--- a/Introduccion a la Ingenieria/Clases/Clase 10 - Herramientas digitales aplicadas a la Ingenieria/Presentacion.pptx
+++ b/Introduccion a la Ingenieria/Clases/Clase 10 - Herramientas digitales aplicadas a la Ingenieria/Presentacion.pptx
@@ -18,6 +18,16 @@
     <p:sldId id="266" r:id="rId17"/>
     <p:sldId id="267" r:id="rId18"/>
     <p:sldId id="268" r:id="rId19"/>
+    <p:sldId id="269" r:id="rId20"/>
+    <p:sldId id="270" r:id="rId21"/>
+    <p:sldId id="271" r:id="rId22"/>
+    <p:sldId id="272" r:id="rId23"/>
+    <p:sldId id="273" r:id="rId24"/>
+    <p:sldId id="274" r:id="rId25"/>
+    <p:sldId id="275" r:id="rId26"/>
+    <p:sldId id="276" r:id="rId27"/>
+    <p:sldId id="277" r:id="rId28"/>
+    <p:sldId id="278" r:id="rId29"/>
   </p:sldIdLst>
   <p:sldSz cx="12191695" cy="6858000" type="screen4x3"/>
   <p:notesSz cx="6858000" cy="9144000"/>
@@ -3512,7 +3522,7 @@
         <p:spPr>
           <a:xfrm>
             <a:off x="0" y="0"/>
-            <a:ext cx="12191695" cy="1170432"/>
+            <a:ext cx="12191695" cy="960120"/>
           </a:xfrm>
           <a:prstGeom prst="rect">
             <a:avLst/>
@@ -3554,7 +3564,7 @@
         </p:nvSpPr>
         <p:spPr>
           <a:xfrm>
-            <a:off x="0" y="1170432"/>
+            <a:off x="0" y="960120"/>
             <a:ext cx="12191695" cy="41148"/>
           </a:xfrm>
           <a:prstGeom prst="rect">
@@ -3598,7 +3608,7 @@
         <p:spPr>
           <a:xfrm>
             <a:off x="457200" y="164592"/>
-            <a:ext cx="11277295" cy="384048"/>
+            <a:ext cx="11277295" cy="502920"/>
           </a:xfrm>
           <a:prstGeom prst="rect">
             <a:avLst/>
@@ -3618,7 +3628,7 @@
                 </a:solidFill>
                 <a:latin typeface="Calibri"/>
               </a:rPr>
-              <a:t>Taller de hoy: Prototipo de baja fidelidad</a:t>
+              <a:t>La pregunta de entrada: la paradoja de la fidelidad (1/2)</a:t>
             </a:r>
           </a:p>
         </p:txBody>
@@ -3631,8 +3641,8 @@
         </p:nvSpPr>
         <p:spPr>
           <a:xfrm>
-            <a:off x="457200" y="566928"/>
-            <a:ext cx="11277295" cy="411480"/>
+            <a:off x="457200" y="1170432"/>
+            <a:ext cx="11277295" cy="5230368"/>
           </a:xfrm>
           <a:prstGeom prst="rect">
             <a:avLst/>
@@ -3645,200 +3655,47 @@
           </a:bodyPr>
           <a:lstStyle/>
           <a:p>
-            <a:r>
-              <a:rPr sz="1400" b="0" i="0">
-                <a:solidFill>
-                  <a:srgbClr val="B8D8EE"/>
-                </a:solidFill>
-                <a:latin typeface="Calibri"/>
-              </a:rPr>
-              <a:t>17 min en equipos · 2 dibujan · 2 escriben textos · 1 escribe el guion de prueba · prototipo de tres pantallas + guion de prueba con tres tareas</a:t>
-            </a:r>
-          </a:p>
-        </p:txBody>
-      </p:sp>
-      <p:sp>
-        <p:nvSpPr>
-          <p:cNvPr id="6" name="Rounded Rectangle 5"/>
-          <p:cNvSpPr/>
-          <p:nvPr/>
-        </p:nvSpPr>
-        <p:spPr>
-          <a:xfrm>
-            <a:off x="457200" y="1472184"/>
-            <a:ext cx="11277295" cy="566928"/>
-          </a:xfrm>
-          <a:prstGeom prst="roundRect">
-            <a:avLst>
-              <a:gd name="adj" fmla="val 12000"/>
-            </a:avLst>
-          </a:prstGeom>
-          <a:solidFill>
-            <a:srgbClr val="F2F2F2"/>
-          </a:solidFill>
-          <a:ln>
-            <a:noFill/>
-          </a:ln>
-        </p:spPr>
-        <p:style>
-          <a:lnRef idx="1">
-            <a:schemeClr val="accent1"/>
-          </a:lnRef>
-          <a:fillRef idx="3">
-            <a:schemeClr val="accent1"/>
-          </a:fillRef>
-          <a:effectRef idx="2">
-            <a:schemeClr val="accent1"/>
-          </a:effectRef>
-          <a:fontRef idx="minor">
-            <a:schemeClr val="lt1"/>
-          </a:fontRef>
-        </p:style>
-        <p:txBody>
-          <a:bodyPr rtlCol="0" anchor="ctr"/>
-          <a:lstStyle/>
-          <a:p>
-            <a:pPr algn="ctr"/>
-          </a:p>
-        </p:txBody>
-      </p:sp>
-      <p:sp>
-        <p:nvSpPr>
-          <p:cNvPr id="7" name="Rectangle 6"/>
-          <p:cNvSpPr/>
-          <p:nvPr/>
-        </p:nvSpPr>
-        <p:spPr>
-          <a:xfrm>
-            <a:off x="640080" y="1618487"/>
-            <a:ext cx="274320" cy="274320"/>
-          </a:xfrm>
-          <a:prstGeom prst="rect">
-            <a:avLst/>
-          </a:prstGeom>
-          <a:solidFill>
-            <a:srgbClr val="FFFFFF"/>
-          </a:solidFill>
-          <a:ln>
-            <a:solidFill>
-              <a:srgbClr val="333333"/>
-            </a:solidFill>
-          </a:ln>
-        </p:spPr>
-        <p:style>
-          <a:lnRef idx="1">
-            <a:schemeClr val="accent1"/>
-          </a:lnRef>
-          <a:fillRef idx="3">
-            <a:schemeClr val="accent1"/>
-          </a:fillRef>
-          <a:effectRef idx="2">
-            <a:schemeClr val="accent1"/>
-          </a:effectRef>
-          <a:fontRef idx="minor">
-            <a:schemeClr val="lt1"/>
-          </a:fontRef>
-        </p:style>
-        <p:txBody>
-          <a:bodyPr rtlCol="0" anchor="ctr"/>
-          <a:lstStyle/>
-          <a:p>
-            <a:pPr algn="ctr"/>
-          </a:p>
-        </p:txBody>
-      </p:sp>
-      <p:sp>
-        <p:nvSpPr>
-          <p:cNvPr id="8" name="Rectangle 7"/>
-          <p:cNvSpPr/>
-          <p:nvPr/>
-        </p:nvSpPr>
-        <p:spPr>
-          <a:xfrm>
-            <a:off x="640080" y="1618487"/>
-            <a:ext cx="73152" cy="274320"/>
-          </a:xfrm>
-          <a:prstGeom prst="rect">
-            <a:avLst/>
-          </a:prstGeom>
-          <a:solidFill>
-            <a:srgbClr val="269CCB"/>
-          </a:solidFill>
-          <a:ln>
-            <a:noFill/>
-          </a:ln>
-        </p:spPr>
-        <p:style>
-          <a:lnRef idx="1">
-            <a:schemeClr val="accent1"/>
-          </a:lnRef>
-          <a:fillRef idx="3">
-            <a:schemeClr val="accent1"/>
-          </a:fillRef>
-          <a:effectRef idx="2">
-            <a:schemeClr val="accent1"/>
-          </a:effectRef>
-          <a:fontRef idx="minor">
-            <a:schemeClr val="lt1"/>
-          </a:fontRef>
-        </p:style>
-        <p:txBody>
-          <a:bodyPr rtlCol="0" anchor="ctr"/>
-          <a:lstStyle/>
-          <a:p>
-            <a:pPr algn="ctr"/>
-          </a:p>
-        </p:txBody>
-      </p:sp>
-      <p:sp>
-        <p:nvSpPr>
-          <p:cNvPr id="9" name="TextBox 8"/>
-          <p:cNvSpPr txBox="1"/>
-          <p:nvPr/>
-        </p:nvSpPr>
-        <p:spPr>
-          <a:xfrm>
-            <a:off x="1097280" y="1563624"/>
-            <a:ext cx="10362895" cy="402336"/>
-          </a:xfrm>
-          <a:prstGeom prst="rect">
-            <a:avLst/>
-          </a:prstGeom>
-          <a:noFill/>
-        </p:spPr>
-        <p:txBody>
-          <a:bodyPr wrap="square" anchor="ctr"/>
-          <a:lstStyle/>
-          <a:p>
-            <a:r>
-              <a:rPr sz="1500" b="1" i="0">
-                <a:solidFill>
-                  <a:srgbClr val="333333"/>
-                </a:solidFill>
-                <a:latin typeface="Calibri"/>
-              </a:rPr>
-              <a:t>EL FLUJO EN TRES PASOS</a:t>
-            </a:r>
-            <a:r>
-              <a:rPr sz="1500" b="0" i="0">
-                <a:solidFill>
-                  <a:srgbClr val="333333"/>
-                </a:solidFill>
-                <a:latin typeface="Calibri"/>
-              </a:rPr>
-              <a:t> — El camino principal del alcance mínimo, en tres pantallas o tres pasos, y </a:t>
-            </a:r>
-            <a:r>
-              <a:rPr sz="1500" b="1" i="0">
-                <a:solidFill>
-                  <a:srgbClr val="333333"/>
-                </a:solidFill>
-                <a:latin typeface="Calibri"/>
-              </a:rPr>
-              <a:t>una frase de propósito por cada uno</a:t>
-            </a:r>
-            <a:r>
-              <a:rPr sz="1500" b="0" i="0">
+            <a:pPr>
+              <a:spcAft>
+                <a:spcPts val="800"/>
+              </a:spcAft>
+            </a:pPr>
+            <a:r>
+              <a:rPr sz="2000" b="0" i="0">
+                <a:solidFill>
+                  <a:srgbClr val="333333"/>
+                </a:solidFill>
+                <a:latin typeface="Calibri"/>
+              </a:rPr>
+              <a:t>–   Este es uno de los hallazgos más útiles y menos intuitivos del diseño, y funciona perfectamente como gancho porque todos lo han vivido del otro lado: cuando a uno le muestran algo que parece terminado, le da pena criticarlo.</a:t>
+            </a:r>
+          </a:p>
+          <a:p>
+            <a:pPr>
+              <a:spcAft>
+                <a:spcPts val="800"/>
+              </a:spcAft>
+            </a:pPr>
+            <a:r>
+              <a:rPr sz="2000" b="0" i="0">
+                <a:solidFill>
+                  <a:srgbClr val="333333"/>
+                </a:solidFill>
+                <a:latin typeface="Calibri"/>
+              </a:rPr>
+              <a:t>–   El fenómeno es consistente: </a:t>
+            </a:r>
+            <a:r>
+              <a:rPr sz="2000" b="1" i="0">
+                <a:solidFill>
+                  <a:srgbClr val="333333"/>
+                </a:solidFill>
+                <a:latin typeface="Calibri"/>
+              </a:rPr>
+              <a:t>delante de un dibujo a lápiz la gente dice «esto no se entiende, ¿dónde busco?»; delante de una pantalla con colores y tipografía dice «está muy bonita»</a:t>
+            </a:r>
+            <a:r>
+              <a:rPr sz="2000" b="0" i="0">
                 <a:solidFill>
                   <a:srgbClr val="333333"/>
                 </a:solidFill>
@@ -3847,788 +3704,59 @@
               <a:t>.</a:t>
             </a:r>
           </a:p>
-        </p:txBody>
-      </p:sp>
-      <p:sp>
-        <p:nvSpPr>
-          <p:cNvPr id="10" name="Rounded Rectangle 9"/>
-          <p:cNvSpPr/>
-          <p:nvPr/>
-        </p:nvSpPr>
-        <p:spPr>
-          <a:xfrm>
-            <a:off x="457200" y="2148839"/>
-            <a:ext cx="11277295" cy="566928"/>
-          </a:xfrm>
-          <a:prstGeom prst="roundRect">
-            <a:avLst>
-              <a:gd name="adj" fmla="val 12000"/>
-            </a:avLst>
-          </a:prstGeom>
-          <a:solidFill>
-            <a:srgbClr val="F2F2F2"/>
-          </a:solidFill>
-          <a:ln>
-            <a:noFill/>
-          </a:ln>
-        </p:spPr>
-        <p:style>
-          <a:lnRef idx="1">
-            <a:schemeClr val="accent1"/>
-          </a:lnRef>
-          <a:fillRef idx="3">
-            <a:schemeClr val="accent1"/>
-          </a:fillRef>
-          <a:effectRef idx="2">
-            <a:schemeClr val="accent1"/>
-          </a:effectRef>
-          <a:fontRef idx="minor">
-            <a:schemeClr val="lt1"/>
-          </a:fontRef>
-        </p:style>
-        <p:txBody>
-          <a:bodyPr rtlCol="0" anchor="ctr"/>
-          <a:lstStyle/>
-          <a:p>
-            <a:pPr algn="ctr"/>
-          </a:p>
-        </p:txBody>
-      </p:sp>
-      <p:sp>
-        <p:nvSpPr>
-          <p:cNvPr id="11" name="Rectangle 10"/>
-          <p:cNvSpPr/>
-          <p:nvPr/>
-        </p:nvSpPr>
-        <p:spPr>
-          <a:xfrm>
-            <a:off x="640080" y="2295144"/>
-            <a:ext cx="274320" cy="274320"/>
-          </a:xfrm>
-          <a:prstGeom prst="rect">
-            <a:avLst/>
-          </a:prstGeom>
-          <a:solidFill>
-            <a:srgbClr val="FFFFFF"/>
-          </a:solidFill>
-          <a:ln>
-            <a:solidFill>
-              <a:srgbClr val="333333"/>
-            </a:solidFill>
-          </a:ln>
-        </p:spPr>
-        <p:style>
-          <a:lnRef idx="1">
-            <a:schemeClr val="accent1"/>
-          </a:lnRef>
-          <a:fillRef idx="3">
-            <a:schemeClr val="accent1"/>
-          </a:fillRef>
-          <a:effectRef idx="2">
-            <a:schemeClr val="accent1"/>
-          </a:effectRef>
-          <a:fontRef idx="minor">
-            <a:schemeClr val="lt1"/>
-          </a:fontRef>
-        </p:style>
-        <p:txBody>
-          <a:bodyPr rtlCol="0" anchor="ctr"/>
-          <a:lstStyle/>
-          <a:p>
-            <a:pPr algn="ctr"/>
-          </a:p>
-        </p:txBody>
-      </p:sp>
-      <p:sp>
-        <p:nvSpPr>
-          <p:cNvPr id="12" name="Rectangle 11"/>
-          <p:cNvSpPr/>
-          <p:nvPr/>
-        </p:nvSpPr>
-        <p:spPr>
-          <a:xfrm>
-            <a:off x="640080" y="2295144"/>
-            <a:ext cx="73152" cy="274320"/>
-          </a:xfrm>
-          <a:prstGeom prst="rect">
-            <a:avLst/>
-          </a:prstGeom>
-          <a:solidFill>
-            <a:srgbClr val="269CCB"/>
-          </a:solidFill>
-          <a:ln>
-            <a:noFill/>
-          </a:ln>
-        </p:spPr>
-        <p:style>
-          <a:lnRef idx="1">
-            <a:schemeClr val="accent1"/>
-          </a:lnRef>
-          <a:fillRef idx="3">
-            <a:schemeClr val="accent1"/>
-          </a:fillRef>
-          <a:effectRef idx="2">
-            <a:schemeClr val="accent1"/>
-          </a:effectRef>
-          <a:fontRef idx="minor">
-            <a:schemeClr val="lt1"/>
-          </a:fontRef>
-        </p:style>
-        <p:txBody>
-          <a:bodyPr rtlCol="0" anchor="ctr"/>
-          <a:lstStyle/>
-          <a:p>
-            <a:pPr algn="ctr"/>
-          </a:p>
-        </p:txBody>
-      </p:sp>
-      <p:sp>
-        <p:nvSpPr>
-          <p:cNvPr id="13" name="TextBox 12"/>
-          <p:cNvSpPr txBox="1"/>
-          <p:nvPr/>
-        </p:nvSpPr>
-        <p:spPr>
-          <a:xfrm>
-            <a:off x="1097280" y="2240279"/>
-            <a:ext cx="10362895" cy="402336"/>
-          </a:xfrm>
-          <a:prstGeom prst="rect">
-            <a:avLst/>
-          </a:prstGeom>
-          <a:noFill/>
-        </p:spPr>
-        <p:txBody>
-          <a:bodyPr wrap="square" anchor="ctr"/>
-          <a:lstStyle/>
-          <a:p>
-            <a:r>
-              <a:rPr sz="1500" b="1" i="0">
-                <a:solidFill>
-                  <a:srgbClr val="333333"/>
-                </a:solidFill>
-                <a:latin typeface="Calibri"/>
-              </a:rPr>
-              <a:t>LAS TRES PANTALLAS DIBUJADAS</a:t>
-            </a:r>
-            <a:r>
-              <a:rPr sz="1500" b="0" i="0">
-                <a:solidFill>
-                  <a:srgbClr val="333333"/>
-                </a:solidFill>
-                <a:latin typeface="Calibri"/>
-              </a:rPr>
-              <a:t> — Las tres dibujadas de verdad, con el camino principal grande y primero, y una </a:t>
-            </a:r>
-            <a:r>
-              <a:rPr sz="1500" b="1" i="0">
-                <a:solidFill>
-                  <a:srgbClr val="333333"/>
-                </a:solidFill>
-                <a:latin typeface="Calibri"/>
-              </a:rPr>
-              <a:t>flecha con destino</a:t>
-            </a:r>
-            <a:r>
-              <a:rPr sz="1500" b="0" i="0">
-                <a:solidFill>
-                  <a:srgbClr val="333333"/>
-                </a:solidFill>
-                <a:latin typeface="Calibri"/>
-              </a:rPr>
-              <a:t> por cada botón.</a:t>
-            </a:r>
-          </a:p>
-        </p:txBody>
-      </p:sp>
-      <p:sp>
-        <p:nvSpPr>
-          <p:cNvPr id="14" name="Rounded Rectangle 13"/>
-          <p:cNvSpPr/>
-          <p:nvPr/>
-        </p:nvSpPr>
-        <p:spPr>
-          <a:xfrm>
-            <a:off x="457200" y="2825496"/>
-            <a:ext cx="11277295" cy="566928"/>
-          </a:xfrm>
-          <a:prstGeom prst="roundRect">
-            <a:avLst>
-              <a:gd name="adj" fmla="val 12000"/>
-            </a:avLst>
-          </a:prstGeom>
-          <a:solidFill>
-            <a:srgbClr val="F2F2F2"/>
-          </a:solidFill>
-          <a:ln>
-            <a:noFill/>
-          </a:ln>
-        </p:spPr>
-        <p:style>
-          <a:lnRef idx="1">
-            <a:schemeClr val="accent1"/>
-          </a:lnRef>
-          <a:fillRef idx="3">
-            <a:schemeClr val="accent1"/>
-          </a:fillRef>
-          <a:effectRef idx="2">
-            <a:schemeClr val="accent1"/>
-          </a:effectRef>
-          <a:fontRef idx="minor">
-            <a:schemeClr val="lt1"/>
-          </a:fontRef>
-        </p:style>
-        <p:txBody>
-          <a:bodyPr rtlCol="0" anchor="ctr"/>
-          <a:lstStyle/>
-          <a:p>
-            <a:pPr algn="ctr"/>
-          </a:p>
-        </p:txBody>
-      </p:sp>
-      <p:sp>
-        <p:nvSpPr>
-          <p:cNvPr id="15" name="Rectangle 14"/>
-          <p:cNvSpPr/>
-          <p:nvPr/>
-        </p:nvSpPr>
-        <p:spPr>
-          <a:xfrm>
-            <a:off x="640080" y="2971800"/>
-            <a:ext cx="274320" cy="274320"/>
-          </a:xfrm>
-          <a:prstGeom prst="rect">
-            <a:avLst/>
-          </a:prstGeom>
-          <a:solidFill>
-            <a:srgbClr val="FFFFFF"/>
-          </a:solidFill>
-          <a:ln>
-            <a:solidFill>
-              <a:srgbClr val="333333"/>
-            </a:solidFill>
-          </a:ln>
-        </p:spPr>
-        <p:style>
-          <a:lnRef idx="1">
-            <a:schemeClr val="accent1"/>
-          </a:lnRef>
-          <a:fillRef idx="3">
-            <a:schemeClr val="accent1"/>
-          </a:fillRef>
-          <a:effectRef idx="2">
-            <a:schemeClr val="accent1"/>
-          </a:effectRef>
-          <a:fontRef idx="minor">
-            <a:schemeClr val="lt1"/>
-          </a:fontRef>
-        </p:style>
-        <p:txBody>
-          <a:bodyPr rtlCol="0" anchor="ctr"/>
-          <a:lstStyle/>
-          <a:p>
-            <a:pPr algn="ctr"/>
-          </a:p>
-        </p:txBody>
-      </p:sp>
-      <p:sp>
-        <p:nvSpPr>
-          <p:cNvPr id="16" name="Rectangle 15"/>
-          <p:cNvSpPr/>
-          <p:nvPr/>
-        </p:nvSpPr>
-        <p:spPr>
-          <a:xfrm>
-            <a:off x="640080" y="2971800"/>
-            <a:ext cx="73152" cy="274320"/>
-          </a:xfrm>
-          <a:prstGeom prst="rect">
-            <a:avLst/>
-          </a:prstGeom>
-          <a:solidFill>
-            <a:srgbClr val="269CCB"/>
-          </a:solidFill>
-          <a:ln>
-            <a:noFill/>
-          </a:ln>
-        </p:spPr>
-        <p:style>
-          <a:lnRef idx="1">
-            <a:schemeClr val="accent1"/>
-          </a:lnRef>
-          <a:fillRef idx="3">
-            <a:schemeClr val="accent1"/>
-          </a:fillRef>
-          <a:effectRef idx="2">
-            <a:schemeClr val="accent1"/>
-          </a:effectRef>
-          <a:fontRef idx="minor">
-            <a:schemeClr val="lt1"/>
-          </a:fontRef>
-        </p:style>
-        <p:txBody>
-          <a:bodyPr rtlCol="0" anchor="ctr"/>
-          <a:lstStyle/>
-          <a:p>
-            <a:pPr algn="ctr"/>
-          </a:p>
-        </p:txBody>
-      </p:sp>
-      <p:sp>
-        <p:nvSpPr>
-          <p:cNvPr id="17" name="TextBox 16"/>
-          <p:cNvSpPr txBox="1"/>
-          <p:nvPr/>
-        </p:nvSpPr>
-        <p:spPr>
-          <a:xfrm>
-            <a:off x="1097280" y="2916936"/>
-            <a:ext cx="10362895" cy="402336"/>
-          </a:xfrm>
-          <a:prstGeom prst="rect">
-            <a:avLst/>
-          </a:prstGeom>
-          <a:noFill/>
-        </p:spPr>
-        <p:txBody>
-          <a:bodyPr wrap="square" anchor="ctr"/>
-          <a:lstStyle/>
-          <a:p>
-            <a:r>
-              <a:rPr sz="1500" b="1" i="0">
-                <a:solidFill>
-                  <a:srgbClr val="333333"/>
-                </a:solidFill>
-                <a:latin typeface="Calibri"/>
-              </a:rPr>
-              <a:t>EL ESTADO VACÍO Y EL DE ERROR</a:t>
-            </a:r>
-            <a:r>
-              <a:rPr sz="1500" b="0" i="0">
-                <a:solidFill>
-                  <a:srgbClr val="333333"/>
-                </a:solidFill>
-                <a:latin typeface="Calibri"/>
-              </a:rPr>
-              <a:t> — Qué se ve la primera vez sin datos, qué se ve cuando la búsqueda no encuentra nada, y qué se ve cuando algo falla. </a:t>
-            </a:r>
-            <a:r>
-              <a:rPr sz="1500" b="1" i="0">
-                <a:solidFill>
-                  <a:srgbClr val="333333"/>
-                </a:solidFill>
-                <a:latin typeface="Calibri"/>
-              </a:rPr>
-              <a:t>Con el texto exacto del mensaje.</a:t>
-            </a:r>
-          </a:p>
-        </p:txBody>
-      </p:sp>
-      <p:sp>
-        <p:nvSpPr>
-          <p:cNvPr id="18" name="Rounded Rectangle 17"/>
-          <p:cNvSpPr/>
-          <p:nvPr/>
-        </p:nvSpPr>
-        <p:spPr>
-          <a:xfrm>
-            <a:off x="457200" y="3502152"/>
-            <a:ext cx="11277295" cy="566928"/>
-          </a:xfrm>
-          <a:prstGeom prst="roundRect">
-            <a:avLst>
-              <a:gd name="adj" fmla="val 12000"/>
-            </a:avLst>
-          </a:prstGeom>
-          <a:solidFill>
-            <a:srgbClr val="F2F2F2"/>
-          </a:solidFill>
-          <a:ln>
-            <a:noFill/>
-          </a:ln>
-        </p:spPr>
-        <p:style>
-          <a:lnRef idx="1">
-            <a:schemeClr val="accent1"/>
-          </a:lnRef>
-          <a:fillRef idx="3">
-            <a:schemeClr val="accent1"/>
-          </a:fillRef>
-          <a:effectRef idx="2">
-            <a:schemeClr val="accent1"/>
-          </a:effectRef>
-          <a:fontRef idx="minor">
-            <a:schemeClr val="lt1"/>
-          </a:fontRef>
-        </p:style>
-        <p:txBody>
-          <a:bodyPr rtlCol="0" anchor="ctr"/>
-          <a:lstStyle/>
-          <a:p>
-            <a:pPr algn="ctr"/>
-          </a:p>
-        </p:txBody>
-      </p:sp>
-      <p:sp>
-        <p:nvSpPr>
-          <p:cNvPr id="19" name="Rectangle 18"/>
-          <p:cNvSpPr/>
-          <p:nvPr/>
-        </p:nvSpPr>
-        <p:spPr>
-          <a:xfrm>
-            <a:off x="640080" y="3648456"/>
-            <a:ext cx="274320" cy="274320"/>
-          </a:xfrm>
-          <a:prstGeom prst="rect">
-            <a:avLst/>
-          </a:prstGeom>
-          <a:solidFill>
-            <a:srgbClr val="FFFFFF"/>
-          </a:solidFill>
-          <a:ln>
-            <a:solidFill>
-              <a:srgbClr val="333333"/>
-            </a:solidFill>
-          </a:ln>
-        </p:spPr>
-        <p:style>
-          <a:lnRef idx="1">
-            <a:schemeClr val="accent1"/>
-          </a:lnRef>
-          <a:fillRef idx="3">
-            <a:schemeClr val="accent1"/>
-          </a:fillRef>
-          <a:effectRef idx="2">
-            <a:schemeClr val="accent1"/>
-          </a:effectRef>
-          <a:fontRef idx="minor">
-            <a:schemeClr val="lt1"/>
-          </a:fontRef>
-        </p:style>
-        <p:txBody>
-          <a:bodyPr rtlCol="0" anchor="ctr"/>
-          <a:lstStyle/>
-          <a:p>
-            <a:pPr algn="ctr"/>
-          </a:p>
-        </p:txBody>
-      </p:sp>
-      <p:sp>
-        <p:nvSpPr>
-          <p:cNvPr id="20" name="Rectangle 19"/>
-          <p:cNvSpPr/>
-          <p:nvPr/>
-        </p:nvSpPr>
-        <p:spPr>
-          <a:xfrm>
-            <a:off x="640080" y="3648456"/>
-            <a:ext cx="73152" cy="274320"/>
-          </a:xfrm>
-          <a:prstGeom prst="rect">
-            <a:avLst/>
-          </a:prstGeom>
-          <a:solidFill>
-            <a:srgbClr val="269CCB"/>
-          </a:solidFill>
-          <a:ln>
-            <a:noFill/>
-          </a:ln>
-        </p:spPr>
-        <p:style>
-          <a:lnRef idx="1">
-            <a:schemeClr val="accent1"/>
-          </a:lnRef>
-          <a:fillRef idx="3">
-            <a:schemeClr val="accent1"/>
-          </a:fillRef>
-          <a:effectRef idx="2">
-            <a:schemeClr val="accent1"/>
-          </a:effectRef>
-          <a:fontRef idx="minor">
-            <a:schemeClr val="lt1"/>
-          </a:fontRef>
-        </p:style>
-        <p:txBody>
-          <a:bodyPr rtlCol="0" anchor="ctr"/>
-          <a:lstStyle/>
-          <a:p>
-            <a:pPr algn="ctr"/>
-          </a:p>
-        </p:txBody>
-      </p:sp>
-      <p:sp>
-        <p:nvSpPr>
-          <p:cNvPr id="21" name="TextBox 20"/>
-          <p:cNvSpPr txBox="1"/>
-          <p:nvPr/>
-        </p:nvSpPr>
-        <p:spPr>
-          <a:xfrm>
-            <a:off x="1097280" y="3593592"/>
-            <a:ext cx="10362895" cy="402336"/>
-          </a:xfrm>
-          <a:prstGeom prst="rect">
-            <a:avLst/>
-          </a:prstGeom>
-          <a:noFill/>
-        </p:spPr>
-        <p:txBody>
-          <a:bodyPr wrap="square" anchor="ctr"/>
-          <a:lstStyle/>
-          <a:p>
-            <a:r>
-              <a:rPr sz="1500" b="1" i="0">
-                <a:solidFill>
-                  <a:srgbClr val="333333"/>
-                </a:solidFill>
-                <a:latin typeface="Calibri"/>
-              </a:rPr>
-              <a:t>LOS TEXTOS REALES</a:t>
-            </a:r>
-            <a:r>
-              <a:rPr sz="1500" b="0" i="0">
-                <a:solidFill>
-                  <a:srgbClr val="333333"/>
-                </a:solidFill>
-                <a:latin typeface="Calibri"/>
-              </a:rPr>
-              <a:t> — Todos los rótulos y mensajes escritos como van a quedar. </a:t>
-            </a:r>
-            <a:r>
-              <a:rPr sz="1500" b="1" i="0">
-                <a:solidFill>
-                  <a:srgbClr val="333333"/>
-                </a:solidFill>
-                <a:latin typeface="Calibri"/>
-              </a:rPr>
-              <a:t>Cero relleno</a:t>
-            </a:r>
-            <a:r>
-              <a:rPr sz="1500" b="0" i="0">
-                <a:solidFill>
-                  <a:srgbClr val="333333"/>
-                </a:solidFill>
-                <a:latin typeface="Calibri"/>
-              </a:rPr>
-              <a:t>, cero «texto aquí», cero «lorem ipsum».</a:t>
-            </a:r>
-          </a:p>
-        </p:txBody>
-      </p:sp>
-      <p:sp>
-        <p:nvSpPr>
-          <p:cNvPr id="22" name="Rounded Rectangle 21"/>
-          <p:cNvSpPr/>
-          <p:nvPr/>
-        </p:nvSpPr>
-        <p:spPr>
-          <a:xfrm>
-            <a:off x="457200" y="4178808"/>
-            <a:ext cx="11277295" cy="566928"/>
-          </a:xfrm>
-          <a:prstGeom prst="roundRect">
-            <a:avLst>
-              <a:gd name="adj" fmla="val 12000"/>
-            </a:avLst>
-          </a:prstGeom>
-          <a:solidFill>
-            <a:srgbClr val="F2F2F2"/>
-          </a:solidFill>
-          <a:ln>
-            <a:noFill/>
-          </a:ln>
-        </p:spPr>
-        <p:style>
-          <a:lnRef idx="1">
-            <a:schemeClr val="accent1"/>
-          </a:lnRef>
-          <a:fillRef idx="3">
-            <a:schemeClr val="accent1"/>
-          </a:fillRef>
-          <a:effectRef idx="2">
-            <a:schemeClr val="accent1"/>
-          </a:effectRef>
-          <a:fontRef idx="minor">
-            <a:schemeClr val="lt1"/>
-          </a:fontRef>
-        </p:style>
-        <p:txBody>
-          <a:bodyPr rtlCol="0" anchor="ctr"/>
-          <a:lstStyle/>
-          <a:p>
-            <a:pPr algn="ctr"/>
-          </a:p>
-        </p:txBody>
-      </p:sp>
-      <p:sp>
-        <p:nvSpPr>
-          <p:cNvPr id="23" name="Rectangle 22"/>
-          <p:cNvSpPr/>
-          <p:nvPr/>
-        </p:nvSpPr>
-        <p:spPr>
-          <a:xfrm>
-            <a:off x="640080" y="4325112"/>
-            <a:ext cx="274320" cy="274320"/>
-          </a:xfrm>
-          <a:prstGeom prst="rect">
-            <a:avLst/>
-          </a:prstGeom>
-          <a:solidFill>
-            <a:srgbClr val="FFFFFF"/>
-          </a:solidFill>
-          <a:ln>
-            <a:solidFill>
-              <a:srgbClr val="333333"/>
-            </a:solidFill>
-          </a:ln>
-        </p:spPr>
-        <p:style>
-          <a:lnRef idx="1">
-            <a:schemeClr val="accent1"/>
-          </a:lnRef>
-          <a:fillRef idx="3">
-            <a:schemeClr val="accent1"/>
-          </a:fillRef>
-          <a:effectRef idx="2">
-            <a:schemeClr val="accent1"/>
-          </a:effectRef>
-          <a:fontRef idx="minor">
-            <a:schemeClr val="lt1"/>
-          </a:fontRef>
-        </p:style>
-        <p:txBody>
-          <a:bodyPr rtlCol="0" anchor="ctr"/>
-          <a:lstStyle/>
-          <a:p>
-            <a:pPr algn="ctr"/>
-          </a:p>
-        </p:txBody>
-      </p:sp>
-      <p:sp>
-        <p:nvSpPr>
-          <p:cNvPr id="24" name="Rectangle 23"/>
-          <p:cNvSpPr/>
-          <p:nvPr/>
-        </p:nvSpPr>
-        <p:spPr>
-          <a:xfrm>
-            <a:off x="640080" y="4325112"/>
-            <a:ext cx="73152" cy="274320"/>
-          </a:xfrm>
-          <a:prstGeom prst="rect">
-            <a:avLst/>
-          </a:prstGeom>
-          <a:solidFill>
-            <a:srgbClr val="269CCB"/>
-          </a:solidFill>
-          <a:ln>
-            <a:noFill/>
-          </a:ln>
-        </p:spPr>
-        <p:style>
-          <a:lnRef idx="1">
-            <a:schemeClr val="accent1"/>
-          </a:lnRef>
-          <a:fillRef idx="3">
-            <a:schemeClr val="accent1"/>
-          </a:fillRef>
-          <a:effectRef idx="2">
-            <a:schemeClr val="accent1"/>
-          </a:effectRef>
-          <a:fontRef idx="minor">
-            <a:schemeClr val="lt1"/>
-          </a:fontRef>
-        </p:style>
-        <p:txBody>
-          <a:bodyPr rtlCol="0" anchor="ctr"/>
-          <a:lstStyle/>
-          <a:p>
-            <a:pPr algn="ctr"/>
-          </a:p>
-        </p:txBody>
-      </p:sp>
-      <p:sp>
-        <p:nvSpPr>
-          <p:cNvPr id="25" name="TextBox 24"/>
-          <p:cNvSpPr txBox="1"/>
-          <p:nvPr/>
-        </p:nvSpPr>
-        <p:spPr>
-          <a:xfrm>
-            <a:off x="1097280" y="4270248"/>
-            <a:ext cx="10362895" cy="402336"/>
-          </a:xfrm>
-          <a:prstGeom prst="rect">
-            <a:avLst/>
-          </a:prstGeom>
-          <a:noFill/>
-        </p:spPr>
-        <p:txBody>
-          <a:bodyPr wrap="square" anchor="ctr"/>
-          <a:lstStyle/>
-          <a:p>
-            <a:r>
-              <a:rPr sz="1500" b="1" i="0">
-                <a:solidFill>
-                  <a:srgbClr val="333333"/>
-                </a:solidFill>
-                <a:latin typeface="Calibri"/>
-              </a:rPr>
-              <a:t>EL GUION DE PRUEBA</a:t>
-            </a:r>
-            <a:r>
-              <a:rPr sz="1500" b="0" i="0">
-                <a:solidFill>
-                  <a:srgbClr val="333333"/>
-                </a:solidFill>
-                <a:latin typeface="Calibri"/>
-              </a:rPr>
-              <a:t> — Tres tareas para pedirle a una persona ajena, salidas de los </a:t>
-            </a:r>
-            <a:r>
-              <a:rPr sz="1500" b="1" i="0">
-                <a:solidFill>
-                  <a:srgbClr val="333333"/>
-                </a:solidFill>
-                <a:latin typeface="Calibri"/>
-              </a:rPr>
-              <a:t>criterios de aceptación de la sesión 7</a:t>
-            </a:r>
-            <a:r>
-              <a:rPr sz="1500" b="0" i="0">
-                <a:solidFill>
-                  <a:srgbClr val="333333"/>
-                </a:solidFill>
-                <a:latin typeface="Calibri"/>
-              </a:rPr>
-              <a:t>, y una de ellas sobre el caso en que el sistema </a:t>
-            </a:r>
-            <a:r>
-              <a:rPr sz="1500" b="1" i="0">
-                <a:solidFill>
-                  <a:srgbClr val="333333"/>
-                </a:solidFill>
-                <a:latin typeface="Calibri"/>
-              </a:rPr>
-              <a:t>no</a:t>
-            </a:r>
-            <a:r>
-              <a:rPr sz="1500" b="0" i="0">
-                <a:solidFill>
-                  <a:srgbClr val="333333"/>
-                </a:solidFill>
-                <a:latin typeface="Calibri"/>
-              </a:rPr>
-              <a:t> tiene la respuesta.</a:t>
-            </a:r>
-          </a:p>
-        </p:txBody>
-      </p:sp>
-      <p:sp>
-        <p:nvSpPr>
-          <p:cNvPr id="26" name="TextBox 25"/>
+          <a:p>
+            <a:pPr>
+              <a:spcAft>
+                <a:spcPts val="800"/>
+              </a:spcAft>
+            </a:pPr>
+            <a:r>
+              <a:rPr sz="2000" b="0" i="0">
+                <a:solidFill>
+                  <a:srgbClr val="333333"/>
+                </a:solidFill>
+                <a:latin typeface="Calibri"/>
+              </a:rPr>
+              <a:t>–   La explicación es social, no técnica.</a:t>
+            </a:r>
+          </a:p>
+          <a:p>
+            <a:pPr>
+              <a:spcAft>
+                <a:spcPts val="800"/>
+              </a:spcAft>
+            </a:pPr>
+            <a:r>
+              <a:rPr sz="2000" b="0" i="0">
+                <a:solidFill>
+                  <a:srgbClr val="333333"/>
+                </a:solidFill>
+                <a:latin typeface="Calibri"/>
+              </a:rPr>
+              <a:t>–   Un dibujo comunica «esto es un borrador, opine»; una pantalla pulida comunica «esto costó trabajo, no lo destruya».</a:t>
+            </a:r>
+          </a:p>
+          <a:p>
+            <a:pPr>
+              <a:spcAft>
+                <a:spcPts val="800"/>
+              </a:spcAft>
+            </a:pPr>
+            <a:r>
+              <a:rPr sz="2000" b="0" i="0">
+                <a:solidFill>
+                  <a:srgbClr val="333333"/>
+                </a:solidFill>
+                <a:latin typeface="Calibri"/>
+              </a:rPr>
+              <a:t>–   Y hay un segundo efecto, sobre el propio equipo: cuanto más trabajo hay invertido en algo, más cuesta cambiarlo — eso ya lo vieron como curva del costo en la sesión 7, y aquí aparece en versión psicológica.</a:t>
+            </a:r>
+          </a:p>
+        </p:txBody>
+      </p:sp>
+      <p:sp>
+        <p:nvSpPr>
+          <p:cNvPr id="6" name="TextBox 5"/>
           <p:cNvSpPr txBox="1"/>
           <p:nvPr/>
         </p:nvSpPr>
@@ -4696,7 +3824,7 @@
         <p:spPr>
           <a:xfrm>
             <a:off x="0" y="0"/>
-            <a:ext cx="12191695" cy="1170432"/>
+            <a:ext cx="12191695" cy="960120"/>
           </a:xfrm>
           <a:prstGeom prst="rect">
             <a:avLst/>
@@ -4738,7 +3866,7 @@
         </p:nvSpPr>
         <p:spPr>
           <a:xfrm>
-            <a:off x="0" y="1170432"/>
+            <a:off x="0" y="960120"/>
             <a:ext cx="12191695" cy="41148"/>
           </a:xfrm>
           <a:prstGeom prst="rect">
@@ -4782,7 +3910,7 @@
         <p:spPr>
           <a:xfrm>
             <a:off x="457200" y="164592"/>
-            <a:ext cx="11277295" cy="384048"/>
+            <a:ext cx="11277295" cy="502920"/>
           </a:xfrm>
           <a:prstGeom prst="rect">
             <a:avLst/>
@@ -4802,7 +3930,7 @@
                 </a:solidFill>
                 <a:latin typeface="Calibri"/>
               </a:rPr>
-              <a:t>Cómo se expone en 3 minutos</a:t>
+              <a:t>La pregunta de entrada: la paradoja de la fidelidad (2/2)</a:t>
             </a:r>
           </a:p>
         </p:txBody>
@@ -4815,8 +3943,8 @@
         </p:nvSpPr>
         <p:spPr>
           <a:xfrm>
-            <a:off x="457200" y="566928"/>
-            <a:ext cx="11277295" cy="411480"/>
+            <a:off x="457200" y="1170432"/>
+            <a:ext cx="11277295" cy="5230368"/>
           </a:xfrm>
           <a:prstGeom prst="rect">
             <a:avLst/>
@@ -4829,876 +3957,92 @@
           </a:bodyPr>
           <a:lstStyle/>
           <a:p>
-            <a:r>
-              <a:rPr sz="1400" b="0" i="0">
-                <a:solidFill>
-                  <a:srgbClr val="B8D8EE"/>
-                </a:solidFill>
-                <a:latin typeface="Calibri"/>
-              </a:rPr>
-              <a:t>Habla el vocero con la pantalla ya compartida · cronómetro en pantalla · se corta al llegar a cero</a:t>
-            </a:r>
-          </a:p>
-        </p:txBody>
-      </p:sp>
-      <p:sp>
-        <p:nvSpPr>
-          <p:cNvPr id="6" name="Rounded Rectangle 5"/>
-          <p:cNvSpPr/>
-          <p:nvPr/>
-        </p:nvSpPr>
-        <p:spPr>
-          <a:xfrm>
-            <a:off x="457200" y="1444752"/>
-            <a:ext cx="11277295" cy="908913"/>
-          </a:xfrm>
-          <a:prstGeom prst="roundRect">
-            <a:avLst>
-              <a:gd name="adj" fmla="val 12000"/>
-            </a:avLst>
-          </a:prstGeom>
-          <a:solidFill>
-            <a:srgbClr val="F2F2F2"/>
-          </a:solidFill>
-          <a:ln>
-            <a:noFill/>
-          </a:ln>
-        </p:spPr>
-        <p:style>
-          <a:lnRef idx="1">
-            <a:schemeClr val="accent1"/>
-          </a:lnRef>
-          <a:fillRef idx="3">
-            <a:schemeClr val="accent1"/>
-          </a:fillRef>
-          <a:effectRef idx="2">
-            <a:schemeClr val="accent1"/>
-          </a:effectRef>
-          <a:fontRef idx="minor">
-            <a:schemeClr val="lt1"/>
-          </a:fontRef>
-        </p:style>
-        <p:txBody>
-          <a:bodyPr rtlCol="0" anchor="ctr"/>
-          <a:lstStyle/>
-          <a:p>
-            <a:pPr algn="ctr"/>
-          </a:p>
-        </p:txBody>
-      </p:sp>
-      <p:sp>
-        <p:nvSpPr>
-          <p:cNvPr id="7" name="Rounded Rectangle 6"/>
-          <p:cNvSpPr/>
-          <p:nvPr/>
-        </p:nvSpPr>
-        <p:spPr>
-          <a:xfrm>
-            <a:off x="594360" y="1679752"/>
-            <a:ext cx="438912" cy="438912"/>
-          </a:xfrm>
-          <a:prstGeom prst="roundRect">
-            <a:avLst>
-              <a:gd name="adj" fmla="val 12000"/>
-            </a:avLst>
-          </a:prstGeom>
-          <a:solidFill>
-            <a:srgbClr val="095292"/>
-          </a:solidFill>
-          <a:ln>
-            <a:noFill/>
-          </a:ln>
-        </p:spPr>
-        <p:style>
-          <a:lnRef idx="1">
-            <a:schemeClr val="accent1"/>
-          </a:lnRef>
-          <a:fillRef idx="3">
-            <a:schemeClr val="accent1"/>
-          </a:fillRef>
-          <a:effectRef idx="2">
-            <a:schemeClr val="accent1"/>
-          </a:effectRef>
-          <a:fontRef idx="minor">
-            <a:schemeClr val="lt1"/>
-          </a:fontRef>
-        </p:style>
-        <p:txBody>
-          <a:bodyPr rtlCol="0" anchor="ctr"/>
-          <a:lstStyle/>
-          <a:p>
-            <a:pPr algn="ctr"/>
-          </a:p>
-        </p:txBody>
-      </p:sp>
-      <p:sp>
-        <p:nvSpPr>
-          <p:cNvPr id="8" name="TextBox 7"/>
-          <p:cNvSpPr txBox="1"/>
-          <p:nvPr/>
-        </p:nvSpPr>
-        <p:spPr>
-          <a:xfrm>
-            <a:off x="594360" y="1679752"/>
-            <a:ext cx="438912" cy="438912"/>
-          </a:xfrm>
-          <a:prstGeom prst="rect">
-            <a:avLst/>
-          </a:prstGeom>
-          <a:noFill/>
-        </p:spPr>
-        <p:txBody>
-          <a:bodyPr wrap="square" anchor="ctr"/>
-          <a:lstStyle/>
-          <a:p>
-            <a:pPr algn="ctr"/>
-            <a:r>
-              <a:rPr sz="1600" b="1" i="0">
-                <a:solidFill>
-                  <a:srgbClr val="FFFFFF"/>
-                </a:solidFill>
-                <a:latin typeface="Calibri"/>
-              </a:rPr>
-              <a:t>1</a:t>
-            </a:r>
-          </a:p>
-        </p:txBody>
-      </p:sp>
-      <p:sp>
-        <p:nvSpPr>
-          <p:cNvPr id="9" name="TextBox 8"/>
-          <p:cNvSpPr txBox="1"/>
-          <p:nvPr/>
-        </p:nvSpPr>
-        <p:spPr>
-          <a:xfrm>
-            <a:off x="1188720" y="1536192"/>
-            <a:ext cx="10271455" cy="744321"/>
-          </a:xfrm>
-          <a:prstGeom prst="rect">
-            <a:avLst/>
-          </a:prstGeom>
-          <a:noFill/>
-        </p:spPr>
-        <p:txBody>
-          <a:bodyPr wrap="square" anchor="ctr"/>
-          <a:lstStyle/>
-          <a:p>
-            <a:r>
-              <a:rPr sz="1500" b="1" i="0">
-                <a:solidFill>
-                  <a:srgbClr val="095292"/>
-                </a:solidFill>
-                <a:latin typeface="Calibri"/>
-              </a:rPr>
-              <a:t>30 s · El flujo</a:t>
-            </a:r>
-          </a:p>
-          <a:p>
             <a:pPr>
-              <a:spcBef>
-                <a:spcPts val="200"/>
-              </a:spcBef>
+              <a:spcAft>
+                <a:spcPts val="800"/>
+              </a:spcAft>
             </a:pPr>
             <a:r>
-              <a:rPr sz="1300" b="0" i="0">
-                <a:solidFill>
-                  <a:srgbClr val="333333"/>
-                </a:solidFill>
-                <a:latin typeface="Calibri"/>
-              </a:rPr>
-              <a:t>Los tres pasos y para qué existe cada pantalla.</a:t>
-            </a:r>
-          </a:p>
-        </p:txBody>
-      </p:sp>
-      <p:sp>
-        <p:nvSpPr>
-          <p:cNvPr id="10" name="Rounded Rectangle 9"/>
-          <p:cNvSpPr/>
-          <p:nvPr/>
-        </p:nvSpPr>
-        <p:spPr>
-          <a:xfrm>
-            <a:off x="457200" y="2445105"/>
-            <a:ext cx="11277295" cy="908913"/>
-          </a:xfrm>
-          <a:prstGeom prst="roundRect">
-            <a:avLst>
-              <a:gd name="adj" fmla="val 12000"/>
-            </a:avLst>
-          </a:prstGeom>
-          <a:solidFill>
-            <a:srgbClr val="E8F4FA"/>
-          </a:solidFill>
-          <a:ln>
-            <a:noFill/>
-          </a:ln>
-        </p:spPr>
-        <p:style>
-          <a:lnRef idx="1">
-            <a:schemeClr val="accent1"/>
-          </a:lnRef>
-          <a:fillRef idx="3">
-            <a:schemeClr val="accent1"/>
-          </a:fillRef>
-          <a:effectRef idx="2">
-            <a:schemeClr val="accent1"/>
-          </a:effectRef>
-          <a:fontRef idx="minor">
-            <a:schemeClr val="lt1"/>
-          </a:fontRef>
-        </p:style>
-        <p:txBody>
-          <a:bodyPr rtlCol="0" anchor="ctr"/>
-          <a:lstStyle/>
-          <a:p>
-            <a:pPr algn="ctr"/>
-          </a:p>
-        </p:txBody>
-      </p:sp>
-      <p:sp>
-        <p:nvSpPr>
-          <p:cNvPr id="11" name="Rounded Rectangle 10"/>
-          <p:cNvSpPr/>
-          <p:nvPr/>
-        </p:nvSpPr>
-        <p:spPr>
-          <a:xfrm>
-            <a:off x="594360" y="2680106"/>
-            <a:ext cx="438912" cy="438912"/>
-          </a:xfrm>
-          <a:prstGeom prst="roundRect">
-            <a:avLst>
-              <a:gd name="adj" fmla="val 12000"/>
-            </a:avLst>
-          </a:prstGeom>
-          <a:solidFill>
-            <a:srgbClr val="095292"/>
-          </a:solidFill>
-          <a:ln>
-            <a:noFill/>
-          </a:ln>
-        </p:spPr>
-        <p:style>
-          <a:lnRef idx="1">
-            <a:schemeClr val="accent1"/>
-          </a:lnRef>
-          <a:fillRef idx="3">
-            <a:schemeClr val="accent1"/>
-          </a:fillRef>
-          <a:effectRef idx="2">
-            <a:schemeClr val="accent1"/>
-          </a:effectRef>
-          <a:fontRef idx="minor">
-            <a:schemeClr val="lt1"/>
-          </a:fontRef>
-        </p:style>
-        <p:txBody>
-          <a:bodyPr rtlCol="0" anchor="ctr"/>
-          <a:lstStyle/>
-          <a:p>
-            <a:pPr algn="ctr"/>
-          </a:p>
-        </p:txBody>
-      </p:sp>
-      <p:sp>
-        <p:nvSpPr>
-          <p:cNvPr id="12" name="TextBox 11"/>
-          <p:cNvSpPr txBox="1"/>
-          <p:nvPr/>
-        </p:nvSpPr>
-        <p:spPr>
-          <a:xfrm>
-            <a:off x="594360" y="2680106"/>
-            <a:ext cx="438912" cy="438912"/>
-          </a:xfrm>
-          <a:prstGeom prst="rect">
-            <a:avLst/>
-          </a:prstGeom>
-          <a:noFill/>
-        </p:spPr>
-        <p:txBody>
-          <a:bodyPr wrap="square" anchor="ctr"/>
-          <a:lstStyle/>
-          <a:p>
-            <a:pPr algn="ctr"/>
-            <a:r>
-              <a:rPr sz="1600" b="1" i="0">
-                <a:solidFill>
-                  <a:srgbClr val="FFFFFF"/>
-                </a:solidFill>
-                <a:latin typeface="Calibri"/>
-              </a:rPr>
-              <a:t>2</a:t>
-            </a:r>
-          </a:p>
-        </p:txBody>
-      </p:sp>
-      <p:sp>
-        <p:nvSpPr>
-          <p:cNvPr id="13" name="TextBox 12"/>
-          <p:cNvSpPr txBox="1"/>
-          <p:nvPr/>
-        </p:nvSpPr>
-        <p:spPr>
-          <a:xfrm>
-            <a:off x="1188720" y="2536545"/>
-            <a:ext cx="10271455" cy="744321"/>
-          </a:xfrm>
-          <a:prstGeom prst="rect">
-            <a:avLst/>
-          </a:prstGeom>
-          <a:noFill/>
-        </p:spPr>
-        <p:txBody>
-          <a:bodyPr wrap="square" anchor="ctr"/>
-          <a:lstStyle/>
-          <a:p>
-            <a:r>
-              <a:rPr sz="1500" b="1" i="0">
-                <a:solidFill>
-                  <a:srgbClr val="095292"/>
-                </a:solidFill>
-                <a:latin typeface="Calibri"/>
-              </a:rPr>
-              <a:t>50 s · El camino principal</a:t>
+              <a:rPr sz="2000" b="0" i="0">
+                <a:solidFill>
+                  <a:srgbClr val="333333"/>
+                </a:solidFill>
+                <a:latin typeface="Calibri"/>
+              </a:rPr>
+              <a:t>–   La conclusión práctica hay que decirla como regla y no como curiosidad: </a:t>
+            </a:r>
+            <a:r>
+              <a:rPr sz="2000" b="1" i="0">
+                <a:solidFill>
+                  <a:srgbClr val="333333"/>
+                </a:solidFill>
+                <a:latin typeface="Calibri"/>
+              </a:rPr>
+              <a:t>el primer prototipo se hace a propósito feo</a:t>
+            </a:r>
+            <a:r>
+              <a:rPr sz="2000" b="0" i="0">
+                <a:solidFill>
+                  <a:srgbClr val="333333"/>
+                </a:solidFill>
+                <a:latin typeface="Calibri"/>
+              </a:rPr>
+              <a:t>.</a:t>
             </a:r>
           </a:p>
           <a:p>
             <a:pPr>
-              <a:spcBef>
-                <a:spcPts val="200"/>
-              </a:spcBef>
+              <a:spcAft>
+                <a:spcPts val="800"/>
+              </a:spcAft>
             </a:pPr>
             <a:r>
-              <a:rPr sz="1300" b="0" i="0">
-                <a:solidFill>
-                  <a:srgbClr val="333333"/>
-                </a:solidFill>
-                <a:latin typeface="Calibri"/>
-              </a:rPr>
-              <a:t>Qué hace el usuario el 90 % de las veces, señalado en el dibujo.</a:t>
-            </a:r>
-          </a:p>
-        </p:txBody>
-      </p:sp>
-      <p:sp>
-        <p:nvSpPr>
-          <p:cNvPr id="14" name="Rounded Rectangle 13"/>
-          <p:cNvSpPr/>
-          <p:nvPr/>
-        </p:nvSpPr>
-        <p:spPr>
-          <a:xfrm>
-            <a:off x="457200" y="3445459"/>
-            <a:ext cx="11277295" cy="908913"/>
-          </a:xfrm>
-          <a:prstGeom prst="roundRect">
-            <a:avLst>
-              <a:gd name="adj" fmla="val 12000"/>
-            </a:avLst>
-          </a:prstGeom>
-          <a:solidFill>
-            <a:srgbClr val="F2F2F2"/>
-          </a:solidFill>
-          <a:ln>
-            <a:noFill/>
-          </a:ln>
-        </p:spPr>
-        <p:style>
-          <a:lnRef idx="1">
-            <a:schemeClr val="accent1"/>
-          </a:lnRef>
-          <a:fillRef idx="3">
-            <a:schemeClr val="accent1"/>
-          </a:fillRef>
-          <a:effectRef idx="2">
-            <a:schemeClr val="accent1"/>
-          </a:effectRef>
-          <a:fontRef idx="minor">
-            <a:schemeClr val="lt1"/>
-          </a:fontRef>
-        </p:style>
-        <p:txBody>
-          <a:bodyPr rtlCol="0" anchor="ctr"/>
-          <a:lstStyle/>
-          <a:p>
-            <a:pPr algn="ctr"/>
-          </a:p>
-        </p:txBody>
-      </p:sp>
-      <p:sp>
-        <p:nvSpPr>
-          <p:cNvPr id="15" name="Rounded Rectangle 14"/>
-          <p:cNvSpPr/>
-          <p:nvPr/>
-        </p:nvSpPr>
-        <p:spPr>
-          <a:xfrm>
-            <a:off x="594360" y="3680460"/>
-            <a:ext cx="438912" cy="438912"/>
-          </a:xfrm>
-          <a:prstGeom prst="roundRect">
-            <a:avLst>
-              <a:gd name="adj" fmla="val 12000"/>
-            </a:avLst>
-          </a:prstGeom>
-          <a:solidFill>
-            <a:srgbClr val="095292"/>
-          </a:solidFill>
-          <a:ln>
-            <a:noFill/>
-          </a:ln>
-        </p:spPr>
-        <p:style>
-          <a:lnRef idx="1">
-            <a:schemeClr val="accent1"/>
-          </a:lnRef>
-          <a:fillRef idx="3">
-            <a:schemeClr val="accent1"/>
-          </a:fillRef>
-          <a:effectRef idx="2">
-            <a:schemeClr val="accent1"/>
-          </a:effectRef>
-          <a:fontRef idx="minor">
-            <a:schemeClr val="lt1"/>
-          </a:fontRef>
-        </p:style>
-        <p:txBody>
-          <a:bodyPr rtlCol="0" anchor="ctr"/>
-          <a:lstStyle/>
-          <a:p>
-            <a:pPr algn="ctr"/>
-          </a:p>
-        </p:txBody>
-      </p:sp>
-      <p:sp>
-        <p:nvSpPr>
-          <p:cNvPr id="16" name="TextBox 15"/>
-          <p:cNvSpPr txBox="1"/>
-          <p:nvPr/>
-        </p:nvSpPr>
-        <p:spPr>
-          <a:xfrm>
-            <a:off x="594360" y="3680460"/>
-            <a:ext cx="438912" cy="438912"/>
-          </a:xfrm>
-          <a:prstGeom prst="rect">
-            <a:avLst/>
-          </a:prstGeom>
-          <a:noFill/>
-        </p:spPr>
-        <p:txBody>
-          <a:bodyPr wrap="square" anchor="ctr"/>
-          <a:lstStyle/>
-          <a:p>
-            <a:pPr algn="ctr"/>
-            <a:r>
-              <a:rPr sz="1600" b="1" i="0">
-                <a:solidFill>
-                  <a:srgbClr val="FFFFFF"/>
-                </a:solidFill>
-                <a:latin typeface="Calibri"/>
-              </a:rPr>
-              <a:t>3</a:t>
-            </a:r>
-          </a:p>
-        </p:txBody>
-      </p:sp>
-      <p:sp>
-        <p:nvSpPr>
-          <p:cNvPr id="17" name="TextBox 16"/>
-          <p:cNvSpPr txBox="1"/>
-          <p:nvPr/>
-        </p:nvSpPr>
-        <p:spPr>
-          <a:xfrm>
-            <a:off x="1188720" y="3536899"/>
-            <a:ext cx="10271455" cy="744321"/>
-          </a:xfrm>
-          <a:prstGeom prst="rect">
-            <a:avLst/>
-          </a:prstGeom>
-          <a:noFill/>
-        </p:spPr>
-        <p:txBody>
-          <a:bodyPr wrap="square" anchor="ctr"/>
-          <a:lstStyle/>
-          <a:p>
-            <a:r>
-              <a:rPr sz="1500" b="1" i="0">
-                <a:solidFill>
-                  <a:srgbClr val="095292"/>
-                </a:solidFill>
-                <a:latin typeface="Calibri"/>
-              </a:rPr>
-              <a:t>50 s · Qué se ve cuando falla</a:t>
+              <a:rPr sz="2000" b="0" i="0">
+                <a:solidFill>
+                  <a:srgbClr val="333333"/>
+                </a:solidFill>
+                <a:latin typeface="Calibri"/>
+              </a:rPr>
+              <a:t>–   Excalidraw es la herramienta de la sesión justamente porque todo lo que se dibuja ahí se ve hecho a mano.</a:t>
             </a:r>
           </a:p>
           <a:p>
             <a:pPr>
-              <a:spcBef>
-                <a:spcPts val="200"/>
-              </a:spcBef>
+              <a:spcAft>
+                <a:spcPts val="800"/>
+              </a:spcAft>
             </a:pPr>
             <a:r>
-              <a:rPr sz="1300" b="0" i="0">
-                <a:solidFill>
-                  <a:srgbClr val="333333"/>
-                </a:solidFill>
-                <a:latin typeface="Calibri"/>
-              </a:rPr>
-              <a:t>Estado vacío y de error, con el mensaje leído tal cual. Es el minuto obligatorio.</a:t>
-            </a:r>
-          </a:p>
-        </p:txBody>
-      </p:sp>
-      <p:sp>
-        <p:nvSpPr>
-          <p:cNvPr id="18" name="Rounded Rectangle 17"/>
-          <p:cNvSpPr/>
-          <p:nvPr/>
-        </p:nvSpPr>
-        <p:spPr>
-          <a:xfrm>
-            <a:off x="457200" y="4445812"/>
-            <a:ext cx="11277295" cy="908913"/>
-          </a:xfrm>
-          <a:prstGeom prst="roundRect">
-            <a:avLst>
-              <a:gd name="adj" fmla="val 12000"/>
-            </a:avLst>
-          </a:prstGeom>
-          <a:solidFill>
-            <a:srgbClr val="E8F4FA"/>
-          </a:solidFill>
-          <a:ln>
-            <a:noFill/>
-          </a:ln>
-        </p:spPr>
-        <p:style>
-          <a:lnRef idx="1">
-            <a:schemeClr val="accent1"/>
-          </a:lnRef>
-          <a:fillRef idx="3">
-            <a:schemeClr val="accent1"/>
-          </a:fillRef>
-          <a:effectRef idx="2">
-            <a:schemeClr val="accent1"/>
-          </a:effectRef>
-          <a:fontRef idx="minor">
-            <a:schemeClr val="lt1"/>
-          </a:fontRef>
-        </p:style>
-        <p:txBody>
-          <a:bodyPr rtlCol="0" anchor="ctr"/>
-          <a:lstStyle/>
-          <a:p>
-            <a:pPr algn="ctr"/>
-          </a:p>
-        </p:txBody>
-      </p:sp>
-      <p:sp>
-        <p:nvSpPr>
-          <p:cNvPr id="19" name="Rounded Rectangle 18"/>
-          <p:cNvSpPr/>
-          <p:nvPr/>
-        </p:nvSpPr>
-        <p:spPr>
-          <a:xfrm>
-            <a:off x="594360" y="4680813"/>
-            <a:ext cx="438912" cy="438912"/>
-          </a:xfrm>
-          <a:prstGeom prst="roundRect">
-            <a:avLst>
-              <a:gd name="adj" fmla="val 12000"/>
-            </a:avLst>
-          </a:prstGeom>
-          <a:solidFill>
-            <a:srgbClr val="095292"/>
-          </a:solidFill>
-          <a:ln>
-            <a:noFill/>
-          </a:ln>
-        </p:spPr>
-        <p:style>
-          <a:lnRef idx="1">
-            <a:schemeClr val="accent1"/>
-          </a:lnRef>
-          <a:fillRef idx="3">
-            <a:schemeClr val="accent1"/>
-          </a:fillRef>
-          <a:effectRef idx="2">
-            <a:schemeClr val="accent1"/>
-          </a:effectRef>
-          <a:fontRef idx="minor">
-            <a:schemeClr val="lt1"/>
-          </a:fontRef>
-        </p:style>
-        <p:txBody>
-          <a:bodyPr rtlCol="0" anchor="ctr"/>
-          <a:lstStyle/>
-          <a:p>
-            <a:pPr algn="ctr"/>
-          </a:p>
-        </p:txBody>
-      </p:sp>
-      <p:sp>
-        <p:nvSpPr>
-          <p:cNvPr id="20" name="TextBox 19"/>
-          <p:cNvSpPr txBox="1"/>
-          <p:nvPr/>
-        </p:nvSpPr>
-        <p:spPr>
-          <a:xfrm>
-            <a:off x="594360" y="4680813"/>
-            <a:ext cx="438912" cy="438912"/>
-          </a:xfrm>
-          <a:prstGeom prst="rect">
-            <a:avLst/>
-          </a:prstGeom>
-          <a:noFill/>
-        </p:spPr>
-        <p:txBody>
-          <a:bodyPr wrap="square" anchor="ctr"/>
-          <a:lstStyle/>
-          <a:p>
-            <a:pPr algn="ctr"/>
-            <a:r>
-              <a:rPr sz="1600" b="1" i="0">
-                <a:solidFill>
-                  <a:srgbClr val="FFFFFF"/>
-                </a:solidFill>
-                <a:latin typeface="Calibri"/>
-              </a:rPr>
-              <a:t>4</a:t>
-            </a:r>
-          </a:p>
-        </p:txBody>
-      </p:sp>
-      <p:sp>
-        <p:nvSpPr>
-          <p:cNvPr id="21" name="TextBox 20"/>
-          <p:cNvSpPr txBox="1"/>
-          <p:nvPr/>
-        </p:nvSpPr>
-        <p:spPr>
-          <a:xfrm>
-            <a:off x="1188720" y="4537252"/>
-            <a:ext cx="10271455" cy="744321"/>
-          </a:xfrm>
-          <a:prstGeom prst="rect">
-            <a:avLst/>
-          </a:prstGeom>
-          <a:noFill/>
-        </p:spPr>
-        <p:txBody>
-          <a:bodyPr wrap="square" anchor="ctr"/>
-          <a:lstStyle/>
-          <a:p>
-            <a:r>
-              <a:rPr sz="1500" b="1" i="0">
-                <a:solidFill>
-                  <a:srgbClr val="095292"/>
-                </a:solidFill>
-                <a:latin typeface="Calibri"/>
-              </a:rPr>
-              <a:t>30 s · Los textos</a:t>
+              <a:rPr sz="2000" b="0" i="0">
+                <a:solidFill>
+                  <a:srgbClr val="333333"/>
+                </a:solidFill>
+                <a:latin typeface="Calibri"/>
+              </a:rPr>
+              <a:t>–   Recoja las respuestas del muro y no revele la explicación de inmediato: deje que alguien la formule.</a:t>
             </a:r>
           </a:p>
           <a:p>
             <a:pPr>
-              <a:spcBef>
-                <a:spcPts val="200"/>
-              </a:spcBef>
+              <a:spcAft>
+                <a:spcPts val="800"/>
+              </a:spcAft>
             </a:pPr>
             <a:r>
-              <a:rPr sz="1300" b="0" i="0">
-                <a:solidFill>
-                  <a:srgbClr val="333333"/>
-                </a:solidFill>
-                <a:latin typeface="Calibri"/>
-              </a:rPr>
-              <a:t>Dos rótulos que costó decidir y por qué quedaron así.</a:t>
-            </a:r>
-          </a:p>
-        </p:txBody>
-      </p:sp>
-      <p:sp>
-        <p:nvSpPr>
-          <p:cNvPr id="22" name="Rounded Rectangle 21"/>
-          <p:cNvSpPr/>
-          <p:nvPr/>
-        </p:nvSpPr>
-        <p:spPr>
-          <a:xfrm>
-            <a:off x="457200" y="5446166"/>
-            <a:ext cx="11277295" cy="908913"/>
-          </a:xfrm>
-          <a:prstGeom prst="roundRect">
-            <a:avLst>
-              <a:gd name="adj" fmla="val 12000"/>
-            </a:avLst>
-          </a:prstGeom>
-          <a:solidFill>
-            <a:srgbClr val="F2F2F2"/>
-          </a:solidFill>
-          <a:ln>
-            <a:noFill/>
-          </a:ln>
-        </p:spPr>
-        <p:style>
-          <a:lnRef idx="1">
-            <a:schemeClr val="accent1"/>
-          </a:lnRef>
-          <a:fillRef idx="3">
-            <a:schemeClr val="accent1"/>
-          </a:fillRef>
-          <a:effectRef idx="2">
-            <a:schemeClr val="accent1"/>
-          </a:effectRef>
-          <a:fontRef idx="minor">
-            <a:schemeClr val="lt1"/>
-          </a:fontRef>
-        </p:style>
-        <p:txBody>
-          <a:bodyPr rtlCol="0" anchor="ctr"/>
-          <a:lstStyle/>
-          <a:p>
-            <a:pPr algn="ctr"/>
-          </a:p>
-        </p:txBody>
-      </p:sp>
-      <p:sp>
-        <p:nvSpPr>
-          <p:cNvPr id="23" name="Rounded Rectangle 22"/>
-          <p:cNvSpPr/>
-          <p:nvPr/>
-        </p:nvSpPr>
-        <p:spPr>
-          <a:xfrm>
-            <a:off x="594360" y="5681167"/>
-            <a:ext cx="438912" cy="438912"/>
-          </a:xfrm>
-          <a:prstGeom prst="roundRect">
-            <a:avLst>
-              <a:gd name="adj" fmla="val 12000"/>
-            </a:avLst>
-          </a:prstGeom>
-          <a:solidFill>
-            <a:srgbClr val="095292"/>
-          </a:solidFill>
-          <a:ln>
-            <a:noFill/>
-          </a:ln>
-        </p:spPr>
-        <p:style>
-          <a:lnRef idx="1">
-            <a:schemeClr val="accent1"/>
-          </a:lnRef>
-          <a:fillRef idx="3">
-            <a:schemeClr val="accent1"/>
-          </a:fillRef>
-          <a:effectRef idx="2">
-            <a:schemeClr val="accent1"/>
-          </a:effectRef>
-          <a:fontRef idx="minor">
-            <a:schemeClr val="lt1"/>
-          </a:fontRef>
-        </p:style>
-        <p:txBody>
-          <a:bodyPr rtlCol="0" anchor="ctr"/>
-          <a:lstStyle/>
-          <a:p>
-            <a:pPr algn="ctr"/>
-          </a:p>
-        </p:txBody>
-      </p:sp>
-      <p:sp>
-        <p:nvSpPr>
-          <p:cNvPr id="24" name="TextBox 23"/>
-          <p:cNvSpPr txBox="1"/>
-          <p:nvPr/>
-        </p:nvSpPr>
-        <p:spPr>
-          <a:xfrm>
-            <a:off x="594360" y="5681167"/>
-            <a:ext cx="438912" cy="438912"/>
-          </a:xfrm>
-          <a:prstGeom prst="rect">
-            <a:avLst/>
-          </a:prstGeom>
-          <a:noFill/>
-        </p:spPr>
-        <p:txBody>
-          <a:bodyPr wrap="square" anchor="ctr"/>
-          <a:lstStyle/>
-          <a:p>
-            <a:pPr algn="ctr"/>
-            <a:r>
-              <a:rPr sz="1600" b="1" i="0">
-                <a:solidFill>
-                  <a:srgbClr val="FFFFFF"/>
-                </a:solidFill>
-                <a:latin typeface="Calibri"/>
-              </a:rPr>
-              <a:t>5</a:t>
-            </a:r>
-          </a:p>
-        </p:txBody>
-      </p:sp>
-      <p:sp>
-        <p:nvSpPr>
-          <p:cNvPr id="25" name="TextBox 24"/>
-          <p:cNvSpPr txBox="1"/>
-          <p:nvPr/>
-        </p:nvSpPr>
-        <p:spPr>
-          <a:xfrm>
-            <a:off x="1188720" y="5537606"/>
-            <a:ext cx="10271455" cy="744321"/>
-          </a:xfrm>
-          <a:prstGeom prst="rect">
-            <a:avLst/>
-          </a:prstGeom>
-          <a:noFill/>
-        </p:spPr>
-        <p:txBody>
-          <a:bodyPr wrap="square" anchor="ctr"/>
-          <a:lstStyle/>
-          <a:p>
-            <a:r>
-              <a:rPr sz="1500" b="1" i="0">
-                <a:solidFill>
-                  <a:srgbClr val="095292"/>
-                </a:solidFill>
-                <a:latin typeface="Calibri"/>
-              </a:rPr>
-              <a:t>20 s · El guion de prueba</a:t>
-            </a:r>
-          </a:p>
-          <a:p>
-            <a:pPr>
-              <a:spcBef>
-                <a:spcPts val="200"/>
-              </a:spcBef>
-            </a:pPr>
-            <a:r>
-              <a:rPr sz="1300" b="0" i="0">
-                <a:solidFill>
-                  <a:srgbClr val="333333"/>
-                </a:solidFill>
-                <a:latin typeface="Calibri"/>
-              </a:rPr>
-              <a:t>Las tres tareas, y con qué rol van a probar.</a:t>
-            </a:r>
-          </a:p>
-        </p:txBody>
-      </p:sp>
-      <p:sp>
-        <p:nvSpPr>
-          <p:cNvPr id="26" name="TextBox 25"/>
+              <a:rPr sz="2000" b="0" i="0">
+                <a:solidFill>
+                  <a:srgbClr val="333333"/>
+                </a:solidFill>
+                <a:latin typeface="Calibri"/>
+              </a:rPr>
+              <a:t>–   Suele salir en dos o tres intentos, y sale mejor de ellos que del docente.</a:t>
+            </a:r>
+          </a:p>
+        </p:txBody>
+      </p:sp>
+      <p:sp>
+        <p:nvSpPr>
+          <p:cNvPr id="6" name="TextBox 5"/>
           <p:cNvSpPr txBox="1"/>
           <p:nvPr/>
         </p:nvSpPr>
@@ -5872,7 +4216,7 @@
                 </a:solidFill>
                 <a:latin typeface="Calibri"/>
               </a:rPr>
-              <a:t>Para la Clase 11</a:t>
+              <a:t>Qué es un prototipo: una pregunta hecha objeto (1/2)</a:t>
             </a:r>
           </a:p>
         </p:txBody>
@@ -5911,7 +4255,7 @@
                 </a:solidFill>
                 <a:latin typeface="Calibri"/>
               </a:rPr>
-              <a:t>–   </a:t>
+              <a:t>–   La definición que hay que dejar instalada: </a:t>
             </a:r>
             <a:r>
               <a:rPr sz="2000" b="1" i="0">
@@ -5920,7 +4264,7 @@
                 </a:solidFill>
                 <a:latin typeface="Calibri"/>
               </a:rPr>
-              <a:t>Trabajo dirigido:</a:t>
+              <a:t>un prototipo es una pregunta hecha objeto</a:t>
             </a:r>
             <a:r>
               <a:rPr sz="2000" b="0" i="0">
@@ -5929,25 +4273,7 @@
                 </a:solidFill>
                 <a:latin typeface="Calibri"/>
               </a:rPr>
-              <a:t> Introducción a software de prototipado — terminar las tres pantallas con </a:t>
-            </a:r>
-            <a:r>
-              <a:rPr sz="2000" b="1" i="0">
-                <a:solidFill>
-                  <a:srgbClr val="333333"/>
-                </a:solidFill>
-                <a:latin typeface="Calibri"/>
-              </a:rPr>
-              <a:t>todos</a:t>
-            </a:r>
-            <a:r>
-              <a:rPr sz="2000" b="0" i="0">
-                <a:solidFill>
-                  <a:srgbClr val="333333"/>
-                </a:solidFill>
-                <a:latin typeface="Calibri"/>
-              </a:rPr>
-              <a:t> los textos reales y los tres estados dibujados, y dejar el PNG en la carpeta del equipo.</a:t>
+              <a:t>.</a:t>
             </a:r>
           </a:p>
           <a:p>
@@ -5963,43 +4289,7 @@
                 </a:solidFill>
                 <a:latin typeface="Calibri"/>
               </a:rPr>
-              <a:t>–   </a:t>
-            </a:r>
-            <a:r>
-              <a:rPr sz="2000" b="1" i="0">
-                <a:solidFill>
-                  <a:srgbClr val="333333"/>
-                </a:solidFill>
-                <a:latin typeface="Calibri"/>
-              </a:rPr>
-              <a:t>Trabajo independiente:</a:t>
-            </a:r>
-            <a:r>
-              <a:rPr sz="2000" b="0" i="0">
-                <a:solidFill>
-                  <a:srgbClr val="333333"/>
-                </a:solidFill>
-                <a:latin typeface="Calibri"/>
-              </a:rPr>
-              <a:t> Práctica básica con herramientas digitales: convertir el prototipo en </a:t>
-            </a:r>
-            <a:r>
-              <a:rPr sz="2000" b="1" i="0">
-                <a:solidFill>
-                  <a:srgbClr val="333333"/>
-                </a:solidFill>
-                <a:latin typeface="Calibri"/>
-              </a:rPr>
-              <a:t>navegable</a:t>
-            </a:r>
-            <a:r>
-              <a:rPr sz="2000" b="0" i="0">
-                <a:solidFill>
-                  <a:srgbClr val="333333"/>
-                </a:solidFill>
-                <a:latin typeface="Calibri"/>
-              </a:rPr>
-              <a:t> —diapositivas enlazadas o enlaces entre marcos— para poder recorrerlo delante de una persona.</a:t>
+              <a:t>–   Se construye para responder algo concreto —¿la gente entiende esta pantalla?, ¿alcanza el tiempo?, ¿el flujo tiene sentido?— y sin esa pregunta es una maqueta decorativa.</a:t>
             </a:r>
           </a:p>
           <a:p>
@@ -6015,7 +4305,7 @@
                 </a:solidFill>
                 <a:latin typeface="Calibri"/>
               </a:rPr>
-              <a:t>–   </a:t>
+              <a:t>–   Pídale a cada equipo, en la sala, que escriba la pregunta de su prototipo en una línea antes de dibujar nada. </a:t>
             </a:r>
             <a:r>
               <a:rPr sz="2000" b="1" i="0">
@@ -6024,7 +4314,7 @@
                 </a:solidFill>
                 <a:latin typeface="Calibri"/>
               </a:rPr>
-              <a:t>Clase 11 · Taller de prototipado inicial con IA</a:t>
+              <a:t>No es la versión 1 a medias</a:t>
             </a:r>
             <a:r>
               <a:rPr sz="2000" b="0" i="0">
@@ -6033,43 +4323,7 @@
                 </a:solidFill>
                 <a:latin typeface="Calibri"/>
               </a:rPr>
-              <a:t> — </a:t>
-            </a:r>
-            <a:r>
-              <a:rPr sz="2000" b="1" i="0">
-                <a:solidFill>
-                  <a:srgbClr val="333333"/>
-                </a:solidFill>
-                <a:latin typeface="Calibri"/>
-              </a:rPr>
-              <a:t>prototipo v2 con IA autorizada</a:t>
-            </a:r>
-            <a:r>
-              <a:rPr sz="2000" b="0" i="0">
-                <a:solidFill>
-                  <a:srgbClr val="333333"/>
-                </a:solidFill>
-                <a:latin typeface="Calibri"/>
-              </a:rPr>
-              <a:t>: generar variantes, elegir con criterio y corregir lo que la IA no sabía. Y la </a:t>
-            </a:r>
-            <a:r>
-              <a:rPr sz="2000" b="1" i="0">
-                <a:solidFill>
-                  <a:srgbClr val="333333"/>
-                </a:solidFill>
-                <a:latin typeface="Calibri"/>
-              </a:rPr>
-              <a:t>evaluación del corte 2</a:t>
-            </a:r>
-            <a:r>
-              <a:rPr sz="2000" b="0" i="0">
-                <a:solidFill>
-                  <a:srgbClr val="333333"/>
-                </a:solidFill>
-                <a:latin typeface="Calibri"/>
-              </a:rPr>
-              <a:t> en la plataforma del curso, sobre las sesiones 7 a 11.</a:t>
+              <a:t>, y esta distinción es la que más cuesta en primer semestre.</a:t>
             </a:r>
           </a:p>
           <a:p>
@@ -6085,95 +4339,7 @@
                 </a:solidFill>
                 <a:latin typeface="Calibri"/>
               </a:rPr>
-              <a:t>–   </a:t>
-            </a:r>
-            <a:r>
-              <a:rPr sz="2000" b="1" i="0">
-                <a:solidFill>
-                  <a:srgbClr val="333333"/>
-                </a:solidFill>
-                <a:latin typeface="Calibri"/>
-              </a:rPr>
-              <a:t>Aviso:</a:t>
-            </a:r>
-            <a:r>
-              <a:rPr sz="2000" b="0" i="0">
-                <a:solidFill>
-                  <a:srgbClr val="333333"/>
-                </a:solidFill>
-                <a:latin typeface="Calibri"/>
-              </a:rPr>
-              <a:t> La sesión 11 </a:t>
-            </a:r>
-            <a:r>
-              <a:rPr sz="2000" b="1" i="0">
-                <a:solidFill>
-                  <a:srgbClr val="333333"/>
-                </a:solidFill>
-                <a:latin typeface="Calibri"/>
-              </a:rPr>
-              <a:t>cierra el corte 2</a:t>
-            </a:r>
-            <a:r>
-              <a:rPr sz="2000" b="0" i="0">
-                <a:solidFill>
-                  <a:srgbClr val="333333"/>
-                </a:solidFill>
-                <a:latin typeface="Calibri"/>
-              </a:rPr>
-              <a:t>: hay 20 minutos de evaluación al final, sobre las sesiones 7 a 11. Traigan el prototipo terminado y navegable — sin él no hay nada que corregir con IA, y ese es el entregable de la sesión. La evaluación es </a:t>
-            </a:r>
-            <a:r>
-              <a:rPr sz="2000" b="1" i="0">
-                <a:solidFill>
-                  <a:srgbClr val="333333"/>
-                </a:solidFill>
-                <a:latin typeface="Calibri"/>
-              </a:rPr>
-              <a:t>a libro abierto sobre los documentos de su equipo</a:t>
-            </a:r>
-            <a:r>
-              <a:rPr sz="2000" b="0" i="0">
-                <a:solidFill>
-                  <a:srgbClr val="333333"/>
-                </a:solidFill>
-                <a:latin typeface="Calibri"/>
-              </a:rPr>
-              <a:t>: lean el documento «Evaluación del Corte 2 — cómo prepararse», que dice exactamente qué pestañas tener abiertas.</a:t>
-            </a:r>
-          </a:p>
-          <a:p>
-            <a:pPr>
-              <a:spcAft>
-                <a:spcPts val="800"/>
-              </a:spcAft>
-            </a:pPr>
-            <a:r>
-              <a:rPr sz="2000" b="0" i="0">
-                <a:solidFill>
-                  <a:srgbClr val="333333"/>
-                </a:solidFill>
-                <a:latin typeface="Calibri"/>
-              </a:rPr>
-              <a:t>–   </a:t>
-            </a:r>
-            <a:r>
-              <a:rPr sz="2000" b="1" i="0">
-                <a:solidFill>
-                  <a:srgbClr val="333333"/>
-                </a:solidFill>
-                <a:latin typeface="Calibri"/>
-              </a:rPr>
-              <a:t>Antes de salir:</a:t>
-            </a:r>
-            <a:r>
-              <a:rPr sz="2000" b="0" i="0">
-                <a:solidFill>
-                  <a:srgbClr val="333333"/>
-                </a:solidFill>
-                <a:latin typeface="Calibri"/>
-              </a:rPr>
-              <a:t> el enlace del documento del equipo en el chat, con permiso de lectura para el docente, y el nombre del vocero de hoy.</a:t>
+              <a:t>–   Una versión inacabada intenta ser el producto y falla en el intento; un prototipo no intenta ser el producto, así que puede ser papel, puede no tener datos reales, puede no funcionar</a:t>
             </a:r>
           </a:p>
         </p:txBody>
@@ -6248,13 +4414,13 @@
         <p:spPr>
           <a:xfrm>
             <a:off x="0" y="0"/>
-            <a:ext cx="12191695" cy="164592"/>
+            <a:ext cx="12191695" cy="960120"/>
           </a:xfrm>
           <a:prstGeom prst="rect">
             <a:avLst/>
           </a:prstGeom>
           <a:solidFill>
-            <a:srgbClr val="269CCB"/>
+            <a:srgbClr val="095292"/>
           </a:solidFill>
           <a:ln>
             <a:noFill/>
@@ -6282,30 +4448,49 @@
           </a:p>
         </p:txBody>
       </p:sp>
-      <p:pic>
-        <p:nvPicPr>
-          <p:cNvPr id="3" name="Picture 2" descr="logo_uniajc_color.png"/>
-          <p:cNvPicPr>
-            <a:picLocks noChangeAspect="1"/>
-          </p:cNvPicPr>
-          <p:nvPr/>
-        </p:nvPicPr>
-        <p:blipFill>
-          <a:blip r:embed="rId2"/>
-          <a:stretch>
-            <a:fillRect/>
-          </a:stretch>
-        </p:blipFill>
-        <p:spPr>
-          <a:xfrm>
-            <a:off x="10271455" y="5998464"/>
-            <a:ext cx="1463040" cy="643233"/>
-          </a:xfrm>
-          <a:prstGeom prst="rect">
-            <a:avLst/>
-          </a:prstGeom>
-        </p:spPr>
-      </p:pic>
+      <p:sp>
+        <p:nvSpPr>
+          <p:cNvPr id="3" name="Rectangle 2"/>
+          <p:cNvSpPr/>
+          <p:nvPr/>
+        </p:nvSpPr>
+        <p:spPr>
+          <a:xfrm>
+            <a:off x="0" y="960120"/>
+            <a:ext cx="12191695" cy="41148"/>
+          </a:xfrm>
+          <a:prstGeom prst="rect">
+            <a:avLst/>
+          </a:prstGeom>
+          <a:solidFill>
+            <a:srgbClr val="FFD000"/>
+          </a:solidFill>
+          <a:ln>
+            <a:noFill/>
+          </a:ln>
+        </p:spPr>
+        <p:style>
+          <a:lnRef idx="1">
+            <a:schemeClr val="accent1"/>
+          </a:lnRef>
+          <a:fillRef idx="3">
+            <a:schemeClr val="accent1"/>
+          </a:fillRef>
+          <a:effectRef idx="2">
+            <a:schemeClr val="accent1"/>
+          </a:effectRef>
+          <a:fontRef idx="minor">
+            <a:schemeClr val="lt1"/>
+          </a:fontRef>
+        </p:style>
+        <p:txBody>
+          <a:bodyPr rtlCol="0" anchor="ctr"/>
+          <a:lstStyle/>
+          <a:p>
+            <a:pPr algn="ctr"/>
+          </a:p>
+        </p:txBody>
+      </p:sp>
       <p:sp>
         <p:nvSpPr>
           <p:cNvPr id="4" name="TextBox 3"/>
@@ -6314,41 +4499,8 @@
         </p:nvSpPr>
         <p:spPr>
           <a:xfrm>
-            <a:off x="457200" y="1737360"/>
-            <a:ext cx="11277295" cy="1097280"/>
-          </a:xfrm>
-          <a:prstGeom prst="rect">
-            <a:avLst/>
-          </a:prstGeom>
-          <a:noFill/>
-        </p:spPr>
-        <p:txBody>
-          <a:bodyPr wrap="square" anchor="ctr"/>
-          <a:lstStyle/>
-          <a:p>
-            <a:pPr algn="ctr"/>
-            <a:r>
-              <a:rPr sz="3400" b="1" i="0">
-                <a:solidFill>
-                  <a:srgbClr val="095292"/>
-                </a:solidFill>
-                <a:latin typeface="Calibri"/>
-              </a:rPr>
-              <a:t>Nos vemos en la sesión 11</a:t>
-            </a:r>
-          </a:p>
-        </p:txBody>
-      </p:sp>
-      <p:sp>
-        <p:nvSpPr>
-          <p:cNvPr id="5" name="TextBox 4"/>
-          <p:cNvSpPr txBox="1"/>
-          <p:nvPr/>
-        </p:nvSpPr>
-        <p:spPr>
-          <a:xfrm>
-            <a:off x="457200" y="3017520"/>
-            <a:ext cx="11277295" cy="1645920"/>
+            <a:off x="457200" y="164592"/>
+            <a:ext cx="11277295" cy="502920"/>
           </a:xfrm>
           <a:prstGeom prst="rect">
             <a:avLst/>
@@ -6361,49 +4513,28 @@
           </a:bodyPr>
           <a:lstStyle/>
           <a:p>
-            <a:pPr algn="ctr">
-              <a:spcAft>
-                <a:spcPts val="600"/>
-              </a:spcAft>
-            </a:pPr>
-            <a:r>
-              <a:rPr sz="1600" b="0" i="0">
-                <a:solidFill>
-                  <a:srgbClr val="333333"/>
-                </a:solidFill>
-                <a:latin typeface="Calibri"/>
-              </a:rPr>
-              <a:t>Herramientas digitales aplicadas a la Ingeniería · Clase 10</a:t>
-            </a:r>
-          </a:p>
-          <a:p>
-            <a:pPr algn="ctr">
-              <a:spcAft>
-                <a:spcPts val="600"/>
-              </a:spcAft>
-            </a:pPr>
-            <a:r>
-              <a:rPr sz="1600" b="0" i="0">
-                <a:solidFill>
-                  <a:srgbClr val="333333"/>
-                </a:solidFill>
-                <a:latin typeface="Calibri"/>
-              </a:rPr>
-              <a:t>FI300101 · UNIAJC · Ingeniería de Sistemas</a:t>
-            </a:r>
-          </a:p>
-        </p:txBody>
-      </p:sp>
-      <p:sp>
-        <p:nvSpPr>
-          <p:cNvPr id="6" name="TextBox 5"/>
+            <a:r>
+              <a:rPr sz="2600" b="1" i="0">
+                <a:solidFill>
+                  <a:srgbClr val="FFFFFF"/>
+                </a:solidFill>
+                <a:latin typeface="Calibri"/>
+              </a:rPr>
+              <a:t>Qué es un prototipo: una pregunta hecha objeto (2/2)</a:t>
+            </a:r>
+          </a:p>
+        </p:txBody>
+      </p:sp>
+      <p:sp>
+        <p:nvSpPr>
+          <p:cNvPr id="5" name="TextBox 4"/>
           <p:cNvSpPr txBox="1"/>
           <p:nvPr/>
         </p:nvSpPr>
         <p:spPr>
           <a:xfrm>
-            <a:off x="457200" y="4754880"/>
-            <a:ext cx="11277295" cy="640080"/>
+            <a:off x="457200" y="1170432"/>
+            <a:ext cx="11277295" cy="5230368"/>
           </a:xfrm>
           <a:prstGeom prst="rect">
             <a:avLst/>
@@ -6416,15 +4547,2250 @@
           </a:bodyPr>
           <a:lstStyle/>
           <a:p>
+            <a:pPr>
+              <a:spcAft>
+                <a:spcPts val="800"/>
+              </a:spcAft>
+            </a:pPr>
+            <a:r>
+              <a:rPr sz="2000" b="0" i="0">
+                <a:solidFill>
+                  <a:srgbClr val="333333"/>
+                </a:solidFill>
+                <a:latin typeface="Calibri"/>
+              </a:rPr>
+              <a:t>–   Y aun así responder la pregunta con precisión. </a:t>
+            </a:r>
+            <a:r>
+              <a:rPr sz="2000" b="1" i="0">
+                <a:solidFill>
+                  <a:srgbClr val="333333"/>
+                </a:solidFill>
+                <a:latin typeface="Calibri"/>
+              </a:rPr>
+              <a:t>Es desechable, y eso lo libera.</a:t>
+            </a:r>
+            <a:r>
+              <a:rPr sz="2000" b="0" i="0">
+                <a:solidFill>
+                  <a:srgbClr val="333333"/>
+                </a:solidFill>
+                <a:latin typeface="Calibri"/>
+              </a:rPr>
+              <a:t> Se hace sabiendo que se va a tirar, y por eso se puede probar una idea rara sin costo.</a:t>
+            </a:r>
+          </a:p>
+          <a:p>
+            <a:pPr>
+              <a:spcAft>
+                <a:spcPts val="800"/>
+              </a:spcAft>
+            </a:pPr>
+            <a:r>
+              <a:rPr sz="2000" b="0" i="0">
+                <a:solidFill>
+                  <a:srgbClr val="333333"/>
+                </a:solidFill>
+                <a:latin typeface="Calibri"/>
+              </a:rPr>
+              <a:t>–   La frase que conviene dejarles: </a:t>
+            </a:r>
+            <a:r>
+              <a:rPr sz="2000" b="1" i="0">
+                <a:solidFill>
+                  <a:srgbClr val="333333"/>
+                </a:solidFill>
+                <a:latin typeface="Calibri"/>
+              </a:rPr>
+              <a:t>un prototipo que da pesar tirar ya costó demasiado.</a:t>
+            </a:r>
+            <a:r>
+              <a:rPr sz="2000" b="0" i="0">
+                <a:solidFill>
+                  <a:srgbClr val="333333"/>
+                </a:solidFill>
+                <a:latin typeface="Calibri"/>
+              </a:rPr>
+              <a:t> Y el punto que amarra la sesión con la 8 y con la 12: </a:t>
+            </a:r>
+            <a:r>
+              <a:rPr sz="2000" b="1" i="0">
+                <a:solidFill>
+                  <a:srgbClr val="333333"/>
+                </a:solidFill>
+                <a:latin typeface="Calibri"/>
+              </a:rPr>
+              <a:t>se prueba con alguien ajeno</a:t>
+            </a:r>
+            <a:r>
+              <a:rPr sz="2000" b="0" i="0">
+                <a:solidFill>
+                  <a:srgbClr val="333333"/>
+                </a:solidFill>
+                <a:latin typeface="Calibri"/>
+              </a:rPr>
+              <a:t>.</a:t>
+            </a:r>
+          </a:p>
+          <a:p>
+            <a:pPr>
+              <a:spcAft>
+                <a:spcPts val="800"/>
+              </a:spcAft>
+            </a:pPr>
+            <a:r>
+              <a:rPr sz="2000" b="0" i="0">
+                <a:solidFill>
+                  <a:srgbClr val="333333"/>
+                </a:solidFill>
+                <a:latin typeface="Calibri"/>
+              </a:rPr>
+              <a:t>–   Un prototipo que solo vio el equipo no probó nada.</a:t>
+            </a:r>
+          </a:p>
+          <a:p>
+            <a:pPr>
+              <a:spcAft>
+                <a:spcPts val="800"/>
+              </a:spcAft>
+            </a:pPr>
+            <a:r>
+              <a:rPr sz="2000" b="0" i="0">
+                <a:solidFill>
+                  <a:srgbClr val="333333"/>
+                </a:solidFill>
+                <a:latin typeface="Calibri"/>
+              </a:rPr>
+              <a:t>–   Su única razón de existir es que una persona de afuera intente usarlo delante de ustedes </a:t>
+            </a:r>
+            <a:r>
+              <a:rPr sz="2000" b="1" i="0">
+                <a:solidFill>
+                  <a:srgbClr val="333333"/>
+                </a:solidFill>
+                <a:latin typeface="Calibri"/>
+              </a:rPr>
+              <a:t>y que ustedes se queden callados</a:t>
+            </a:r>
+            <a:r>
+              <a:rPr sz="2000" b="0" i="0">
+                <a:solidFill>
+                  <a:srgbClr val="333333"/>
+                </a:solidFill>
+                <a:latin typeface="Calibri"/>
+              </a:rPr>
+              <a:t> — el silencio del equipo es parte del método, no una cortesía.</a:t>
+            </a:r>
+          </a:p>
+        </p:txBody>
+      </p:sp>
+      <p:sp>
+        <p:nvSpPr>
+          <p:cNvPr id="6" name="TextBox 5"/>
+          <p:cNvSpPr txBox="1"/>
+          <p:nvPr/>
+        </p:nvSpPr>
+        <p:spPr>
+          <a:xfrm>
+            <a:off x="11185855" y="6473952"/>
+            <a:ext cx="640080" cy="274320"/>
+          </a:xfrm>
+          <a:prstGeom prst="rect">
+            <a:avLst/>
+          </a:prstGeom>
+          <a:noFill/>
+        </p:spPr>
+        <p:txBody>
+          <a:bodyPr wrap="square">
+            <a:spAutoFit/>
+          </a:bodyPr>
+          <a:lstStyle/>
+          <a:p>
+            <a:pPr algn="r"/>
+            <a:r>
+              <a:rPr sz="1100" b="0" i="0">
+                <a:solidFill>
+                  <a:srgbClr val="666666"/>
+                </a:solidFill>
+                <a:latin typeface="Calibri"/>
+              </a:rPr>
+              <a:t>13</a:t>
+            </a:r>
+          </a:p>
+        </p:txBody>
+      </p:sp>
+    </p:spTree>
+  </p:cSld>
+  <p:clrMapOvr>
+    <a:masterClrMapping/>
+  </p:clrMapOvr>
+</p:sld>
+</file>
+
+<file path=ppt/slides/slide14.xml><?xml version="1.0" encoding="utf-8"?>
+<p:sld xmlns:a="http://schemas.openxmlformats.org/drawingml/2006/main" xmlns:p="http://schemas.openxmlformats.org/presentationml/2006/main" xmlns:r="http://schemas.openxmlformats.org/officeDocument/2006/relationships">
+  <p:cSld>
+    <p:bg>
+      <p:bgPr>
+        <a:solidFill>
+          <a:srgbClr val="FFFFFF"/>
+        </a:solidFill>
+        <a:effectLst/>
+      </p:bgPr>
+    </p:bg>
+    <p:spTree>
+      <p:nvGrpSpPr>
+        <p:cNvPr id="1" name=""/>
+        <p:cNvGrpSpPr/>
+        <p:nvPr/>
+      </p:nvGrpSpPr>
+      <p:grpSpPr/>
+      <p:sp>
+        <p:nvSpPr>
+          <p:cNvPr id="2" name="Rectangle 1"/>
+          <p:cNvSpPr/>
+          <p:nvPr/>
+        </p:nvSpPr>
+        <p:spPr>
+          <a:xfrm>
+            <a:off x="0" y="0"/>
+            <a:ext cx="12191695" cy="960120"/>
+          </a:xfrm>
+          <a:prstGeom prst="rect">
+            <a:avLst/>
+          </a:prstGeom>
+          <a:solidFill>
+            <a:srgbClr val="095292"/>
+          </a:solidFill>
+          <a:ln>
+            <a:noFill/>
+          </a:ln>
+        </p:spPr>
+        <p:style>
+          <a:lnRef idx="1">
+            <a:schemeClr val="accent1"/>
+          </a:lnRef>
+          <a:fillRef idx="3">
+            <a:schemeClr val="accent1"/>
+          </a:fillRef>
+          <a:effectRef idx="2">
+            <a:schemeClr val="accent1"/>
+          </a:effectRef>
+          <a:fontRef idx="minor">
+            <a:schemeClr val="lt1"/>
+          </a:fontRef>
+        </p:style>
+        <p:txBody>
+          <a:bodyPr rtlCol="0" anchor="ctr"/>
+          <a:lstStyle/>
+          <a:p>
             <a:pPr algn="ctr"/>
+          </a:p>
+        </p:txBody>
+      </p:sp>
+      <p:sp>
+        <p:nvSpPr>
+          <p:cNvPr id="3" name="Rectangle 2"/>
+          <p:cNvSpPr/>
+          <p:nvPr/>
+        </p:nvSpPr>
+        <p:spPr>
+          <a:xfrm>
+            <a:off x="0" y="960120"/>
+            <a:ext cx="12191695" cy="41148"/>
+          </a:xfrm>
+          <a:prstGeom prst="rect">
+            <a:avLst/>
+          </a:prstGeom>
+          <a:solidFill>
+            <a:srgbClr val="FFD000"/>
+          </a:solidFill>
+          <a:ln>
+            <a:noFill/>
+          </a:ln>
+        </p:spPr>
+        <p:style>
+          <a:lnRef idx="1">
+            <a:schemeClr val="accent1"/>
+          </a:lnRef>
+          <a:fillRef idx="3">
+            <a:schemeClr val="accent1"/>
+          </a:fillRef>
+          <a:effectRef idx="2">
+            <a:schemeClr val="accent1"/>
+          </a:effectRef>
+          <a:fontRef idx="minor">
+            <a:schemeClr val="lt1"/>
+          </a:fontRef>
+        </p:style>
+        <p:txBody>
+          <a:bodyPr rtlCol="0" anchor="ctr"/>
+          <a:lstStyle/>
+          <a:p>
+            <a:pPr algn="ctr"/>
+          </a:p>
+        </p:txBody>
+      </p:sp>
+      <p:sp>
+        <p:nvSpPr>
+          <p:cNvPr id="4" name="TextBox 3"/>
+          <p:cNvSpPr txBox="1"/>
+          <p:nvPr/>
+        </p:nvSpPr>
+        <p:spPr>
+          <a:xfrm>
+            <a:off x="457200" y="164592"/>
+            <a:ext cx="11277295" cy="502920"/>
+          </a:xfrm>
+          <a:prstGeom prst="rect">
+            <a:avLst/>
+          </a:prstGeom>
+          <a:noFill/>
+        </p:spPr>
+        <p:txBody>
+          <a:bodyPr wrap="square">
+            <a:spAutoFit/>
+          </a:bodyPr>
+          <a:lstStyle/>
+          <a:p>
+            <a:r>
+              <a:rPr sz="2600" b="1" i="0">
+                <a:solidFill>
+                  <a:srgbClr val="FFFFFF"/>
+                </a:solidFill>
+                <a:latin typeface="Calibri"/>
+              </a:rPr>
+              <a:t>Fidelidad: cada nivel responde una pregunta distinta (1/2)</a:t>
+            </a:r>
+          </a:p>
+        </p:txBody>
+      </p:sp>
+      <p:sp>
+        <p:nvSpPr>
+          <p:cNvPr id="5" name="TextBox 4"/>
+          <p:cNvSpPr txBox="1"/>
+          <p:nvPr/>
+        </p:nvSpPr>
+        <p:spPr>
+          <a:xfrm>
+            <a:off x="457200" y="1170432"/>
+            <a:ext cx="11277295" cy="5230368"/>
+          </a:xfrm>
+          <a:prstGeom prst="rect">
+            <a:avLst/>
+          </a:prstGeom>
+          <a:noFill/>
+        </p:spPr>
+        <p:txBody>
+          <a:bodyPr wrap="square">
+            <a:spAutoFit/>
+          </a:bodyPr>
+          <a:lstStyle/>
+          <a:p>
+            <a:pPr>
+              <a:spcAft>
+                <a:spcPts val="800"/>
+              </a:spcAft>
+            </a:pPr>
+            <a:r>
+              <a:rPr sz="2000" b="0" i="0">
+                <a:solidFill>
+                  <a:srgbClr val="333333"/>
+                </a:solidFill>
+                <a:latin typeface="Calibri"/>
+              </a:rPr>
+              <a:t>–   La tabla de fidelidad no es una escala de calidad, y hay que decirlo explícitamente porque el estudiante la va a leer como «de peor a mejor». </a:t>
+            </a:r>
             <a:r>
               <a:rPr sz="2000" b="1" i="0">
                 <a:solidFill>
-                  <a:srgbClr val="269CCB"/>
-                </a:solidFill>
-                <a:latin typeface="Calibri"/>
-              </a:rPr>
-              <a:t>Un prototipo no es una maqueta: es una pregunta, y por eso se hace feo a propósito</a:t>
+                  <a:srgbClr val="333333"/>
+                </a:solidFill>
+                <a:latin typeface="Calibri"/>
+              </a:rPr>
+              <a:t>Es una escala de preguntas</a:t>
+            </a:r>
+            <a:r>
+              <a:rPr sz="2000" b="0" i="0">
+                <a:solidFill>
+                  <a:srgbClr val="333333"/>
+                </a:solidFill>
+                <a:latin typeface="Calibri"/>
+              </a:rPr>
+              <a:t>: cada nivel responde una pregunta distinta y cuesta un orden de magnitud más cambiarlo que el anterior. </a:t>
+            </a:r>
+            <a:r>
+              <a:rPr sz="2000" b="1" i="0">
+                <a:solidFill>
+                  <a:srgbClr val="333333"/>
+                </a:solidFill>
+                <a:latin typeface="Calibri"/>
+              </a:rPr>
+              <a:t>Baja fidelidad</a:t>
+            </a:r>
+            <a:r>
+              <a:rPr sz="2000" b="0" i="0">
+                <a:solidFill>
+                  <a:srgbClr val="333333"/>
+                </a:solidFill>
+                <a:latin typeface="Calibri"/>
+              </a:rPr>
+              <a:t> —papel, Excalidraw— responde *¿el flujo tiene sentido?, ¿la gente entiende qué hacer?*</a:t>
+            </a:r>
+          </a:p>
+          <a:p>
+            <a:pPr>
+              <a:spcAft>
+                <a:spcPts val="800"/>
+              </a:spcAft>
+            </a:pPr>
+            <a:r>
+              <a:rPr sz="2000" b="0" i="0">
+                <a:solidFill>
+                  <a:srgbClr val="333333"/>
+                </a:solidFill>
+                <a:latin typeface="Calibri"/>
+              </a:rPr>
+              <a:t>–   Y se cambia en un minuto. </a:t>
+            </a:r>
+            <a:r>
+              <a:rPr sz="2000" b="1" i="0">
+                <a:solidFill>
+                  <a:srgbClr val="333333"/>
+                </a:solidFill>
+                <a:latin typeface="Calibri"/>
+              </a:rPr>
+              <a:t>Media</a:t>
+            </a:r>
+            <a:r>
+              <a:rPr sz="2000" b="0" i="0">
+                <a:solidFill>
+                  <a:srgbClr val="333333"/>
+                </a:solidFill>
+                <a:latin typeface="Calibri"/>
+              </a:rPr>
+              <a:t> —draw.io, diapositivas enlazadas— responde *¿se puede completar la tarea sin ayuda?, ¿faltan pasos?*, y se cambia en minutos. </a:t>
+            </a:r>
+            <a:r>
+              <a:rPr sz="2000" b="1" i="0">
+                <a:solidFill>
+                  <a:srgbClr val="333333"/>
+                </a:solidFill>
+                <a:latin typeface="Calibri"/>
+              </a:rPr>
+              <a:t>Alta</a:t>
+            </a:r>
+            <a:r>
+              <a:rPr sz="2000" b="0" i="0">
+                <a:solidFill>
+                  <a:srgbClr val="333333"/>
+                </a:solidFill>
+                <a:latin typeface="Calibri"/>
+              </a:rPr>
+              <a:t> —Canva, herramientas de diseño— responde *¿se ve confiable?*, cuesta horas</a:t>
+            </a:r>
+          </a:p>
+          <a:p>
+            <a:pPr>
+              <a:spcAft>
+                <a:spcPts val="800"/>
+              </a:spcAft>
+            </a:pPr>
+            <a:r>
+              <a:rPr sz="2000" b="0" i="0">
+                <a:solidFill>
+                  <a:srgbClr val="333333"/>
+                </a:solidFill>
+                <a:latin typeface="Calibri"/>
+              </a:rPr>
+              <a:t>–   Y tiene el efecto secundario de la paradoja: la gente deja de criticarlo. </a:t>
+            </a:r>
+            <a:r>
+              <a:rPr sz="2000" b="1" i="0">
+                <a:solidFill>
+                  <a:srgbClr val="333333"/>
+                </a:solidFill>
+                <a:latin typeface="Calibri"/>
+              </a:rPr>
+              <a:t>Funcional</a:t>
+            </a:r>
+            <a:r>
+              <a:rPr sz="2000" b="0" i="0">
+                <a:solidFill>
+                  <a:srgbClr val="333333"/>
+                </a:solidFill>
+                <a:latin typeface="Calibri"/>
+              </a:rPr>
+              <a:t> ya no es prototipo: es construcción, y responde *¿aguanta?, ¿sirve en el celular viejo?*.</a:t>
+            </a:r>
+          </a:p>
+        </p:txBody>
+      </p:sp>
+      <p:sp>
+        <p:nvSpPr>
+          <p:cNvPr id="6" name="TextBox 5"/>
+          <p:cNvSpPr txBox="1"/>
+          <p:nvPr/>
+        </p:nvSpPr>
+        <p:spPr>
+          <a:xfrm>
+            <a:off x="11185855" y="6473952"/>
+            <a:ext cx="640080" cy="274320"/>
+          </a:xfrm>
+          <a:prstGeom prst="rect">
+            <a:avLst/>
+          </a:prstGeom>
+          <a:noFill/>
+        </p:spPr>
+        <p:txBody>
+          <a:bodyPr wrap="square">
+            <a:spAutoFit/>
+          </a:bodyPr>
+          <a:lstStyle/>
+          <a:p>
+            <a:pPr algn="r"/>
+            <a:r>
+              <a:rPr sz="1100" b="0" i="0">
+                <a:solidFill>
+                  <a:srgbClr val="666666"/>
+                </a:solidFill>
+                <a:latin typeface="Calibri"/>
+              </a:rPr>
+              <a:t>14</a:t>
+            </a:r>
+          </a:p>
+        </p:txBody>
+      </p:sp>
+    </p:spTree>
+  </p:cSld>
+  <p:clrMapOvr>
+    <a:masterClrMapping/>
+  </p:clrMapOvr>
+</p:sld>
+</file>
+
+<file path=ppt/slides/slide15.xml><?xml version="1.0" encoding="utf-8"?>
+<p:sld xmlns:a="http://schemas.openxmlformats.org/drawingml/2006/main" xmlns:p="http://schemas.openxmlformats.org/presentationml/2006/main" xmlns:r="http://schemas.openxmlformats.org/officeDocument/2006/relationships">
+  <p:cSld>
+    <p:bg>
+      <p:bgPr>
+        <a:solidFill>
+          <a:srgbClr val="FFFFFF"/>
+        </a:solidFill>
+        <a:effectLst/>
+      </p:bgPr>
+    </p:bg>
+    <p:spTree>
+      <p:nvGrpSpPr>
+        <p:cNvPr id="1" name=""/>
+        <p:cNvGrpSpPr/>
+        <p:nvPr/>
+      </p:nvGrpSpPr>
+      <p:grpSpPr/>
+      <p:sp>
+        <p:nvSpPr>
+          <p:cNvPr id="2" name="Rectangle 1"/>
+          <p:cNvSpPr/>
+          <p:nvPr/>
+        </p:nvSpPr>
+        <p:spPr>
+          <a:xfrm>
+            <a:off x="0" y="0"/>
+            <a:ext cx="12191695" cy="960120"/>
+          </a:xfrm>
+          <a:prstGeom prst="rect">
+            <a:avLst/>
+          </a:prstGeom>
+          <a:solidFill>
+            <a:srgbClr val="095292"/>
+          </a:solidFill>
+          <a:ln>
+            <a:noFill/>
+          </a:ln>
+        </p:spPr>
+        <p:style>
+          <a:lnRef idx="1">
+            <a:schemeClr val="accent1"/>
+          </a:lnRef>
+          <a:fillRef idx="3">
+            <a:schemeClr val="accent1"/>
+          </a:fillRef>
+          <a:effectRef idx="2">
+            <a:schemeClr val="accent1"/>
+          </a:effectRef>
+          <a:fontRef idx="minor">
+            <a:schemeClr val="lt1"/>
+          </a:fontRef>
+        </p:style>
+        <p:txBody>
+          <a:bodyPr rtlCol="0" anchor="ctr"/>
+          <a:lstStyle/>
+          <a:p>
+            <a:pPr algn="ctr"/>
+          </a:p>
+        </p:txBody>
+      </p:sp>
+      <p:sp>
+        <p:nvSpPr>
+          <p:cNvPr id="3" name="Rectangle 2"/>
+          <p:cNvSpPr/>
+          <p:nvPr/>
+        </p:nvSpPr>
+        <p:spPr>
+          <a:xfrm>
+            <a:off x="0" y="960120"/>
+            <a:ext cx="12191695" cy="41148"/>
+          </a:xfrm>
+          <a:prstGeom prst="rect">
+            <a:avLst/>
+          </a:prstGeom>
+          <a:solidFill>
+            <a:srgbClr val="FFD000"/>
+          </a:solidFill>
+          <a:ln>
+            <a:noFill/>
+          </a:ln>
+        </p:spPr>
+        <p:style>
+          <a:lnRef idx="1">
+            <a:schemeClr val="accent1"/>
+          </a:lnRef>
+          <a:fillRef idx="3">
+            <a:schemeClr val="accent1"/>
+          </a:fillRef>
+          <a:effectRef idx="2">
+            <a:schemeClr val="accent1"/>
+          </a:effectRef>
+          <a:fontRef idx="minor">
+            <a:schemeClr val="lt1"/>
+          </a:fontRef>
+        </p:style>
+        <p:txBody>
+          <a:bodyPr rtlCol="0" anchor="ctr"/>
+          <a:lstStyle/>
+          <a:p>
+            <a:pPr algn="ctr"/>
+          </a:p>
+        </p:txBody>
+      </p:sp>
+      <p:sp>
+        <p:nvSpPr>
+          <p:cNvPr id="4" name="TextBox 3"/>
+          <p:cNvSpPr txBox="1"/>
+          <p:nvPr/>
+        </p:nvSpPr>
+        <p:spPr>
+          <a:xfrm>
+            <a:off x="457200" y="164592"/>
+            <a:ext cx="11277295" cy="502920"/>
+          </a:xfrm>
+          <a:prstGeom prst="rect">
+            <a:avLst/>
+          </a:prstGeom>
+          <a:noFill/>
+        </p:spPr>
+        <p:txBody>
+          <a:bodyPr wrap="square">
+            <a:spAutoFit/>
+          </a:bodyPr>
+          <a:lstStyle/>
+          <a:p>
+            <a:r>
+              <a:rPr sz="2600" b="1" i="0">
+                <a:solidFill>
+                  <a:srgbClr val="FFFFFF"/>
+                </a:solidFill>
+                <a:latin typeface="Calibri"/>
+              </a:rPr>
+              <a:t>Fidelidad: cada nivel responde una pregunta distinta (2/2)</a:t>
+            </a:r>
+          </a:p>
+        </p:txBody>
+      </p:sp>
+      <p:sp>
+        <p:nvSpPr>
+          <p:cNvPr id="5" name="TextBox 4"/>
+          <p:cNvSpPr txBox="1"/>
+          <p:nvPr/>
+        </p:nvSpPr>
+        <p:spPr>
+          <a:xfrm>
+            <a:off x="457200" y="1170432"/>
+            <a:ext cx="11277295" cy="5230368"/>
+          </a:xfrm>
+          <a:prstGeom prst="rect">
+            <a:avLst/>
+          </a:prstGeom>
+          <a:noFill/>
+        </p:spPr>
+        <p:txBody>
+          <a:bodyPr wrap="square">
+            <a:spAutoFit/>
+          </a:bodyPr>
+          <a:lstStyle/>
+          <a:p>
+            <a:pPr>
+              <a:spcAft>
+                <a:spcPts val="800"/>
+              </a:spcAft>
+            </a:pPr>
+            <a:r>
+              <a:rPr sz="2000" b="0" i="0">
+                <a:solidFill>
+                  <a:srgbClr val="333333"/>
+                </a:solidFill>
+                <a:latin typeface="Calibri"/>
+              </a:rPr>
+              <a:t>–   La regla del curso, que hay que dejar clara para que nadie pierda el fin de semana: </a:t>
+            </a:r>
+            <a:r>
+              <a:rPr sz="2000" b="1" i="0">
+                <a:solidFill>
+                  <a:srgbClr val="333333"/>
+                </a:solidFill>
+                <a:latin typeface="Calibri"/>
+              </a:rPr>
+              <a:t>el prototipo del corte 2 es de baja o media fidelidad</a:t>
+            </a:r>
+            <a:r>
+              <a:rPr sz="2000" b="0" i="0">
+                <a:solidFill>
+                  <a:srgbClr val="333333"/>
+                </a:solidFill>
+                <a:latin typeface="Calibri"/>
+              </a:rPr>
+              <a:t>.</a:t>
+            </a:r>
+          </a:p>
+          <a:p>
+            <a:pPr>
+              <a:spcAft>
+                <a:spcPts val="800"/>
+              </a:spcAft>
+            </a:pPr>
+            <a:r>
+              <a:rPr sz="2000" b="0" i="0">
+                <a:solidFill>
+                  <a:srgbClr val="333333"/>
+                </a:solidFill>
+                <a:latin typeface="Calibri"/>
+              </a:rPr>
+              <a:t>–   La alta aparece en la Clase 14, y solo para la presentación final.</a:t>
+            </a:r>
+          </a:p>
+          <a:p>
+            <a:pPr>
+              <a:spcAft>
+                <a:spcPts val="800"/>
+              </a:spcAft>
+            </a:pPr>
+            <a:r>
+              <a:rPr sz="2000" b="0" i="0">
+                <a:solidFill>
+                  <a:srgbClr val="333333"/>
+                </a:solidFill>
+                <a:latin typeface="Calibri"/>
+              </a:rPr>
+              <a:t>–   Un equipo que llega a la Clase 11 con una pantalla preciosa y sin estado de error entendió mal la sesión.</a:t>
+            </a:r>
+          </a:p>
+          <a:p>
+            <a:pPr>
+              <a:spcAft>
+                <a:spcPts val="800"/>
+              </a:spcAft>
+            </a:pPr>
+            <a:r>
+              <a:rPr sz="2000" b="0" i="0">
+                <a:solidFill>
+                  <a:srgbClr val="333333"/>
+                </a:solidFill>
+                <a:latin typeface="Calibri"/>
+              </a:rPr>
+              <a:t>–   Vale la pena conectarlo con la curva de la sesión 7: los niveles de fidelidad son esa misma curva vista desde el diseño.</a:t>
+            </a:r>
+          </a:p>
+          <a:p>
+            <a:pPr>
+              <a:spcAft>
+                <a:spcPts val="800"/>
+              </a:spcAft>
+            </a:pPr>
+            <a:r>
+              <a:rPr sz="2000" b="0" i="0">
+                <a:solidFill>
+                  <a:srgbClr val="333333"/>
+                </a:solidFill>
+                <a:latin typeface="Calibri"/>
+              </a:rPr>
+              <a:t>–   Prototipar en baja fidelidad es exactamente «descubrir el error en la fase donde cuesta un borrador».</a:t>
+            </a:r>
+          </a:p>
+        </p:txBody>
+      </p:sp>
+      <p:sp>
+        <p:nvSpPr>
+          <p:cNvPr id="6" name="TextBox 5"/>
+          <p:cNvSpPr txBox="1"/>
+          <p:nvPr/>
+        </p:nvSpPr>
+        <p:spPr>
+          <a:xfrm>
+            <a:off x="11185855" y="6473952"/>
+            <a:ext cx="640080" cy="274320"/>
+          </a:xfrm>
+          <a:prstGeom prst="rect">
+            <a:avLst/>
+          </a:prstGeom>
+          <a:noFill/>
+        </p:spPr>
+        <p:txBody>
+          <a:bodyPr wrap="square">
+            <a:spAutoFit/>
+          </a:bodyPr>
+          <a:lstStyle/>
+          <a:p>
+            <a:pPr algn="r"/>
+            <a:r>
+              <a:rPr sz="1100" b="0" i="0">
+                <a:solidFill>
+                  <a:srgbClr val="666666"/>
+                </a:solidFill>
+                <a:latin typeface="Calibri"/>
+              </a:rPr>
+              <a:t>15</a:t>
+            </a:r>
+          </a:p>
+        </p:txBody>
+      </p:sp>
+    </p:spTree>
+  </p:cSld>
+  <p:clrMapOvr>
+    <a:masterClrMapping/>
+  </p:clrMapOvr>
+</p:sld>
+</file>
+
+<file path=ppt/slides/slide16.xml><?xml version="1.0" encoding="utf-8"?>
+<p:sld xmlns:a="http://schemas.openxmlformats.org/drawingml/2006/main" xmlns:p="http://schemas.openxmlformats.org/presentationml/2006/main" xmlns:r="http://schemas.openxmlformats.org/officeDocument/2006/relationships">
+  <p:cSld>
+    <p:bg>
+      <p:bgPr>
+        <a:solidFill>
+          <a:srgbClr val="FFFFFF"/>
+        </a:solidFill>
+        <a:effectLst/>
+      </p:bgPr>
+    </p:bg>
+    <p:spTree>
+      <p:nvGrpSpPr>
+        <p:cNvPr id="1" name=""/>
+        <p:cNvGrpSpPr/>
+        <p:nvPr/>
+      </p:nvGrpSpPr>
+      <p:grpSpPr/>
+      <p:sp>
+        <p:nvSpPr>
+          <p:cNvPr id="2" name="Rectangle 1"/>
+          <p:cNvSpPr/>
+          <p:nvPr/>
+        </p:nvSpPr>
+        <p:spPr>
+          <a:xfrm>
+            <a:off x="0" y="0"/>
+            <a:ext cx="12191695" cy="960120"/>
+          </a:xfrm>
+          <a:prstGeom prst="rect">
+            <a:avLst/>
+          </a:prstGeom>
+          <a:solidFill>
+            <a:srgbClr val="095292"/>
+          </a:solidFill>
+          <a:ln>
+            <a:noFill/>
+          </a:ln>
+        </p:spPr>
+        <p:style>
+          <a:lnRef idx="1">
+            <a:schemeClr val="accent1"/>
+          </a:lnRef>
+          <a:fillRef idx="3">
+            <a:schemeClr val="accent1"/>
+          </a:fillRef>
+          <a:effectRef idx="2">
+            <a:schemeClr val="accent1"/>
+          </a:effectRef>
+          <a:fontRef idx="minor">
+            <a:schemeClr val="lt1"/>
+          </a:fontRef>
+        </p:style>
+        <p:txBody>
+          <a:bodyPr rtlCol="0" anchor="ctr"/>
+          <a:lstStyle/>
+          <a:p>
+            <a:pPr algn="ctr"/>
+          </a:p>
+        </p:txBody>
+      </p:sp>
+      <p:sp>
+        <p:nvSpPr>
+          <p:cNvPr id="3" name="Rectangle 2"/>
+          <p:cNvSpPr/>
+          <p:nvPr/>
+        </p:nvSpPr>
+        <p:spPr>
+          <a:xfrm>
+            <a:off x="0" y="960120"/>
+            <a:ext cx="12191695" cy="41148"/>
+          </a:xfrm>
+          <a:prstGeom prst="rect">
+            <a:avLst/>
+          </a:prstGeom>
+          <a:solidFill>
+            <a:srgbClr val="FFD000"/>
+          </a:solidFill>
+          <a:ln>
+            <a:noFill/>
+          </a:ln>
+        </p:spPr>
+        <p:style>
+          <a:lnRef idx="1">
+            <a:schemeClr val="accent1"/>
+          </a:lnRef>
+          <a:fillRef idx="3">
+            <a:schemeClr val="accent1"/>
+          </a:fillRef>
+          <a:effectRef idx="2">
+            <a:schemeClr val="accent1"/>
+          </a:effectRef>
+          <a:fontRef idx="minor">
+            <a:schemeClr val="lt1"/>
+          </a:fontRef>
+        </p:style>
+        <p:txBody>
+          <a:bodyPr rtlCol="0" anchor="ctr"/>
+          <a:lstStyle/>
+          <a:p>
+            <a:pPr algn="ctr"/>
+          </a:p>
+        </p:txBody>
+      </p:sp>
+      <p:sp>
+        <p:nvSpPr>
+          <p:cNvPr id="4" name="TextBox 3"/>
+          <p:cNvSpPr txBox="1"/>
+          <p:nvPr/>
+        </p:nvSpPr>
+        <p:spPr>
+          <a:xfrm>
+            <a:off x="457200" y="164592"/>
+            <a:ext cx="11277295" cy="502920"/>
+          </a:xfrm>
+          <a:prstGeom prst="rect">
+            <a:avLst/>
+          </a:prstGeom>
+          <a:noFill/>
+        </p:spPr>
+        <p:txBody>
+          <a:bodyPr wrap="square">
+            <a:spAutoFit/>
+          </a:bodyPr>
+          <a:lstStyle/>
+          <a:p>
+            <a:r>
+              <a:rPr sz="2600" b="1" i="0">
+                <a:solidFill>
+                  <a:srgbClr val="FFFFFF"/>
+                </a:solidFill>
+                <a:latin typeface="Calibri"/>
+              </a:rPr>
+              <a:t>Los cinco pasos de una pantalla, y el estado de error (1/2)</a:t>
+            </a:r>
+          </a:p>
+        </p:txBody>
+      </p:sp>
+      <p:sp>
+        <p:nvSpPr>
+          <p:cNvPr id="5" name="TextBox 4"/>
+          <p:cNvSpPr txBox="1"/>
+          <p:nvPr/>
+        </p:nvSpPr>
+        <p:spPr>
+          <a:xfrm>
+            <a:off x="457200" y="1170432"/>
+            <a:ext cx="11277295" cy="5230368"/>
+          </a:xfrm>
+          <a:prstGeom prst="rect">
+            <a:avLst/>
+          </a:prstGeom>
+          <a:noFill/>
+        </p:spPr>
+        <p:txBody>
+          <a:bodyPr wrap="square">
+            <a:spAutoFit/>
+          </a:bodyPr>
+          <a:lstStyle/>
+          <a:p>
+            <a:pPr>
+              <a:spcAft>
+                <a:spcPts val="800"/>
+              </a:spcAft>
+            </a:pPr>
+            <a:r>
+              <a:rPr sz="2000" b="0" i="0">
+                <a:solidFill>
+                  <a:srgbClr val="333333"/>
+                </a:solidFill>
+                <a:latin typeface="Calibri"/>
+              </a:rPr>
+              <a:t>–   Estos cinco pasos son el método operativo del taller y cada uno esconde una decisión de diseño. </a:t>
+            </a:r>
+            <a:r>
+              <a:rPr sz="2000" b="1" i="0">
+                <a:solidFill>
+                  <a:srgbClr val="333333"/>
+                </a:solidFill>
+                <a:latin typeface="Calibri"/>
+              </a:rPr>
+              <a:t>Escribir arriba para qué existe la pantalla</a:t>
+            </a:r>
+            <a:r>
+              <a:rPr sz="2000" b="0" i="0">
+                <a:solidFill>
+                  <a:srgbClr val="333333"/>
+                </a:solidFill>
+                <a:latin typeface="Calibri"/>
+              </a:rPr>
+              <a:t> parece trivial y es un filtro potente: si la frase no se puede escribir, la pantalla está haciendo dos cosas y hay que partirla.</a:t>
+            </a:r>
+          </a:p>
+          <a:p>
+            <a:pPr>
+              <a:spcAft>
+                <a:spcPts val="800"/>
+              </a:spcAft>
+            </a:pPr>
+            <a:r>
+              <a:rPr sz="2000" b="0" i="0">
+                <a:solidFill>
+                  <a:srgbClr val="333333"/>
+                </a:solidFill>
+                <a:latin typeface="Calibri"/>
+              </a:rPr>
+              <a:t>–   Es el equivalente, en diseño, del «problema en una frase» de la sesión 6. </a:t>
+            </a:r>
+            <a:r>
+              <a:rPr sz="2000" b="1" i="0">
+                <a:solidFill>
+                  <a:srgbClr val="333333"/>
+                </a:solidFill>
+                <a:latin typeface="Calibri"/>
+              </a:rPr>
+              <a:t>Un solo camino principal, visible.</a:t>
+            </a:r>
+            <a:r>
+              <a:rPr sz="2000" b="0" i="0">
+                <a:solidFill>
+                  <a:srgbClr val="333333"/>
+                </a:solidFill>
+                <a:latin typeface="Calibri"/>
+              </a:rPr>
+              <a:t> Lo que la persona va a hacer el 90 % de las veces va grande y primero; todo lo demás, más pequeño o más abajo.</a:t>
+            </a:r>
+          </a:p>
+          <a:p>
+            <a:pPr>
+              <a:spcAft>
+                <a:spcPts val="800"/>
+              </a:spcAft>
+            </a:pPr>
+            <a:r>
+              <a:rPr sz="2000" b="0" i="0">
+                <a:solidFill>
+                  <a:srgbClr val="333333"/>
+                </a:solidFill>
+                <a:latin typeface="Calibri"/>
+              </a:rPr>
+              <a:t>–   El error típico es la pantalla democrática, donde ocho opciones tienen el mismo tamaño y el usuario no sabe por dónde empezar. **Textos reales</a:t>
+            </a:r>
+          </a:p>
+          <a:p>
+            <a:pPr>
+              <a:spcAft>
+                <a:spcPts val="800"/>
+              </a:spcAft>
+            </a:pPr>
+            <a:r>
+              <a:rPr sz="2000" b="0" i="0">
+                <a:solidFill>
+                  <a:srgbClr val="333333"/>
+                </a:solidFill>
+                <a:latin typeface="Calibri"/>
+              </a:rPr>
+              <a:t>–   Nunca relleno.** Esta es la regla que más mejora los prototipos del curso y hay que insistir en ella: escribir «Buscar título» y no «texto aquí».</a:t>
+            </a:r>
+          </a:p>
+          <a:p>
+            <a:pPr>
+              <a:spcAft>
+                <a:spcPts val="800"/>
+              </a:spcAft>
+            </a:pPr>
+            <a:r>
+              <a:rPr sz="2000" b="0" i="0">
+                <a:solidFill>
+                  <a:srgbClr val="333333"/>
+                </a:solidFill>
+                <a:latin typeface="Calibri"/>
+              </a:rPr>
+              <a:t>–   La razón es profunda y conviene decirla: </a:t>
+            </a:r>
+            <a:r>
+              <a:rPr sz="2000" b="1" i="0">
+                <a:solidFill>
+                  <a:srgbClr val="333333"/>
+                </a:solidFill>
+                <a:latin typeface="Calibri"/>
+              </a:rPr>
+              <a:t>los textos falsos esconden los problemas</a:t>
+            </a:r>
+            <a:r>
+              <a:rPr sz="2000" b="0" i="0">
+                <a:solidFill>
+                  <a:srgbClr val="333333"/>
+                </a:solidFill>
+                <a:latin typeface="Calibri"/>
+              </a:rPr>
+              <a:t>.</a:t>
+            </a:r>
+          </a:p>
+        </p:txBody>
+      </p:sp>
+      <p:sp>
+        <p:nvSpPr>
+          <p:cNvPr id="6" name="TextBox 5"/>
+          <p:cNvSpPr txBox="1"/>
+          <p:nvPr/>
+        </p:nvSpPr>
+        <p:spPr>
+          <a:xfrm>
+            <a:off x="11185855" y="6473952"/>
+            <a:ext cx="640080" cy="274320"/>
+          </a:xfrm>
+          <a:prstGeom prst="rect">
+            <a:avLst/>
+          </a:prstGeom>
+          <a:noFill/>
+        </p:spPr>
+        <p:txBody>
+          <a:bodyPr wrap="square">
+            <a:spAutoFit/>
+          </a:bodyPr>
+          <a:lstStyle/>
+          <a:p>
+            <a:pPr algn="r"/>
+            <a:r>
+              <a:rPr sz="1100" b="0" i="0">
+                <a:solidFill>
+                  <a:srgbClr val="666666"/>
+                </a:solidFill>
+                <a:latin typeface="Calibri"/>
+              </a:rPr>
+              <a:t>16</a:t>
+            </a:r>
+          </a:p>
+        </p:txBody>
+      </p:sp>
+    </p:spTree>
+  </p:cSld>
+  <p:clrMapOvr>
+    <a:masterClrMapping/>
+  </p:clrMapOvr>
+</p:sld>
+</file>
+
+<file path=ppt/slides/slide17.xml><?xml version="1.0" encoding="utf-8"?>
+<p:sld xmlns:a="http://schemas.openxmlformats.org/drawingml/2006/main" xmlns:p="http://schemas.openxmlformats.org/presentationml/2006/main" xmlns:r="http://schemas.openxmlformats.org/officeDocument/2006/relationships">
+  <p:cSld>
+    <p:bg>
+      <p:bgPr>
+        <a:solidFill>
+          <a:srgbClr val="FFFFFF"/>
+        </a:solidFill>
+        <a:effectLst/>
+      </p:bgPr>
+    </p:bg>
+    <p:spTree>
+      <p:nvGrpSpPr>
+        <p:cNvPr id="1" name=""/>
+        <p:cNvGrpSpPr/>
+        <p:nvPr/>
+      </p:nvGrpSpPr>
+      <p:grpSpPr/>
+      <p:sp>
+        <p:nvSpPr>
+          <p:cNvPr id="2" name="Rectangle 1"/>
+          <p:cNvSpPr/>
+          <p:nvPr/>
+        </p:nvSpPr>
+        <p:spPr>
+          <a:xfrm>
+            <a:off x="0" y="0"/>
+            <a:ext cx="12191695" cy="960120"/>
+          </a:xfrm>
+          <a:prstGeom prst="rect">
+            <a:avLst/>
+          </a:prstGeom>
+          <a:solidFill>
+            <a:srgbClr val="095292"/>
+          </a:solidFill>
+          <a:ln>
+            <a:noFill/>
+          </a:ln>
+        </p:spPr>
+        <p:style>
+          <a:lnRef idx="1">
+            <a:schemeClr val="accent1"/>
+          </a:lnRef>
+          <a:fillRef idx="3">
+            <a:schemeClr val="accent1"/>
+          </a:fillRef>
+          <a:effectRef idx="2">
+            <a:schemeClr val="accent1"/>
+          </a:effectRef>
+          <a:fontRef idx="minor">
+            <a:schemeClr val="lt1"/>
+          </a:fontRef>
+        </p:style>
+        <p:txBody>
+          <a:bodyPr rtlCol="0" anchor="ctr"/>
+          <a:lstStyle/>
+          <a:p>
+            <a:pPr algn="ctr"/>
+          </a:p>
+        </p:txBody>
+      </p:sp>
+      <p:sp>
+        <p:nvSpPr>
+          <p:cNvPr id="3" name="Rectangle 2"/>
+          <p:cNvSpPr/>
+          <p:nvPr/>
+        </p:nvSpPr>
+        <p:spPr>
+          <a:xfrm>
+            <a:off x="0" y="960120"/>
+            <a:ext cx="12191695" cy="41148"/>
+          </a:xfrm>
+          <a:prstGeom prst="rect">
+            <a:avLst/>
+          </a:prstGeom>
+          <a:solidFill>
+            <a:srgbClr val="FFD000"/>
+          </a:solidFill>
+          <a:ln>
+            <a:noFill/>
+          </a:ln>
+        </p:spPr>
+        <p:style>
+          <a:lnRef idx="1">
+            <a:schemeClr val="accent1"/>
+          </a:lnRef>
+          <a:fillRef idx="3">
+            <a:schemeClr val="accent1"/>
+          </a:fillRef>
+          <a:effectRef idx="2">
+            <a:schemeClr val="accent1"/>
+          </a:effectRef>
+          <a:fontRef idx="minor">
+            <a:schemeClr val="lt1"/>
+          </a:fontRef>
+        </p:style>
+        <p:txBody>
+          <a:bodyPr rtlCol="0" anchor="ctr"/>
+          <a:lstStyle/>
+          <a:p>
+            <a:pPr algn="ctr"/>
+          </a:p>
+        </p:txBody>
+      </p:sp>
+      <p:sp>
+        <p:nvSpPr>
+          <p:cNvPr id="4" name="TextBox 3"/>
+          <p:cNvSpPr txBox="1"/>
+          <p:nvPr/>
+        </p:nvSpPr>
+        <p:spPr>
+          <a:xfrm>
+            <a:off x="457200" y="164592"/>
+            <a:ext cx="11277295" cy="502920"/>
+          </a:xfrm>
+          <a:prstGeom prst="rect">
+            <a:avLst/>
+          </a:prstGeom>
+          <a:noFill/>
+        </p:spPr>
+        <p:txBody>
+          <a:bodyPr wrap="square">
+            <a:spAutoFit/>
+          </a:bodyPr>
+          <a:lstStyle/>
+          <a:p>
+            <a:r>
+              <a:rPr sz="2600" b="1" i="0">
+                <a:solidFill>
+                  <a:srgbClr val="FFFFFF"/>
+                </a:solidFill>
+                <a:latin typeface="Calibri"/>
+              </a:rPr>
+              <a:t>Los cinco pasos de una pantalla, y el estado de error (2/2)</a:t>
+            </a:r>
+          </a:p>
+        </p:txBody>
+      </p:sp>
+      <p:sp>
+        <p:nvSpPr>
+          <p:cNvPr id="5" name="TextBox 4"/>
+          <p:cNvSpPr txBox="1"/>
+          <p:nvPr/>
+        </p:nvSpPr>
+        <p:spPr>
+          <a:xfrm>
+            <a:off x="457200" y="1170432"/>
+            <a:ext cx="11277295" cy="5230368"/>
+          </a:xfrm>
+          <a:prstGeom prst="rect">
+            <a:avLst/>
+          </a:prstGeom>
+          <a:noFill/>
+        </p:spPr>
+        <p:txBody>
+          <a:bodyPr wrap="square">
+            <a:spAutoFit/>
+          </a:bodyPr>
+          <a:lstStyle/>
+          <a:p>
+            <a:pPr>
+              <a:spcAft>
+                <a:spcPts val="800"/>
+              </a:spcAft>
+            </a:pPr>
+            <a:r>
+              <a:rPr sz="2000" b="0" i="0">
+                <a:solidFill>
+                  <a:srgbClr val="333333"/>
+                </a:solidFill>
+                <a:latin typeface="Calibri"/>
+              </a:rPr>
+              <a:t>–   El botón que no se sabe cómo llamar es un botón que no se sabe qué hace, y con relleno ese vacío no se nota hasta que alguien lo usa. </a:t>
+            </a:r>
+            <a:r>
+              <a:rPr sz="2000" b="1" i="0">
+                <a:solidFill>
+                  <a:srgbClr val="333333"/>
+                </a:solidFill>
+                <a:latin typeface="Calibri"/>
+              </a:rPr>
+              <a:t>Dibujar el estado vacío y el de error</a:t>
+            </a:r>
+            <a:r>
+              <a:rPr sz="2000" b="0" i="0">
+                <a:solidFill>
+                  <a:srgbClr val="333333"/>
+                </a:solidFill>
+                <a:latin typeface="Calibri"/>
+              </a:rPr>
+              <a:t> es el paso que casi nadie hace y donde se cae la mayoría de los prototipos.</a:t>
+            </a:r>
+          </a:p>
+          <a:p>
+            <a:pPr>
+              <a:spcAft>
+                <a:spcPts val="800"/>
+              </a:spcAft>
+            </a:pPr>
+            <a:r>
+              <a:rPr sz="2000" b="0" i="0">
+                <a:solidFill>
+                  <a:srgbClr val="333333"/>
+                </a:solidFill>
+                <a:latin typeface="Calibri"/>
+              </a:rPr>
+              <a:t>–   ¿Qué se ve la primera vez, cuando no hay datos?</a:t>
+            </a:r>
+          </a:p>
+          <a:p>
+            <a:pPr>
+              <a:spcAft>
+                <a:spcPts val="800"/>
+              </a:spcAft>
+            </a:pPr>
+            <a:r>
+              <a:rPr sz="2000" b="0" i="0">
+                <a:solidFill>
+                  <a:srgbClr val="333333"/>
+                </a:solidFill>
+                <a:latin typeface="Calibri"/>
+              </a:rPr>
+              <a:t>–   ¿Qué se ve cuando no se encuentra lo que se buscó?</a:t>
+            </a:r>
+          </a:p>
+          <a:p>
+            <a:pPr>
+              <a:spcAft>
+                <a:spcPts val="800"/>
+              </a:spcAft>
+            </a:pPr>
+            <a:r>
+              <a:rPr sz="2000" b="0" i="0">
+                <a:solidFill>
+                  <a:srgbClr val="333333"/>
+                </a:solidFill>
+                <a:latin typeface="Calibri"/>
+              </a:rPr>
+              <a:t>–   ¿Qué se ve cuando algo falla?</a:t>
+            </a:r>
+          </a:p>
+          <a:p>
+            <a:pPr>
+              <a:spcAft>
+                <a:spcPts val="800"/>
+              </a:spcAft>
+            </a:pPr>
+            <a:r>
+              <a:rPr sz="2000" b="0" i="0">
+                <a:solidFill>
+                  <a:srgbClr val="333333"/>
+                </a:solidFill>
+                <a:latin typeface="Calibri"/>
+              </a:rPr>
+              <a:t>–   Un prototipo que solo muestra el camino feliz no sirve para probar nada, porque en la vida real el camino feliz es la minoría de los casos.</a:t>
+            </a:r>
+          </a:p>
+          <a:p>
+            <a:pPr>
+              <a:spcAft>
+                <a:spcPts val="800"/>
+              </a:spcAft>
+            </a:pPr>
+            <a:r>
+              <a:rPr sz="2000" b="0" i="0">
+                <a:solidFill>
+                  <a:srgbClr val="333333"/>
+                </a:solidFill>
+                <a:latin typeface="Calibri"/>
+              </a:rPr>
+              <a:t>–   Aquí hay un puente con la sesión 8: la tarea (3) del plan de validación —«dígame qué haría si el libro que busca no aparece»— exige justamente esta pantalla. </a:t>
+            </a:r>
+            <a:r>
+              <a:rPr sz="2000" b="1" i="0">
+                <a:solidFill>
+                  <a:srgbClr val="333333"/>
+                </a:solidFill>
+                <a:latin typeface="Calibri"/>
+              </a:rPr>
+              <a:t>Decir qué pasa al tocar cada cosa</a:t>
+            </a:r>
+            <a:r>
+              <a:rPr sz="2000" b="0" i="0">
+                <a:solidFill>
+                  <a:srgbClr val="333333"/>
+                </a:solidFill>
+                <a:latin typeface="Calibri"/>
+              </a:rPr>
+              <a:t>: una flecha y una palabra por botón.</a:t>
+            </a:r>
+          </a:p>
+          <a:p>
+            <a:pPr>
+              <a:spcAft>
+                <a:spcPts val="800"/>
+              </a:spcAft>
+            </a:pPr>
+            <a:r>
+              <a:rPr sz="2000" b="0" i="0">
+                <a:solidFill>
+                  <a:srgbClr val="333333"/>
+                </a:solidFill>
+                <a:latin typeface="Calibri"/>
+              </a:rPr>
+              <a:t>–   Un botón sin destino escrito es una decisión que nadie tomó, y en la Clase 12 la va a tomar el usuario por ustedes, mal.</a:t>
+            </a:r>
+          </a:p>
+        </p:txBody>
+      </p:sp>
+      <p:sp>
+        <p:nvSpPr>
+          <p:cNvPr id="6" name="TextBox 5"/>
+          <p:cNvSpPr txBox="1"/>
+          <p:nvPr/>
+        </p:nvSpPr>
+        <p:spPr>
+          <a:xfrm>
+            <a:off x="11185855" y="6473952"/>
+            <a:ext cx="640080" cy="274320"/>
+          </a:xfrm>
+          <a:prstGeom prst="rect">
+            <a:avLst/>
+          </a:prstGeom>
+          <a:noFill/>
+        </p:spPr>
+        <p:txBody>
+          <a:bodyPr wrap="square">
+            <a:spAutoFit/>
+          </a:bodyPr>
+          <a:lstStyle/>
+          <a:p>
+            <a:pPr algn="r"/>
+            <a:r>
+              <a:rPr sz="1100" b="0" i="0">
+                <a:solidFill>
+                  <a:srgbClr val="666666"/>
+                </a:solidFill>
+                <a:latin typeface="Calibri"/>
+              </a:rPr>
+              <a:t>17</a:t>
+            </a:r>
+          </a:p>
+        </p:txBody>
+      </p:sp>
+    </p:spTree>
+  </p:cSld>
+  <p:clrMapOvr>
+    <a:masterClrMapping/>
+  </p:clrMapOvr>
+</p:sld>
+</file>
+
+<file path=ppt/slides/slide18.xml><?xml version="1.0" encoding="utf-8"?>
+<p:sld xmlns:a="http://schemas.openxmlformats.org/drawingml/2006/main" xmlns:p="http://schemas.openxmlformats.org/presentationml/2006/main" xmlns:r="http://schemas.openxmlformats.org/officeDocument/2006/relationships">
+  <p:cSld>
+    <p:bg>
+      <p:bgPr>
+        <a:solidFill>
+          <a:srgbClr val="FFFFFF"/>
+        </a:solidFill>
+        <a:effectLst/>
+      </p:bgPr>
+    </p:bg>
+    <p:spTree>
+      <p:nvGrpSpPr>
+        <p:cNvPr id="1" name=""/>
+        <p:cNvGrpSpPr/>
+        <p:nvPr/>
+      </p:nvGrpSpPr>
+      <p:grpSpPr/>
+      <p:sp>
+        <p:nvSpPr>
+          <p:cNvPr id="2" name="Rectangle 1"/>
+          <p:cNvSpPr/>
+          <p:nvPr/>
+        </p:nvSpPr>
+        <p:spPr>
+          <a:xfrm>
+            <a:off x="0" y="0"/>
+            <a:ext cx="12191695" cy="960120"/>
+          </a:xfrm>
+          <a:prstGeom prst="rect">
+            <a:avLst/>
+          </a:prstGeom>
+          <a:solidFill>
+            <a:srgbClr val="095292"/>
+          </a:solidFill>
+          <a:ln>
+            <a:noFill/>
+          </a:ln>
+        </p:spPr>
+        <p:style>
+          <a:lnRef idx="1">
+            <a:schemeClr val="accent1"/>
+          </a:lnRef>
+          <a:fillRef idx="3">
+            <a:schemeClr val="accent1"/>
+          </a:fillRef>
+          <a:effectRef idx="2">
+            <a:schemeClr val="accent1"/>
+          </a:effectRef>
+          <a:fontRef idx="minor">
+            <a:schemeClr val="lt1"/>
+          </a:fontRef>
+        </p:style>
+        <p:txBody>
+          <a:bodyPr rtlCol="0" anchor="ctr"/>
+          <a:lstStyle/>
+          <a:p>
+            <a:pPr algn="ctr"/>
+          </a:p>
+        </p:txBody>
+      </p:sp>
+      <p:sp>
+        <p:nvSpPr>
+          <p:cNvPr id="3" name="Rectangle 2"/>
+          <p:cNvSpPr/>
+          <p:nvPr/>
+        </p:nvSpPr>
+        <p:spPr>
+          <a:xfrm>
+            <a:off x="0" y="960120"/>
+            <a:ext cx="12191695" cy="41148"/>
+          </a:xfrm>
+          <a:prstGeom prst="rect">
+            <a:avLst/>
+          </a:prstGeom>
+          <a:solidFill>
+            <a:srgbClr val="FFD000"/>
+          </a:solidFill>
+          <a:ln>
+            <a:noFill/>
+          </a:ln>
+        </p:spPr>
+        <p:style>
+          <a:lnRef idx="1">
+            <a:schemeClr val="accent1"/>
+          </a:lnRef>
+          <a:fillRef idx="3">
+            <a:schemeClr val="accent1"/>
+          </a:fillRef>
+          <a:effectRef idx="2">
+            <a:schemeClr val="accent1"/>
+          </a:effectRef>
+          <a:fontRef idx="minor">
+            <a:schemeClr val="lt1"/>
+          </a:fontRef>
+        </p:style>
+        <p:txBody>
+          <a:bodyPr rtlCol="0" anchor="ctr"/>
+          <a:lstStyle/>
+          <a:p>
+            <a:pPr algn="ctr"/>
+          </a:p>
+        </p:txBody>
+      </p:sp>
+      <p:sp>
+        <p:nvSpPr>
+          <p:cNvPr id="4" name="TextBox 3"/>
+          <p:cNvSpPr txBox="1"/>
+          <p:nvPr/>
+        </p:nvSpPr>
+        <p:spPr>
+          <a:xfrm>
+            <a:off x="457200" y="164592"/>
+            <a:ext cx="11277295" cy="502920"/>
+          </a:xfrm>
+          <a:prstGeom prst="rect">
+            <a:avLst/>
+          </a:prstGeom>
+          <a:noFill/>
+        </p:spPr>
+        <p:txBody>
+          <a:bodyPr wrap="square">
+            <a:spAutoFit/>
+          </a:bodyPr>
+          <a:lstStyle/>
+          <a:p>
+            <a:r>
+              <a:rPr sz="2600" b="1" i="0">
+                <a:solidFill>
+                  <a:srgbClr val="FFFFFF"/>
+                </a:solidFill>
+                <a:latin typeface="Calibri"/>
+              </a:rPr>
+              <a:t>Elegir la herramienta por la pregunta, y las dos advertencias (1/2)</a:t>
+            </a:r>
+          </a:p>
+        </p:txBody>
+      </p:sp>
+      <p:sp>
+        <p:nvSpPr>
+          <p:cNvPr id="5" name="TextBox 4"/>
+          <p:cNvSpPr txBox="1"/>
+          <p:nvPr/>
+        </p:nvSpPr>
+        <p:spPr>
+          <a:xfrm>
+            <a:off x="457200" y="1170432"/>
+            <a:ext cx="11277295" cy="5230368"/>
+          </a:xfrm>
+          <a:prstGeom prst="rect">
+            <a:avLst/>
+          </a:prstGeom>
+          <a:noFill/>
+        </p:spPr>
+        <p:txBody>
+          <a:bodyPr wrap="square">
+            <a:spAutoFit/>
+          </a:bodyPr>
+          <a:lstStyle/>
+          <a:p>
+            <a:pPr>
+              <a:spcAft>
+                <a:spcPts val="800"/>
+              </a:spcAft>
+            </a:pPr>
+            <a:r>
+              <a:rPr sz="2000" b="0" i="0">
+                <a:solidFill>
+                  <a:srgbClr val="333333"/>
+                </a:solidFill>
+                <a:latin typeface="Calibri"/>
+              </a:rPr>
+              <a:t>–   La tabla de herramientas hay que recorrerla rápido, con la idea que la ordena: </a:t>
+            </a:r>
+            <a:r>
+              <a:rPr sz="2000" b="1" i="0">
+                <a:solidFill>
+                  <a:srgbClr val="333333"/>
+                </a:solidFill>
+                <a:latin typeface="Calibri"/>
+              </a:rPr>
+              <a:t>la pregunta para elegir no es «¿cuál sé usar?» sino «¿qué quiero responder con esto?»</a:t>
+            </a:r>
+            <a:r>
+              <a:rPr sz="2000" b="0" i="0">
+                <a:solidFill>
+                  <a:srgbClr val="333333"/>
+                </a:solidFill>
+                <a:latin typeface="Calibri"/>
+              </a:rPr>
+              <a:t>.</a:t>
+            </a:r>
+          </a:p>
+          <a:p>
+            <a:pPr>
+              <a:spcAft>
+                <a:spcPts val="800"/>
+              </a:spcAft>
+            </a:pPr>
+            <a:r>
+              <a:rPr sz="2000" b="0" i="0">
+                <a:solidFill>
+                  <a:srgbClr val="333333"/>
+                </a:solidFill>
+                <a:latin typeface="Calibri"/>
+              </a:rPr>
+              <a:t>–   Es la misma lógica de la matriz de la sesión 8 aplicada a herramientas. </a:t>
+            </a:r>
+            <a:r>
+              <a:rPr sz="2000" b="1" i="0">
+                <a:solidFill>
+                  <a:srgbClr val="333333"/>
+                </a:solidFill>
+                <a:latin typeface="Calibri"/>
+              </a:rPr>
+              <a:t>Excalidraw</a:t>
+            </a:r>
+            <a:r>
+              <a:rPr sz="2000" b="0" i="0">
+                <a:solidFill>
+                  <a:srgbClr val="333333"/>
+                </a:solidFill>
+                <a:latin typeface="Calibri"/>
+              </a:rPr>
+              <a:t> para pantallas de baja fidelidad</a:t>
+            </a:r>
+          </a:p>
+          <a:p>
+            <a:pPr>
+              <a:spcAft>
+                <a:spcPts val="800"/>
+              </a:spcAft>
+            </a:pPr>
+            <a:r>
+              <a:rPr sz="2000" b="0" i="0">
+                <a:solidFill>
+                  <a:srgbClr val="333333"/>
+                </a:solidFill>
+                <a:latin typeface="Calibri"/>
+              </a:rPr>
+              <a:t>–   Y su apariencia de dibujo a mano es una ventaja funcional, no un defecto estético. </a:t>
+            </a:r>
+            <a:r>
+              <a:rPr sz="2000" b="1" i="0">
+                <a:solidFill>
+                  <a:srgbClr val="333333"/>
+                </a:solidFill>
+                <a:latin typeface="Calibri"/>
+              </a:rPr>
+              <a:t>draw.io</a:t>
+            </a:r>
+            <a:r>
+              <a:rPr sz="2000" b="0" i="0">
+                <a:solidFill>
+                  <a:srgbClr val="333333"/>
+                </a:solidFill>
+                <a:latin typeface="Calibri"/>
+              </a:rPr>
+              <a:t> para flujos, procesos y diagramas con decisiones —los equipos con proyectos de gestión trabajan aquí—; sus conectores se quedan pegados al mover las cajas</a:t>
+            </a:r>
+          </a:p>
+          <a:p>
+            <a:pPr>
+              <a:spcAft>
+                <a:spcPts val="800"/>
+              </a:spcAft>
+            </a:pPr>
+            <a:r>
+              <a:rPr sz="2000" b="0" i="0">
+                <a:solidFill>
+                  <a:srgbClr val="333333"/>
+                </a:solidFill>
+                <a:latin typeface="Calibri"/>
+              </a:rPr>
+              <a:t>–   Que es exactamente lo que se necesita cuando el flujo cambia diez veces. **Google Slides como prototipo navegable es el truco más útil de la sesión y hay que demostrarlo en vivo</a:t>
+            </a:r>
+          </a:p>
+          <a:p>
+            <a:pPr>
+              <a:spcAft>
+                <a:spcPts val="800"/>
+              </a:spcAft>
+            </a:pPr>
+            <a:r>
+              <a:rPr sz="2000" b="0" i="0">
+                <a:solidFill>
+                  <a:srgbClr val="333333"/>
+                </a:solidFill>
+                <a:latin typeface="Calibri"/>
+              </a:rPr>
+              <a:t>–   No describirlo**: una diapositiva por pantalla, y en cada botón un enlace hacia la diapositiva de destino.</a:t>
+            </a:r>
+          </a:p>
+          <a:p>
+            <a:pPr>
+              <a:spcAft>
+                <a:spcPts val="800"/>
+              </a:spcAft>
+            </a:pPr>
+            <a:r>
+              <a:rPr sz="2000" b="0" i="0">
+                <a:solidFill>
+                  <a:srgbClr val="333333"/>
+                </a:solidFill>
+                <a:latin typeface="Calibri"/>
+              </a:rPr>
+              <a:t>–   En modo presentación se recorre como si funcionara.</a:t>
+            </a:r>
+          </a:p>
+          <a:p>
+            <a:pPr>
+              <a:spcAft>
+                <a:spcPts val="800"/>
+              </a:spcAft>
+            </a:pPr>
+            <a:r>
+              <a:rPr sz="2000" b="0" i="0">
+                <a:solidFill>
+                  <a:srgbClr val="333333"/>
+                </a:solidFill>
+                <a:latin typeface="Calibri"/>
+              </a:rPr>
+              <a:t>–   Con eso un equipo de primer semestre puede probar un flujo completo con un usuario real sin escribir una línea de código.</a:t>
+            </a:r>
+          </a:p>
+        </p:txBody>
+      </p:sp>
+      <p:sp>
+        <p:nvSpPr>
+          <p:cNvPr id="6" name="TextBox 5"/>
+          <p:cNvSpPr txBox="1"/>
+          <p:nvPr/>
+        </p:nvSpPr>
+        <p:spPr>
+          <a:xfrm>
+            <a:off x="11185855" y="6473952"/>
+            <a:ext cx="640080" cy="274320"/>
+          </a:xfrm>
+          <a:prstGeom prst="rect">
+            <a:avLst/>
+          </a:prstGeom>
+          <a:noFill/>
+        </p:spPr>
+        <p:txBody>
+          <a:bodyPr wrap="square">
+            <a:spAutoFit/>
+          </a:bodyPr>
+          <a:lstStyle/>
+          <a:p>
+            <a:pPr algn="r"/>
+            <a:r>
+              <a:rPr sz="1100" b="0" i="0">
+                <a:solidFill>
+                  <a:srgbClr val="666666"/>
+                </a:solidFill>
+                <a:latin typeface="Calibri"/>
+              </a:rPr>
+              <a:t>18</a:t>
+            </a:r>
+          </a:p>
+        </p:txBody>
+      </p:sp>
+    </p:spTree>
+  </p:cSld>
+  <p:clrMapOvr>
+    <a:masterClrMapping/>
+  </p:clrMapOvr>
+</p:sld>
+</file>
+
+<file path=ppt/slides/slide19.xml><?xml version="1.0" encoding="utf-8"?>
+<p:sld xmlns:a="http://schemas.openxmlformats.org/drawingml/2006/main" xmlns:p="http://schemas.openxmlformats.org/presentationml/2006/main" xmlns:r="http://schemas.openxmlformats.org/officeDocument/2006/relationships">
+  <p:cSld>
+    <p:bg>
+      <p:bgPr>
+        <a:solidFill>
+          <a:srgbClr val="FFFFFF"/>
+        </a:solidFill>
+        <a:effectLst/>
+      </p:bgPr>
+    </p:bg>
+    <p:spTree>
+      <p:nvGrpSpPr>
+        <p:cNvPr id="1" name=""/>
+        <p:cNvGrpSpPr/>
+        <p:nvPr/>
+      </p:nvGrpSpPr>
+      <p:grpSpPr/>
+      <p:sp>
+        <p:nvSpPr>
+          <p:cNvPr id="2" name="Rectangle 1"/>
+          <p:cNvSpPr/>
+          <p:nvPr/>
+        </p:nvSpPr>
+        <p:spPr>
+          <a:xfrm>
+            <a:off x="0" y="0"/>
+            <a:ext cx="12191695" cy="960120"/>
+          </a:xfrm>
+          <a:prstGeom prst="rect">
+            <a:avLst/>
+          </a:prstGeom>
+          <a:solidFill>
+            <a:srgbClr val="095292"/>
+          </a:solidFill>
+          <a:ln>
+            <a:noFill/>
+          </a:ln>
+        </p:spPr>
+        <p:style>
+          <a:lnRef idx="1">
+            <a:schemeClr val="accent1"/>
+          </a:lnRef>
+          <a:fillRef idx="3">
+            <a:schemeClr val="accent1"/>
+          </a:fillRef>
+          <a:effectRef idx="2">
+            <a:schemeClr val="accent1"/>
+          </a:effectRef>
+          <a:fontRef idx="minor">
+            <a:schemeClr val="lt1"/>
+          </a:fontRef>
+        </p:style>
+        <p:txBody>
+          <a:bodyPr rtlCol="0" anchor="ctr"/>
+          <a:lstStyle/>
+          <a:p>
+            <a:pPr algn="ctr"/>
+          </a:p>
+        </p:txBody>
+      </p:sp>
+      <p:sp>
+        <p:nvSpPr>
+          <p:cNvPr id="3" name="Rectangle 2"/>
+          <p:cNvSpPr/>
+          <p:nvPr/>
+        </p:nvSpPr>
+        <p:spPr>
+          <a:xfrm>
+            <a:off x="0" y="960120"/>
+            <a:ext cx="12191695" cy="41148"/>
+          </a:xfrm>
+          <a:prstGeom prst="rect">
+            <a:avLst/>
+          </a:prstGeom>
+          <a:solidFill>
+            <a:srgbClr val="FFD000"/>
+          </a:solidFill>
+          <a:ln>
+            <a:noFill/>
+          </a:ln>
+        </p:spPr>
+        <p:style>
+          <a:lnRef idx="1">
+            <a:schemeClr val="accent1"/>
+          </a:lnRef>
+          <a:fillRef idx="3">
+            <a:schemeClr val="accent1"/>
+          </a:fillRef>
+          <a:effectRef idx="2">
+            <a:schemeClr val="accent1"/>
+          </a:effectRef>
+          <a:fontRef idx="minor">
+            <a:schemeClr val="lt1"/>
+          </a:fontRef>
+        </p:style>
+        <p:txBody>
+          <a:bodyPr rtlCol="0" anchor="ctr"/>
+          <a:lstStyle/>
+          <a:p>
+            <a:pPr algn="ctr"/>
+          </a:p>
+        </p:txBody>
+      </p:sp>
+      <p:sp>
+        <p:nvSpPr>
+          <p:cNvPr id="4" name="TextBox 3"/>
+          <p:cNvSpPr txBox="1"/>
+          <p:nvPr/>
+        </p:nvSpPr>
+        <p:spPr>
+          <a:xfrm>
+            <a:off x="457200" y="164592"/>
+            <a:ext cx="11277295" cy="502920"/>
+          </a:xfrm>
+          <a:prstGeom prst="rect">
+            <a:avLst/>
+          </a:prstGeom>
+          <a:noFill/>
+        </p:spPr>
+        <p:txBody>
+          <a:bodyPr wrap="square">
+            <a:spAutoFit/>
+          </a:bodyPr>
+          <a:lstStyle/>
+          <a:p>
+            <a:r>
+              <a:rPr sz="2600" b="1" i="0">
+                <a:solidFill>
+                  <a:srgbClr val="FFFFFF"/>
+                </a:solidFill>
+                <a:latin typeface="Calibri"/>
+              </a:rPr>
+              <a:t>Elegir la herramienta por la pregunta, y las dos advertencias (2/2)</a:t>
+            </a:r>
+          </a:p>
+        </p:txBody>
+      </p:sp>
+      <p:sp>
+        <p:nvSpPr>
+          <p:cNvPr id="5" name="TextBox 4"/>
+          <p:cNvSpPr txBox="1"/>
+          <p:nvPr/>
+        </p:nvSpPr>
+        <p:spPr>
+          <a:xfrm>
+            <a:off x="457200" y="1170432"/>
+            <a:ext cx="11277295" cy="5230368"/>
+          </a:xfrm>
+          <a:prstGeom prst="rect">
+            <a:avLst/>
+          </a:prstGeom>
+          <a:noFill/>
+        </p:spPr>
+        <p:txBody>
+          <a:bodyPr wrap="square">
+            <a:spAutoFit/>
+          </a:bodyPr>
+          <a:lstStyle/>
+          <a:p>
+            <a:pPr>
+              <a:spcAft>
+                <a:spcPts val="800"/>
+              </a:spcAft>
+            </a:pPr>
+            <a:r>
+              <a:rPr sz="2000" b="0" i="0">
+                <a:solidFill>
+                  <a:srgbClr val="333333"/>
+                </a:solidFill>
+                <a:latin typeface="Calibri"/>
+              </a:rPr>
+              <a:t>–   Dedíquele dos minutos de pantalla compartida: es lo que más van a agradecer. </a:t>
+            </a:r>
+            <a:r>
+              <a:rPr sz="2000" b="1" i="0">
+                <a:solidFill>
+                  <a:srgbClr val="333333"/>
+                </a:solidFill>
+                <a:latin typeface="Calibri"/>
+              </a:rPr>
+              <a:t>Canva</a:t>
+            </a:r>
+            <a:r>
+              <a:rPr sz="2000" b="0" i="0">
+                <a:solidFill>
+                  <a:srgbClr val="333333"/>
+                </a:solidFill>
+                <a:latin typeface="Calibri"/>
+              </a:rPr>
+              <a:t> queda reservado para la Clase 14 y para material que verá alguien externo.</a:t>
+            </a:r>
+          </a:p>
+          <a:p>
+            <a:pPr>
+              <a:spcAft>
+                <a:spcPts val="800"/>
+              </a:spcAft>
+            </a:pPr>
+            <a:r>
+              <a:rPr sz="2000" b="0" i="0">
+                <a:solidFill>
+                  <a:srgbClr val="333333"/>
+                </a:solidFill>
+                <a:latin typeface="Calibri"/>
+              </a:rPr>
+              <a:t>–   Y </a:t>
+            </a:r>
+            <a:r>
+              <a:rPr sz="2000" b="1" i="0">
+                <a:solidFill>
+                  <a:srgbClr val="333333"/>
+                </a:solidFill>
+                <a:latin typeface="Calibri"/>
+              </a:rPr>
+              <a:t>papel con una foto</a:t>
+            </a:r>
+            <a:r>
+              <a:rPr sz="2000" b="0" i="0">
+                <a:solidFill>
+                  <a:srgbClr val="333333"/>
+                </a:solidFill>
+                <a:latin typeface="Calibri"/>
+              </a:rPr>
+              <a:t> es perfectamente válido en este curso: es lo más rápido que existe y hay que decirlo, porque hay equipos que se paralizan buscando la herramienta perfecta.</a:t>
+            </a:r>
+          </a:p>
+          <a:p>
+            <a:pPr>
+              <a:spcAft>
+                <a:spcPts val="800"/>
+              </a:spcAft>
+            </a:pPr>
+            <a:r>
+              <a:rPr sz="2000" b="0" i="0">
+                <a:solidFill>
+                  <a:srgbClr val="333333"/>
+                </a:solidFill>
+                <a:latin typeface="Calibri"/>
+              </a:rPr>
+              <a:t>–   Las dos advertencias del cierre son operativas. </a:t>
+            </a:r>
+            <a:r>
+              <a:rPr sz="2000" b="1" i="0">
+                <a:solidFill>
+                  <a:srgbClr val="333333"/>
+                </a:solidFill>
+                <a:latin typeface="Calibri"/>
+              </a:rPr>
+              <a:t>No pulir el prototipo</a:t>
+            </a:r>
+            <a:r>
+              <a:rPr sz="2000" b="0" i="0">
+                <a:solidFill>
+                  <a:srgbClr val="333333"/>
+                </a:solidFill>
+                <a:latin typeface="Calibri"/>
+              </a:rPr>
+              <a:t>: se califica que el flujo se entienda</a:t>
+            </a:r>
+          </a:p>
+          <a:p>
+            <a:pPr>
+              <a:spcAft>
+                <a:spcPts val="800"/>
+              </a:spcAft>
+            </a:pPr>
+            <a:r>
+              <a:rPr sz="2000" b="0" i="0">
+                <a:solidFill>
+                  <a:srgbClr val="333333"/>
+                </a:solidFill>
+                <a:latin typeface="Calibri"/>
+              </a:rPr>
+              <a:t>–   Que los textos sean reales y que existan el estado vacío y el de error; un equipo que gasta el taller eligiendo colores llega a la Clase 12 sin nada que probar.</a:t>
+            </a:r>
+          </a:p>
+          <a:p>
+            <a:pPr>
+              <a:spcAft>
+                <a:spcPts val="800"/>
+              </a:spcAft>
+            </a:pPr>
+            <a:r>
+              <a:rPr sz="2000" b="0" i="0">
+                <a:solidFill>
+                  <a:srgbClr val="333333"/>
+                </a:solidFill>
+                <a:latin typeface="Calibri"/>
+              </a:rPr>
+              <a:t>–   Y </a:t>
+            </a:r>
+            <a:r>
+              <a:rPr sz="2000" b="1" i="0">
+                <a:solidFill>
+                  <a:srgbClr val="333333"/>
+                </a:solidFill>
+                <a:latin typeface="Calibri"/>
+              </a:rPr>
+              <a:t>si el prototipo lleva datos, que sean inventados</a:t>
+            </a:r>
+            <a:r>
+              <a:rPr sz="2000" b="0" i="0">
+                <a:solidFill>
+                  <a:srgbClr val="333333"/>
+                </a:solidFill>
+                <a:latin typeface="Calibri"/>
+              </a:rPr>
+              <a:t>: ningún nombre, cédula, teléfono, dirección ni foto de una persona real, ni de ellos mismos.</a:t>
+            </a:r>
+          </a:p>
+          <a:p>
+            <a:pPr>
+              <a:spcAft>
+                <a:spcPts val="800"/>
+              </a:spcAft>
+            </a:pPr>
+            <a:r>
+              <a:rPr sz="2000" b="0" i="0">
+                <a:solidFill>
+                  <a:srgbClr val="333333"/>
+                </a:solidFill>
+                <a:latin typeface="Calibri"/>
+              </a:rPr>
+              <a:t>–   Es la regla del curso y es la Ley 1581 de 2012 de la sesión 4 aplicada al lugar donde de verdad se incumple — los datos de prueba se inventan.</a:t>
+            </a:r>
+          </a:p>
+        </p:txBody>
+      </p:sp>
+      <p:sp>
+        <p:nvSpPr>
+          <p:cNvPr id="6" name="TextBox 5"/>
+          <p:cNvSpPr txBox="1"/>
+          <p:nvPr/>
+        </p:nvSpPr>
+        <p:spPr>
+          <a:xfrm>
+            <a:off x="11185855" y="6473952"/>
+            <a:ext cx="640080" cy="274320"/>
+          </a:xfrm>
+          <a:prstGeom prst="rect">
+            <a:avLst/>
+          </a:prstGeom>
+          <a:noFill/>
+        </p:spPr>
+        <p:txBody>
+          <a:bodyPr wrap="square">
+            <a:spAutoFit/>
+          </a:bodyPr>
+          <a:lstStyle/>
+          <a:p>
+            <a:pPr algn="r"/>
+            <a:r>
+              <a:rPr sz="1100" b="0" i="0">
+                <a:solidFill>
+                  <a:srgbClr val="666666"/>
+                </a:solidFill>
+                <a:latin typeface="Calibri"/>
+              </a:rPr>
+              <a:t>19</a:t>
             </a:r>
           </a:p>
         </p:txBody>
@@ -7311,6 +7677,2958 @@
                 <a:latin typeface="Calibri"/>
               </a:rPr>
               <a:t>2</a:t>
+            </a:r>
+          </a:p>
+        </p:txBody>
+      </p:sp>
+    </p:spTree>
+  </p:cSld>
+  <p:clrMapOvr>
+    <a:masterClrMapping/>
+  </p:clrMapOvr>
+</p:sld>
+</file>
+
+<file path=ppt/slides/slide20.xml><?xml version="1.0" encoding="utf-8"?>
+<p:sld xmlns:a="http://schemas.openxmlformats.org/drawingml/2006/main" xmlns:p="http://schemas.openxmlformats.org/presentationml/2006/main" xmlns:r="http://schemas.openxmlformats.org/officeDocument/2006/relationships">
+  <p:cSld>
+    <p:bg>
+      <p:bgPr>
+        <a:solidFill>
+          <a:srgbClr val="FFFFFF"/>
+        </a:solidFill>
+        <a:effectLst/>
+      </p:bgPr>
+    </p:bg>
+    <p:spTree>
+      <p:nvGrpSpPr>
+        <p:cNvPr id="1" name=""/>
+        <p:cNvGrpSpPr/>
+        <p:nvPr/>
+      </p:nvGrpSpPr>
+      <p:grpSpPr/>
+      <p:sp>
+        <p:nvSpPr>
+          <p:cNvPr id="2" name="Rectangle 1"/>
+          <p:cNvSpPr/>
+          <p:nvPr/>
+        </p:nvSpPr>
+        <p:spPr>
+          <a:xfrm>
+            <a:off x="0" y="0"/>
+            <a:ext cx="12191695" cy="1170432"/>
+          </a:xfrm>
+          <a:prstGeom prst="rect">
+            <a:avLst/>
+          </a:prstGeom>
+          <a:solidFill>
+            <a:srgbClr val="095292"/>
+          </a:solidFill>
+          <a:ln>
+            <a:noFill/>
+          </a:ln>
+        </p:spPr>
+        <p:style>
+          <a:lnRef idx="1">
+            <a:schemeClr val="accent1"/>
+          </a:lnRef>
+          <a:fillRef idx="3">
+            <a:schemeClr val="accent1"/>
+          </a:fillRef>
+          <a:effectRef idx="2">
+            <a:schemeClr val="accent1"/>
+          </a:effectRef>
+          <a:fontRef idx="minor">
+            <a:schemeClr val="lt1"/>
+          </a:fontRef>
+        </p:style>
+        <p:txBody>
+          <a:bodyPr rtlCol="0" anchor="ctr"/>
+          <a:lstStyle/>
+          <a:p>
+            <a:pPr algn="ctr"/>
+          </a:p>
+        </p:txBody>
+      </p:sp>
+      <p:sp>
+        <p:nvSpPr>
+          <p:cNvPr id="3" name="Rectangle 2"/>
+          <p:cNvSpPr/>
+          <p:nvPr/>
+        </p:nvSpPr>
+        <p:spPr>
+          <a:xfrm>
+            <a:off x="0" y="1170432"/>
+            <a:ext cx="12191695" cy="41148"/>
+          </a:xfrm>
+          <a:prstGeom prst="rect">
+            <a:avLst/>
+          </a:prstGeom>
+          <a:solidFill>
+            <a:srgbClr val="FFD000"/>
+          </a:solidFill>
+          <a:ln>
+            <a:noFill/>
+          </a:ln>
+        </p:spPr>
+        <p:style>
+          <a:lnRef idx="1">
+            <a:schemeClr val="accent1"/>
+          </a:lnRef>
+          <a:fillRef idx="3">
+            <a:schemeClr val="accent1"/>
+          </a:fillRef>
+          <a:effectRef idx="2">
+            <a:schemeClr val="accent1"/>
+          </a:effectRef>
+          <a:fontRef idx="minor">
+            <a:schemeClr val="lt1"/>
+          </a:fontRef>
+        </p:style>
+        <p:txBody>
+          <a:bodyPr rtlCol="0" anchor="ctr"/>
+          <a:lstStyle/>
+          <a:p>
+            <a:pPr algn="ctr"/>
+          </a:p>
+        </p:txBody>
+      </p:sp>
+      <p:sp>
+        <p:nvSpPr>
+          <p:cNvPr id="4" name="TextBox 3"/>
+          <p:cNvSpPr txBox="1"/>
+          <p:nvPr/>
+        </p:nvSpPr>
+        <p:spPr>
+          <a:xfrm>
+            <a:off x="457200" y="164592"/>
+            <a:ext cx="11277295" cy="384048"/>
+          </a:xfrm>
+          <a:prstGeom prst="rect">
+            <a:avLst/>
+          </a:prstGeom>
+          <a:noFill/>
+        </p:spPr>
+        <p:txBody>
+          <a:bodyPr wrap="square">
+            <a:spAutoFit/>
+          </a:bodyPr>
+          <a:lstStyle/>
+          <a:p>
+            <a:r>
+              <a:rPr sz="2600" b="1" i="0">
+                <a:solidFill>
+                  <a:srgbClr val="FFFFFF"/>
+                </a:solidFill>
+                <a:latin typeface="Calibri"/>
+              </a:rPr>
+              <a:t>Taller de hoy: Prototipo de baja fidelidad</a:t>
+            </a:r>
+          </a:p>
+        </p:txBody>
+      </p:sp>
+      <p:sp>
+        <p:nvSpPr>
+          <p:cNvPr id="5" name="TextBox 4"/>
+          <p:cNvSpPr txBox="1"/>
+          <p:nvPr/>
+        </p:nvSpPr>
+        <p:spPr>
+          <a:xfrm>
+            <a:off x="457200" y="566928"/>
+            <a:ext cx="11277295" cy="411480"/>
+          </a:xfrm>
+          <a:prstGeom prst="rect">
+            <a:avLst/>
+          </a:prstGeom>
+          <a:noFill/>
+        </p:spPr>
+        <p:txBody>
+          <a:bodyPr wrap="square">
+            <a:spAutoFit/>
+          </a:bodyPr>
+          <a:lstStyle/>
+          <a:p>
+            <a:r>
+              <a:rPr sz="1400" b="0" i="0">
+                <a:solidFill>
+                  <a:srgbClr val="B8D8EE"/>
+                </a:solidFill>
+                <a:latin typeface="Calibri"/>
+              </a:rPr>
+              <a:t>17 min en equipos · 2 dibujan · 2 escriben textos · 1 escribe el guion de prueba · prototipo de tres pantallas + guion de prueba con tres tareas</a:t>
+            </a:r>
+          </a:p>
+        </p:txBody>
+      </p:sp>
+      <p:sp>
+        <p:nvSpPr>
+          <p:cNvPr id="6" name="Rounded Rectangle 5"/>
+          <p:cNvSpPr/>
+          <p:nvPr/>
+        </p:nvSpPr>
+        <p:spPr>
+          <a:xfrm>
+            <a:off x="457200" y="1472184"/>
+            <a:ext cx="11277295" cy="566928"/>
+          </a:xfrm>
+          <a:prstGeom prst="roundRect">
+            <a:avLst>
+              <a:gd name="adj" fmla="val 12000"/>
+            </a:avLst>
+          </a:prstGeom>
+          <a:solidFill>
+            <a:srgbClr val="F2F2F2"/>
+          </a:solidFill>
+          <a:ln>
+            <a:noFill/>
+          </a:ln>
+        </p:spPr>
+        <p:style>
+          <a:lnRef idx="1">
+            <a:schemeClr val="accent1"/>
+          </a:lnRef>
+          <a:fillRef idx="3">
+            <a:schemeClr val="accent1"/>
+          </a:fillRef>
+          <a:effectRef idx="2">
+            <a:schemeClr val="accent1"/>
+          </a:effectRef>
+          <a:fontRef idx="minor">
+            <a:schemeClr val="lt1"/>
+          </a:fontRef>
+        </p:style>
+        <p:txBody>
+          <a:bodyPr rtlCol="0" anchor="ctr"/>
+          <a:lstStyle/>
+          <a:p>
+            <a:pPr algn="ctr"/>
+          </a:p>
+        </p:txBody>
+      </p:sp>
+      <p:sp>
+        <p:nvSpPr>
+          <p:cNvPr id="7" name="Rectangle 6"/>
+          <p:cNvSpPr/>
+          <p:nvPr/>
+        </p:nvSpPr>
+        <p:spPr>
+          <a:xfrm>
+            <a:off x="640080" y="1618487"/>
+            <a:ext cx="274320" cy="274320"/>
+          </a:xfrm>
+          <a:prstGeom prst="rect">
+            <a:avLst/>
+          </a:prstGeom>
+          <a:solidFill>
+            <a:srgbClr val="FFFFFF"/>
+          </a:solidFill>
+          <a:ln>
+            <a:solidFill>
+              <a:srgbClr val="333333"/>
+            </a:solidFill>
+          </a:ln>
+        </p:spPr>
+        <p:style>
+          <a:lnRef idx="1">
+            <a:schemeClr val="accent1"/>
+          </a:lnRef>
+          <a:fillRef idx="3">
+            <a:schemeClr val="accent1"/>
+          </a:fillRef>
+          <a:effectRef idx="2">
+            <a:schemeClr val="accent1"/>
+          </a:effectRef>
+          <a:fontRef idx="minor">
+            <a:schemeClr val="lt1"/>
+          </a:fontRef>
+        </p:style>
+        <p:txBody>
+          <a:bodyPr rtlCol="0" anchor="ctr"/>
+          <a:lstStyle/>
+          <a:p>
+            <a:pPr algn="ctr"/>
+          </a:p>
+        </p:txBody>
+      </p:sp>
+      <p:sp>
+        <p:nvSpPr>
+          <p:cNvPr id="8" name="Rectangle 7"/>
+          <p:cNvSpPr/>
+          <p:nvPr/>
+        </p:nvSpPr>
+        <p:spPr>
+          <a:xfrm>
+            <a:off x="640080" y="1618487"/>
+            <a:ext cx="73152" cy="274320"/>
+          </a:xfrm>
+          <a:prstGeom prst="rect">
+            <a:avLst/>
+          </a:prstGeom>
+          <a:solidFill>
+            <a:srgbClr val="269CCB"/>
+          </a:solidFill>
+          <a:ln>
+            <a:noFill/>
+          </a:ln>
+        </p:spPr>
+        <p:style>
+          <a:lnRef idx="1">
+            <a:schemeClr val="accent1"/>
+          </a:lnRef>
+          <a:fillRef idx="3">
+            <a:schemeClr val="accent1"/>
+          </a:fillRef>
+          <a:effectRef idx="2">
+            <a:schemeClr val="accent1"/>
+          </a:effectRef>
+          <a:fontRef idx="minor">
+            <a:schemeClr val="lt1"/>
+          </a:fontRef>
+        </p:style>
+        <p:txBody>
+          <a:bodyPr rtlCol="0" anchor="ctr"/>
+          <a:lstStyle/>
+          <a:p>
+            <a:pPr algn="ctr"/>
+          </a:p>
+        </p:txBody>
+      </p:sp>
+      <p:sp>
+        <p:nvSpPr>
+          <p:cNvPr id="9" name="TextBox 8"/>
+          <p:cNvSpPr txBox="1"/>
+          <p:nvPr/>
+        </p:nvSpPr>
+        <p:spPr>
+          <a:xfrm>
+            <a:off x="1097280" y="1563624"/>
+            <a:ext cx="10362895" cy="402336"/>
+          </a:xfrm>
+          <a:prstGeom prst="rect">
+            <a:avLst/>
+          </a:prstGeom>
+          <a:noFill/>
+        </p:spPr>
+        <p:txBody>
+          <a:bodyPr wrap="square" anchor="ctr"/>
+          <a:lstStyle/>
+          <a:p>
+            <a:r>
+              <a:rPr sz="1500" b="1" i="0">
+                <a:solidFill>
+                  <a:srgbClr val="333333"/>
+                </a:solidFill>
+                <a:latin typeface="Calibri"/>
+              </a:rPr>
+              <a:t>EL FLUJO EN TRES PASOS</a:t>
+            </a:r>
+            <a:r>
+              <a:rPr sz="1500" b="0" i="0">
+                <a:solidFill>
+                  <a:srgbClr val="333333"/>
+                </a:solidFill>
+                <a:latin typeface="Calibri"/>
+              </a:rPr>
+              <a:t> — El camino principal del alcance mínimo, en tres pantallas o tres pasos, y </a:t>
+            </a:r>
+            <a:r>
+              <a:rPr sz="1500" b="1" i="0">
+                <a:solidFill>
+                  <a:srgbClr val="333333"/>
+                </a:solidFill>
+                <a:latin typeface="Calibri"/>
+              </a:rPr>
+              <a:t>una frase de propósito por cada uno</a:t>
+            </a:r>
+            <a:r>
+              <a:rPr sz="1500" b="0" i="0">
+                <a:solidFill>
+                  <a:srgbClr val="333333"/>
+                </a:solidFill>
+                <a:latin typeface="Calibri"/>
+              </a:rPr>
+              <a:t>.</a:t>
+            </a:r>
+          </a:p>
+        </p:txBody>
+      </p:sp>
+      <p:sp>
+        <p:nvSpPr>
+          <p:cNvPr id="10" name="Rounded Rectangle 9"/>
+          <p:cNvSpPr/>
+          <p:nvPr/>
+        </p:nvSpPr>
+        <p:spPr>
+          <a:xfrm>
+            <a:off x="457200" y="2148839"/>
+            <a:ext cx="11277295" cy="566928"/>
+          </a:xfrm>
+          <a:prstGeom prst="roundRect">
+            <a:avLst>
+              <a:gd name="adj" fmla="val 12000"/>
+            </a:avLst>
+          </a:prstGeom>
+          <a:solidFill>
+            <a:srgbClr val="F2F2F2"/>
+          </a:solidFill>
+          <a:ln>
+            <a:noFill/>
+          </a:ln>
+        </p:spPr>
+        <p:style>
+          <a:lnRef idx="1">
+            <a:schemeClr val="accent1"/>
+          </a:lnRef>
+          <a:fillRef idx="3">
+            <a:schemeClr val="accent1"/>
+          </a:fillRef>
+          <a:effectRef idx="2">
+            <a:schemeClr val="accent1"/>
+          </a:effectRef>
+          <a:fontRef idx="minor">
+            <a:schemeClr val="lt1"/>
+          </a:fontRef>
+        </p:style>
+        <p:txBody>
+          <a:bodyPr rtlCol="0" anchor="ctr"/>
+          <a:lstStyle/>
+          <a:p>
+            <a:pPr algn="ctr"/>
+          </a:p>
+        </p:txBody>
+      </p:sp>
+      <p:sp>
+        <p:nvSpPr>
+          <p:cNvPr id="11" name="Rectangle 10"/>
+          <p:cNvSpPr/>
+          <p:nvPr/>
+        </p:nvSpPr>
+        <p:spPr>
+          <a:xfrm>
+            <a:off x="640080" y="2295144"/>
+            <a:ext cx="274320" cy="274320"/>
+          </a:xfrm>
+          <a:prstGeom prst="rect">
+            <a:avLst/>
+          </a:prstGeom>
+          <a:solidFill>
+            <a:srgbClr val="FFFFFF"/>
+          </a:solidFill>
+          <a:ln>
+            <a:solidFill>
+              <a:srgbClr val="333333"/>
+            </a:solidFill>
+          </a:ln>
+        </p:spPr>
+        <p:style>
+          <a:lnRef idx="1">
+            <a:schemeClr val="accent1"/>
+          </a:lnRef>
+          <a:fillRef idx="3">
+            <a:schemeClr val="accent1"/>
+          </a:fillRef>
+          <a:effectRef idx="2">
+            <a:schemeClr val="accent1"/>
+          </a:effectRef>
+          <a:fontRef idx="minor">
+            <a:schemeClr val="lt1"/>
+          </a:fontRef>
+        </p:style>
+        <p:txBody>
+          <a:bodyPr rtlCol="0" anchor="ctr"/>
+          <a:lstStyle/>
+          <a:p>
+            <a:pPr algn="ctr"/>
+          </a:p>
+        </p:txBody>
+      </p:sp>
+      <p:sp>
+        <p:nvSpPr>
+          <p:cNvPr id="12" name="Rectangle 11"/>
+          <p:cNvSpPr/>
+          <p:nvPr/>
+        </p:nvSpPr>
+        <p:spPr>
+          <a:xfrm>
+            <a:off x="640080" y="2295144"/>
+            <a:ext cx="73152" cy="274320"/>
+          </a:xfrm>
+          <a:prstGeom prst="rect">
+            <a:avLst/>
+          </a:prstGeom>
+          <a:solidFill>
+            <a:srgbClr val="269CCB"/>
+          </a:solidFill>
+          <a:ln>
+            <a:noFill/>
+          </a:ln>
+        </p:spPr>
+        <p:style>
+          <a:lnRef idx="1">
+            <a:schemeClr val="accent1"/>
+          </a:lnRef>
+          <a:fillRef idx="3">
+            <a:schemeClr val="accent1"/>
+          </a:fillRef>
+          <a:effectRef idx="2">
+            <a:schemeClr val="accent1"/>
+          </a:effectRef>
+          <a:fontRef idx="minor">
+            <a:schemeClr val="lt1"/>
+          </a:fontRef>
+        </p:style>
+        <p:txBody>
+          <a:bodyPr rtlCol="0" anchor="ctr"/>
+          <a:lstStyle/>
+          <a:p>
+            <a:pPr algn="ctr"/>
+          </a:p>
+        </p:txBody>
+      </p:sp>
+      <p:sp>
+        <p:nvSpPr>
+          <p:cNvPr id="13" name="TextBox 12"/>
+          <p:cNvSpPr txBox="1"/>
+          <p:nvPr/>
+        </p:nvSpPr>
+        <p:spPr>
+          <a:xfrm>
+            <a:off x="1097280" y="2240279"/>
+            <a:ext cx="10362895" cy="402336"/>
+          </a:xfrm>
+          <a:prstGeom prst="rect">
+            <a:avLst/>
+          </a:prstGeom>
+          <a:noFill/>
+        </p:spPr>
+        <p:txBody>
+          <a:bodyPr wrap="square" anchor="ctr"/>
+          <a:lstStyle/>
+          <a:p>
+            <a:r>
+              <a:rPr sz="1500" b="1" i="0">
+                <a:solidFill>
+                  <a:srgbClr val="333333"/>
+                </a:solidFill>
+                <a:latin typeface="Calibri"/>
+              </a:rPr>
+              <a:t>LAS TRES PANTALLAS DIBUJADAS</a:t>
+            </a:r>
+            <a:r>
+              <a:rPr sz="1500" b="0" i="0">
+                <a:solidFill>
+                  <a:srgbClr val="333333"/>
+                </a:solidFill>
+                <a:latin typeface="Calibri"/>
+              </a:rPr>
+              <a:t> — Las tres dibujadas de verdad, con el camino principal grande y primero, y una </a:t>
+            </a:r>
+            <a:r>
+              <a:rPr sz="1500" b="1" i="0">
+                <a:solidFill>
+                  <a:srgbClr val="333333"/>
+                </a:solidFill>
+                <a:latin typeface="Calibri"/>
+              </a:rPr>
+              <a:t>flecha con destino</a:t>
+            </a:r>
+            <a:r>
+              <a:rPr sz="1500" b="0" i="0">
+                <a:solidFill>
+                  <a:srgbClr val="333333"/>
+                </a:solidFill>
+                <a:latin typeface="Calibri"/>
+              </a:rPr>
+              <a:t> por cada botón.</a:t>
+            </a:r>
+          </a:p>
+        </p:txBody>
+      </p:sp>
+      <p:sp>
+        <p:nvSpPr>
+          <p:cNvPr id="14" name="Rounded Rectangle 13"/>
+          <p:cNvSpPr/>
+          <p:nvPr/>
+        </p:nvSpPr>
+        <p:spPr>
+          <a:xfrm>
+            <a:off x="457200" y="2825496"/>
+            <a:ext cx="11277295" cy="566928"/>
+          </a:xfrm>
+          <a:prstGeom prst="roundRect">
+            <a:avLst>
+              <a:gd name="adj" fmla="val 12000"/>
+            </a:avLst>
+          </a:prstGeom>
+          <a:solidFill>
+            <a:srgbClr val="F2F2F2"/>
+          </a:solidFill>
+          <a:ln>
+            <a:noFill/>
+          </a:ln>
+        </p:spPr>
+        <p:style>
+          <a:lnRef idx="1">
+            <a:schemeClr val="accent1"/>
+          </a:lnRef>
+          <a:fillRef idx="3">
+            <a:schemeClr val="accent1"/>
+          </a:fillRef>
+          <a:effectRef idx="2">
+            <a:schemeClr val="accent1"/>
+          </a:effectRef>
+          <a:fontRef idx="minor">
+            <a:schemeClr val="lt1"/>
+          </a:fontRef>
+        </p:style>
+        <p:txBody>
+          <a:bodyPr rtlCol="0" anchor="ctr"/>
+          <a:lstStyle/>
+          <a:p>
+            <a:pPr algn="ctr"/>
+          </a:p>
+        </p:txBody>
+      </p:sp>
+      <p:sp>
+        <p:nvSpPr>
+          <p:cNvPr id="15" name="Rectangle 14"/>
+          <p:cNvSpPr/>
+          <p:nvPr/>
+        </p:nvSpPr>
+        <p:spPr>
+          <a:xfrm>
+            <a:off x="640080" y="2971800"/>
+            <a:ext cx="274320" cy="274320"/>
+          </a:xfrm>
+          <a:prstGeom prst="rect">
+            <a:avLst/>
+          </a:prstGeom>
+          <a:solidFill>
+            <a:srgbClr val="FFFFFF"/>
+          </a:solidFill>
+          <a:ln>
+            <a:solidFill>
+              <a:srgbClr val="333333"/>
+            </a:solidFill>
+          </a:ln>
+        </p:spPr>
+        <p:style>
+          <a:lnRef idx="1">
+            <a:schemeClr val="accent1"/>
+          </a:lnRef>
+          <a:fillRef idx="3">
+            <a:schemeClr val="accent1"/>
+          </a:fillRef>
+          <a:effectRef idx="2">
+            <a:schemeClr val="accent1"/>
+          </a:effectRef>
+          <a:fontRef idx="minor">
+            <a:schemeClr val="lt1"/>
+          </a:fontRef>
+        </p:style>
+        <p:txBody>
+          <a:bodyPr rtlCol="0" anchor="ctr"/>
+          <a:lstStyle/>
+          <a:p>
+            <a:pPr algn="ctr"/>
+          </a:p>
+        </p:txBody>
+      </p:sp>
+      <p:sp>
+        <p:nvSpPr>
+          <p:cNvPr id="16" name="Rectangle 15"/>
+          <p:cNvSpPr/>
+          <p:nvPr/>
+        </p:nvSpPr>
+        <p:spPr>
+          <a:xfrm>
+            <a:off x="640080" y="2971800"/>
+            <a:ext cx="73152" cy="274320"/>
+          </a:xfrm>
+          <a:prstGeom prst="rect">
+            <a:avLst/>
+          </a:prstGeom>
+          <a:solidFill>
+            <a:srgbClr val="269CCB"/>
+          </a:solidFill>
+          <a:ln>
+            <a:noFill/>
+          </a:ln>
+        </p:spPr>
+        <p:style>
+          <a:lnRef idx="1">
+            <a:schemeClr val="accent1"/>
+          </a:lnRef>
+          <a:fillRef idx="3">
+            <a:schemeClr val="accent1"/>
+          </a:fillRef>
+          <a:effectRef idx="2">
+            <a:schemeClr val="accent1"/>
+          </a:effectRef>
+          <a:fontRef idx="minor">
+            <a:schemeClr val="lt1"/>
+          </a:fontRef>
+        </p:style>
+        <p:txBody>
+          <a:bodyPr rtlCol="0" anchor="ctr"/>
+          <a:lstStyle/>
+          <a:p>
+            <a:pPr algn="ctr"/>
+          </a:p>
+        </p:txBody>
+      </p:sp>
+      <p:sp>
+        <p:nvSpPr>
+          <p:cNvPr id="17" name="TextBox 16"/>
+          <p:cNvSpPr txBox="1"/>
+          <p:nvPr/>
+        </p:nvSpPr>
+        <p:spPr>
+          <a:xfrm>
+            <a:off x="1097280" y="2916936"/>
+            <a:ext cx="10362895" cy="402336"/>
+          </a:xfrm>
+          <a:prstGeom prst="rect">
+            <a:avLst/>
+          </a:prstGeom>
+          <a:noFill/>
+        </p:spPr>
+        <p:txBody>
+          <a:bodyPr wrap="square" anchor="ctr"/>
+          <a:lstStyle/>
+          <a:p>
+            <a:r>
+              <a:rPr sz="1500" b="1" i="0">
+                <a:solidFill>
+                  <a:srgbClr val="333333"/>
+                </a:solidFill>
+                <a:latin typeface="Calibri"/>
+              </a:rPr>
+              <a:t>EL ESTADO VACÍO Y EL DE ERROR</a:t>
+            </a:r>
+            <a:r>
+              <a:rPr sz="1500" b="0" i="0">
+                <a:solidFill>
+                  <a:srgbClr val="333333"/>
+                </a:solidFill>
+                <a:latin typeface="Calibri"/>
+              </a:rPr>
+              <a:t> — Qué se ve la primera vez sin datos, qué se ve cuando la búsqueda no encuentra nada, y qué se ve cuando algo falla. </a:t>
+            </a:r>
+            <a:r>
+              <a:rPr sz="1500" b="1" i="0">
+                <a:solidFill>
+                  <a:srgbClr val="333333"/>
+                </a:solidFill>
+                <a:latin typeface="Calibri"/>
+              </a:rPr>
+              <a:t>Con el texto exacto del mensaje.</a:t>
+            </a:r>
+          </a:p>
+        </p:txBody>
+      </p:sp>
+      <p:sp>
+        <p:nvSpPr>
+          <p:cNvPr id="18" name="Rounded Rectangle 17"/>
+          <p:cNvSpPr/>
+          <p:nvPr/>
+        </p:nvSpPr>
+        <p:spPr>
+          <a:xfrm>
+            <a:off x="457200" y="3502152"/>
+            <a:ext cx="11277295" cy="566928"/>
+          </a:xfrm>
+          <a:prstGeom prst="roundRect">
+            <a:avLst>
+              <a:gd name="adj" fmla="val 12000"/>
+            </a:avLst>
+          </a:prstGeom>
+          <a:solidFill>
+            <a:srgbClr val="F2F2F2"/>
+          </a:solidFill>
+          <a:ln>
+            <a:noFill/>
+          </a:ln>
+        </p:spPr>
+        <p:style>
+          <a:lnRef idx="1">
+            <a:schemeClr val="accent1"/>
+          </a:lnRef>
+          <a:fillRef idx="3">
+            <a:schemeClr val="accent1"/>
+          </a:fillRef>
+          <a:effectRef idx="2">
+            <a:schemeClr val="accent1"/>
+          </a:effectRef>
+          <a:fontRef idx="minor">
+            <a:schemeClr val="lt1"/>
+          </a:fontRef>
+        </p:style>
+        <p:txBody>
+          <a:bodyPr rtlCol="0" anchor="ctr"/>
+          <a:lstStyle/>
+          <a:p>
+            <a:pPr algn="ctr"/>
+          </a:p>
+        </p:txBody>
+      </p:sp>
+      <p:sp>
+        <p:nvSpPr>
+          <p:cNvPr id="19" name="Rectangle 18"/>
+          <p:cNvSpPr/>
+          <p:nvPr/>
+        </p:nvSpPr>
+        <p:spPr>
+          <a:xfrm>
+            <a:off x="640080" y="3648456"/>
+            <a:ext cx="274320" cy="274320"/>
+          </a:xfrm>
+          <a:prstGeom prst="rect">
+            <a:avLst/>
+          </a:prstGeom>
+          <a:solidFill>
+            <a:srgbClr val="FFFFFF"/>
+          </a:solidFill>
+          <a:ln>
+            <a:solidFill>
+              <a:srgbClr val="333333"/>
+            </a:solidFill>
+          </a:ln>
+        </p:spPr>
+        <p:style>
+          <a:lnRef idx="1">
+            <a:schemeClr val="accent1"/>
+          </a:lnRef>
+          <a:fillRef idx="3">
+            <a:schemeClr val="accent1"/>
+          </a:fillRef>
+          <a:effectRef idx="2">
+            <a:schemeClr val="accent1"/>
+          </a:effectRef>
+          <a:fontRef idx="minor">
+            <a:schemeClr val="lt1"/>
+          </a:fontRef>
+        </p:style>
+        <p:txBody>
+          <a:bodyPr rtlCol="0" anchor="ctr"/>
+          <a:lstStyle/>
+          <a:p>
+            <a:pPr algn="ctr"/>
+          </a:p>
+        </p:txBody>
+      </p:sp>
+      <p:sp>
+        <p:nvSpPr>
+          <p:cNvPr id="20" name="Rectangle 19"/>
+          <p:cNvSpPr/>
+          <p:nvPr/>
+        </p:nvSpPr>
+        <p:spPr>
+          <a:xfrm>
+            <a:off x="640080" y="3648456"/>
+            <a:ext cx="73152" cy="274320"/>
+          </a:xfrm>
+          <a:prstGeom prst="rect">
+            <a:avLst/>
+          </a:prstGeom>
+          <a:solidFill>
+            <a:srgbClr val="269CCB"/>
+          </a:solidFill>
+          <a:ln>
+            <a:noFill/>
+          </a:ln>
+        </p:spPr>
+        <p:style>
+          <a:lnRef idx="1">
+            <a:schemeClr val="accent1"/>
+          </a:lnRef>
+          <a:fillRef idx="3">
+            <a:schemeClr val="accent1"/>
+          </a:fillRef>
+          <a:effectRef idx="2">
+            <a:schemeClr val="accent1"/>
+          </a:effectRef>
+          <a:fontRef idx="minor">
+            <a:schemeClr val="lt1"/>
+          </a:fontRef>
+        </p:style>
+        <p:txBody>
+          <a:bodyPr rtlCol="0" anchor="ctr"/>
+          <a:lstStyle/>
+          <a:p>
+            <a:pPr algn="ctr"/>
+          </a:p>
+        </p:txBody>
+      </p:sp>
+      <p:sp>
+        <p:nvSpPr>
+          <p:cNvPr id="21" name="TextBox 20"/>
+          <p:cNvSpPr txBox="1"/>
+          <p:nvPr/>
+        </p:nvSpPr>
+        <p:spPr>
+          <a:xfrm>
+            <a:off x="1097280" y="3593592"/>
+            <a:ext cx="10362895" cy="402336"/>
+          </a:xfrm>
+          <a:prstGeom prst="rect">
+            <a:avLst/>
+          </a:prstGeom>
+          <a:noFill/>
+        </p:spPr>
+        <p:txBody>
+          <a:bodyPr wrap="square" anchor="ctr"/>
+          <a:lstStyle/>
+          <a:p>
+            <a:r>
+              <a:rPr sz="1500" b="1" i="0">
+                <a:solidFill>
+                  <a:srgbClr val="333333"/>
+                </a:solidFill>
+                <a:latin typeface="Calibri"/>
+              </a:rPr>
+              <a:t>LOS TEXTOS REALES</a:t>
+            </a:r>
+            <a:r>
+              <a:rPr sz="1500" b="0" i="0">
+                <a:solidFill>
+                  <a:srgbClr val="333333"/>
+                </a:solidFill>
+                <a:latin typeface="Calibri"/>
+              </a:rPr>
+              <a:t> — Todos los rótulos y mensajes escritos como van a quedar. </a:t>
+            </a:r>
+            <a:r>
+              <a:rPr sz="1500" b="1" i="0">
+                <a:solidFill>
+                  <a:srgbClr val="333333"/>
+                </a:solidFill>
+                <a:latin typeface="Calibri"/>
+              </a:rPr>
+              <a:t>Cero relleno</a:t>
+            </a:r>
+            <a:r>
+              <a:rPr sz="1500" b="0" i="0">
+                <a:solidFill>
+                  <a:srgbClr val="333333"/>
+                </a:solidFill>
+                <a:latin typeface="Calibri"/>
+              </a:rPr>
+              <a:t>, cero «texto aquí», cero «lorem ipsum».</a:t>
+            </a:r>
+          </a:p>
+        </p:txBody>
+      </p:sp>
+      <p:sp>
+        <p:nvSpPr>
+          <p:cNvPr id="22" name="Rounded Rectangle 21"/>
+          <p:cNvSpPr/>
+          <p:nvPr/>
+        </p:nvSpPr>
+        <p:spPr>
+          <a:xfrm>
+            <a:off x="457200" y="4178808"/>
+            <a:ext cx="11277295" cy="566928"/>
+          </a:xfrm>
+          <a:prstGeom prst="roundRect">
+            <a:avLst>
+              <a:gd name="adj" fmla="val 12000"/>
+            </a:avLst>
+          </a:prstGeom>
+          <a:solidFill>
+            <a:srgbClr val="F2F2F2"/>
+          </a:solidFill>
+          <a:ln>
+            <a:noFill/>
+          </a:ln>
+        </p:spPr>
+        <p:style>
+          <a:lnRef idx="1">
+            <a:schemeClr val="accent1"/>
+          </a:lnRef>
+          <a:fillRef idx="3">
+            <a:schemeClr val="accent1"/>
+          </a:fillRef>
+          <a:effectRef idx="2">
+            <a:schemeClr val="accent1"/>
+          </a:effectRef>
+          <a:fontRef idx="minor">
+            <a:schemeClr val="lt1"/>
+          </a:fontRef>
+        </p:style>
+        <p:txBody>
+          <a:bodyPr rtlCol="0" anchor="ctr"/>
+          <a:lstStyle/>
+          <a:p>
+            <a:pPr algn="ctr"/>
+          </a:p>
+        </p:txBody>
+      </p:sp>
+      <p:sp>
+        <p:nvSpPr>
+          <p:cNvPr id="23" name="Rectangle 22"/>
+          <p:cNvSpPr/>
+          <p:nvPr/>
+        </p:nvSpPr>
+        <p:spPr>
+          <a:xfrm>
+            <a:off x="640080" y="4325112"/>
+            <a:ext cx="274320" cy="274320"/>
+          </a:xfrm>
+          <a:prstGeom prst="rect">
+            <a:avLst/>
+          </a:prstGeom>
+          <a:solidFill>
+            <a:srgbClr val="FFFFFF"/>
+          </a:solidFill>
+          <a:ln>
+            <a:solidFill>
+              <a:srgbClr val="333333"/>
+            </a:solidFill>
+          </a:ln>
+        </p:spPr>
+        <p:style>
+          <a:lnRef idx="1">
+            <a:schemeClr val="accent1"/>
+          </a:lnRef>
+          <a:fillRef idx="3">
+            <a:schemeClr val="accent1"/>
+          </a:fillRef>
+          <a:effectRef idx="2">
+            <a:schemeClr val="accent1"/>
+          </a:effectRef>
+          <a:fontRef idx="minor">
+            <a:schemeClr val="lt1"/>
+          </a:fontRef>
+        </p:style>
+        <p:txBody>
+          <a:bodyPr rtlCol="0" anchor="ctr"/>
+          <a:lstStyle/>
+          <a:p>
+            <a:pPr algn="ctr"/>
+          </a:p>
+        </p:txBody>
+      </p:sp>
+      <p:sp>
+        <p:nvSpPr>
+          <p:cNvPr id="24" name="Rectangle 23"/>
+          <p:cNvSpPr/>
+          <p:nvPr/>
+        </p:nvSpPr>
+        <p:spPr>
+          <a:xfrm>
+            <a:off x="640080" y="4325112"/>
+            <a:ext cx="73152" cy="274320"/>
+          </a:xfrm>
+          <a:prstGeom prst="rect">
+            <a:avLst/>
+          </a:prstGeom>
+          <a:solidFill>
+            <a:srgbClr val="269CCB"/>
+          </a:solidFill>
+          <a:ln>
+            <a:noFill/>
+          </a:ln>
+        </p:spPr>
+        <p:style>
+          <a:lnRef idx="1">
+            <a:schemeClr val="accent1"/>
+          </a:lnRef>
+          <a:fillRef idx="3">
+            <a:schemeClr val="accent1"/>
+          </a:fillRef>
+          <a:effectRef idx="2">
+            <a:schemeClr val="accent1"/>
+          </a:effectRef>
+          <a:fontRef idx="minor">
+            <a:schemeClr val="lt1"/>
+          </a:fontRef>
+        </p:style>
+        <p:txBody>
+          <a:bodyPr rtlCol="0" anchor="ctr"/>
+          <a:lstStyle/>
+          <a:p>
+            <a:pPr algn="ctr"/>
+          </a:p>
+        </p:txBody>
+      </p:sp>
+      <p:sp>
+        <p:nvSpPr>
+          <p:cNvPr id="25" name="TextBox 24"/>
+          <p:cNvSpPr txBox="1"/>
+          <p:nvPr/>
+        </p:nvSpPr>
+        <p:spPr>
+          <a:xfrm>
+            <a:off x="1097280" y="4270248"/>
+            <a:ext cx="10362895" cy="402336"/>
+          </a:xfrm>
+          <a:prstGeom prst="rect">
+            <a:avLst/>
+          </a:prstGeom>
+          <a:noFill/>
+        </p:spPr>
+        <p:txBody>
+          <a:bodyPr wrap="square" anchor="ctr"/>
+          <a:lstStyle/>
+          <a:p>
+            <a:r>
+              <a:rPr sz="1500" b="1" i="0">
+                <a:solidFill>
+                  <a:srgbClr val="333333"/>
+                </a:solidFill>
+                <a:latin typeface="Calibri"/>
+              </a:rPr>
+              <a:t>EL GUION DE PRUEBA</a:t>
+            </a:r>
+            <a:r>
+              <a:rPr sz="1500" b="0" i="0">
+                <a:solidFill>
+                  <a:srgbClr val="333333"/>
+                </a:solidFill>
+                <a:latin typeface="Calibri"/>
+              </a:rPr>
+              <a:t> — Tres tareas para pedirle a una persona ajena, salidas de los </a:t>
+            </a:r>
+            <a:r>
+              <a:rPr sz="1500" b="1" i="0">
+                <a:solidFill>
+                  <a:srgbClr val="333333"/>
+                </a:solidFill>
+                <a:latin typeface="Calibri"/>
+              </a:rPr>
+              <a:t>criterios de aceptación de la sesión 7</a:t>
+            </a:r>
+            <a:r>
+              <a:rPr sz="1500" b="0" i="0">
+                <a:solidFill>
+                  <a:srgbClr val="333333"/>
+                </a:solidFill>
+                <a:latin typeface="Calibri"/>
+              </a:rPr>
+              <a:t>, y una de ellas sobre el caso en que el sistema </a:t>
+            </a:r>
+            <a:r>
+              <a:rPr sz="1500" b="1" i="0">
+                <a:solidFill>
+                  <a:srgbClr val="333333"/>
+                </a:solidFill>
+                <a:latin typeface="Calibri"/>
+              </a:rPr>
+              <a:t>no</a:t>
+            </a:r>
+            <a:r>
+              <a:rPr sz="1500" b="0" i="0">
+                <a:solidFill>
+                  <a:srgbClr val="333333"/>
+                </a:solidFill>
+                <a:latin typeface="Calibri"/>
+              </a:rPr>
+              <a:t> tiene la respuesta.</a:t>
+            </a:r>
+          </a:p>
+        </p:txBody>
+      </p:sp>
+      <p:sp>
+        <p:nvSpPr>
+          <p:cNvPr id="26" name="TextBox 25"/>
+          <p:cNvSpPr txBox="1"/>
+          <p:nvPr/>
+        </p:nvSpPr>
+        <p:spPr>
+          <a:xfrm>
+            <a:off x="11185855" y="6473952"/>
+            <a:ext cx="640080" cy="274320"/>
+          </a:xfrm>
+          <a:prstGeom prst="rect">
+            <a:avLst/>
+          </a:prstGeom>
+          <a:noFill/>
+        </p:spPr>
+        <p:txBody>
+          <a:bodyPr wrap="square">
+            <a:spAutoFit/>
+          </a:bodyPr>
+          <a:lstStyle/>
+          <a:p>
+            <a:pPr algn="r"/>
+            <a:r>
+              <a:rPr sz="1100" b="0" i="0">
+                <a:solidFill>
+                  <a:srgbClr val="666666"/>
+                </a:solidFill>
+                <a:latin typeface="Calibri"/>
+              </a:rPr>
+              <a:t>20</a:t>
+            </a:r>
+          </a:p>
+        </p:txBody>
+      </p:sp>
+    </p:spTree>
+  </p:cSld>
+  <p:clrMapOvr>
+    <a:masterClrMapping/>
+  </p:clrMapOvr>
+</p:sld>
+</file>
+
+<file path=ppt/slides/slide21.xml><?xml version="1.0" encoding="utf-8"?>
+<p:sld xmlns:a="http://schemas.openxmlformats.org/drawingml/2006/main" xmlns:p="http://schemas.openxmlformats.org/presentationml/2006/main" xmlns:r="http://schemas.openxmlformats.org/officeDocument/2006/relationships">
+  <p:cSld>
+    <p:bg>
+      <p:bgPr>
+        <a:solidFill>
+          <a:srgbClr val="FFFFFF"/>
+        </a:solidFill>
+        <a:effectLst/>
+      </p:bgPr>
+    </p:bg>
+    <p:spTree>
+      <p:nvGrpSpPr>
+        <p:cNvPr id="1" name=""/>
+        <p:cNvGrpSpPr/>
+        <p:nvPr/>
+      </p:nvGrpSpPr>
+      <p:grpSpPr/>
+      <p:sp>
+        <p:nvSpPr>
+          <p:cNvPr id="2" name="Rectangle 1"/>
+          <p:cNvSpPr/>
+          <p:nvPr/>
+        </p:nvSpPr>
+        <p:spPr>
+          <a:xfrm>
+            <a:off x="0" y="0"/>
+            <a:ext cx="12191695" cy="1170432"/>
+          </a:xfrm>
+          <a:prstGeom prst="rect">
+            <a:avLst/>
+          </a:prstGeom>
+          <a:solidFill>
+            <a:srgbClr val="095292"/>
+          </a:solidFill>
+          <a:ln>
+            <a:noFill/>
+          </a:ln>
+        </p:spPr>
+        <p:style>
+          <a:lnRef idx="1">
+            <a:schemeClr val="accent1"/>
+          </a:lnRef>
+          <a:fillRef idx="3">
+            <a:schemeClr val="accent1"/>
+          </a:fillRef>
+          <a:effectRef idx="2">
+            <a:schemeClr val="accent1"/>
+          </a:effectRef>
+          <a:fontRef idx="minor">
+            <a:schemeClr val="lt1"/>
+          </a:fontRef>
+        </p:style>
+        <p:txBody>
+          <a:bodyPr rtlCol="0" anchor="ctr"/>
+          <a:lstStyle/>
+          <a:p>
+            <a:pPr algn="ctr"/>
+          </a:p>
+        </p:txBody>
+      </p:sp>
+      <p:sp>
+        <p:nvSpPr>
+          <p:cNvPr id="3" name="Rectangle 2"/>
+          <p:cNvSpPr/>
+          <p:nvPr/>
+        </p:nvSpPr>
+        <p:spPr>
+          <a:xfrm>
+            <a:off x="0" y="1170432"/>
+            <a:ext cx="12191695" cy="41148"/>
+          </a:xfrm>
+          <a:prstGeom prst="rect">
+            <a:avLst/>
+          </a:prstGeom>
+          <a:solidFill>
+            <a:srgbClr val="FFD000"/>
+          </a:solidFill>
+          <a:ln>
+            <a:noFill/>
+          </a:ln>
+        </p:spPr>
+        <p:style>
+          <a:lnRef idx="1">
+            <a:schemeClr val="accent1"/>
+          </a:lnRef>
+          <a:fillRef idx="3">
+            <a:schemeClr val="accent1"/>
+          </a:fillRef>
+          <a:effectRef idx="2">
+            <a:schemeClr val="accent1"/>
+          </a:effectRef>
+          <a:fontRef idx="minor">
+            <a:schemeClr val="lt1"/>
+          </a:fontRef>
+        </p:style>
+        <p:txBody>
+          <a:bodyPr rtlCol="0" anchor="ctr"/>
+          <a:lstStyle/>
+          <a:p>
+            <a:pPr algn="ctr"/>
+          </a:p>
+        </p:txBody>
+      </p:sp>
+      <p:sp>
+        <p:nvSpPr>
+          <p:cNvPr id="4" name="TextBox 3"/>
+          <p:cNvSpPr txBox="1"/>
+          <p:nvPr/>
+        </p:nvSpPr>
+        <p:spPr>
+          <a:xfrm>
+            <a:off x="457200" y="164592"/>
+            <a:ext cx="11277295" cy="384048"/>
+          </a:xfrm>
+          <a:prstGeom prst="rect">
+            <a:avLst/>
+          </a:prstGeom>
+          <a:noFill/>
+        </p:spPr>
+        <p:txBody>
+          <a:bodyPr wrap="square">
+            <a:spAutoFit/>
+          </a:bodyPr>
+          <a:lstStyle/>
+          <a:p>
+            <a:r>
+              <a:rPr sz="2600" b="1" i="0">
+                <a:solidFill>
+                  <a:srgbClr val="FFFFFF"/>
+                </a:solidFill>
+                <a:latin typeface="Calibri"/>
+              </a:rPr>
+              <a:t>Cómo se expone en 3 minutos</a:t>
+            </a:r>
+          </a:p>
+        </p:txBody>
+      </p:sp>
+      <p:sp>
+        <p:nvSpPr>
+          <p:cNvPr id="5" name="TextBox 4"/>
+          <p:cNvSpPr txBox="1"/>
+          <p:nvPr/>
+        </p:nvSpPr>
+        <p:spPr>
+          <a:xfrm>
+            <a:off x="457200" y="566928"/>
+            <a:ext cx="11277295" cy="411480"/>
+          </a:xfrm>
+          <a:prstGeom prst="rect">
+            <a:avLst/>
+          </a:prstGeom>
+          <a:noFill/>
+        </p:spPr>
+        <p:txBody>
+          <a:bodyPr wrap="square">
+            <a:spAutoFit/>
+          </a:bodyPr>
+          <a:lstStyle/>
+          <a:p>
+            <a:r>
+              <a:rPr sz="1400" b="0" i="0">
+                <a:solidFill>
+                  <a:srgbClr val="B8D8EE"/>
+                </a:solidFill>
+                <a:latin typeface="Calibri"/>
+              </a:rPr>
+              <a:t>Habla el vocero con la pantalla ya compartida · cronómetro en pantalla · se corta al llegar a cero</a:t>
+            </a:r>
+          </a:p>
+        </p:txBody>
+      </p:sp>
+      <p:sp>
+        <p:nvSpPr>
+          <p:cNvPr id="6" name="Rounded Rectangle 5"/>
+          <p:cNvSpPr/>
+          <p:nvPr/>
+        </p:nvSpPr>
+        <p:spPr>
+          <a:xfrm>
+            <a:off x="457200" y="1444752"/>
+            <a:ext cx="11277295" cy="908913"/>
+          </a:xfrm>
+          <a:prstGeom prst="roundRect">
+            <a:avLst>
+              <a:gd name="adj" fmla="val 12000"/>
+            </a:avLst>
+          </a:prstGeom>
+          <a:solidFill>
+            <a:srgbClr val="F2F2F2"/>
+          </a:solidFill>
+          <a:ln>
+            <a:noFill/>
+          </a:ln>
+        </p:spPr>
+        <p:style>
+          <a:lnRef idx="1">
+            <a:schemeClr val="accent1"/>
+          </a:lnRef>
+          <a:fillRef idx="3">
+            <a:schemeClr val="accent1"/>
+          </a:fillRef>
+          <a:effectRef idx="2">
+            <a:schemeClr val="accent1"/>
+          </a:effectRef>
+          <a:fontRef idx="minor">
+            <a:schemeClr val="lt1"/>
+          </a:fontRef>
+        </p:style>
+        <p:txBody>
+          <a:bodyPr rtlCol="0" anchor="ctr"/>
+          <a:lstStyle/>
+          <a:p>
+            <a:pPr algn="ctr"/>
+          </a:p>
+        </p:txBody>
+      </p:sp>
+      <p:sp>
+        <p:nvSpPr>
+          <p:cNvPr id="7" name="Rounded Rectangle 6"/>
+          <p:cNvSpPr/>
+          <p:nvPr/>
+        </p:nvSpPr>
+        <p:spPr>
+          <a:xfrm>
+            <a:off x="594360" y="1679752"/>
+            <a:ext cx="438912" cy="438912"/>
+          </a:xfrm>
+          <a:prstGeom prst="roundRect">
+            <a:avLst>
+              <a:gd name="adj" fmla="val 12000"/>
+            </a:avLst>
+          </a:prstGeom>
+          <a:solidFill>
+            <a:srgbClr val="095292"/>
+          </a:solidFill>
+          <a:ln>
+            <a:noFill/>
+          </a:ln>
+        </p:spPr>
+        <p:style>
+          <a:lnRef idx="1">
+            <a:schemeClr val="accent1"/>
+          </a:lnRef>
+          <a:fillRef idx="3">
+            <a:schemeClr val="accent1"/>
+          </a:fillRef>
+          <a:effectRef idx="2">
+            <a:schemeClr val="accent1"/>
+          </a:effectRef>
+          <a:fontRef idx="minor">
+            <a:schemeClr val="lt1"/>
+          </a:fontRef>
+        </p:style>
+        <p:txBody>
+          <a:bodyPr rtlCol="0" anchor="ctr"/>
+          <a:lstStyle/>
+          <a:p>
+            <a:pPr algn="ctr"/>
+          </a:p>
+        </p:txBody>
+      </p:sp>
+      <p:sp>
+        <p:nvSpPr>
+          <p:cNvPr id="8" name="TextBox 7"/>
+          <p:cNvSpPr txBox="1"/>
+          <p:nvPr/>
+        </p:nvSpPr>
+        <p:spPr>
+          <a:xfrm>
+            <a:off x="594360" y="1679752"/>
+            <a:ext cx="438912" cy="438912"/>
+          </a:xfrm>
+          <a:prstGeom prst="rect">
+            <a:avLst/>
+          </a:prstGeom>
+          <a:noFill/>
+        </p:spPr>
+        <p:txBody>
+          <a:bodyPr wrap="square" anchor="ctr"/>
+          <a:lstStyle/>
+          <a:p>
+            <a:pPr algn="ctr"/>
+            <a:r>
+              <a:rPr sz="1600" b="1" i="0">
+                <a:solidFill>
+                  <a:srgbClr val="FFFFFF"/>
+                </a:solidFill>
+                <a:latin typeface="Calibri"/>
+              </a:rPr>
+              <a:t>1</a:t>
+            </a:r>
+          </a:p>
+        </p:txBody>
+      </p:sp>
+      <p:sp>
+        <p:nvSpPr>
+          <p:cNvPr id="9" name="TextBox 8"/>
+          <p:cNvSpPr txBox="1"/>
+          <p:nvPr/>
+        </p:nvSpPr>
+        <p:spPr>
+          <a:xfrm>
+            <a:off x="1188720" y="1536192"/>
+            <a:ext cx="10271455" cy="744321"/>
+          </a:xfrm>
+          <a:prstGeom prst="rect">
+            <a:avLst/>
+          </a:prstGeom>
+          <a:noFill/>
+        </p:spPr>
+        <p:txBody>
+          <a:bodyPr wrap="square" anchor="ctr"/>
+          <a:lstStyle/>
+          <a:p>
+            <a:r>
+              <a:rPr sz="1500" b="1" i="0">
+                <a:solidFill>
+                  <a:srgbClr val="095292"/>
+                </a:solidFill>
+                <a:latin typeface="Calibri"/>
+              </a:rPr>
+              <a:t>30 s · El flujo</a:t>
+            </a:r>
+          </a:p>
+          <a:p>
+            <a:pPr>
+              <a:spcBef>
+                <a:spcPts val="200"/>
+              </a:spcBef>
+            </a:pPr>
+            <a:r>
+              <a:rPr sz="1300" b="0" i="0">
+                <a:solidFill>
+                  <a:srgbClr val="333333"/>
+                </a:solidFill>
+                <a:latin typeface="Calibri"/>
+              </a:rPr>
+              <a:t>Los tres pasos y para qué existe cada pantalla.</a:t>
+            </a:r>
+          </a:p>
+        </p:txBody>
+      </p:sp>
+      <p:sp>
+        <p:nvSpPr>
+          <p:cNvPr id="10" name="Rounded Rectangle 9"/>
+          <p:cNvSpPr/>
+          <p:nvPr/>
+        </p:nvSpPr>
+        <p:spPr>
+          <a:xfrm>
+            <a:off x="457200" y="2445105"/>
+            <a:ext cx="11277295" cy="908913"/>
+          </a:xfrm>
+          <a:prstGeom prst="roundRect">
+            <a:avLst>
+              <a:gd name="adj" fmla="val 12000"/>
+            </a:avLst>
+          </a:prstGeom>
+          <a:solidFill>
+            <a:srgbClr val="E8F4FA"/>
+          </a:solidFill>
+          <a:ln>
+            <a:noFill/>
+          </a:ln>
+        </p:spPr>
+        <p:style>
+          <a:lnRef idx="1">
+            <a:schemeClr val="accent1"/>
+          </a:lnRef>
+          <a:fillRef idx="3">
+            <a:schemeClr val="accent1"/>
+          </a:fillRef>
+          <a:effectRef idx="2">
+            <a:schemeClr val="accent1"/>
+          </a:effectRef>
+          <a:fontRef idx="minor">
+            <a:schemeClr val="lt1"/>
+          </a:fontRef>
+        </p:style>
+        <p:txBody>
+          <a:bodyPr rtlCol="0" anchor="ctr"/>
+          <a:lstStyle/>
+          <a:p>
+            <a:pPr algn="ctr"/>
+          </a:p>
+        </p:txBody>
+      </p:sp>
+      <p:sp>
+        <p:nvSpPr>
+          <p:cNvPr id="11" name="Rounded Rectangle 10"/>
+          <p:cNvSpPr/>
+          <p:nvPr/>
+        </p:nvSpPr>
+        <p:spPr>
+          <a:xfrm>
+            <a:off x="594360" y="2680106"/>
+            <a:ext cx="438912" cy="438912"/>
+          </a:xfrm>
+          <a:prstGeom prst="roundRect">
+            <a:avLst>
+              <a:gd name="adj" fmla="val 12000"/>
+            </a:avLst>
+          </a:prstGeom>
+          <a:solidFill>
+            <a:srgbClr val="095292"/>
+          </a:solidFill>
+          <a:ln>
+            <a:noFill/>
+          </a:ln>
+        </p:spPr>
+        <p:style>
+          <a:lnRef idx="1">
+            <a:schemeClr val="accent1"/>
+          </a:lnRef>
+          <a:fillRef idx="3">
+            <a:schemeClr val="accent1"/>
+          </a:fillRef>
+          <a:effectRef idx="2">
+            <a:schemeClr val="accent1"/>
+          </a:effectRef>
+          <a:fontRef idx="minor">
+            <a:schemeClr val="lt1"/>
+          </a:fontRef>
+        </p:style>
+        <p:txBody>
+          <a:bodyPr rtlCol="0" anchor="ctr"/>
+          <a:lstStyle/>
+          <a:p>
+            <a:pPr algn="ctr"/>
+          </a:p>
+        </p:txBody>
+      </p:sp>
+      <p:sp>
+        <p:nvSpPr>
+          <p:cNvPr id="12" name="TextBox 11"/>
+          <p:cNvSpPr txBox="1"/>
+          <p:nvPr/>
+        </p:nvSpPr>
+        <p:spPr>
+          <a:xfrm>
+            <a:off x="594360" y="2680106"/>
+            <a:ext cx="438912" cy="438912"/>
+          </a:xfrm>
+          <a:prstGeom prst="rect">
+            <a:avLst/>
+          </a:prstGeom>
+          <a:noFill/>
+        </p:spPr>
+        <p:txBody>
+          <a:bodyPr wrap="square" anchor="ctr"/>
+          <a:lstStyle/>
+          <a:p>
+            <a:pPr algn="ctr"/>
+            <a:r>
+              <a:rPr sz="1600" b="1" i="0">
+                <a:solidFill>
+                  <a:srgbClr val="FFFFFF"/>
+                </a:solidFill>
+                <a:latin typeface="Calibri"/>
+              </a:rPr>
+              <a:t>2</a:t>
+            </a:r>
+          </a:p>
+        </p:txBody>
+      </p:sp>
+      <p:sp>
+        <p:nvSpPr>
+          <p:cNvPr id="13" name="TextBox 12"/>
+          <p:cNvSpPr txBox="1"/>
+          <p:nvPr/>
+        </p:nvSpPr>
+        <p:spPr>
+          <a:xfrm>
+            <a:off x="1188720" y="2536545"/>
+            <a:ext cx="10271455" cy="744321"/>
+          </a:xfrm>
+          <a:prstGeom prst="rect">
+            <a:avLst/>
+          </a:prstGeom>
+          <a:noFill/>
+        </p:spPr>
+        <p:txBody>
+          <a:bodyPr wrap="square" anchor="ctr"/>
+          <a:lstStyle/>
+          <a:p>
+            <a:r>
+              <a:rPr sz="1500" b="1" i="0">
+                <a:solidFill>
+                  <a:srgbClr val="095292"/>
+                </a:solidFill>
+                <a:latin typeface="Calibri"/>
+              </a:rPr>
+              <a:t>50 s · El camino principal</a:t>
+            </a:r>
+          </a:p>
+          <a:p>
+            <a:pPr>
+              <a:spcBef>
+                <a:spcPts val="200"/>
+              </a:spcBef>
+            </a:pPr>
+            <a:r>
+              <a:rPr sz="1300" b="0" i="0">
+                <a:solidFill>
+                  <a:srgbClr val="333333"/>
+                </a:solidFill>
+                <a:latin typeface="Calibri"/>
+              </a:rPr>
+              <a:t>Qué hace el usuario el 90 % de las veces, señalado en el dibujo.</a:t>
+            </a:r>
+          </a:p>
+        </p:txBody>
+      </p:sp>
+      <p:sp>
+        <p:nvSpPr>
+          <p:cNvPr id="14" name="Rounded Rectangle 13"/>
+          <p:cNvSpPr/>
+          <p:nvPr/>
+        </p:nvSpPr>
+        <p:spPr>
+          <a:xfrm>
+            <a:off x="457200" y="3445459"/>
+            <a:ext cx="11277295" cy="908913"/>
+          </a:xfrm>
+          <a:prstGeom prst="roundRect">
+            <a:avLst>
+              <a:gd name="adj" fmla="val 12000"/>
+            </a:avLst>
+          </a:prstGeom>
+          <a:solidFill>
+            <a:srgbClr val="F2F2F2"/>
+          </a:solidFill>
+          <a:ln>
+            <a:noFill/>
+          </a:ln>
+        </p:spPr>
+        <p:style>
+          <a:lnRef idx="1">
+            <a:schemeClr val="accent1"/>
+          </a:lnRef>
+          <a:fillRef idx="3">
+            <a:schemeClr val="accent1"/>
+          </a:fillRef>
+          <a:effectRef idx="2">
+            <a:schemeClr val="accent1"/>
+          </a:effectRef>
+          <a:fontRef idx="minor">
+            <a:schemeClr val="lt1"/>
+          </a:fontRef>
+        </p:style>
+        <p:txBody>
+          <a:bodyPr rtlCol="0" anchor="ctr"/>
+          <a:lstStyle/>
+          <a:p>
+            <a:pPr algn="ctr"/>
+          </a:p>
+        </p:txBody>
+      </p:sp>
+      <p:sp>
+        <p:nvSpPr>
+          <p:cNvPr id="15" name="Rounded Rectangle 14"/>
+          <p:cNvSpPr/>
+          <p:nvPr/>
+        </p:nvSpPr>
+        <p:spPr>
+          <a:xfrm>
+            <a:off x="594360" y="3680460"/>
+            <a:ext cx="438912" cy="438912"/>
+          </a:xfrm>
+          <a:prstGeom prst="roundRect">
+            <a:avLst>
+              <a:gd name="adj" fmla="val 12000"/>
+            </a:avLst>
+          </a:prstGeom>
+          <a:solidFill>
+            <a:srgbClr val="095292"/>
+          </a:solidFill>
+          <a:ln>
+            <a:noFill/>
+          </a:ln>
+        </p:spPr>
+        <p:style>
+          <a:lnRef idx="1">
+            <a:schemeClr val="accent1"/>
+          </a:lnRef>
+          <a:fillRef idx="3">
+            <a:schemeClr val="accent1"/>
+          </a:fillRef>
+          <a:effectRef idx="2">
+            <a:schemeClr val="accent1"/>
+          </a:effectRef>
+          <a:fontRef idx="minor">
+            <a:schemeClr val="lt1"/>
+          </a:fontRef>
+        </p:style>
+        <p:txBody>
+          <a:bodyPr rtlCol="0" anchor="ctr"/>
+          <a:lstStyle/>
+          <a:p>
+            <a:pPr algn="ctr"/>
+          </a:p>
+        </p:txBody>
+      </p:sp>
+      <p:sp>
+        <p:nvSpPr>
+          <p:cNvPr id="16" name="TextBox 15"/>
+          <p:cNvSpPr txBox="1"/>
+          <p:nvPr/>
+        </p:nvSpPr>
+        <p:spPr>
+          <a:xfrm>
+            <a:off x="594360" y="3680460"/>
+            <a:ext cx="438912" cy="438912"/>
+          </a:xfrm>
+          <a:prstGeom prst="rect">
+            <a:avLst/>
+          </a:prstGeom>
+          <a:noFill/>
+        </p:spPr>
+        <p:txBody>
+          <a:bodyPr wrap="square" anchor="ctr"/>
+          <a:lstStyle/>
+          <a:p>
+            <a:pPr algn="ctr"/>
+            <a:r>
+              <a:rPr sz="1600" b="1" i="0">
+                <a:solidFill>
+                  <a:srgbClr val="FFFFFF"/>
+                </a:solidFill>
+                <a:latin typeface="Calibri"/>
+              </a:rPr>
+              <a:t>3</a:t>
+            </a:r>
+          </a:p>
+        </p:txBody>
+      </p:sp>
+      <p:sp>
+        <p:nvSpPr>
+          <p:cNvPr id="17" name="TextBox 16"/>
+          <p:cNvSpPr txBox="1"/>
+          <p:nvPr/>
+        </p:nvSpPr>
+        <p:spPr>
+          <a:xfrm>
+            <a:off x="1188720" y="3536899"/>
+            <a:ext cx="10271455" cy="744321"/>
+          </a:xfrm>
+          <a:prstGeom prst="rect">
+            <a:avLst/>
+          </a:prstGeom>
+          <a:noFill/>
+        </p:spPr>
+        <p:txBody>
+          <a:bodyPr wrap="square" anchor="ctr"/>
+          <a:lstStyle/>
+          <a:p>
+            <a:r>
+              <a:rPr sz="1500" b="1" i="0">
+                <a:solidFill>
+                  <a:srgbClr val="095292"/>
+                </a:solidFill>
+                <a:latin typeface="Calibri"/>
+              </a:rPr>
+              <a:t>50 s · Qué se ve cuando falla</a:t>
+            </a:r>
+          </a:p>
+          <a:p>
+            <a:pPr>
+              <a:spcBef>
+                <a:spcPts val="200"/>
+              </a:spcBef>
+            </a:pPr>
+            <a:r>
+              <a:rPr sz="1300" b="0" i="0">
+                <a:solidFill>
+                  <a:srgbClr val="333333"/>
+                </a:solidFill>
+                <a:latin typeface="Calibri"/>
+              </a:rPr>
+              <a:t>Estado vacío y de error, con el mensaje leído tal cual. Es el minuto obligatorio.</a:t>
+            </a:r>
+          </a:p>
+        </p:txBody>
+      </p:sp>
+      <p:sp>
+        <p:nvSpPr>
+          <p:cNvPr id="18" name="Rounded Rectangle 17"/>
+          <p:cNvSpPr/>
+          <p:nvPr/>
+        </p:nvSpPr>
+        <p:spPr>
+          <a:xfrm>
+            <a:off x="457200" y="4445812"/>
+            <a:ext cx="11277295" cy="908913"/>
+          </a:xfrm>
+          <a:prstGeom prst="roundRect">
+            <a:avLst>
+              <a:gd name="adj" fmla="val 12000"/>
+            </a:avLst>
+          </a:prstGeom>
+          <a:solidFill>
+            <a:srgbClr val="E8F4FA"/>
+          </a:solidFill>
+          <a:ln>
+            <a:noFill/>
+          </a:ln>
+        </p:spPr>
+        <p:style>
+          <a:lnRef idx="1">
+            <a:schemeClr val="accent1"/>
+          </a:lnRef>
+          <a:fillRef idx="3">
+            <a:schemeClr val="accent1"/>
+          </a:fillRef>
+          <a:effectRef idx="2">
+            <a:schemeClr val="accent1"/>
+          </a:effectRef>
+          <a:fontRef idx="minor">
+            <a:schemeClr val="lt1"/>
+          </a:fontRef>
+        </p:style>
+        <p:txBody>
+          <a:bodyPr rtlCol="0" anchor="ctr"/>
+          <a:lstStyle/>
+          <a:p>
+            <a:pPr algn="ctr"/>
+          </a:p>
+        </p:txBody>
+      </p:sp>
+      <p:sp>
+        <p:nvSpPr>
+          <p:cNvPr id="19" name="Rounded Rectangle 18"/>
+          <p:cNvSpPr/>
+          <p:nvPr/>
+        </p:nvSpPr>
+        <p:spPr>
+          <a:xfrm>
+            <a:off x="594360" y="4680813"/>
+            <a:ext cx="438912" cy="438912"/>
+          </a:xfrm>
+          <a:prstGeom prst="roundRect">
+            <a:avLst>
+              <a:gd name="adj" fmla="val 12000"/>
+            </a:avLst>
+          </a:prstGeom>
+          <a:solidFill>
+            <a:srgbClr val="095292"/>
+          </a:solidFill>
+          <a:ln>
+            <a:noFill/>
+          </a:ln>
+        </p:spPr>
+        <p:style>
+          <a:lnRef idx="1">
+            <a:schemeClr val="accent1"/>
+          </a:lnRef>
+          <a:fillRef idx="3">
+            <a:schemeClr val="accent1"/>
+          </a:fillRef>
+          <a:effectRef idx="2">
+            <a:schemeClr val="accent1"/>
+          </a:effectRef>
+          <a:fontRef idx="minor">
+            <a:schemeClr val="lt1"/>
+          </a:fontRef>
+        </p:style>
+        <p:txBody>
+          <a:bodyPr rtlCol="0" anchor="ctr"/>
+          <a:lstStyle/>
+          <a:p>
+            <a:pPr algn="ctr"/>
+          </a:p>
+        </p:txBody>
+      </p:sp>
+      <p:sp>
+        <p:nvSpPr>
+          <p:cNvPr id="20" name="TextBox 19"/>
+          <p:cNvSpPr txBox="1"/>
+          <p:nvPr/>
+        </p:nvSpPr>
+        <p:spPr>
+          <a:xfrm>
+            <a:off x="594360" y="4680813"/>
+            <a:ext cx="438912" cy="438912"/>
+          </a:xfrm>
+          <a:prstGeom prst="rect">
+            <a:avLst/>
+          </a:prstGeom>
+          <a:noFill/>
+        </p:spPr>
+        <p:txBody>
+          <a:bodyPr wrap="square" anchor="ctr"/>
+          <a:lstStyle/>
+          <a:p>
+            <a:pPr algn="ctr"/>
+            <a:r>
+              <a:rPr sz="1600" b="1" i="0">
+                <a:solidFill>
+                  <a:srgbClr val="FFFFFF"/>
+                </a:solidFill>
+                <a:latin typeface="Calibri"/>
+              </a:rPr>
+              <a:t>4</a:t>
+            </a:r>
+          </a:p>
+        </p:txBody>
+      </p:sp>
+      <p:sp>
+        <p:nvSpPr>
+          <p:cNvPr id="21" name="TextBox 20"/>
+          <p:cNvSpPr txBox="1"/>
+          <p:nvPr/>
+        </p:nvSpPr>
+        <p:spPr>
+          <a:xfrm>
+            <a:off x="1188720" y="4537252"/>
+            <a:ext cx="10271455" cy="744321"/>
+          </a:xfrm>
+          <a:prstGeom prst="rect">
+            <a:avLst/>
+          </a:prstGeom>
+          <a:noFill/>
+        </p:spPr>
+        <p:txBody>
+          <a:bodyPr wrap="square" anchor="ctr"/>
+          <a:lstStyle/>
+          <a:p>
+            <a:r>
+              <a:rPr sz="1500" b="1" i="0">
+                <a:solidFill>
+                  <a:srgbClr val="095292"/>
+                </a:solidFill>
+                <a:latin typeface="Calibri"/>
+              </a:rPr>
+              <a:t>30 s · Los textos</a:t>
+            </a:r>
+          </a:p>
+          <a:p>
+            <a:pPr>
+              <a:spcBef>
+                <a:spcPts val="200"/>
+              </a:spcBef>
+            </a:pPr>
+            <a:r>
+              <a:rPr sz="1300" b="0" i="0">
+                <a:solidFill>
+                  <a:srgbClr val="333333"/>
+                </a:solidFill>
+                <a:latin typeface="Calibri"/>
+              </a:rPr>
+              <a:t>Dos rótulos que costó decidir y por qué quedaron así.</a:t>
+            </a:r>
+          </a:p>
+        </p:txBody>
+      </p:sp>
+      <p:sp>
+        <p:nvSpPr>
+          <p:cNvPr id="22" name="Rounded Rectangle 21"/>
+          <p:cNvSpPr/>
+          <p:nvPr/>
+        </p:nvSpPr>
+        <p:spPr>
+          <a:xfrm>
+            <a:off x="457200" y="5446166"/>
+            <a:ext cx="11277295" cy="908913"/>
+          </a:xfrm>
+          <a:prstGeom prst="roundRect">
+            <a:avLst>
+              <a:gd name="adj" fmla="val 12000"/>
+            </a:avLst>
+          </a:prstGeom>
+          <a:solidFill>
+            <a:srgbClr val="F2F2F2"/>
+          </a:solidFill>
+          <a:ln>
+            <a:noFill/>
+          </a:ln>
+        </p:spPr>
+        <p:style>
+          <a:lnRef idx="1">
+            <a:schemeClr val="accent1"/>
+          </a:lnRef>
+          <a:fillRef idx="3">
+            <a:schemeClr val="accent1"/>
+          </a:fillRef>
+          <a:effectRef idx="2">
+            <a:schemeClr val="accent1"/>
+          </a:effectRef>
+          <a:fontRef idx="minor">
+            <a:schemeClr val="lt1"/>
+          </a:fontRef>
+        </p:style>
+        <p:txBody>
+          <a:bodyPr rtlCol="0" anchor="ctr"/>
+          <a:lstStyle/>
+          <a:p>
+            <a:pPr algn="ctr"/>
+          </a:p>
+        </p:txBody>
+      </p:sp>
+      <p:sp>
+        <p:nvSpPr>
+          <p:cNvPr id="23" name="Rounded Rectangle 22"/>
+          <p:cNvSpPr/>
+          <p:nvPr/>
+        </p:nvSpPr>
+        <p:spPr>
+          <a:xfrm>
+            <a:off x="594360" y="5681167"/>
+            <a:ext cx="438912" cy="438912"/>
+          </a:xfrm>
+          <a:prstGeom prst="roundRect">
+            <a:avLst>
+              <a:gd name="adj" fmla="val 12000"/>
+            </a:avLst>
+          </a:prstGeom>
+          <a:solidFill>
+            <a:srgbClr val="095292"/>
+          </a:solidFill>
+          <a:ln>
+            <a:noFill/>
+          </a:ln>
+        </p:spPr>
+        <p:style>
+          <a:lnRef idx="1">
+            <a:schemeClr val="accent1"/>
+          </a:lnRef>
+          <a:fillRef idx="3">
+            <a:schemeClr val="accent1"/>
+          </a:fillRef>
+          <a:effectRef idx="2">
+            <a:schemeClr val="accent1"/>
+          </a:effectRef>
+          <a:fontRef idx="minor">
+            <a:schemeClr val="lt1"/>
+          </a:fontRef>
+        </p:style>
+        <p:txBody>
+          <a:bodyPr rtlCol="0" anchor="ctr"/>
+          <a:lstStyle/>
+          <a:p>
+            <a:pPr algn="ctr"/>
+          </a:p>
+        </p:txBody>
+      </p:sp>
+      <p:sp>
+        <p:nvSpPr>
+          <p:cNvPr id="24" name="TextBox 23"/>
+          <p:cNvSpPr txBox="1"/>
+          <p:nvPr/>
+        </p:nvSpPr>
+        <p:spPr>
+          <a:xfrm>
+            <a:off x="594360" y="5681167"/>
+            <a:ext cx="438912" cy="438912"/>
+          </a:xfrm>
+          <a:prstGeom prst="rect">
+            <a:avLst/>
+          </a:prstGeom>
+          <a:noFill/>
+        </p:spPr>
+        <p:txBody>
+          <a:bodyPr wrap="square" anchor="ctr"/>
+          <a:lstStyle/>
+          <a:p>
+            <a:pPr algn="ctr"/>
+            <a:r>
+              <a:rPr sz="1600" b="1" i="0">
+                <a:solidFill>
+                  <a:srgbClr val="FFFFFF"/>
+                </a:solidFill>
+                <a:latin typeface="Calibri"/>
+              </a:rPr>
+              <a:t>5</a:t>
+            </a:r>
+          </a:p>
+        </p:txBody>
+      </p:sp>
+      <p:sp>
+        <p:nvSpPr>
+          <p:cNvPr id="25" name="TextBox 24"/>
+          <p:cNvSpPr txBox="1"/>
+          <p:nvPr/>
+        </p:nvSpPr>
+        <p:spPr>
+          <a:xfrm>
+            <a:off x="1188720" y="5537606"/>
+            <a:ext cx="10271455" cy="744321"/>
+          </a:xfrm>
+          <a:prstGeom prst="rect">
+            <a:avLst/>
+          </a:prstGeom>
+          <a:noFill/>
+        </p:spPr>
+        <p:txBody>
+          <a:bodyPr wrap="square" anchor="ctr"/>
+          <a:lstStyle/>
+          <a:p>
+            <a:r>
+              <a:rPr sz="1500" b="1" i="0">
+                <a:solidFill>
+                  <a:srgbClr val="095292"/>
+                </a:solidFill>
+                <a:latin typeface="Calibri"/>
+              </a:rPr>
+              <a:t>20 s · El guion de prueba</a:t>
+            </a:r>
+          </a:p>
+          <a:p>
+            <a:pPr>
+              <a:spcBef>
+                <a:spcPts val="200"/>
+              </a:spcBef>
+            </a:pPr>
+            <a:r>
+              <a:rPr sz="1300" b="0" i="0">
+                <a:solidFill>
+                  <a:srgbClr val="333333"/>
+                </a:solidFill>
+                <a:latin typeface="Calibri"/>
+              </a:rPr>
+              <a:t>Las tres tareas, y con qué rol van a probar.</a:t>
+            </a:r>
+          </a:p>
+        </p:txBody>
+      </p:sp>
+      <p:sp>
+        <p:nvSpPr>
+          <p:cNvPr id="26" name="TextBox 25"/>
+          <p:cNvSpPr txBox="1"/>
+          <p:nvPr/>
+        </p:nvSpPr>
+        <p:spPr>
+          <a:xfrm>
+            <a:off x="11185855" y="6473952"/>
+            <a:ext cx="640080" cy="274320"/>
+          </a:xfrm>
+          <a:prstGeom prst="rect">
+            <a:avLst/>
+          </a:prstGeom>
+          <a:noFill/>
+        </p:spPr>
+        <p:txBody>
+          <a:bodyPr wrap="square">
+            <a:spAutoFit/>
+          </a:bodyPr>
+          <a:lstStyle/>
+          <a:p>
+            <a:pPr algn="r"/>
+            <a:r>
+              <a:rPr sz="1100" b="0" i="0">
+                <a:solidFill>
+                  <a:srgbClr val="666666"/>
+                </a:solidFill>
+                <a:latin typeface="Calibri"/>
+              </a:rPr>
+              <a:t>21</a:t>
+            </a:r>
+          </a:p>
+        </p:txBody>
+      </p:sp>
+    </p:spTree>
+  </p:cSld>
+  <p:clrMapOvr>
+    <a:masterClrMapping/>
+  </p:clrMapOvr>
+</p:sld>
+</file>
+
+<file path=ppt/slides/slide22.xml><?xml version="1.0" encoding="utf-8"?>
+<p:sld xmlns:a="http://schemas.openxmlformats.org/drawingml/2006/main" xmlns:p="http://schemas.openxmlformats.org/presentationml/2006/main" xmlns:r="http://schemas.openxmlformats.org/officeDocument/2006/relationships">
+  <p:cSld>
+    <p:bg>
+      <p:bgPr>
+        <a:solidFill>
+          <a:srgbClr val="FFFFFF"/>
+        </a:solidFill>
+        <a:effectLst/>
+      </p:bgPr>
+    </p:bg>
+    <p:spTree>
+      <p:nvGrpSpPr>
+        <p:cNvPr id="1" name=""/>
+        <p:cNvGrpSpPr/>
+        <p:nvPr/>
+      </p:nvGrpSpPr>
+      <p:grpSpPr/>
+      <p:sp>
+        <p:nvSpPr>
+          <p:cNvPr id="2" name="Rectangle 1"/>
+          <p:cNvSpPr/>
+          <p:nvPr/>
+        </p:nvSpPr>
+        <p:spPr>
+          <a:xfrm>
+            <a:off x="0" y="0"/>
+            <a:ext cx="12191695" cy="960120"/>
+          </a:xfrm>
+          <a:prstGeom prst="rect">
+            <a:avLst/>
+          </a:prstGeom>
+          <a:solidFill>
+            <a:srgbClr val="095292"/>
+          </a:solidFill>
+          <a:ln>
+            <a:noFill/>
+          </a:ln>
+        </p:spPr>
+        <p:style>
+          <a:lnRef idx="1">
+            <a:schemeClr val="accent1"/>
+          </a:lnRef>
+          <a:fillRef idx="3">
+            <a:schemeClr val="accent1"/>
+          </a:fillRef>
+          <a:effectRef idx="2">
+            <a:schemeClr val="accent1"/>
+          </a:effectRef>
+          <a:fontRef idx="minor">
+            <a:schemeClr val="lt1"/>
+          </a:fontRef>
+        </p:style>
+        <p:txBody>
+          <a:bodyPr rtlCol="0" anchor="ctr"/>
+          <a:lstStyle/>
+          <a:p>
+            <a:pPr algn="ctr"/>
+          </a:p>
+        </p:txBody>
+      </p:sp>
+      <p:sp>
+        <p:nvSpPr>
+          <p:cNvPr id="3" name="Rectangle 2"/>
+          <p:cNvSpPr/>
+          <p:nvPr/>
+        </p:nvSpPr>
+        <p:spPr>
+          <a:xfrm>
+            <a:off x="0" y="960120"/>
+            <a:ext cx="12191695" cy="41148"/>
+          </a:xfrm>
+          <a:prstGeom prst="rect">
+            <a:avLst/>
+          </a:prstGeom>
+          <a:solidFill>
+            <a:srgbClr val="FFD000"/>
+          </a:solidFill>
+          <a:ln>
+            <a:noFill/>
+          </a:ln>
+        </p:spPr>
+        <p:style>
+          <a:lnRef idx="1">
+            <a:schemeClr val="accent1"/>
+          </a:lnRef>
+          <a:fillRef idx="3">
+            <a:schemeClr val="accent1"/>
+          </a:fillRef>
+          <a:effectRef idx="2">
+            <a:schemeClr val="accent1"/>
+          </a:effectRef>
+          <a:fontRef idx="minor">
+            <a:schemeClr val="lt1"/>
+          </a:fontRef>
+        </p:style>
+        <p:txBody>
+          <a:bodyPr rtlCol="0" anchor="ctr"/>
+          <a:lstStyle/>
+          <a:p>
+            <a:pPr algn="ctr"/>
+          </a:p>
+        </p:txBody>
+      </p:sp>
+      <p:sp>
+        <p:nvSpPr>
+          <p:cNvPr id="4" name="TextBox 3"/>
+          <p:cNvSpPr txBox="1"/>
+          <p:nvPr/>
+        </p:nvSpPr>
+        <p:spPr>
+          <a:xfrm>
+            <a:off x="457200" y="164592"/>
+            <a:ext cx="11277295" cy="502920"/>
+          </a:xfrm>
+          <a:prstGeom prst="rect">
+            <a:avLst/>
+          </a:prstGeom>
+          <a:noFill/>
+        </p:spPr>
+        <p:txBody>
+          <a:bodyPr wrap="square">
+            <a:spAutoFit/>
+          </a:bodyPr>
+          <a:lstStyle/>
+          <a:p>
+            <a:r>
+              <a:rPr sz="2600" b="1" i="0">
+                <a:solidFill>
+                  <a:srgbClr val="FFFFFF"/>
+                </a:solidFill>
+                <a:latin typeface="Calibri"/>
+              </a:rPr>
+              <a:t>Para la Clase 11</a:t>
+            </a:r>
+          </a:p>
+        </p:txBody>
+      </p:sp>
+      <p:sp>
+        <p:nvSpPr>
+          <p:cNvPr id="5" name="TextBox 4"/>
+          <p:cNvSpPr txBox="1"/>
+          <p:nvPr/>
+        </p:nvSpPr>
+        <p:spPr>
+          <a:xfrm>
+            <a:off x="457200" y="1170432"/>
+            <a:ext cx="11277295" cy="5230368"/>
+          </a:xfrm>
+          <a:prstGeom prst="rect">
+            <a:avLst/>
+          </a:prstGeom>
+          <a:noFill/>
+        </p:spPr>
+        <p:txBody>
+          <a:bodyPr wrap="square">
+            <a:spAutoFit/>
+          </a:bodyPr>
+          <a:lstStyle/>
+          <a:p>
+            <a:pPr>
+              <a:spcAft>
+                <a:spcPts val="800"/>
+              </a:spcAft>
+            </a:pPr>
+            <a:r>
+              <a:rPr sz="2000" b="0" i="0">
+                <a:solidFill>
+                  <a:srgbClr val="333333"/>
+                </a:solidFill>
+                <a:latin typeface="Calibri"/>
+              </a:rPr>
+              <a:t>–   </a:t>
+            </a:r>
+            <a:r>
+              <a:rPr sz="2000" b="1" i="0">
+                <a:solidFill>
+                  <a:srgbClr val="333333"/>
+                </a:solidFill>
+                <a:latin typeface="Calibri"/>
+              </a:rPr>
+              <a:t>Trabajo dirigido:</a:t>
+            </a:r>
+            <a:r>
+              <a:rPr sz="2000" b="0" i="0">
+                <a:solidFill>
+                  <a:srgbClr val="333333"/>
+                </a:solidFill>
+                <a:latin typeface="Calibri"/>
+              </a:rPr>
+              <a:t> Introducción a software de prototipado — terminar las tres pantallas con </a:t>
+            </a:r>
+            <a:r>
+              <a:rPr sz="2000" b="1" i="0">
+                <a:solidFill>
+                  <a:srgbClr val="333333"/>
+                </a:solidFill>
+                <a:latin typeface="Calibri"/>
+              </a:rPr>
+              <a:t>todos</a:t>
+            </a:r>
+            <a:r>
+              <a:rPr sz="2000" b="0" i="0">
+                <a:solidFill>
+                  <a:srgbClr val="333333"/>
+                </a:solidFill>
+                <a:latin typeface="Calibri"/>
+              </a:rPr>
+              <a:t> los textos reales y los tres estados dibujados, y dejar el PNG en la carpeta del equipo.</a:t>
+            </a:r>
+          </a:p>
+          <a:p>
+            <a:pPr>
+              <a:spcAft>
+                <a:spcPts val="800"/>
+              </a:spcAft>
+            </a:pPr>
+            <a:r>
+              <a:rPr sz="2000" b="0" i="0">
+                <a:solidFill>
+                  <a:srgbClr val="333333"/>
+                </a:solidFill>
+                <a:latin typeface="Calibri"/>
+              </a:rPr>
+              <a:t>–   </a:t>
+            </a:r>
+            <a:r>
+              <a:rPr sz="2000" b="1" i="0">
+                <a:solidFill>
+                  <a:srgbClr val="333333"/>
+                </a:solidFill>
+                <a:latin typeface="Calibri"/>
+              </a:rPr>
+              <a:t>Trabajo independiente:</a:t>
+            </a:r>
+            <a:r>
+              <a:rPr sz="2000" b="0" i="0">
+                <a:solidFill>
+                  <a:srgbClr val="333333"/>
+                </a:solidFill>
+                <a:latin typeface="Calibri"/>
+              </a:rPr>
+              <a:t> Práctica básica con herramientas digitales: convertir el prototipo en </a:t>
+            </a:r>
+            <a:r>
+              <a:rPr sz="2000" b="1" i="0">
+                <a:solidFill>
+                  <a:srgbClr val="333333"/>
+                </a:solidFill>
+                <a:latin typeface="Calibri"/>
+              </a:rPr>
+              <a:t>navegable</a:t>
+            </a:r>
+            <a:r>
+              <a:rPr sz="2000" b="0" i="0">
+                <a:solidFill>
+                  <a:srgbClr val="333333"/>
+                </a:solidFill>
+                <a:latin typeface="Calibri"/>
+              </a:rPr>
+              <a:t> —diapositivas enlazadas o enlaces entre marcos— para poder recorrerlo delante de una persona.</a:t>
+            </a:r>
+          </a:p>
+          <a:p>
+            <a:pPr>
+              <a:spcAft>
+                <a:spcPts val="800"/>
+              </a:spcAft>
+            </a:pPr>
+            <a:r>
+              <a:rPr sz="2000" b="0" i="0">
+                <a:solidFill>
+                  <a:srgbClr val="333333"/>
+                </a:solidFill>
+                <a:latin typeface="Calibri"/>
+              </a:rPr>
+              <a:t>–   </a:t>
+            </a:r>
+            <a:r>
+              <a:rPr sz="2000" b="1" i="0">
+                <a:solidFill>
+                  <a:srgbClr val="333333"/>
+                </a:solidFill>
+                <a:latin typeface="Calibri"/>
+              </a:rPr>
+              <a:t>Clase 11 · Taller de prototipado inicial con IA</a:t>
+            </a:r>
+            <a:r>
+              <a:rPr sz="2000" b="0" i="0">
+                <a:solidFill>
+                  <a:srgbClr val="333333"/>
+                </a:solidFill>
+                <a:latin typeface="Calibri"/>
+              </a:rPr>
+              <a:t> — </a:t>
+            </a:r>
+            <a:r>
+              <a:rPr sz="2000" b="1" i="0">
+                <a:solidFill>
+                  <a:srgbClr val="333333"/>
+                </a:solidFill>
+                <a:latin typeface="Calibri"/>
+              </a:rPr>
+              <a:t>prototipo v2 con IA autorizada</a:t>
+            </a:r>
+            <a:r>
+              <a:rPr sz="2000" b="0" i="0">
+                <a:solidFill>
+                  <a:srgbClr val="333333"/>
+                </a:solidFill>
+                <a:latin typeface="Calibri"/>
+              </a:rPr>
+              <a:t>: generar variantes, elegir con criterio y corregir lo que la IA no sabía. Y la </a:t>
+            </a:r>
+            <a:r>
+              <a:rPr sz="2000" b="1" i="0">
+                <a:solidFill>
+                  <a:srgbClr val="333333"/>
+                </a:solidFill>
+                <a:latin typeface="Calibri"/>
+              </a:rPr>
+              <a:t>evaluación del corte 2</a:t>
+            </a:r>
+            <a:r>
+              <a:rPr sz="2000" b="0" i="0">
+                <a:solidFill>
+                  <a:srgbClr val="333333"/>
+                </a:solidFill>
+                <a:latin typeface="Calibri"/>
+              </a:rPr>
+              <a:t> en la plataforma del curso, sobre las sesiones 7 a 11.</a:t>
+            </a:r>
+          </a:p>
+          <a:p>
+            <a:pPr>
+              <a:spcAft>
+                <a:spcPts val="800"/>
+              </a:spcAft>
+            </a:pPr>
+            <a:r>
+              <a:rPr sz="2000" b="0" i="0">
+                <a:solidFill>
+                  <a:srgbClr val="333333"/>
+                </a:solidFill>
+                <a:latin typeface="Calibri"/>
+              </a:rPr>
+              <a:t>–   </a:t>
+            </a:r>
+            <a:r>
+              <a:rPr sz="2000" b="1" i="0">
+                <a:solidFill>
+                  <a:srgbClr val="333333"/>
+                </a:solidFill>
+                <a:latin typeface="Calibri"/>
+              </a:rPr>
+              <a:t>Aviso:</a:t>
+            </a:r>
+            <a:r>
+              <a:rPr sz="2000" b="0" i="0">
+                <a:solidFill>
+                  <a:srgbClr val="333333"/>
+                </a:solidFill>
+                <a:latin typeface="Calibri"/>
+              </a:rPr>
+              <a:t> La sesión 11 </a:t>
+            </a:r>
+            <a:r>
+              <a:rPr sz="2000" b="1" i="0">
+                <a:solidFill>
+                  <a:srgbClr val="333333"/>
+                </a:solidFill>
+                <a:latin typeface="Calibri"/>
+              </a:rPr>
+              <a:t>cierra el corte 2</a:t>
+            </a:r>
+            <a:r>
+              <a:rPr sz="2000" b="0" i="0">
+                <a:solidFill>
+                  <a:srgbClr val="333333"/>
+                </a:solidFill>
+                <a:latin typeface="Calibri"/>
+              </a:rPr>
+              <a:t>: hay 20 minutos de evaluación al final, sobre las sesiones 7 a 11. Traigan el prototipo terminado y navegable — sin él no hay nada que corregir con IA, y ese es el entregable de la sesión. La evaluación es </a:t>
+            </a:r>
+            <a:r>
+              <a:rPr sz="2000" b="1" i="0">
+                <a:solidFill>
+                  <a:srgbClr val="333333"/>
+                </a:solidFill>
+                <a:latin typeface="Calibri"/>
+              </a:rPr>
+              <a:t>a libro abierto sobre los documentos de su equipo</a:t>
+            </a:r>
+            <a:r>
+              <a:rPr sz="2000" b="0" i="0">
+                <a:solidFill>
+                  <a:srgbClr val="333333"/>
+                </a:solidFill>
+                <a:latin typeface="Calibri"/>
+              </a:rPr>
+              <a:t>: lean el documento «Evaluación del Corte 2 — cómo prepararse», que dice exactamente qué pestañas tener abiertas.</a:t>
+            </a:r>
+          </a:p>
+          <a:p>
+            <a:pPr>
+              <a:spcAft>
+                <a:spcPts val="800"/>
+              </a:spcAft>
+            </a:pPr>
+            <a:r>
+              <a:rPr sz="2000" b="0" i="0">
+                <a:solidFill>
+                  <a:srgbClr val="333333"/>
+                </a:solidFill>
+                <a:latin typeface="Calibri"/>
+              </a:rPr>
+              <a:t>–   </a:t>
+            </a:r>
+            <a:r>
+              <a:rPr sz="2000" b="1" i="0">
+                <a:solidFill>
+                  <a:srgbClr val="333333"/>
+                </a:solidFill>
+                <a:latin typeface="Calibri"/>
+              </a:rPr>
+              <a:t>Antes de salir:</a:t>
+            </a:r>
+            <a:r>
+              <a:rPr sz="2000" b="0" i="0">
+                <a:solidFill>
+                  <a:srgbClr val="333333"/>
+                </a:solidFill>
+                <a:latin typeface="Calibri"/>
+              </a:rPr>
+              <a:t> el enlace del documento del equipo en el chat, con permiso de lectura para el docente, y el nombre del vocero de hoy.</a:t>
+            </a:r>
+          </a:p>
+        </p:txBody>
+      </p:sp>
+      <p:sp>
+        <p:nvSpPr>
+          <p:cNvPr id="6" name="TextBox 5"/>
+          <p:cNvSpPr txBox="1"/>
+          <p:nvPr/>
+        </p:nvSpPr>
+        <p:spPr>
+          <a:xfrm>
+            <a:off x="11185855" y="6473952"/>
+            <a:ext cx="640080" cy="274320"/>
+          </a:xfrm>
+          <a:prstGeom prst="rect">
+            <a:avLst/>
+          </a:prstGeom>
+          <a:noFill/>
+        </p:spPr>
+        <p:txBody>
+          <a:bodyPr wrap="square">
+            <a:spAutoFit/>
+          </a:bodyPr>
+          <a:lstStyle/>
+          <a:p>
+            <a:pPr algn="r"/>
+            <a:r>
+              <a:rPr sz="1100" b="0" i="0">
+                <a:solidFill>
+                  <a:srgbClr val="666666"/>
+                </a:solidFill>
+                <a:latin typeface="Calibri"/>
+              </a:rPr>
+              <a:t>22</a:t>
+            </a:r>
+          </a:p>
+        </p:txBody>
+      </p:sp>
+    </p:spTree>
+  </p:cSld>
+  <p:clrMapOvr>
+    <a:masterClrMapping/>
+  </p:clrMapOvr>
+</p:sld>
+</file>
+
+<file path=ppt/slides/slide23.xml><?xml version="1.0" encoding="utf-8"?>
+<p:sld xmlns:a="http://schemas.openxmlformats.org/drawingml/2006/main" xmlns:p="http://schemas.openxmlformats.org/presentationml/2006/main" xmlns:r="http://schemas.openxmlformats.org/officeDocument/2006/relationships">
+  <p:cSld>
+    <p:bg>
+      <p:bgPr>
+        <a:solidFill>
+          <a:srgbClr val="FFFFFF"/>
+        </a:solidFill>
+        <a:effectLst/>
+      </p:bgPr>
+    </p:bg>
+    <p:spTree>
+      <p:nvGrpSpPr>
+        <p:cNvPr id="1" name=""/>
+        <p:cNvGrpSpPr/>
+        <p:nvPr/>
+      </p:nvGrpSpPr>
+      <p:grpSpPr/>
+      <p:sp>
+        <p:nvSpPr>
+          <p:cNvPr id="2" name="Rectangle 1"/>
+          <p:cNvSpPr/>
+          <p:nvPr/>
+        </p:nvSpPr>
+        <p:spPr>
+          <a:xfrm>
+            <a:off x="0" y="0"/>
+            <a:ext cx="12191695" cy="164592"/>
+          </a:xfrm>
+          <a:prstGeom prst="rect">
+            <a:avLst/>
+          </a:prstGeom>
+          <a:solidFill>
+            <a:srgbClr val="269CCB"/>
+          </a:solidFill>
+          <a:ln>
+            <a:noFill/>
+          </a:ln>
+        </p:spPr>
+        <p:style>
+          <a:lnRef idx="1">
+            <a:schemeClr val="accent1"/>
+          </a:lnRef>
+          <a:fillRef idx="3">
+            <a:schemeClr val="accent1"/>
+          </a:fillRef>
+          <a:effectRef idx="2">
+            <a:schemeClr val="accent1"/>
+          </a:effectRef>
+          <a:fontRef idx="minor">
+            <a:schemeClr val="lt1"/>
+          </a:fontRef>
+        </p:style>
+        <p:txBody>
+          <a:bodyPr rtlCol="0" anchor="ctr"/>
+          <a:lstStyle/>
+          <a:p>
+            <a:pPr algn="ctr"/>
+          </a:p>
+        </p:txBody>
+      </p:sp>
+      <p:pic>
+        <p:nvPicPr>
+          <p:cNvPr id="3" name="Picture 2" descr="logo_uniajc_color.png"/>
+          <p:cNvPicPr>
+            <a:picLocks noChangeAspect="1"/>
+          </p:cNvPicPr>
+          <p:nvPr/>
+        </p:nvPicPr>
+        <p:blipFill>
+          <a:blip r:embed="rId2"/>
+          <a:stretch>
+            <a:fillRect/>
+          </a:stretch>
+        </p:blipFill>
+        <p:spPr>
+          <a:xfrm>
+            <a:off x="10271455" y="5998464"/>
+            <a:ext cx="1463040" cy="643233"/>
+          </a:xfrm>
+          <a:prstGeom prst="rect">
+            <a:avLst/>
+          </a:prstGeom>
+        </p:spPr>
+      </p:pic>
+      <p:sp>
+        <p:nvSpPr>
+          <p:cNvPr id="4" name="TextBox 3"/>
+          <p:cNvSpPr txBox="1"/>
+          <p:nvPr/>
+        </p:nvSpPr>
+        <p:spPr>
+          <a:xfrm>
+            <a:off x="457200" y="1737360"/>
+            <a:ext cx="11277295" cy="1097280"/>
+          </a:xfrm>
+          <a:prstGeom prst="rect">
+            <a:avLst/>
+          </a:prstGeom>
+          <a:noFill/>
+        </p:spPr>
+        <p:txBody>
+          <a:bodyPr wrap="square" anchor="ctr"/>
+          <a:lstStyle/>
+          <a:p>
+            <a:pPr algn="ctr"/>
+            <a:r>
+              <a:rPr sz="3400" b="1" i="0">
+                <a:solidFill>
+                  <a:srgbClr val="095292"/>
+                </a:solidFill>
+                <a:latin typeface="Calibri"/>
+              </a:rPr>
+              <a:t>Nos vemos en la sesión 11</a:t>
+            </a:r>
+          </a:p>
+        </p:txBody>
+      </p:sp>
+      <p:sp>
+        <p:nvSpPr>
+          <p:cNvPr id="5" name="TextBox 4"/>
+          <p:cNvSpPr txBox="1"/>
+          <p:nvPr/>
+        </p:nvSpPr>
+        <p:spPr>
+          <a:xfrm>
+            <a:off x="457200" y="3017520"/>
+            <a:ext cx="11277295" cy="1645920"/>
+          </a:xfrm>
+          <a:prstGeom prst="rect">
+            <a:avLst/>
+          </a:prstGeom>
+          <a:noFill/>
+        </p:spPr>
+        <p:txBody>
+          <a:bodyPr wrap="square">
+            <a:spAutoFit/>
+          </a:bodyPr>
+          <a:lstStyle/>
+          <a:p>
+            <a:pPr algn="ctr">
+              <a:spcAft>
+                <a:spcPts val="600"/>
+              </a:spcAft>
+            </a:pPr>
+            <a:r>
+              <a:rPr sz="1600" b="0" i="0">
+                <a:solidFill>
+                  <a:srgbClr val="333333"/>
+                </a:solidFill>
+                <a:latin typeface="Calibri"/>
+              </a:rPr>
+              <a:t>Herramientas digitales aplicadas a la Ingeniería · Clase 10</a:t>
+            </a:r>
+          </a:p>
+          <a:p>
+            <a:pPr algn="ctr">
+              <a:spcAft>
+                <a:spcPts val="600"/>
+              </a:spcAft>
+            </a:pPr>
+            <a:r>
+              <a:rPr sz="1600" b="0" i="0">
+                <a:solidFill>
+                  <a:srgbClr val="333333"/>
+                </a:solidFill>
+                <a:latin typeface="Calibri"/>
+              </a:rPr>
+              <a:t>FI300101 · UNIAJC · Ingeniería de Sistemas</a:t>
+            </a:r>
+          </a:p>
+        </p:txBody>
+      </p:sp>
+      <p:sp>
+        <p:nvSpPr>
+          <p:cNvPr id="6" name="TextBox 5"/>
+          <p:cNvSpPr txBox="1"/>
+          <p:nvPr/>
+        </p:nvSpPr>
+        <p:spPr>
+          <a:xfrm>
+            <a:off x="457200" y="4754880"/>
+            <a:ext cx="11277295" cy="640080"/>
+          </a:xfrm>
+          <a:prstGeom prst="rect">
+            <a:avLst/>
+          </a:prstGeom>
+          <a:noFill/>
+        </p:spPr>
+        <p:txBody>
+          <a:bodyPr wrap="square">
+            <a:spAutoFit/>
+          </a:bodyPr>
+          <a:lstStyle/>
+          <a:p>
+            <a:pPr algn="ctr"/>
+            <a:r>
+              <a:rPr sz="2000" b="1" i="0">
+                <a:solidFill>
+                  <a:srgbClr val="269CCB"/>
+                </a:solidFill>
+                <a:latin typeface="Calibri"/>
+              </a:rPr>
+              <a:t>Un prototipo no es una maqueta: es una pregunta, y por eso se hace feo a propósito</a:t>
             </a:r>
           </a:p>
         </p:txBody>

--- a/Introduccion a la Ingenieria/Clases/Clase 10 - Herramientas digitales aplicadas a la Ingenieria/Presentacion.pptx
+++ b/Introduccion a la Ingenieria/Clases/Clase 10 - Herramientas digitales aplicadas a la Ingenieria/Presentacion.pptx
@@ -28,6 +28,8 @@
     <p:sldId id="276" r:id="rId27"/>
     <p:sldId id="277" r:id="rId28"/>
     <p:sldId id="278" r:id="rId29"/>
+    <p:sldId id="279" r:id="rId30"/>
+    <p:sldId id="280" r:id="rId31"/>
   </p:sldIdLst>
   <p:sldSz cx="12191695" cy="6858000" type="screen4x3"/>
   <p:notesSz cx="6858000" cy="9144000"/>
@@ -3736,22 +3738,6 @@
               <a:t>–   Un dibujo comunica «esto es un borrador, opine»; una pantalla pulida comunica «esto costó trabajo, no lo destruya».</a:t>
             </a:r>
           </a:p>
-          <a:p>
-            <a:pPr>
-              <a:spcAft>
-                <a:spcPts val="800"/>
-              </a:spcAft>
-            </a:pPr>
-            <a:r>
-              <a:rPr sz="2000" b="0" i="0">
-                <a:solidFill>
-                  <a:srgbClr val="333333"/>
-                </a:solidFill>
-                <a:latin typeface="Calibri"/>
-              </a:rPr>
-              <a:t>–   Y hay un segundo efecto, sobre el propio equipo: cuanto más trabajo hay invertido en algo, más cuesta cambiarlo — eso ya lo vieron como curva del costo en la sesión 7, y aquí aparece en versión psicológica.</a:t>
-            </a:r>
-          </a:p>
         </p:txBody>
       </p:sp>
       <p:sp>
@@ -3969,25 +3955,7 @@
                 </a:solidFill>
                 <a:latin typeface="Calibri"/>
               </a:rPr>
-              <a:t>–   La conclusión práctica hay que decirla como regla y no como curiosidad: </a:t>
-            </a:r>
-            <a:r>
-              <a:rPr sz="2000" b="1" i="0">
-                <a:solidFill>
-                  <a:srgbClr val="333333"/>
-                </a:solidFill>
-                <a:latin typeface="Calibri"/>
-              </a:rPr>
-              <a:t>el primer prototipo se hace a propósito feo</a:t>
-            </a:r>
-            <a:r>
-              <a:rPr sz="2000" b="0" i="0">
-                <a:solidFill>
-                  <a:srgbClr val="333333"/>
-                </a:solidFill>
-                <a:latin typeface="Calibri"/>
-              </a:rPr>
-              <a:t>.</a:t>
+              <a:t>–   Y hay un segundo efecto, sobre el propio equipo: cuanto más trabajo hay invertido en algo, más cuesta cambiarlo — eso ya lo vieron como curva del costo en la sesión 7, y aquí aparece en versión psicológica.</a:t>
             </a:r>
           </a:p>
           <a:p>
@@ -4003,7 +3971,25 @@
                 </a:solidFill>
                 <a:latin typeface="Calibri"/>
               </a:rPr>
-              <a:t>–   Excalidraw es la herramienta de la sesión justamente porque todo lo que se dibuja ahí se ve hecho a mano.</a:t>
+              <a:t>–   La conclusión práctica hay que decirla como regla y no como curiosidad: </a:t>
+            </a:r>
+            <a:r>
+              <a:rPr sz="2000" b="1" i="0">
+                <a:solidFill>
+                  <a:srgbClr val="333333"/>
+                </a:solidFill>
+                <a:latin typeface="Calibri"/>
+              </a:rPr>
+              <a:t>el primer prototipo se hace a propósito feo</a:t>
+            </a:r>
+            <a:r>
+              <a:rPr sz="2000" b="0" i="0">
+                <a:solidFill>
+                  <a:srgbClr val="333333"/>
+                </a:solidFill>
+                <a:latin typeface="Calibri"/>
+              </a:rPr>
+              <a:t>.</a:t>
             </a:r>
           </a:p>
           <a:p>
@@ -4019,7 +4005,7 @@
                 </a:solidFill>
                 <a:latin typeface="Calibri"/>
               </a:rPr>
-              <a:t>–   Recoja las respuestas del muro y no revele la explicación de inmediato: deje que alguien la formule.</a:t>
+              <a:t>–   Excalidraw es la herramienta de la sesión justamente porque todo lo que se dibuja ahí se ve hecho a mano.</a:t>
             </a:r>
           </a:p>
           <a:p>
@@ -4035,7 +4021,7 @@
                 </a:solidFill>
                 <a:latin typeface="Calibri"/>
               </a:rPr>
-              <a:t>–   Suele salir en dos o tres intentos, y sale mejor de ellos que del docente.</a:t>
+              <a:t>–   Recoja las respuestas del muro y no revele la explicación de inmediato: deje que alguien la formule.</a:t>
             </a:r>
           </a:p>
         </p:txBody>
@@ -4305,25 +4291,7 @@
                 </a:solidFill>
                 <a:latin typeface="Calibri"/>
               </a:rPr>
-              <a:t>–   Pídale a cada equipo, en la sala, que escriba la pregunta de su prototipo en una línea antes de dibujar nada. </a:t>
-            </a:r>
-            <a:r>
-              <a:rPr sz="2000" b="1" i="0">
-                <a:solidFill>
-                  <a:srgbClr val="333333"/>
-                </a:solidFill>
-                <a:latin typeface="Calibri"/>
-              </a:rPr>
-              <a:t>No es la versión 1 a medias</a:t>
-            </a:r>
-            <a:r>
-              <a:rPr sz="2000" b="0" i="0">
-                <a:solidFill>
-                  <a:srgbClr val="333333"/>
-                </a:solidFill>
-                <a:latin typeface="Calibri"/>
-              </a:rPr>
-              <a:t>, y esta distinción es la que más cuesta en primer semestre.</a:t>
+              <a:t>–   Una versión inacabada intenta ser el producto y falla en el intento; un prototipo no intenta ser el producto, así que puede ser papel, puede no tener datos reales, puede no funcionar</a:t>
             </a:r>
           </a:p>
           <a:p>
@@ -4339,7 +4307,25 @@
                 </a:solidFill>
                 <a:latin typeface="Calibri"/>
               </a:rPr>
-              <a:t>–   Una versión inacabada intenta ser el producto y falla en el intento; un prototipo no intenta ser el producto, así que puede ser papel, puede no tener datos reales, puede no funcionar</a:t>
+              <a:t>–   Y aun así responder la pregunta con precisión. </a:t>
+            </a:r>
+            <a:r>
+              <a:rPr sz="2000" b="1" i="0">
+                <a:solidFill>
+                  <a:srgbClr val="333333"/>
+                </a:solidFill>
+                <a:latin typeface="Calibri"/>
+              </a:rPr>
+              <a:t>Es desechable, y eso lo libera.</a:t>
+            </a:r>
+            <a:r>
+              <a:rPr sz="2000" b="0" i="0">
+                <a:solidFill>
+                  <a:srgbClr val="333333"/>
+                </a:solidFill>
+                <a:latin typeface="Calibri"/>
+              </a:rPr>
+              <a:t> Se hace sabiendo que se va a tirar, y por eso se puede probar una idea rara sin costo.</a:t>
             </a:r>
           </a:p>
         </p:txBody>
@@ -4559,7 +4545,7 @@
                 </a:solidFill>
                 <a:latin typeface="Calibri"/>
               </a:rPr>
-              <a:t>–   Y aun así responder la pregunta con precisión. </a:t>
+              <a:t>–   La frase que conviene dejarles: </a:t>
             </a:r>
             <a:r>
               <a:rPr sz="2000" b="1" i="0">
@@ -4568,7 +4554,7 @@
                 </a:solidFill>
                 <a:latin typeface="Calibri"/>
               </a:rPr>
-              <a:t>Es desechable, y eso lo libera.</a:t>
+              <a:t>un prototipo que da pesar tirar ya costó demasiado.</a:t>
             </a:r>
             <a:r>
               <a:rPr sz="2000" b="0" i="0">
@@ -4577,15 +4563,17 @@
                 </a:solidFill>
                 <a:latin typeface="Calibri"/>
               </a:rPr>
-              <a:t> Se hace sabiendo que se va a tirar, y por eso se puede probar una idea rara sin costo.</a:t>
-            </a:r>
-          </a:p>
-          <a:p>
-            <a:pPr>
-              <a:spcAft>
-                <a:spcPts val="800"/>
-              </a:spcAft>
-            </a:pPr>
+              <a:t> Y el punto que amarra la sesión con la 8 y con la 12: </a:t>
+            </a:r>
+            <a:r>
+              <a:rPr sz="2000" b="1" i="0">
+                <a:solidFill>
+                  <a:srgbClr val="333333"/>
+                </a:solidFill>
+                <a:latin typeface="Calibri"/>
+              </a:rPr>
+              <a:t>se prueba con alguien ajeno</a:t>
+            </a:r>
             <a:r>
               <a:rPr sz="2000" b="0" i="0">
                 <a:solidFill>
@@ -4593,59 +4581,7 @@
                 </a:solidFill>
                 <a:latin typeface="Calibri"/>
               </a:rPr>
-              <a:t>–   La frase que conviene dejarles: </a:t>
-            </a:r>
-            <a:r>
-              <a:rPr sz="2000" b="1" i="0">
-                <a:solidFill>
-                  <a:srgbClr val="333333"/>
-                </a:solidFill>
-                <a:latin typeface="Calibri"/>
-              </a:rPr>
-              <a:t>un prototipo que da pesar tirar ya costó demasiado.</a:t>
-            </a:r>
-            <a:r>
-              <a:rPr sz="2000" b="0" i="0">
-                <a:solidFill>
-                  <a:srgbClr val="333333"/>
-                </a:solidFill>
-                <a:latin typeface="Calibri"/>
-              </a:rPr>
-              <a:t> Y el punto que amarra la sesión con la 8 y con la 12: </a:t>
-            </a:r>
-            <a:r>
-              <a:rPr sz="2000" b="1" i="0">
-                <a:solidFill>
-                  <a:srgbClr val="333333"/>
-                </a:solidFill>
-                <a:latin typeface="Calibri"/>
-              </a:rPr>
-              <a:t>se prueba con alguien ajeno</a:t>
-            </a:r>
-            <a:r>
-              <a:rPr sz="2000" b="0" i="0">
-                <a:solidFill>
-                  <a:srgbClr val="333333"/>
-                </a:solidFill>
-                <a:latin typeface="Calibri"/>
-              </a:rPr>
               <a:t>.</a:t>
-            </a:r>
-          </a:p>
-          <a:p>
-            <a:pPr>
-              <a:spcAft>
-                <a:spcPts val="800"/>
-              </a:spcAft>
-            </a:pPr>
-            <a:r>
-              <a:rPr sz="2000" b="0" i="0">
-                <a:solidFill>
-                  <a:srgbClr val="333333"/>
-                </a:solidFill>
-                <a:latin typeface="Calibri"/>
-              </a:rPr>
-              <a:t>–   Un prototipo que solo vio el equipo no probó nada.</a:t>
             </a:r>
           </a:p>
           <a:p>
@@ -4990,40 +4926,6 @@
               <a:t> —Canva, herramientas de diseño— responde *¿se ve confiable?*, cuesta horas</a:t>
             </a:r>
           </a:p>
-          <a:p>
-            <a:pPr>
-              <a:spcAft>
-                <a:spcPts val="800"/>
-              </a:spcAft>
-            </a:pPr>
-            <a:r>
-              <a:rPr sz="2000" b="0" i="0">
-                <a:solidFill>
-                  <a:srgbClr val="333333"/>
-                </a:solidFill>
-                <a:latin typeface="Calibri"/>
-              </a:rPr>
-              <a:t>–   Y tiene el efecto secundario de la paradoja: la gente deja de criticarlo. </a:t>
-            </a:r>
-            <a:r>
-              <a:rPr sz="2000" b="1" i="0">
-                <a:solidFill>
-                  <a:srgbClr val="333333"/>
-                </a:solidFill>
-                <a:latin typeface="Calibri"/>
-              </a:rPr>
-              <a:t>Funcional</a:t>
-            </a:r>
-            <a:r>
-              <a:rPr sz="2000" b="0" i="0">
-                <a:solidFill>
-                  <a:srgbClr val="333333"/>
-                </a:solidFill>
-                <a:latin typeface="Calibri"/>
-              </a:rPr>
-              <a:t> ya no es prototipo: es construcción, y responde *¿aguanta?, ¿sirve en el celular viejo?*.</a:t>
-            </a:r>
-          </a:p>
         </p:txBody>
       </p:sp>
       <p:sp>
@@ -5241,7 +5143,7 @@
                 </a:solidFill>
                 <a:latin typeface="Calibri"/>
               </a:rPr>
-              <a:t>–   La regla del curso, que hay que dejar clara para que nadie pierda el fin de semana: </a:t>
+              <a:t>–   Y tiene el efecto secundario de la paradoja: la gente deja de criticarlo. </a:t>
             </a:r>
             <a:r>
               <a:rPr sz="2000" b="1" i="0">
@@ -5250,7 +5152,7 @@
                 </a:solidFill>
                 <a:latin typeface="Calibri"/>
               </a:rPr>
-              <a:t>el prototipo del corte 2 es de baja o media fidelidad</a:t>
+              <a:t>Funcional</a:t>
             </a:r>
             <a:r>
               <a:rPr sz="2000" b="0" i="0">
@@ -5259,7 +5161,7 @@
                 </a:solidFill>
                 <a:latin typeface="Calibri"/>
               </a:rPr>
-              <a:t>.</a:t>
+              <a:t> ya no es prototipo: es construcción, y responde *¿aguanta?, ¿sirve en el celular viejo?*.</a:t>
             </a:r>
           </a:p>
           <a:p>
@@ -5275,7 +5177,25 @@
                 </a:solidFill>
                 <a:latin typeface="Calibri"/>
               </a:rPr>
-              <a:t>–   La alta aparece en la Clase 14, y solo para la presentación final.</a:t>
+              <a:t>–   La regla del curso, que hay que dejar clara para que nadie pierda el fin de semana: </a:t>
+            </a:r>
+            <a:r>
+              <a:rPr sz="2000" b="1" i="0">
+                <a:solidFill>
+                  <a:srgbClr val="333333"/>
+                </a:solidFill>
+                <a:latin typeface="Calibri"/>
+              </a:rPr>
+              <a:t>el prototipo del corte 2 es de baja o media fidelidad</a:t>
+            </a:r>
+            <a:r>
+              <a:rPr sz="2000" b="0" i="0">
+                <a:solidFill>
+                  <a:srgbClr val="333333"/>
+                </a:solidFill>
+                <a:latin typeface="Calibri"/>
+              </a:rPr>
+              <a:t>.</a:t>
             </a:r>
           </a:p>
           <a:p>
@@ -5291,7 +5211,7 @@
                 </a:solidFill>
                 <a:latin typeface="Calibri"/>
               </a:rPr>
-              <a:t>–   Un equipo que llega a la Clase 11 con una pantalla preciosa y sin estado de error entendió mal la sesión.</a:t>
+              <a:t>–   La alta aparece en la Clase 14, y solo para la presentación final.</a:t>
             </a:r>
           </a:p>
           <a:p>
@@ -5307,7 +5227,7 @@
                 </a:solidFill>
                 <a:latin typeface="Calibri"/>
               </a:rPr>
-              <a:t>–   Vale la pena conectarlo con la curva de la sesión 7: los niveles de fidelidad son esa misma curva vista desde el diseño.</a:t>
+              <a:t>–   Un equipo que llega a la Clase 11 con una pantalla preciosa y sin estado de error entendió mal la sesión.</a:t>
             </a:r>
           </a:p>
           <a:p>
@@ -5504,7 +5424,7 @@
                 </a:solidFill>
                 <a:latin typeface="Calibri"/>
               </a:rPr>
-              <a:t>Los cinco pasos de una pantalla, y el estado de error (1/2)</a:t>
+              <a:t>Los cinco pasos de una pantalla, y el estado de error (1/3)</a:t>
             </a:r>
           </a:p>
         </p:txBody>
@@ -5612,56 +5532,6 @@
                 <a:latin typeface="Calibri"/>
               </a:rPr>
               <a:t>–   El error típico es la pantalla democrática, donde ocho opciones tienen el mismo tamaño y el usuario no sabe por dónde empezar. **Textos reales</a:t>
-            </a:r>
-          </a:p>
-          <a:p>
-            <a:pPr>
-              <a:spcAft>
-                <a:spcPts val="800"/>
-              </a:spcAft>
-            </a:pPr>
-            <a:r>
-              <a:rPr sz="2000" b="0" i="0">
-                <a:solidFill>
-                  <a:srgbClr val="333333"/>
-                </a:solidFill>
-                <a:latin typeface="Calibri"/>
-              </a:rPr>
-              <a:t>–   Nunca relleno.** Esta es la regla que más mejora los prototipos del curso y hay que insistir en ella: escribir «Buscar título» y no «texto aquí».</a:t>
-            </a:r>
-          </a:p>
-          <a:p>
-            <a:pPr>
-              <a:spcAft>
-                <a:spcPts val="800"/>
-              </a:spcAft>
-            </a:pPr>
-            <a:r>
-              <a:rPr sz="2000" b="0" i="0">
-                <a:solidFill>
-                  <a:srgbClr val="333333"/>
-                </a:solidFill>
-                <a:latin typeface="Calibri"/>
-              </a:rPr>
-              <a:t>–   La razón es profunda y conviene decirla: </a:t>
-            </a:r>
-            <a:r>
-              <a:rPr sz="2000" b="1" i="0">
-                <a:solidFill>
-                  <a:srgbClr val="333333"/>
-                </a:solidFill>
-                <a:latin typeface="Calibri"/>
-              </a:rPr>
-              <a:t>los textos falsos esconden los problemas</a:t>
-            </a:r>
-            <a:r>
-              <a:rPr sz="2000" b="0" i="0">
-                <a:solidFill>
-                  <a:srgbClr val="333333"/>
-                </a:solidFill>
-                <a:latin typeface="Calibri"/>
-              </a:rPr>
-              <a:t>.</a:t>
             </a:r>
           </a:p>
         </p:txBody>
@@ -5842,7 +5712,7 @@
                 </a:solidFill>
                 <a:latin typeface="Calibri"/>
               </a:rPr>
-              <a:t>Los cinco pasos de una pantalla, y el estado de error (2/2)</a:t>
+              <a:t>Los cinco pasos de una pantalla, y el estado de error (2/3)</a:t>
             </a:r>
           </a:p>
         </p:txBody>
@@ -5881,25 +5751,7 @@
                 </a:solidFill>
                 <a:latin typeface="Calibri"/>
               </a:rPr>
-              <a:t>–   El botón que no se sabe cómo llamar es un botón que no se sabe qué hace, y con relleno ese vacío no se nota hasta que alguien lo usa. </a:t>
-            </a:r>
-            <a:r>
-              <a:rPr sz="2000" b="1" i="0">
-                <a:solidFill>
-                  <a:srgbClr val="333333"/>
-                </a:solidFill>
-                <a:latin typeface="Calibri"/>
-              </a:rPr>
-              <a:t>Dibujar el estado vacío y el de error</a:t>
-            </a:r>
-            <a:r>
-              <a:rPr sz="2000" b="0" i="0">
-                <a:solidFill>
-                  <a:srgbClr val="333333"/>
-                </a:solidFill>
-                <a:latin typeface="Calibri"/>
-              </a:rPr>
-              <a:t> es el paso que casi nadie hace y donde se cae la mayoría de los prototipos.</a:t>
+              <a:t>–   Nunca relleno.** Esta es la regla que más mejora los prototipos del curso y hay que insistir en ella: escribir «Buscar título» y no «texto aquí».</a:t>
             </a:r>
           </a:p>
           <a:p>
@@ -5915,7 +5767,25 @@
                 </a:solidFill>
                 <a:latin typeface="Calibri"/>
               </a:rPr>
-              <a:t>–   ¿Qué se ve la primera vez, cuando no hay datos?</a:t>
+              <a:t>–   La razón es profunda y conviene decirla: </a:t>
+            </a:r>
+            <a:r>
+              <a:rPr sz="2000" b="1" i="0">
+                <a:solidFill>
+                  <a:srgbClr val="333333"/>
+                </a:solidFill>
+                <a:latin typeface="Calibri"/>
+              </a:rPr>
+              <a:t>los textos falsos esconden los problemas</a:t>
+            </a:r>
+            <a:r>
+              <a:rPr sz="2000" b="0" i="0">
+                <a:solidFill>
+                  <a:srgbClr val="333333"/>
+                </a:solidFill>
+                <a:latin typeface="Calibri"/>
+              </a:rPr>
+              <a:t>.</a:t>
             </a:r>
           </a:p>
           <a:p>
@@ -5931,7 +5801,25 @@
                 </a:solidFill>
                 <a:latin typeface="Calibri"/>
               </a:rPr>
-              <a:t>–   ¿Qué se ve cuando no se encuentra lo que se buscó?</a:t>
+              <a:t>–   El botón que no se sabe cómo llamar es un botón que no se sabe qué hace, y con relleno ese vacío no se nota hasta que alguien lo usa. </a:t>
+            </a:r>
+            <a:r>
+              <a:rPr sz="2000" b="1" i="0">
+                <a:solidFill>
+                  <a:srgbClr val="333333"/>
+                </a:solidFill>
+                <a:latin typeface="Calibri"/>
+              </a:rPr>
+              <a:t>Dibujar el estado vacío y el de error</a:t>
+            </a:r>
+            <a:r>
+              <a:rPr sz="2000" b="0" i="0">
+                <a:solidFill>
+                  <a:srgbClr val="333333"/>
+                </a:solidFill>
+                <a:latin typeface="Calibri"/>
+              </a:rPr>
+              <a:t> es el paso que casi nadie hace y donde se cae la mayoría de los prototipos.</a:t>
             </a:r>
           </a:p>
           <a:p>
@@ -5947,7 +5835,7 @@
                 </a:solidFill>
                 <a:latin typeface="Calibri"/>
               </a:rPr>
-              <a:t>–   ¿Qué se ve cuando algo falla?</a:t>
+              <a:t>–   ¿Qué se ve cuando no se encuentra lo que se buscó?</a:t>
             </a:r>
           </a:p>
           <a:p>
@@ -5964,56 +5852,6 @@
                 <a:latin typeface="Calibri"/>
               </a:rPr>
               <a:t>–   Un prototipo que solo muestra el camino feliz no sirve para probar nada, porque en la vida real el camino feliz es la minoría de los casos.</a:t>
-            </a:r>
-          </a:p>
-          <a:p>
-            <a:pPr>
-              <a:spcAft>
-                <a:spcPts val="800"/>
-              </a:spcAft>
-            </a:pPr>
-            <a:r>
-              <a:rPr sz="2000" b="0" i="0">
-                <a:solidFill>
-                  <a:srgbClr val="333333"/>
-                </a:solidFill>
-                <a:latin typeface="Calibri"/>
-              </a:rPr>
-              <a:t>–   Aquí hay un puente con la sesión 8: la tarea (3) del plan de validación —«dígame qué haría si el libro que busca no aparece»— exige justamente esta pantalla. </a:t>
-            </a:r>
-            <a:r>
-              <a:rPr sz="2000" b="1" i="0">
-                <a:solidFill>
-                  <a:srgbClr val="333333"/>
-                </a:solidFill>
-                <a:latin typeface="Calibri"/>
-              </a:rPr>
-              <a:t>Decir qué pasa al tocar cada cosa</a:t>
-            </a:r>
-            <a:r>
-              <a:rPr sz="2000" b="0" i="0">
-                <a:solidFill>
-                  <a:srgbClr val="333333"/>
-                </a:solidFill>
-                <a:latin typeface="Calibri"/>
-              </a:rPr>
-              <a:t>: una flecha y una palabra por botón.</a:t>
-            </a:r>
-          </a:p>
-          <a:p>
-            <a:pPr>
-              <a:spcAft>
-                <a:spcPts val="800"/>
-              </a:spcAft>
-            </a:pPr>
-            <a:r>
-              <a:rPr sz="2000" b="0" i="0">
-                <a:solidFill>
-                  <a:srgbClr val="333333"/>
-                </a:solidFill>
-                <a:latin typeface="Calibri"/>
-              </a:rPr>
-              <a:t>–   Un botón sin destino escrito es una decisión que nadie tomó, y en la Clase 12 la va a tomar el usuario por ustedes, mal.</a:t>
             </a:r>
           </a:p>
         </p:txBody>
@@ -6194,7 +6032,7 @@
                 </a:solidFill>
                 <a:latin typeface="Calibri"/>
               </a:rPr>
-              <a:t>Elegir la herramienta por la pregunta, y las dos advertencias (1/2)</a:t>
+              <a:t>Los cinco pasos de una pantalla, y el estado de error (3/3)</a:t>
             </a:r>
           </a:p>
         </p:txBody>
@@ -6233,7 +6071,7 @@
                 </a:solidFill>
                 <a:latin typeface="Calibri"/>
               </a:rPr>
-              <a:t>–   La tabla de herramientas hay que recorrerla rápido, con la idea que la ordena: </a:t>
+              <a:t>–   Aquí hay un puente con la sesión 8: la tarea (3) del plan de validación —«dígame qué haría si el libro que busca no aparece»— exige justamente esta pantalla. </a:t>
             </a:r>
             <a:r>
               <a:rPr sz="2000" b="1" i="0">
@@ -6242,7 +6080,7 @@
                 </a:solidFill>
                 <a:latin typeface="Calibri"/>
               </a:rPr>
-              <a:t>la pregunta para elegir no es «¿cuál sé usar?» sino «¿qué quiero responder con esto?»</a:t>
+              <a:t>Decir qué pasa al tocar cada cosa</a:t>
             </a:r>
             <a:r>
               <a:rPr sz="2000" b="0" i="0">
@@ -6251,7 +6089,7 @@
                 </a:solidFill>
                 <a:latin typeface="Calibri"/>
               </a:rPr>
-              <a:t>.</a:t>
+              <a:t>: una flecha y una palabra por botón.</a:t>
             </a:r>
           </a:p>
           <a:p>
@@ -6267,123 +6105,7 @@
                 </a:solidFill>
                 <a:latin typeface="Calibri"/>
               </a:rPr>
-              <a:t>–   Es la misma lógica de la matriz de la sesión 8 aplicada a herramientas. </a:t>
-            </a:r>
-            <a:r>
-              <a:rPr sz="2000" b="1" i="0">
-                <a:solidFill>
-                  <a:srgbClr val="333333"/>
-                </a:solidFill>
-                <a:latin typeface="Calibri"/>
-              </a:rPr>
-              <a:t>Excalidraw</a:t>
-            </a:r>
-            <a:r>
-              <a:rPr sz="2000" b="0" i="0">
-                <a:solidFill>
-                  <a:srgbClr val="333333"/>
-                </a:solidFill>
-                <a:latin typeface="Calibri"/>
-              </a:rPr>
-              <a:t> para pantallas de baja fidelidad</a:t>
-            </a:r>
-          </a:p>
-          <a:p>
-            <a:pPr>
-              <a:spcAft>
-                <a:spcPts val="800"/>
-              </a:spcAft>
-            </a:pPr>
-            <a:r>
-              <a:rPr sz="2000" b="0" i="0">
-                <a:solidFill>
-                  <a:srgbClr val="333333"/>
-                </a:solidFill>
-                <a:latin typeface="Calibri"/>
-              </a:rPr>
-              <a:t>–   Y su apariencia de dibujo a mano es una ventaja funcional, no un defecto estético. </a:t>
-            </a:r>
-            <a:r>
-              <a:rPr sz="2000" b="1" i="0">
-                <a:solidFill>
-                  <a:srgbClr val="333333"/>
-                </a:solidFill>
-                <a:latin typeface="Calibri"/>
-              </a:rPr>
-              <a:t>draw.io</a:t>
-            </a:r>
-            <a:r>
-              <a:rPr sz="2000" b="0" i="0">
-                <a:solidFill>
-                  <a:srgbClr val="333333"/>
-                </a:solidFill>
-                <a:latin typeface="Calibri"/>
-              </a:rPr>
-              <a:t> para flujos, procesos y diagramas con decisiones —los equipos con proyectos de gestión trabajan aquí—; sus conectores se quedan pegados al mover las cajas</a:t>
-            </a:r>
-          </a:p>
-          <a:p>
-            <a:pPr>
-              <a:spcAft>
-                <a:spcPts val="800"/>
-              </a:spcAft>
-            </a:pPr>
-            <a:r>
-              <a:rPr sz="2000" b="0" i="0">
-                <a:solidFill>
-                  <a:srgbClr val="333333"/>
-                </a:solidFill>
-                <a:latin typeface="Calibri"/>
-              </a:rPr>
-              <a:t>–   Que es exactamente lo que se necesita cuando el flujo cambia diez veces. **Google Slides como prototipo navegable es el truco más útil de la sesión y hay que demostrarlo en vivo</a:t>
-            </a:r>
-          </a:p>
-          <a:p>
-            <a:pPr>
-              <a:spcAft>
-                <a:spcPts val="800"/>
-              </a:spcAft>
-            </a:pPr>
-            <a:r>
-              <a:rPr sz="2000" b="0" i="0">
-                <a:solidFill>
-                  <a:srgbClr val="333333"/>
-                </a:solidFill>
-                <a:latin typeface="Calibri"/>
-              </a:rPr>
-              <a:t>–   No describirlo**: una diapositiva por pantalla, y en cada botón un enlace hacia la diapositiva de destino.</a:t>
-            </a:r>
-          </a:p>
-          <a:p>
-            <a:pPr>
-              <a:spcAft>
-                <a:spcPts val="800"/>
-              </a:spcAft>
-            </a:pPr>
-            <a:r>
-              <a:rPr sz="2000" b="0" i="0">
-                <a:solidFill>
-                  <a:srgbClr val="333333"/>
-                </a:solidFill>
-                <a:latin typeface="Calibri"/>
-              </a:rPr>
-              <a:t>–   En modo presentación se recorre como si funcionara.</a:t>
-            </a:r>
-          </a:p>
-          <a:p>
-            <a:pPr>
-              <a:spcAft>
-                <a:spcPts val="800"/>
-              </a:spcAft>
-            </a:pPr>
-            <a:r>
-              <a:rPr sz="2000" b="0" i="0">
-                <a:solidFill>
-                  <a:srgbClr val="333333"/>
-                </a:solidFill>
-                <a:latin typeface="Calibri"/>
-              </a:rPr>
-              <a:t>–   Con eso un equipo de primer semestre puede probar un flujo completo con un usuario real sin escribir una línea de código.</a:t>
+              <a:t>–   Un botón sin destino escrito es una decisión que nadie tomó, y en la Clase 12 la va a tomar el usuario por ustedes, mal.</a:t>
             </a:r>
           </a:p>
         </p:txBody>
@@ -6564,7 +6286,7 @@
                 </a:solidFill>
                 <a:latin typeface="Calibri"/>
               </a:rPr>
-              <a:t>Elegir la herramienta por la pregunta, y las dos advertencias (2/2)</a:t>
+              <a:t>Elegir la herramienta por la pregunta, y las dos advertencias (1/3)</a:t>
             </a:r>
           </a:p>
         </p:txBody>
@@ -6603,7 +6325,7 @@
                 </a:solidFill>
                 <a:latin typeface="Calibri"/>
               </a:rPr>
-              <a:t>–   Dedíquele dos minutos de pantalla compartida: es lo que más van a agradecer. </a:t>
+              <a:t>–   La tabla de herramientas hay que recorrerla rápido, con la idea que la ordena: </a:t>
             </a:r>
             <a:r>
               <a:rPr sz="2000" b="1" i="0">
@@ -6612,7 +6334,7 @@
                 </a:solidFill>
                 <a:latin typeface="Calibri"/>
               </a:rPr>
-              <a:t>Canva</a:t>
+              <a:t>la pregunta para elegir no es «¿cuál sé usar?» sino «¿qué quiero responder con esto?»</a:t>
             </a:r>
             <a:r>
               <a:rPr sz="2000" b="0" i="0">
@@ -6621,7 +6343,7 @@
                 </a:solidFill>
                 <a:latin typeface="Calibri"/>
               </a:rPr>
-              <a:t> queda reservado para la Clase 14 y para material que verá alguien externo.</a:t>
+              <a:t>.</a:t>
             </a:r>
           </a:p>
           <a:p>
@@ -6637,7 +6359,7 @@
                 </a:solidFill>
                 <a:latin typeface="Calibri"/>
               </a:rPr>
-              <a:t>–   Y </a:t>
+              <a:t>–   Es la misma lógica de la matriz de la sesión 8 aplicada a herramientas. </a:t>
             </a:r>
             <a:r>
               <a:rPr sz="2000" b="1" i="0">
@@ -6646,7 +6368,7 @@
                 </a:solidFill>
                 <a:latin typeface="Calibri"/>
               </a:rPr>
-              <a:t>papel con una foto</a:t>
+              <a:t>Excalidraw</a:t>
             </a:r>
             <a:r>
               <a:rPr sz="2000" b="0" i="0">
@@ -6655,7 +6377,7 @@
                 </a:solidFill>
                 <a:latin typeface="Calibri"/>
               </a:rPr>
-              <a:t> es perfectamente válido en este curso: es lo más rápido que existe y hay que decirlo, porque hay equipos que se paralizan buscando la herramienta perfecta.</a:t>
+              <a:t> para pantallas de baja fidelidad</a:t>
             </a:r>
           </a:p>
           <a:p>
@@ -6671,7 +6393,7 @@
                 </a:solidFill>
                 <a:latin typeface="Calibri"/>
               </a:rPr>
-              <a:t>–   Las dos advertencias del cierre son operativas. </a:t>
+              <a:t>–   Y su apariencia de dibujo a mano es una ventaja funcional, no un defecto estético. </a:t>
             </a:r>
             <a:r>
               <a:rPr sz="2000" b="1" i="0">
@@ -6680,7 +6402,7 @@
                 </a:solidFill>
                 <a:latin typeface="Calibri"/>
               </a:rPr>
-              <a:t>No pulir el prototipo</a:t>
+              <a:t>draw.io</a:t>
             </a:r>
             <a:r>
               <a:rPr sz="2000" b="0" i="0">
@@ -6689,7 +6411,7 @@
                 </a:solidFill>
                 <a:latin typeface="Calibri"/>
               </a:rPr>
-              <a:t>: se califica que el flujo se entienda</a:t>
+              <a:t> para flujos, procesos y diagramas con decisiones —los equipos con proyectos de gestión trabajan aquí—; sus conectores se quedan pegados al mover las cajas</a:t>
             </a:r>
           </a:p>
           <a:p>
@@ -6705,57 +6427,7 @@
                 </a:solidFill>
                 <a:latin typeface="Calibri"/>
               </a:rPr>
-              <a:t>–   Que los textos sean reales y que existan el estado vacío y el de error; un equipo que gasta el taller eligiendo colores llega a la Clase 12 sin nada que probar.</a:t>
-            </a:r>
-          </a:p>
-          <a:p>
-            <a:pPr>
-              <a:spcAft>
-                <a:spcPts val="800"/>
-              </a:spcAft>
-            </a:pPr>
-            <a:r>
-              <a:rPr sz="2000" b="0" i="0">
-                <a:solidFill>
-                  <a:srgbClr val="333333"/>
-                </a:solidFill>
-                <a:latin typeface="Calibri"/>
-              </a:rPr>
-              <a:t>–   Y </a:t>
-            </a:r>
-            <a:r>
-              <a:rPr sz="2000" b="1" i="0">
-                <a:solidFill>
-                  <a:srgbClr val="333333"/>
-                </a:solidFill>
-                <a:latin typeface="Calibri"/>
-              </a:rPr>
-              <a:t>si el prototipo lleva datos, que sean inventados</a:t>
-            </a:r>
-            <a:r>
-              <a:rPr sz="2000" b="0" i="0">
-                <a:solidFill>
-                  <a:srgbClr val="333333"/>
-                </a:solidFill>
-                <a:latin typeface="Calibri"/>
-              </a:rPr>
-              <a:t>: ningún nombre, cédula, teléfono, dirección ni foto de una persona real, ni de ellos mismos.</a:t>
-            </a:r>
-          </a:p>
-          <a:p>
-            <a:pPr>
-              <a:spcAft>
-                <a:spcPts val="800"/>
-              </a:spcAft>
-            </a:pPr>
-            <a:r>
-              <a:rPr sz="2000" b="0" i="0">
-                <a:solidFill>
-                  <a:srgbClr val="333333"/>
-                </a:solidFill>
-                <a:latin typeface="Calibri"/>
-              </a:rPr>
-              <a:t>–   Es la regla del curso y es la Ley 1581 de 2012 de la sesión 4 aplicada al lugar donde de verdad se incumple — los datos de prueba se inventan.</a:t>
+              <a:t>–   Que es exactamente lo que se necesita cuando el flujo cambia diez veces. **Google Slides como prototipo navegable es el truco más útil de la sesión y hay que demostrarlo en vivo</a:t>
             </a:r>
           </a:p>
         </p:txBody>
@@ -7716,7 +7388,7 @@
         <p:spPr>
           <a:xfrm>
             <a:off x="0" y="0"/>
-            <a:ext cx="12191695" cy="1170432"/>
+            <a:ext cx="12191695" cy="960120"/>
           </a:xfrm>
           <a:prstGeom prst="rect">
             <a:avLst/>
@@ -7758,7 +7430,7 @@
         </p:nvSpPr>
         <p:spPr>
           <a:xfrm>
-            <a:off x="0" y="1170432"/>
+            <a:off x="0" y="960120"/>
             <a:ext cx="12191695" cy="41148"/>
           </a:xfrm>
           <a:prstGeom prst="rect">
@@ -7802,7 +7474,7 @@
         <p:spPr>
           <a:xfrm>
             <a:off x="457200" y="164592"/>
-            <a:ext cx="11277295" cy="384048"/>
+            <a:ext cx="11277295" cy="502920"/>
           </a:xfrm>
           <a:prstGeom prst="rect">
             <a:avLst/>
@@ -7822,7 +7494,7 @@
                 </a:solidFill>
                 <a:latin typeface="Calibri"/>
               </a:rPr>
-              <a:t>Taller de hoy: Prototipo de baja fidelidad</a:t>
+              <a:t>Elegir la herramienta por la pregunta, y las dos advertencias (2/3)</a:t>
             </a:r>
           </a:p>
         </p:txBody>
@@ -7835,8 +7507,8 @@
         </p:nvSpPr>
         <p:spPr>
           <a:xfrm>
-            <a:off x="457200" y="566928"/>
-            <a:ext cx="11277295" cy="411480"/>
+            <a:off x="457200" y="1170432"/>
+            <a:ext cx="11277295" cy="5230368"/>
           </a:xfrm>
           <a:prstGeom prst="rect">
             <a:avLst/>
@@ -7849,990 +7521,144 @@
           </a:bodyPr>
           <a:lstStyle/>
           <a:p>
-            <a:r>
-              <a:rPr sz="1400" b="0" i="0">
-                <a:solidFill>
-                  <a:srgbClr val="B8D8EE"/>
-                </a:solidFill>
-                <a:latin typeface="Calibri"/>
-              </a:rPr>
-              <a:t>17 min en equipos · 2 dibujan · 2 escriben textos · 1 escribe el guion de prueba · prototipo de tres pantallas + guion de prueba con tres tareas</a:t>
-            </a:r>
-          </a:p>
-        </p:txBody>
-      </p:sp>
-      <p:sp>
-        <p:nvSpPr>
-          <p:cNvPr id="6" name="Rounded Rectangle 5"/>
-          <p:cNvSpPr/>
-          <p:nvPr/>
-        </p:nvSpPr>
-        <p:spPr>
-          <a:xfrm>
-            <a:off x="457200" y="1472184"/>
-            <a:ext cx="11277295" cy="566928"/>
-          </a:xfrm>
-          <a:prstGeom prst="roundRect">
-            <a:avLst>
-              <a:gd name="adj" fmla="val 12000"/>
-            </a:avLst>
-          </a:prstGeom>
-          <a:solidFill>
-            <a:srgbClr val="F2F2F2"/>
-          </a:solidFill>
-          <a:ln>
-            <a:noFill/>
-          </a:ln>
-        </p:spPr>
-        <p:style>
-          <a:lnRef idx="1">
-            <a:schemeClr val="accent1"/>
-          </a:lnRef>
-          <a:fillRef idx="3">
-            <a:schemeClr val="accent1"/>
-          </a:fillRef>
-          <a:effectRef idx="2">
-            <a:schemeClr val="accent1"/>
-          </a:effectRef>
-          <a:fontRef idx="minor">
-            <a:schemeClr val="lt1"/>
-          </a:fontRef>
-        </p:style>
-        <p:txBody>
-          <a:bodyPr rtlCol="0" anchor="ctr"/>
-          <a:lstStyle/>
-          <a:p>
-            <a:pPr algn="ctr"/>
-          </a:p>
-        </p:txBody>
-      </p:sp>
-      <p:sp>
-        <p:nvSpPr>
-          <p:cNvPr id="7" name="Rectangle 6"/>
-          <p:cNvSpPr/>
-          <p:nvPr/>
-        </p:nvSpPr>
-        <p:spPr>
-          <a:xfrm>
-            <a:off x="640080" y="1618487"/>
-            <a:ext cx="274320" cy="274320"/>
-          </a:xfrm>
-          <a:prstGeom prst="rect">
-            <a:avLst/>
-          </a:prstGeom>
-          <a:solidFill>
-            <a:srgbClr val="FFFFFF"/>
-          </a:solidFill>
-          <a:ln>
-            <a:solidFill>
-              <a:srgbClr val="333333"/>
-            </a:solidFill>
-          </a:ln>
-        </p:spPr>
-        <p:style>
-          <a:lnRef idx="1">
-            <a:schemeClr val="accent1"/>
-          </a:lnRef>
-          <a:fillRef idx="3">
-            <a:schemeClr val="accent1"/>
-          </a:fillRef>
-          <a:effectRef idx="2">
-            <a:schemeClr val="accent1"/>
-          </a:effectRef>
-          <a:fontRef idx="minor">
-            <a:schemeClr val="lt1"/>
-          </a:fontRef>
-        </p:style>
-        <p:txBody>
-          <a:bodyPr rtlCol="0" anchor="ctr"/>
-          <a:lstStyle/>
-          <a:p>
-            <a:pPr algn="ctr"/>
-          </a:p>
-        </p:txBody>
-      </p:sp>
-      <p:sp>
-        <p:nvSpPr>
-          <p:cNvPr id="8" name="Rectangle 7"/>
-          <p:cNvSpPr/>
-          <p:nvPr/>
-        </p:nvSpPr>
-        <p:spPr>
-          <a:xfrm>
-            <a:off x="640080" y="1618487"/>
-            <a:ext cx="73152" cy="274320"/>
-          </a:xfrm>
-          <a:prstGeom prst="rect">
-            <a:avLst/>
-          </a:prstGeom>
-          <a:solidFill>
-            <a:srgbClr val="269CCB"/>
-          </a:solidFill>
-          <a:ln>
-            <a:noFill/>
-          </a:ln>
-        </p:spPr>
-        <p:style>
-          <a:lnRef idx="1">
-            <a:schemeClr val="accent1"/>
-          </a:lnRef>
-          <a:fillRef idx="3">
-            <a:schemeClr val="accent1"/>
-          </a:fillRef>
-          <a:effectRef idx="2">
-            <a:schemeClr val="accent1"/>
-          </a:effectRef>
-          <a:fontRef idx="minor">
-            <a:schemeClr val="lt1"/>
-          </a:fontRef>
-        </p:style>
-        <p:txBody>
-          <a:bodyPr rtlCol="0" anchor="ctr"/>
-          <a:lstStyle/>
-          <a:p>
-            <a:pPr algn="ctr"/>
-          </a:p>
-        </p:txBody>
-      </p:sp>
-      <p:sp>
-        <p:nvSpPr>
-          <p:cNvPr id="9" name="TextBox 8"/>
-          <p:cNvSpPr txBox="1"/>
-          <p:nvPr/>
-        </p:nvSpPr>
-        <p:spPr>
-          <a:xfrm>
-            <a:off x="1097280" y="1563624"/>
-            <a:ext cx="10362895" cy="402336"/>
-          </a:xfrm>
-          <a:prstGeom prst="rect">
-            <a:avLst/>
-          </a:prstGeom>
-          <a:noFill/>
-        </p:spPr>
-        <p:txBody>
-          <a:bodyPr wrap="square" anchor="ctr"/>
-          <a:lstStyle/>
-          <a:p>
-            <a:r>
-              <a:rPr sz="1500" b="1" i="0">
-                <a:solidFill>
-                  <a:srgbClr val="333333"/>
-                </a:solidFill>
-                <a:latin typeface="Calibri"/>
-              </a:rPr>
-              <a:t>EL FLUJO EN TRES PASOS</a:t>
-            </a:r>
-            <a:r>
-              <a:rPr sz="1500" b="0" i="0">
-                <a:solidFill>
-                  <a:srgbClr val="333333"/>
-                </a:solidFill>
-                <a:latin typeface="Calibri"/>
-              </a:rPr>
-              <a:t> — El camino principal del alcance mínimo, en tres pantallas o tres pasos, y </a:t>
-            </a:r>
-            <a:r>
-              <a:rPr sz="1500" b="1" i="0">
-                <a:solidFill>
-                  <a:srgbClr val="333333"/>
-                </a:solidFill>
-                <a:latin typeface="Calibri"/>
-              </a:rPr>
-              <a:t>una frase de propósito por cada uno</a:t>
-            </a:r>
-            <a:r>
-              <a:rPr sz="1500" b="0" i="0">
-                <a:solidFill>
-                  <a:srgbClr val="333333"/>
-                </a:solidFill>
-                <a:latin typeface="Calibri"/>
-              </a:rPr>
-              <a:t>.</a:t>
-            </a:r>
-          </a:p>
-        </p:txBody>
-      </p:sp>
-      <p:sp>
-        <p:nvSpPr>
-          <p:cNvPr id="10" name="Rounded Rectangle 9"/>
-          <p:cNvSpPr/>
-          <p:nvPr/>
-        </p:nvSpPr>
-        <p:spPr>
-          <a:xfrm>
-            <a:off x="457200" y="2148839"/>
-            <a:ext cx="11277295" cy="566928"/>
-          </a:xfrm>
-          <a:prstGeom prst="roundRect">
-            <a:avLst>
-              <a:gd name="adj" fmla="val 12000"/>
-            </a:avLst>
-          </a:prstGeom>
-          <a:solidFill>
-            <a:srgbClr val="F2F2F2"/>
-          </a:solidFill>
-          <a:ln>
-            <a:noFill/>
-          </a:ln>
-        </p:spPr>
-        <p:style>
-          <a:lnRef idx="1">
-            <a:schemeClr val="accent1"/>
-          </a:lnRef>
-          <a:fillRef idx="3">
-            <a:schemeClr val="accent1"/>
-          </a:fillRef>
-          <a:effectRef idx="2">
-            <a:schemeClr val="accent1"/>
-          </a:effectRef>
-          <a:fontRef idx="minor">
-            <a:schemeClr val="lt1"/>
-          </a:fontRef>
-        </p:style>
-        <p:txBody>
-          <a:bodyPr rtlCol="0" anchor="ctr"/>
-          <a:lstStyle/>
-          <a:p>
-            <a:pPr algn="ctr"/>
-          </a:p>
-        </p:txBody>
-      </p:sp>
-      <p:sp>
-        <p:nvSpPr>
-          <p:cNvPr id="11" name="Rectangle 10"/>
-          <p:cNvSpPr/>
-          <p:nvPr/>
-        </p:nvSpPr>
-        <p:spPr>
-          <a:xfrm>
-            <a:off x="640080" y="2295144"/>
-            <a:ext cx="274320" cy="274320"/>
-          </a:xfrm>
-          <a:prstGeom prst="rect">
-            <a:avLst/>
-          </a:prstGeom>
-          <a:solidFill>
-            <a:srgbClr val="FFFFFF"/>
-          </a:solidFill>
-          <a:ln>
-            <a:solidFill>
-              <a:srgbClr val="333333"/>
-            </a:solidFill>
-          </a:ln>
-        </p:spPr>
-        <p:style>
-          <a:lnRef idx="1">
-            <a:schemeClr val="accent1"/>
-          </a:lnRef>
-          <a:fillRef idx="3">
-            <a:schemeClr val="accent1"/>
-          </a:fillRef>
-          <a:effectRef idx="2">
-            <a:schemeClr val="accent1"/>
-          </a:effectRef>
-          <a:fontRef idx="minor">
-            <a:schemeClr val="lt1"/>
-          </a:fontRef>
-        </p:style>
-        <p:txBody>
-          <a:bodyPr rtlCol="0" anchor="ctr"/>
-          <a:lstStyle/>
-          <a:p>
-            <a:pPr algn="ctr"/>
-          </a:p>
-        </p:txBody>
-      </p:sp>
-      <p:sp>
-        <p:nvSpPr>
-          <p:cNvPr id="12" name="Rectangle 11"/>
-          <p:cNvSpPr/>
-          <p:nvPr/>
-        </p:nvSpPr>
-        <p:spPr>
-          <a:xfrm>
-            <a:off x="640080" y="2295144"/>
-            <a:ext cx="73152" cy="274320"/>
-          </a:xfrm>
-          <a:prstGeom prst="rect">
-            <a:avLst/>
-          </a:prstGeom>
-          <a:solidFill>
-            <a:srgbClr val="269CCB"/>
-          </a:solidFill>
-          <a:ln>
-            <a:noFill/>
-          </a:ln>
-        </p:spPr>
-        <p:style>
-          <a:lnRef idx="1">
-            <a:schemeClr val="accent1"/>
-          </a:lnRef>
-          <a:fillRef idx="3">
-            <a:schemeClr val="accent1"/>
-          </a:fillRef>
-          <a:effectRef idx="2">
-            <a:schemeClr val="accent1"/>
-          </a:effectRef>
-          <a:fontRef idx="minor">
-            <a:schemeClr val="lt1"/>
-          </a:fontRef>
-        </p:style>
-        <p:txBody>
-          <a:bodyPr rtlCol="0" anchor="ctr"/>
-          <a:lstStyle/>
-          <a:p>
-            <a:pPr algn="ctr"/>
-          </a:p>
-        </p:txBody>
-      </p:sp>
-      <p:sp>
-        <p:nvSpPr>
-          <p:cNvPr id="13" name="TextBox 12"/>
-          <p:cNvSpPr txBox="1"/>
-          <p:nvPr/>
-        </p:nvSpPr>
-        <p:spPr>
-          <a:xfrm>
-            <a:off x="1097280" y="2240279"/>
-            <a:ext cx="10362895" cy="402336"/>
-          </a:xfrm>
-          <a:prstGeom prst="rect">
-            <a:avLst/>
-          </a:prstGeom>
-          <a:noFill/>
-        </p:spPr>
-        <p:txBody>
-          <a:bodyPr wrap="square" anchor="ctr"/>
-          <a:lstStyle/>
-          <a:p>
-            <a:r>
-              <a:rPr sz="1500" b="1" i="0">
-                <a:solidFill>
-                  <a:srgbClr val="333333"/>
-                </a:solidFill>
-                <a:latin typeface="Calibri"/>
-              </a:rPr>
-              <a:t>LAS TRES PANTALLAS DIBUJADAS</a:t>
-            </a:r>
-            <a:r>
-              <a:rPr sz="1500" b="0" i="0">
-                <a:solidFill>
-                  <a:srgbClr val="333333"/>
-                </a:solidFill>
-                <a:latin typeface="Calibri"/>
-              </a:rPr>
-              <a:t> — Las tres dibujadas de verdad, con el camino principal grande y primero, y una </a:t>
-            </a:r>
-            <a:r>
-              <a:rPr sz="1500" b="1" i="0">
-                <a:solidFill>
-                  <a:srgbClr val="333333"/>
-                </a:solidFill>
-                <a:latin typeface="Calibri"/>
-              </a:rPr>
-              <a:t>flecha con destino</a:t>
-            </a:r>
-            <a:r>
-              <a:rPr sz="1500" b="0" i="0">
-                <a:solidFill>
-                  <a:srgbClr val="333333"/>
-                </a:solidFill>
-                <a:latin typeface="Calibri"/>
-              </a:rPr>
-              <a:t> por cada botón.</a:t>
-            </a:r>
-          </a:p>
-        </p:txBody>
-      </p:sp>
-      <p:sp>
-        <p:nvSpPr>
-          <p:cNvPr id="14" name="Rounded Rectangle 13"/>
-          <p:cNvSpPr/>
-          <p:nvPr/>
-        </p:nvSpPr>
-        <p:spPr>
-          <a:xfrm>
-            <a:off x="457200" y="2825496"/>
-            <a:ext cx="11277295" cy="566928"/>
-          </a:xfrm>
-          <a:prstGeom prst="roundRect">
-            <a:avLst>
-              <a:gd name="adj" fmla="val 12000"/>
-            </a:avLst>
-          </a:prstGeom>
-          <a:solidFill>
-            <a:srgbClr val="F2F2F2"/>
-          </a:solidFill>
-          <a:ln>
-            <a:noFill/>
-          </a:ln>
-        </p:spPr>
-        <p:style>
-          <a:lnRef idx="1">
-            <a:schemeClr val="accent1"/>
-          </a:lnRef>
-          <a:fillRef idx="3">
-            <a:schemeClr val="accent1"/>
-          </a:fillRef>
-          <a:effectRef idx="2">
-            <a:schemeClr val="accent1"/>
-          </a:effectRef>
-          <a:fontRef idx="minor">
-            <a:schemeClr val="lt1"/>
-          </a:fontRef>
-        </p:style>
-        <p:txBody>
-          <a:bodyPr rtlCol="0" anchor="ctr"/>
-          <a:lstStyle/>
-          <a:p>
-            <a:pPr algn="ctr"/>
-          </a:p>
-        </p:txBody>
-      </p:sp>
-      <p:sp>
-        <p:nvSpPr>
-          <p:cNvPr id="15" name="Rectangle 14"/>
-          <p:cNvSpPr/>
-          <p:nvPr/>
-        </p:nvSpPr>
-        <p:spPr>
-          <a:xfrm>
-            <a:off x="640080" y="2971800"/>
-            <a:ext cx="274320" cy="274320"/>
-          </a:xfrm>
-          <a:prstGeom prst="rect">
-            <a:avLst/>
-          </a:prstGeom>
-          <a:solidFill>
-            <a:srgbClr val="FFFFFF"/>
-          </a:solidFill>
-          <a:ln>
-            <a:solidFill>
-              <a:srgbClr val="333333"/>
-            </a:solidFill>
-          </a:ln>
-        </p:spPr>
-        <p:style>
-          <a:lnRef idx="1">
-            <a:schemeClr val="accent1"/>
-          </a:lnRef>
-          <a:fillRef idx="3">
-            <a:schemeClr val="accent1"/>
-          </a:fillRef>
-          <a:effectRef idx="2">
-            <a:schemeClr val="accent1"/>
-          </a:effectRef>
-          <a:fontRef idx="minor">
-            <a:schemeClr val="lt1"/>
-          </a:fontRef>
-        </p:style>
-        <p:txBody>
-          <a:bodyPr rtlCol="0" anchor="ctr"/>
-          <a:lstStyle/>
-          <a:p>
-            <a:pPr algn="ctr"/>
-          </a:p>
-        </p:txBody>
-      </p:sp>
-      <p:sp>
-        <p:nvSpPr>
-          <p:cNvPr id="16" name="Rectangle 15"/>
-          <p:cNvSpPr/>
-          <p:nvPr/>
-        </p:nvSpPr>
-        <p:spPr>
-          <a:xfrm>
-            <a:off x="640080" y="2971800"/>
-            <a:ext cx="73152" cy="274320"/>
-          </a:xfrm>
-          <a:prstGeom prst="rect">
-            <a:avLst/>
-          </a:prstGeom>
-          <a:solidFill>
-            <a:srgbClr val="269CCB"/>
-          </a:solidFill>
-          <a:ln>
-            <a:noFill/>
-          </a:ln>
-        </p:spPr>
-        <p:style>
-          <a:lnRef idx="1">
-            <a:schemeClr val="accent1"/>
-          </a:lnRef>
-          <a:fillRef idx="3">
-            <a:schemeClr val="accent1"/>
-          </a:fillRef>
-          <a:effectRef idx="2">
-            <a:schemeClr val="accent1"/>
-          </a:effectRef>
-          <a:fontRef idx="minor">
-            <a:schemeClr val="lt1"/>
-          </a:fontRef>
-        </p:style>
-        <p:txBody>
-          <a:bodyPr rtlCol="0" anchor="ctr"/>
-          <a:lstStyle/>
-          <a:p>
-            <a:pPr algn="ctr"/>
-          </a:p>
-        </p:txBody>
-      </p:sp>
-      <p:sp>
-        <p:nvSpPr>
-          <p:cNvPr id="17" name="TextBox 16"/>
-          <p:cNvSpPr txBox="1"/>
-          <p:nvPr/>
-        </p:nvSpPr>
-        <p:spPr>
-          <a:xfrm>
-            <a:off x="1097280" y="2916936"/>
-            <a:ext cx="10362895" cy="402336"/>
-          </a:xfrm>
-          <a:prstGeom prst="rect">
-            <a:avLst/>
-          </a:prstGeom>
-          <a:noFill/>
-        </p:spPr>
-        <p:txBody>
-          <a:bodyPr wrap="square" anchor="ctr"/>
-          <a:lstStyle/>
-          <a:p>
-            <a:r>
-              <a:rPr sz="1500" b="1" i="0">
-                <a:solidFill>
-                  <a:srgbClr val="333333"/>
-                </a:solidFill>
-                <a:latin typeface="Calibri"/>
-              </a:rPr>
-              <a:t>EL ESTADO VACÍO Y EL DE ERROR</a:t>
-            </a:r>
-            <a:r>
-              <a:rPr sz="1500" b="0" i="0">
-                <a:solidFill>
-                  <a:srgbClr val="333333"/>
-                </a:solidFill>
-                <a:latin typeface="Calibri"/>
-              </a:rPr>
-              <a:t> — Qué se ve la primera vez sin datos, qué se ve cuando la búsqueda no encuentra nada, y qué se ve cuando algo falla. </a:t>
-            </a:r>
-            <a:r>
-              <a:rPr sz="1500" b="1" i="0">
-                <a:solidFill>
-                  <a:srgbClr val="333333"/>
-                </a:solidFill>
-                <a:latin typeface="Calibri"/>
-              </a:rPr>
-              <a:t>Con el texto exacto del mensaje.</a:t>
-            </a:r>
-          </a:p>
-        </p:txBody>
-      </p:sp>
-      <p:sp>
-        <p:nvSpPr>
-          <p:cNvPr id="18" name="Rounded Rectangle 17"/>
-          <p:cNvSpPr/>
-          <p:nvPr/>
-        </p:nvSpPr>
-        <p:spPr>
-          <a:xfrm>
-            <a:off x="457200" y="3502152"/>
-            <a:ext cx="11277295" cy="566928"/>
-          </a:xfrm>
-          <a:prstGeom prst="roundRect">
-            <a:avLst>
-              <a:gd name="adj" fmla="val 12000"/>
-            </a:avLst>
-          </a:prstGeom>
-          <a:solidFill>
-            <a:srgbClr val="F2F2F2"/>
-          </a:solidFill>
-          <a:ln>
-            <a:noFill/>
-          </a:ln>
-        </p:spPr>
-        <p:style>
-          <a:lnRef idx="1">
-            <a:schemeClr val="accent1"/>
-          </a:lnRef>
-          <a:fillRef idx="3">
-            <a:schemeClr val="accent1"/>
-          </a:fillRef>
-          <a:effectRef idx="2">
-            <a:schemeClr val="accent1"/>
-          </a:effectRef>
-          <a:fontRef idx="minor">
-            <a:schemeClr val="lt1"/>
-          </a:fontRef>
-        </p:style>
-        <p:txBody>
-          <a:bodyPr rtlCol="0" anchor="ctr"/>
-          <a:lstStyle/>
-          <a:p>
-            <a:pPr algn="ctr"/>
-          </a:p>
-        </p:txBody>
-      </p:sp>
-      <p:sp>
-        <p:nvSpPr>
-          <p:cNvPr id="19" name="Rectangle 18"/>
-          <p:cNvSpPr/>
-          <p:nvPr/>
-        </p:nvSpPr>
-        <p:spPr>
-          <a:xfrm>
-            <a:off x="640080" y="3648456"/>
-            <a:ext cx="274320" cy="274320"/>
-          </a:xfrm>
-          <a:prstGeom prst="rect">
-            <a:avLst/>
-          </a:prstGeom>
-          <a:solidFill>
-            <a:srgbClr val="FFFFFF"/>
-          </a:solidFill>
-          <a:ln>
-            <a:solidFill>
-              <a:srgbClr val="333333"/>
-            </a:solidFill>
-          </a:ln>
-        </p:spPr>
-        <p:style>
-          <a:lnRef idx="1">
-            <a:schemeClr val="accent1"/>
-          </a:lnRef>
-          <a:fillRef idx="3">
-            <a:schemeClr val="accent1"/>
-          </a:fillRef>
-          <a:effectRef idx="2">
-            <a:schemeClr val="accent1"/>
-          </a:effectRef>
-          <a:fontRef idx="minor">
-            <a:schemeClr val="lt1"/>
-          </a:fontRef>
-        </p:style>
-        <p:txBody>
-          <a:bodyPr rtlCol="0" anchor="ctr"/>
-          <a:lstStyle/>
-          <a:p>
-            <a:pPr algn="ctr"/>
-          </a:p>
-        </p:txBody>
-      </p:sp>
-      <p:sp>
-        <p:nvSpPr>
-          <p:cNvPr id="20" name="Rectangle 19"/>
-          <p:cNvSpPr/>
-          <p:nvPr/>
-        </p:nvSpPr>
-        <p:spPr>
-          <a:xfrm>
-            <a:off x="640080" y="3648456"/>
-            <a:ext cx="73152" cy="274320"/>
-          </a:xfrm>
-          <a:prstGeom prst="rect">
-            <a:avLst/>
-          </a:prstGeom>
-          <a:solidFill>
-            <a:srgbClr val="269CCB"/>
-          </a:solidFill>
-          <a:ln>
-            <a:noFill/>
-          </a:ln>
-        </p:spPr>
-        <p:style>
-          <a:lnRef idx="1">
-            <a:schemeClr val="accent1"/>
-          </a:lnRef>
-          <a:fillRef idx="3">
-            <a:schemeClr val="accent1"/>
-          </a:fillRef>
-          <a:effectRef idx="2">
-            <a:schemeClr val="accent1"/>
-          </a:effectRef>
-          <a:fontRef idx="minor">
-            <a:schemeClr val="lt1"/>
-          </a:fontRef>
-        </p:style>
-        <p:txBody>
-          <a:bodyPr rtlCol="0" anchor="ctr"/>
-          <a:lstStyle/>
-          <a:p>
-            <a:pPr algn="ctr"/>
-          </a:p>
-        </p:txBody>
-      </p:sp>
-      <p:sp>
-        <p:nvSpPr>
-          <p:cNvPr id="21" name="TextBox 20"/>
-          <p:cNvSpPr txBox="1"/>
-          <p:nvPr/>
-        </p:nvSpPr>
-        <p:spPr>
-          <a:xfrm>
-            <a:off x="1097280" y="3593592"/>
-            <a:ext cx="10362895" cy="402336"/>
-          </a:xfrm>
-          <a:prstGeom prst="rect">
-            <a:avLst/>
-          </a:prstGeom>
-          <a:noFill/>
-        </p:spPr>
-        <p:txBody>
-          <a:bodyPr wrap="square" anchor="ctr"/>
-          <a:lstStyle/>
-          <a:p>
-            <a:r>
-              <a:rPr sz="1500" b="1" i="0">
-                <a:solidFill>
-                  <a:srgbClr val="333333"/>
-                </a:solidFill>
-                <a:latin typeface="Calibri"/>
-              </a:rPr>
-              <a:t>LOS TEXTOS REALES</a:t>
-            </a:r>
-            <a:r>
-              <a:rPr sz="1500" b="0" i="0">
-                <a:solidFill>
-                  <a:srgbClr val="333333"/>
-                </a:solidFill>
-                <a:latin typeface="Calibri"/>
-              </a:rPr>
-              <a:t> — Todos los rótulos y mensajes escritos como van a quedar. </a:t>
-            </a:r>
-            <a:r>
-              <a:rPr sz="1500" b="1" i="0">
-                <a:solidFill>
-                  <a:srgbClr val="333333"/>
-                </a:solidFill>
-                <a:latin typeface="Calibri"/>
-              </a:rPr>
-              <a:t>Cero relleno</a:t>
-            </a:r>
-            <a:r>
-              <a:rPr sz="1500" b="0" i="0">
-                <a:solidFill>
-                  <a:srgbClr val="333333"/>
-                </a:solidFill>
-                <a:latin typeface="Calibri"/>
-              </a:rPr>
-              <a:t>, cero «texto aquí», cero «lorem ipsum».</a:t>
-            </a:r>
-          </a:p>
-        </p:txBody>
-      </p:sp>
-      <p:sp>
-        <p:nvSpPr>
-          <p:cNvPr id="22" name="Rounded Rectangle 21"/>
-          <p:cNvSpPr/>
-          <p:nvPr/>
-        </p:nvSpPr>
-        <p:spPr>
-          <a:xfrm>
-            <a:off x="457200" y="4178808"/>
-            <a:ext cx="11277295" cy="566928"/>
-          </a:xfrm>
-          <a:prstGeom prst="roundRect">
-            <a:avLst>
-              <a:gd name="adj" fmla="val 12000"/>
-            </a:avLst>
-          </a:prstGeom>
-          <a:solidFill>
-            <a:srgbClr val="F2F2F2"/>
-          </a:solidFill>
-          <a:ln>
-            <a:noFill/>
-          </a:ln>
-        </p:spPr>
-        <p:style>
-          <a:lnRef idx="1">
-            <a:schemeClr val="accent1"/>
-          </a:lnRef>
-          <a:fillRef idx="3">
-            <a:schemeClr val="accent1"/>
-          </a:fillRef>
-          <a:effectRef idx="2">
-            <a:schemeClr val="accent1"/>
-          </a:effectRef>
-          <a:fontRef idx="minor">
-            <a:schemeClr val="lt1"/>
-          </a:fontRef>
-        </p:style>
-        <p:txBody>
-          <a:bodyPr rtlCol="0" anchor="ctr"/>
-          <a:lstStyle/>
-          <a:p>
-            <a:pPr algn="ctr"/>
-          </a:p>
-        </p:txBody>
-      </p:sp>
-      <p:sp>
-        <p:nvSpPr>
-          <p:cNvPr id="23" name="Rectangle 22"/>
-          <p:cNvSpPr/>
-          <p:nvPr/>
-        </p:nvSpPr>
-        <p:spPr>
-          <a:xfrm>
-            <a:off x="640080" y="4325112"/>
-            <a:ext cx="274320" cy="274320"/>
-          </a:xfrm>
-          <a:prstGeom prst="rect">
-            <a:avLst/>
-          </a:prstGeom>
-          <a:solidFill>
-            <a:srgbClr val="FFFFFF"/>
-          </a:solidFill>
-          <a:ln>
-            <a:solidFill>
-              <a:srgbClr val="333333"/>
-            </a:solidFill>
-          </a:ln>
-        </p:spPr>
-        <p:style>
-          <a:lnRef idx="1">
-            <a:schemeClr val="accent1"/>
-          </a:lnRef>
-          <a:fillRef idx="3">
-            <a:schemeClr val="accent1"/>
-          </a:fillRef>
-          <a:effectRef idx="2">
-            <a:schemeClr val="accent1"/>
-          </a:effectRef>
-          <a:fontRef idx="minor">
-            <a:schemeClr val="lt1"/>
-          </a:fontRef>
-        </p:style>
-        <p:txBody>
-          <a:bodyPr rtlCol="0" anchor="ctr"/>
-          <a:lstStyle/>
-          <a:p>
-            <a:pPr algn="ctr"/>
-          </a:p>
-        </p:txBody>
-      </p:sp>
-      <p:sp>
-        <p:nvSpPr>
-          <p:cNvPr id="24" name="Rectangle 23"/>
-          <p:cNvSpPr/>
-          <p:nvPr/>
-        </p:nvSpPr>
-        <p:spPr>
-          <a:xfrm>
-            <a:off x="640080" y="4325112"/>
-            <a:ext cx="73152" cy="274320"/>
-          </a:xfrm>
-          <a:prstGeom prst="rect">
-            <a:avLst/>
-          </a:prstGeom>
-          <a:solidFill>
-            <a:srgbClr val="269CCB"/>
-          </a:solidFill>
-          <a:ln>
-            <a:noFill/>
-          </a:ln>
-        </p:spPr>
-        <p:style>
-          <a:lnRef idx="1">
-            <a:schemeClr val="accent1"/>
-          </a:lnRef>
-          <a:fillRef idx="3">
-            <a:schemeClr val="accent1"/>
-          </a:fillRef>
-          <a:effectRef idx="2">
-            <a:schemeClr val="accent1"/>
-          </a:effectRef>
-          <a:fontRef idx="minor">
-            <a:schemeClr val="lt1"/>
-          </a:fontRef>
-        </p:style>
-        <p:txBody>
-          <a:bodyPr rtlCol="0" anchor="ctr"/>
-          <a:lstStyle/>
-          <a:p>
-            <a:pPr algn="ctr"/>
-          </a:p>
-        </p:txBody>
-      </p:sp>
-      <p:sp>
-        <p:nvSpPr>
-          <p:cNvPr id="25" name="TextBox 24"/>
-          <p:cNvSpPr txBox="1"/>
-          <p:nvPr/>
-        </p:nvSpPr>
-        <p:spPr>
-          <a:xfrm>
-            <a:off x="1097280" y="4270248"/>
-            <a:ext cx="10362895" cy="402336"/>
-          </a:xfrm>
-          <a:prstGeom prst="rect">
-            <a:avLst/>
-          </a:prstGeom>
-          <a:noFill/>
-        </p:spPr>
-        <p:txBody>
-          <a:bodyPr wrap="square" anchor="ctr"/>
-          <a:lstStyle/>
-          <a:p>
-            <a:r>
-              <a:rPr sz="1500" b="1" i="0">
-                <a:solidFill>
-                  <a:srgbClr val="333333"/>
-                </a:solidFill>
-                <a:latin typeface="Calibri"/>
-              </a:rPr>
-              <a:t>EL GUION DE PRUEBA</a:t>
-            </a:r>
-            <a:r>
-              <a:rPr sz="1500" b="0" i="0">
-                <a:solidFill>
-                  <a:srgbClr val="333333"/>
-                </a:solidFill>
-                <a:latin typeface="Calibri"/>
-              </a:rPr>
-              <a:t> — Tres tareas para pedirle a una persona ajena, salidas de los </a:t>
-            </a:r>
-            <a:r>
-              <a:rPr sz="1500" b="1" i="0">
-                <a:solidFill>
-                  <a:srgbClr val="333333"/>
-                </a:solidFill>
-                <a:latin typeface="Calibri"/>
-              </a:rPr>
-              <a:t>criterios de aceptación de la sesión 7</a:t>
-            </a:r>
-            <a:r>
-              <a:rPr sz="1500" b="0" i="0">
-                <a:solidFill>
-                  <a:srgbClr val="333333"/>
-                </a:solidFill>
-                <a:latin typeface="Calibri"/>
-              </a:rPr>
-              <a:t>, y una de ellas sobre el caso en que el sistema </a:t>
-            </a:r>
-            <a:r>
-              <a:rPr sz="1500" b="1" i="0">
-                <a:solidFill>
-                  <a:srgbClr val="333333"/>
-                </a:solidFill>
-                <a:latin typeface="Calibri"/>
-              </a:rPr>
-              <a:t>no</a:t>
-            </a:r>
-            <a:r>
-              <a:rPr sz="1500" b="0" i="0">
-                <a:solidFill>
-                  <a:srgbClr val="333333"/>
-                </a:solidFill>
-                <a:latin typeface="Calibri"/>
-              </a:rPr>
-              <a:t> tiene la respuesta.</a:t>
-            </a:r>
-          </a:p>
-        </p:txBody>
-      </p:sp>
-      <p:sp>
-        <p:nvSpPr>
-          <p:cNvPr id="26" name="TextBox 25"/>
+            <a:pPr>
+              <a:spcAft>
+                <a:spcPts val="800"/>
+              </a:spcAft>
+            </a:pPr>
+            <a:r>
+              <a:rPr sz="2000" b="0" i="0">
+                <a:solidFill>
+                  <a:srgbClr val="333333"/>
+                </a:solidFill>
+                <a:latin typeface="Calibri"/>
+              </a:rPr>
+              <a:t>–   No describirlo**: una diapositiva por pantalla, y en cada botón un enlace hacia la diapositiva de destino.</a:t>
+            </a:r>
+          </a:p>
+          <a:p>
+            <a:pPr>
+              <a:spcAft>
+                <a:spcPts val="800"/>
+              </a:spcAft>
+            </a:pPr>
+            <a:r>
+              <a:rPr sz="2000" b="0" i="0">
+                <a:solidFill>
+                  <a:srgbClr val="333333"/>
+                </a:solidFill>
+                <a:latin typeface="Calibri"/>
+              </a:rPr>
+              <a:t>–   Dedíquele dos minutos de pantalla compartida: es lo que más van a agradecer. </a:t>
+            </a:r>
+            <a:r>
+              <a:rPr sz="2000" b="1" i="0">
+                <a:solidFill>
+                  <a:srgbClr val="333333"/>
+                </a:solidFill>
+                <a:latin typeface="Calibri"/>
+              </a:rPr>
+              <a:t>Canva</a:t>
+            </a:r>
+            <a:r>
+              <a:rPr sz="2000" b="0" i="0">
+                <a:solidFill>
+                  <a:srgbClr val="333333"/>
+                </a:solidFill>
+                <a:latin typeface="Calibri"/>
+              </a:rPr>
+              <a:t> queda reservado para la Clase 14 y para material que verá alguien externo.</a:t>
+            </a:r>
+          </a:p>
+          <a:p>
+            <a:pPr>
+              <a:spcAft>
+                <a:spcPts val="800"/>
+              </a:spcAft>
+            </a:pPr>
+            <a:r>
+              <a:rPr sz="2000" b="0" i="0">
+                <a:solidFill>
+                  <a:srgbClr val="333333"/>
+                </a:solidFill>
+                <a:latin typeface="Calibri"/>
+              </a:rPr>
+              <a:t>–   Y </a:t>
+            </a:r>
+            <a:r>
+              <a:rPr sz="2000" b="1" i="0">
+                <a:solidFill>
+                  <a:srgbClr val="333333"/>
+                </a:solidFill>
+                <a:latin typeface="Calibri"/>
+              </a:rPr>
+              <a:t>papel con una foto</a:t>
+            </a:r>
+            <a:r>
+              <a:rPr sz="2000" b="0" i="0">
+                <a:solidFill>
+                  <a:srgbClr val="333333"/>
+                </a:solidFill>
+                <a:latin typeface="Calibri"/>
+              </a:rPr>
+              <a:t> es perfectamente válido en este curso: es lo más rápido que existe y hay que decirlo, porque hay equipos que se paralizan buscando la herramienta perfecta.</a:t>
+            </a:r>
+          </a:p>
+          <a:p>
+            <a:pPr>
+              <a:spcAft>
+                <a:spcPts val="800"/>
+              </a:spcAft>
+            </a:pPr>
+            <a:r>
+              <a:rPr sz="2000" b="0" i="0">
+                <a:solidFill>
+                  <a:srgbClr val="333333"/>
+                </a:solidFill>
+                <a:latin typeface="Calibri"/>
+              </a:rPr>
+              <a:t>–   Las dos advertencias del cierre son operativas. </a:t>
+            </a:r>
+            <a:r>
+              <a:rPr sz="2000" b="1" i="0">
+                <a:solidFill>
+                  <a:srgbClr val="333333"/>
+                </a:solidFill>
+                <a:latin typeface="Calibri"/>
+              </a:rPr>
+              <a:t>No pulir el prototipo</a:t>
+            </a:r>
+            <a:r>
+              <a:rPr sz="2000" b="0" i="0">
+                <a:solidFill>
+                  <a:srgbClr val="333333"/>
+                </a:solidFill>
+                <a:latin typeface="Calibri"/>
+              </a:rPr>
+              <a:t>: se califica que el flujo se entienda</a:t>
+            </a:r>
+          </a:p>
+          <a:p>
+            <a:pPr>
+              <a:spcAft>
+                <a:spcPts val="800"/>
+              </a:spcAft>
+            </a:pPr>
+            <a:r>
+              <a:rPr sz="2000" b="0" i="0">
+                <a:solidFill>
+                  <a:srgbClr val="333333"/>
+                </a:solidFill>
+                <a:latin typeface="Calibri"/>
+              </a:rPr>
+              <a:t>–   Que los textos sean reales y que existan el estado vacío y el de error; un equipo que gasta el taller eligiendo colores llega a la Clase 12 sin nada que probar.</a:t>
+            </a:r>
+          </a:p>
+        </p:txBody>
+      </p:sp>
+      <p:sp>
+        <p:nvSpPr>
+          <p:cNvPr id="6" name="TextBox 5"/>
           <p:cNvSpPr txBox="1"/>
           <p:nvPr/>
         </p:nvSpPr>
@@ -8900,7 +7726,7 @@
         <p:spPr>
           <a:xfrm>
             <a:off x="0" y="0"/>
-            <a:ext cx="12191695" cy="1170432"/>
+            <a:ext cx="12191695" cy="960120"/>
           </a:xfrm>
           <a:prstGeom prst="rect">
             <a:avLst/>
@@ -8942,7 +7768,7 @@
         </p:nvSpPr>
         <p:spPr>
           <a:xfrm>
-            <a:off x="0" y="1170432"/>
+            <a:off x="0" y="960120"/>
             <a:ext cx="12191695" cy="41148"/>
           </a:xfrm>
           <a:prstGeom prst="rect">
@@ -8986,7 +7812,7 @@
         <p:spPr>
           <a:xfrm>
             <a:off x="457200" y="164592"/>
-            <a:ext cx="11277295" cy="384048"/>
+            <a:ext cx="11277295" cy="502920"/>
           </a:xfrm>
           <a:prstGeom prst="rect">
             <a:avLst/>
@@ -9006,7 +7832,7 @@
                 </a:solidFill>
                 <a:latin typeface="Calibri"/>
               </a:rPr>
-              <a:t>Cómo se expone en 3 minutos</a:t>
+              <a:t>Elegir la herramienta por la pregunta, y las dos advertencias (3/3)</a:t>
             </a:r>
           </a:p>
         </p:txBody>
@@ -9019,8 +7845,8 @@
         </p:nvSpPr>
         <p:spPr>
           <a:xfrm>
-            <a:off x="457200" y="566928"/>
-            <a:ext cx="11277295" cy="411480"/>
+            <a:off x="457200" y="1170432"/>
+            <a:ext cx="11277295" cy="5230368"/>
           </a:xfrm>
           <a:prstGeom prst="rect">
             <a:avLst/>
@@ -9033,876 +7859,60 @@
           </a:bodyPr>
           <a:lstStyle/>
           <a:p>
-            <a:r>
-              <a:rPr sz="1400" b="0" i="0">
-                <a:solidFill>
-                  <a:srgbClr val="B8D8EE"/>
-                </a:solidFill>
-                <a:latin typeface="Calibri"/>
-              </a:rPr>
-              <a:t>Habla el vocero con la pantalla ya compartida · cronómetro en pantalla · se corta al llegar a cero</a:t>
-            </a:r>
-          </a:p>
-        </p:txBody>
-      </p:sp>
-      <p:sp>
-        <p:nvSpPr>
-          <p:cNvPr id="6" name="Rounded Rectangle 5"/>
-          <p:cNvSpPr/>
-          <p:nvPr/>
-        </p:nvSpPr>
-        <p:spPr>
-          <a:xfrm>
-            <a:off x="457200" y="1444752"/>
-            <a:ext cx="11277295" cy="908913"/>
-          </a:xfrm>
-          <a:prstGeom prst="roundRect">
-            <a:avLst>
-              <a:gd name="adj" fmla="val 12000"/>
-            </a:avLst>
-          </a:prstGeom>
-          <a:solidFill>
-            <a:srgbClr val="F2F2F2"/>
-          </a:solidFill>
-          <a:ln>
-            <a:noFill/>
-          </a:ln>
-        </p:spPr>
-        <p:style>
-          <a:lnRef idx="1">
-            <a:schemeClr val="accent1"/>
-          </a:lnRef>
-          <a:fillRef idx="3">
-            <a:schemeClr val="accent1"/>
-          </a:fillRef>
-          <a:effectRef idx="2">
-            <a:schemeClr val="accent1"/>
-          </a:effectRef>
-          <a:fontRef idx="minor">
-            <a:schemeClr val="lt1"/>
-          </a:fontRef>
-        </p:style>
-        <p:txBody>
-          <a:bodyPr rtlCol="0" anchor="ctr"/>
-          <a:lstStyle/>
-          <a:p>
-            <a:pPr algn="ctr"/>
-          </a:p>
-        </p:txBody>
-      </p:sp>
-      <p:sp>
-        <p:nvSpPr>
-          <p:cNvPr id="7" name="Rounded Rectangle 6"/>
-          <p:cNvSpPr/>
-          <p:nvPr/>
-        </p:nvSpPr>
-        <p:spPr>
-          <a:xfrm>
-            <a:off x="594360" y="1679752"/>
-            <a:ext cx="438912" cy="438912"/>
-          </a:xfrm>
-          <a:prstGeom prst="roundRect">
-            <a:avLst>
-              <a:gd name="adj" fmla="val 12000"/>
-            </a:avLst>
-          </a:prstGeom>
-          <a:solidFill>
-            <a:srgbClr val="095292"/>
-          </a:solidFill>
-          <a:ln>
-            <a:noFill/>
-          </a:ln>
-        </p:spPr>
-        <p:style>
-          <a:lnRef idx="1">
-            <a:schemeClr val="accent1"/>
-          </a:lnRef>
-          <a:fillRef idx="3">
-            <a:schemeClr val="accent1"/>
-          </a:fillRef>
-          <a:effectRef idx="2">
-            <a:schemeClr val="accent1"/>
-          </a:effectRef>
-          <a:fontRef idx="minor">
-            <a:schemeClr val="lt1"/>
-          </a:fontRef>
-        </p:style>
-        <p:txBody>
-          <a:bodyPr rtlCol="0" anchor="ctr"/>
-          <a:lstStyle/>
-          <a:p>
-            <a:pPr algn="ctr"/>
-          </a:p>
-        </p:txBody>
-      </p:sp>
-      <p:sp>
-        <p:nvSpPr>
-          <p:cNvPr id="8" name="TextBox 7"/>
-          <p:cNvSpPr txBox="1"/>
-          <p:nvPr/>
-        </p:nvSpPr>
-        <p:spPr>
-          <a:xfrm>
-            <a:off x="594360" y="1679752"/>
-            <a:ext cx="438912" cy="438912"/>
-          </a:xfrm>
-          <a:prstGeom prst="rect">
-            <a:avLst/>
-          </a:prstGeom>
-          <a:noFill/>
-        </p:spPr>
-        <p:txBody>
-          <a:bodyPr wrap="square" anchor="ctr"/>
-          <a:lstStyle/>
-          <a:p>
-            <a:pPr algn="ctr"/>
-            <a:r>
-              <a:rPr sz="1600" b="1" i="0">
-                <a:solidFill>
-                  <a:srgbClr val="FFFFFF"/>
-                </a:solidFill>
-                <a:latin typeface="Calibri"/>
-              </a:rPr>
-              <a:t>1</a:t>
-            </a:r>
-          </a:p>
-        </p:txBody>
-      </p:sp>
-      <p:sp>
-        <p:nvSpPr>
-          <p:cNvPr id="9" name="TextBox 8"/>
-          <p:cNvSpPr txBox="1"/>
-          <p:nvPr/>
-        </p:nvSpPr>
-        <p:spPr>
-          <a:xfrm>
-            <a:off x="1188720" y="1536192"/>
-            <a:ext cx="10271455" cy="744321"/>
-          </a:xfrm>
-          <a:prstGeom prst="rect">
-            <a:avLst/>
-          </a:prstGeom>
-          <a:noFill/>
-        </p:spPr>
-        <p:txBody>
-          <a:bodyPr wrap="square" anchor="ctr"/>
-          <a:lstStyle/>
-          <a:p>
-            <a:r>
-              <a:rPr sz="1500" b="1" i="0">
-                <a:solidFill>
-                  <a:srgbClr val="095292"/>
-                </a:solidFill>
-                <a:latin typeface="Calibri"/>
-              </a:rPr>
-              <a:t>30 s · El flujo</a:t>
-            </a:r>
-          </a:p>
-          <a:p>
             <a:pPr>
-              <a:spcBef>
-                <a:spcPts val="200"/>
-              </a:spcBef>
+              <a:spcAft>
+                <a:spcPts val="800"/>
+              </a:spcAft>
             </a:pPr>
             <a:r>
-              <a:rPr sz="1300" b="0" i="0">
-                <a:solidFill>
-                  <a:srgbClr val="333333"/>
-                </a:solidFill>
-                <a:latin typeface="Calibri"/>
-              </a:rPr>
-              <a:t>Los tres pasos y para qué existe cada pantalla.</a:t>
-            </a:r>
-          </a:p>
-        </p:txBody>
-      </p:sp>
-      <p:sp>
-        <p:nvSpPr>
-          <p:cNvPr id="10" name="Rounded Rectangle 9"/>
-          <p:cNvSpPr/>
-          <p:nvPr/>
-        </p:nvSpPr>
-        <p:spPr>
-          <a:xfrm>
-            <a:off x="457200" y="2445105"/>
-            <a:ext cx="11277295" cy="908913"/>
-          </a:xfrm>
-          <a:prstGeom prst="roundRect">
-            <a:avLst>
-              <a:gd name="adj" fmla="val 12000"/>
-            </a:avLst>
-          </a:prstGeom>
-          <a:solidFill>
-            <a:srgbClr val="E8F4FA"/>
-          </a:solidFill>
-          <a:ln>
-            <a:noFill/>
-          </a:ln>
-        </p:spPr>
-        <p:style>
-          <a:lnRef idx="1">
-            <a:schemeClr val="accent1"/>
-          </a:lnRef>
-          <a:fillRef idx="3">
-            <a:schemeClr val="accent1"/>
-          </a:fillRef>
-          <a:effectRef idx="2">
-            <a:schemeClr val="accent1"/>
-          </a:effectRef>
-          <a:fontRef idx="minor">
-            <a:schemeClr val="lt1"/>
-          </a:fontRef>
-        </p:style>
-        <p:txBody>
-          <a:bodyPr rtlCol="0" anchor="ctr"/>
-          <a:lstStyle/>
-          <a:p>
-            <a:pPr algn="ctr"/>
-          </a:p>
-        </p:txBody>
-      </p:sp>
-      <p:sp>
-        <p:nvSpPr>
-          <p:cNvPr id="11" name="Rounded Rectangle 10"/>
-          <p:cNvSpPr/>
-          <p:nvPr/>
-        </p:nvSpPr>
-        <p:spPr>
-          <a:xfrm>
-            <a:off x="594360" y="2680106"/>
-            <a:ext cx="438912" cy="438912"/>
-          </a:xfrm>
-          <a:prstGeom prst="roundRect">
-            <a:avLst>
-              <a:gd name="adj" fmla="val 12000"/>
-            </a:avLst>
-          </a:prstGeom>
-          <a:solidFill>
-            <a:srgbClr val="095292"/>
-          </a:solidFill>
-          <a:ln>
-            <a:noFill/>
-          </a:ln>
-        </p:spPr>
-        <p:style>
-          <a:lnRef idx="1">
-            <a:schemeClr val="accent1"/>
-          </a:lnRef>
-          <a:fillRef idx="3">
-            <a:schemeClr val="accent1"/>
-          </a:fillRef>
-          <a:effectRef idx="2">
-            <a:schemeClr val="accent1"/>
-          </a:effectRef>
-          <a:fontRef idx="minor">
-            <a:schemeClr val="lt1"/>
-          </a:fontRef>
-        </p:style>
-        <p:txBody>
-          <a:bodyPr rtlCol="0" anchor="ctr"/>
-          <a:lstStyle/>
-          <a:p>
-            <a:pPr algn="ctr"/>
-          </a:p>
-        </p:txBody>
-      </p:sp>
-      <p:sp>
-        <p:nvSpPr>
-          <p:cNvPr id="12" name="TextBox 11"/>
-          <p:cNvSpPr txBox="1"/>
-          <p:nvPr/>
-        </p:nvSpPr>
-        <p:spPr>
-          <a:xfrm>
-            <a:off x="594360" y="2680106"/>
-            <a:ext cx="438912" cy="438912"/>
-          </a:xfrm>
-          <a:prstGeom prst="rect">
-            <a:avLst/>
-          </a:prstGeom>
-          <a:noFill/>
-        </p:spPr>
-        <p:txBody>
-          <a:bodyPr wrap="square" anchor="ctr"/>
-          <a:lstStyle/>
-          <a:p>
-            <a:pPr algn="ctr"/>
-            <a:r>
-              <a:rPr sz="1600" b="1" i="0">
-                <a:solidFill>
-                  <a:srgbClr val="FFFFFF"/>
-                </a:solidFill>
-                <a:latin typeface="Calibri"/>
-              </a:rPr>
-              <a:t>2</a:t>
-            </a:r>
-          </a:p>
-        </p:txBody>
-      </p:sp>
-      <p:sp>
-        <p:nvSpPr>
-          <p:cNvPr id="13" name="TextBox 12"/>
-          <p:cNvSpPr txBox="1"/>
-          <p:nvPr/>
-        </p:nvSpPr>
-        <p:spPr>
-          <a:xfrm>
-            <a:off x="1188720" y="2536545"/>
-            <a:ext cx="10271455" cy="744321"/>
-          </a:xfrm>
-          <a:prstGeom prst="rect">
-            <a:avLst/>
-          </a:prstGeom>
-          <a:noFill/>
-        </p:spPr>
-        <p:txBody>
-          <a:bodyPr wrap="square" anchor="ctr"/>
-          <a:lstStyle/>
-          <a:p>
-            <a:r>
-              <a:rPr sz="1500" b="1" i="0">
-                <a:solidFill>
-                  <a:srgbClr val="095292"/>
-                </a:solidFill>
-                <a:latin typeface="Calibri"/>
-              </a:rPr>
-              <a:t>50 s · El camino principal</a:t>
+              <a:rPr sz="2000" b="0" i="0">
+                <a:solidFill>
+                  <a:srgbClr val="333333"/>
+                </a:solidFill>
+                <a:latin typeface="Calibri"/>
+              </a:rPr>
+              <a:t>–   Y </a:t>
+            </a:r>
+            <a:r>
+              <a:rPr sz="2000" b="1" i="0">
+                <a:solidFill>
+                  <a:srgbClr val="333333"/>
+                </a:solidFill>
+                <a:latin typeface="Calibri"/>
+              </a:rPr>
+              <a:t>si el prototipo lleva datos, que sean inventados</a:t>
+            </a:r>
+            <a:r>
+              <a:rPr sz="2000" b="0" i="0">
+                <a:solidFill>
+                  <a:srgbClr val="333333"/>
+                </a:solidFill>
+                <a:latin typeface="Calibri"/>
+              </a:rPr>
+              <a:t>: ningún nombre, cédula, teléfono, dirección ni foto de una persona real, ni de ellos mismos.</a:t>
             </a:r>
           </a:p>
           <a:p>
             <a:pPr>
-              <a:spcBef>
-                <a:spcPts val="200"/>
-              </a:spcBef>
+              <a:spcAft>
+                <a:spcPts val="800"/>
+              </a:spcAft>
             </a:pPr>
             <a:r>
-              <a:rPr sz="1300" b="0" i="0">
-                <a:solidFill>
-                  <a:srgbClr val="333333"/>
-                </a:solidFill>
-                <a:latin typeface="Calibri"/>
-              </a:rPr>
-              <a:t>Qué hace el usuario el 90 % de las veces, señalado en el dibujo.</a:t>
-            </a:r>
-          </a:p>
-        </p:txBody>
-      </p:sp>
-      <p:sp>
-        <p:nvSpPr>
-          <p:cNvPr id="14" name="Rounded Rectangle 13"/>
-          <p:cNvSpPr/>
-          <p:nvPr/>
-        </p:nvSpPr>
-        <p:spPr>
-          <a:xfrm>
-            <a:off x="457200" y="3445459"/>
-            <a:ext cx="11277295" cy="908913"/>
-          </a:xfrm>
-          <a:prstGeom prst="roundRect">
-            <a:avLst>
-              <a:gd name="adj" fmla="val 12000"/>
-            </a:avLst>
-          </a:prstGeom>
-          <a:solidFill>
-            <a:srgbClr val="F2F2F2"/>
-          </a:solidFill>
-          <a:ln>
-            <a:noFill/>
-          </a:ln>
-        </p:spPr>
-        <p:style>
-          <a:lnRef idx="1">
-            <a:schemeClr val="accent1"/>
-          </a:lnRef>
-          <a:fillRef idx="3">
-            <a:schemeClr val="accent1"/>
-          </a:fillRef>
-          <a:effectRef idx="2">
-            <a:schemeClr val="accent1"/>
-          </a:effectRef>
-          <a:fontRef idx="minor">
-            <a:schemeClr val="lt1"/>
-          </a:fontRef>
-        </p:style>
-        <p:txBody>
-          <a:bodyPr rtlCol="0" anchor="ctr"/>
-          <a:lstStyle/>
-          <a:p>
-            <a:pPr algn="ctr"/>
-          </a:p>
-        </p:txBody>
-      </p:sp>
-      <p:sp>
-        <p:nvSpPr>
-          <p:cNvPr id="15" name="Rounded Rectangle 14"/>
-          <p:cNvSpPr/>
-          <p:nvPr/>
-        </p:nvSpPr>
-        <p:spPr>
-          <a:xfrm>
-            <a:off x="594360" y="3680460"/>
-            <a:ext cx="438912" cy="438912"/>
-          </a:xfrm>
-          <a:prstGeom prst="roundRect">
-            <a:avLst>
-              <a:gd name="adj" fmla="val 12000"/>
-            </a:avLst>
-          </a:prstGeom>
-          <a:solidFill>
-            <a:srgbClr val="095292"/>
-          </a:solidFill>
-          <a:ln>
-            <a:noFill/>
-          </a:ln>
-        </p:spPr>
-        <p:style>
-          <a:lnRef idx="1">
-            <a:schemeClr val="accent1"/>
-          </a:lnRef>
-          <a:fillRef idx="3">
-            <a:schemeClr val="accent1"/>
-          </a:fillRef>
-          <a:effectRef idx="2">
-            <a:schemeClr val="accent1"/>
-          </a:effectRef>
-          <a:fontRef idx="minor">
-            <a:schemeClr val="lt1"/>
-          </a:fontRef>
-        </p:style>
-        <p:txBody>
-          <a:bodyPr rtlCol="0" anchor="ctr"/>
-          <a:lstStyle/>
-          <a:p>
-            <a:pPr algn="ctr"/>
-          </a:p>
-        </p:txBody>
-      </p:sp>
-      <p:sp>
-        <p:nvSpPr>
-          <p:cNvPr id="16" name="TextBox 15"/>
-          <p:cNvSpPr txBox="1"/>
-          <p:nvPr/>
-        </p:nvSpPr>
-        <p:spPr>
-          <a:xfrm>
-            <a:off x="594360" y="3680460"/>
-            <a:ext cx="438912" cy="438912"/>
-          </a:xfrm>
-          <a:prstGeom prst="rect">
-            <a:avLst/>
-          </a:prstGeom>
-          <a:noFill/>
-        </p:spPr>
-        <p:txBody>
-          <a:bodyPr wrap="square" anchor="ctr"/>
-          <a:lstStyle/>
-          <a:p>
-            <a:pPr algn="ctr"/>
-            <a:r>
-              <a:rPr sz="1600" b="1" i="0">
-                <a:solidFill>
-                  <a:srgbClr val="FFFFFF"/>
-                </a:solidFill>
-                <a:latin typeface="Calibri"/>
-              </a:rPr>
-              <a:t>3</a:t>
-            </a:r>
-          </a:p>
-        </p:txBody>
-      </p:sp>
-      <p:sp>
-        <p:nvSpPr>
-          <p:cNvPr id="17" name="TextBox 16"/>
-          <p:cNvSpPr txBox="1"/>
-          <p:nvPr/>
-        </p:nvSpPr>
-        <p:spPr>
-          <a:xfrm>
-            <a:off x="1188720" y="3536899"/>
-            <a:ext cx="10271455" cy="744321"/>
-          </a:xfrm>
-          <a:prstGeom prst="rect">
-            <a:avLst/>
-          </a:prstGeom>
-          <a:noFill/>
-        </p:spPr>
-        <p:txBody>
-          <a:bodyPr wrap="square" anchor="ctr"/>
-          <a:lstStyle/>
-          <a:p>
-            <a:r>
-              <a:rPr sz="1500" b="1" i="0">
-                <a:solidFill>
-                  <a:srgbClr val="095292"/>
-                </a:solidFill>
-                <a:latin typeface="Calibri"/>
-              </a:rPr>
-              <a:t>50 s · Qué se ve cuando falla</a:t>
-            </a:r>
-          </a:p>
-          <a:p>
-            <a:pPr>
-              <a:spcBef>
-                <a:spcPts val="200"/>
-              </a:spcBef>
-            </a:pPr>
-            <a:r>
-              <a:rPr sz="1300" b="0" i="0">
-                <a:solidFill>
-                  <a:srgbClr val="333333"/>
-                </a:solidFill>
-                <a:latin typeface="Calibri"/>
-              </a:rPr>
-              <a:t>Estado vacío y de error, con el mensaje leído tal cual. Es el minuto obligatorio.</a:t>
-            </a:r>
-          </a:p>
-        </p:txBody>
-      </p:sp>
-      <p:sp>
-        <p:nvSpPr>
-          <p:cNvPr id="18" name="Rounded Rectangle 17"/>
-          <p:cNvSpPr/>
-          <p:nvPr/>
-        </p:nvSpPr>
-        <p:spPr>
-          <a:xfrm>
-            <a:off x="457200" y="4445812"/>
-            <a:ext cx="11277295" cy="908913"/>
-          </a:xfrm>
-          <a:prstGeom prst="roundRect">
-            <a:avLst>
-              <a:gd name="adj" fmla="val 12000"/>
-            </a:avLst>
-          </a:prstGeom>
-          <a:solidFill>
-            <a:srgbClr val="E8F4FA"/>
-          </a:solidFill>
-          <a:ln>
-            <a:noFill/>
-          </a:ln>
-        </p:spPr>
-        <p:style>
-          <a:lnRef idx="1">
-            <a:schemeClr val="accent1"/>
-          </a:lnRef>
-          <a:fillRef idx="3">
-            <a:schemeClr val="accent1"/>
-          </a:fillRef>
-          <a:effectRef idx="2">
-            <a:schemeClr val="accent1"/>
-          </a:effectRef>
-          <a:fontRef idx="minor">
-            <a:schemeClr val="lt1"/>
-          </a:fontRef>
-        </p:style>
-        <p:txBody>
-          <a:bodyPr rtlCol="0" anchor="ctr"/>
-          <a:lstStyle/>
-          <a:p>
-            <a:pPr algn="ctr"/>
-          </a:p>
-        </p:txBody>
-      </p:sp>
-      <p:sp>
-        <p:nvSpPr>
-          <p:cNvPr id="19" name="Rounded Rectangle 18"/>
-          <p:cNvSpPr/>
-          <p:nvPr/>
-        </p:nvSpPr>
-        <p:spPr>
-          <a:xfrm>
-            <a:off x="594360" y="4680813"/>
-            <a:ext cx="438912" cy="438912"/>
-          </a:xfrm>
-          <a:prstGeom prst="roundRect">
-            <a:avLst>
-              <a:gd name="adj" fmla="val 12000"/>
-            </a:avLst>
-          </a:prstGeom>
-          <a:solidFill>
-            <a:srgbClr val="095292"/>
-          </a:solidFill>
-          <a:ln>
-            <a:noFill/>
-          </a:ln>
-        </p:spPr>
-        <p:style>
-          <a:lnRef idx="1">
-            <a:schemeClr val="accent1"/>
-          </a:lnRef>
-          <a:fillRef idx="3">
-            <a:schemeClr val="accent1"/>
-          </a:fillRef>
-          <a:effectRef idx="2">
-            <a:schemeClr val="accent1"/>
-          </a:effectRef>
-          <a:fontRef idx="minor">
-            <a:schemeClr val="lt1"/>
-          </a:fontRef>
-        </p:style>
-        <p:txBody>
-          <a:bodyPr rtlCol="0" anchor="ctr"/>
-          <a:lstStyle/>
-          <a:p>
-            <a:pPr algn="ctr"/>
-          </a:p>
-        </p:txBody>
-      </p:sp>
-      <p:sp>
-        <p:nvSpPr>
-          <p:cNvPr id="20" name="TextBox 19"/>
-          <p:cNvSpPr txBox="1"/>
-          <p:nvPr/>
-        </p:nvSpPr>
-        <p:spPr>
-          <a:xfrm>
-            <a:off x="594360" y="4680813"/>
-            <a:ext cx="438912" cy="438912"/>
-          </a:xfrm>
-          <a:prstGeom prst="rect">
-            <a:avLst/>
-          </a:prstGeom>
-          <a:noFill/>
-        </p:spPr>
-        <p:txBody>
-          <a:bodyPr wrap="square" anchor="ctr"/>
-          <a:lstStyle/>
-          <a:p>
-            <a:pPr algn="ctr"/>
-            <a:r>
-              <a:rPr sz="1600" b="1" i="0">
-                <a:solidFill>
-                  <a:srgbClr val="FFFFFF"/>
-                </a:solidFill>
-                <a:latin typeface="Calibri"/>
-              </a:rPr>
-              <a:t>4</a:t>
-            </a:r>
-          </a:p>
-        </p:txBody>
-      </p:sp>
-      <p:sp>
-        <p:nvSpPr>
-          <p:cNvPr id="21" name="TextBox 20"/>
-          <p:cNvSpPr txBox="1"/>
-          <p:nvPr/>
-        </p:nvSpPr>
-        <p:spPr>
-          <a:xfrm>
-            <a:off x="1188720" y="4537252"/>
-            <a:ext cx="10271455" cy="744321"/>
-          </a:xfrm>
-          <a:prstGeom prst="rect">
-            <a:avLst/>
-          </a:prstGeom>
-          <a:noFill/>
-        </p:spPr>
-        <p:txBody>
-          <a:bodyPr wrap="square" anchor="ctr"/>
-          <a:lstStyle/>
-          <a:p>
-            <a:r>
-              <a:rPr sz="1500" b="1" i="0">
-                <a:solidFill>
-                  <a:srgbClr val="095292"/>
-                </a:solidFill>
-                <a:latin typeface="Calibri"/>
-              </a:rPr>
-              <a:t>30 s · Los textos</a:t>
-            </a:r>
-          </a:p>
-          <a:p>
-            <a:pPr>
-              <a:spcBef>
-                <a:spcPts val="200"/>
-              </a:spcBef>
-            </a:pPr>
-            <a:r>
-              <a:rPr sz="1300" b="0" i="0">
-                <a:solidFill>
-                  <a:srgbClr val="333333"/>
-                </a:solidFill>
-                <a:latin typeface="Calibri"/>
-              </a:rPr>
-              <a:t>Dos rótulos que costó decidir y por qué quedaron así.</a:t>
-            </a:r>
-          </a:p>
-        </p:txBody>
-      </p:sp>
-      <p:sp>
-        <p:nvSpPr>
-          <p:cNvPr id="22" name="Rounded Rectangle 21"/>
-          <p:cNvSpPr/>
-          <p:nvPr/>
-        </p:nvSpPr>
-        <p:spPr>
-          <a:xfrm>
-            <a:off x="457200" y="5446166"/>
-            <a:ext cx="11277295" cy="908913"/>
-          </a:xfrm>
-          <a:prstGeom prst="roundRect">
-            <a:avLst>
-              <a:gd name="adj" fmla="val 12000"/>
-            </a:avLst>
-          </a:prstGeom>
-          <a:solidFill>
-            <a:srgbClr val="F2F2F2"/>
-          </a:solidFill>
-          <a:ln>
-            <a:noFill/>
-          </a:ln>
-        </p:spPr>
-        <p:style>
-          <a:lnRef idx="1">
-            <a:schemeClr val="accent1"/>
-          </a:lnRef>
-          <a:fillRef idx="3">
-            <a:schemeClr val="accent1"/>
-          </a:fillRef>
-          <a:effectRef idx="2">
-            <a:schemeClr val="accent1"/>
-          </a:effectRef>
-          <a:fontRef idx="minor">
-            <a:schemeClr val="lt1"/>
-          </a:fontRef>
-        </p:style>
-        <p:txBody>
-          <a:bodyPr rtlCol="0" anchor="ctr"/>
-          <a:lstStyle/>
-          <a:p>
-            <a:pPr algn="ctr"/>
-          </a:p>
-        </p:txBody>
-      </p:sp>
-      <p:sp>
-        <p:nvSpPr>
-          <p:cNvPr id="23" name="Rounded Rectangle 22"/>
-          <p:cNvSpPr/>
-          <p:nvPr/>
-        </p:nvSpPr>
-        <p:spPr>
-          <a:xfrm>
-            <a:off x="594360" y="5681167"/>
-            <a:ext cx="438912" cy="438912"/>
-          </a:xfrm>
-          <a:prstGeom prst="roundRect">
-            <a:avLst>
-              <a:gd name="adj" fmla="val 12000"/>
-            </a:avLst>
-          </a:prstGeom>
-          <a:solidFill>
-            <a:srgbClr val="095292"/>
-          </a:solidFill>
-          <a:ln>
-            <a:noFill/>
-          </a:ln>
-        </p:spPr>
-        <p:style>
-          <a:lnRef idx="1">
-            <a:schemeClr val="accent1"/>
-          </a:lnRef>
-          <a:fillRef idx="3">
-            <a:schemeClr val="accent1"/>
-          </a:fillRef>
-          <a:effectRef idx="2">
-            <a:schemeClr val="accent1"/>
-          </a:effectRef>
-          <a:fontRef idx="minor">
-            <a:schemeClr val="lt1"/>
-          </a:fontRef>
-        </p:style>
-        <p:txBody>
-          <a:bodyPr rtlCol="0" anchor="ctr"/>
-          <a:lstStyle/>
-          <a:p>
-            <a:pPr algn="ctr"/>
-          </a:p>
-        </p:txBody>
-      </p:sp>
-      <p:sp>
-        <p:nvSpPr>
-          <p:cNvPr id="24" name="TextBox 23"/>
-          <p:cNvSpPr txBox="1"/>
-          <p:nvPr/>
-        </p:nvSpPr>
-        <p:spPr>
-          <a:xfrm>
-            <a:off x="594360" y="5681167"/>
-            <a:ext cx="438912" cy="438912"/>
-          </a:xfrm>
-          <a:prstGeom prst="rect">
-            <a:avLst/>
-          </a:prstGeom>
-          <a:noFill/>
-        </p:spPr>
-        <p:txBody>
-          <a:bodyPr wrap="square" anchor="ctr"/>
-          <a:lstStyle/>
-          <a:p>
-            <a:pPr algn="ctr"/>
-            <a:r>
-              <a:rPr sz="1600" b="1" i="0">
-                <a:solidFill>
-                  <a:srgbClr val="FFFFFF"/>
-                </a:solidFill>
-                <a:latin typeface="Calibri"/>
-              </a:rPr>
-              <a:t>5</a:t>
-            </a:r>
-          </a:p>
-        </p:txBody>
-      </p:sp>
-      <p:sp>
-        <p:nvSpPr>
-          <p:cNvPr id="25" name="TextBox 24"/>
-          <p:cNvSpPr txBox="1"/>
-          <p:nvPr/>
-        </p:nvSpPr>
-        <p:spPr>
-          <a:xfrm>
-            <a:off x="1188720" y="5537606"/>
-            <a:ext cx="10271455" cy="744321"/>
-          </a:xfrm>
-          <a:prstGeom prst="rect">
-            <a:avLst/>
-          </a:prstGeom>
-          <a:noFill/>
-        </p:spPr>
-        <p:txBody>
-          <a:bodyPr wrap="square" anchor="ctr"/>
-          <a:lstStyle/>
-          <a:p>
-            <a:r>
-              <a:rPr sz="1500" b="1" i="0">
-                <a:solidFill>
-                  <a:srgbClr val="095292"/>
-                </a:solidFill>
-                <a:latin typeface="Calibri"/>
-              </a:rPr>
-              <a:t>20 s · El guion de prueba</a:t>
-            </a:r>
-          </a:p>
-          <a:p>
-            <a:pPr>
-              <a:spcBef>
-                <a:spcPts val="200"/>
-              </a:spcBef>
-            </a:pPr>
-            <a:r>
-              <a:rPr sz="1300" b="0" i="0">
-                <a:solidFill>
-                  <a:srgbClr val="333333"/>
-                </a:solidFill>
-                <a:latin typeface="Calibri"/>
-              </a:rPr>
-              <a:t>Las tres tareas, y con qué rol van a probar.</a:t>
-            </a:r>
-          </a:p>
-        </p:txBody>
-      </p:sp>
-      <p:sp>
-        <p:nvSpPr>
-          <p:cNvPr id="26" name="TextBox 25"/>
+              <a:rPr sz="2000" b="0" i="0">
+                <a:solidFill>
+                  <a:srgbClr val="333333"/>
+                </a:solidFill>
+                <a:latin typeface="Calibri"/>
+              </a:rPr>
+              <a:t>–   Es la regla del curso y es la Ley 1581 de 2012 de la sesión 4 aplicada al lugar donde de verdad se incumple — los datos de prueba se inventan.</a:t>
+            </a:r>
+          </a:p>
+        </p:txBody>
+      </p:sp>
+      <p:sp>
+        <p:nvSpPr>
+          <p:cNvPr id="6" name="TextBox 5"/>
           <p:cNvSpPr txBox="1"/>
           <p:nvPr/>
         </p:nvSpPr>
@@ -9970,7 +7980,7 @@
         <p:spPr>
           <a:xfrm>
             <a:off x="0" y="0"/>
-            <a:ext cx="12191695" cy="960120"/>
+            <a:ext cx="12191695" cy="1170432"/>
           </a:xfrm>
           <a:prstGeom prst="rect">
             <a:avLst/>
@@ -10012,7 +8022,7 @@
         </p:nvSpPr>
         <p:spPr>
           <a:xfrm>
-            <a:off x="0" y="960120"/>
+            <a:off x="0" y="1170432"/>
             <a:ext cx="12191695" cy="41148"/>
           </a:xfrm>
           <a:prstGeom prst="rect">
@@ -10056,7 +8066,7 @@
         <p:spPr>
           <a:xfrm>
             <a:off x="457200" y="164592"/>
-            <a:ext cx="11277295" cy="502920"/>
+            <a:ext cx="11277295" cy="384048"/>
           </a:xfrm>
           <a:prstGeom prst="rect">
             <a:avLst/>
@@ -10076,7 +8086,7 @@
                 </a:solidFill>
                 <a:latin typeface="Calibri"/>
               </a:rPr>
-              <a:t>Para la Clase 11</a:t>
+              <a:t>Taller de hoy: Prototipo de baja fidelidad</a:t>
             </a:r>
           </a:p>
         </p:txBody>
@@ -10089,8 +8099,8 @@
         </p:nvSpPr>
         <p:spPr>
           <a:xfrm>
-            <a:off x="457200" y="1170432"/>
-            <a:ext cx="11277295" cy="5230368"/>
+            <a:off x="457200" y="566928"/>
+            <a:ext cx="11277295" cy="411480"/>
           </a:xfrm>
           <a:prstGeom prst="rect">
             <a:avLst/>
@@ -10103,288 +8113,990 @@
           </a:bodyPr>
           <a:lstStyle/>
           <a:p>
-            <a:pPr>
-              <a:spcAft>
-                <a:spcPts val="800"/>
-              </a:spcAft>
-            </a:pPr>
-            <a:r>
-              <a:rPr sz="2000" b="0" i="0">
-                <a:solidFill>
-                  <a:srgbClr val="333333"/>
-                </a:solidFill>
-                <a:latin typeface="Calibri"/>
-              </a:rPr>
-              <a:t>–   </a:t>
-            </a:r>
-            <a:r>
-              <a:rPr sz="2000" b="1" i="0">
-                <a:solidFill>
-                  <a:srgbClr val="333333"/>
-                </a:solidFill>
-                <a:latin typeface="Calibri"/>
-              </a:rPr>
-              <a:t>Trabajo dirigido:</a:t>
-            </a:r>
-            <a:r>
-              <a:rPr sz="2000" b="0" i="0">
-                <a:solidFill>
-                  <a:srgbClr val="333333"/>
-                </a:solidFill>
-                <a:latin typeface="Calibri"/>
-              </a:rPr>
-              <a:t> Introducción a software de prototipado — terminar las tres pantallas con </a:t>
-            </a:r>
-            <a:r>
-              <a:rPr sz="2000" b="1" i="0">
-                <a:solidFill>
-                  <a:srgbClr val="333333"/>
-                </a:solidFill>
-                <a:latin typeface="Calibri"/>
-              </a:rPr>
-              <a:t>todos</a:t>
-            </a:r>
-            <a:r>
-              <a:rPr sz="2000" b="0" i="0">
-                <a:solidFill>
-                  <a:srgbClr val="333333"/>
-                </a:solidFill>
-                <a:latin typeface="Calibri"/>
-              </a:rPr>
-              <a:t> los textos reales y los tres estados dibujados, y dejar el PNG en la carpeta del equipo.</a:t>
-            </a:r>
-          </a:p>
-          <a:p>
-            <a:pPr>
-              <a:spcAft>
-                <a:spcPts val="800"/>
-              </a:spcAft>
-            </a:pPr>
-            <a:r>
-              <a:rPr sz="2000" b="0" i="0">
-                <a:solidFill>
-                  <a:srgbClr val="333333"/>
-                </a:solidFill>
-                <a:latin typeface="Calibri"/>
-              </a:rPr>
-              <a:t>–   </a:t>
-            </a:r>
-            <a:r>
-              <a:rPr sz="2000" b="1" i="0">
-                <a:solidFill>
-                  <a:srgbClr val="333333"/>
-                </a:solidFill>
-                <a:latin typeface="Calibri"/>
-              </a:rPr>
-              <a:t>Trabajo independiente:</a:t>
-            </a:r>
-            <a:r>
-              <a:rPr sz="2000" b="0" i="0">
-                <a:solidFill>
-                  <a:srgbClr val="333333"/>
-                </a:solidFill>
-                <a:latin typeface="Calibri"/>
-              </a:rPr>
-              <a:t> Práctica básica con herramientas digitales: convertir el prototipo en </a:t>
-            </a:r>
-            <a:r>
-              <a:rPr sz="2000" b="1" i="0">
-                <a:solidFill>
-                  <a:srgbClr val="333333"/>
-                </a:solidFill>
-                <a:latin typeface="Calibri"/>
-              </a:rPr>
-              <a:t>navegable</a:t>
-            </a:r>
-            <a:r>
-              <a:rPr sz="2000" b="0" i="0">
-                <a:solidFill>
-                  <a:srgbClr val="333333"/>
-                </a:solidFill>
-                <a:latin typeface="Calibri"/>
-              </a:rPr>
-              <a:t> —diapositivas enlazadas o enlaces entre marcos— para poder recorrerlo delante de una persona.</a:t>
-            </a:r>
-          </a:p>
-          <a:p>
-            <a:pPr>
-              <a:spcAft>
-                <a:spcPts val="800"/>
-              </a:spcAft>
-            </a:pPr>
-            <a:r>
-              <a:rPr sz="2000" b="0" i="0">
-                <a:solidFill>
-                  <a:srgbClr val="333333"/>
-                </a:solidFill>
-                <a:latin typeface="Calibri"/>
-              </a:rPr>
-              <a:t>–   </a:t>
-            </a:r>
-            <a:r>
-              <a:rPr sz="2000" b="1" i="0">
-                <a:solidFill>
-                  <a:srgbClr val="333333"/>
-                </a:solidFill>
-                <a:latin typeface="Calibri"/>
-              </a:rPr>
-              <a:t>Clase 11 · Taller de prototipado inicial con IA</a:t>
-            </a:r>
-            <a:r>
-              <a:rPr sz="2000" b="0" i="0">
-                <a:solidFill>
-                  <a:srgbClr val="333333"/>
-                </a:solidFill>
-                <a:latin typeface="Calibri"/>
-              </a:rPr>
-              <a:t> — </a:t>
-            </a:r>
-            <a:r>
-              <a:rPr sz="2000" b="1" i="0">
-                <a:solidFill>
-                  <a:srgbClr val="333333"/>
-                </a:solidFill>
-                <a:latin typeface="Calibri"/>
-              </a:rPr>
-              <a:t>prototipo v2 con IA autorizada</a:t>
-            </a:r>
-            <a:r>
-              <a:rPr sz="2000" b="0" i="0">
-                <a:solidFill>
-                  <a:srgbClr val="333333"/>
-                </a:solidFill>
-                <a:latin typeface="Calibri"/>
-              </a:rPr>
-              <a:t>: generar variantes, elegir con criterio y corregir lo que la IA no sabía. Y la </a:t>
-            </a:r>
-            <a:r>
-              <a:rPr sz="2000" b="1" i="0">
-                <a:solidFill>
-                  <a:srgbClr val="333333"/>
-                </a:solidFill>
-                <a:latin typeface="Calibri"/>
-              </a:rPr>
-              <a:t>evaluación del corte 2</a:t>
-            </a:r>
-            <a:r>
-              <a:rPr sz="2000" b="0" i="0">
-                <a:solidFill>
-                  <a:srgbClr val="333333"/>
-                </a:solidFill>
-                <a:latin typeface="Calibri"/>
-              </a:rPr>
-              <a:t> en la plataforma del curso, sobre las sesiones 7 a 11.</a:t>
-            </a:r>
-          </a:p>
-          <a:p>
-            <a:pPr>
-              <a:spcAft>
-                <a:spcPts val="800"/>
-              </a:spcAft>
-            </a:pPr>
-            <a:r>
-              <a:rPr sz="2000" b="0" i="0">
-                <a:solidFill>
-                  <a:srgbClr val="333333"/>
-                </a:solidFill>
-                <a:latin typeface="Calibri"/>
-              </a:rPr>
-              <a:t>–   </a:t>
-            </a:r>
-            <a:r>
-              <a:rPr sz="2000" b="1" i="0">
-                <a:solidFill>
-                  <a:srgbClr val="333333"/>
-                </a:solidFill>
-                <a:latin typeface="Calibri"/>
-              </a:rPr>
-              <a:t>Aviso:</a:t>
-            </a:r>
-            <a:r>
-              <a:rPr sz="2000" b="0" i="0">
-                <a:solidFill>
-                  <a:srgbClr val="333333"/>
-                </a:solidFill>
-                <a:latin typeface="Calibri"/>
-              </a:rPr>
-              <a:t> La sesión 11 </a:t>
-            </a:r>
-            <a:r>
-              <a:rPr sz="2000" b="1" i="0">
-                <a:solidFill>
-                  <a:srgbClr val="333333"/>
-                </a:solidFill>
-                <a:latin typeface="Calibri"/>
-              </a:rPr>
-              <a:t>cierra el corte 2</a:t>
-            </a:r>
-            <a:r>
-              <a:rPr sz="2000" b="0" i="0">
-                <a:solidFill>
-                  <a:srgbClr val="333333"/>
-                </a:solidFill>
-                <a:latin typeface="Calibri"/>
-              </a:rPr>
-              <a:t>: hay 20 minutos de evaluación al final, sobre las sesiones 7 a 11. Traigan el prototipo terminado y navegable — sin él no hay nada que corregir con IA, y ese es el entregable de la sesión. La evaluación es </a:t>
-            </a:r>
-            <a:r>
-              <a:rPr sz="2000" b="1" i="0">
-                <a:solidFill>
-                  <a:srgbClr val="333333"/>
-                </a:solidFill>
-                <a:latin typeface="Calibri"/>
-              </a:rPr>
-              <a:t>a libro abierto sobre los documentos de su equipo</a:t>
-            </a:r>
-            <a:r>
-              <a:rPr sz="2000" b="0" i="0">
-                <a:solidFill>
-                  <a:srgbClr val="333333"/>
-                </a:solidFill>
-                <a:latin typeface="Calibri"/>
-              </a:rPr>
-              <a:t>: lean el documento «Evaluación del Corte 2 — cómo prepararse», que dice exactamente qué pestañas tener abiertas.</a:t>
-            </a:r>
-          </a:p>
-          <a:p>
-            <a:pPr>
-              <a:spcAft>
-                <a:spcPts val="800"/>
-              </a:spcAft>
-            </a:pPr>
-            <a:r>
-              <a:rPr sz="2000" b="0" i="0">
-                <a:solidFill>
-                  <a:srgbClr val="333333"/>
-                </a:solidFill>
-                <a:latin typeface="Calibri"/>
-              </a:rPr>
-              <a:t>–   </a:t>
-            </a:r>
-            <a:r>
-              <a:rPr sz="2000" b="1" i="0">
-                <a:solidFill>
-                  <a:srgbClr val="333333"/>
-                </a:solidFill>
-                <a:latin typeface="Calibri"/>
-              </a:rPr>
-              <a:t>Antes de salir:</a:t>
-            </a:r>
-            <a:r>
-              <a:rPr sz="2000" b="0" i="0">
-                <a:solidFill>
-                  <a:srgbClr val="333333"/>
-                </a:solidFill>
-                <a:latin typeface="Calibri"/>
-              </a:rPr>
-              <a:t> el enlace del documento del equipo en el chat, con permiso de lectura para el docente, y el nombre del vocero de hoy.</a:t>
-            </a:r>
-          </a:p>
-        </p:txBody>
-      </p:sp>
-      <p:sp>
-        <p:nvSpPr>
-          <p:cNvPr id="6" name="TextBox 5"/>
+            <a:r>
+              <a:rPr sz="1400" b="0" i="0">
+                <a:solidFill>
+                  <a:srgbClr val="B8D8EE"/>
+                </a:solidFill>
+                <a:latin typeface="Calibri"/>
+              </a:rPr>
+              <a:t>17 min en equipos · 2 dibujan · 2 escriben textos · 1 escribe el guion de prueba · prototipo de tres pantallas + guion de prueba con tres tareas</a:t>
+            </a:r>
+          </a:p>
+        </p:txBody>
+      </p:sp>
+      <p:sp>
+        <p:nvSpPr>
+          <p:cNvPr id="6" name="Rounded Rectangle 5"/>
+          <p:cNvSpPr/>
+          <p:nvPr/>
+        </p:nvSpPr>
+        <p:spPr>
+          <a:xfrm>
+            <a:off x="457200" y="1472184"/>
+            <a:ext cx="11277295" cy="566928"/>
+          </a:xfrm>
+          <a:prstGeom prst="roundRect">
+            <a:avLst>
+              <a:gd name="adj" fmla="val 12000"/>
+            </a:avLst>
+          </a:prstGeom>
+          <a:solidFill>
+            <a:srgbClr val="F2F2F2"/>
+          </a:solidFill>
+          <a:ln>
+            <a:noFill/>
+          </a:ln>
+        </p:spPr>
+        <p:style>
+          <a:lnRef idx="1">
+            <a:schemeClr val="accent1"/>
+          </a:lnRef>
+          <a:fillRef idx="3">
+            <a:schemeClr val="accent1"/>
+          </a:fillRef>
+          <a:effectRef idx="2">
+            <a:schemeClr val="accent1"/>
+          </a:effectRef>
+          <a:fontRef idx="minor">
+            <a:schemeClr val="lt1"/>
+          </a:fontRef>
+        </p:style>
+        <p:txBody>
+          <a:bodyPr rtlCol="0" anchor="ctr"/>
+          <a:lstStyle/>
+          <a:p>
+            <a:pPr algn="ctr"/>
+          </a:p>
+        </p:txBody>
+      </p:sp>
+      <p:sp>
+        <p:nvSpPr>
+          <p:cNvPr id="7" name="Rectangle 6"/>
+          <p:cNvSpPr/>
+          <p:nvPr/>
+        </p:nvSpPr>
+        <p:spPr>
+          <a:xfrm>
+            <a:off x="640080" y="1618487"/>
+            <a:ext cx="274320" cy="274320"/>
+          </a:xfrm>
+          <a:prstGeom prst="rect">
+            <a:avLst/>
+          </a:prstGeom>
+          <a:solidFill>
+            <a:srgbClr val="FFFFFF"/>
+          </a:solidFill>
+          <a:ln>
+            <a:solidFill>
+              <a:srgbClr val="333333"/>
+            </a:solidFill>
+          </a:ln>
+        </p:spPr>
+        <p:style>
+          <a:lnRef idx="1">
+            <a:schemeClr val="accent1"/>
+          </a:lnRef>
+          <a:fillRef idx="3">
+            <a:schemeClr val="accent1"/>
+          </a:fillRef>
+          <a:effectRef idx="2">
+            <a:schemeClr val="accent1"/>
+          </a:effectRef>
+          <a:fontRef idx="minor">
+            <a:schemeClr val="lt1"/>
+          </a:fontRef>
+        </p:style>
+        <p:txBody>
+          <a:bodyPr rtlCol="0" anchor="ctr"/>
+          <a:lstStyle/>
+          <a:p>
+            <a:pPr algn="ctr"/>
+          </a:p>
+        </p:txBody>
+      </p:sp>
+      <p:sp>
+        <p:nvSpPr>
+          <p:cNvPr id="8" name="Rectangle 7"/>
+          <p:cNvSpPr/>
+          <p:nvPr/>
+        </p:nvSpPr>
+        <p:spPr>
+          <a:xfrm>
+            <a:off x="640080" y="1618487"/>
+            <a:ext cx="73152" cy="274320"/>
+          </a:xfrm>
+          <a:prstGeom prst="rect">
+            <a:avLst/>
+          </a:prstGeom>
+          <a:solidFill>
+            <a:srgbClr val="269CCB"/>
+          </a:solidFill>
+          <a:ln>
+            <a:noFill/>
+          </a:ln>
+        </p:spPr>
+        <p:style>
+          <a:lnRef idx="1">
+            <a:schemeClr val="accent1"/>
+          </a:lnRef>
+          <a:fillRef idx="3">
+            <a:schemeClr val="accent1"/>
+          </a:fillRef>
+          <a:effectRef idx="2">
+            <a:schemeClr val="accent1"/>
+          </a:effectRef>
+          <a:fontRef idx="minor">
+            <a:schemeClr val="lt1"/>
+          </a:fontRef>
+        </p:style>
+        <p:txBody>
+          <a:bodyPr rtlCol="0" anchor="ctr"/>
+          <a:lstStyle/>
+          <a:p>
+            <a:pPr algn="ctr"/>
+          </a:p>
+        </p:txBody>
+      </p:sp>
+      <p:sp>
+        <p:nvSpPr>
+          <p:cNvPr id="9" name="TextBox 8"/>
+          <p:cNvSpPr txBox="1"/>
+          <p:nvPr/>
+        </p:nvSpPr>
+        <p:spPr>
+          <a:xfrm>
+            <a:off x="1097280" y="1563624"/>
+            <a:ext cx="10362895" cy="402336"/>
+          </a:xfrm>
+          <a:prstGeom prst="rect">
+            <a:avLst/>
+          </a:prstGeom>
+          <a:noFill/>
+        </p:spPr>
+        <p:txBody>
+          <a:bodyPr wrap="square" anchor="ctr"/>
+          <a:lstStyle/>
+          <a:p>
+            <a:r>
+              <a:rPr sz="1500" b="1" i="0">
+                <a:solidFill>
+                  <a:srgbClr val="333333"/>
+                </a:solidFill>
+                <a:latin typeface="Calibri"/>
+              </a:rPr>
+              <a:t>EL FLUJO EN TRES PASOS</a:t>
+            </a:r>
+            <a:r>
+              <a:rPr sz="1500" b="0" i="0">
+                <a:solidFill>
+                  <a:srgbClr val="333333"/>
+                </a:solidFill>
+                <a:latin typeface="Calibri"/>
+              </a:rPr>
+              <a:t> — El camino principal del alcance mínimo, en tres pantallas o tres pasos, y </a:t>
+            </a:r>
+            <a:r>
+              <a:rPr sz="1500" b="1" i="0">
+                <a:solidFill>
+                  <a:srgbClr val="333333"/>
+                </a:solidFill>
+                <a:latin typeface="Calibri"/>
+              </a:rPr>
+              <a:t>una frase de propósito por cada uno</a:t>
+            </a:r>
+            <a:r>
+              <a:rPr sz="1500" b="0" i="0">
+                <a:solidFill>
+                  <a:srgbClr val="333333"/>
+                </a:solidFill>
+                <a:latin typeface="Calibri"/>
+              </a:rPr>
+              <a:t>.</a:t>
+            </a:r>
+          </a:p>
+        </p:txBody>
+      </p:sp>
+      <p:sp>
+        <p:nvSpPr>
+          <p:cNvPr id="10" name="Rounded Rectangle 9"/>
+          <p:cNvSpPr/>
+          <p:nvPr/>
+        </p:nvSpPr>
+        <p:spPr>
+          <a:xfrm>
+            <a:off x="457200" y="2148839"/>
+            <a:ext cx="11277295" cy="566928"/>
+          </a:xfrm>
+          <a:prstGeom prst="roundRect">
+            <a:avLst>
+              <a:gd name="adj" fmla="val 12000"/>
+            </a:avLst>
+          </a:prstGeom>
+          <a:solidFill>
+            <a:srgbClr val="F2F2F2"/>
+          </a:solidFill>
+          <a:ln>
+            <a:noFill/>
+          </a:ln>
+        </p:spPr>
+        <p:style>
+          <a:lnRef idx="1">
+            <a:schemeClr val="accent1"/>
+          </a:lnRef>
+          <a:fillRef idx="3">
+            <a:schemeClr val="accent1"/>
+          </a:fillRef>
+          <a:effectRef idx="2">
+            <a:schemeClr val="accent1"/>
+          </a:effectRef>
+          <a:fontRef idx="minor">
+            <a:schemeClr val="lt1"/>
+          </a:fontRef>
+        </p:style>
+        <p:txBody>
+          <a:bodyPr rtlCol="0" anchor="ctr"/>
+          <a:lstStyle/>
+          <a:p>
+            <a:pPr algn="ctr"/>
+          </a:p>
+        </p:txBody>
+      </p:sp>
+      <p:sp>
+        <p:nvSpPr>
+          <p:cNvPr id="11" name="Rectangle 10"/>
+          <p:cNvSpPr/>
+          <p:nvPr/>
+        </p:nvSpPr>
+        <p:spPr>
+          <a:xfrm>
+            <a:off x="640080" y="2295144"/>
+            <a:ext cx="274320" cy="274320"/>
+          </a:xfrm>
+          <a:prstGeom prst="rect">
+            <a:avLst/>
+          </a:prstGeom>
+          <a:solidFill>
+            <a:srgbClr val="FFFFFF"/>
+          </a:solidFill>
+          <a:ln>
+            <a:solidFill>
+              <a:srgbClr val="333333"/>
+            </a:solidFill>
+          </a:ln>
+        </p:spPr>
+        <p:style>
+          <a:lnRef idx="1">
+            <a:schemeClr val="accent1"/>
+          </a:lnRef>
+          <a:fillRef idx="3">
+            <a:schemeClr val="accent1"/>
+          </a:fillRef>
+          <a:effectRef idx="2">
+            <a:schemeClr val="accent1"/>
+          </a:effectRef>
+          <a:fontRef idx="minor">
+            <a:schemeClr val="lt1"/>
+          </a:fontRef>
+        </p:style>
+        <p:txBody>
+          <a:bodyPr rtlCol="0" anchor="ctr"/>
+          <a:lstStyle/>
+          <a:p>
+            <a:pPr algn="ctr"/>
+          </a:p>
+        </p:txBody>
+      </p:sp>
+      <p:sp>
+        <p:nvSpPr>
+          <p:cNvPr id="12" name="Rectangle 11"/>
+          <p:cNvSpPr/>
+          <p:nvPr/>
+        </p:nvSpPr>
+        <p:spPr>
+          <a:xfrm>
+            <a:off x="640080" y="2295144"/>
+            <a:ext cx="73152" cy="274320"/>
+          </a:xfrm>
+          <a:prstGeom prst="rect">
+            <a:avLst/>
+          </a:prstGeom>
+          <a:solidFill>
+            <a:srgbClr val="269CCB"/>
+          </a:solidFill>
+          <a:ln>
+            <a:noFill/>
+          </a:ln>
+        </p:spPr>
+        <p:style>
+          <a:lnRef idx="1">
+            <a:schemeClr val="accent1"/>
+          </a:lnRef>
+          <a:fillRef idx="3">
+            <a:schemeClr val="accent1"/>
+          </a:fillRef>
+          <a:effectRef idx="2">
+            <a:schemeClr val="accent1"/>
+          </a:effectRef>
+          <a:fontRef idx="minor">
+            <a:schemeClr val="lt1"/>
+          </a:fontRef>
+        </p:style>
+        <p:txBody>
+          <a:bodyPr rtlCol="0" anchor="ctr"/>
+          <a:lstStyle/>
+          <a:p>
+            <a:pPr algn="ctr"/>
+          </a:p>
+        </p:txBody>
+      </p:sp>
+      <p:sp>
+        <p:nvSpPr>
+          <p:cNvPr id="13" name="TextBox 12"/>
+          <p:cNvSpPr txBox="1"/>
+          <p:nvPr/>
+        </p:nvSpPr>
+        <p:spPr>
+          <a:xfrm>
+            <a:off x="1097280" y="2240279"/>
+            <a:ext cx="10362895" cy="402336"/>
+          </a:xfrm>
+          <a:prstGeom prst="rect">
+            <a:avLst/>
+          </a:prstGeom>
+          <a:noFill/>
+        </p:spPr>
+        <p:txBody>
+          <a:bodyPr wrap="square" anchor="ctr"/>
+          <a:lstStyle/>
+          <a:p>
+            <a:r>
+              <a:rPr sz="1500" b="1" i="0">
+                <a:solidFill>
+                  <a:srgbClr val="333333"/>
+                </a:solidFill>
+                <a:latin typeface="Calibri"/>
+              </a:rPr>
+              <a:t>LAS TRES PANTALLAS DIBUJADAS</a:t>
+            </a:r>
+            <a:r>
+              <a:rPr sz="1500" b="0" i="0">
+                <a:solidFill>
+                  <a:srgbClr val="333333"/>
+                </a:solidFill>
+                <a:latin typeface="Calibri"/>
+              </a:rPr>
+              <a:t> — Las tres dibujadas de verdad, con el camino principal grande y primero, y una </a:t>
+            </a:r>
+            <a:r>
+              <a:rPr sz="1500" b="1" i="0">
+                <a:solidFill>
+                  <a:srgbClr val="333333"/>
+                </a:solidFill>
+                <a:latin typeface="Calibri"/>
+              </a:rPr>
+              <a:t>flecha con destino</a:t>
+            </a:r>
+            <a:r>
+              <a:rPr sz="1500" b="0" i="0">
+                <a:solidFill>
+                  <a:srgbClr val="333333"/>
+                </a:solidFill>
+                <a:latin typeface="Calibri"/>
+              </a:rPr>
+              <a:t> por cada botón.</a:t>
+            </a:r>
+          </a:p>
+        </p:txBody>
+      </p:sp>
+      <p:sp>
+        <p:nvSpPr>
+          <p:cNvPr id="14" name="Rounded Rectangle 13"/>
+          <p:cNvSpPr/>
+          <p:nvPr/>
+        </p:nvSpPr>
+        <p:spPr>
+          <a:xfrm>
+            <a:off x="457200" y="2825496"/>
+            <a:ext cx="11277295" cy="566928"/>
+          </a:xfrm>
+          <a:prstGeom prst="roundRect">
+            <a:avLst>
+              <a:gd name="adj" fmla="val 12000"/>
+            </a:avLst>
+          </a:prstGeom>
+          <a:solidFill>
+            <a:srgbClr val="F2F2F2"/>
+          </a:solidFill>
+          <a:ln>
+            <a:noFill/>
+          </a:ln>
+        </p:spPr>
+        <p:style>
+          <a:lnRef idx="1">
+            <a:schemeClr val="accent1"/>
+          </a:lnRef>
+          <a:fillRef idx="3">
+            <a:schemeClr val="accent1"/>
+          </a:fillRef>
+          <a:effectRef idx="2">
+            <a:schemeClr val="accent1"/>
+          </a:effectRef>
+          <a:fontRef idx="minor">
+            <a:schemeClr val="lt1"/>
+          </a:fontRef>
+        </p:style>
+        <p:txBody>
+          <a:bodyPr rtlCol="0" anchor="ctr"/>
+          <a:lstStyle/>
+          <a:p>
+            <a:pPr algn="ctr"/>
+          </a:p>
+        </p:txBody>
+      </p:sp>
+      <p:sp>
+        <p:nvSpPr>
+          <p:cNvPr id="15" name="Rectangle 14"/>
+          <p:cNvSpPr/>
+          <p:nvPr/>
+        </p:nvSpPr>
+        <p:spPr>
+          <a:xfrm>
+            <a:off x="640080" y="2971800"/>
+            <a:ext cx="274320" cy="274320"/>
+          </a:xfrm>
+          <a:prstGeom prst="rect">
+            <a:avLst/>
+          </a:prstGeom>
+          <a:solidFill>
+            <a:srgbClr val="FFFFFF"/>
+          </a:solidFill>
+          <a:ln>
+            <a:solidFill>
+              <a:srgbClr val="333333"/>
+            </a:solidFill>
+          </a:ln>
+        </p:spPr>
+        <p:style>
+          <a:lnRef idx="1">
+            <a:schemeClr val="accent1"/>
+          </a:lnRef>
+          <a:fillRef idx="3">
+            <a:schemeClr val="accent1"/>
+          </a:fillRef>
+          <a:effectRef idx="2">
+            <a:schemeClr val="accent1"/>
+          </a:effectRef>
+          <a:fontRef idx="minor">
+            <a:schemeClr val="lt1"/>
+          </a:fontRef>
+        </p:style>
+        <p:txBody>
+          <a:bodyPr rtlCol="0" anchor="ctr"/>
+          <a:lstStyle/>
+          <a:p>
+            <a:pPr algn="ctr"/>
+          </a:p>
+        </p:txBody>
+      </p:sp>
+      <p:sp>
+        <p:nvSpPr>
+          <p:cNvPr id="16" name="Rectangle 15"/>
+          <p:cNvSpPr/>
+          <p:nvPr/>
+        </p:nvSpPr>
+        <p:spPr>
+          <a:xfrm>
+            <a:off x="640080" y="2971800"/>
+            <a:ext cx="73152" cy="274320"/>
+          </a:xfrm>
+          <a:prstGeom prst="rect">
+            <a:avLst/>
+          </a:prstGeom>
+          <a:solidFill>
+            <a:srgbClr val="269CCB"/>
+          </a:solidFill>
+          <a:ln>
+            <a:noFill/>
+          </a:ln>
+        </p:spPr>
+        <p:style>
+          <a:lnRef idx="1">
+            <a:schemeClr val="accent1"/>
+          </a:lnRef>
+          <a:fillRef idx="3">
+            <a:schemeClr val="accent1"/>
+          </a:fillRef>
+          <a:effectRef idx="2">
+            <a:schemeClr val="accent1"/>
+          </a:effectRef>
+          <a:fontRef idx="minor">
+            <a:schemeClr val="lt1"/>
+          </a:fontRef>
+        </p:style>
+        <p:txBody>
+          <a:bodyPr rtlCol="0" anchor="ctr"/>
+          <a:lstStyle/>
+          <a:p>
+            <a:pPr algn="ctr"/>
+          </a:p>
+        </p:txBody>
+      </p:sp>
+      <p:sp>
+        <p:nvSpPr>
+          <p:cNvPr id="17" name="TextBox 16"/>
+          <p:cNvSpPr txBox="1"/>
+          <p:nvPr/>
+        </p:nvSpPr>
+        <p:spPr>
+          <a:xfrm>
+            <a:off x="1097280" y="2916936"/>
+            <a:ext cx="10362895" cy="402336"/>
+          </a:xfrm>
+          <a:prstGeom prst="rect">
+            <a:avLst/>
+          </a:prstGeom>
+          <a:noFill/>
+        </p:spPr>
+        <p:txBody>
+          <a:bodyPr wrap="square" anchor="ctr"/>
+          <a:lstStyle/>
+          <a:p>
+            <a:r>
+              <a:rPr sz="1500" b="1" i="0">
+                <a:solidFill>
+                  <a:srgbClr val="333333"/>
+                </a:solidFill>
+                <a:latin typeface="Calibri"/>
+              </a:rPr>
+              <a:t>EL ESTADO VACÍO Y EL DE ERROR</a:t>
+            </a:r>
+            <a:r>
+              <a:rPr sz="1500" b="0" i="0">
+                <a:solidFill>
+                  <a:srgbClr val="333333"/>
+                </a:solidFill>
+                <a:latin typeface="Calibri"/>
+              </a:rPr>
+              <a:t> — Qué se ve la primera vez sin datos, qué se ve cuando la búsqueda no encuentra nada, y qué se ve cuando algo falla. </a:t>
+            </a:r>
+            <a:r>
+              <a:rPr sz="1500" b="1" i="0">
+                <a:solidFill>
+                  <a:srgbClr val="333333"/>
+                </a:solidFill>
+                <a:latin typeface="Calibri"/>
+              </a:rPr>
+              <a:t>Con el texto exacto del mensaje.</a:t>
+            </a:r>
+          </a:p>
+        </p:txBody>
+      </p:sp>
+      <p:sp>
+        <p:nvSpPr>
+          <p:cNvPr id="18" name="Rounded Rectangle 17"/>
+          <p:cNvSpPr/>
+          <p:nvPr/>
+        </p:nvSpPr>
+        <p:spPr>
+          <a:xfrm>
+            <a:off x="457200" y="3502152"/>
+            <a:ext cx="11277295" cy="566928"/>
+          </a:xfrm>
+          <a:prstGeom prst="roundRect">
+            <a:avLst>
+              <a:gd name="adj" fmla="val 12000"/>
+            </a:avLst>
+          </a:prstGeom>
+          <a:solidFill>
+            <a:srgbClr val="F2F2F2"/>
+          </a:solidFill>
+          <a:ln>
+            <a:noFill/>
+          </a:ln>
+        </p:spPr>
+        <p:style>
+          <a:lnRef idx="1">
+            <a:schemeClr val="accent1"/>
+          </a:lnRef>
+          <a:fillRef idx="3">
+            <a:schemeClr val="accent1"/>
+          </a:fillRef>
+          <a:effectRef idx="2">
+            <a:schemeClr val="accent1"/>
+          </a:effectRef>
+          <a:fontRef idx="minor">
+            <a:schemeClr val="lt1"/>
+          </a:fontRef>
+        </p:style>
+        <p:txBody>
+          <a:bodyPr rtlCol="0" anchor="ctr"/>
+          <a:lstStyle/>
+          <a:p>
+            <a:pPr algn="ctr"/>
+          </a:p>
+        </p:txBody>
+      </p:sp>
+      <p:sp>
+        <p:nvSpPr>
+          <p:cNvPr id="19" name="Rectangle 18"/>
+          <p:cNvSpPr/>
+          <p:nvPr/>
+        </p:nvSpPr>
+        <p:spPr>
+          <a:xfrm>
+            <a:off x="640080" y="3648456"/>
+            <a:ext cx="274320" cy="274320"/>
+          </a:xfrm>
+          <a:prstGeom prst="rect">
+            <a:avLst/>
+          </a:prstGeom>
+          <a:solidFill>
+            <a:srgbClr val="FFFFFF"/>
+          </a:solidFill>
+          <a:ln>
+            <a:solidFill>
+              <a:srgbClr val="333333"/>
+            </a:solidFill>
+          </a:ln>
+        </p:spPr>
+        <p:style>
+          <a:lnRef idx="1">
+            <a:schemeClr val="accent1"/>
+          </a:lnRef>
+          <a:fillRef idx="3">
+            <a:schemeClr val="accent1"/>
+          </a:fillRef>
+          <a:effectRef idx="2">
+            <a:schemeClr val="accent1"/>
+          </a:effectRef>
+          <a:fontRef idx="minor">
+            <a:schemeClr val="lt1"/>
+          </a:fontRef>
+        </p:style>
+        <p:txBody>
+          <a:bodyPr rtlCol="0" anchor="ctr"/>
+          <a:lstStyle/>
+          <a:p>
+            <a:pPr algn="ctr"/>
+          </a:p>
+        </p:txBody>
+      </p:sp>
+      <p:sp>
+        <p:nvSpPr>
+          <p:cNvPr id="20" name="Rectangle 19"/>
+          <p:cNvSpPr/>
+          <p:nvPr/>
+        </p:nvSpPr>
+        <p:spPr>
+          <a:xfrm>
+            <a:off x="640080" y="3648456"/>
+            <a:ext cx="73152" cy="274320"/>
+          </a:xfrm>
+          <a:prstGeom prst="rect">
+            <a:avLst/>
+          </a:prstGeom>
+          <a:solidFill>
+            <a:srgbClr val="269CCB"/>
+          </a:solidFill>
+          <a:ln>
+            <a:noFill/>
+          </a:ln>
+        </p:spPr>
+        <p:style>
+          <a:lnRef idx="1">
+            <a:schemeClr val="accent1"/>
+          </a:lnRef>
+          <a:fillRef idx="3">
+            <a:schemeClr val="accent1"/>
+          </a:fillRef>
+          <a:effectRef idx="2">
+            <a:schemeClr val="accent1"/>
+          </a:effectRef>
+          <a:fontRef idx="minor">
+            <a:schemeClr val="lt1"/>
+          </a:fontRef>
+        </p:style>
+        <p:txBody>
+          <a:bodyPr rtlCol="0" anchor="ctr"/>
+          <a:lstStyle/>
+          <a:p>
+            <a:pPr algn="ctr"/>
+          </a:p>
+        </p:txBody>
+      </p:sp>
+      <p:sp>
+        <p:nvSpPr>
+          <p:cNvPr id="21" name="TextBox 20"/>
+          <p:cNvSpPr txBox="1"/>
+          <p:nvPr/>
+        </p:nvSpPr>
+        <p:spPr>
+          <a:xfrm>
+            <a:off x="1097280" y="3593592"/>
+            <a:ext cx="10362895" cy="402336"/>
+          </a:xfrm>
+          <a:prstGeom prst="rect">
+            <a:avLst/>
+          </a:prstGeom>
+          <a:noFill/>
+        </p:spPr>
+        <p:txBody>
+          <a:bodyPr wrap="square" anchor="ctr"/>
+          <a:lstStyle/>
+          <a:p>
+            <a:r>
+              <a:rPr sz="1500" b="1" i="0">
+                <a:solidFill>
+                  <a:srgbClr val="333333"/>
+                </a:solidFill>
+                <a:latin typeface="Calibri"/>
+              </a:rPr>
+              <a:t>LOS TEXTOS REALES</a:t>
+            </a:r>
+            <a:r>
+              <a:rPr sz="1500" b="0" i="0">
+                <a:solidFill>
+                  <a:srgbClr val="333333"/>
+                </a:solidFill>
+                <a:latin typeface="Calibri"/>
+              </a:rPr>
+              <a:t> — Todos los rótulos y mensajes escritos como van a quedar. </a:t>
+            </a:r>
+            <a:r>
+              <a:rPr sz="1500" b="1" i="0">
+                <a:solidFill>
+                  <a:srgbClr val="333333"/>
+                </a:solidFill>
+                <a:latin typeface="Calibri"/>
+              </a:rPr>
+              <a:t>Cero relleno</a:t>
+            </a:r>
+            <a:r>
+              <a:rPr sz="1500" b="0" i="0">
+                <a:solidFill>
+                  <a:srgbClr val="333333"/>
+                </a:solidFill>
+                <a:latin typeface="Calibri"/>
+              </a:rPr>
+              <a:t>, cero «texto aquí», cero «lorem ipsum».</a:t>
+            </a:r>
+          </a:p>
+        </p:txBody>
+      </p:sp>
+      <p:sp>
+        <p:nvSpPr>
+          <p:cNvPr id="22" name="Rounded Rectangle 21"/>
+          <p:cNvSpPr/>
+          <p:nvPr/>
+        </p:nvSpPr>
+        <p:spPr>
+          <a:xfrm>
+            <a:off x="457200" y="4178808"/>
+            <a:ext cx="11277295" cy="566928"/>
+          </a:xfrm>
+          <a:prstGeom prst="roundRect">
+            <a:avLst>
+              <a:gd name="adj" fmla="val 12000"/>
+            </a:avLst>
+          </a:prstGeom>
+          <a:solidFill>
+            <a:srgbClr val="F2F2F2"/>
+          </a:solidFill>
+          <a:ln>
+            <a:noFill/>
+          </a:ln>
+        </p:spPr>
+        <p:style>
+          <a:lnRef idx="1">
+            <a:schemeClr val="accent1"/>
+          </a:lnRef>
+          <a:fillRef idx="3">
+            <a:schemeClr val="accent1"/>
+          </a:fillRef>
+          <a:effectRef idx="2">
+            <a:schemeClr val="accent1"/>
+          </a:effectRef>
+          <a:fontRef idx="minor">
+            <a:schemeClr val="lt1"/>
+          </a:fontRef>
+        </p:style>
+        <p:txBody>
+          <a:bodyPr rtlCol="0" anchor="ctr"/>
+          <a:lstStyle/>
+          <a:p>
+            <a:pPr algn="ctr"/>
+          </a:p>
+        </p:txBody>
+      </p:sp>
+      <p:sp>
+        <p:nvSpPr>
+          <p:cNvPr id="23" name="Rectangle 22"/>
+          <p:cNvSpPr/>
+          <p:nvPr/>
+        </p:nvSpPr>
+        <p:spPr>
+          <a:xfrm>
+            <a:off x="640080" y="4325112"/>
+            <a:ext cx="274320" cy="274320"/>
+          </a:xfrm>
+          <a:prstGeom prst="rect">
+            <a:avLst/>
+          </a:prstGeom>
+          <a:solidFill>
+            <a:srgbClr val="FFFFFF"/>
+          </a:solidFill>
+          <a:ln>
+            <a:solidFill>
+              <a:srgbClr val="333333"/>
+            </a:solidFill>
+          </a:ln>
+        </p:spPr>
+        <p:style>
+          <a:lnRef idx="1">
+            <a:schemeClr val="accent1"/>
+          </a:lnRef>
+          <a:fillRef idx="3">
+            <a:schemeClr val="accent1"/>
+          </a:fillRef>
+          <a:effectRef idx="2">
+            <a:schemeClr val="accent1"/>
+          </a:effectRef>
+          <a:fontRef idx="minor">
+            <a:schemeClr val="lt1"/>
+          </a:fontRef>
+        </p:style>
+        <p:txBody>
+          <a:bodyPr rtlCol="0" anchor="ctr"/>
+          <a:lstStyle/>
+          <a:p>
+            <a:pPr algn="ctr"/>
+          </a:p>
+        </p:txBody>
+      </p:sp>
+      <p:sp>
+        <p:nvSpPr>
+          <p:cNvPr id="24" name="Rectangle 23"/>
+          <p:cNvSpPr/>
+          <p:nvPr/>
+        </p:nvSpPr>
+        <p:spPr>
+          <a:xfrm>
+            <a:off x="640080" y="4325112"/>
+            <a:ext cx="73152" cy="274320"/>
+          </a:xfrm>
+          <a:prstGeom prst="rect">
+            <a:avLst/>
+          </a:prstGeom>
+          <a:solidFill>
+            <a:srgbClr val="269CCB"/>
+          </a:solidFill>
+          <a:ln>
+            <a:noFill/>
+          </a:ln>
+        </p:spPr>
+        <p:style>
+          <a:lnRef idx="1">
+            <a:schemeClr val="accent1"/>
+          </a:lnRef>
+          <a:fillRef idx="3">
+            <a:schemeClr val="accent1"/>
+          </a:fillRef>
+          <a:effectRef idx="2">
+            <a:schemeClr val="accent1"/>
+          </a:effectRef>
+          <a:fontRef idx="minor">
+            <a:schemeClr val="lt1"/>
+          </a:fontRef>
+        </p:style>
+        <p:txBody>
+          <a:bodyPr rtlCol="0" anchor="ctr"/>
+          <a:lstStyle/>
+          <a:p>
+            <a:pPr algn="ctr"/>
+          </a:p>
+        </p:txBody>
+      </p:sp>
+      <p:sp>
+        <p:nvSpPr>
+          <p:cNvPr id="25" name="TextBox 24"/>
+          <p:cNvSpPr txBox="1"/>
+          <p:nvPr/>
+        </p:nvSpPr>
+        <p:spPr>
+          <a:xfrm>
+            <a:off x="1097280" y="4270248"/>
+            <a:ext cx="10362895" cy="402336"/>
+          </a:xfrm>
+          <a:prstGeom prst="rect">
+            <a:avLst/>
+          </a:prstGeom>
+          <a:noFill/>
+        </p:spPr>
+        <p:txBody>
+          <a:bodyPr wrap="square" anchor="ctr"/>
+          <a:lstStyle/>
+          <a:p>
+            <a:r>
+              <a:rPr sz="1500" b="1" i="0">
+                <a:solidFill>
+                  <a:srgbClr val="333333"/>
+                </a:solidFill>
+                <a:latin typeface="Calibri"/>
+              </a:rPr>
+              <a:t>EL GUION DE PRUEBA</a:t>
+            </a:r>
+            <a:r>
+              <a:rPr sz="1500" b="0" i="0">
+                <a:solidFill>
+                  <a:srgbClr val="333333"/>
+                </a:solidFill>
+                <a:latin typeface="Calibri"/>
+              </a:rPr>
+              <a:t> — Tres tareas para pedirle a una persona ajena, salidas de los </a:t>
+            </a:r>
+            <a:r>
+              <a:rPr sz="1500" b="1" i="0">
+                <a:solidFill>
+                  <a:srgbClr val="333333"/>
+                </a:solidFill>
+                <a:latin typeface="Calibri"/>
+              </a:rPr>
+              <a:t>criterios de aceptación de la sesión 7</a:t>
+            </a:r>
+            <a:r>
+              <a:rPr sz="1500" b="0" i="0">
+                <a:solidFill>
+                  <a:srgbClr val="333333"/>
+                </a:solidFill>
+                <a:latin typeface="Calibri"/>
+              </a:rPr>
+              <a:t>, y una de ellas sobre el caso en que el sistema </a:t>
+            </a:r>
+            <a:r>
+              <a:rPr sz="1500" b="1" i="0">
+                <a:solidFill>
+                  <a:srgbClr val="333333"/>
+                </a:solidFill>
+                <a:latin typeface="Calibri"/>
+              </a:rPr>
+              <a:t>no</a:t>
+            </a:r>
+            <a:r>
+              <a:rPr sz="1500" b="0" i="0">
+                <a:solidFill>
+                  <a:srgbClr val="333333"/>
+                </a:solidFill>
+                <a:latin typeface="Calibri"/>
+              </a:rPr>
+              <a:t> tiene la respuesta.</a:t>
+            </a:r>
+          </a:p>
+        </p:txBody>
+      </p:sp>
+      <p:sp>
+        <p:nvSpPr>
+          <p:cNvPr id="26" name="TextBox 25"/>
           <p:cNvSpPr txBox="1"/>
           <p:nvPr/>
         </p:nvSpPr>
@@ -10426,6 +9138,1558 @@
 </file>
 
 <file path=ppt/slides/slide23.xml><?xml version="1.0" encoding="utf-8"?>
+<p:sld xmlns:a="http://schemas.openxmlformats.org/drawingml/2006/main" xmlns:p="http://schemas.openxmlformats.org/presentationml/2006/main" xmlns:r="http://schemas.openxmlformats.org/officeDocument/2006/relationships">
+  <p:cSld>
+    <p:bg>
+      <p:bgPr>
+        <a:solidFill>
+          <a:srgbClr val="FFFFFF"/>
+        </a:solidFill>
+        <a:effectLst/>
+      </p:bgPr>
+    </p:bg>
+    <p:spTree>
+      <p:nvGrpSpPr>
+        <p:cNvPr id="1" name=""/>
+        <p:cNvGrpSpPr/>
+        <p:nvPr/>
+      </p:nvGrpSpPr>
+      <p:grpSpPr/>
+      <p:sp>
+        <p:nvSpPr>
+          <p:cNvPr id="2" name="Rectangle 1"/>
+          <p:cNvSpPr/>
+          <p:nvPr/>
+        </p:nvSpPr>
+        <p:spPr>
+          <a:xfrm>
+            <a:off x="0" y="0"/>
+            <a:ext cx="12191695" cy="1170432"/>
+          </a:xfrm>
+          <a:prstGeom prst="rect">
+            <a:avLst/>
+          </a:prstGeom>
+          <a:solidFill>
+            <a:srgbClr val="095292"/>
+          </a:solidFill>
+          <a:ln>
+            <a:noFill/>
+          </a:ln>
+        </p:spPr>
+        <p:style>
+          <a:lnRef idx="1">
+            <a:schemeClr val="accent1"/>
+          </a:lnRef>
+          <a:fillRef idx="3">
+            <a:schemeClr val="accent1"/>
+          </a:fillRef>
+          <a:effectRef idx="2">
+            <a:schemeClr val="accent1"/>
+          </a:effectRef>
+          <a:fontRef idx="minor">
+            <a:schemeClr val="lt1"/>
+          </a:fontRef>
+        </p:style>
+        <p:txBody>
+          <a:bodyPr rtlCol="0" anchor="ctr"/>
+          <a:lstStyle/>
+          <a:p>
+            <a:pPr algn="ctr"/>
+          </a:p>
+        </p:txBody>
+      </p:sp>
+      <p:sp>
+        <p:nvSpPr>
+          <p:cNvPr id="3" name="Rectangle 2"/>
+          <p:cNvSpPr/>
+          <p:nvPr/>
+        </p:nvSpPr>
+        <p:spPr>
+          <a:xfrm>
+            <a:off x="0" y="1170432"/>
+            <a:ext cx="12191695" cy="41148"/>
+          </a:xfrm>
+          <a:prstGeom prst="rect">
+            <a:avLst/>
+          </a:prstGeom>
+          <a:solidFill>
+            <a:srgbClr val="FFD000"/>
+          </a:solidFill>
+          <a:ln>
+            <a:noFill/>
+          </a:ln>
+        </p:spPr>
+        <p:style>
+          <a:lnRef idx="1">
+            <a:schemeClr val="accent1"/>
+          </a:lnRef>
+          <a:fillRef idx="3">
+            <a:schemeClr val="accent1"/>
+          </a:fillRef>
+          <a:effectRef idx="2">
+            <a:schemeClr val="accent1"/>
+          </a:effectRef>
+          <a:fontRef idx="minor">
+            <a:schemeClr val="lt1"/>
+          </a:fontRef>
+        </p:style>
+        <p:txBody>
+          <a:bodyPr rtlCol="0" anchor="ctr"/>
+          <a:lstStyle/>
+          <a:p>
+            <a:pPr algn="ctr"/>
+          </a:p>
+        </p:txBody>
+      </p:sp>
+      <p:sp>
+        <p:nvSpPr>
+          <p:cNvPr id="4" name="TextBox 3"/>
+          <p:cNvSpPr txBox="1"/>
+          <p:nvPr/>
+        </p:nvSpPr>
+        <p:spPr>
+          <a:xfrm>
+            <a:off x="457200" y="164592"/>
+            <a:ext cx="11277295" cy="384048"/>
+          </a:xfrm>
+          <a:prstGeom prst="rect">
+            <a:avLst/>
+          </a:prstGeom>
+          <a:noFill/>
+        </p:spPr>
+        <p:txBody>
+          <a:bodyPr wrap="square">
+            <a:spAutoFit/>
+          </a:bodyPr>
+          <a:lstStyle/>
+          <a:p>
+            <a:r>
+              <a:rPr sz="2600" b="1" i="0">
+                <a:solidFill>
+                  <a:srgbClr val="FFFFFF"/>
+                </a:solidFill>
+                <a:latin typeface="Calibri"/>
+              </a:rPr>
+              <a:t>Cómo se expone en 3 minutos</a:t>
+            </a:r>
+          </a:p>
+        </p:txBody>
+      </p:sp>
+      <p:sp>
+        <p:nvSpPr>
+          <p:cNvPr id="5" name="TextBox 4"/>
+          <p:cNvSpPr txBox="1"/>
+          <p:nvPr/>
+        </p:nvSpPr>
+        <p:spPr>
+          <a:xfrm>
+            <a:off x="457200" y="566928"/>
+            <a:ext cx="11277295" cy="411480"/>
+          </a:xfrm>
+          <a:prstGeom prst="rect">
+            <a:avLst/>
+          </a:prstGeom>
+          <a:noFill/>
+        </p:spPr>
+        <p:txBody>
+          <a:bodyPr wrap="square">
+            <a:spAutoFit/>
+          </a:bodyPr>
+          <a:lstStyle/>
+          <a:p>
+            <a:r>
+              <a:rPr sz="1400" b="0" i="0">
+                <a:solidFill>
+                  <a:srgbClr val="B8D8EE"/>
+                </a:solidFill>
+                <a:latin typeface="Calibri"/>
+              </a:rPr>
+              <a:t>Habla el vocero con la pantalla ya compartida · cronómetro en pantalla · se corta al llegar a cero</a:t>
+            </a:r>
+          </a:p>
+        </p:txBody>
+      </p:sp>
+      <p:sp>
+        <p:nvSpPr>
+          <p:cNvPr id="6" name="Rounded Rectangle 5"/>
+          <p:cNvSpPr/>
+          <p:nvPr/>
+        </p:nvSpPr>
+        <p:spPr>
+          <a:xfrm>
+            <a:off x="457200" y="1444752"/>
+            <a:ext cx="11277295" cy="908913"/>
+          </a:xfrm>
+          <a:prstGeom prst="roundRect">
+            <a:avLst>
+              <a:gd name="adj" fmla="val 12000"/>
+            </a:avLst>
+          </a:prstGeom>
+          <a:solidFill>
+            <a:srgbClr val="F2F2F2"/>
+          </a:solidFill>
+          <a:ln>
+            <a:noFill/>
+          </a:ln>
+        </p:spPr>
+        <p:style>
+          <a:lnRef idx="1">
+            <a:schemeClr val="accent1"/>
+          </a:lnRef>
+          <a:fillRef idx="3">
+            <a:schemeClr val="accent1"/>
+          </a:fillRef>
+          <a:effectRef idx="2">
+            <a:schemeClr val="accent1"/>
+          </a:effectRef>
+          <a:fontRef idx="minor">
+            <a:schemeClr val="lt1"/>
+          </a:fontRef>
+        </p:style>
+        <p:txBody>
+          <a:bodyPr rtlCol="0" anchor="ctr"/>
+          <a:lstStyle/>
+          <a:p>
+            <a:pPr algn="ctr"/>
+          </a:p>
+        </p:txBody>
+      </p:sp>
+      <p:sp>
+        <p:nvSpPr>
+          <p:cNvPr id="7" name="Rounded Rectangle 6"/>
+          <p:cNvSpPr/>
+          <p:nvPr/>
+        </p:nvSpPr>
+        <p:spPr>
+          <a:xfrm>
+            <a:off x="594360" y="1679752"/>
+            <a:ext cx="438912" cy="438912"/>
+          </a:xfrm>
+          <a:prstGeom prst="roundRect">
+            <a:avLst>
+              <a:gd name="adj" fmla="val 12000"/>
+            </a:avLst>
+          </a:prstGeom>
+          <a:solidFill>
+            <a:srgbClr val="095292"/>
+          </a:solidFill>
+          <a:ln>
+            <a:noFill/>
+          </a:ln>
+        </p:spPr>
+        <p:style>
+          <a:lnRef idx="1">
+            <a:schemeClr val="accent1"/>
+          </a:lnRef>
+          <a:fillRef idx="3">
+            <a:schemeClr val="accent1"/>
+          </a:fillRef>
+          <a:effectRef idx="2">
+            <a:schemeClr val="accent1"/>
+          </a:effectRef>
+          <a:fontRef idx="minor">
+            <a:schemeClr val="lt1"/>
+          </a:fontRef>
+        </p:style>
+        <p:txBody>
+          <a:bodyPr rtlCol="0" anchor="ctr"/>
+          <a:lstStyle/>
+          <a:p>
+            <a:pPr algn="ctr"/>
+          </a:p>
+        </p:txBody>
+      </p:sp>
+      <p:sp>
+        <p:nvSpPr>
+          <p:cNvPr id="8" name="TextBox 7"/>
+          <p:cNvSpPr txBox="1"/>
+          <p:nvPr/>
+        </p:nvSpPr>
+        <p:spPr>
+          <a:xfrm>
+            <a:off x="594360" y="1679752"/>
+            <a:ext cx="438912" cy="438912"/>
+          </a:xfrm>
+          <a:prstGeom prst="rect">
+            <a:avLst/>
+          </a:prstGeom>
+          <a:noFill/>
+        </p:spPr>
+        <p:txBody>
+          <a:bodyPr wrap="square" anchor="ctr"/>
+          <a:lstStyle/>
+          <a:p>
+            <a:pPr algn="ctr"/>
+            <a:r>
+              <a:rPr sz="1600" b="1" i="0">
+                <a:solidFill>
+                  <a:srgbClr val="FFFFFF"/>
+                </a:solidFill>
+                <a:latin typeface="Calibri"/>
+              </a:rPr>
+              <a:t>1</a:t>
+            </a:r>
+          </a:p>
+        </p:txBody>
+      </p:sp>
+      <p:sp>
+        <p:nvSpPr>
+          <p:cNvPr id="9" name="TextBox 8"/>
+          <p:cNvSpPr txBox="1"/>
+          <p:nvPr/>
+        </p:nvSpPr>
+        <p:spPr>
+          <a:xfrm>
+            <a:off x="1188720" y="1536192"/>
+            <a:ext cx="10271455" cy="744321"/>
+          </a:xfrm>
+          <a:prstGeom prst="rect">
+            <a:avLst/>
+          </a:prstGeom>
+          <a:noFill/>
+        </p:spPr>
+        <p:txBody>
+          <a:bodyPr wrap="square" anchor="ctr"/>
+          <a:lstStyle/>
+          <a:p>
+            <a:r>
+              <a:rPr sz="1500" b="1" i="0">
+                <a:solidFill>
+                  <a:srgbClr val="095292"/>
+                </a:solidFill>
+                <a:latin typeface="Calibri"/>
+              </a:rPr>
+              <a:t>30 s · El flujo</a:t>
+            </a:r>
+          </a:p>
+          <a:p>
+            <a:pPr>
+              <a:spcBef>
+                <a:spcPts val="200"/>
+              </a:spcBef>
+            </a:pPr>
+            <a:r>
+              <a:rPr sz="1300" b="0" i="0">
+                <a:solidFill>
+                  <a:srgbClr val="333333"/>
+                </a:solidFill>
+                <a:latin typeface="Calibri"/>
+              </a:rPr>
+              <a:t>Los tres pasos y para qué existe cada pantalla.</a:t>
+            </a:r>
+          </a:p>
+        </p:txBody>
+      </p:sp>
+      <p:sp>
+        <p:nvSpPr>
+          <p:cNvPr id="10" name="Rounded Rectangle 9"/>
+          <p:cNvSpPr/>
+          <p:nvPr/>
+        </p:nvSpPr>
+        <p:spPr>
+          <a:xfrm>
+            <a:off x="457200" y="2445105"/>
+            <a:ext cx="11277295" cy="908913"/>
+          </a:xfrm>
+          <a:prstGeom prst="roundRect">
+            <a:avLst>
+              <a:gd name="adj" fmla="val 12000"/>
+            </a:avLst>
+          </a:prstGeom>
+          <a:solidFill>
+            <a:srgbClr val="E8F4FA"/>
+          </a:solidFill>
+          <a:ln>
+            <a:noFill/>
+          </a:ln>
+        </p:spPr>
+        <p:style>
+          <a:lnRef idx="1">
+            <a:schemeClr val="accent1"/>
+          </a:lnRef>
+          <a:fillRef idx="3">
+            <a:schemeClr val="accent1"/>
+          </a:fillRef>
+          <a:effectRef idx="2">
+            <a:schemeClr val="accent1"/>
+          </a:effectRef>
+          <a:fontRef idx="minor">
+            <a:schemeClr val="lt1"/>
+          </a:fontRef>
+        </p:style>
+        <p:txBody>
+          <a:bodyPr rtlCol="0" anchor="ctr"/>
+          <a:lstStyle/>
+          <a:p>
+            <a:pPr algn="ctr"/>
+          </a:p>
+        </p:txBody>
+      </p:sp>
+      <p:sp>
+        <p:nvSpPr>
+          <p:cNvPr id="11" name="Rounded Rectangle 10"/>
+          <p:cNvSpPr/>
+          <p:nvPr/>
+        </p:nvSpPr>
+        <p:spPr>
+          <a:xfrm>
+            <a:off x="594360" y="2680106"/>
+            <a:ext cx="438912" cy="438912"/>
+          </a:xfrm>
+          <a:prstGeom prst="roundRect">
+            <a:avLst>
+              <a:gd name="adj" fmla="val 12000"/>
+            </a:avLst>
+          </a:prstGeom>
+          <a:solidFill>
+            <a:srgbClr val="095292"/>
+          </a:solidFill>
+          <a:ln>
+            <a:noFill/>
+          </a:ln>
+        </p:spPr>
+        <p:style>
+          <a:lnRef idx="1">
+            <a:schemeClr val="accent1"/>
+          </a:lnRef>
+          <a:fillRef idx="3">
+            <a:schemeClr val="accent1"/>
+          </a:fillRef>
+          <a:effectRef idx="2">
+            <a:schemeClr val="accent1"/>
+          </a:effectRef>
+          <a:fontRef idx="minor">
+            <a:schemeClr val="lt1"/>
+          </a:fontRef>
+        </p:style>
+        <p:txBody>
+          <a:bodyPr rtlCol="0" anchor="ctr"/>
+          <a:lstStyle/>
+          <a:p>
+            <a:pPr algn="ctr"/>
+          </a:p>
+        </p:txBody>
+      </p:sp>
+      <p:sp>
+        <p:nvSpPr>
+          <p:cNvPr id="12" name="TextBox 11"/>
+          <p:cNvSpPr txBox="1"/>
+          <p:nvPr/>
+        </p:nvSpPr>
+        <p:spPr>
+          <a:xfrm>
+            <a:off x="594360" y="2680106"/>
+            <a:ext cx="438912" cy="438912"/>
+          </a:xfrm>
+          <a:prstGeom prst="rect">
+            <a:avLst/>
+          </a:prstGeom>
+          <a:noFill/>
+        </p:spPr>
+        <p:txBody>
+          <a:bodyPr wrap="square" anchor="ctr"/>
+          <a:lstStyle/>
+          <a:p>
+            <a:pPr algn="ctr"/>
+            <a:r>
+              <a:rPr sz="1600" b="1" i="0">
+                <a:solidFill>
+                  <a:srgbClr val="FFFFFF"/>
+                </a:solidFill>
+                <a:latin typeface="Calibri"/>
+              </a:rPr>
+              <a:t>2</a:t>
+            </a:r>
+          </a:p>
+        </p:txBody>
+      </p:sp>
+      <p:sp>
+        <p:nvSpPr>
+          <p:cNvPr id="13" name="TextBox 12"/>
+          <p:cNvSpPr txBox="1"/>
+          <p:nvPr/>
+        </p:nvSpPr>
+        <p:spPr>
+          <a:xfrm>
+            <a:off x="1188720" y="2536545"/>
+            <a:ext cx="10271455" cy="744321"/>
+          </a:xfrm>
+          <a:prstGeom prst="rect">
+            <a:avLst/>
+          </a:prstGeom>
+          <a:noFill/>
+        </p:spPr>
+        <p:txBody>
+          <a:bodyPr wrap="square" anchor="ctr"/>
+          <a:lstStyle/>
+          <a:p>
+            <a:r>
+              <a:rPr sz="1500" b="1" i="0">
+                <a:solidFill>
+                  <a:srgbClr val="095292"/>
+                </a:solidFill>
+                <a:latin typeface="Calibri"/>
+              </a:rPr>
+              <a:t>50 s · El camino principal</a:t>
+            </a:r>
+          </a:p>
+          <a:p>
+            <a:pPr>
+              <a:spcBef>
+                <a:spcPts val="200"/>
+              </a:spcBef>
+            </a:pPr>
+            <a:r>
+              <a:rPr sz="1300" b="0" i="0">
+                <a:solidFill>
+                  <a:srgbClr val="333333"/>
+                </a:solidFill>
+                <a:latin typeface="Calibri"/>
+              </a:rPr>
+              <a:t>Qué hace el usuario el 90 % de las veces, señalado en el dibujo.</a:t>
+            </a:r>
+          </a:p>
+        </p:txBody>
+      </p:sp>
+      <p:sp>
+        <p:nvSpPr>
+          <p:cNvPr id="14" name="Rounded Rectangle 13"/>
+          <p:cNvSpPr/>
+          <p:nvPr/>
+        </p:nvSpPr>
+        <p:spPr>
+          <a:xfrm>
+            <a:off x="457200" y="3445459"/>
+            <a:ext cx="11277295" cy="908913"/>
+          </a:xfrm>
+          <a:prstGeom prst="roundRect">
+            <a:avLst>
+              <a:gd name="adj" fmla="val 12000"/>
+            </a:avLst>
+          </a:prstGeom>
+          <a:solidFill>
+            <a:srgbClr val="F2F2F2"/>
+          </a:solidFill>
+          <a:ln>
+            <a:noFill/>
+          </a:ln>
+        </p:spPr>
+        <p:style>
+          <a:lnRef idx="1">
+            <a:schemeClr val="accent1"/>
+          </a:lnRef>
+          <a:fillRef idx="3">
+            <a:schemeClr val="accent1"/>
+          </a:fillRef>
+          <a:effectRef idx="2">
+            <a:schemeClr val="accent1"/>
+          </a:effectRef>
+          <a:fontRef idx="minor">
+            <a:schemeClr val="lt1"/>
+          </a:fontRef>
+        </p:style>
+        <p:txBody>
+          <a:bodyPr rtlCol="0" anchor="ctr"/>
+          <a:lstStyle/>
+          <a:p>
+            <a:pPr algn="ctr"/>
+          </a:p>
+        </p:txBody>
+      </p:sp>
+      <p:sp>
+        <p:nvSpPr>
+          <p:cNvPr id="15" name="Rounded Rectangle 14"/>
+          <p:cNvSpPr/>
+          <p:nvPr/>
+        </p:nvSpPr>
+        <p:spPr>
+          <a:xfrm>
+            <a:off x="594360" y="3680460"/>
+            <a:ext cx="438912" cy="438912"/>
+          </a:xfrm>
+          <a:prstGeom prst="roundRect">
+            <a:avLst>
+              <a:gd name="adj" fmla="val 12000"/>
+            </a:avLst>
+          </a:prstGeom>
+          <a:solidFill>
+            <a:srgbClr val="095292"/>
+          </a:solidFill>
+          <a:ln>
+            <a:noFill/>
+          </a:ln>
+        </p:spPr>
+        <p:style>
+          <a:lnRef idx="1">
+            <a:schemeClr val="accent1"/>
+          </a:lnRef>
+          <a:fillRef idx="3">
+            <a:schemeClr val="accent1"/>
+          </a:fillRef>
+          <a:effectRef idx="2">
+            <a:schemeClr val="accent1"/>
+          </a:effectRef>
+          <a:fontRef idx="minor">
+            <a:schemeClr val="lt1"/>
+          </a:fontRef>
+        </p:style>
+        <p:txBody>
+          <a:bodyPr rtlCol="0" anchor="ctr"/>
+          <a:lstStyle/>
+          <a:p>
+            <a:pPr algn="ctr"/>
+          </a:p>
+        </p:txBody>
+      </p:sp>
+      <p:sp>
+        <p:nvSpPr>
+          <p:cNvPr id="16" name="TextBox 15"/>
+          <p:cNvSpPr txBox="1"/>
+          <p:nvPr/>
+        </p:nvSpPr>
+        <p:spPr>
+          <a:xfrm>
+            <a:off x="594360" y="3680460"/>
+            <a:ext cx="438912" cy="438912"/>
+          </a:xfrm>
+          <a:prstGeom prst="rect">
+            <a:avLst/>
+          </a:prstGeom>
+          <a:noFill/>
+        </p:spPr>
+        <p:txBody>
+          <a:bodyPr wrap="square" anchor="ctr"/>
+          <a:lstStyle/>
+          <a:p>
+            <a:pPr algn="ctr"/>
+            <a:r>
+              <a:rPr sz="1600" b="1" i="0">
+                <a:solidFill>
+                  <a:srgbClr val="FFFFFF"/>
+                </a:solidFill>
+                <a:latin typeface="Calibri"/>
+              </a:rPr>
+              <a:t>3</a:t>
+            </a:r>
+          </a:p>
+        </p:txBody>
+      </p:sp>
+      <p:sp>
+        <p:nvSpPr>
+          <p:cNvPr id="17" name="TextBox 16"/>
+          <p:cNvSpPr txBox="1"/>
+          <p:nvPr/>
+        </p:nvSpPr>
+        <p:spPr>
+          <a:xfrm>
+            <a:off x="1188720" y="3536899"/>
+            <a:ext cx="10271455" cy="744321"/>
+          </a:xfrm>
+          <a:prstGeom prst="rect">
+            <a:avLst/>
+          </a:prstGeom>
+          <a:noFill/>
+        </p:spPr>
+        <p:txBody>
+          <a:bodyPr wrap="square" anchor="ctr"/>
+          <a:lstStyle/>
+          <a:p>
+            <a:r>
+              <a:rPr sz="1500" b="1" i="0">
+                <a:solidFill>
+                  <a:srgbClr val="095292"/>
+                </a:solidFill>
+                <a:latin typeface="Calibri"/>
+              </a:rPr>
+              <a:t>50 s · Qué se ve cuando falla</a:t>
+            </a:r>
+          </a:p>
+          <a:p>
+            <a:pPr>
+              <a:spcBef>
+                <a:spcPts val="200"/>
+              </a:spcBef>
+            </a:pPr>
+            <a:r>
+              <a:rPr sz="1300" b="0" i="0">
+                <a:solidFill>
+                  <a:srgbClr val="333333"/>
+                </a:solidFill>
+                <a:latin typeface="Calibri"/>
+              </a:rPr>
+              <a:t>Estado vacío y de error, con el mensaje leído tal cual. Es el minuto obligatorio.</a:t>
+            </a:r>
+          </a:p>
+        </p:txBody>
+      </p:sp>
+      <p:sp>
+        <p:nvSpPr>
+          <p:cNvPr id="18" name="Rounded Rectangle 17"/>
+          <p:cNvSpPr/>
+          <p:nvPr/>
+        </p:nvSpPr>
+        <p:spPr>
+          <a:xfrm>
+            <a:off x="457200" y="4445812"/>
+            <a:ext cx="11277295" cy="908913"/>
+          </a:xfrm>
+          <a:prstGeom prst="roundRect">
+            <a:avLst>
+              <a:gd name="adj" fmla="val 12000"/>
+            </a:avLst>
+          </a:prstGeom>
+          <a:solidFill>
+            <a:srgbClr val="E8F4FA"/>
+          </a:solidFill>
+          <a:ln>
+            <a:noFill/>
+          </a:ln>
+        </p:spPr>
+        <p:style>
+          <a:lnRef idx="1">
+            <a:schemeClr val="accent1"/>
+          </a:lnRef>
+          <a:fillRef idx="3">
+            <a:schemeClr val="accent1"/>
+          </a:fillRef>
+          <a:effectRef idx="2">
+            <a:schemeClr val="accent1"/>
+          </a:effectRef>
+          <a:fontRef idx="minor">
+            <a:schemeClr val="lt1"/>
+          </a:fontRef>
+        </p:style>
+        <p:txBody>
+          <a:bodyPr rtlCol="0" anchor="ctr"/>
+          <a:lstStyle/>
+          <a:p>
+            <a:pPr algn="ctr"/>
+          </a:p>
+        </p:txBody>
+      </p:sp>
+      <p:sp>
+        <p:nvSpPr>
+          <p:cNvPr id="19" name="Rounded Rectangle 18"/>
+          <p:cNvSpPr/>
+          <p:nvPr/>
+        </p:nvSpPr>
+        <p:spPr>
+          <a:xfrm>
+            <a:off x="594360" y="4680813"/>
+            <a:ext cx="438912" cy="438912"/>
+          </a:xfrm>
+          <a:prstGeom prst="roundRect">
+            <a:avLst>
+              <a:gd name="adj" fmla="val 12000"/>
+            </a:avLst>
+          </a:prstGeom>
+          <a:solidFill>
+            <a:srgbClr val="095292"/>
+          </a:solidFill>
+          <a:ln>
+            <a:noFill/>
+          </a:ln>
+        </p:spPr>
+        <p:style>
+          <a:lnRef idx="1">
+            <a:schemeClr val="accent1"/>
+          </a:lnRef>
+          <a:fillRef idx="3">
+            <a:schemeClr val="accent1"/>
+          </a:fillRef>
+          <a:effectRef idx="2">
+            <a:schemeClr val="accent1"/>
+          </a:effectRef>
+          <a:fontRef idx="minor">
+            <a:schemeClr val="lt1"/>
+          </a:fontRef>
+        </p:style>
+        <p:txBody>
+          <a:bodyPr rtlCol="0" anchor="ctr"/>
+          <a:lstStyle/>
+          <a:p>
+            <a:pPr algn="ctr"/>
+          </a:p>
+        </p:txBody>
+      </p:sp>
+      <p:sp>
+        <p:nvSpPr>
+          <p:cNvPr id="20" name="TextBox 19"/>
+          <p:cNvSpPr txBox="1"/>
+          <p:nvPr/>
+        </p:nvSpPr>
+        <p:spPr>
+          <a:xfrm>
+            <a:off x="594360" y="4680813"/>
+            <a:ext cx="438912" cy="438912"/>
+          </a:xfrm>
+          <a:prstGeom prst="rect">
+            <a:avLst/>
+          </a:prstGeom>
+          <a:noFill/>
+        </p:spPr>
+        <p:txBody>
+          <a:bodyPr wrap="square" anchor="ctr"/>
+          <a:lstStyle/>
+          <a:p>
+            <a:pPr algn="ctr"/>
+            <a:r>
+              <a:rPr sz="1600" b="1" i="0">
+                <a:solidFill>
+                  <a:srgbClr val="FFFFFF"/>
+                </a:solidFill>
+                <a:latin typeface="Calibri"/>
+              </a:rPr>
+              <a:t>4</a:t>
+            </a:r>
+          </a:p>
+        </p:txBody>
+      </p:sp>
+      <p:sp>
+        <p:nvSpPr>
+          <p:cNvPr id="21" name="TextBox 20"/>
+          <p:cNvSpPr txBox="1"/>
+          <p:nvPr/>
+        </p:nvSpPr>
+        <p:spPr>
+          <a:xfrm>
+            <a:off x="1188720" y="4537252"/>
+            <a:ext cx="10271455" cy="744321"/>
+          </a:xfrm>
+          <a:prstGeom prst="rect">
+            <a:avLst/>
+          </a:prstGeom>
+          <a:noFill/>
+        </p:spPr>
+        <p:txBody>
+          <a:bodyPr wrap="square" anchor="ctr"/>
+          <a:lstStyle/>
+          <a:p>
+            <a:r>
+              <a:rPr sz="1500" b="1" i="0">
+                <a:solidFill>
+                  <a:srgbClr val="095292"/>
+                </a:solidFill>
+                <a:latin typeface="Calibri"/>
+              </a:rPr>
+              <a:t>30 s · Los textos</a:t>
+            </a:r>
+          </a:p>
+          <a:p>
+            <a:pPr>
+              <a:spcBef>
+                <a:spcPts val="200"/>
+              </a:spcBef>
+            </a:pPr>
+            <a:r>
+              <a:rPr sz="1300" b="0" i="0">
+                <a:solidFill>
+                  <a:srgbClr val="333333"/>
+                </a:solidFill>
+                <a:latin typeface="Calibri"/>
+              </a:rPr>
+              <a:t>Dos rótulos que costó decidir y por qué quedaron así.</a:t>
+            </a:r>
+          </a:p>
+        </p:txBody>
+      </p:sp>
+      <p:sp>
+        <p:nvSpPr>
+          <p:cNvPr id="22" name="Rounded Rectangle 21"/>
+          <p:cNvSpPr/>
+          <p:nvPr/>
+        </p:nvSpPr>
+        <p:spPr>
+          <a:xfrm>
+            <a:off x="457200" y="5446166"/>
+            <a:ext cx="11277295" cy="908913"/>
+          </a:xfrm>
+          <a:prstGeom prst="roundRect">
+            <a:avLst>
+              <a:gd name="adj" fmla="val 12000"/>
+            </a:avLst>
+          </a:prstGeom>
+          <a:solidFill>
+            <a:srgbClr val="F2F2F2"/>
+          </a:solidFill>
+          <a:ln>
+            <a:noFill/>
+          </a:ln>
+        </p:spPr>
+        <p:style>
+          <a:lnRef idx="1">
+            <a:schemeClr val="accent1"/>
+          </a:lnRef>
+          <a:fillRef idx="3">
+            <a:schemeClr val="accent1"/>
+          </a:fillRef>
+          <a:effectRef idx="2">
+            <a:schemeClr val="accent1"/>
+          </a:effectRef>
+          <a:fontRef idx="minor">
+            <a:schemeClr val="lt1"/>
+          </a:fontRef>
+        </p:style>
+        <p:txBody>
+          <a:bodyPr rtlCol="0" anchor="ctr"/>
+          <a:lstStyle/>
+          <a:p>
+            <a:pPr algn="ctr"/>
+          </a:p>
+        </p:txBody>
+      </p:sp>
+      <p:sp>
+        <p:nvSpPr>
+          <p:cNvPr id="23" name="Rounded Rectangle 22"/>
+          <p:cNvSpPr/>
+          <p:nvPr/>
+        </p:nvSpPr>
+        <p:spPr>
+          <a:xfrm>
+            <a:off x="594360" y="5681167"/>
+            <a:ext cx="438912" cy="438912"/>
+          </a:xfrm>
+          <a:prstGeom prst="roundRect">
+            <a:avLst>
+              <a:gd name="adj" fmla="val 12000"/>
+            </a:avLst>
+          </a:prstGeom>
+          <a:solidFill>
+            <a:srgbClr val="095292"/>
+          </a:solidFill>
+          <a:ln>
+            <a:noFill/>
+          </a:ln>
+        </p:spPr>
+        <p:style>
+          <a:lnRef idx="1">
+            <a:schemeClr val="accent1"/>
+          </a:lnRef>
+          <a:fillRef idx="3">
+            <a:schemeClr val="accent1"/>
+          </a:fillRef>
+          <a:effectRef idx="2">
+            <a:schemeClr val="accent1"/>
+          </a:effectRef>
+          <a:fontRef idx="minor">
+            <a:schemeClr val="lt1"/>
+          </a:fontRef>
+        </p:style>
+        <p:txBody>
+          <a:bodyPr rtlCol="0" anchor="ctr"/>
+          <a:lstStyle/>
+          <a:p>
+            <a:pPr algn="ctr"/>
+          </a:p>
+        </p:txBody>
+      </p:sp>
+      <p:sp>
+        <p:nvSpPr>
+          <p:cNvPr id="24" name="TextBox 23"/>
+          <p:cNvSpPr txBox="1"/>
+          <p:nvPr/>
+        </p:nvSpPr>
+        <p:spPr>
+          <a:xfrm>
+            <a:off x="594360" y="5681167"/>
+            <a:ext cx="438912" cy="438912"/>
+          </a:xfrm>
+          <a:prstGeom prst="rect">
+            <a:avLst/>
+          </a:prstGeom>
+          <a:noFill/>
+        </p:spPr>
+        <p:txBody>
+          <a:bodyPr wrap="square" anchor="ctr"/>
+          <a:lstStyle/>
+          <a:p>
+            <a:pPr algn="ctr"/>
+            <a:r>
+              <a:rPr sz="1600" b="1" i="0">
+                <a:solidFill>
+                  <a:srgbClr val="FFFFFF"/>
+                </a:solidFill>
+                <a:latin typeface="Calibri"/>
+              </a:rPr>
+              <a:t>5</a:t>
+            </a:r>
+          </a:p>
+        </p:txBody>
+      </p:sp>
+      <p:sp>
+        <p:nvSpPr>
+          <p:cNvPr id="25" name="TextBox 24"/>
+          <p:cNvSpPr txBox="1"/>
+          <p:nvPr/>
+        </p:nvSpPr>
+        <p:spPr>
+          <a:xfrm>
+            <a:off x="1188720" y="5537606"/>
+            <a:ext cx="10271455" cy="744321"/>
+          </a:xfrm>
+          <a:prstGeom prst="rect">
+            <a:avLst/>
+          </a:prstGeom>
+          <a:noFill/>
+        </p:spPr>
+        <p:txBody>
+          <a:bodyPr wrap="square" anchor="ctr"/>
+          <a:lstStyle/>
+          <a:p>
+            <a:r>
+              <a:rPr sz="1500" b="1" i="0">
+                <a:solidFill>
+                  <a:srgbClr val="095292"/>
+                </a:solidFill>
+                <a:latin typeface="Calibri"/>
+              </a:rPr>
+              <a:t>20 s · El guion de prueba</a:t>
+            </a:r>
+          </a:p>
+          <a:p>
+            <a:pPr>
+              <a:spcBef>
+                <a:spcPts val="200"/>
+              </a:spcBef>
+            </a:pPr>
+            <a:r>
+              <a:rPr sz="1300" b="0" i="0">
+                <a:solidFill>
+                  <a:srgbClr val="333333"/>
+                </a:solidFill>
+                <a:latin typeface="Calibri"/>
+              </a:rPr>
+              <a:t>Las tres tareas, y con qué rol van a probar.</a:t>
+            </a:r>
+          </a:p>
+        </p:txBody>
+      </p:sp>
+      <p:sp>
+        <p:nvSpPr>
+          <p:cNvPr id="26" name="TextBox 25"/>
+          <p:cNvSpPr txBox="1"/>
+          <p:nvPr/>
+        </p:nvSpPr>
+        <p:spPr>
+          <a:xfrm>
+            <a:off x="11185855" y="6473952"/>
+            <a:ext cx="640080" cy="274320"/>
+          </a:xfrm>
+          <a:prstGeom prst="rect">
+            <a:avLst/>
+          </a:prstGeom>
+          <a:noFill/>
+        </p:spPr>
+        <p:txBody>
+          <a:bodyPr wrap="square">
+            <a:spAutoFit/>
+          </a:bodyPr>
+          <a:lstStyle/>
+          <a:p>
+            <a:pPr algn="r"/>
+            <a:r>
+              <a:rPr sz="1100" b="0" i="0">
+                <a:solidFill>
+                  <a:srgbClr val="666666"/>
+                </a:solidFill>
+                <a:latin typeface="Calibri"/>
+              </a:rPr>
+              <a:t>23</a:t>
+            </a:r>
+          </a:p>
+        </p:txBody>
+      </p:sp>
+    </p:spTree>
+  </p:cSld>
+  <p:clrMapOvr>
+    <a:masterClrMapping/>
+  </p:clrMapOvr>
+</p:sld>
+</file>
+
+<file path=ppt/slides/slide24.xml><?xml version="1.0" encoding="utf-8"?>
+<p:sld xmlns:a="http://schemas.openxmlformats.org/drawingml/2006/main" xmlns:p="http://schemas.openxmlformats.org/presentationml/2006/main" xmlns:r="http://schemas.openxmlformats.org/officeDocument/2006/relationships">
+  <p:cSld>
+    <p:bg>
+      <p:bgPr>
+        <a:solidFill>
+          <a:srgbClr val="FFFFFF"/>
+        </a:solidFill>
+        <a:effectLst/>
+      </p:bgPr>
+    </p:bg>
+    <p:spTree>
+      <p:nvGrpSpPr>
+        <p:cNvPr id="1" name=""/>
+        <p:cNvGrpSpPr/>
+        <p:nvPr/>
+      </p:nvGrpSpPr>
+      <p:grpSpPr/>
+      <p:sp>
+        <p:nvSpPr>
+          <p:cNvPr id="2" name="Rectangle 1"/>
+          <p:cNvSpPr/>
+          <p:nvPr/>
+        </p:nvSpPr>
+        <p:spPr>
+          <a:xfrm>
+            <a:off x="0" y="0"/>
+            <a:ext cx="12191695" cy="960120"/>
+          </a:xfrm>
+          <a:prstGeom prst="rect">
+            <a:avLst/>
+          </a:prstGeom>
+          <a:solidFill>
+            <a:srgbClr val="095292"/>
+          </a:solidFill>
+          <a:ln>
+            <a:noFill/>
+          </a:ln>
+        </p:spPr>
+        <p:style>
+          <a:lnRef idx="1">
+            <a:schemeClr val="accent1"/>
+          </a:lnRef>
+          <a:fillRef idx="3">
+            <a:schemeClr val="accent1"/>
+          </a:fillRef>
+          <a:effectRef idx="2">
+            <a:schemeClr val="accent1"/>
+          </a:effectRef>
+          <a:fontRef idx="minor">
+            <a:schemeClr val="lt1"/>
+          </a:fontRef>
+        </p:style>
+        <p:txBody>
+          <a:bodyPr rtlCol="0" anchor="ctr"/>
+          <a:lstStyle/>
+          <a:p>
+            <a:pPr algn="ctr"/>
+          </a:p>
+        </p:txBody>
+      </p:sp>
+      <p:sp>
+        <p:nvSpPr>
+          <p:cNvPr id="3" name="Rectangle 2"/>
+          <p:cNvSpPr/>
+          <p:nvPr/>
+        </p:nvSpPr>
+        <p:spPr>
+          <a:xfrm>
+            <a:off x="0" y="960120"/>
+            <a:ext cx="12191695" cy="41148"/>
+          </a:xfrm>
+          <a:prstGeom prst="rect">
+            <a:avLst/>
+          </a:prstGeom>
+          <a:solidFill>
+            <a:srgbClr val="FFD000"/>
+          </a:solidFill>
+          <a:ln>
+            <a:noFill/>
+          </a:ln>
+        </p:spPr>
+        <p:style>
+          <a:lnRef idx="1">
+            <a:schemeClr val="accent1"/>
+          </a:lnRef>
+          <a:fillRef idx="3">
+            <a:schemeClr val="accent1"/>
+          </a:fillRef>
+          <a:effectRef idx="2">
+            <a:schemeClr val="accent1"/>
+          </a:effectRef>
+          <a:fontRef idx="minor">
+            <a:schemeClr val="lt1"/>
+          </a:fontRef>
+        </p:style>
+        <p:txBody>
+          <a:bodyPr rtlCol="0" anchor="ctr"/>
+          <a:lstStyle/>
+          <a:p>
+            <a:pPr algn="ctr"/>
+          </a:p>
+        </p:txBody>
+      </p:sp>
+      <p:sp>
+        <p:nvSpPr>
+          <p:cNvPr id="4" name="TextBox 3"/>
+          <p:cNvSpPr txBox="1"/>
+          <p:nvPr/>
+        </p:nvSpPr>
+        <p:spPr>
+          <a:xfrm>
+            <a:off x="457200" y="164592"/>
+            <a:ext cx="11277295" cy="502920"/>
+          </a:xfrm>
+          <a:prstGeom prst="rect">
+            <a:avLst/>
+          </a:prstGeom>
+          <a:noFill/>
+        </p:spPr>
+        <p:txBody>
+          <a:bodyPr wrap="square">
+            <a:spAutoFit/>
+          </a:bodyPr>
+          <a:lstStyle/>
+          <a:p>
+            <a:r>
+              <a:rPr sz="2600" b="1" i="0">
+                <a:solidFill>
+                  <a:srgbClr val="FFFFFF"/>
+                </a:solidFill>
+                <a:latin typeface="Calibri"/>
+              </a:rPr>
+              <a:t>Para la Clase 11</a:t>
+            </a:r>
+          </a:p>
+        </p:txBody>
+      </p:sp>
+      <p:sp>
+        <p:nvSpPr>
+          <p:cNvPr id="5" name="TextBox 4"/>
+          <p:cNvSpPr txBox="1"/>
+          <p:nvPr/>
+        </p:nvSpPr>
+        <p:spPr>
+          <a:xfrm>
+            <a:off x="457200" y="1170432"/>
+            <a:ext cx="11277295" cy="5230368"/>
+          </a:xfrm>
+          <a:prstGeom prst="rect">
+            <a:avLst/>
+          </a:prstGeom>
+          <a:noFill/>
+        </p:spPr>
+        <p:txBody>
+          <a:bodyPr wrap="square">
+            <a:spAutoFit/>
+          </a:bodyPr>
+          <a:lstStyle/>
+          <a:p>
+            <a:pPr>
+              <a:spcAft>
+                <a:spcPts val="800"/>
+              </a:spcAft>
+            </a:pPr>
+            <a:r>
+              <a:rPr sz="2000" b="0" i="0">
+                <a:solidFill>
+                  <a:srgbClr val="333333"/>
+                </a:solidFill>
+                <a:latin typeface="Calibri"/>
+              </a:rPr>
+              <a:t>–   </a:t>
+            </a:r>
+            <a:r>
+              <a:rPr sz="2000" b="1" i="0">
+                <a:solidFill>
+                  <a:srgbClr val="333333"/>
+                </a:solidFill>
+                <a:latin typeface="Calibri"/>
+              </a:rPr>
+              <a:t>Trabajo dirigido:</a:t>
+            </a:r>
+            <a:r>
+              <a:rPr sz="2000" b="0" i="0">
+                <a:solidFill>
+                  <a:srgbClr val="333333"/>
+                </a:solidFill>
+                <a:latin typeface="Calibri"/>
+              </a:rPr>
+              <a:t> Introducción a software de prototipado — terminar las tres pantallas con </a:t>
+            </a:r>
+            <a:r>
+              <a:rPr sz="2000" b="1" i="0">
+                <a:solidFill>
+                  <a:srgbClr val="333333"/>
+                </a:solidFill>
+                <a:latin typeface="Calibri"/>
+              </a:rPr>
+              <a:t>todos</a:t>
+            </a:r>
+            <a:r>
+              <a:rPr sz="2000" b="0" i="0">
+                <a:solidFill>
+                  <a:srgbClr val="333333"/>
+                </a:solidFill>
+                <a:latin typeface="Calibri"/>
+              </a:rPr>
+              <a:t> los textos reales y los tres estados dibujados, y dejar el PNG en la carpeta del equipo.</a:t>
+            </a:r>
+          </a:p>
+          <a:p>
+            <a:pPr>
+              <a:spcAft>
+                <a:spcPts val="800"/>
+              </a:spcAft>
+            </a:pPr>
+            <a:r>
+              <a:rPr sz="2000" b="0" i="0">
+                <a:solidFill>
+                  <a:srgbClr val="333333"/>
+                </a:solidFill>
+                <a:latin typeface="Calibri"/>
+              </a:rPr>
+              <a:t>–   </a:t>
+            </a:r>
+            <a:r>
+              <a:rPr sz="2000" b="1" i="0">
+                <a:solidFill>
+                  <a:srgbClr val="333333"/>
+                </a:solidFill>
+                <a:latin typeface="Calibri"/>
+              </a:rPr>
+              <a:t>Trabajo independiente:</a:t>
+            </a:r>
+            <a:r>
+              <a:rPr sz="2000" b="0" i="0">
+                <a:solidFill>
+                  <a:srgbClr val="333333"/>
+                </a:solidFill>
+                <a:latin typeface="Calibri"/>
+              </a:rPr>
+              <a:t> Práctica básica con herramientas digitales: convertir el prototipo en </a:t>
+            </a:r>
+            <a:r>
+              <a:rPr sz="2000" b="1" i="0">
+                <a:solidFill>
+                  <a:srgbClr val="333333"/>
+                </a:solidFill>
+                <a:latin typeface="Calibri"/>
+              </a:rPr>
+              <a:t>navegable</a:t>
+            </a:r>
+            <a:r>
+              <a:rPr sz="2000" b="0" i="0">
+                <a:solidFill>
+                  <a:srgbClr val="333333"/>
+                </a:solidFill>
+                <a:latin typeface="Calibri"/>
+              </a:rPr>
+              <a:t> —diapositivas enlazadas o enlaces entre marcos— para poder recorrerlo delante de una persona.</a:t>
+            </a:r>
+          </a:p>
+          <a:p>
+            <a:pPr>
+              <a:spcAft>
+                <a:spcPts val="800"/>
+              </a:spcAft>
+            </a:pPr>
+            <a:r>
+              <a:rPr sz="2000" b="0" i="0">
+                <a:solidFill>
+                  <a:srgbClr val="333333"/>
+                </a:solidFill>
+                <a:latin typeface="Calibri"/>
+              </a:rPr>
+              <a:t>–   </a:t>
+            </a:r>
+            <a:r>
+              <a:rPr sz="2000" b="1" i="0">
+                <a:solidFill>
+                  <a:srgbClr val="333333"/>
+                </a:solidFill>
+                <a:latin typeface="Calibri"/>
+              </a:rPr>
+              <a:t>Clase 11 · Taller de prototipado inicial con IA</a:t>
+            </a:r>
+            <a:r>
+              <a:rPr sz="2000" b="0" i="0">
+                <a:solidFill>
+                  <a:srgbClr val="333333"/>
+                </a:solidFill>
+                <a:latin typeface="Calibri"/>
+              </a:rPr>
+              <a:t> — </a:t>
+            </a:r>
+            <a:r>
+              <a:rPr sz="2000" b="1" i="0">
+                <a:solidFill>
+                  <a:srgbClr val="333333"/>
+                </a:solidFill>
+                <a:latin typeface="Calibri"/>
+              </a:rPr>
+              <a:t>prototipo v2 con IA autorizada</a:t>
+            </a:r>
+            <a:r>
+              <a:rPr sz="2000" b="0" i="0">
+                <a:solidFill>
+                  <a:srgbClr val="333333"/>
+                </a:solidFill>
+                <a:latin typeface="Calibri"/>
+              </a:rPr>
+              <a:t>: generar variantes, elegir con criterio y corregir lo que la IA no sabía. Y la </a:t>
+            </a:r>
+            <a:r>
+              <a:rPr sz="2000" b="1" i="0">
+                <a:solidFill>
+                  <a:srgbClr val="333333"/>
+                </a:solidFill>
+                <a:latin typeface="Calibri"/>
+              </a:rPr>
+              <a:t>evaluación del corte 2</a:t>
+            </a:r>
+            <a:r>
+              <a:rPr sz="2000" b="0" i="0">
+                <a:solidFill>
+                  <a:srgbClr val="333333"/>
+                </a:solidFill>
+                <a:latin typeface="Calibri"/>
+              </a:rPr>
+              <a:t> en la plataforma del curso, sobre las sesiones 7 a 11.</a:t>
+            </a:r>
+          </a:p>
+          <a:p>
+            <a:pPr>
+              <a:spcAft>
+                <a:spcPts val="800"/>
+              </a:spcAft>
+            </a:pPr>
+            <a:r>
+              <a:rPr sz="2000" b="0" i="0">
+                <a:solidFill>
+                  <a:srgbClr val="333333"/>
+                </a:solidFill>
+                <a:latin typeface="Calibri"/>
+              </a:rPr>
+              <a:t>–   </a:t>
+            </a:r>
+            <a:r>
+              <a:rPr sz="2000" b="1" i="0">
+                <a:solidFill>
+                  <a:srgbClr val="333333"/>
+                </a:solidFill>
+                <a:latin typeface="Calibri"/>
+              </a:rPr>
+              <a:t>Aviso:</a:t>
+            </a:r>
+            <a:r>
+              <a:rPr sz="2000" b="0" i="0">
+                <a:solidFill>
+                  <a:srgbClr val="333333"/>
+                </a:solidFill>
+                <a:latin typeface="Calibri"/>
+              </a:rPr>
+              <a:t> La sesión 11 </a:t>
+            </a:r>
+            <a:r>
+              <a:rPr sz="2000" b="1" i="0">
+                <a:solidFill>
+                  <a:srgbClr val="333333"/>
+                </a:solidFill>
+                <a:latin typeface="Calibri"/>
+              </a:rPr>
+              <a:t>cierra el corte 2</a:t>
+            </a:r>
+            <a:r>
+              <a:rPr sz="2000" b="0" i="0">
+                <a:solidFill>
+                  <a:srgbClr val="333333"/>
+                </a:solidFill>
+                <a:latin typeface="Calibri"/>
+              </a:rPr>
+              <a:t>: hay 20 minutos de evaluación al final, sobre las sesiones 7 a 11. Traigan el prototipo terminado y navegable — sin él no hay nada que corregir con IA, y ese es el entregable de la sesión. La evaluación es </a:t>
+            </a:r>
+            <a:r>
+              <a:rPr sz="2000" b="1" i="0">
+                <a:solidFill>
+                  <a:srgbClr val="333333"/>
+                </a:solidFill>
+                <a:latin typeface="Calibri"/>
+              </a:rPr>
+              <a:t>a libro abierto sobre los documentos de su equipo</a:t>
+            </a:r>
+            <a:r>
+              <a:rPr sz="2000" b="0" i="0">
+                <a:solidFill>
+                  <a:srgbClr val="333333"/>
+                </a:solidFill>
+                <a:latin typeface="Calibri"/>
+              </a:rPr>
+              <a:t>: lean el documento «Evaluación del Corte 2 — cómo prepararse», que dice exactamente qué pestañas tener abiertas.</a:t>
+            </a:r>
+          </a:p>
+          <a:p>
+            <a:pPr>
+              <a:spcAft>
+                <a:spcPts val="800"/>
+              </a:spcAft>
+            </a:pPr>
+            <a:r>
+              <a:rPr sz="2000" b="0" i="0">
+                <a:solidFill>
+                  <a:srgbClr val="333333"/>
+                </a:solidFill>
+                <a:latin typeface="Calibri"/>
+              </a:rPr>
+              <a:t>–   </a:t>
+            </a:r>
+            <a:r>
+              <a:rPr sz="2000" b="1" i="0">
+                <a:solidFill>
+                  <a:srgbClr val="333333"/>
+                </a:solidFill>
+                <a:latin typeface="Calibri"/>
+              </a:rPr>
+              <a:t>Antes de salir:</a:t>
+            </a:r>
+            <a:r>
+              <a:rPr sz="2000" b="0" i="0">
+                <a:solidFill>
+                  <a:srgbClr val="333333"/>
+                </a:solidFill>
+                <a:latin typeface="Calibri"/>
+              </a:rPr>
+              <a:t> el enlace del documento del equipo en el chat, con permiso de lectura para el docente, y el nombre del vocero de hoy.</a:t>
+            </a:r>
+          </a:p>
+        </p:txBody>
+      </p:sp>
+      <p:sp>
+        <p:nvSpPr>
+          <p:cNvPr id="6" name="TextBox 5"/>
+          <p:cNvSpPr txBox="1"/>
+          <p:nvPr/>
+        </p:nvSpPr>
+        <p:spPr>
+          <a:xfrm>
+            <a:off x="11185855" y="6473952"/>
+            <a:ext cx="640080" cy="274320"/>
+          </a:xfrm>
+          <a:prstGeom prst="rect">
+            <a:avLst/>
+          </a:prstGeom>
+          <a:noFill/>
+        </p:spPr>
+        <p:txBody>
+          <a:bodyPr wrap="square">
+            <a:spAutoFit/>
+          </a:bodyPr>
+          <a:lstStyle/>
+          <a:p>
+            <a:pPr algn="r"/>
+            <a:r>
+              <a:rPr sz="1100" b="0" i="0">
+                <a:solidFill>
+                  <a:srgbClr val="666666"/>
+                </a:solidFill>
+                <a:latin typeface="Calibri"/>
+              </a:rPr>
+              <a:t>24</a:t>
+            </a:r>
+          </a:p>
+        </p:txBody>
+      </p:sp>
+    </p:spTree>
+  </p:cSld>
+  <p:clrMapOvr>
+    <a:masterClrMapping/>
+  </p:clrMapOvr>
+</p:sld>
+</file>
+
+<file path=ppt/slides/slide25.xml><?xml version="1.0" encoding="utf-8"?>
 <p:sld xmlns:a="http://schemas.openxmlformats.org/drawingml/2006/main" xmlns:p="http://schemas.openxmlformats.org/presentationml/2006/main" xmlns:r="http://schemas.openxmlformats.org/officeDocument/2006/relationships">
   <p:cSld>
     <p:bg>

--- a/Introduccion a la Ingenieria/Clases/Clase 10 - Herramientas digitales aplicadas a la Ingenieria/Presentacion.pptx
+++ b/Introduccion a la Ingenieria/Clases/Clase 10 - Herramientas digitales aplicadas a la Ingenieria/Presentacion.pptx
@@ -30,6 +30,8 @@
     <p:sldId id="278" r:id="rId29"/>
     <p:sldId id="279" r:id="rId30"/>
     <p:sldId id="280" r:id="rId31"/>
+    <p:sldId id="281" r:id="rId32"/>
+    <p:sldId id="282" r:id="rId33"/>
   </p:sldIdLst>
   <p:sldSz cx="12191695" cy="6858000" type="screen4x3"/>
   <p:notesSz cx="6858000" cy="9144000"/>
@@ -7980,7 +7982,7 @@
         <p:spPr>
           <a:xfrm>
             <a:off x="0" y="0"/>
-            <a:ext cx="12191695" cy="1170432"/>
+            <a:ext cx="12191695" cy="960120"/>
           </a:xfrm>
           <a:prstGeom prst="rect">
             <a:avLst/>
@@ -8022,7 +8024,7 @@
         </p:nvSpPr>
         <p:spPr>
           <a:xfrm>
-            <a:off x="0" y="1170432"/>
+            <a:off x="0" y="960120"/>
             <a:ext cx="12191695" cy="41148"/>
           </a:xfrm>
           <a:prstGeom prst="rect">
@@ -8066,7 +8068,7 @@
         <p:spPr>
           <a:xfrm>
             <a:off x="457200" y="164592"/>
-            <a:ext cx="11277295" cy="384048"/>
+            <a:ext cx="11277295" cy="502920"/>
           </a:xfrm>
           <a:prstGeom prst="rect">
             <a:avLst/>
@@ -8086,55 +8088,21 @@
                 </a:solidFill>
                 <a:latin typeface="Calibri"/>
               </a:rPr>
-              <a:t>Taller de hoy: Prototipo de baja fidelidad</a:t>
-            </a:r>
-          </a:p>
-        </p:txBody>
-      </p:sp>
-      <p:sp>
-        <p:nvSpPr>
-          <p:cNvPr id="5" name="TextBox 4"/>
-          <p:cNvSpPr txBox="1"/>
-          <p:nvPr/>
-        </p:nvSpPr>
-        <p:spPr>
-          <a:xfrm>
-            <a:off x="457200" y="566928"/>
-            <a:ext cx="11277295" cy="411480"/>
-          </a:xfrm>
-          <a:prstGeom prst="rect">
-            <a:avLst/>
-          </a:prstGeom>
-          <a:noFill/>
-        </p:spPr>
-        <p:txBody>
-          <a:bodyPr wrap="square">
-            <a:spAutoFit/>
-          </a:bodyPr>
-          <a:lstStyle/>
-          <a:p>
-            <a:r>
-              <a:rPr sz="1400" b="0" i="0">
-                <a:solidFill>
-                  <a:srgbClr val="B8D8EE"/>
-                </a:solidFill>
-                <a:latin typeface="Calibri"/>
-              </a:rPr>
-              <a:t>17 min en equipos · 2 dibujan · 2 escriben textos · 1 escribe el guion de prueba · prototipo de tres pantallas + guion de prueba con tres tareas</a:t>
-            </a:r>
-          </a:p>
-        </p:txBody>
-      </p:sp>
-      <p:sp>
-        <p:nvSpPr>
-          <p:cNvPr id="6" name="Rounded Rectangle 5"/>
+              <a:t>Plantilla del entregable: los 5 bloques</a:t>
+            </a:r>
+          </a:p>
+        </p:txBody>
+      </p:sp>
+      <p:sp>
+        <p:nvSpPr>
+          <p:cNvPr id="5" name="Rounded Rectangle 4"/>
           <p:cNvSpPr/>
           <p:nvPr/>
         </p:nvSpPr>
         <p:spPr>
           <a:xfrm>
-            <a:off x="457200" y="1472184"/>
-            <a:ext cx="11277295" cy="566928"/>
+            <a:off x="457200" y="1261872"/>
+            <a:ext cx="11277295" cy="5093208"/>
           </a:xfrm>
           <a:prstGeom prst="roundRect">
             <a:avLst>
@@ -8142,7 +8110,7 @@
             </a:avLst>
           </a:prstGeom>
           <a:solidFill>
-            <a:srgbClr val="F2F2F2"/>
+            <a:srgbClr val="1E2A38"/>
           </a:solidFill>
           <a:ln>
             <a:noFill/>
@@ -8172,25 +8140,23 @@
       </p:sp>
       <p:sp>
         <p:nvSpPr>
-          <p:cNvPr id="7" name="Rectangle 6"/>
+          <p:cNvPr id="6" name="Rectangle 5"/>
           <p:cNvSpPr/>
           <p:nvPr/>
         </p:nvSpPr>
         <p:spPr>
           <a:xfrm>
-            <a:off x="640080" y="1618487"/>
-            <a:ext cx="274320" cy="274320"/>
+            <a:off x="457200" y="1261872"/>
+            <a:ext cx="11277295" cy="320040"/>
           </a:xfrm>
           <a:prstGeom prst="rect">
             <a:avLst/>
           </a:prstGeom>
           <a:solidFill>
-            <a:srgbClr val="FFFFFF"/>
+            <a:srgbClr val="095292"/>
           </a:solidFill>
           <a:ln>
-            <a:solidFill>
-              <a:srgbClr val="333333"/>
-            </a:solidFill>
+            <a:noFill/>
           </a:ln>
         </p:spPr>
         <p:style>
@@ -8217,886 +8183,222 @@
       </p:sp>
       <p:sp>
         <p:nvSpPr>
-          <p:cNvPr id="8" name="Rectangle 7"/>
-          <p:cNvSpPr/>
-          <p:nvPr/>
-        </p:nvSpPr>
-        <p:spPr>
-          <a:xfrm>
-            <a:off x="640080" y="1618487"/>
-            <a:ext cx="73152" cy="274320"/>
-          </a:xfrm>
-          <a:prstGeom prst="rect">
-            <a:avLst/>
-          </a:prstGeom>
-          <a:solidFill>
-            <a:srgbClr val="269CCB"/>
-          </a:solidFill>
-          <a:ln>
-            <a:noFill/>
-          </a:ln>
-        </p:spPr>
-        <p:style>
-          <a:lnRef idx="1">
-            <a:schemeClr val="accent1"/>
-          </a:lnRef>
-          <a:fillRef idx="3">
-            <a:schemeClr val="accent1"/>
-          </a:fillRef>
-          <a:effectRef idx="2">
-            <a:schemeClr val="accent1"/>
-          </a:effectRef>
-          <a:fontRef idx="minor">
-            <a:schemeClr val="lt1"/>
-          </a:fontRef>
-        </p:style>
-        <p:txBody>
-          <a:bodyPr rtlCol="0" anchor="ctr"/>
-          <a:lstStyle/>
-          <a:p>
-            <a:pPr algn="ctr"/>
+          <p:cNvPr id="7" name="TextBox 6"/>
+          <p:cNvSpPr txBox="1"/>
+          <p:nvPr/>
+        </p:nvSpPr>
+        <p:spPr>
+          <a:xfrm>
+            <a:off x="685800" y="1307592"/>
+            <a:ext cx="10820095" cy="256032"/>
+          </a:xfrm>
+          <a:prstGeom prst="rect">
+            <a:avLst/>
+          </a:prstGeom>
+          <a:noFill/>
+        </p:spPr>
+        <p:txBody>
+          <a:bodyPr wrap="square" anchor="ctr"/>
+          <a:lstStyle/>
+          <a:p>
+            <a:r>
+              <a:rPr sz="1000" b="1" i="0">
+                <a:solidFill>
+                  <a:srgbClr val="269CCB"/>
+                </a:solidFill>
+                <a:latin typeface="Calibri"/>
+              </a:rPr>
+              <a:t>● ● ●</a:t>
+            </a:r>
+          </a:p>
+        </p:txBody>
+      </p:sp>
+      <p:sp>
+        <p:nvSpPr>
+          <p:cNvPr id="8" name="TextBox 7"/>
+          <p:cNvSpPr txBox="1"/>
+          <p:nvPr/>
+        </p:nvSpPr>
+        <p:spPr>
+          <a:xfrm>
+            <a:off x="777240" y="1719072"/>
+            <a:ext cx="10637215" cy="4453128"/>
+          </a:xfrm>
+          <a:prstGeom prst="rect">
+            <a:avLst/>
+          </a:prstGeom>
+          <a:noFill/>
+        </p:spPr>
+        <p:txBody>
+          <a:bodyPr wrap="square">
+            <a:spAutoFit/>
+          </a:bodyPr>
+          <a:lstStyle/>
+          <a:p>
+            <a:pPr>
+              <a:spcAft>
+                <a:spcPts val="400"/>
+              </a:spcAft>
+            </a:pPr>
+            <a:r>
+              <a:rPr sz="1400" b="0" i="0">
+                <a:solidFill>
+                  <a:srgbClr val="FFFFFF"/>
+                </a:solidFill>
+                <a:latin typeface="Calibri"/>
+              </a:rPr>
+              <a:t># Prototipo de baja fidelidad</a:t>
+            </a:r>
+          </a:p>
+          <a:p>
+            <a:pPr>
+              <a:spcAft>
+                <a:spcPts val="400"/>
+              </a:spcAft>
+            </a:pPr>
+            <a:r>
+              <a:rPr sz="1400" b="0" i="0">
+                <a:solidFill>
+                  <a:srgbClr val="FFFFFF"/>
+                </a:solidFill>
+                <a:latin typeface="Calibri"/>
+              </a:rPr>
+              <a:t># Documento del equipo · un bloque por titulo, sin cambiar los nombres</a:t>
+            </a:r>
+          </a:p>
+          <a:p>
+            <a:pPr>
+              <a:spcAft>
+                <a:spcPts val="400"/>
+              </a:spcAft>
+            </a:pPr>
+            <a:r>
+              <a:rPr sz="1400" b="0" i="0">
+                <a:solidFill>
+                  <a:srgbClr val="FFFFFF"/>
+                </a:solidFill>
+                <a:latin typeface="Calibri"/>
+              </a:rPr>
+              <a:t/>
+            </a:r>
+          </a:p>
+          <a:p>
+            <a:pPr>
+              <a:spcAft>
+                <a:spcPts val="400"/>
+              </a:spcAft>
+            </a:pPr>
+            <a:r>
+              <a:rPr sz="1400" b="0" i="0">
+                <a:solidFill>
+                  <a:srgbClr val="FFFFFF"/>
+                </a:solidFill>
+                <a:latin typeface="Calibri"/>
+              </a:rPr>
+              <a:t>## 1. EL FLUJO EN TRES PASOS</a:t>
+            </a:r>
+          </a:p>
+          <a:p>
+            <a:pPr>
+              <a:spcAft>
+                <a:spcPts val="400"/>
+              </a:spcAft>
+            </a:pPr>
+            <a:r>
+              <a:rPr sz="1400" b="0" i="0">
+                <a:solidFill>
+                  <a:srgbClr val="FFFFFF"/>
+                </a:solidFill>
+                <a:latin typeface="Calibri"/>
+              </a:rPr>
+              <a:t>## 2. LAS TRES PANTALLAS DIBUJADAS</a:t>
+            </a:r>
+          </a:p>
+          <a:p>
+            <a:pPr>
+              <a:spcAft>
+                <a:spcPts val="400"/>
+              </a:spcAft>
+            </a:pPr>
+            <a:r>
+              <a:rPr sz="1400" b="0" i="0">
+                <a:solidFill>
+                  <a:srgbClr val="FFFFFF"/>
+                </a:solidFill>
+                <a:latin typeface="Calibri"/>
+              </a:rPr>
+              <a:t>## 3. EL ESTADO VACÍO Y EL DE ERROR</a:t>
+            </a:r>
+          </a:p>
+          <a:p>
+            <a:pPr>
+              <a:spcAft>
+                <a:spcPts val="400"/>
+              </a:spcAft>
+            </a:pPr>
+            <a:r>
+              <a:rPr sz="1400" b="0" i="0">
+                <a:solidFill>
+                  <a:srgbClr val="FFFFFF"/>
+                </a:solidFill>
+                <a:latin typeface="Calibri"/>
+              </a:rPr>
+              <a:t>## 4. LOS TEXTOS REALES</a:t>
+            </a:r>
+          </a:p>
+          <a:p>
+            <a:pPr>
+              <a:spcAft>
+                <a:spcPts val="400"/>
+              </a:spcAft>
+            </a:pPr>
+            <a:r>
+              <a:rPr sz="1400" b="0" i="0">
+                <a:solidFill>
+                  <a:srgbClr val="FFFFFF"/>
+                </a:solidFill>
+                <a:latin typeface="Calibri"/>
+              </a:rPr>
+              <a:t>## 5. EL GUION DE PRUEBA</a:t>
+            </a:r>
+          </a:p>
+          <a:p>
+            <a:pPr>
+              <a:spcAft>
+                <a:spcPts val="400"/>
+              </a:spcAft>
+            </a:pPr>
+            <a:r>
+              <a:rPr sz="1400" b="0" i="0">
+                <a:solidFill>
+                  <a:srgbClr val="FFFFFF"/>
+                </a:solidFill>
+                <a:latin typeface="Calibri"/>
+              </a:rPr>
+              <a:t/>
+            </a:r>
+          </a:p>
+          <a:p>
+            <a:pPr>
+              <a:spcAft>
+                <a:spcPts val="400"/>
+              </a:spcAft>
+            </a:pPr>
+            <a:r>
+              <a:rPr sz="1400" b="0" i="0">
+                <a:solidFill>
+                  <a:srgbClr val="FFFFFF"/>
+                </a:solidFill>
+                <a:latin typeface="Calibri"/>
+              </a:rPr>
+              <a:t># Los titulos van TAL CUAL: son con los que se califica.</a:t>
+            </a:r>
           </a:p>
         </p:txBody>
       </p:sp>
       <p:sp>
         <p:nvSpPr>
           <p:cNvPr id="9" name="TextBox 8"/>
-          <p:cNvSpPr txBox="1"/>
-          <p:nvPr/>
-        </p:nvSpPr>
-        <p:spPr>
-          <a:xfrm>
-            <a:off x="1097280" y="1563624"/>
-            <a:ext cx="10362895" cy="402336"/>
-          </a:xfrm>
-          <a:prstGeom prst="rect">
-            <a:avLst/>
-          </a:prstGeom>
-          <a:noFill/>
-        </p:spPr>
-        <p:txBody>
-          <a:bodyPr wrap="square" anchor="ctr"/>
-          <a:lstStyle/>
-          <a:p>
-            <a:r>
-              <a:rPr sz="1500" b="1" i="0">
-                <a:solidFill>
-                  <a:srgbClr val="333333"/>
-                </a:solidFill>
-                <a:latin typeface="Calibri"/>
-              </a:rPr>
-              <a:t>EL FLUJO EN TRES PASOS</a:t>
-            </a:r>
-            <a:r>
-              <a:rPr sz="1500" b="0" i="0">
-                <a:solidFill>
-                  <a:srgbClr val="333333"/>
-                </a:solidFill>
-                <a:latin typeface="Calibri"/>
-              </a:rPr>
-              <a:t> — El camino principal del alcance mínimo, en tres pantallas o tres pasos, y </a:t>
-            </a:r>
-            <a:r>
-              <a:rPr sz="1500" b="1" i="0">
-                <a:solidFill>
-                  <a:srgbClr val="333333"/>
-                </a:solidFill>
-                <a:latin typeface="Calibri"/>
-              </a:rPr>
-              <a:t>una frase de propósito por cada uno</a:t>
-            </a:r>
-            <a:r>
-              <a:rPr sz="1500" b="0" i="0">
-                <a:solidFill>
-                  <a:srgbClr val="333333"/>
-                </a:solidFill>
-                <a:latin typeface="Calibri"/>
-              </a:rPr>
-              <a:t>.</a:t>
-            </a:r>
-          </a:p>
-        </p:txBody>
-      </p:sp>
-      <p:sp>
-        <p:nvSpPr>
-          <p:cNvPr id="10" name="Rounded Rectangle 9"/>
-          <p:cNvSpPr/>
-          <p:nvPr/>
-        </p:nvSpPr>
-        <p:spPr>
-          <a:xfrm>
-            <a:off x="457200" y="2148839"/>
-            <a:ext cx="11277295" cy="566928"/>
-          </a:xfrm>
-          <a:prstGeom prst="roundRect">
-            <a:avLst>
-              <a:gd name="adj" fmla="val 12000"/>
-            </a:avLst>
-          </a:prstGeom>
-          <a:solidFill>
-            <a:srgbClr val="F2F2F2"/>
-          </a:solidFill>
-          <a:ln>
-            <a:noFill/>
-          </a:ln>
-        </p:spPr>
-        <p:style>
-          <a:lnRef idx="1">
-            <a:schemeClr val="accent1"/>
-          </a:lnRef>
-          <a:fillRef idx="3">
-            <a:schemeClr val="accent1"/>
-          </a:fillRef>
-          <a:effectRef idx="2">
-            <a:schemeClr val="accent1"/>
-          </a:effectRef>
-          <a:fontRef idx="minor">
-            <a:schemeClr val="lt1"/>
-          </a:fontRef>
-        </p:style>
-        <p:txBody>
-          <a:bodyPr rtlCol="0" anchor="ctr"/>
-          <a:lstStyle/>
-          <a:p>
-            <a:pPr algn="ctr"/>
-          </a:p>
-        </p:txBody>
-      </p:sp>
-      <p:sp>
-        <p:nvSpPr>
-          <p:cNvPr id="11" name="Rectangle 10"/>
-          <p:cNvSpPr/>
-          <p:nvPr/>
-        </p:nvSpPr>
-        <p:spPr>
-          <a:xfrm>
-            <a:off x="640080" y="2295144"/>
-            <a:ext cx="274320" cy="274320"/>
-          </a:xfrm>
-          <a:prstGeom prst="rect">
-            <a:avLst/>
-          </a:prstGeom>
-          <a:solidFill>
-            <a:srgbClr val="FFFFFF"/>
-          </a:solidFill>
-          <a:ln>
-            <a:solidFill>
-              <a:srgbClr val="333333"/>
-            </a:solidFill>
-          </a:ln>
-        </p:spPr>
-        <p:style>
-          <a:lnRef idx="1">
-            <a:schemeClr val="accent1"/>
-          </a:lnRef>
-          <a:fillRef idx="3">
-            <a:schemeClr val="accent1"/>
-          </a:fillRef>
-          <a:effectRef idx="2">
-            <a:schemeClr val="accent1"/>
-          </a:effectRef>
-          <a:fontRef idx="minor">
-            <a:schemeClr val="lt1"/>
-          </a:fontRef>
-        </p:style>
-        <p:txBody>
-          <a:bodyPr rtlCol="0" anchor="ctr"/>
-          <a:lstStyle/>
-          <a:p>
-            <a:pPr algn="ctr"/>
-          </a:p>
-        </p:txBody>
-      </p:sp>
-      <p:sp>
-        <p:nvSpPr>
-          <p:cNvPr id="12" name="Rectangle 11"/>
-          <p:cNvSpPr/>
-          <p:nvPr/>
-        </p:nvSpPr>
-        <p:spPr>
-          <a:xfrm>
-            <a:off x="640080" y="2295144"/>
-            <a:ext cx="73152" cy="274320"/>
-          </a:xfrm>
-          <a:prstGeom prst="rect">
-            <a:avLst/>
-          </a:prstGeom>
-          <a:solidFill>
-            <a:srgbClr val="269CCB"/>
-          </a:solidFill>
-          <a:ln>
-            <a:noFill/>
-          </a:ln>
-        </p:spPr>
-        <p:style>
-          <a:lnRef idx="1">
-            <a:schemeClr val="accent1"/>
-          </a:lnRef>
-          <a:fillRef idx="3">
-            <a:schemeClr val="accent1"/>
-          </a:fillRef>
-          <a:effectRef idx="2">
-            <a:schemeClr val="accent1"/>
-          </a:effectRef>
-          <a:fontRef idx="minor">
-            <a:schemeClr val="lt1"/>
-          </a:fontRef>
-        </p:style>
-        <p:txBody>
-          <a:bodyPr rtlCol="0" anchor="ctr"/>
-          <a:lstStyle/>
-          <a:p>
-            <a:pPr algn="ctr"/>
-          </a:p>
-        </p:txBody>
-      </p:sp>
-      <p:sp>
-        <p:nvSpPr>
-          <p:cNvPr id="13" name="TextBox 12"/>
-          <p:cNvSpPr txBox="1"/>
-          <p:nvPr/>
-        </p:nvSpPr>
-        <p:spPr>
-          <a:xfrm>
-            <a:off x="1097280" y="2240279"/>
-            <a:ext cx="10362895" cy="402336"/>
-          </a:xfrm>
-          <a:prstGeom prst="rect">
-            <a:avLst/>
-          </a:prstGeom>
-          <a:noFill/>
-        </p:spPr>
-        <p:txBody>
-          <a:bodyPr wrap="square" anchor="ctr"/>
-          <a:lstStyle/>
-          <a:p>
-            <a:r>
-              <a:rPr sz="1500" b="1" i="0">
-                <a:solidFill>
-                  <a:srgbClr val="333333"/>
-                </a:solidFill>
-                <a:latin typeface="Calibri"/>
-              </a:rPr>
-              <a:t>LAS TRES PANTALLAS DIBUJADAS</a:t>
-            </a:r>
-            <a:r>
-              <a:rPr sz="1500" b="0" i="0">
-                <a:solidFill>
-                  <a:srgbClr val="333333"/>
-                </a:solidFill>
-                <a:latin typeface="Calibri"/>
-              </a:rPr>
-              <a:t> — Las tres dibujadas de verdad, con el camino principal grande y primero, y una </a:t>
-            </a:r>
-            <a:r>
-              <a:rPr sz="1500" b="1" i="0">
-                <a:solidFill>
-                  <a:srgbClr val="333333"/>
-                </a:solidFill>
-                <a:latin typeface="Calibri"/>
-              </a:rPr>
-              <a:t>flecha con destino</a:t>
-            </a:r>
-            <a:r>
-              <a:rPr sz="1500" b="0" i="0">
-                <a:solidFill>
-                  <a:srgbClr val="333333"/>
-                </a:solidFill>
-                <a:latin typeface="Calibri"/>
-              </a:rPr>
-              <a:t> por cada botón.</a:t>
-            </a:r>
-          </a:p>
-        </p:txBody>
-      </p:sp>
-      <p:sp>
-        <p:nvSpPr>
-          <p:cNvPr id="14" name="Rounded Rectangle 13"/>
-          <p:cNvSpPr/>
-          <p:nvPr/>
-        </p:nvSpPr>
-        <p:spPr>
-          <a:xfrm>
-            <a:off x="457200" y="2825496"/>
-            <a:ext cx="11277295" cy="566928"/>
-          </a:xfrm>
-          <a:prstGeom prst="roundRect">
-            <a:avLst>
-              <a:gd name="adj" fmla="val 12000"/>
-            </a:avLst>
-          </a:prstGeom>
-          <a:solidFill>
-            <a:srgbClr val="F2F2F2"/>
-          </a:solidFill>
-          <a:ln>
-            <a:noFill/>
-          </a:ln>
-        </p:spPr>
-        <p:style>
-          <a:lnRef idx="1">
-            <a:schemeClr val="accent1"/>
-          </a:lnRef>
-          <a:fillRef idx="3">
-            <a:schemeClr val="accent1"/>
-          </a:fillRef>
-          <a:effectRef idx="2">
-            <a:schemeClr val="accent1"/>
-          </a:effectRef>
-          <a:fontRef idx="minor">
-            <a:schemeClr val="lt1"/>
-          </a:fontRef>
-        </p:style>
-        <p:txBody>
-          <a:bodyPr rtlCol="0" anchor="ctr"/>
-          <a:lstStyle/>
-          <a:p>
-            <a:pPr algn="ctr"/>
-          </a:p>
-        </p:txBody>
-      </p:sp>
-      <p:sp>
-        <p:nvSpPr>
-          <p:cNvPr id="15" name="Rectangle 14"/>
-          <p:cNvSpPr/>
-          <p:nvPr/>
-        </p:nvSpPr>
-        <p:spPr>
-          <a:xfrm>
-            <a:off x="640080" y="2971800"/>
-            <a:ext cx="274320" cy="274320"/>
-          </a:xfrm>
-          <a:prstGeom prst="rect">
-            <a:avLst/>
-          </a:prstGeom>
-          <a:solidFill>
-            <a:srgbClr val="FFFFFF"/>
-          </a:solidFill>
-          <a:ln>
-            <a:solidFill>
-              <a:srgbClr val="333333"/>
-            </a:solidFill>
-          </a:ln>
-        </p:spPr>
-        <p:style>
-          <a:lnRef idx="1">
-            <a:schemeClr val="accent1"/>
-          </a:lnRef>
-          <a:fillRef idx="3">
-            <a:schemeClr val="accent1"/>
-          </a:fillRef>
-          <a:effectRef idx="2">
-            <a:schemeClr val="accent1"/>
-          </a:effectRef>
-          <a:fontRef idx="minor">
-            <a:schemeClr val="lt1"/>
-          </a:fontRef>
-        </p:style>
-        <p:txBody>
-          <a:bodyPr rtlCol="0" anchor="ctr"/>
-          <a:lstStyle/>
-          <a:p>
-            <a:pPr algn="ctr"/>
-          </a:p>
-        </p:txBody>
-      </p:sp>
-      <p:sp>
-        <p:nvSpPr>
-          <p:cNvPr id="16" name="Rectangle 15"/>
-          <p:cNvSpPr/>
-          <p:nvPr/>
-        </p:nvSpPr>
-        <p:spPr>
-          <a:xfrm>
-            <a:off x="640080" y="2971800"/>
-            <a:ext cx="73152" cy="274320"/>
-          </a:xfrm>
-          <a:prstGeom prst="rect">
-            <a:avLst/>
-          </a:prstGeom>
-          <a:solidFill>
-            <a:srgbClr val="269CCB"/>
-          </a:solidFill>
-          <a:ln>
-            <a:noFill/>
-          </a:ln>
-        </p:spPr>
-        <p:style>
-          <a:lnRef idx="1">
-            <a:schemeClr val="accent1"/>
-          </a:lnRef>
-          <a:fillRef idx="3">
-            <a:schemeClr val="accent1"/>
-          </a:fillRef>
-          <a:effectRef idx="2">
-            <a:schemeClr val="accent1"/>
-          </a:effectRef>
-          <a:fontRef idx="minor">
-            <a:schemeClr val="lt1"/>
-          </a:fontRef>
-        </p:style>
-        <p:txBody>
-          <a:bodyPr rtlCol="0" anchor="ctr"/>
-          <a:lstStyle/>
-          <a:p>
-            <a:pPr algn="ctr"/>
-          </a:p>
-        </p:txBody>
-      </p:sp>
-      <p:sp>
-        <p:nvSpPr>
-          <p:cNvPr id="17" name="TextBox 16"/>
-          <p:cNvSpPr txBox="1"/>
-          <p:nvPr/>
-        </p:nvSpPr>
-        <p:spPr>
-          <a:xfrm>
-            <a:off x="1097280" y="2916936"/>
-            <a:ext cx="10362895" cy="402336"/>
-          </a:xfrm>
-          <a:prstGeom prst="rect">
-            <a:avLst/>
-          </a:prstGeom>
-          <a:noFill/>
-        </p:spPr>
-        <p:txBody>
-          <a:bodyPr wrap="square" anchor="ctr"/>
-          <a:lstStyle/>
-          <a:p>
-            <a:r>
-              <a:rPr sz="1500" b="1" i="0">
-                <a:solidFill>
-                  <a:srgbClr val="333333"/>
-                </a:solidFill>
-                <a:latin typeface="Calibri"/>
-              </a:rPr>
-              <a:t>EL ESTADO VACÍO Y EL DE ERROR</a:t>
-            </a:r>
-            <a:r>
-              <a:rPr sz="1500" b="0" i="0">
-                <a:solidFill>
-                  <a:srgbClr val="333333"/>
-                </a:solidFill>
-                <a:latin typeface="Calibri"/>
-              </a:rPr>
-              <a:t> — Qué se ve la primera vez sin datos, qué se ve cuando la búsqueda no encuentra nada, y qué se ve cuando algo falla. </a:t>
-            </a:r>
-            <a:r>
-              <a:rPr sz="1500" b="1" i="0">
-                <a:solidFill>
-                  <a:srgbClr val="333333"/>
-                </a:solidFill>
-                <a:latin typeface="Calibri"/>
-              </a:rPr>
-              <a:t>Con el texto exacto del mensaje.</a:t>
-            </a:r>
-          </a:p>
-        </p:txBody>
-      </p:sp>
-      <p:sp>
-        <p:nvSpPr>
-          <p:cNvPr id="18" name="Rounded Rectangle 17"/>
-          <p:cNvSpPr/>
-          <p:nvPr/>
-        </p:nvSpPr>
-        <p:spPr>
-          <a:xfrm>
-            <a:off x="457200" y="3502152"/>
-            <a:ext cx="11277295" cy="566928"/>
-          </a:xfrm>
-          <a:prstGeom prst="roundRect">
-            <a:avLst>
-              <a:gd name="adj" fmla="val 12000"/>
-            </a:avLst>
-          </a:prstGeom>
-          <a:solidFill>
-            <a:srgbClr val="F2F2F2"/>
-          </a:solidFill>
-          <a:ln>
-            <a:noFill/>
-          </a:ln>
-        </p:spPr>
-        <p:style>
-          <a:lnRef idx="1">
-            <a:schemeClr val="accent1"/>
-          </a:lnRef>
-          <a:fillRef idx="3">
-            <a:schemeClr val="accent1"/>
-          </a:fillRef>
-          <a:effectRef idx="2">
-            <a:schemeClr val="accent1"/>
-          </a:effectRef>
-          <a:fontRef idx="minor">
-            <a:schemeClr val="lt1"/>
-          </a:fontRef>
-        </p:style>
-        <p:txBody>
-          <a:bodyPr rtlCol="0" anchor="ctr"/>
-          <a:lstStyle/>
-          <a:p>
-            <a:pPr algn="ctr"/>
-          </a:p>
-        </p:txBody>
-      </p:sp>
-      <p:sp>
-        <p:nvSpPr>
-          <p:cNvPr id="19" name="Rectangle 18"/>
-          <p:cNvSpPr/>
-          <p:nvPr/>
-        </p:nvSpPr>
-        <p:spPr>
-          <a:xfrm>
-            <a:off x="640080" y="3648456"/>
-            <a:ext cx="274320" cy="274320"/>
-          </a:xfrm>
-          <a:prstGeom prst="rect">
-            <a:avLst/>
-          </a:prstGeom>
-          <a:solidFill>
-            <a:srgbClr val="FFFFFF"/>
-          </a:solidFill>
-          <a:ln>
-            <a:solidFill>
-              <a:srgbClr val="333333"/>
-            </a:solidFill>
-          </a:ln>
-        </p:spPr>
-        <p:style>
-          <a:lnRef idx="1">
-            <a:schemeClr val="accent1"/>
-          </a:lnRef>
-          <a:fillRef idx="3">
-            <a:schemeClr val="accent1"/>
-          </a:fillRef>
-          <a:effectRef idx="2">
-            <a:schemeClr val="accent1"/>
-          </a:effectRef>
-          <a:fontRef idx="minor">
-            <a:schemeClr val="lt1"/>
-          </a:fontRef>
-        </p:style>
-        <p:txBody>
-          <a:bodyPr rtlCol="0" anchor="ctr"/>
-          <a:lstStyle/>
-          <a:p>
-            <a:pPr algn="ctr"/>
-          </a:p>
-        </p:txBody>
-      </p:sp>
-      <p:sp>
-        <p:nvSpPr>
-          <p:cNvPr id="20" name="Rectangle 19"/>
-          <p:cNvSpPr/>
-          <p:nvPr/>
-        </p:nvSpPr>
-        <p:spPr>
-          <a:xfrm>
-            <a:off x="640080" y="3648456"/>
-            <a:ext cx="73152" cy="274320"/>
-          </a:xfrm>
-          <a:prstGeom prst="rect">
-            <a:avLst/>
-          </a:prstGeom>
-          <a:solidFill>
-            <a:srgbClr val="269CCB"/>
-          </a:solidFill>
-          <a:ln>
-            <a:noFill/>
-          </a:ln>
-        </p:spPr>
-        <p:style>
-          <a:lnRef idx="1">
-            <a:schemeClr val="accent1"/>
-          </a:lnRef>
-          <a:fillRef idx="3">
-            <a:schemeClr val="accent1"/>
-          </a:fillRef>
-          <a:effectRef idx="2">
-            <a:schemeClr val="accent1"/>
-          </a:effectRef>
-          <a:fontRef idx="minor">
-            <a:schemeClr val="lt1"/>
-          </a:fontRef>
-        </p:style>
-        <p:txBody>
-          <a:bodyPr rtlCol="0" anchor="ctr"/>
-          <a:lstStyle/>
-          <a:p>
-            <a:pPr algn="ctr"/>
-          </a:p>
-        </p:txBody>
-      </p:sp>
-      <p:sp>
-        <p:nvSpPr>
-          <p:cNvPr id="21" name="TextBox 20"/>
-          <p:cNvSpPr txBox="1"/>
-          <p:nvPr/>
-        </p:nvSpPr>
-        <p:spPr>
-          <a:xfrm>
-            <a:off x="1097280" y="3593592"/>
-            <a:ext cx="10362895" cy="402336"/>
-          </a:xfrm>
-          <a:prstGeom prst="rect">
-            <a:avLst/>
-          </a:prstGeom>
-          <a:noFill/>
-        </p:spPr>
-        <p:txBody>
-          <a:bodyPr wrap="square" anchor="ctr"/>
-          <a:lstStyle/>
-          <a:p>
-            <a:r>
-              <a:rPr sz="1500" b="1" i="0">
-                <a:solidFill>
-                  <a:srgbClr val="333333"/>
-                </a:solidFill>
-                <a:latin typeface="Calibri"/>
-              </a:rPr>
-              <a:t>LOS TEXTOS REALES</a:t>
-            </a:r>
-            <a:r>
-              <a:rPr sz="1500" b="0" i="0">
-                <a:solidFill>
-                  <a:srgbClr val="333333"/>
-                </a:solidFill>
-                <a:latin typeface="Calibri"/>
-              </a:rPr>
-              <a:t> — Todos los rótulos y mensajes escritos como van a quedar. </a:t>
-            </a:r>
-            <a:r>
-              <a:rPr sz="1500" b="1" i="0">
-                <a:solidFill>
-                  <a:srgbClr val="333333"/>
-                </a:solidFill>
-                <a:latin typeface="Calibri"/>
-              </a:rPr>
-              <a:t>Cero relleno</a:t>
-            </a:r>
-            <a:r>
-              <a:rPr sz="1500" b="0" i="0">
-                <a:solidFill>
-                  <a:srgbClr val="333333"/>
-                </a:solidFill>
-                <a:latin typeface="Calibri"/>
-              </a:rPr>
-              <a:t>, cero «texto aquí», cero «lorem ipsum».</a:t>
-            </a:r>
-          </a:p>
-        </p:txBody>
-      </p:sp>
-      <p:sp>
-        <p:nvSpPr>
-          <p:cNvPr id="22" name="Rounded Rectangle 21"/>
-          <p:cNvSpPr/>
-          <p:nvPr/>
-        </p:nvSpPr>
-        <p:spPr>
-          <a:xfrm>
-            <a:off x="457200" y="4178808"/>
-            <a:ext cx="11277295" cy="566928"/>
-          </a:xfrm>
-          <a:prstGeom prst="roundRect">
-            <a:avLst>
-              <a:gd name="adj" fmla="val 12000"/>
-            </a:avLst>
-          </a:prstGeom>
-          <a:solidFill>
-            <a:srgbClr val="F2F2F2"/>
-          </a:solidFill>
-          <a:ln>
-            <a:noFill/>
-          </a:ln>
-        </p:spPr>
-        <p:style>
-          <a:lnRef idx="1">
-            <a:schemeClr val="accent1"/>
-          </a:lnRef>
-          <a:fillRef idx="3">
-            <a:schemeClr val="accent1"/>
-          </a:fillRef>
-          <a:effectRef idx="2">
-            <a:schemeClr val="accent1"/>
-          </a:effectRef>
-          <a:fontRef idx="minor">
-            <a:schemeClr val="lt1"/>
-          </a:fontRef>
-        </p:style>
-        <p:txBody>
-          <a:bodyPr rtlCol="0" anchor="ctr"/>
-          <a:lstStyle/>
-          <a:p>
-            <a:pPr algn="ctr"/>
-          </a:p>
-        </p:txBody>
-      </p:sp>
-      <p:sp>
-        <p:nvSpPr>
-          <p:cNvPr id="23" name="Rectangle 22"/>
-          <p:cNvSpPr/>
-          <p:nvPr/>
-        </p:nvSpPr>
-        <p:spPr>
-          <a:xfrm>
-            <a:off x="640080" y="4325112"/>
-            <a:ext cx="274320" cy="274320"/>
-          </a:xfrm>
-          <a:prstGeom prst="rect">
-            <a:avLst/>
-          </a:prstGeom>
-          <a:solidFill>
-            <a:srgbClr val="FFFFFF"/>
-          </a:solidFill>
-          <a:ln>
-            <a:solidFill>
-              <a:srgbClr val="333333"/>
-            </a:solidFill>
-          </a:ln>
-        </p:spPr>
-        <p:style>
-          <a:lnRef idx="1">
-            <a:schemeClr val="accent1"/>
-          </a:lnRef>
-          <a:fillRef idx="3">
-            <a:schemeClr val="accent1"/>
-          </a:fillRef>
-          <a:effectRef idx="2">
-            <a:schemeClr val="accent1"/>
-          </a:effectRef>
-          <a:fontRef idx="minor">
-            <a:schemeClr val="lt1"/>
-          </a:fontRef>
-        </p:style>
-        <p:txBody>
-          <a:bodyPr rtlCol="0" anchor="ctr"/>
-          <a:lstStyle/>
-          <a:p>
-            <a:pPr algn="ctr"/>
-          </a:p>
-        </p:txBody>
-      </p:sp>
-      <p:sp>
-        <p:nvSpPr>
-          <p:cNvPr id="24" name="Rectangle 23"/>
-          <p:cNvSpPr/>
-          <p:nvPr/>
-        </p:nvSpPr>
-        <p:spPr>
-          <a:xfrm>
-            <a:off x="640080" y="4325112"/>
-            <a:ext cx="73152" cy="274320"/>
-          </a:xfrm>
-          <a:prstGeom prst="rect">
-            <a:avLst/>
-          </a:prstGeom>
-          <a:solidFill>
-            <a:srgbClr val="269CCB"/>
-          </a:solidFill>
-          <a:ln>
-            <a:noFill/>
-          </a:ln>
-        </p:spPr>
-        <p:style>
-          <a:lnRef idx="1">
-            <a:schemeClr val="accent1"/>
-          </a:lnRef>
-          <a:fillRef idx="3">
-            <a:schemeClr val="accent1"/>
-          </a:fillRef>
-          <a:effectRef idx="2">
-            <a:schemeClr val="accent1"/>
-          </a:effectRef>
-          <a:fontRef idx="minor">
-            <a:schemeClr val="lt1"/>
-          </a:fontRef>
-        </p:style>
-        <p:txBody>
-          <a:bodyPr rtlCol="0" anchor="ctr"/>
-          <a:lstStyle/>
-          <a:p>
-            <a:pPr algn="ctr"/>
-          </a:p>
-        </p:txBody>
-      </p:sp>
-      <p:sp>
-        <p:nvSpPr>
-          <p:cNvPr id="25" name="TextBox 24"/>
-          <p:cNvSpPr txBox="1"/>
-          <p:nvPr/>
-        </p:nvSpPr>
-        <p:spPr>
-          <a:xfrm>
-            <a:off x="1097280" y="4270248"/>
-            <a:ext cx="10362895" cy="402336"/>
-          </a:xfrm>
-          <a:prstGeom prst="rect">
-            <a:avLst/>
-          </a:prstGeom>
-          <a:noFill/>
-        </p:spPr>
-        <p:txBody>
-          <a:bodyPr wrap="square" anchor="ctr"/>
-          <a:lstStyle/>
-          <a:p>
-            <a:r>
-              <a:rPr sz="1500" b="1" i="0">
-                <a:solidFill>
-                  <a:srgbClr val="333333"/>
-                </a:solidFill>
-                <a:latin typeface="Calibri"/>
-              </a:rPr>
-              <a:t>EL GUION DE PRUEBA</a:t>
-            </a:r>
-            <a:r>
-              <a:rPr sz="1500" b="0" i="0">
-                <a:solidFill>
-                  <a:srgbClr val="333333"/>
-                </a:solidFill>
-                <a:latin typeface="Calibri"/>
-              </a:rPr>
-              <a:t> — Tres tareas para pedirle a una persona ajena, salidas de los </a:t>
-            </a:r>
-            <a:r>
-              <a:rPr sz="1500" b="1" i="0">
-                <a:solidFill>
-                  <a:srgbClr val="333333"/>
-                </a:solidFill>
-                <a:latin typeface="Calibri"/>
-              </a:rPr>
-              <a:t>criterios de aceptación de la sesión 7</a:t>
-            </a:r>
-            <a:r>
-              <a:rPr sz="1500" b="0" i="0">
-                <a:solidFill>
-                  <a:srgbClr val="333333"/>
-                </a:solidFill>
-                <a:latin typeface="Calibri"/>
-              </a:rPr>
-              <a:t>, y una de ellas sobre el caso en que el sistema </a:t>
-            </a:r>
-            <a:r>
-              <a:rPr sz="1500" b="1" i="0">
-                <a:solidFill>
-                  <a:srgbClr val="333333"/>
-                </a:solidFill>
-                <a:latin typeface="Calibri"/>
-              </a:rPr>
-              <a:t>no</a:t>
-            </a:r>
-            <a:r>
-              <a:rPr sz="1500" b="0" i="0">
-                <a:solidFill>
-                  <a:srgbClr val="333333"/>
-                </a:solidFill>
-                <a:latin typeface="Calibri"/>
-              </a:rPr>
-              <a:t> tiene la respuesta.</a:t>
-            </a:r>
-          </a:p>
-        </p:txBody>
-      </p:sp>
-      <p:sp>
-        <p:nvSpPr>
-          <p:cNvPr id="26" name="TextBox 25"/>
           <p:cNvSpPr txBox="1"/>
           <p:nvPr/>
         </p:nvSpPr>
@@ -9164,7 +8466,7 @@
         <p:spPr>
           <a:xfrm>
             <a:off x="0" y="0"/>
-            <a:ext cx="12191695" cy="1170432"/>
+            <a:ext cx="12191695" cy="960120"/>
           </a:xfrm>
           <a:prstGeom prst="rect">
             <a:avLst/>
@@ -9206,7 +8508,7 @@
         </p:nvSpPr>
         <p:spPr>
           <a:xfrm>
-            <a:off x="0" y="1170432"/>
+            <a:off x="0" y="960120"/>
             <a:ext cx="12191695" cy="41148"/>
           </a:xfrm>
           <a:prstGeom prst="rect">
@@ -9250,7 +8552,7 @@
         <p:spPr>
           <a:xfrm>
             <a:off x="457200" y="164592"/>
-            <a:ext cx="11277295" cy="384048"/>
+            <a:ext cx="11277295" cy="502920"/>
           </a:xfrm>
           <a:prstGeom prst="rect">
             <a:avLst/>
@@ -9270,55 +8572,21 @@
                 </a:solidFill>
                 <a:latin typeface="Calibri"/>
               </a:rPr>
-              <a:t>Cómo se expone en 3 minutos</a:t>
-            </a:r>
-          </a:p>
-        </p:txBody>
-      </p:sp>
-      <p:sp>
-        <p:nvSpPr>
-          <p:cNvPr id="5" name="TextBox 4"/>
-          <p:cNvSpPr txBox="1"/>
-          <p:nvPr/>
-        </p:nvSpPr>
-        <p:spPr>
-          <a:xfrm>
-            <a:off x="457200" y="566928"/>
-            <a:ext cx="11277295" cy="411480"/>
-          </a:xfrm>
-          <a:prstGeom prst="rect">
-            <a:avLst/>
-          </a:prstGeom>
-          <a:noFill/>
-        </p:spPr>
-        <p:txBody>
-          <a:bodyPr wrap="square">
-            <a:spAutoFit/>
-          </a:bodyPr>
-          <a:lstStyle/>
-          <a:p>
-            <a:r>
-              <a:rPr sz="1400" b="0" i="0">
-                <a:solidFill>
-                  <a:srgbClr val="B8D8EE"/>
-                </a:solidFill>
-                <a:latin typeface="Calibri"/>
-              </a:rPr>
-              <a:t>Habla el vocero con la pantalla ya compartida · cronómetro en pantalla · se corta al llegar a cero</a:t>
-            </a:r>
-          </a:p>
-        </p:txBody>
-      </p:sp>
-      <p:sp>
-        <p:nvSpPr>
-          <p:cNvPr id="6" name="Rounded Rectangle 5"/>
+              <a:t>Guion de la exposicion, con tiempos</a:t>
+            </a:r>
+          </a:p>
+        </p:txBody>
+      </p:sp>
+      <p:sp>
+        <p:nvSpPr>
+          <p:cNvPr id="5" name="Rounded Rectangle 4"/>
           <p:cNvSpPr/>
           <p:nvPr/>
         </p:nvSpPr>
         <p:spPr>
           <a:xfrm>
-            <a:off x="457200" y="1444752"/>
-            <a:ext cx="11277295" cy="908913"/>
+            <a:off x="457200" y="1261872"/>
+            <a:ext cx="11277295" cy="5093208"/>
           </a:xfrm>
           <a:prstGeom prst="roundRect">
             <a:avLst>
@@ -9326,7 +8594,7 @@
             </a:avLst>
           </a:prstGeom>
           <a:solidFill>
-            <a:srgbClr val="F2F2F2"/>
+            <a:srgbClr val="1E2A38"/>
           </a:solidFill>
           <a:ln>
             <a:noFill/>
@@ -9356,19 +8624,17 @@
       </p:sp>
       <p:sp>
         <p:nvSpPr>
-          <p:cNvPr id="7" name="Rounded Rectangle 6"/>
+          <p:cNvPr id="6" name="Rectangle 5"/>
           <p:cNvSpPr/>
           <p:nvPr/>
         </p:nvSpPr>
         <p:spPr>
           <a:xfrm>
-            <a:off x="594360" y="1679752"/>
-            <a:ext cx="438912" cy="438912"/>
-          </a:xfrm>
-          <a:prstGeom prst="roundRect">
-            <a:avLst>
-              <a:gd name="adj" fmla="val 12000"/>
-            </a:avLst>
+            <a:off x="457200" y="1261872"/>
+            <a:ext cx="11277295" cy="320040"/>
+          </a:xfrm>
+          <a:prstGeom prst="rect">
+            <a:avLst/>
           </a:prstGeom>
           <a:solidFill>
             <a:srgbClr val="095292"/>
@@ -9401,14 +8667,46 @@
       </p:sp>
       <p:sp>
         <p:nvSpPr>
+          <p:cNvPr id="7" name="TextBox 6"/>
+          <p:cNvSpPr txBox="1"/>
+          <p:nvPr/>
+        </p:nvSpPr>
+        <p:spPr>
+          <a:xfrm>
+            <a:off x="685800" y="1307592"/>
+            <a:ext cx="10820095" cy="256032"/>
+          </a:xfrm>
+          <a:prstGeom prst="rect">
+            <a:avLst/>
+          </a:prstGeom>
+          <a:noFill/>
+        </p:spPr>
+        <p:txBody>
+          <a:bodyPr wrap="square" anchor="ctr"/>
+          <a:lstStyle/>
+          <a:p>
+            <a:r>
+              <a:rPr sz="1000" b="1" i="0">
+                <a:solidFill>
+                  <a:srgbClr val="269CCB"/>
+                </a:solidFill>
+                <a:latin typeface="Calibri"/>
+              </a:rPr>
+              <a:t>● ● ●</a:t>
+            </a:r>
+          </a:p>
+        </p:txBody>
+      </p:sp>
+      <p:sp>
+        <p:nvSpPr>
           <p:cNvPr id="8" name="TextBox 7"/>
           <p:cNvSpPr txBox="1"/>
           <p:nvPr/>
         </p:nvSpPr>
         <p:spPr>
           <a:xfrm>
-            <a:off x="594360" y="1679752"/>
-            <a:ext cx="438912" cy="438912"/>
+            <a:off x="777240" y="1719072"/>
+            <a:ext cx="10637215" cy="4453128"/>
           </a:xfrm>
           <a:prstGeom prst="rect">
             <a:avLst/>
@@ -9416,18 +8714,168 @@
           <a:noFill/>
         </p:spPr>
         <p:txBody>
-          <a:bodyPr wrap="square" anchor="ctr"/>
-          <a:lstStyle/>
-          <a:p>
-            <a:pPr algn="ctr"/>
-            <a:r>
-              <a:rPr sz="1600" b="1" i="0">
+          <a:bodyPr wrap="square">
+            <a:spAutoFit/>
+          </a:bodyPr>
+          <a:lstStyle/>
+          <a:p>
+            <a:pPr>
+              <a:spcAft>
+                <a:spcPts val="400"/>
+              </a:spcAft>
+            </a:pPr>
+            <a:r>
+              <a:rPr sz="1400" b="0" i="0">
                 <a:solidFill>
                   <a:srgbClr val="FFFFFF"/>
                 </a:solidFill>
                 <a:latin typeface="Calibri"/>
               </a:rPr>
-              <a:t>1</a:t>
+              <a:t># Exposicion de hoy · lo que se califica es el reparto, no el total</a:t>
+            </a:r>
+          </a:p>
+          <a:p>
+            <a:pPr>
+              <a:spcAft>
+                <a:spcPts val="400"/>
+              </a:spcAft>
+            </a:pPr>
+            <a:r>
+              <a:rPr sz="1400" b="0" i="0">
+                <a:solidFill>
+                  <a:srgbClr val="FFFFFF"/>
+                </a:solidFill>
+                <a:latin typeface="Calibri"/>
+              </a:rPr>
+              <a:t/>
+            </a:r>
+          </a:p>
+          <a:p>
+            <a:pPr>
+              <a:spcAft>
+                <a:spcPts val="400"/>
+              </a:spcAft>
+            </a:pPr>
+            <a:r>
+              <a:rPr sz="1400" b="0" i="0">
+                <a:solidFill>
+                  <a:srgbClr val="FFFFFF"/>
+                </a:solidFill>
+                <a:latin typeface="Calibri"/>
+              </a:rPr>
+              <a:t>30 s · El flujo                    Los tres pasos y para qué existe cada pantal</a:t>
+            </a:r>
+          </a:p>
+          <a:p>
+            <a:pPr>
+              <a:spcAft>
+                <a:spcPts val="400"/>
+              </a:spcAft>
+            </a:pPr>
+            <a:r>
+              <a:rPr sz="1400" b="0" i="0">
+                <a:solidFill>
+                  <a:srgbClr val="FFFFFF"/>
+                </a:solidFill>
+                <a:latin typeface="Calibri"/>
+              </a:rPr>
+              <a:t>50 s · El camino principal         Qué hace el usuario el 90 % de las veces, se</a:t>
+            </a:r>
+          </a:p>
+          <a:p>
+            <a:pPr>
+              <a:spcAft>
+                <a:spcPts val="400"/>
+              </a:spcAft>
+            </a:pPr>
+            <a:r>
+              <a:rPr sz="1400" b="0" i="0">
+                <a:solidFill>
+                  <a:srgbClr val="FFFFFF"/>
+                </a:solidFill>
+                <a:latin typeface="Calibri"/>
+              </a:rPr>
+              <a:t>50 s · Qué se ve cuando falla      Estado vacío y de error, con el mensaje leíd</a:t>
+            </a:r>
+          </a:p>
+          <a:p>
+            <a:pPr>
+              <a:spcAft>
+                <a:spcPts val="400"/>
+              </a:spcAft>
+            </a:pPr>
+            <a:r>
+              <a:rPr sz="1400" b="0" i="0">
+                <a:solidFill>
+                  <a:srgbClr val="FFFFFF"/>
+                </a:solidFill>
+                <a:latin typeface="Calibri"/>
+              </a:rPr>
+              <a:t>30 s · Los textos                  Dos rótulos que costó decidir y por qué qued</a:t>
+            </a:r>
+          </a:p>
+          <a:p>
+            <a:pPr>
+              <a:spcAft>
+                <a:spcPts val="400"/>
+              </a:spcAft>
+            </a:pPr>
+            <a:r>
+              <a:rPr sz="1400" b="0" i="0">
+                <a:solidFill>
+                  <a:srgbClr val="FFFFFF"/>
+                </a:solidFill>
+                <a:latin typeface="Calibri"/>
+              </a:rPr>
+              <a:t>20 s · El guion de prueba          Las tres tareas, y con qué rol van a probar.</a:t>
+            </a:r>
+          </a:p>
+          <a:p>
+            <a:pPr>
+              <a:spcAft>
+                <a:spcPts val="400"/>
+              </a:spcAft>
+            </a:pPr>
+            <a:r>
+              <a:rPr sz="1400" b="0" i="0">
+                <a:solidFill>
+                  <a:srgbClr val="FFFFFF"/>
+                </a:solidFill>
+                <a:latin typeface="Calibri"/>
+              </a:rPr>
+              <a:t/>
+            </a:r>
+          </a:p>
+          <a:p>
+            <a:pPr>
+              <a:spcAft>
+                <a:spcPts val="400"/>
+              </a:spcAft>
+            </a:pPr>
+            <a:r>
+              <a:rPr sz="1400" b="0" i="0">
+                <a:solidFill>
+                  <a:srgbClr val="FFFFFF"/>
+                </a:solidFill>
+                <a:latin typeface="Calibri"/>
+              </a:rPr>
+              <a:t># El tramo marcado como obligatorio es el que el jurado califica:</a:t>
+            </a:r>
+          </a:p>
+          <a:p>
+            <a:pPr>
+              <a:spcAft>
+                <a:spcPts val="400"/>
+              </a:spcAft>
+            </a:pPr>
+            <a:r>
+              <a:rPr sz="1400" b="0" i="0">
+                <a:solidFill>
+                  <a:srgbClr val="FFFFFF"/>
+                </a:solidFill>
+                <a:latin typeface="Calibri"/>
+              </a:rPr>
+              <a:t># si el guion no esta cronometrado, es el que se queda sin tiempo.</a:t>
             </a:r>
           </a:p>
         </p:txBody>
@@ -9435,738 +8883,6 @@
       <p:sp>
         <p:nvSpPr>
           <p:cNvPr id="9" name="TextBox 8"/>
-          <p:cNvSpPr txBox="1"/>
-          <p:nvPr/>
-        </p:nvSpPr>
-        <p:spPr>
-          <a:xfrm>
-            <a:off x="1188720" y="1536192"/>
-            <a:ext cx="10271455" cy="744321"/>
-          </a:xfrm>
-          <a:prstGeom prst="rect">
-            <a:avLst/>
-          </a:prstGeom>
-          <a:noFill/>
-        </p:spPr>
-        <p:txBody>
-          <a:bodyPr wrap="square" anchor="ctr"/>
-          <a:lstStyle/>
-          <a:p>
-            <a:r>
-              <a:rPr sz="1500" b="1" i="0">
-                <a:solidFill>
-                  <a:srgbClr val="095292"/>
-                </a:solidFill>
-                <a:latin typeface="Calibri"/>
-              </a:rPr>
-              <a:t>30 s · El flujo</a:t>
-            </a:r>
-          </a:p>
-          <a:p>
-            <a:pPr>
-              <a:spcBef>
-                <a:spcPts val="200"/>
-              </a:spcBef>
-            </a:pPr>
-            <a:r>
-              <a:rPr sz="1300" b="0" i="0">
-                <a:solidFill>
-                  <a:srgbClr val="333333"/>
-                </a:solidFill>
-                <a:latin typeface="Calibri"/>
-              </a:rPr>
-              <a:t>Los tres pasos y para qué existe cada pantalla.</a:t>
-            </a:r>
-          </a:p>
-        </p:txBody>
-      </p:sp>
-      <p:sp>
-        <p:nvSpPr>
-          <p:cNvPr id="10" name="Rounded Rectangle 9"/>
-          <p:cNvSpPr/>
-          <p:nvPr/>
-        </p:nvSpPr>
-        <p:spPr>
-          <a:xfrm>
-            <a:off x="457200" y="2445105"/>
-            <a:ext cx="11277295" cy="908913"/>
-          </a:xfrm>
-          <a:prstGeom prst="roundRect">
-            <a:avLst>
-              <a:gd name="adj" fmla="val 12000"/>
-            </a:avLst>
-          </a:prstGeom>
-          <a:solidFill>
-            <a:srgbClr val="E8F4FA"/>
-          </a:solidFill>
-          <a:ln>
-            <a:noFill/>
-          </a:ln>
-        </p:spPr>
-        <p:style>
-          <a:lnRef idx="1">
-            <a:schemeClr val="accent1"/>
-          </a:lnRef>
-          <a:fillRef idx="3">
-            <a:schemeClr val="accent1"/>
-          </a:fillRef>
-          <a:effectRef idx="2">
-            <a:schemeClr val="accent1"/>
-          </a:effectRef>
-          <a:fontRef idx="minor">
-            <a:schemeClr val="lt1"/>
-          </a:fontRef>
-        </p:style>
-        <p:txBody>
-          <a:bodyPr rtlCol="0" anchor="ctr"/>
-          <a:lstStyle/>
-          <a:p>
-            <a:pPr algn="ctr"/>
-          </a:p>
-        </p:txBody>
-      </p:sp>
-      <p:sp>
-        <p:nvSpPr>
-          <p:cNvPr id="11" name="Rounded Rectangle 10"/>
-          <p:cNvSpPr/>
-          <p:nvPr/>
-        </p:nvSpPr>
-        <p:spPr>
-          <a:xfrm>
-            <a:off x="594360" y="2680106"/>
-            <a:ext cx="438912" cy="438912"/>
-          </a:xfrm>
-          <a:prstGeom prst="roundRect">
-            <a:avLst>
-              <a:gd name="adj" fmla="val 12000"/>
-            </a:avLst>
-          </a:prstGeom>
-          <a:solidFill>
-            <a:srgbClr val="095292"/>
-          </a:solidFill>
-          <a:ln>
-            <a:noFill/>
-          </a:ln>
-        </p:spPr>
-        <p:style>
-          <a:lnRef idx="1">
-            <a:schemeClr val="accent1"/>
-          </a:lnRef>
-          <a:fillRef idx="3">
-            <a:schemeClr val="accent1"/>
-          </a:fillRef>
-          <a:effectRef idx="2">
-            <a:schemeClr val="accent1"/>
-          </a:effectRef>
-          <a:fontRef idx="minor">
-            <a:schemeClr val="lt1"/>
-          </a:fontRef>
-        </p:style>
-        <p:txBody>
-          <a:bodyPr rtlCol="0" anchor="ctr"/>
-          <a:lstStyle/>
-          <a:p>
-            <a:pPr algn="ctr"/>
-          </a:p>
-        </p:txBody>
-      </p:sp>
-      <p:sp>
-        <p:nvSpPr>
-          <p:cNvPr id="12" name="TextBox 11"/>
-          <p:cNvSpPr txBox="1"/>
-          <p:nvPr/>
-        </p:nvSpPr>
-        <p:spPr>
-          <a:xfrm>
-            <a:off x="594360" y="2680106"/>
-            <a:ext cx="438912" cy="438912"/>
-          </a:xfrm>
-          <a:prstGeom prst="rect">
-            <a:avLst/>
-          </a:prstGeom>
-          <a:noFill/>
-        </p:spPr>
-        <p:txBody>
-          <a:bodyPr wrap="square" anchor="ctr"/>
-          <a:lstStyle/>
-          <a:p>
-            <a:pPr algn="ctr"/>
-            <a:r>
-              <a:rPr sz="1600" b="1" i="0">
-                <a:solidFill>
-                  <a:srgbClr val="FFFFFF"/>
-                </a:solidFill>
-                <a:latin typeface="Calibri"/>
-              </a:rPr>
-              <a:t>2</a:t>
-            </a:r>
-          </a:p>
-        </p:txBody>
-      </p:sp>
-      <p:sp>
-        <p:nvSpPr>
-          <p:cNvPr id="13" name="TextBox 12"/>
-          <p:cNvSpPr txBox="1"/>
-          <p:nvPr/>
-        </p:nvSpPr>
-        <p:spPr>
-          <a:xfrm>
-            <a:off x="1188720" y="2536545"/>
-            <a:ext cx="10271455" cy="744321"/>
-          </a:xfrm>
-          <a:prstGeom prst="rect">
-            <a:avLst/>
-          </a:prstGeom>
-          <a:noFill/>
-        </p:spPr>
-        <p:txBody>
-          <a:bodyPr wrap="square" anchor="ctr"/>
-          <a:lstStyle/>
-          <a:p>
-            <a:r>
-              <a:rPr sz="1500" b="1" i="0">
-                <a:solidFill>
-                  <a:srgbClr val="095292"/>
-                </a:solidFill>
-                <a:latin typeface="Calibri"/>
-              </a:rPr>
-              <a:t>50 s · El camino principal</a:t>
-            </a:r>
-          </a:p>
-          <a:p>
-            <a:pPr>
-              <a:spcBef>
-                <a:spcPts val="200"/>
-              </a:spcBef>
-            </a:pPr>
-            <a:r>
-              <a:rPr sz="1300" b="0" i="0">
-                <a:solidFill>
-                  <a:srgbClr val="333333"/>
-                </a:solidFill>
-                <a:latin typeface="Calibri"/>
-              </a:rPr>
-              <a:t>Qué hace el usuario el 90 % de las veces, señalado en el dibujo.</a:t>
-            </a:r>
-          </a:p>
-        </p:txBody>
-      </p:sp>
-      <p:sp>
-        <p:nvSpPr>
-          <p:cNvPr id="14" name="Rounded Rectangle 13"/>
-          <p:cNvSpPr/>
-          <p:nvPr/>
-        </p:nvSpPr>
-        <p:spPr>
-          <a:xfrm>
-            <a:off x="457200" y="3445459"/>
-            <a:ext cx="11277295" cy="908913"/>
-          </a:xfrm>
-          <a:prstGeom prst="roundRect">
-            <a:avLst>
-              <a:gd name="adj" fmla="val 12000"/>
-            </a:avLst>
-          </a:prstGeom>
-          <a:solidFill>
-            <a:srgbClr val="F2F2F2"/>
-          </a:solidFill>
-          <a:ln>
-            <a:noFill/>
-          </a:ln>
-        </p:spPr>
-        <p:style>
-          <a:lnRef idx="1">
-            <a:schemeClr val="accent1"/>
-          </a:lnRef>
-          <a:fillRef idx="3">
-            <a:schemeClr val="accent1"/>
-          </a:fillRef>
-          <a:effectRef idx="2">
-            <a:schemeClr val="accent1"/>
-          </a:effectRef>
-          <a:fontRef idx="minor">
-            <a:schemeClr val="lt1"/>
-          </a:fontRef>
-        </p:style>
-        <p:txBody>
-          <a:bodyPr rtlCol="0" anchor="ctr"/>
-          <a:lstStyle/>
-          <a:p>
-            <a:pPr algn="ctr"/>
-          </a:p>
-        </p:txBody>
-      </p:sp>
-      <p:sp>
-        <p:nvSpPr>
-          <p:cNvPr id="15" name="Rounded Rectangle 14"/>
-          <p:cNvSpPr/>
-          <p:nvPr/>
-        </p:nvSpPr>
-        <p:spPr>
-          <a:xfrm>
-            <a:off x="594360" y="3680460"/>
-            <a:ext cx="438912" cy="438912"/>
-          </a:xfrm>
-          <a:prstGeom prst="roundRect">
-            <a:avLst>
-              <a:gd name="adj" fmla="val 12000"/>
-            </a:avLst>
-          </a:prstGeom>
-          <a:solidFill>
-            <a:srgbClr val="095292"/>
-          </a:solidFill>
-          <a:ln>
-            <a:noFill/>
-          </a:ln>
-        </p:spPr>
-        <p:style>
-          <a:lnRef idx="1">
-            <a:schemeClr val="accent1"/>
-          </a:lnRef>
-          <a:fillRef idx="3">
-            <a:schemeClr val="accent1"/>
-          </a:fillRef>
-          <a:effectRef idx="2">
-            <a:schemeClr val="accent1"/>
-          </a:effectRef>
-          <a:fontRef idx="minor">
-            <a:schemeClr val="lt1"/>
-          </a:fontRef>
-        </p:style>
-        <p:txBody>
-          <a:bodyPr rtlCol="0" anchor="ctr"/>
-          <a:lstStyle/>
-          <a:p>
-            <a:pPr algn="ctr"/>
-          </a:p>
-        </p:txBody>
-      </p:sp>
-      <p:sp>
-        <p:nvSpPr>
-          <p:cNvPr id="16" name="TextBox 15"/>
-          <p:cNvSpPr txBox="1"/>
-          <p:nvPr/>
-        </p:nvSpPr>
-        <p:spPr>
-          <a:xfrm>
-            <a:off x="594360" y="3680460"/>
-            <a:ext cx="438912" cy="438912"/>
-          </a:xfrm>
-          <a:prstGeom prst="rect">
-            <a:avLst/>
-          </a:prstGeom>
-          <a:noFill/>
-        </p:spPr>
-        <p:txBody>
-          <a:bodyPr wrap="square" anchor="ctr"/>
-          <a:lstStyle/>
-          <a:p>
-            <a:pPr algn="ctr"/>
-            <a:r>
-              <a:rPr sz="1600" b="1" i="0">
-                <a:solidFill>
-                  <a:srgbClr val="FFFFFF"/>
-                </a:solidFill>
-                <a:latin typeface="Calibri"/>
-              </a:rPr>
-              <a:t>3</a:t>
-            </a:r>
-          </a:p>
-        </p:txBody>
-      </p:sp>
-      <p:sp>
-        <p:nvSpPr>
-          <p:cNvPr id="17" name="TextBox 16"/>
-          <p:cNvSpPr txBox="1"/>
-          <p:nvPr/>
-        </p:nvSpPr>
-        <p:spPr>
-          <a:xfrm>
-            <a:off x="1188720" y="3536899"/>
-            <a:ext cx="10271455" cy="744321"/>
-          </a:xfrm>
-          <a:prstGeom prst="rect">
-            <a:avLst/>
-          </a:prstGeom>
-          <a:noFill/>
-        </p:spPr>
-        <p:txBody>
-          <a:bodyPr wrap="square" anchor="ctr"/>
-          <a:lstStyle/>
-          <a:p>
-            <a:r>
-              <a:rPr sz="1500" b="1" i="0">
-                <a:solidFill>
-                  <a:srgbClr val="095292"/>
-                </a:solidFill>
-                <a:latin typeface="Calibri"/>
-              </a:rPr>
-              <a:t>50 s · Qué se ve cuando falla</a:t>
-            </a:r>
-          </a:p>
-          <a:p>
-            <a:pPr>
-              <a:spcBef>
-                <a:spcPts val="200"/>
-              </a:spcBef>
-            </a:pPr>
-            <a:r>
-              <a:rPr sz="1300" b="0" i="0">
-                <a:solidFill>
-                  <a:srgbClr val="333333"/>
-                </a:solidFill>
-                <a:latin typeface="Calibri"/>
-              </a:rPr>
-              <a:t>Estado vacío y de error, con el mensaje leído tal cual. Es el minuto obligatorio.</a:t>
-            </a:r>
-          </a:p>
-        </p:txBody>
-      </p:sp>
-      <p:sp>
-        <p:nvSpPr>
-          <p:cNvPr id="18" name="Rounded Rectangle 17"/>
-          <p:cNvSpPr/>
-          <p:nvPr/>
-        </p:nvSpPr>
-        <p:spPr>
-          <a:xfrm>
-            <a:off x="457200" y="4445812"/>
-            <a:ext cx="11277295" cy="908913"/>
-          </a:xfrm>
-          <a:prstGeom prst="roundRect">
-            <a:avLst>
-              <a:gd name="adj" fmla="val 12000"/>
-            </a:avLst>
-          </a:prstGeom>
-          <a:solidFill>
-            <a:srgbClr val="E8F4FA"/>
-          </a:solidFill>
-          <a:ln>
-            <a:noFill/>
-          </a:ln>
-        </p:spPr>
-        <p:style>
-          <a:lnRef idx="1">
-            <a:schemeClr val="accent1"/>
-          </a:lnRef>
-          <a:fillRef idx="3">
-            <a:schemeClr val="accent1"/>
-          </a:fillRef>
-          <a:effectRef idx="2">
-            <a:schemeClr val="accent1"/>
-          </a:effectRef>
-          <a:fontRef idx="minor">
-            <a:schemeClr val="lt1"/>
-          </a:fontRef>
-        </p:style>
-        <p:txBody>
-          <a:bodyPr rtlCol="0" anchor="ctr"/>
-          <a:lstStyle/>
-          <a:p>
-            <a:pPr algn="ctr"/>
-          </a:p>
-        </p:txBody>
-      </p:sp>
-      <p:sp>
-        <p:nvSpPr>
-          <p:cNvPr id="19" name="Rounded Rectangle 18"/>
-          <p:cNvSpPr/>
-          <p:nvPr/>
-        </p:nvSpPr>
-        <p:spPr>
-          <a:xfrm>
-            <a:off x="594360" y="4680813"/>
-            <a:ext cx="438912" cy="438912"/>
-          </a:xfrm>
-          <a:prstGeom prst="roundRect">
-            <a:avLst>
-              <a:gd name="adj" fmla="val 12000"/>
-            </a:avLst>
-          </a:prstGeom>
-          <a:solidFill>
-            <a:srgbClr val="095292"/>
-          </a:solidFill>
-          <a:ln>
-            <a:noFill/>
-          </a:ln>
-        </p:spPr>
-        <p:style>
-          <a:lnRef idx="1">
-            <a:schemeClr val="accent1"/>
-          </a:lnRef>
-          <a:fillRef idx="3">
-            <a:schemeClr val="accent1"/>
-          </a:fillRef>
-          <a:effectRef idx="2">
-            <a:schemeClr val="accent1"/>
-          </a:effectRef>
-          <a:fontRef idx="minor">
-            <a:schemeClr val="lt1"/>
-          </a:fontRef>
-        </p:style>
-        <p:txBody>
-          <a:bodyPr rtlCol="0" anchor="ctr"/>
-          <a:lstStyle/>
-          <a:p>
-            <a:pPr algn="ctr"/>
-          </a:p>
-        </p:txBody>
-      </p:sp>
-      <p:sp>
-        <p:nvSpPr>
-          <p:cNvPr id="20" name="TextBox 19"/>
-          <p:cNvSpPr txBox="1"/>
-          <p:nvPr/>
-        </p:nvSpPr>
-        <p:spPr>
-          <a:xfrm>
-            <a:off x="594360" y="4680813"/>
-            <a:ext cx="438912" cy="438912"/>
-          </a:xfrm>
-          <a:prstGeom prst="rect">
-            <a:avLst/>
-          </a:prstGeom>
-          <a:noFill/>
-        </p:spPr>
-        <p:txBody>
-          <a:bodyPr wrap="square" anchor="ctr"/>
-          <a:lstStyle/>
-          <a:p>
-            <a:pPr algn="ctr"/>
-            <a:r>
-              <a:rPr sz="1600" b="1" i="0">
-                <a:solidFill>
-                  <a:srgbClr val="FFFFFF"/>
-                </a:solidFill>
-                <a:latin typeface="Calibri"/>
-              </a:rPr>
-              <a:t>4</a:t>
-            </a:r>
-          </a:p>
-        </p:txBody>
-      </p:sp>
-      <p:sp>
-        <p:nvSpPr>
-          <p:cNvPr id="21" name="TextBox 20"/>
-          <p:cNvSpPr txBox="1"/>
-          <p:nvPr/>
-        </p:nvSpPr>
-        <p:spPr>
-          <a:xfrm>
-            <a:off x="1188720" y="4537252"/>
-            <a:ext cx="10271455" cy="744321"/>
-          </a:xfrm>
-          <a:prstGeom prst="rect">
-            <a:avLst/>
-          </a:prstGeom>
-          <a:noFill/>
-        </p:spPr>
-        <p:txBody>
-          <a:bodyPr wrap="square" anchor="ctr"/>
-          <a:lstStyle/>
-          <a:p>
-            <a:r>
-              <a:rPr sz="1500" b="1" i="0">
-                <a:solidFill>
-                  <a:srgbClr val="095292"/>
-                </a:solidFill>
-                <a:latin typeface="Calibri"/>
-              </a:rPr>
-              <a:t>30 s · Los textos</a:t>
-            </a:r>
-          </a:p>
-          <a:p>
-            <a:pPr>
-              <a:spcBef>
-                <a:spcPts val="200"/>
-              </a:spcBef>
-            </a:pPr>
-            <a:r>
-              <a:rPr sz="1300" b="0" i="0">
-                <a:solidFill>
-                  <a:srgbClr val="333333"/>
-                </a:solidFill>
-                <a:latin typeface="Calibri"/>
-              </a:rPr>
-              <a:t>Dos rótulos que costó decidir y por qué quedaron así.</a:t>
-            </a:r>
-          </a:p>
-        </p:txBody>
-      </p:sp>
-      <p:sp>
-        <p:nvSpPr>
-          <p:cNvPr id="22" name="Rounded Rectangle 21"/>
-          <p:cNvSpPr/>
-          <p:nvPr/>
-        </p:nvSpPr>
-        <p:spPr>
-          <a:xfrm>
-            <a:off x="457200" y="5446166"/>
-            <a:ext cx="11277295" cy="908913"/>
-          </a:xfrm>
-          <a:prstGeom prst="roundRect">
-            <a:avLst>
-              <a:gd name="adj" fmla="val 12000"/>
-            </a:avLst>
-          </a:prstGeom>
-          <a:solidFill>
-            <a:srgbClr val="F2F2F2"/>
-          </a:solidFill>
-          <a:ln>
-            <a:noFill/>
-          </a:ln>
-        </p:spPr>
-        <p:style>
-          <a:lnRef idx="1">
-            <a:schemeClr val="accent1"/>
-          </a:lnRef>
-          <a:fillRef idx="3">
-            <a:schemeClr val="accent1"/>
-          </a:fillRef>
-          <a:effectRef idx="2">
-            <a:schemeClr val="accent1"/>
-          </a:effectRef>
-          <a:fontRef idx="minor">
-            <a:schemeClr val="lt1"/>
-          </a:fontRef>
-        </p:style>
-        <p:txBody>
-          <a:bodyPr rtlCol="0" anchor="ctr"/>
-          <a:lstStyle/>
-          <a:p>
-            <a:pPr algn="ctr"/>
-          </a:p>
-        </p:txBody>
-      </p:sp>
-      <p:sp>
-        <p:nvSpPr>
-          <p:cNvPr id="23" name="Rounded Rectangle 22"/>
-          <p:cNvSpPr/>
-          <p:nvPr/>
-        </p:nvSpPr>
-        <p:spPr>
-          <a:xfrm>
-            <a:off x="594360" y="5681167"/>
-            <a:ext cx="438912" cy="438912"/>
-          </a:xfrm>
-          <a:prstGeom prst="roundRect">
-            <a:avLst>
-              <a:gd name="adj" fmla="val 12000"/>
-            </a:avLst>
-          </a:prstGeom>
-          <a:solidFill>
-            <a:srgbClr val="095292"/>
-          </a:solidFill>
-          <a:ln>
-            <a:noFill/>
-          </a:ln>
-        </p:spPr>
-        <p:style>
-          <a:lnRef idx="1">
-            <a:schemeClr val="accent1"/>
-          </a:lnRef>
-          <a:fillRef idx="3">
-            <a:schemeClr val="accent1"/>
-          </a:fillRef>
-          <a:effectRef idx="2">
-            <a:schemeClr val="accent1"/>
-          </a:effectRef>
-          <a:fontRef idx="minor">
-            <a:schemeClr val="lt1"/>
-          </a:fontRef>
-        </p:style>
-        <p:txBody>
-          <a:bodyPr rtlCol="0" anchor="ctr"/>
-          <a:lstStyle/>
-          <a:p>
-            <a:pPr algn="ctr"/>
-          </a:p>
-        </p:txBody>
-      </p:sp>
-      <p:sp>
-        <p:nvSpPr>
-          <p:cNvPr id="24" name="TextBox 23"/>
-          <p:cNvSpPr txBox="1"/>
-          <p:nvPr/>
-        </p:nvSpPr>
-        <p:spPr>
-          <a:xfrm>
-            <a:off x="594360" y="5681167"/>
-            <a:ext cx="438912" cy="438912"/>
-          </a:xfrm>
-          <a:prstGeom prst="rect">
-            <a:avLst/>
-          </a:prstGeom>
-          <a:noFill/>
-        </p:spPr>
-        <p:txBody>
-          <a:bodyPr wrap="square" anchor="ctr"/>
-          <a:lstStyle/>
-          <a:p>
-            <a:pPr algn="ctr"/>
-            <a:r>
-              <a:rPr sz="1600" b="1" i="0">
-                <a:solidFill>
-                  <a:srgbClr val="FFFFFF"/>
-                </a:solidFill>
-                <a:latin typeface="Calibri"/>
-              </a:rPr>
-              <a:t>5</a:t>
-            </a:r>
-          </a:p>
-        </p:txBody>
-      </p:sp>
-      <p:sp>
-        <p:nvSpPr>
-          <p:cNvPr id="25" name="TextBox 24"/>
-          <p:cNvSpPr txBox="1"/>
-          <p:nvPr/>
-        </p:nvSpPr>
-        <p:spPr>
-          <a:xfrm>
-            <a:off x="1188720" y="5537606"/>
-            <a:ext cx="10271455" cy="744321"/>
-          </a:xfrm>
-          <a:prstGeom prst="rect">
-            <a:avLst/>
-          </a:prstGeom>
-          <a:noFill/>
-        </p:spPr>
-        <p:txBody>
-          <a:bodyPr wrap="square" anchor="ctr"/>
-          <a:lstStyle/>
-          <a:p>
-            <a:r>
-              <a:rPr sz="1500" b="1" i="0">
-                <a:solidFill>
-                  <a:srgbClr val="095292"/>
-                </a:solidFill>
-                <a:latin typeface="Calibri"/>
-              </a:rPr>
-              <a:t>20 s · El guion de prueba</a:t>
-            </a:r>
-          </a:p>
-          <a:p>
-            <a:pPr>
-              <a:spcBef>
-                <a:spcPts val="200"/>
-              </a:spcBef>
-            </a:pPr>
-            <a:r>
-              <a:rPr sz="1300" b="0" i="0">
-                <a:solidFill>
-                  <a:srgbClr val="333333"/>
-                </a:solidFill>
-                <a:latin typeface="Calibri"/>
-              </a:rPr>
-              <a:t>Las tres tareas, y con qué rol van a probar.</a:t>
-            </a:r>
-          </a:p>
-        </p:txBody>
-      </p:sp>
-      <p:sp>
-        <p:nvSpPr>
-          <p:cNvPr id="26" name="TextBox 25"/>
           <p:cNvSpPr txBox="1"/>
           <p:nvPr/>
         </p:nvSpPr>
@@ -10234,7 +8950,7 @@
         <p:spPr>
           <a:xfrm>
             <a:off x="0" y="0"/>
-            <a:ext cx="12191695" cy="960120"/>
+            <a:ext cx="12191695" cy="1170432"/>
           </a:xfrm>
           <a:prstGeom prst="rect">
             <a:avLst/>
@@ -10276,7 +8992,7 @@
         </p:nvSpPr>
         <p:spPr>
           <a:xfrm>
-            <a:off x="0" y="960120"/>
+            <a:off x="0" y="1170432"/>
             <a:ext cx="12191695" cy="41148"/>
           </a:xfrm>
           <a:prstGeom prst="rect">
@@ -10320,7 +9036,7 @@
         <p:spPr>
           <a:xfrm>
             <a:off x="457200" y="164592"/>
-            <a:ext cx="11277295" cy="502920"/>
+            <a:ext cx="11277295" cy="384048"/>
           </a:xfrm>
           <a:prstGeom prst="rect">
             <a:avLst/>
@@ -10340,7 +9056,7 @@
                 </a:solidFill>
                 <a:latin typeface="Calibri"/>
               </a:rPr>
-              <a:t>Para la Clase 11</a:t>
+              <a:t>Taller de hoy: Prototipo de baja fidelidad</a:t>
             </a:r>
           </a:p>
         </p:txBody>
@@ -10353,8 +9069,8 @@
         </p:nvSpPr>
         <p:spPr>
           <a:xfrm>
-            <a:off x="457200" y="1170432"/>
-            <a:ext cx="11277295" cy="5230368"/>
+            <a:off x="457200" y="566928"/>
+            <a:ext cx="11277295" cy="411480"/>
           </a:xfrm>
           <a:prstGeom prst="rect">
             <a:avLst/>
@@ -10367,288 +9083,990 @@
           </a:bodyPr>
           <a:lstStyle/>
           <a:p>
-            <a:pPr>
-              <a:spcAft>
-                <a:spcPts val="800"/>
-              </a:spcAft>
-            </a:pPr>
-            <a:r>
-              <a:rPr sz="2000" b="0" i="0">
-                <a:solidFill>
-                  <a:srgbClr val="333333"/>
-                </a:solidFill>
-                <a:latin typeface="Calibri"/>
-              </a:rPr>
-              <a:t>–   </a:t>
-            </a:r>
-            <a:r>
-              <a:rPr sz="2000" b="1" i="0">
-                <a:solidFill>
-                  <a:srgbClr val="333333"/>
-                </a:solidFill>
-                <a:latin typeface="Calibri"/>
-              </a:rPr>
-              <a:t>Trabajo dirigido:</a:t>
-            </a:r>
-            <a:r>
-              <a:rPr sz="2000" b="0" i="0">
-                <a:solidFill>
-                  <a:srgbClr val="333333"/>
-                </a:solidFill>
-                <a:latin typeface="Calibri"/>
-              </a:rPr>
-              <a:t> Introducción a software de prototipado — terminar las tres pantallas con </a:t>
-            </a:r>
-            <a:r>
-              <a:rPr sz="2000" b="1" i="0">
-                <a:solidFill>
-                  <a:srgbClr val="333333"/>
-                </a:solidFill>
-                <a:latin typeface="Calibri"/>
-              </a:rPr>
-              <a:t>todos</a:t>
-            </a:r>
-            <a:r>
-              <a:rPr sz="2000" b="0" i="0">
-                <a:solidFill>
-                  <a:srgbClr val="333333"/>
-                </a:solidFill>
-                <a:latin typeface="Calibri"/>
-              </a:rPr>
-              <a:t> los textos reales y los tres estados dibujados, y dejar el PNG en la carpeta del equipo.</a:t>
-            </a:r>
-          </a:p>
-          <a:p>
-            <a:pPr>
-              <a:spcAft>
-                <a:spcPts val="800"/>
-              </a:spcAft>
-            </a:pPr>
-            <a:r>
-              <a:rPr sz="2000" b="0" i="0">
-                <a:solidFill>
-                  <a:srgbClr val="333333"/>
-                </a:solidFill>
-                <a:latin typeface="Calibri"/>
-              </a:rPr>
-              <a:t>–   </a:t>
-            </a:r>
-            <a:r>
-              <a:rPr sz="2000" b="1" i="0">
-                <a:solidFill>
-                  <a:srgbClr val="333333"/>
-                </a:solidFill>
-                <a:latin typeface="Calibri"/>
-              </a:rPr>
-              <a:t>Trabajo independiente:</a:t>
-            </a:r>
-            <a:r>
-              <a:rPr sz="2000" b="0" i="0">
-                <a:solidFill>
-                  <a:srgbClr val="333333"/>
-                </a:solidFill>
-                <a:latin typeface="Calibri"/>
-              </a:rPr>
-              <a:t> Práctica básica con herramientas digitales: convertir el prototipo en </a:t>
-            </a:r>
-            <a:r>
-              <a:rPr sz="2000" b="1" i="0">
-                <a:solidFill>
-                  <a:srgbClr val="333333"/>
-                </a:solidFill>
-                <a:latin typeface="Calibri"/>
-              </a:rPr>
-              <a:t>navegable</a:t>
-            </a:r>
-            <a:r>
-              <a:rPr sz="2000" b="0" i="0">
-                <a:solidFill>
-                  <a:srgbClr val="333333"/>
-                </a:solidFill>
-                <a:latin typeface="Calibri"/>
-              </a:rPr>
-              <a:t> —diapositivas enlazadas o enlaces entre marcos— para poder recorrerlo delante de una persona.</a:t>
-            </a:r>
-          </a:p>
-          <a:p>
-            <a:pPr>
-              <a:spcAft>
-                <a:spcPts val="800"/>
-              </a:spcAft>
-            </a:pPr>
-            <a:r>
-              <a:rPr sz="2000" b="0" i="0">
-                <a:solidFill>
-                  <a:srgbClr val="333333"/>
-                </a:solidFill>
-                <a:latin typeface="Calibri"/>
-              </a:rPr>
-              <a:t>–   </a:t>
-            </a:r>
-            <a:r>
-              <a:rPr sz="2000" b="1" i="0">
-                <a:solidFill>
-                  <a:srgbClr val="333333"/>
-                </a:solidFill>
-                <a:latin typeface="Calibri"/>
-              </a:rPr>
-              <a:t>Clase 11 · Taller de prototipado inicial con IA</a:t>
-            </a:r>
-            <a:r>
-              <a:rPr sz="2000" b="0" i="0">
-                <a:solidFill>
-                  <a:srgbClr val="333333"/>
-                </a:solidFill>
-                <a:latin typeface="Calibri"/>
-              </a:rPr>
-              <a:t> — </a:t>
-            </a:r>
-            <a:r>
-              <a:rPr sz="2000" b="1" i="0">
-                <a:solidFill>
-                  <a:srgbClr val="333333"/>
-                </a:solidFill>
-                <a:latin typeface="Calibri"/>
-              </a:rPr>
-              <a:t>prototipo v2 con IA autorizada</a:t>
-            </a:r>
-            <a:r>
-              <a:rPr sz="2000" b="0" i="0">
-                <a:solidFill>
-                  <a:srgbClr val="333333"/>
-                </a:solidFill>
-                <a:latin typeface="Calibri"/>
-              </a:rPr>
-              <a:t>: generar variantes, elegir con criterio y corregir lo que la IA no sabía. Y la </a:t>
-            </a:r>
-            <a:r>
-              <a:rPr sz="2000" b="1" i="0">
-                <a:solidFill>
-                  <a:srgbClr val="333333"/>
-                </a:solidFill>
-                <a:latin typeface="Calibri"/>
-              </a:rPr>
-              <a:t>evaluación del corte 2</a:t>
-            </a:r>
-            <a:r>
-              <a:rPr sz="2000" b="0" i="0">
-                <a:solidFill>
-                  <a:srgbClr val="333333"/>
-                </a:solidFill>
-                <a:latin typeface="Calibri"/>
-              </a:rPr>
-              <a:t> en la plataforma del curso, sobre las sesiones 7 a 11.</a:t>
-            </a:r>
-          </a:p>
-          <a:p>
-            <a:pPr>
-              <a:spcAft>
-                <a:spcPts val="800"/>
-              </a:spcAft>
-            </a:pPr>
-            <a:r>
-              <a:rPr sz="2000" b="0" i="0">
-                <a:solidFill>
-                  <a:srgbClr val="333333"/>
-                </a:solidFill>
-                <a:latin typeface="Calibri"/>
-              </a:rPr>
-              <a:t>–   </a:t>
-            </a:r>
-            <a:r>
-              <a:rPr sz="2000" b="1" i="0">
-                <a:solidFill>
-                  <a:srgbClr val="333333"/>
-                </a:solidFill>
-                <a:latin typeface="Calibri"/>
-              </a:rPr>
-              <a:t>Aviso:</a:t>
-            </a:r>
-            <a:r>
-              <a:rPr sz="2000" b="0" i="0">
-                <a:solidFill>
-                  <a:srgbClr val="333333"/>
-                </a:solidFill>
-                <a:latin typeface="Calibri"/>
-              </a:rPr>
-              <a:t> La sesión 11 </a:t>
-            </a:r>
-            <a:r>
-              <a:rPr sz="2000" b="1" i="0">
-                <a:solidFill>
-                  <a:srgbClr val="333333"/>
-                </a:solidFill>
-                <a:latin typeface="Calibri"/>
-              </a:rPr>
-              <a:t>cierra el corte 2</a:t>
-            </a:r>
-            <a:r>
-              <a:rPr sz="2000" b="0" i="0">
-                <a:solidFill>
-                  <a:srgbClr val="333333"/>
-                </a:solidFill>
-                <a:latin typeface="Calibri"/>
-              </a:rPr>
-              <a:t>: hay 20 minutos de evaluación al final, sobre las sesiones 7 a 11. Traigan el prototipo terminado y navegable — sin él no hay nada que corregir con IA, y ese es el entregable de la sesión. La evaluación es </a:t>
-            </a:r>
-            <a:r>
-              <a:rPr sz="2000" b="1" i="0">
-                <a:solidFill>
-                  <a:srgbClr val="333333"/>
-                </a:solidFill>
-                <a:latin typeface="Calibri"/>
-              </a:rPr>
-              <a:t>a libro abierto sobre los documentos de su equipo</a:t>
-            </a:r>
-            <a:r>
-              <a:rPr sz="2000" b="0" i="0">
-                <a:solidFill>
-                  <a:srgbClr val="333333"/>
-                </a:solidFill>
-                <a:latin typeface="Calibri"/>
-              </a:rPr>
-              <a:t>: lean el documento «Evaluación del Corte 2 — cómo prepararse», que dice exactamente qué pestañas tener abiertas.</a:t>
-            </a:r>
-          </a:p>
-          <a:p>
-            <a:pPr>
-              <a:spcAft>
-                <a:spcPts val="800"/>
-              </a:spcAft>
-            </a:pPr>
-            <a:r>
-              <a:rPr sz="2000" b="0" i="0">
-                <a:solidFill>
-                  <a:srgbClr val="333333"/>
-                </a:solidFill>
-                <a:latin typeface="Calibri"/>
-              </a:rPr>
-              <a:t>–   </a:t>
-            </a:r>
-            <a:r>
-              <a:rPr sz="2000" b="1" i="0">
-                <a:solidFill>
-                  <a:srgbClr val="333333"/>
-                </a:solidFill>
-                <a:latin typeface="Calibri"/>
-              </a:rPr>
-              <a:t>Antes de salir:</a:t>
-            </a:r>
-            <a:r>
-              <a:rPr sz="2000" b="0" i="0">
-                <a:solidFill>
-                  <a:srgbClr val="333333"/>
-                </a:solidFill>
-                <a:latin typeface="Calibri"/>
-              </a:rPr>
-              <a:t> el enlace del documento del equipo en el chat, con permiso de lectura para el docente, y el nombre del vocero de hoy.</a:t>
-            </a:r>
-          </a:p>
-        </p:txBody>
-      </p:sp>
-      <p:sp>
-        <p:nvSpPr>
-          <p:cNvPr id="6" name="TextBox 5"/>
+            <a:r>
+              <a:rPr sz="1400" b="0" i="0">
+                <a:solidFill>
+                  <a:srgbClr val="B8D8EE"/>
+                </a:solidFill>
+                <a:latin typeface="Calibri"/>
+              </a:rPr>
+              <a:t>17 min en equipos · 2 dibujan · 2 escriben textos · 1 escribe el guion de prueba · prototipo de tres pantallas + guion de prueba con tres tareas</a:t>
+            </a:r>
+          </a:p>
+        </p:txBody>
+      </p:sp>
+      <p:sp>
+        <p:nvSpPr>
+          <p:cNvPr id="6" name="Rounded Rectangle 5"/>
+          <p:cNvSpPr/>
+          <p:nvPr/>
+        </p:nvSpPr>
+        <p:spPr>
+          <a:xfrm>
+            <a:off x="457200" y="1472184"/>
+            <a:ext cx="11277295" cy="566928"/>
+          </a:xfrm>
+          <a:prstGeom prst="roundRect">
+            <a:avLst>
+              <a:gd name="adj" fmla="val 12000"/>
+            </a:avLst>
+          </a:prstGeom>
+          <a:solidFill>
+            <a:srgbClr val="F2F2F2"/>
+          </a:solidFill>
+          <a:ln>
+            <a:noFill/>
+          </a:ln>
+        </p:spPr>
+        <p:style>
+          <a:lnRef idx="1">
+            <a:schemeClr val="accent1"/>
+          </a:lnRef>
+          <a:fillRef idx="3">
+            <a:schemeClr val="accent1"/>
+          </a:fillRef>
+          <a:effectRef idx="2">
+            <a:schemeClr val="accent1"/>
+          </a:effectRef>
+          <a:fontRef idx="minor">
+            <a:schemeClr val="lt1"/>
+          </a:fontRef>
+        </p:style>
+        <p:txBody>
+          <a:bodyPr rtlCol="0" anchor="ctr"/>
+          <a:lstStyle/>
+          <a:p>
+            <a:pPr algn="ctr"/>
+          </a:p>
+        </p:txBody>
+      </p:sp>
+      <p:sp>
+        <p:nvSpPr>
+          <p:cNvPr id="7" name="Rectangle 6"/>
+          <p:cNvSpPr/>
+          <p:nvPr/>
+        </p:nvSpPr>
+        <p:spPr>
+          <a:xfrm>
+            <a:off x="640080" y="1618487"/>
+            <a:ext cx="274320" cy="274320"/>
+          </a:xfrm>
+          <a:prstGeom prst="rect">
+            <a:avLst/>
+          </a:prstGeom>
+          <a:solidFill>
+            <a:srgbClr val="FFFFFF"/>
+          </a:solidFill>
+          <a:ln>
+            <a:solidFill>
+              <a:srgbClr val="333333"/>
+            </a:solidFill>
+          </a:ln>
+        </p:spPr>
+        <p:style>
+          <a:lnRef idx="1">
+            <a:schemeClr val="accent1"/>
+          </a:lnRef>
+          <a:fillRef idx="3">
+            <a:schemeClr val="accent1"/>
+          </a:fillRef>
+          <a:effectRef idx="2">
+            <a:schemeClr val="accent1"/>
+          </a:effectRef>
+          <a:fontRef idx="minor">
+            <a:schemeClr val="lt1"/>
+          </a:fontRef>
+        </p:style>
+        <p:txBody>
+          <a:bodyPr rtlCol="0" anchor="ctr"/>
+          <a:lstStyle/>
+          <a:p>
+            <a:pPr algn="ctr"/>
+          </a:p>
+        </p:txBody>
+      </p:sp>
+      <p:sp>
+        <p:nvSpPr>
+          <p:cNvPr id="8" name="Rectangle 7"/>
+          <p:cNvSpPr/>
+          <p:nvPr/>
+        </p:nvSpPr>
+        <p:spPr>
+          <a:xfrm>
+            <a:off x="640080" y="1618487"/>
+            <a:ext cx="73152" cy="274320"/>
+          </a:xfrm>
+          <a:prstGeom prst="rect">
+            <a:avLst/>
+          </a:prstGeom>
+          <a:solidFill>
+            <a:srgbClr val="269CCB"/>
+          </a:solidFill>
+          <a:ln>
+            <a:noFill/>
+          </a:ln>
+        </p:spPr>
+        <p:style>
+          <a:lnRef idx="1">
+            <a:schemeClr val="accent1"/>
+          </a:lnRef>
+          <a:fillRef idx="3">
+            <a:schemeClr val="accent1"/>
+          </a:fillRef>
+          <a:effectRef idx="2">
+            <a:schemeClr val="accent1"/>
+          </a:effectRef>
+          <a:fontRef idx="minor">
+            <a:schemeClr val="lt1"/>
+          </a:fontRef>
+        </p:style>
+        <p:txBody>
+          <a:bodyPr rtlCol="0" anchor="ctr"/>
+          <a:lstStyle/>
+          <a:p>
+            <a:pPr algn="ctr"/>
+          </a:p>
+        </p:txBody>
+      </p:sp>
+      <p:sp>
+        <p:nvSpPr>
+          <p:cNvPr id="9" name="TextBox 8"/>
+          <p:cNvSpPr txBox="1"/>
+          <p:nvPr/>
+        </p:nvSpPr>
+        <p:spPr>
+          <a:xfrm>
+            <a:off x="1097280" y="1563624"/>
+            <a:ext cx="10362895" cy="402336"/>
+          </a:xfrm>
+          <a:prstGeom prst="rect">
+            <a:avLst/>
+          </a:prstGeom>
+          <a:noFill/>
+        </p:spPr>
+        <p:txBody>
+          <a:bodyPr wrap="square" anchor="ctr"/>
+          <a:lstStyle/>
+          <a:p>
+            <a:r>
+              <a:rPr sz="1500" b="1" i="0">
+                <a:solidFill>
+                  <a:srgbClr val="333333"/>
+                </a:solidFill>
+                <a:latin typeface="Calibri"/>
+              </a:rPr>
+              <a:t>EL FLUJO EN TRES PASOS</a:t>
+            </a:r>
+            <a:r>
+              <a:rPr sz="1500" b="0" i="0">
+                <a:solidFill>
+                  <a:srgbClr val="333333"/>
+                </a:solidFill>
+                <a:latin typeface="Calibri"/>
+              </a:rPr>
+              <a:t> — El camino principal del alcance mínimo, en tres pantallas o tres pasos, y </a:t>
+            </a:r>
+            <a:r>
+              <a:rPr sz="1500" b="1" i="0">
+                <a:solidFill>
+                  <a:srgbClr val="333333"/>
+                </a:solidFill>
+                <a:latin typeface="Calibri"/>
+              </a:rPr>
+              <a:t>una frase de propósito por cada uno</a:t>
+            </a:r>
+            <a:r>
+              <a:rPr sz="1500" b="0" i="0">
+                <a:solidFill>
+                  <a:srgbClr val="333333"/>
+                </a:solidFill>
+                <a:latin typeface="Calibri"/>
+              </a:rPr>
+              <a:t>.</a:t>
+            </a:r>
+          </a:p>
+        </p:txBody>
+      </p:sp>
+      <p:sp>
+        <p:nvSpPr>
+          <p:cNvPr id="10" name="Rounded Rectangle 9"/>
+          <p:cNvSpPr/>
+          <p:nvPr/>
+        </p:nvSpPr>
+        <p:spPr>
+          <a:xfrm>
+            <a:off x="457200" y="2148839"/>
+            <a:ext cx="11277295" cy="566928"/>
+          </a:xfrm>
+          <a:prstGeom prst="roundRect">
+            <a:avLst>
+              <a:gd name="adj" fmla="val 12000"/>
+            </a:avLst>
+          </a:prstGeom>
+          <a:solidFill>
+            <a:srgbClr val="F2F2F2"/>
+          </a:solidFill>
+          <a:ln>
+            <a:noFill/>
+          </a:ln>
+        </p:spPr>
+        <p:style>
+          <a:lnRef idx="1">
+            <a:schemeClr val="accent1"/>
+          </a:lnRef>
+          <a:fillRef idx="3">
+            <a:schemeClr val="accent1"/>
+          </a:fillRef>
+          <a:effectRef idx="2">
+            <a:schemeClr val="accent1"/>
+          </a:effectRef>
+          <a:fontRef idx="minor">
+            <a:schemeClr val="lt1"/>
+          </a:fontRef>
+        </p:style>
+        <p:txBody>
+          <a:bodyPr rtlCol="0" anchor="ctr"/>
+          <a:lstStyle/>
+          <a:p>
+            <a:pPr algn="ctr"/>
+          </a:p>
+        </p:txBody>
+      </p:sp>
+      <p:sp>
+        <p:nvSpPr>
+          <p:cNvPr id="11" name="Rectangle 10"/>
+          <p:cNvSpPr/>
+          <p:nvPr/>
+        </p:nvSpPr>
+        <p:spPr>
+          <a:xfrm>
+            <a:off x="640080" y="2295144"/>
+            <a:ext cx="274320" cy="274320"/>
+          </a:xfrm>
+          <a:prstGeom prst="rect">
+            <a:avLst/>
+          </a:prstGeom>
+          <a:solidFill>
+            <a:srgbClr val="FFFFFF"/>
+          </a:solidFill>
+          <a:ln>
+            <a:solidFill>
+              <a:srgbClr val="333333"/>
+            </a:solidFill>
+          </a:ln>
+        </p:spPr>
+        <p:style>
+          <a:lnRef idx="1">
+            <a:schemeClr val="accent1"/>
+          </a:lnRef>
+          <a:fillRef idx="3">
+            <a:schemeClr val="accent1"/>
+          </a:fillRef>
+          <a:effectRef idx="2">
+            <a:schemeClr val="accent1"/>
+          </a:effectRef>
+          <a:fontRef idx="minor">
+            <a:schemeClr val="lt1"/>
+          </a:fontRef>
+        </p:style>
+        <p:txBody>
+          <a:bodyPr rtlCol="0" anchor="ctr"/>
+          <a:lstStyle/>
+          <a:p>
+            <a:pPr algn="ctr"/>
+          </a:p>
+        </p:txBody>
+      </p:sp>
+      <p:sp>
+        <p:nvSpPr>
+          <p:cNvPr id="12" name="Rectangle 11"/>
+          <p:cNvSpPr/>
+          <p:nvPr/>
+        </p:nvSpPr>
+        <p:spPr>
+          <a:xfrm>
+            <a:off x="640080" y="2295144"/>
+            <a:ext cx="73152" cy="274320"/>
+          </a:xfrm>
+          <a:prstGeom prst="rect">
+            <a:avLst/>
+          </a:prstGeom>
+          <a:solidFill>
+            <a:srgbClr val="269CCB"/>
+          </a:solidFill>
+          <a:ln>
+            <a:noFill/>
+          </a:ln>
+        </p:spPr>
+        <p:style>
+          <a:lnRef idx="1">
+            <a:schemeClr val="accent1"/>
+          </a:lnRef>
+          <a:fillRef idx="3">
+            <a:schemeClr val="accent1"/>
+          </a:fillRef>
+          <a:effectRef idx="2">
+            <a:schemeClr val="accent1"/>
+          </a:effectRef>
+          <a:fontRef idx="minor">
+            <a:schemeClr val="lt1"/>
+          </a:fontRef>
+        </p:style>
+        <p:txBody>
+          <a:bodyPr rtlCol="0" anchor="ctr"/>
+          <a:lstStyle/>
+          <a:p>
+            <a:pPr algn="ctr"/>
+          </a:p>
+        </p:txBody>
+      </p:sp>
+      <p:sp>
+        <p:nvSpPr>
+          <p:cNvPr id="13" name="TextBox 12"/>
+          <p:cNvSpPr txBox="1"/>
+          <p:nvPr/>
+        </p:nvSpPr>
+        <p:spPr>
+          <a:xfrm>
+            <a:off x="1097280" y="2240279"/>
+            <a:ext cx="10362895" cy="402336"/>
+          </a:xfrm>
+          <a:prstGeom prst="rect">
+            <a:avLst/>
+          </a:prstGeom>
+          <a:noFill/>
+        </p:spPr>
+        <p:txBody>
+          <a:bodyPr wrap="square" anchor="ctr"/>
+          <a:lstStyle/>
+          <a:p>
+            <a:r>
+              <a:rPr sz="1500" b="1" i="0">
+                <a:solidFill>
+                  <a:srgbClr val="333333"/>
+                </a:solidFill>
+                <a:latin typeface="Calibri"/>
+              </a:rPr>
+              <a:t>LAS TRES PANTALLAS DIBUJADAS</a:t>
+            </a:r>
+            <a:r>
+              <a:rPr sz="1500" b="0" i="0">
+                <a:solidFill>
+                  <a:srgbClr val="333333"/>
+                </a:solidFill>
+                <a:latin typeface="Calibri"/>
+              </a:rPr>
+              <a:t> — Las tres dibujadas de verdad, con el camino principal grande y primero, y una </a:t>
+            </a:r>
+            <a:r>
+              <a:rPr sz="1500" b="1" i="0">
+                <a:solidFill>
+                  <a:srgbClr val="333333"/>
+                </a:solidFill>
+                <a:latin typeface="Calibri"/>
+              </a:rPr>
+              <a:t>flecha con destino</a:t>
+            </a:r>
+            <a:r>
+              <a:rPr sz="1500" b="0" i="0">
+                <a:solidFill>
+                  <a:srgbClr val="333333"/>
+                </a:solidFill>
+                <a:latin typeface="Calibri"/>
+              </a:rPr>
+              <a:t> por cada botón.</a:t>
+            </a:r>
+          </a:p>
+        </p:txBody>
+      </p:sp>
+      <p:sp>
+        <p:nvSpPr>
+          <p:cNvPr id="14" name="Rounded Rectangle 13"/>
+          <p:cNvSpPr/>
+          <p:nvPr/>
+        </p:nvSpPr>
+        <p:spPr>
+          <a:xfrm>
+            <a:off x="457200" y="2825496"/>
+            <a:ext cx="11277295" cy="566928"/>
+          </a:xfrm>
+          <a:prstGeom prst="roundRect">
+            <a:avLst>
+              <a:gd name="adj" fmla="val 12000"/>
+            </a:avLst>
+          </a:prstGeom>
+          <a:solidFill>
+            <a:srgbClr val="F2F2F2"/>
+          </a:solidFill>
+          <a:ln>
+            <a:noFill/>
+          </a:ln>
+        </p:spPr>
+        <p:style>
+          <a:lnRef idx="1">
+            <a:schemeClr val="accent1"/>
+          </a:lnRef>
+          <a:fillRef idx="3">
+            <a:schemeClr val="accent1"/>
+          </a:fillRef>
+          <a:effectRef idx="2">
+            <a:schemeClr val="accent1"/>
+          </a:effectRef>
+          <a:fontRef idx="minor">
+            <a:schemeClr val="lt1"/>
+          </a:fontRef>
+        </p:style>
+        <p:txBody>
+          <a:bodyPr rtlCol="0" anchor="ctr"/>
+          <a:lstStyle/>
+          <a:p>
+            <a:pPr algn="ctr"/>
+          </a:p>
+        </p:txBody>
+      </p:sp>
+      <p:sp>
+        <p:nvSpPr>
+          <p:cNvPr id="15" name="Rectangle 14"/>
+          <p:cNvSpPr/>
+          <p:nvPr/>
+        </p:nvSpPr>
+        <p:spPr>
+          <a:xfrm>
+            <a:off x="640080" y="2971800"/>
+            <a:ext cx="274320" cy="274320"/>
+          </a:xfrm>
+          <a:prstGeom prst="rect">
+            <a:avLst/>
+          </a:prstGeom>
+          <a:solidFill>
+            <a:srgbClr val="FFFFFF"/>
+          </a:solidFill>
+          <a:ln>
+            <a:solidFill>
+              <a:srgbClr val="333333"/>
+            </a:solidFill>
+          </a:ln>
+        </p:spPr>
+        <p:style>
+          <a:lnRef idx="1">
+            <a:schemeClr val="accent1"/>
+          </a:lnRef>
+          <a:fillRef idx="3">
+            <a:schemeClr val="accent1"/>
+          </a:fillRef>
+          <a:effectRef idx="2">
+            <a:schemeClr val="accent1"/>
+          </a:effectRef>
+          <a:fontRef idx="minor">
+            <a:schemeClr val="lt1"/>
+          </a:fontRef>
+        </p:style>
+        <p:txBody>
+          <a:bodyPr rtlCol="0" anchor="ctr"/>
+          <a:lstStyle/>
+          <a:p>
+            <a:pPr algn="ctr"/>
+          </a:p>
+        </p:txBody>
+      </p:sp>
+      <p:sp>
+        <p:nvSpPr>
+          <p:cNvPr id="16" name="Rectangle 15"/>
+          <p:cNvSpPr/>
+          <p:nvPr/>
+        </p:nvSpPr>
+        <p:spPr>
+          <a:xfrm>
+            <a:off x="640080" y="2971800"/>
+            <a:ext cx="73152" cy="274320"/>
+          </a:xfrm>
+          <a:prstGeom prst="rect">
+            <a:avLst/>
+          </a:prstGeom>
+          <a:solidFill>
+            <a:srgbClr val="269CCB"/>
+          </a:solidFill>
+          <a:ln>
+            <a:noFill/>
+          </a:ln>
+        </p:spPr>
+        <p:style>
+          <a:lnRef idx="1">
+            <a:schemeClr val="accent1"/>
+          </a:lnRef>
+          <a:fillRef idx="3">
+            <a:schemeClr val="accent1"/>
+          </a:fillRef>
+          <a:effectRef idx="2">
+            <a:schemeClr val="accent1"/>
+          </a:effectRef>
+          <a:fontRef idx="minor">
+            <a:schemeClr val="lt1"/>
+          </a:fontRef>
+        </p:style>
+        <p:txBody>
+          <a:bodyPr rtlCol="0" anchor="ctr"/>
+          <a:lstStyle/>
+          <a:p>
+            <a:pPr algn="ctr"/>
+          </a:p>
+        </p:txBody>
+      </p:sp>
+      <p:sp>
+        <p:nvSpPr>
+          <p:cNvPr id="17" name="TextBox 16"/>
+          <p:cNvSpPr txBox="1"/>
+          <p:nvPr/>
+        </p:nvSpPr>
+        <p:spPr>
+          <a:xfrm>
+            <a:off x="1097280" y="2916936"/>
+            <a:ext cx="10362895" cy="402336"/>
+          </a:xfrm>
+          <a:prstGeom prst="rect">
+            <a:avLst/>
+          </a:prstGeom>
+          <a:noFill/>
+        </p:spPr>
+        <p:txBody>
+          <a:bodyPr wrap="square" anchor="ctr"/>
+          <a:lstStyle/>
+          <a:p>
+            <a:r>
+              <a:rPr sz="1500" b="1" i="0">
+                <a:solidFill>
+                  <a:srgbClr val="333333"/>
+                </a:solidFill>
+                <a:latin typeface="Calibri"/>
+              </a:rPr>
+              <a:t>EL ESTADO VACÍO Y EL DE ERROR</a:t>
+            </a:r>
+            <a:r>
+              <a:rPr sz="1500" b="0" i="0">
+                <a:solidFill>
+                  <a:srgbClr val="333333"/>
+                </a:solidFill>
+                <a:latin typeface="Calibri"/>
+              </a:rPr>
+              <a:t> — Qué se ve la primera vez sin datos, qué se ve cuando la búsqueda no encuentra nada, y qué se ve cuando algo falla. </a:t>
+            </a:r>
+            <a:r>
+              <a:rPr sz="1500" b="1" i="0">
+                <a:solidFill>
+                  <a:srgbClr val="333333"/>
+                </a:solidFill>
+                <a:latin typeface="Calibri"/>
+              </a:rPr>
+              <a:t>Con el texto exacto del mensaje.</a:t>
+            </a:r>
+          </a:p>
+        </p:txBody>
+      </p:sp>
+      <p:sp>
+        <p:nvSpPr>
+          <p:cNvPr id="18" name="Rounded Rectangle 17"/>
+          <p:cNvSpPr/>
+          <p:nvPr/>
+        </p:nvSpPr>
+        <p:spPr>
+          <a:xfrm>
+            <a:off x="457200" y="3502152"/>
+            <a:ext cx="11277295" cy="566928"/>
+          </a:xfrm>
+          <a:prstGeom prst="roundRect">
+            <a:avLst>
+              <a:gd name="adj" fmla="val 12000"/>
+            </a:avLst>
+          </a:prstGeom>
+          <a:solidFill>
+            <a:srgbClr val="F2F2F2"/>
+          </a:solidFill>
+          <a:ln>
+            <a:noFill/>
+          </a:ln>
+        </p:spPr>
+        <p:style>
+          <a:lnRef idx="1">
+            <a:schemeClr val="accent1"/>
+          </a:lnRef>
+          <a:fillRef idx="3">
+            <a:schemeClr val="accent1"/>
+          </a:fillRef>
+          <a:effectRef idx="2">
+            <a:schemeClr val="accent1"/>
+          </a:effectRef>
+          <a:fontRef idx="minor">
+            <a:schemeClr val="lt1"/>
+          </a:fontRef>
+        </p:style>
+        <p:txBody>
+          <a:bodyPr rtlCol="0" anchor="ctr"/>
+          <a:lstStyle/>
+          <a:p>
+            <a:pPr algn="ctr"/>
+          </a:p>
+        </p:txBody>
+      </p:sp>
+      <p:sp>
+        <p:nvSpPr>
+          <p:cNvPr id="19" name="Rectangle 18"/>
+          <p:cNvSpPr/>
+          <p:nvPr/>
+        </p:nvSpPr>
+        <p:spPr>
+          <a:xfrm>
+            <a:off x="640080" y="3648456"/>
+            <a:ext cx="274320" cy="274320"/>
+          </a:xfrm>
+          <a:prstGeom prst="rect">
+            <a:avLst/>
+          </a:prstGeom>
+          <a:solidFill>
+            <a:srgbClr val="FFFFFF"/>
+          </a:solidFill>
+          <a:ln>
+            <a:solidFill>
+              <a:srgbClr val="333333"/>
+            </a:solidFill>
+          </a:ln>
+        </p:spPr>
+        <p:style>
+          <a:lnRef idx="1">
+            <a:schemeClr val="accent1"/>
+          </a:lnRef>
+          <a:fillRef idx="3">
+            <a:schemeClr val="accent1"/>
+          </a:fillRef>
+          <a:effectRef idx="2">
+            <a:schemeClr val="accent1"/>
+          </a:effectRef>
+          <a:fontRef idx="minor">
+            <a:schemeClr val="lt1"/>
+          </a:fontRef>
+        </p:style>
+        <p:txBody>
+          <a:bodyPr rtlCol="0" anchor="ctr"/>
+          <a:lstStyle/>
+          <a:p>
+            <a:pPr algn="ctr"/>
+          </a:p>
+        </p:txBody>
+      </p:sp>
+      <p:sp>
+        <p:nvSpPr>
+          <p:cNvPr id="20" name="Rectangle 19"/>
+          <p:cNvSpPr/>
+          <p:nvPr/>
+        </p:nvSpPr>
+        <p:spPr>
+          <a:xfrm>
+            <a:off x="640080" y="3648456"/>
+            <a:ext cx="73152" cy="274320"/>
+          </a:xfrm>
+          <a:prstGeom prst="rect">
+            <a:avLst/>
+          </a:prstGeom>
+          <a:solidFill>
+            <a:srgbClr val="269CCB"/>
+          </a:solidFill>
+          <a:ln>
+            <a:noFill/>
+          </a:ln>
+        </p:spPr>
+        <p:style>
+          <a:lnRef idx="1">
+            <a:schemeClr val="accent1"/>
+          </a:lnRef>
+          <a:fillRef idx="3">
+            <a:schemeClr val="accent1"/>
+          </a:fillRef>
+          <a:effectRef idx="2">
+            <a:schemeClr val="accent1"/>
+          </a:effectRef>
+          <a:fontRef idx="minor">
+            <a:schemeClr val="lt1"/>
+          </a:fontRef>
+        </p:style>
+        <p:txBody>
+          <a:bodyPr rtlCol="0" anchor="ctr"/>
+          <a:lstStyle/>
+          <a:p>
+            <a:pPr algn="ctr"/>
+          </a:p>
+        </p:txBody>
+      </p:sp>
+      <p:sp>
+        <p:nvSpPr>
+          <p:cNvPr id="21" name="TextBox 20"/>
+          <p:cNvSpPr txBox="1"/>
+          <p:nvPr/>
+        </p:nvSpPr>
+        <p:spPr>
+          <a:xfrm>
+            <a:off x="1097280" y="3593592"/>
+            <a:ext cx="10362895" cy="402336"/>
+          </a:xfrm>
+          <a:prstGeom prst="rect">
+            <a:avLst/>
+          </a:prstGeom>
+          <a:noFill/>
+        </p:spPr>
+        <p:txBody>
+          <a:bodyPr wrap="square" anchor="ctr"/>
+          <a:lstStyle/>
+          <a:p>
+            <a:r>
+              <a:rPr sz="1500" b="1" i="0">
+                <a:solidFill>
+                  <a:srgbClr val="333333"/>
+                </a:solidFill>
+                <a:latin typeface="Calibri"/>
+              </a:rPr>
+              <a:t>LOS TEXTOS REALES</a:t>
+            </a:r>
+            <a:r>
+              <a:rPr sz="1500" b="0" i="0">
+                <a:solidFill>
+                  <a:srgbClr val="333333"/>
+                </a:solidFill>
+                <a:latin typeface="Calibri"/>
+              </a:rPr>
+              <a:t> — Todos los rótulos y mensajes escritos como van a quedar. </a:t>
+            </a:r>
+            <a:r>
+              <a:rPr sz="1500" b="1" i="0">
+                <a:solidFill>
+                  <a:srgbClr val="333333"/>
+                </a:solidFill>
+                <a:latin typeface="Calibri"/>
+              </a:rPr>
+              <a:t>Cero relleno</a:t>
+            </a:r>
+            <a:r>
+              <a:rPr sz="1500" b="0" i="0">
+                <a:solidFill>
+                  <a:srgbClr val="333333"/>
+                </a:solidFill>
+                <a:latin typeface="Calibri"/>
+              </a:rPr>
+              <a:t>, cero «texto aquí», cero «lorem ipsum».</a:t>
+            </a:r>
+          </a:p>
+        </p:txBody>
+      </p:sp>
+      <p:sp>
+        <p:nvSpPr>
+          <p:cNvPr id="22" name="Rounded Rectangle 21"/>
+          <p:cNvSpPr/>
+          <p:nvPr/>
+        </p:nvSpPr>
+        <p:spPr>
+          <a:xfrm>
+            <a:off x="457200" y="4178808"/>
+            <a:ext cx="11277295" cy="566928"/>
+          </a:xfrm>
+          <a:prstGeom prst="roundRect">
+            <a:avLst>
+              <a:gd name="adj" fmla="val 12000"/>
+            </a:avLst>
+          </a:prstGeom>
+          <a:solidFill>
+            <a:srgbClr val="F2F2F2"/>
+          </a:solidFill>
+          <a:ln>
+            <a:noFill/>
+          </a:ln>
+        </p:spPr>
+        <p:style>
+          <a:lnRef idx="1">
+            <a:schemeClr val="accent1"/>
+          </a:lnRef>
+          <a:fillRef idx="3">
+            <a:schemeClr val="accent1"/>
+          </a:fillRef>
+          <a:effectRef idx="2">
+            <a:schemeClr val="accent1"/>
+          </a:effectRef>
+          <a:fontRef idx="minor">
+            <a:schemeClr val="lt1"/>
+          </a:fontRef>
+        </p:style>
+        <p:txBody>
+          <a:bodyPr rtlCol="0" anchor="ctr"/>
+          <a:lstStyle/>
+          <a:p>
+            <a:pPr algn="ctr"/>
+          </a:p>
+        </p:txBody>
+      </p:sp>
+      <p:sp>
+        <p:nvSpPr>
+          <p:cNvPr id="23" name="Rectangle 22"/>
+          <p:cNvSpPr/>
+          <p:nvPr/>
+        </p:nvSpPr>
+        <p:spPr>
+          <a:xfrm>
+            <a:off x="640080" y="4325112"/>
+            <a:ext cx="274320" cy="274320"/>
+          </a:xfrm>
+          <a:prstGeom prst="rect">
+            <a:avLst/>
+          </a:prstGeom>
+          <a:solidFill>
+            <a:srgbClr val="FFFFFF"/>
+          </a:solidFill>
+          <a:ln>
+            <a:solidFill>
+              <a:srgbClr val="333333"/>
+            </a:solidFill>
+          </a:ln>
+        </p:spPr>
+        <p:style>
+          <a:lnRef idx="1">
+            <a:schemeClr val="accent1"/>
+          </a:lnRef>
+          <a:fillRef idx="3">
+            <a:schemeClr val="accent1"/>
+          </a:fillRef>
+          <a:effectRef idx="2">
+            <a:schemeClr val="accent1"/>
+          </a:effectRef>
+          <a:fontRef idx="minor">
+            <a:schemeClr val="lt1"/>
+          </a:fontRef>
+        </p:style>
+        <p:txBody>
+          <a:bodyPr rtlCol="0" anchor="ctr"/>
+          <a:lstStyle/>
+          <a:p>
+            <a:pPr algn="ctr"/>
+          </a:p>
+        </p:txBody>
+      </p:sp>
+      <p:sp>
+        <p:nvSpPr>
+          <p:cNvPr id="24" name="Rectangle 23"/>
+          <p:cNvSpPr/>
+          <p:nvPr/>
+        </p:nvSpPr>
+        <p:spPr>
+          <a:xfrm>
+            <a:off x="640080" y="4325112"/>
+            <a:ext cx="73152" cy="274320"/>
+          </a:xfrm>
+          <a:prstGeom prst="rect">
+            <a:avLst/>
+          </a:prstGeom>
+          <a:solidFill>
+            <a:srgbClr val="269CCB"/>
+          </a:solidFill>
+          <a:ln>
+            <a:noFill/>
+          </a:ln>
+        </p:spPr>
+        <p:style>
+          <a:lnRef idx="1">
+            <a:schemeClr val="accent1"/>
+          </a:lnRef>
+          <a:fillRef idx="3">
+            <a:schemeClr val="accent1"/>
+          </a:fillRef>
+          <a:effectRef idx="2">
+            <a:schemeClr val="accent1"/>
+          </a:effectRef>
+          <a:fontRef idx="minor">
+            <a:schemeClr val="lt1"/>
+          </a:fontRef>
+        </p:style>
+        <p:txBody>
+          <a:bodyPr rtlCol="0" anchor="ctr"/>
+          <a:lstStyle/>
+          <a:p>
+            <a:pPr algn="ctr"/>
+          </a:p>
+        </p:txBody>
+      </p:sp>
+      <p:sp>
+        <p:nvSpPr>
+          <p:cNvPr id="25" name="TextBox 24"/>
+          <p:cNvSpPr txBox="1"/>
+          <p:nvPr/>
+        </p:nvSpPr>
+        <p:spPr>
+          <a:xfrm>
+            <a:off x="1097280" y="4270248"/>
+            <a:ext cx="10362895" cy="402336"/>
+          </a:xfrm>
+          <a:prstGeom prst="rect">
+            <a:avLst/>
+          </a:prstGeom>
+          <a:noFill/>
+        </p:spPr>
+        <p:txBody>
+          <a:bodyPr wrap="square" anchor="ctr"/>
+          <a:lstStyle/>
+          <a:p>
+            <a:r>
+              <a:rPr sz="1500" b="1" i="0">
+                <a:solidFill>
+                  <a:srgbClr val="333333"/>
+                </a:solidFill>
+                <a:latin typeface="Calibri"/>
+              </a:rPr>
+              <a:t>EL GUION DE PRUEBA</a:t>
+            </a:r>
+            <a:r>
+              <a:rPr sz="1500" b="0" i="0">
+                <a:solidFill>
+                  <a:srgbClr val="333333"/>
+                </a:solidFill>
+                <a:latin typeface="Calibri"/>
+              </a:rPr>
+              <a:t> — Tres tareas para pedirle a una persona ajena, salidas de los </a:t>
+            </a:r>
+            <a:r>
+              <a:rPr sz="1500" b="1" i="0">
+                <a:solidFill>
+                  <a:srgbClr val="333333"/>
+                </a:solidFill>
+                <a:latin typeface="Calibri"/>
+              </a:rPr>
+              <a:t>criterios de aceptación de la sesión 7</a:t>
+            </a:r>
+            <a:r>
+              <a:rPr sz="1500" b="0" i="0">
+                <a:solidFill>
+                  <a:srgbClr val="333333"/>
+                </a:solidFill>
+                <a:latin typeface="Calibri"/>
+              </a:rPr>
+              <a:t>, y una de ellas sobre el caso en que el sistema </a:t>
+            </a:r>
+            <a:r>
+              <a:rPr sz="1500" b="1" i="0">
+                <a:solidFill>
+                  <a:srgbClr val="333333"/>
+                </a:solidFill>
+                <a:latin typeface="Calibri"/>
+              </a:rPr>
+              <a:t>no</a:t>
+            </a:r>
+            <a:r>
+              <a:rPr sz="1500" b="0" i="0">
+                <a:solidFill>
+                  <a:srgbClr val="333333"/>
+                </a:solidFill>
+                <a:latin typeface="Calibri"/>
+              </a:rPr>
+              <a:t> tiene la respuesta.</a:t>
+            </a:r>
+          </a:p>
+        </p:txBody>
+      </p:sp>
+      <p:sp>
+        <p:nvSpPr>
+          <p:cNvPr id="26" name="TextBox 25"/>
           <p:cNvSpPr txBox="1"/>
           <p:nvPr/>
         </p:nvSpPr>
@@ -10690,6 +10108,1558 @@
 </file>
 
 <file path=ppt/slides/slide25.xml><?xml version="1.0" encoding="utf-8"?>
+<p:sld xmlns:a="http://schemas.openxmlformats.org/drawingml/2006/main" xmlns:p="http://schemas.openxmlformats.org/presentationml/2006/main" xmlns:r="http://schemas.openxmlformats.org/officeDocument/2006/relationships">
+  <p:cSld>
+    <p:bg>
+      <p:bgPr>
+        <a:solidFill>
+          <a:srgbClr val="FFFFFF"/>
+        </a:solidFill>
+        <a:effectLst/>
+      </p:bgPr>
+    </p:bg>
+    <p:spTree>
+      <p:nvGrpSpPr>
+        <p:cNvPr id="1" name=""/>
+        <p:cNvGrpSpPr/>
+        <p:nvPr/>
+      </p:nvGrpSpPr>
+      <p:grpSpPr/>
+      <p:sp>
+        <p:nvSpPr>
+          <p:cNvPr id="2" name="Rectangle 1"/>
+          <p:cNvSpPr/>
+          <p:nvPr/>
+        </p:nvSpPr>
+        <p:spPr>
+          <a:xfrm>
+            <a:off x="0" y="0"/>
+            <a:ext cx="12191695" cy="1170432"/>
+          </a:xfrm>
+          <a:prstGeom prst="rect">
+            <a:avLst/>
+          </a:prstGeom>
+          <a:solidFill>
+            <a:srgbClr val="095292"/>
+          </a:solidFill>
+          <a:ln>
+            <a:noFill/>
+          </a:ln>
+        </p:spPr>
+        <p:style>
+          <a:lnRef idx="1">
+            <a:schemeClr val="accent1"/>
+          </a:lnRef>
+          <a:fillRef idx="3">
+            <a:schemeClr val="accent1"/>
+          </a:fillRef>
+          <a:effectRef idx="2">
+            <a:schemeClr val="accent1"/>
+          </a:effectRef>
+          <a:fontRef idx="minor">
+            <a:schemeClr val="lt1"/>
+          </a:fontRef>
+        </p:style>
+        <p:txBody>
+          <a:bodyPr rtlCol="0" anchor="ctr"/>
+          <a:lstStyle/>
+          <a:p>
+            <a:pPr algn="ctr"/>
+          </a:p>
+        </p:txBody>
+      </p:sp>
+      <p:sp>
+        <p:nvSpPr>
+          <p:cNvPr id="3" name="Rectangle 2"/>
+          <p:cNvSpPr/>
+          <p:nvPr/>
+        </p:nvSpPr>
+        <p:spPr>
+          <a:xfrm>
+            <a:off x="0" y="1170432"/>
+            <a:ext cx="12191695" cy="41148"/>
+          </a:xfrm>
+          <a:prstGeom prst="rect">
+            <a:avLst/>
+          </a:prstGeom>
+          <a:solidFill>
+            <a:srgbClr val="FFD000"/>
+          </a:solidFill>
+          <a:ln>
+            <a:noFill/>
+          </a:ln>
+        </p:spPr>
+        <p:style>
+          <a:lnRef idx="1">
+            <a:schemeClr val="accent1"/>
+          </a:lnRef>
+          <a:fillRef idx="3">
+            <a:schemeClr val="accent1"/>
+          </a:fillRef>
+          <a:effectRef idx="2">
+            <a:schemeClr val="accent1"/>
+          </a:effectRef>
+          <a:fontRef idx="minor">
+            <a:schemeClr val="lt1"/>
+          </a:fontRef>
+        </p:style>
+        <p:txBody>
+          <a:bodyPr rtlCol="0" anchor="ctr"/>
+          <a:lstStyle/>
+          <a:p>
+            <a:pPr algn="ctr"/>
+          </a:p>
+        </p:txBody>
+      </p:sp>
+      <p:sp>
+        <p:nvSpPr>
+          <p:cNvPr id="4" name="TextBox 3"/>
+          <p:cNvSpPr txBox="1"/>
+          <p:nvPr/>
+        </p:nvSpPr>
+        <p:spPr>
+          <a:xfrm>
+            <a:off x="457200" y="164592"/>
+            <a:ext cx="11277295" cy="384048"/>
+          </a:xfrm>
+          <a:prstGeom prst="rect">
+            <a:avLst/>
+          </a:prstGeom>
+          <a:noFill/>
+        </p:spPr>
+        <p:txBody>
+          <a:bodyPr wrap="square">
+            <a:spAutoFit/>
+          </a:bodyPr>
+          <a:lstStyle/>
+          <a:p>
+            <a:r>
+              <a:rPr sz="2600" b="1" i="0">
+                <a:solidFill>
+                  <a:srgbClr val="FFFFFF"/>
+                </a:solidFill>
+                <a:latin typeface="Calibri"/>
+              </a:rPr>
+              <a:t>Cómo se expone en 3 minutos</a:t>
+            </a:r>
+          </a:p>
+        </p:txBody>
+      </p:sp>
+      <p:sp>
+        <p:nvSpPr>
+          <p:cNvPr id="5" name="TextBox 4"/>
+          <p:cNvSpPr txBox="1"/>
+          <p:nvPr/>
+        </p:nvSpPr>
+        <p:spPr>
+          <a:xfrm>
+            <a:off x="457200" y="566928"/>
+            <a:ext cx="11277295" cy="411480"/>
+          </a:xfrm>
+          <a:prstGeom prst="rect">
+            <a:avLst/>
+          </a:prstGeom>
+          <a:noFill/>
+        </p:spPr>
+        <p:txBody>
+          <a:bodyPr wrap="square">
+            <a:spAutoFit/>
+          </a:bodyPr>
+          <a:lstStyle/>
+          <a:p>
+            <a:r>
+              <a:rPr sz="1400" b="0" i="0">
+                <a:solidFill>
+                  <a:srgbClr val="B8D8EE"/>
+                </a:solidFill>
+                <a:latin typeface="Calibri"/>
+              </a:rPr>
+              <a:t>Habla el vocero con la pantalla ya compartida · cronómetro en pantalla · se corta al llegar a cero</a:t>
+            </a:r>
+          </a:p>
+        </p:txBody>
+      </p:sp>
+      <p:sp>
+        <p:nvSpPr>
+          <p:cNvPr id="6" name="Rounded Rectangle 5"/>
+          <p:cNvSpPr/>
+          <p:nvPr/>
+        </p:nvSpPr>
+        <p:spPr>
+          <a:xfrm>
+            <a:off x="457200" y="1444752"/>
+            <a:ext cx="11277295" cy="908913"/>
+          </a:xfrm>
+          <a:prstGeom prst="roundRect">
+            <a:avLst>
+              <a:gd name="adj" fmla="val 12000"/>
+            </a:avLst>
+          </a:prstGeom>
+          <a:solidFill>
+            <a:srgbClr val="F2F2F2"/>
+          </a:solidFill>
+          <a:ln>
+            <a:noFill/>
+          </a:ln>
+        </p:spPr>
+        <p:style>
+          <a:lnRef idx="1">
+            <a:schemeClr val="accent1"/>
+          </a:lnRef>
+          <a:fillRef idx="3">
+            <a:schemeClr val="accent1"/>
+          </a:fillRef>
+          <a:effectRef idx="2">
+            <a:schemeClr val="accent1"/>
+          </a:effectRef>
+          <a:fontRef idx="minor">
+            <a:schemeClr val="lt1"/>
+          </a:fontRef>
+        </p:style>
+        <p:txBody>
+          <a:bodyPr rtlCol="0" anchor="ctr"/>
+          <a:lstStyle/>
+          <a:p>
+            <a:pPr algn="ctr"/>
+          </a:p>
+        </p:txBody>
+      </p:sp>
+      <p:sp>
+        <p:nvSpPr>
+          <p:cNvPr id="7" name="Rounded Rectangle 6"/>
+          <p:cNvSpPr/>
+          <p:nvPr/>
+        </p:nvSpPr>
+        <p:spPr>
+          <a:xfrm>
+            <a:off x="594360" y="1679752"/>
+            <a:ext cx="438912" cy="438912"/>
+          </a:xfrm>
+          <a:prstGeom prst="roundRect">
+            <a:avLst>
+              <a:gd name="adj" fmla="val 12000"/>
+            </a:avLst>
+          </a:prstGeom>
+          <a:solidFill>
+            <a:srgbClr val="095292"/>
+          </a:solidFill>
+          <a:ln>
+            <a:noFill/>
+          </a:ln>
+        </p:spPr>
+        <p:style>
+          <a:lnRef idx="1">
+            <a:schemeClr val="accent1"/>
+          </a:lnRef>
+          <a:fillRef idx="3">
+            <a:schemeClr val="accent1"/>
+          </a:fillRef>
+          <a:effectRef idx="2">
+            <a:schemeClr val="accent1"/>
+          </a:effectRef>
+          <a:fontRef idx="minor">
+            <a:schemeClr val="lt1"/>
+          </a:fontRef>
+        </p:style>
+        <p:txBody>
+          <a:bodyPr rtlCol="0" anchor="ctr"/>
+          <a:lstStyle/>
+          <a:p>
+            <a:pPr algn="ctr"/>
+          </a:p>
+        </p:txBody>
+      </p:sp>
+      <p:sp>
+        <p:nvSpPr>
+          <p:cNvPr id="8" name="TextBox 7"/>
+          <p:cNvSpPr txBox="1"/>
+          <p:nvPr/>
+        </p:nvSpPr>
+        <p:spPr>
+          <a:xfrm>
+            <a:off x="594360" y="1679752"/>
+            <a:ext cx="438912" cy="438912"/>
+          </a:xfrm>
+          <a:prstGeom prst="rect">
+            <a:avLst/>
+          </a:prstGeom>
+          <a:noFill/>
+        </p:spPr>
+        <p:txBody>
+          <a:bodyPr wrap="square" anchor="ctr"/>
+          <a:lstStyle/>
+          <a:p>
+            <a:pPr algn="ctr"/>
+            <a:r>
+              <a:rPr sz="1600" b="1" i="0">
+                <a:solidFill>
+                  <a:srgbClr val="FFFFFF"/>
+                </a:solidFill>
+                <a:latin typeface="Calibri"/>
+              </a:rPr>
+              <a:t>1</a:t>
+            </a:r>
+          </a:p>
+        </p:txBody>
+      </p:sp>
+      <p:sp>
+        <p:nvSpPr>
+          <p:cNvPr id="9" name="TextBox 8"/>
+          <p:cNvSpPr txBox="1"/>
+          <p:nvPr/>
+        </p:nvSpPr>
+        <p:spPr>
+          <a:xfrm>
+            <a:off x="1188720" y="1536192"/>
+            <a:ext cx="10271455" cy="744321"/>
+          </a:xfrm>
+          <a:prstGeom prst="rect">
+            <a:avLst/>
+          </a:prstGeom>
+          <a:noFill/>
+        </p:spPr>
+        <p:txBody>
+          <a:bodyPr wrap="square" anchor="ctr"/>
+          <a:lstStyle/>
+          <a:p>
+            <a:r>
+              <a:rPr sz="1500" b="1" i="0">
+                <a:solidFill>
+                  <a:srgbClr val="095292"/>
+                </a:solidFill>
+                <a:latin typeface="Calibri"/>
+              </a:rPr>
+              <a:t>30 s · El flujo</a:t>
+            </a:r>
+          </a:p>
+          <a:p>
+            <a:pPr>
+              <a:spcBef>
+                <a:spcPts val="200"/>
+              </a:spcBef>
+            </a:pPr>
+            <a:r>
+              <a:rPr sz="1300" b="0" i="0">
+                <a:solidFill>
+                  <a:srgbClr val="333333"/>
+                </a:solidFill>
+                <a:latin typeface="Calibri"/>
+              </a:rPr>
+              <a:t>Los tres pasos y para qué existe cada pantalla.</a:t>
+            </a:r>
+          </a:p>
+        </p:txBody>
+      </p:sp>
+      <p:sp>
+        <p:nvSpPr>
+          <p:cNvPr id="10" name="Rounded Rectangle 9"/>
+          <p:cNvSpPr/>
+          <p:nvPr/>
+        </p:nvSpPr>
+        <p:spPr>
+          <a:xfrm>
+            <a:off x="457200" y="2445105"/>
+            <a:ext cx="11277295" cy="908913"/>
+          </a:xfrm>
+          <a:prstGeom prst="roundRect">
+            <a:avLst>
+              <a:gd name="adj" fmla="val 12000"/>
+            </a:avLst>
+          </a:prstGeom>
+          <a:solidFill>
+            <a:srgbClr val="E8F4FA"/>
+          </a:solidFill>
+          <a:ln>
+            <a:noFill/>
+          </a:ln>
+        </p:spPr>
+        <p:style>
+          <a:lnRef idx="1">
+            <a:schemeClr val="accent1"/>
+          </a:lnRef>
+          <a:fillRef idx="3">
+            <a:schemeClr val="accent1"/>
+          </a:fillRef>
+          <a:effectRef idx="2">
+            <a:schemeClr val="accent1"/>
+          </a:effectRef>
+          <a:fontRef idx="minor">
+            <a:schemeClr val="lt1"/>
+          </a:fontRef>
+        </p:style>
+        <p:txBody>
+          <a:bodyPr rtlCol="0" anchor="ctr"/>
+          <a:lstStyle/>
+          <a:p>
+            <a:pPr algn="ctr"/>
+          </a:p>
+        </p:txBody>
+      </p:sp>
+      <p:sp>
+        <p:nvSpPr>
+          <p:cNvPr id="11" name="Rounded Rectangle 10"/>
+          <p:cNvSpPr/>
+          <p:nvPr/>
+        </p:nvSpPr>
+        <p:spPr>
+          <a:xfrm>
+            <a:off x="594360" y="2680106"/>
+            <a:ext cx="438912" cy="438912"/>
+          </a:xfrm>
+          <a:prstGeom prst="roundRect">
+            <a:avLst>
+              <a:gd name="adj" fmla="val 12000"/>
+            </a:avLst>
+          </a:prstGeom>
+          <a:solidFill>
+            <a:srgbClr val="095292"/>
+          </a:solidFill>
+          <a:ln>
+            <a:noFill/>
+          </a:ln>
+        </p:spPr>
+        <p:style>
+          <a:lnRef idx="1">
+            <a:schemeClr val="accent1"/>
+          </a:lnRef>
+          <a:fillRef idx="3">
+            <a:schemeClr val="accent1"/>
+          </a:fillRef>
+          <a:effectRef idx="2">
+            <a:schemeClr val="accent1"/>
+          </a:effectRef>
+          <a:fontRef idx="minor">
+            <a:schemeClr val="lt1"/>
+          </a:fontRef>
+        </p:style>
+        <p:txBody>
+          <a:bodyPr rtlCol="0" anchor="ctr"/>
+          <a:lstStyle/>
+          <a:p>
+            <a:pPr algn="ctr"/>
+          </a:p>
+        </p:txBody>
+      </p:sp>
+      <p:sp>
+        <p:nvSpPr>
+          <p:cNvPr id="12" name="TextBox 11"/>
+          <p:cNvSpPr txBox="1"/>
+          <p:nvPr/>
+        </p:nvSpPr>
+        <p:spPr>
+          <a:xfrm>
+            <a:off x="594360" y="2680106"/>
+            <a:ext cx="438912" cy="438912"/>
+          </a:xfrm>
+          <a:prstGeom prst="rect">
+            <a:avLst/>
+          </a:prstGeom>
+          <a:noFill/>
+        </p:spPr>
+        <p:txBody>
+          <a:bodyPr wrap="square" anchor="ctr"/>
+          <a:lstStyle/>
+          <a:p>
+            <a:pPr algn="ctr"/>
+            <a:r>
+              <a:rPr sz="1600" b="1" i="0">
+                <a:solidFill>
+                  <a:srgbClr val="FFFFFF"/>
+                </a:solidFill>
+                <a:latin typeface="Calibri"/>
+              </a:rPr>
+              <a:t>2</a:t>
+            </a:r>
+          </a:p>
+        </p:txBody>
+      </p:sp>
+      <p:sp>
+        <p:nvSpPr>
+          <p:cNvPr id="13" name="TextBox 12"/>
+          <p:cNvSpPr txBox="1"/>
+          <p:nvPr/>
+        </p:nvSpPr>
+        <p:spPr>
+          <a:xfrm>
+            <a:off x="1188720" y="2536545"/>
+            <a:ext cx="10271455" cy="744321"/>
+          </a:xfrm>
+          <a:prstGeom prst="rect">
+            <a:avLst/>
+          </a:prstGeom>
+          <a:noFill/>
+        </p:spPr>
+        <p:txBody>
+          <a:bodyPr wrap="square" anchor="ctr"/>
+          <a:lstStyle/>
+          <a:p>
+            <a:r>
+              <a:rPr sz="1500" b="1" i="0">
+                <a:solidFill>
+                  <a:srgbClr val="095292"/>
+                </a:solidFill>
+                <a:latin typeface="Calibri"/>
+              </a:rPr>
+              <a:t>50 s · El camino principal</a:t>
+            </a:r>
+          </a:p>
+          <a:p>
+            <a:pPr>
+              <a:spcBef>
+                <a:spcPts val="200"/>
+              </a:spcBef>
+            </a:pPr>
+            <a:r>
+              <a:rPr sz="1300" b="0" i="0">
+                <a:solidFill>
+                  <a:srgbClr val="333333"/>
+                </a:solidFill>
+                <a:latin typeface="Calibri"/>
+              </a:rPr>
+              <a:t>Qué hace el usuario el 90 % de las veces, señalado en el dibujo.</a:t>
+            </a:r>
+          </a:p>
+        </p:txBody>
+      </p:sp>
+      <p:sp>
+        <p:nvSpPr>
+          <p:cNvPr id="14" name="Rounded Rectangle 13"/>
+          <p:cNvSpPr/>
+          <p:nvPr/>
+        </p:nvSpPr>
+        <p:spPr>
+          <a:xfrm>
+            <a:off x="457200" y="3445459"/>
+            <a:ext cx="11277295" cy="908913"/>
+          </a:xfrm>
+          <a:prstGeom prst="roundRect">
+            <a:avLst>
+              <a:gd name="adj" fmla="val 12000"/>
+            </a:avLst>
+          </a:prstGeom>
+          <a:solidFill>
+            <a:srgbClr val="F2F2F2"/>
+          </a:solidFill>
+          <a:ln>
+            <a:noFill/>
+          </a:ln>
+        </p:spPr>
+        <p:style>
+          <a:lnRef idx="1">
+            <a:schemeClr val="accent1"/>
+          </a:lnRef>
+          <a:fillRef idx="3">
+            <a:schemeClr val="accent1"/>
+          </a:fillRef>
+          <a:effectRef idx="2">
+            <a:schemeClr val="accent1"/>
+          </a:effectRef>
+          <a:fontRef idx="minor">
+            <a:schemeClr val="lt1"/>
+          </a:fontRef>
+        </p:style>
+        <p:txBody>
+          <a:bodyPr rtlCol="0" anchor="ctr"/>
+          <a:lstStyle/>
+          <a:p>
+            <a:pPr algn="ctr"/>
+          </a:p>
+        </p:txBody>
+      </p:sp>
+      <p:sp>
+        <p:nvSpPr>
+          <p:cNvPr id="15" name="Rounded Rectangle 14"/>
+          <p:cNvSpPr/>
+          <p:nvPr/>
+        </p:nvSpPr>
+        <p:spPr>
+          <a:xfrm>
+            <a:off x="594360" y="3680460"/>
+            <a:ext cx="438912" cy="438912"/>
+          </a:xfrm>
+          <a:prstGeom prst="roundRect">
+            <a:avLst>
+              <a:gd name="adj" fmla="val 12000"/>
+            </a:avLst>
+          </a:prstGeom>
+          <a:solidFill>
+            <a:srgbClr val="095292"/>
+          </a:solidFill>
+          <a:ln>
+            <a:noFill/>
+          </a:ln>
+        </p:spPr>
+        <p:style>
+          <a:lnRef idx="1">
+            <a:schemeClr val="accent1"/>
+          </a:lnRef>
+          <a:fillRef idx="3">
+            <a:schemeClr val="accent1"/>
+          </a:fillRef>
+          <a:effectRef idx="2">
+            <a:schemeClr val="accent1"/>
+          </a:effectRef>
+          <a:fontRef idx="minor">
+            <a:schemeClr val="lt1"/>
+          </a:fontRef>
+        </p:style>
+        <p:txBody>
+          <a:bodyPr rtlCol="0" anchor="ctr"/>
+          <a:lstStyle/>
+          <a:p>
+            <a:pPr algn="ctr"/>
+          </a:p>
+        </p:txBody>
+      </p:sp>
+      <p:sp>
+        <p:nvSpPr>
+          <p:cNvPr id="16" name="TextBox 15"/>
+          <p:cNvSpPr txBox="1"/>
+          <p:nvPr/>
+        </p:nvSpPr>
+        <p:spPr>
+          <a:xfrm>
+            <a:off x="594360" y="3680460"/>
+            <a:ext cx="438912" cy="438912"/>
+          </a:xfrm>
+          <a:prstGeom prst="rect">
+            <a:avLst/>
+          </a:prstGeom>
+          <a:noFill/>
+        </p:spPr>
+        <p:txBody>
+          <a:bodyPr wrap="square" anchor="ctr"/>
+          <a:lstStyle/>
+          <a:p>
+            <a:pPr algn="ctr"/>
+            <a:r>
+              <a:rPr sz="1600" b="1" i="0">
+                <a:solidFill>
+                  <a:srgbClr val="FFFFFF"/>
+                </a:solidFill>
+                <a:latin typeface="Calibri"/>
+              </a:rPr>
+              <a:t>3</a:t>
+            </a:r>
+          </a:p>
+        </p:txBody>
+      </p:sp>
+      <p:sp>
+        <p:nvSpPr>
+          <p:cNvPr id="17" name="TextBox 16"/>
+          <p:cNvSpPr txBox="1"/>
+          <p:nvPr/>
+        </p:nvSpPr>
+        <p:spPr>
+          <a:xfrm>
+            <a:off x="1188720" y="3536899"/>
+            <a:ext cx="10271455" cy="744321"/>
+          </a:xfrm>
+          <a:prstGeom prst="rect">
+            <a:avLst/>
+          </a:prstGeom>
+          <a:noFill/>
+        </p:spPr>
+        <p:txBody>
+          <a:bodyPr wrap="square" anchor="ctr"/>
+          <a:lstStyle/>
+          <a:p>
+            <a:r>
+              <a:rPr sz="1500" b="1" i="0">
+                <a:solidFill>
+                  <a:srgbClr val="095292"/>
+                </a:solidFill>
+                <a:latin typeface="Calibri"/>
+              </a:rPr>
+              <a:t>50 s · Qué se ve cuando falla</a:t>
+            </a:r>
+          </a:p>
+          <a:p>
+            <a:pPr>
+              <a:spcBef>
+                <a:spcPts val="200"/>
+              </a:spcBef>
+            </a:pPr>
+            <a:r>
+              <a:rPr sz="1300" b="0" i="0">
+                <a:solidFill>
+                  <a:srgbClr val="333333"/>
+                </a:solidFill>
+                <a:latin typeface="Calibri"/>
+              </a:rPr>
+              <a:t>Estado vacío y de error, con el mensaje leído tal cual. Es el minuto obligatorio.</a:t>
+            </a:r>
+          </a:p>
+        </p:txBody>
+      </p:sp>
+      <p:sp>
+        <p:nvSpPr>
+          <p:cNvPr id="18" name="Rounded Rectangle 17"/>
+          <p:cNvSpPr/>
+          <p:nvPr/>
+        </p:nvSpPr>
+        <p:spPr>
+          <a:xfrm>
+            <a:off x="457200" y="4445812"/>
+            <a:ext cx="11277295" cy="908913"/>
+          </a:xfrm>
+          <a:prstGeom prst="roundRect">
+            <a:avLst>
+              <a:gd name="adj" fmla="val 12000"/>
+            </a:avLst>
+          </a:prstGeom>
+          <a:solidFill>
+            <a:srgbClr val="E8F4FA"/>
+          </a:solidFill>
+          <a:ln>
+            <a:noFill/>
+          </a:ln>
+        </p:spPr>
+        <p:style>
+          <a:lnRef idx="1">
+            <a:schemeClr val="accent1"/>
+          </a:lnRef>
+          <a:fillRef idx="3">
+            <a:schemeClr val="accent1"/>
+          </a:fillRef>
+          <a:effectRef idx="2">
+            <a:schemeClr val="accent1"/>
+          </a:effectRef>
+          <a:fontRef idx="minor">
+            <a:schemeClr val="lt1"/>
+          </a:fontRef>
+        </p:style>
+        <p:txBody>
+          <a:bodyPr rtlCol="0" anchor="ctr"/>
+          <a:lstStyle/>
+          <a:p>
+            <a:pPr algn="ctr"/>
+          </a:p>
+        </p:txBody>
+      </p:sp>
+      <p:sp>
+        <p:nvSpPr>
+          <p:cNvPr id="19" name="Rounded Rectangle 18"/>
+          <p:cNvSpPr/>
+          <p:nvPr/>
+        </p:nvSpPr>
+        <p:spPr>
+          <a:xfrm>
+            <a:off x="594360" y="4680813"/>
+            <a:ext cx="438912" cy="438912"/>
+          </a:xfrm>
+          <a:prstGeom prst="roundRect">
+            <a:avLst>
+              <a:gd name="adj" fmla="val 12000"/>
+            </a:avLst>
+          </a:prstGeom>
+          <a:solidFill>
+            <a:srgbClr val="095292"/>
+          </a:solidFill>
+          <a:ln>
+            <a:noFill/>
+          </a:ln>
+        </p:spPr>
+        <p:style>
+          <a:lnRef idx="1">
+            <a:schemeClr val="accent1"/>
+          </a:lnRef>
+          <a:fillRef idx="3">
+            <a:schemeClr val="accent1"/>
+          </a:fillRef>
+          <a:effectRef idx="2">
+            <a:schemeClr val="accent1"/>
+          </a:effectRef>
+          <a:fontRef idx="minor">
+            <a:schemeClr val="lt1"/>
+          </a:fontRef>
+        </p:style>
+        <p:txBody>
+          <a:bodyPr rtlCol="0" anchor="ctr"/>
+          <a:lstStyle/>
+          <a:p>
+            <a:pPr algn="ctr"/>
+          </a:p>
+        </p:txBody>
+      </p:sp>
+      <p:sp>
+        <p:nvSpPr>
+          <p:cNvPr id="20" name="TextBox 19"/>
+          <p:cNvSpPr txBox="1"/>
+          <p:nvPr/>
+        </p:nvSpPr>
+        <p:spPr>
+          <a:xfrm>
+            <a:off x="594360" y="4680813"/>
+            <a:ext cx="438912" cy="438912"/>
+          </a:xfrm>
+          <a:prstGeom prst="rect">
+            <a:avLst/>
+          </a:prstGeom>
+          <a:noFill/>
+        </p:spPr>
+        <p:txBody>
+          <a:bodyPr wrap="square" anchor="ctr"/>
+          <a:lstStyle/>
+          <a:p>
+            <a:pPr algn="ctr"/>
+            <a:r>
+              <a:rPr sz="1600" b="1" i="0">
+                <a:solidFill>
+                  <a:srgbClr val="FFFFFF"/>
+                </a:solidFill>
+                <a:latin typeface="Calibri"/>
+              </a:rPr>
+              <a:t>4</a:t>
+            </a:r>
+          </a:p>
+        </p:txBody>
+      </p:sp>
+      <p:sp>
+        <p:nvSpPr>
+          <p:cNvPr id="21" name="TextBox 20"/>
+          <p:cNvSpPr txBox="1"/>
+          <p:nvPr/>
+        </p:nvSpPr>
+        <p:spPr>
+          <a:xfrm>
+            <a:off x="1188720" y="4537252"/>
+            <a:ext cx="10271455" cy="744321"/>
+          </a:xfrm>
+          <a:prstGeom prst="rect">
+            <a:avLst/>
+          </a:prstGeom>
+          <a:noFill/>
+        </p:spPr>
+        <p:txBody>
+          <a:bodyPr wrap="square" anchor="ctr"/>
+          <a:lstStyle/>
+          <a:p>
+            <a:r>
+              <a:rPr sz="1500" b="1" i="0">
+                <a:solidFill>
+                  <a:srgbClr val="095292"/>
+                </a:solidFill>
+                <a:latin typeface="Calibri"/>
+              </a:rPr>
+              <a:t>30 s · Los textos</a:t>
+            </a:r>
+          </a:p>
+          <a:p>
+            <a:pPr>
+              <a:spcBef>
+                <a:spcPts val="200"/>
+              </a:spcBef>
+            </a:pPr>
+            <a:r>
+              <a:rPr sz="1300" b="0" i="0">
+                <a:solidFill>
+                  <a:srgbClr val="333333"/>
+                </a:solidFill>
+                <a:latin typeface="Calibri"/>
+              </a:rPr>
+              <a:t>Dos rótulos que costó decidir y por qué quedaron así.</a:t>
+            </a:r>
+          </a:p>
+        </p:txBody>
+      </p:sp>
+      <p:sp>
+        <p:nvSpPr>
+          <p:cNvPr id="22" name="Rounded Rectangle 21"/>
+          <p:cNvSpPr/>
+          <p:nvPr/>
+        </p:nvSpPr>
+        <p:spPr>
+          <a:xfrm>
+            <a:off x="457200" y="5446166"/>
+            <a:ext cx="11277295" cy="908913"/>
+          </a:xfrm>
+          <a:prstGeom prst="roundRect">
+            <a:avLst>
+              <a:gd name="adj" fmla="val 12000"/>
+            </a:avLst>
+          </a:prstGeom>
+          <a:solidFill>
+            <a:srgbClr val="F2F2F2"/>
+          </a:solidFill>
+          <a:ln>
+            <a:noFill/>
+          </a:ln>
+        </p:spPr>
+        <p:style>
+          <a:lnRef idx="1">
+            <a:schemeClr val="accent1"/>
+          </a:lnRef>
+          <a:fillRef idx="3">
+            <a:schemeClr val="accent1"/>
+          </a:fillRef>
+          <a:effectRef idx="2">
+            <a:schemeClr val="accent1"/>
+          </a:effectRef>
+          <a:fontRef idx="minor">
+            <a:schemeClr val="lt1"/>
+          </a:fontRef>
+        </p:style>
+        <p:txBody>
+          <a:bodyPr rtlCol="0" anchor="ctr"/>
+          <a:lstStyle/>
+          <a:p>
+            <a:pPr algn="ctr"/>
+          </a:p>
+        </p:txBody>
+      </p:sp>
+      <p:sp>
+        <p:nvSpPr>
+          <p:cNvPr id="23" name="Rounded Rectangle 22"/>
+          <p:cNvSpPr/>
+          <p:nvPr/>
+        </p:nvSpPr>
+        <p:spPr>
+          <a:xfrm>
+            <a:off x="594360" y="5681167"/>
+            <a:ext cx="438912" cy="438912"/>
+          </a:xfrm>
+          <a:prstGeom prst="roundRect">
+            <a:avLst>
+              <a:gd name="adj" fmla="val 12000"/>
+            </a:avLst>
+          </a:prstGeom>
+          <a:solidFill>
+            <a:srgbClr val="095292"/>
+          </a:solidFill>
+          <a:ln>
+            <a:noFill/>
+          </a:ln>
+        </p:spPr>
+        <p:style>
+          <a:lnRef idx="1">
+            <a:schemeClr val="accent1"/>
+          </a:lnRef>
+          <a:fillRef idx="3">
+            <a:schemeClr val="accent1"/>
+          </a:fillRef>
+          <a:effectRef idx="2">
+            <a:schemeClr val="accent1"/>
+          </a:effectRef>
+          <a:fontRef idx="minor">
+            <a:schemeClr val="lt1"/>
+          </a:fontRef>
+        </p:style>
+        <p:txBody>
+          <a:bodyPr rtlCol="0" anchor="ctr"/>
+          <a:lstStyle/>
+          <a:p>
+            <a:pPr algn="ctr"/>
+          </a:p>
+        </p:txBody>
+      </p:sp>
+      <p:sp>
+        <p:nvSpPr>
+          <p:cNvPr id="24" name="TextBox 23"/>
+          <p:cNvSpPr txBox="1"/>
+          <p:nvPr/>
+        </p:nvSpPr>
+        <p:spPr>
+          <a:xfrm>
+            <a:off x="594360" y="5681167"/>
+            <a:ext cx="438912" cy="438912"/>
+          </a:xfrm>
+          <a:prstGeom prst="rect">
+            <a:avLst/>
+          </a:prstGeom>
+          <a:noFill/>
+        </p:spPr>
+        <p:txBody>
+          <a:bodyPr wrap="square" anchor="ctr"/>
+          <a:lstStyle/>
+          <a:p>
+            <a:pPr algn="ctr"/>
+            <a:r>
+              <a:rPr sz="1600" b="1" i="0">
+                <a:solidFill>
+                  <a:srgbClr val="FFFFFF"/>
+                </a:solidFill>
+                <a:latin typeface="Calibri"/>
+              </a:rPr>
+              <a:t>5</a:t>
+            </a:r>
+          </a:p>
+        </p:txBody>
+      </p:sp>
+      <p:sp>
+        <p:nvSpPr>
+          <p:cNvPr id="25" name="TextBox 24"/>
+          <p:cNvSpPr txBox="1"/>
+          <p:nvPr/>
+        </p:nvSpPr>
+        <p:spPr>
+          <a:xfrm>
+            <a:off x="1188720" y="5537606"/>
+            <a:ext cx="10271455" cy="744321"/>
+          </a:xfrm>
+          <a:prstGeom prst="rect">
+            <a:avLst/>
+          </a:prstGeom>
+          <a:noFill/>
+        </p:spPr>
+        <p:txBody>
+          <a:bodyPr wrap="square" anchor="ctr"/>
+          <a:lstStyle/>
+          <a:p>
+            <a:r>
+              <a:rPr sz="1500" b="1" i="0">
+                <a:solidFill>
+                  <a:srgbClr val="095292"/>
+                </a:solidFill>
+                <a:latin typeface="Calibri"/>
+              </a:rPr>
+              <a:t>20 s · El guion de prueba</a:t>
+            </a:r>
+          </a:p>
+          <a:p>
+            <a:pPr>
+              <a:spcBef>
+                <a:spcPts val="200"/>
+              </a:spcBef>
+            </a:pPr>
+            <a:r>
+              <a:rPr sz="1300" b="0" i="0">
+                <a:solidFill>
+                  <a:srgbClr val="333333"/>
+                </a:solidFill>
+                <a:latin typeface="Calibri"/>
+              </a:rPr>
+              <a:t>Las tres tareas, y con qué rol van a probar.</a:t>
+            </a:r>
+          </a:p>
+        </p:txBody>
+      </p:sp>
+      <p:sp>
+        <p:nvSpPr>
+          <p:cNvPr id="26" name="TextBox 25"/>
+          <p:cNvSpPr txBox="1"/>
+          <p:nvPr/>
+        </p:nvSpPr>
+        <p:spPr>
+          <a:xfrm>
+            <a:off x="11185855" y="6473952"/>
+            <a:ext cx="640080" cy="274320"/>
+          </a:xfrm>
+          <a:prstGeom prst="rect">
+            <a:avLst/>
+          </a:prstGeom>
+          <a:noFill/>
+        </p:spPr>
+        <p:txBody>
+          <a:bodyPr wrap="square">
+            <a:spAutoFit/>
+          </a:bodyPr>
+          <a:lstStyle/>
+          <a:p>
+            <a:pPr algn="r"/>
+            <a:r>
+              <a:rPr sz="1100" b="0" i="0">
+                <a:solidFill>
+                  <a:srgbClr val="666666"/>
+                </a:solidFill>
+                <a:latin typeface="Calibri"/>
+              </a:rPr>
+              <a:t>25</a:t>
+            </a:r>
+          </a:p>
+        </p:txBody>
+      </p:sp>
+    </p:spTree>
+  </p:cSld>
+  <p:clrMapOvr>
+    <a:masterClrMapping/>
+  </p:clrMapOvr>
+</p:sld>
+</file>
+
+<file path=ppt/slides/slide26.xml><?xml version="1.0" encoding="utf-8"?>
+<p:sld xmlns:a="http://schemas.openxmlformats.org/drawingml/2006/main" xmlns:p="http://schemas.openxmlformats.org/presentationml/2006/main" xmlns:r="http://schemas.openxmlformats.org/officeDocument/2006/relationships">
+  <p:cSld>
+    <p:bg>
+      <p:bgPr>
+        <a:solidFill>
+          <a:srgbClr val="FFFFFF"/>
+        </a:solidFill>
+        <a:effectLst/>
+      </p:bgPr>
+    </p:bg>
+    <p:spTree>
+      <p:nvGrpSpPr>
+        <p:cNvPr id="1" name=""/>
+        <p:cNvGrpSpPr/>
+        <p:nvPr/>
+      </p:nvGrpSpPr>
+      <p:grpSpPr/>
+      <p:sp>
+        <p:nvSpPr>
+          <p:cNvPr id="2" name="Rectangle 1"/>
+          <p:cNvSpPr/>
+          <p:nvPr/>
+        </p:nvSpPr>
+        <p:spPr>
+          <a:xfrm>
+            <a:off x="0" y="0"/>
+            <a:ext cx="12191695" cy="960120"/>
+          </a:xfrm>
+          <a:prstGeom prst="rect">
+            <a:avLst/>
+          </a:prstGeom>
+          <a:solidFill>
+            <a:srgbClr val="095292"/>
+          </a:solidFill>
+          <a:ln>
+            <a:noFill/>
+          </a:ln>
+        </p:spPr>
+        <p:style>
+          <a:lnRef idx="1">
+            <a:schemeClr val="accent1"/>
+          </a:lnRef>
+          <a:fillRef idx="3">
+            <a:schemeClr val="accent1"/>
+          </a:fillRef>
+          <a:effectRef idx="2">
+            <a:schemeClr val="accent1"/>
+          </a:effectRef>
+          <a:fontRef idx="minor">
+            <a:schemeClr val="lt1"/>
+          </a:fontRef>
+        </p:style>
+        <p:txBody>
+          <a:bodyPr rtlCol="0" anchor="ctr"/>
+          <a:lstStyle/>
+          <a:p>
+            <a:pPr algn="ctr"/>
+          </a:p>
+        </p:txBody>
+      </p:sp>
+      <p:sp>
+        <p:nvSpPr>
+          <p:cNvPr id="3" name="Rectangle 2"/>
+          <p:cNvSpPr/>
+          <p:nvPr/>
+        </p:nvSpPr>
+        <p:spPr>
+          <a:xfrm>
+            <a:off x="0" y="960120"/>
+            <a:ext cx="12191695" cy="41148"/>
+          </a:xfrm>
+          <a:prstGeom prst="rect">
+            <a:avLst/>
+          </a:prstGeom>
+          <a:solidFill>
+            <a:srgbClr val="FFD000"/>
+          </a:solidFill>
+          <a:ln>
+            <a:noFill/>
+          </a:ln>
+        </p:spPr>
+        <p:style>
+          <a:lnRef idx="1">
+            <a:schemeClr val="accent1"/>
+          </a:lnRef>
+          <a:fillRef idx="3">
+            <a:schemeClr val="accent1"/>
+          </a:fillRef>
+          <a:effectRef idx="2">
+            <a:schemeClr val="accent1"/>
+          </a:effectRef>
+          <a:fontRef idx="minor">
+            <a:schemeClr val="lt1"/>
+          </a:fontRef>
+        </p:style>
+        <p:txBody>
+          <a:bodyPr rtlCol="0" anchor="ctr"/>
+          <a:lstStyle/>
+          <a:p>
+            <a:pPr algn="ctr"/>
+          </a:p>
+        </p:txBody>
+      </p:sp>
+      <p:sp>
+        <p:nvSpPr>
+          <p:cNvPr id="4" name="TextBox 3"/>
+          <p:cNvSpPr txBox="1"/>
+          <p:nvPr/>
+        </p:nvSpPr>
+        <p:spPr>
+          <a:xfrm>
+            <a:off x="457200" y="164592"/>
+            <a:ext cx="11277295" cy="502920"/>
+          </a:xfrm>
+          <a:prstGeom prst="rect">
+            <a:avLst/>
+          </a:prstGeom>
+          <a:noFill/>
+        </p:spPr>
+        <p:txBody>
+          <a:bodyPr wrap="square">
+            <a:spAutoFit/>
+          </a:bodyPr>
+          <a:lstStyle/>
+          <a:p>
+            <a:r>
+              <a:rPr sz="2600" b="1" i="0">
+                <a:solidFill>
+                  <a:srgbClr val="FFFFFF"/>
+                </a:solidFill>
+                <a:latin typeface="Calibri"/>
+              </a:rPr>
+              <a:t>Para la Clase 11</a:t>
+            </a:r>
+          </a:p>
+        </p:txBody>
+      </p:sp>
+      <p:sp>
+        <p:nvSpPr>
+          <p:cNvPr id="5" name="TextBox 4"/>
+          <p:cNvSpPr txBox="1"/>
+          <p:nvPr/>
+        </p:nvSpPr>
+        <p:spPr>
+          <a:xfrm>
+            <a:off x="457200" y="1170432"/>
+            <a:ext cx="11277295" cy="5230368"/>
+          </a:xfrm>
+          <a:prstGeom prst="rect">
+            <a:avLst/>
+          </a:prstGeom>
+          <a:noFill/>
+        </p:spPr>
+        <p:txBody>
+          <a:bodyPr wrap="square">
+            <a:spAutoFit/>
+          </a:bodyPr>
+          <a:lstStyle/>
+          <a:p>
+            <a:pPr>
+              <a:spcAft>
+                <a:spcPts val="800"/>
+              </a:spcAft>
+            </a:pPr>
+            <a:r>
+              <a:rPr sz="2000" b="0" i="0">
+                <a:solidFill>
+                  <a:srgbClr val="333333"/>
+                </a:solidFill>
+                <a:latin typeface="Calibri"/>
+              </a:rPr>
+              <a:t>–   </a:t>
+            </a:r>
+            <a:r>
+              <a:rPr sz="2000" b="1" i="0">
+                <a:solidFill>
+                  <a:srgbClr val="333333"/>
+                </a:solidFill>
+                <a:latin typeface="Calibri"/>
+              </a:rPr>
+              <a:t>Trabajo dirigido:</a:t>
+            </a:r>
+            <a:r>
+              <a:rPr sz="2000" b="0" i="0">
+                <a:solidFill>
+                  <a:srgbClr val="333333"/>
+                </a:solidFill>
+                <a:latin typeface="Calibri"/>
+              </a:rPr>
+              <a:t> Introducción a software de prototipado — terminar las tres pantallas con </a:t>
+            </a:r>
+            <a:r>
+              <a:rPr sz="2000" b="1" i="0">
+                <a:solidFill>
+                  <a:srgbClr val="333333"/>
+                </a:solidFill>
+                <a:latin typeface="Calibri"/>
+              </a:rPr>
+              <a:t>todos</a:t>
+            </a:r>
+            <a:r>
+              <a:rPr sz="2000" b="0" i="0">
+                <a:solidFill>
+                  <a:srgbClr val="333333"/>
+                </a:solidFill>
+                <a:latin typeface="Calibri"/>
+              </a:rPr>
+              <a:t> los textos reales y los tres estados dibujados, y dejar el PNG en la carpeta del equipo.</a:t>
+            </a:r>
+          </a:p>
+          <a:p>
+            <a:pPr>
+              <a:spcAft>
+                <a:spcPts val="800"/>
+              </a:spcAft>
+            </a:pPr>
+            <a:r>
+              <a:rPr sz="2000" b="0" i="0">
+                <a:solidFill>
+                  <a:srgbClr val="333333"/>
+                </a:solidFill>
+                <a:latin typeface="Calibri"/>
+              </a:rPr>
+              <a:t>–   </a:t>
+            </a:r>
+            <a:r>
+              <a:rPr sz="2000" b="1" i="0">
+                <a:solidFill>
+                  <a:srgbClr val="333333"/>
+                </a:solidFill>
+                <a:latin typeface="Calibri"/>
+              </a:rPr>
+              <a:t>Trabajo independiente:</a:t>
+            </a:r>
+            <a:r>
+              <a:rPr sz="2000" b="0" i="0">
+                <a:solidFill>
+                  <a:srgbClr val="333333"/>
+                </a:solidFill>
+                <a:latin typeface="Calibri"/>
+              </a:rPr>
+              <a:t> Práctica básica con herramientas digitales: convertir el prototipo en </a:t>
+            </a:r>
+            <a:r>
+              <a:rPr sz="2000" b="1" i="0">
+                <a:solidFill>
+                  <a:srgbClr val="333333"/>
+                </a:solidFill>
+                <a:latin typeface="Calibri"/>
+              </a:rPr>
+              <a:t>navegable</a:t>
+            </a:r>
+            <a:r>
+              <a:rPr sz="2000" b="0" i="0">
+                <a:solidFill>
+                  <a:srgbClr val="333333"/>
+                </a:solidFill>
+                <a:latin typeface="Calibri"/>
+              </a:rPr>
+              <a:t> —diapositivas enlazadas o enlaces entre marcos— para poder recorrerlo delante de una persona.</a:t>
+            </a:r>
+          </a:p>
+          <a:p>
+            <a:pPr>
+              <a:spcAft>
+                <a:spcPts val="800"/>
+              </a:spcAft>
+            </a:pPr>
+            <a:r>
+              <a:rPr sz="2000" b="0" i="0">
+                <a:solidFill>
+                  <a:srgbClr val="333333"/>
+                </a:solidFill>
+                <a:latin typeface="Calibri"/>
+              </a:rPr>
+              <a:t>–   </a:t>
+            </a:r>
+            <a:r>
+              <a:rPr sz="2000" b="1" i="0">
+                <a:solidFill>
+                  <a:srgbClr val="333333"/>
+                </a:solidFill>
+                <a:latin typeface="Calibri"/>
+              </a:rPr>
+              <a:t>Clase 11 · Taller de prototipado inicial con IA</a:t>
+            </a:r>
+            <a:r>
+              <a:rPr sz="2000" b="0" i="0">
+                <a:solidFill>
+                  <a:srgbClr val="333333"/>
+                </a:solidFill>
+                <a:latin typeface="Calibri"/>
+              </a:rPr>
+              <a:t> — </a:t>
+            </a:r>
+            <a:r>
+              <a:rPr sz="2000" b="1" i="0">
+                <a:solidFill>
+                  <a:srgbClr val="333333"/>
+                </a:solidFill>
+                <a:latin typeface="Calibri"/>
+              </a:rPr>
+              <a:t>prototipo v2 con IA autorizada</a:t>
+            </a:r>
+            <a:r>
+              <a:rPr sz="2000" b="0" i="0">
+                <a:solidFill>
+                  <a:srgbClr val="333333"/>
+                </a:solidFill>
+                <a:latin typeface="Calibri"/>
+              </a:rPr>
+              <a:t>: generar variantes, elegir con criterio y corregir lo que la IA no sabía. Y la </a:t>
+            </a:r>
+            <a:r>
+              <a:rPr sz="2000" b="1" i="0">
+                <a:solidFill>
+                  <a:srgbClr val="333333"/>
+                </a:solidFill>
+                <a:latin typeface="Calibri"/>
+              </a:rPr>
+              <a:t>evaluación del corte 2</a:t>
+            </a:r>
+            <a:r>
+              <a:rPr sz="2000" b="0" i="0">
+                <a:solidFill>
+                  <a:srgbClr val="333333"/>
+                </a:solidFill>
+                <a:latin typeface="Calibri"/>
+              </a:rPr>
+              <a:t> en la plataforma del curso, sobre las sesiones 7 a 11.</a:t>
+            </a:r>
+          </a:p>
+          <a:p>
+            <a:pPr>
+              <a:spcAft>
+                <a:spcPts val="800"/>
+              </a:spcAft>
+            </a:pPr>
+            <a:r>
+              <a:rPr sz="2000" b="0" i="0">
+                <a:solidFill>
+                  <a:srgbClr val="333333"/>
+                </a:solidFill>
+                <a:latin typeface="Calibri"/>
+              </a:rPr>
+              <a:t>–   </a:t>
+            </a:r>
+            <a:r>
+              <a:rPr sz="2000" b="1" i="0">
+                <a:solidFill>
+                  <a:srgbClr val="333333"/>
+                </a:solidFill>
+                <a:latin typeface="Calibri"/>
+              </a:rPr>
+              <a:t>Aviso:</a:t>
+            </a:r>
+            <a:r>
+              <a:rPr sz="2000" b="0" i="0">
+                <a:solidFill>
+                  <a:srgbClr val="333333"/>
+                </a:solidFill>
+                <a:latin typeface="Calibri"/>
+              </a:rPr>
+              <a:t> La sesión 11 </a:t>
+            </a:r>
+            <a:r>
+              <a:rPr sz="2000" b="1" i="0">
+                <a:solidFill>
+                  <a:srgbClr val="333333"/>
+                </a:solidFill>
+                <a:latin typeface="Calibri"/>
+              </a:rPr>
+              <a:t>cierra el corte 2</a:t>
+            </a:r>
+            <a:r>
+              <a:rPr sz="2000" b="0" i="0">
+                <a:solidFill>
+                  <a:srgbClr val="333333"/>
+                </a:solidFill>
+                <a:latin typeface="Calibri"/>
+              </a:rPr>
+              <a:t>: hay 20 minutos de evaluación al final, sobre las sesiones 7 a 11. Traigan el prototipo terminado y navegable — sin él no hay nada que corregir con IA, y ese es el entregable de la sesión. La evaluación es </a:t>
+            </a:r>
+            <a:r>
+              <a:rPr sz="2000" b="1" i="0">
+                <a:solidFill>
+                  <a:srgbClr val="333333"/>
+                </a:solidFill>
+                <a:latin typeface="Calibri"/>
+              </a:rPr>
+              <a:t>a libro abierto sobre los documentos de su equipo</a:t>
+            </a:r>
+            <a:r>
+              <a:rPr sz="2000" b="0" i="0">
+                <a:solidFill>
+                  <a:srgbClr val="333333"/>
+                </a:solidFill>
+                <a:latin typeface="Calibri"/>
+              </a:rPr>
+              <a:t>: lean el documento «Evaluación del Corte 2 — cómo prepararse», que dice exactamente qué pestañas tener abiertas.</a:t>
+            </a:r>
+          </a:p>
+          <a:p>
+            <a:pPr>
+              <a:spcAft>
+                <a:spcPts val="800"/>
+              </a:spcAft>
+            </a:pPr>
+            <a:r>
+              <a:rPr sz="2000" b="0" i="0">
+                <a:solidFill>
+                  <a:srgbClr val="333333"/>
+                </a:solidFill>
+                <a:latin typeface="Calibri"/>
+              </a:rPr>
+              <a:t>–   </a:t>
+            </a:r>
+            <a:r>
+              <a:rPr sz="2000" b="1" i="0">
+                <a:solidFill>
+                  <a:srgbClr val="333333"/>
+                </a:solidFill>
+                <a:latin typeface="Calibri"/>
+              </a:rPr>
+              <a:t>Antes de salir:</a:t>
+            </a:r>
+            <a:r>
+              <a:rPr sz="2000" b="0" i="0">
+                <a:solidFill>
+                  <a:srgbClr val="333333"/>
+                </a:solidFill>
+                <a:latin typeface="Calibri"/>
+              </a:rPr>
+              <a:t> el enlace del documento del equipo en el chat, con permiso de lectura para el docente, y el nombre del vocero de hoy.</a:t>
+            </a:r>
+          </a:p>
+        </p:txBody>
+      </p:sp>
+      <p:sp>
+        <p:nvSpPr>
+          <p:cNvPr id="6" name="TextBox 5"/>
+          <p:cNvSpPr txBox="1"/>
+          <p:nvPr/>
+        </p:nvSpPr>
+        <p:spPr>
+          <a:xfrm>
+            <a:off x="11185855" y="6473952"/>
+            <a:ext cx="640080" cy="274320"/>
+          </a:xfrm>
+          <a:prstGeom prst="rect">
+            <a:avLst/>
+          </a:prstGeom>
+          <a:noFill/>
+        </p:spPr>
+        <p:txBody>
+          <a:bodyPr wrap="square">
+            <a:spAutoFit/>
+          </a:bodyPr>
+          <a:lstStyle/>
+          <a:p>
+            <a:pPr algn="r"/>
+            <a:r>
+              <a:rPr sz="1100" b="0" i="0">
+                <a:solidFill>
+                  <a:srgbClr val="666666"/>
+                </a:solidFill>
+                <a:latin typeface="Calibri"/>
+              </a:rPr>
+              <a:t>26</a:t>
+            </a:r>
+          </a:p>
+        </p:txBody>
+      </p:sp>
+    </p:spTree>
+  </p:cSld>
+  <p:clrMapOvr>
+    <a:masterClrMapping/>
+  </p:clrMapOvr>
+</p:sld>
+</file>
+
+<file path=ppt/slides/slide27.xml><?xml version="1.0" encoding="utf-8"?>
 <p:sld xmlns:a="http://schemas.openxmlformats.org/drawingml/2006/main" xmlns:p="http://schemas.openxmlformats.org/presentationml/2006/main" xmlns:r="http://schemas.openxmlformats.org/officeDocument/2006/relationships">
   <p:cSld>
     <p:bg>

--- a/Introduccion a la Ingenieria/Clases/Clase 10 - Herramientas digitales aplicadas a la Ingenieria/Presentacion.pptx
+++ b/Introduccion a la Ingenieria/Clases/Clase 10 - Herramientas digitales aplicadas a la Ingenieria/Presentacion.pptx
@@ -17,9 +17,6 @@
     <p:sldId id="265" r:id="rId17"/>
     <p:sldId id="266" r:id="rId18"/>
     <p:sldId id="267" r:id="rId19"/>
-    <p:sldId id="268" r:id="rId20"/>
-    <p:sldId id="269" r:id="rId21"/>
-    <p:sldId id="270" r:id="rId22"/>
   </p:sldIdLst>
   <p:sldSz cx="12191695" cy="6858000" type="screen4x3"/>
   <p:notesSz cx="6858000" cy="9144000"/>
@@ -5927,2742 +5924,6 @@
         <p:spPr>
           <a:xfrm>
             <a:off x="0" y="0"/>
-            <a:ext cx="12191695" cy="1170432"/>
-          </a:xfrm>
-          <a:prstGeom prst="rect">
-            <a:avLst/>
-          </a:prstGeom>
-          <a:solidFill>
-            <a:srgbClr val="095292"/>
-          </a:solidFill>
-          <a:ln>
-            <a:noFill/>
-          </a:ln>
-        </p:spPr>
-        <p:style>
-          <a:lnRef idx="1">
-            <a:schemeClr val="accent1"/>
-          </a:lnRef>
-          <a:fillRef idx="3">
-            <a:schemeClr val="accent1"/>
-          </a:fillRef>
-          <a:effectRef idx="2">
-            <a:schemeClr val="accent1"/>
-          </a:effectRef>
-          <a:fontRef idx="minor">
-            <a:schemeClr val="lt1"/>
-          </a:fontRef>
-        </p:style>
-        <p:txBody>
-          <a:bodyPr rtlCol="0" anchor="ctr"/>
-          <a:lstStyle/>
-          <a:p>
-            <a:pPr algn="ctr"/>
-          </a:p>
-        </p:txBody>
-      </p:sp>
-      <p:sp>
-        <p:nvSpPr>
-          <p:cNvPr id="3" name="Rectangle 2"/>
-          <p:cNvSpPr/>
-          <p:nvPr/>
-        </p:nvSpPr>
-        <p:spPr>
-          <a:xfrm>
-            <a:off x="0" y="1170432"/>
-            <a:ext cx="12191695" cy="41148"/>
-          </a:xfrm>
-          <a:prstGeom prst="rect">
-            <a:avLst/>
-          </a:prstGeom>
-          <a:solidFill>
-            <a:srgbClr val="FFD000"/>
-          </a:solidFill>
-          <a:ln>
-            <a:noFill/>
-          </a:ln>
-        </p:spPr>
-        <p:style>
-          <a:lnRef idx="1">
-            <a:schemeClr val="accent1"/>
-          </a:lnRef>
-          <a:fillRef idx="3">
-            <a:schemeClr val="accent1"/>
-          </a:fillRef>
-          <a:effectRef idx="2">
-            <a:schemeClr val="accent1"/>
-          </a:effectRef>
-          <a:fontRef idx="minor">
-            <a:schemeClr val="lt1"/>
-          </a:fontRef>
-        </p:style>
-        <p:txBody>
-          <a:bodyPr rtlCol="0" anchor="ctr"/>
-          <a:lstStyle/>
-          <a:p>
-            <a:pPr algn="ctr"/>
-          </a:p>
-        </p:txBody>
-      </p:sp>
-      <p:sp>
-        <p:nvSpPr>
-          <p:cNvPr id="4" name="TextBox 3"/>
-          <p:cNvSpPr txBox="1"/>
-          <p:nvPr/>
-        </p:nvSpPr>
-        <p:spPr>
-          <a:xfrm>
-            <a:off x="457200" y="164592"/>
-            <a:ext cx="11277295" cy="384048"/>
-          </a:xfrm>
-          <a:prstGeom prst="rect">
-            <a:avLst/>
-          </a:prstGeom>
-          <a:noFill/>
-        </p:spPr>
-        <p:txBody>
-          <a:bodyPr wrap="square">
-            <a:spAutoFit/>
-          </a:bodyPr>
-          <a:lstStyle/>
-          <a:p>
-            <a:r>
-              <a:rPr sz="2600" b="1" i="0">
-                <a:solidFill>
-                  <a:srgbClr val="FFFFFF"/>
-                </a:solidFill>
-                <a:latin typeface="Calibri"/>
-              </a:rPr>
-              <a:t>Taller de hoy: Prototipo de baja fidelidad</a:t>
-            </a:r>
-          </a:p>
-        </p:txBody>
-      </p:sp>
-      <p:sp>
-        <p:nvSpPr>
-          <p:cNvPr id="5" name="TextBox 4"/>
-          <p:cNvSpPr txBox="1"/>
-          <p:nvPr/>
-        </p:nvSpPr>
-        <p:spPr>
-          <a:xfrm>
-            <a:off x="457200" y="566928"/>
-            <a:ext cx="11277295" cy="411480"/>
-          </a:xfrm>
-          <a:prstGeom prst="rect">
-            <a:avLst/>
-          </a:prstGeom>
-          <a:noFill/>
-        </p:spPr>
-        <p:txBody>
-          <a:bodyPr wrap="square">
-            <a:spAutoFit/>
-          </a:bodyPr>
-          <a:lstStyle/>
-          <a:p>
-            <a:r>
-              <a:rPr sz="1400" b="0" i="0">
-                <a:solidFill>
-                  <a:srgbClr val="B8D8EE"/>
-                </a:solidFill>
-                <a:latin typeface="Calibri"/>
-              </a:rPr>
-              <a:t>17 min en equipos · 2 dibujan · 2 escriben textos · 1 escribe el guion de prueba · prototipo de tres pantallas + guion de prueba con tres tareas</a:t>
-            </a:r>
-          </a:p>
-        </p:txBody>
-      </p:sp>
-      <p:sp>
-        <p:nvSpPr>
-          <p:cNvPr id="6" name="Rounded Rectangle 5"/>
-          <p:cNvSpPr/>
-          <p:nvPr/>
-        </p:nvSpPr>
-        <p:spPr>
-          <a:xfrm>
-            <a:off x="457200" y="1472184"/>
-            <a:ext cx="11277295" cy="566928"/>
-          </a:xfrm>
-          <a:prstGeom prst="roundRect">
-            <a:avLst>
-              <a:gd name="adj" fmla="val 12000"/>
-            </a:avLst>
-          </a:prstGeom>
-          <a:solidFill>
-            <a:srgbClr val="F2F2F2"/>
-          </a:solidFill>
-          <a:ln>
-            <a:noFill/>
-          </a:ln>
-        </p:spPr>
-        <p:style>
-          <a:lnRef idx="1">
-            <a:schemeClr val="accent1"/>
-          </a:lnRef>
-          <a:fillRef idx="3">
-            <a:schemeClr val="accent1"/>
-          </a:fillRef>
-          <a:effectRef idx="2">
-            <a:schemeClr val="accent1"/>
-          </a:effectRef>
-          <a:fontRef idx="minor">
-            <a:schemeClr val="lt1"/>
-          </a:fontRef>
-        </p:style>
-        <p:txBody>
-          <a:bodyPr rtlCol="0" anchor="ctr"/>
-          <a:lstStyle/>
-          <a:p>
-            <a:pPr algn="ctr"/>
-          </a:p>
-        </p:txBody>
-      </p:sp>
-      <p:sp>
-        <p:nvSpPr>
-          <p:cNvPr id="7" name="Rectangle 6"/>
-          <p:cNvSpPr/>
-          <p:nvPr/>
-        </p:nvSpPr>
-        <p:spPr>
-          <a:xfrm>
-            <a:off x="640080" y="1618487"/>
-            <a:ext cx="274320" cy="274320"/>
-          </a:xfrm>
-          <a:prstGeom prst="rect">
-            <a:avLst/>
-          </a:prstGeom>
-          <a:solidFill>
-            <a:srgbClr val="FFFFFF"/>
-          </a:solidFill>
-          <a:ln>
-            <a:solidFill>
-              <a:srgbClr val="333333"/>
-            </a:solidFill>
-          </a:ln>
-        </p:spPr>
-        <p:style>
-          <a:lnRef idx="1">
-            <a:schemeClr val="accent1"/>
-          </a:lnRef>
-          <a:fillRef idx="3">
-            <a:schemeClr val="accent1"/>
-          </a:fillRef>
-          <a:effectRef idx="2">
-            <a:schemeClr val="accent1"/>
-          </a:effectRef>
-          <a:fontRef idx="minor">
-            <a:schemeClr val="lt1"/>
-          </a:fontRef>
-        </p:style>
-        <p:txBody>
-          <a:bodyPr rtlCol="0" anchor="ctr"/>
-          <a:lstStyle/>
-          <a:p>
-            <a:pPr algn="ctr"/>
-          </a:p>
-        </p:txBody>
-      </p:sp>
-      <p:sp>
-        <p:nvSpPr>
-          <p:cNvPr id="8" name="Rectangle 7"/>
-          <p:cNvSpPr/>
-          <p:nvPr/>
-        </p:nvSpPr>
-        <p:spPr>
-          <a:xfrm>
-            <a:off x="640080" y="1618487"/>
-            <a:ext cx="73152" cy="274320"/>
-          </a:xfrm>
-          <a:prstGeom prst="rect">
-            <a:avLst/>
-          </a:prstGeom>
-          <a:solidFill>
-            <a:srgbClr val="269CCB"/>
-          </a:solidFill>
-          <a:ln>
-            <a:noFill/>
-          </a:ln>
-        </p:spPr>
-        <p:style>
-          <a:lnRef idx="1">
-            <a:schemeClr val="accent1"/>
-          </a:lnRef>
-          <a:fillRef idx="3">
-            <a:schemeClr val="accent1"/>
-          </a:fillRef>
-          <a:effectRef idx="2">
-            <a:schemeClr val="accent1"/>
-          </a:effectRef>
-          <a:fontRef idx="minor">
-            <a:schemeClr val="lt1"/>
-          </a:fontRef>
-        </p:style>
-        <p:txBody>
-          <a:bodyPr rtlCol="0" anchor="ctr"/>
-          <a:lstStyle/>
-          <a:p>
-            <a:pPr algn="ctr"/>
-          </a:p>
-        </p:txBody>
-      </p:sp>
-      <p:sp>
-        <p:nvSpPr>
-          <p:cNvPr id="9" name="TextBox 8"/>
-          <p:cNvSpPr txBox="1"/>
-          <p:nvPr/>
-        </p:nvSpPr>
-        <p:spPr>
-          <a:xfrm>
-            <a:off x="1097280" y="1563624"/>
-            <a:ext cx="10362895" cy="402336"/>
-          </a:xfrm>
-          <a:prstGeom prst="rect">
-            <a:avLst/>
-          </a:prstGeom>
-          <a:noFill/>
-        </p:spPr>
-        <p:txBody>
-          <a:bodyPr wrap="square" anchor="ctr"/>
-          <a:lstStyle/>
-          <a:p>
-            <a:r>
-              <a:rPr sz="1500" b="1" i="0">
-                <a:solidFill>
-                  <a:srgbClr val="333333"/>
-                </a:solidFill>
-                <a:latin typeface="Calibri"/>
-              </a:rPr>
-              <a:t>EL FLUJO EN TRES PASOS</a:t>
-            </a:r>
-            <a:r>
-              <a:rPr sz="1500" b="0" i="0">
-                <a:solidFill>
-                  <a:srgbClr val="333333"/>
-                </a:solidFill>
-                <a:latin typeface="Calibri"/>
-              </a:rPr>
-              <a:t> — El camino principal del alcance mínimo, en tres pantallas o tres pasos, y </a:t>
-            </a:r>
-            <a:r>
-              <a:rPr sz="1500" b="1" i="0">
-                <a:solidFill>
-                  <a:srgbClr val="333333"/>
-                </a:solidFill>
-                <a:latin typeface="Calibri"/>
-              </a:rPr>
-              <a:t>una frase de propósito por cada uno</a:t>
-            </a:r>
-            <a:r>
-              <a:rPr sz="1500" b="0" i="0">
-                <a:solidFill>
-                  <a:srgbClr val="333333"/>
-                </a:solidFill>
-                <a:latin typeface="Calibri"/>
-              </a:rPr>
-              <a:t>.</a:t>
-            </a:r>
-          </a:p>
-        </p:txBody>
-      </p:sp>
-      <p:sp>
-        <p:nvSpPr>
-          <p:cNvPr id="10" name="Rounded Rectangle 9"/>
-          <p:cNvSpPr/>
-          <p:nvPr/>
-        </p:nvSpPr>
-        <p:spPr>
-          <a:xfrm>
-            <a:off x="457200" y="2148839"/>
-            <a:ext cx="11277295" cy="566928"/>
-          </a:xfrm>
-          <a:prstGeom prst="roundRect">
-            <a:avLst>
-              <a:gd name="adj" fmla="val 12000"/>
-            </a:avLst>
-          </a:prstGeom>
-          <a:solidFill>
-            <a:srgbClr val="F2F2F2"/>
-          </a:solidFill>
-          <a:ln>
-            <a:noFill/>
-          </a:ln>
-        </p:spPr>
-        <p:style>
-          <a:lnRef idx="1">
-            <a:schemeClr val="accent1"/>
-          </a:lnRef>
-          <a:fillRef idx="3">
-            <a:schemeClr val="accent1"/>
-          </a:fillRef>
-          <a:effectRef idx="2">
-            <a:schemeClr val="accent1"/>
-          </a:effectRef>
-          <a:fontRef idx="minor">
-            <a:schemeClr val="lt1"/>
-          </a:fontRef>
-        </p:style>
-        <p:txBody>
-          <a:bodyPr rtlCol="0" anchor="ctr"/>
-          <a:lstStyle/>
-          <a:p>
-            <a:pPr algn="ctr"/>
-          </a:p>
-        </p:txBody>
-      </p:sp>
-      <p:sp>
-        <p:nvSpPr>
-          <p:cNvPr id="11" name="Rectangle 10"/>
-          <p:cNvSpPr/>
-          <p:nvPr/>
-        </p:nvSpPr>
-        <p:spPr>
-          <a:xfrm>
-            <a:off x="640080" y="2295144"/>
-            <a:ext cx="274320" cy="274320"/>
-          </a:xfrm>
-          <a:prstGeom prst="rect">
-            <a:avLst/>
-          </a:prstGeom>
-          <a:solidFill>
-            <a:srgbClr val="FFFFFF"/>
-          </a:solidFill>
-          <a:ln>
-            <a:solidFill>
-              <a:srgbClr val="333333"/>
-            </a:solidFill>
-          </a:ln>
-        </p:spPr>
-        <p:style>
-          <a:lnRef idx="1">
-            <a:schemeClr val="accent1"/>
-          </a:lnRef>
-          <a:fillRef idx="3">
-            <a:schemeClr val="accent1"/>
-          </a:fillRef>
-          <a:effectRef idx="2">
-            <a:schemeClr val="accent1"/>
-          </a:effectRef>
-          <a:fontRef idx="minor">
-            <a:schemeClr val="lt1"/>
-          </a:fontRef>
-        </p:style>
-        <p:txBody>
-          <a:bodyPr rtlCol="0" anchor="ctr"/>
-          <a:lstStyle/>
-          <a:p>
-            <a:pPr algn="ctr"/>
-          </a:p>
-        </p:txBody>
-      </p:sp>
-      <p:sp>
-        <p:nvSpPr>
-          <p:cNvPr id="12" name="Rectangle 11"/>
-          <p:cNvSpPr/>
-          <p:nvPr/>
-        </p:nvSpPr>
-        <p:spPr>
-          <a:xfrm>
-            <a:off x="640080" y="2295144"/>
-            <a:ext cx="73152" cy="274320"/>
-          </a:xfrm>
-          <a:prstGeom prst="rect">
-            <a:avLst/>
-          </a:prstGeom>
-          <a:solidFill>
-            <a:srgbClr val="269CCB"/>
-          </a:solidFill>
-          <a:ln>
-            <a:noFill/>
-          </a:ln>
-        </p:spPr>
-        <p:style>
-          <a:lnRef idx="1">
-            <a:schemeClr val="accent1"/>
-          </a:lnRef>
-          <a:fillRef idx="3">
-            <a:schemeClr val="accent1"/>
-          </a:fillRef>
-          <a:effectRef idx="2">
-            <a:schemeClr val="accent1"/>
-          </a:effectRef>
-          <a:fontRef idx="minor">
-            <a:schemeClr val="lt1"/>
-          </a:fontRef>
-        </p:style>
-        <p:txBody>
-          <a:bodyPr rtlCol="0" anchor="ctr"/>
-          <a:lstStyle/>
-          <a:p>
-            <a:pPr algn="ctr"/>
-          </a:p>
-        </p:txBody>
-      </p:sp>
-      <p:sp>
-        <p:nvSpPr>
-          <p:cNvPr id="13" name="TextBox 12"/>
-          <p:cNvSpPr txBox="1"/>
-          <p:nvPr/>
-        </p:nvSpPr>
-        <p:spPr>
-          <a:xfrm>
-            <a:off x="1097280" y="2240279"/>
-            <a:ext cx="10362895" cy="402336"/>
-          </a:xfrm>
-          <a:prstGeom prst="rect">
-            <a:avLst/>
-          </a:prstGeom>
-          <a:noFill/>
-        </p:spPr>
-        <p:txBody>
-          <a:bodyPr wrap="square" anchor="ctr"/>
-          <a:lstStyle/>
-          <a:p>
-            <a:r>
-              <a:rPr sz="1500" b="1" i="0">
-                <a:solidFill>
-                  <a:srgbClr val="333333"/>
-                </a:solidFill>
-                <a:latin typeface="Calibri"/>
-              </a:rPr>
-              <a:t>LAS TRES PANTALLAS DIBUJADAS</a:t>
-            </a:r>
-            <a:r>
-              <a:rPr sz="1500" b="0" i="0">
-                <a:solidFill>
-                  <a:srgbClr val="333333"/>
-                </a:solidFill>
-                <a:latin typeface="Calibri"/>
-              </a:rPr>
-              <a:t> — Las tres dibujadas de verdad, con el camino principal grande y primero, y una </a:t>
-            </a:r>
-            <a:r>
-              <a:rPr sz="1500" b="1" i="0">
-                <a:solidFill>
-                  <a:srgbClr val="333333"/>
-                </a:solidFill>
-                <a:latin typeface="Calibri"/>
-              </a:rPr>
-              <a:t>flecha con destino</a:t>
-            </a:r>
-            <a:r>
-              <a:rPr sz="1500" b="0" i="0">
-                <a:solidFill>
-                  <a:srgbClr val="333333"/>
-                </a:solidFill>
-                <a:latin typeface="Calibri"/>
-              </a:rPr>
-              <a:t> por cada botón.</a:t>
-            </a:r>
-          </a:p>
-        </p:txBody>
-      </p:sp>
-      <p:sp>
-        <p:nvSpPr>
-          <p:cNvPr id="14" name="Rounded Rectangle 13"/>
-          <p:cNvSpPr/>
-          <p:nvPr/>
-        </p:nvSpPr>
-        <p:spPr>
-          <a:xfrm>
-            <a:off x="457200" y="2825496"/>
-            <a:ext cx="11277295" cy="566928"/>
-          </a:xfrm>
-          <a:prstGeom prst="roundRect">
-            <a:avLst>
-              <a:gd name="adj" fmla="val 12000"/>
-            </a:avLst>
-          </a:prstGeom>
-          <a:solidFill>
-            <a:srgbClr val="F2F2F2"/>
-          </a:solidFill>
-          <a:ln>
-            <a:noFill/>
-          </a:ln>
-        </p:spPr>
-        <p:style>
-          <a:lnRef idx="1">
-            <a:schemeClr val="accent1"/>
-          </a:lnRef>
-          <a:fillRef idx="3">
-            <a:schemeClr val="accent1"/>
-          </a:fillRef>
-          <a:effectRef idx="2">
-            <a:schemeClr val="accent1"/>
-          </a:effectRef>
-          <a:fontRef idx="minor">
-            <a:schemeClr val="lt1"/>
-          </a:fontRef>
-        </p:style>
-        <p:txBody>
-          <a:bodyPr rtlCol="0" anchor="ctr"/>
-          <a:lstStyle/>
-          <a:p>
-            <a:pPr algn="ctr"/>
-          </a:p>
-        </p:txBody>
-      </p:sp>
-      <p:sp>
-        <p:nvSpPr>
-          <p:cNvPr id="15" name="Rectangle 14"/>
-          <p:cNvSpPr/>
-          <p:nvPr/>
-        </p:nvSpPr>
-        <p:spPr>
-          <a:xfrm>
-            <a:off x="640080" y="2971800"/>
-            <a:ext cx="274320" cy="274320"/>
-          </a:xfrm>
-          <a:prstGeom prst="rect">
-            <a:avLst/>
-          </a:prstGeom>
-          <a:solidFill>
-            <a:srgbClr val="FFFFFF"/>
-          </a:solidFill>
-          <a:ln>
-            <a:solidFill>
-              <a:srgbClr val="333333"/>
-            </a:solidFill>
-          </a:ln>
-        </p:spPr>
-        <p:style>
-          <a:lnRef idx="1">
-            <a:schemeClr val="accent1"/>
-          </a:lnRef>
-          <a:fillRef idx="3">
-            <a:schemeClr val="accent1"/>
-          </a:fillRef>
-          <a:effectRef idx="2">
-            <a:schemeClr val="accent1"/>
-          </a:effectRef>
-          <a:fontRef idx="minor">
-            <a:schemeClr val="lt1"/>
-          </a:fontRef>
-        </p:style>
-        <p:txBody>
-          <a:bodyPr rtlCol="0" anchor="ctr"/>
-          <a:lstStyle/>
-          <a:p>
-            <a:pPr algn="ctr"/>
-          </a:p>
-        </p:txBody>
-      </p:sp>
-      <p:sp>
-        <p:nvSpPr>
-          <p:cNvPr id="16" name="Rectangle 15"/>
-          <p:cNvSpPr/>
-          <p:nvPr/>
-        </p:nvSpPr>
-        <p:spPr>
-          <a:xfrm>
-            <a:off x="640080" y="2971800"/>
-            <a:ext cx="73152" cy="274320"/>
-          </a:xfrm>
-          <a:prstGeom prst="rect">
-            <a:avLst/>
-          </a:prstGeom>
-          <a:solidFill>
-            <a:srgbClr val="269CCB"/>
-          </a:solidFill>
-          <a:ln>
-            <a:noFill/>
-          </a:ln>
-        </p:spPr>
-        <p:style>
-          <a:lnRef idx="1">
-            <a:schemeClr val="accent1"/>
-          </a:lnRef>
-          <a:fillRef idx="3">
-            <a:schemeClr val="accent1"/>
-          </a:fillRef>
-          <a:effectRef idx="2">
-            <a:schemeClr val="accent1"/>
-          </a:effectRef>
-          <a:fontRef idx="minor">
-            <a:schemeClr val="lt1"/>
-          </a:fontRef>
-        </p:style>
-        <p:txBody>
-          <a:bodyPr rtlCol="0" anchor="ctr"/>
-          <a:lstStyle/>
-          <a:p>
-            <a:pPr algn="ctr"/>
-          </a:p>
-        </p:txBody>
-      </p:sp>
-      <p:sp>
-        <p:nvSpPr>
-          <p:cNvPr id="17" name="TextBox 16"/>
-          <p:cNvSpPr txBox="1"/>
-          <p:nvPr/>
-        </p:nvSpPr>
-        <p:spPr>
-          <a:xfrm>
-            <a:off x="1097280" y="2916936"/>
-            <a:ext cx="10362895" cy="402336"/>
-          </a:xfrm>
-          <a:prstGeom prst="rect">
-            <a:avLst/>
-          </a:prstGeom>
-          <a:noFill/>
-        </p:spPr>
-        <p:txBody>
-          <a:bodyPr wrap="square" anchor="ctr"/>
-          <a:lstStyle/>
-          <a:p>
-            <a:r>
-              <a:rPr sz="1500" b="1" i="0">
-                <a:solidFill>
-                  <a:srgbClr val="333333"/>
-                </a:solidFill>
-                <a:latin typeface="Calibri"/>
-              </a:rPr>
-              <a:t>EL ESTADO VACÍO Y EL DE ERROR</a:t>
-            </a:r>
-            <a:r>
-              <a:rPr sz="1500" b="0" i="0">
-                <a:solidFill>
-                  <a:srgbClr val="333333"/>
-                </a:solidFill>
-                <a:latin typeface="Calibri"/>
-              </a:rPr>
-              <a:t> — Qué se ve la primera vez sin datos, qué se ve cuando la búsqueda no encuentra nada, y qué se ve cuando algo falla. </a:t>
-            </a:r>
-            <a:r>
-              <a:rPr sz="1500" b="1" i="0">
-                <a:solidFill>
-                  <a:srgbClr val="333333"/>
-                </a:solidFill>
-                <a:latin typeface="Calibri"/>
-              </a:rPr>
-              <a:t>Con el texto exacto del mensaje.</a:t>
-            </a:r>
-          </a:p>
-        </p:txBody>
-      </p:sp>
-      <p:sp>
-        <p:nvSpPr>
-          <p:cNvPr id="18" name="Rounded Rectangle 17"/>
-          <p:cNvSpPr/>
-          <p:nvPr/>
-        </p:nvSpPr>
-        <p:spPr>
-          <a:xfrm>
-            <a:off x="457200" y="3502152"/>
-            <a:ext cx="11277295" cy="566928"/>
-          </a:xfrm>
-          <a:prstGeom prst="roundRect">
-            <a:avLst>
-              <a:gd name="adj" fmla="val 12000"/>
-            </a:avLst>
-          </a:prstGeom>
-          <a:solidFill>
-            <a:srgbClr val="F2F2F2"/>
-          </a:solidFill>
-          <a:ln>
-            <a:noFill/>
-          </a:ln>
-        </p:spPr>
-        <p:style>
-          <a:lnRef idx="1">
-            <a:schemeClr val="accent1"/>
-          </a:lnRef>
-          <a:fillRef idx="3">
-            <a:schemeClr val="accent1"/>
-          </a:fillRef>
-          <a:effectRef idx="2">
-            <a:schemeClr val="accent1"/>
-          </a:effectRef>
-          <a:fontRef idx="minor">
-            <a:schemeClr val="lt1"/>
-          </a:fontRef>
-        </p:style>
-        <p:txBody>
-          <a:bodyPr rtlCol="0" anchor="ctr"/>
-          <a:lstStyle/>
-          <a:p>
-            <a:pPr algn="ctr"/>
-          </a:p>
-        </p:txBody>
-      </p:sp>
-      <p:sp>
-        <p:nvSpPr>
-          <p:cNvPr id="19" name="Rectangle 18"/>
-          <p:cNvSpPr/>
-          <p:nvPr/>
-        </p:nvSpPr>
-        <p:spPr>
-          <a:xfrm>
-            <a:off x="640080" y="3648456"/>
-            <a:ext cx="274320" cy="274320"/>
-          </a:xfrm>
-          <a:prstGeom prst="rect">
-            <a:avLst/>
-          </a:prstGeom>
-          <a:solidFill>
-            <a:srgbClr val="FFFFFF"/>
-          </a:solidFill>
-          <a:ln>
-            <a:solidFill>
-              <a:srgbClr val="333333"/>
-            </a:solidFill>
-          </a:ln>
-        </p:spPr>
-        <p:style>
-          <a:lnRef idx="1">
-            <a:schemeClr val="accent1"/>
-          </a:lnRef>
-          <a:fillRef idx="3">
-            <a:schemeClr val="accent1"/>
-          </a:fillRef>
-          <a:effectRef idx="2">
-            <a:schemeClr val="accent1"/>
-          </a:effectRef>
-          <a:fontRef idx="minor">
-            <a:schemeClr val="lt1"/>
-          </a:fontRef>
-        </p:style>
-        <p:txBody>
-          <a:bodyPr rtlCol="0" anchor="ctr"/>
-          <a:lstStyle/>
-          <a:p>
-            <a:pPr algn="ctr"/>
-          </a:p>
-        </p:txBody>
-      </p:sp>
-      <p:sp>
-        <p:nvSpPr>
-          <p:cNvPr id="20" name="Rectangle 19"/>
-          <p:cNvSpPr/>
-          <p:nvPr/>
-        </p:nvSpPr>
-        <p:spPr>
-          <a:xfrm>
-            <a:off x="640080" y="3648456"/>
-            <a:ext cx="73152" cy="274320"/>
-          </a:xfrm>
-          <a:prstGeom prst="rect">
-            <a:avLst/>
-          </a:prstGeom>
-          <a:solidFill>
-            <a:srgbClr val="269CCB"/>
-          </a:solidFill>
-          <a:ln>
-            <a:noFill/>
-          </a:ln>
-        </p:spPr>
-        <p:style>
-          <a:lnRef idx="1">
-            <a:schemeClr val="accent1"/>
-          </a:lnRef>
-          <a:fillRef idx="3">
-            <a:schemeClr val="accent1"/>
-          </a:fillRef>
-          <a:effectRef idx="2">
-            <a:schemeClr val="accent1"/>
-          </a:effectRef>
-          <a:fontRef idx="minor">
-            <a:schemeClr val="lt1"/>
-          </a:fontRef>
-        </p:style>
-        <p:txBody>
-          <a:bodyPr rtlCol="0" anchor="ctr"/>
-          <a:lstStyle/>
-          <a:p>
-            <a:pPr algn="ctr"/>
-          </a:p>
-        </p:txBody>
-      </p:sp>
-      <p:sp>
-        <p:nvSpPr>
-          <p:cNvPr id="21" name="TextBox 20"/>
-          <p:cNvSpPr txBox="1"/>
-          <p:nvPr/>
-        </p:nvSpPr>
-        <p:spPr>
-          <a:xfrm>
-            <a:off x="1097280" y="3593592"/>
-            <a:ext cx="10362895" cy="402336"/>
-          </a:xfrm>
-          <a:prstGeom prst="rect">
-            <a:avLst/>
-          </a:prstGeom>
-          <a:noFill/>
-        </p:spPr>
-        <p:txBody>
-          <a:bodyPr wrap="square" anchor="ctr"/>
-          <a:lstStyle/>
-          <a:p>
-            <a:r>
-              <a:rPr sz="1500" b="1" i="0">
-                <a:solidFill>
-                  <a:srgbClr val="333333"/>
-                </a:solidFill>
-                <a:latin typeface="Calibri"/>
-              </a:rPr>
-              <a:t>LOS TEXTOS REALES</a:t>
-            </a:r>
-            <a:r>
-              <a:rPr sz="1500" b="0" i="0">
-                <a:solidFill>
-                  <a:srgbClr val="333333"/>
-                </a:solidFill>
-                <a:latin typeface="Calibri"/>
-              </a:rPr>
-              <a:t> — Todos los rótulos y mensajes escritos como van a quedar. </a:t>
-            </a:r>
-            <a:r>
-              <a:rPr sz="1500" b="1" i="0">
-                <a:solidFill>
-                  <a:srgbClr val="333333"/>
-                </a:solidFill>
-                <a:latin typeface="Calibri"/>
-              </a:rPr>
-              <a:t>Cero relleno</a:t>
-            </a:r>
-            <a:r>
-              <a:rPr sz="1500" b="0" i="0">
-                <a:solidFill>
-                  <a:srgbClr val="333333"/>
-                </a:solidFill>
-                <a:latin typeface="Calibri"/>
-              </a:rPr>
-              <a:t>, cero «texto aquí», cero «lorem ipsum».</a:t>
-            </a:r>
-          </a:p>
-        </p:txBody>
-      </p:sp>
-      <p:sp>
-        <p:nvSpPr>
-          <p:cNvPr id="22" name="Rounded Rectangle 21"/>
-          <p:cNvSpPr/>
-          <p:nvPr/>
-        </p:nvSpPr>
-        <p:spPr>
-          <a:xfrm>
-            <a:off x="457200" y="4178808"/>
-            <a:ext cx="11277295" cy="566928"/>
-          </a:xfrm>
-          <a:prstGeom prst="roundRect">
-            <a:avLst>
-              <a:gd name="adj" fmla="val 12000"/>
-            </a:avLst>
-          </a:prstGeom>
-          <a:solidFill>
-            <a:srgbClr val="F2F2F2"/>
-          </a:solidFill>
-          <a:ln>
-            <a:noFill/>
-          </a:ln>
-        </p:spPr>
-        <p:style>
-          <a:lnRef idx="1">
-            <a:schemeClr val="accent1"/>
-          </a:lnRef>
-          <a:fillRef idx="3">
-            <a:schemeClr val="accent1"/>
-          </a:fillRef>
-          <a:effectRef idx="2">
-            <a:schemeClr val="accent1"/>
-          </a:effectRef>
-          <a:fontRef idx="minor">
-            <a:schemeClr val="lt1"/>
-          </a:fontRef>
-        </p:style>
-        <p:txBody>
-          <a:bodyPr rtlCol="0" anchor="ctr"/>
-          <a:lstStyle/>
-          <a:p>
-            <a:pPr algn="ctr"/>
-          </a:p>
-        </p:txBody>
-      </p:sp>
-      <p:sp>
-        <p:nvSpPr>
-          <p:cNvPr id="23" name="Rectangle 22"/>
-          <p:cNvSpPr/>
-          <p:nvPr/>
-        </p:nvSpPr>
-        <p:spPr>
-          <a:xfrm>
-            <a:off x="640080" y="4325112"/>
-            <a:ext cx="274320" cy="274320"/>
-          </a:xfrm>
-          <a:prstGeom prst="rect">
-            <a:avLst/>
-          </a:prstGeom>
-          <a:solidFill>
-            <a:srgbClr val="FFFFFF"/>
-          </a:solidFill>
-          <a:ln>
-            <a:solidFill>
-              <a:srgbClr val="333333"/>
-            </a:solidFill>
-          </a:ln>
-        </p:spPr>
-        <p:style>
-          <a:lnRef idx="1">
-            <a:schemeClr val="accent1"/>
-          </a:lnRef>
-          <a:fillRef idx="3">
-            <a:schemeClr val="accent1"/>
-          </a:fillRef>
-          <a:effectRef idx="2">
-            <a:schemeClr val="accent1"/>
-          </a:effectRef>
-          <a:fontRef idx="minor">
-            <a:schemeClr val="lt1"/>
-          </a:fontRef>
-        </p:style>
-        <p:txBody>
-          <a:bodyPr rtlCol="0" anchor="ctr"/>
-          <a:lstStyle/>
-          <a:p>
-            <a:pPr algn="ctr"/>
-          </a:p>
-        </p:txBody>
-      </p:sp>
-      <p:sp>
-        <p:nvSpPr>
-          <p:cNvPr id="24" name="Rectangle 23"/>
-          <p:cNvSpPr/>
-          <p:nvPr/>
-        </p:nvSpPr>
-        <p:spPr>
-          <a:xfrm>
-            <a:off x="640080" y="4325112"/>
-            <a:ext cx="73152" cy="274320"/>
-          </a:xfrm>
-          <a:prstGeom prst="rect">
-            <a:avLst/>
-          </a:prstGeom>
-          <a:solidFill>
-            <a:srgbClr val="269CCB"/>
-          </a:solidFill>
-          <a:ln>
-            <a:noFill/>
-          </a:ln>
-        </p:spPr>
-        <p:style>
-          <a:lnRef idx="1">
-            <a:schemeClr val="accent1"/>
-          </a:lnRef>
-          <a:fillRef idx="3">
-            <a:schemeClr val="accent1"/>
-          </a:fillRef>
-          <a:effectRef idx="2">
-            <a:schemeClr val="accent1"/>
-          </a:effectRef>
-          <a:fontRef idx="minor">
-            <a:schemeClr val="lt1"/>
-          </a:fontRef>
-        </p:style>
-        <p:txBody>
-          <a:bodyPr rtlCol="0" anchor="ctr"/>
-          <a:lstStyle/>
-          <a:p>
-            <a:pPr algn="ctr"/>
-          </a:p>
-        </p:txBody>
-      </p:sp>
-      <p:sp>
-        <p:nvSpPr>
-          <p:cNvPr id="25" name="TextBox 24"/>
-          <p:cNvSpPr txBox="1"/>
-          <p:nvPr/>
-        </p:nvSpPr>
-        <p:spPr>
-          <a:xfrm>
-            <a:off x="1097280" y="4270248"/>
-            <a:ext cx="10362895" cy="402336"/>
-          </a:xfrm>
-          <a:prstGeom prst="rect">
-            <a:avLst/>
-          </a:prstGeom>
-          <a:noFill/>
-        </p:spPr>
-        <p:txBody>
-          <a:bodyPr wrap="square" anchor="ctr"/>
-          <a:lstStyle/>
-          <a:p>
-            <a:r>
-              <a:rPr sz="1500" b="1" i="0">
-                <a:solidFill>
-                  <a:srgbClr val="333333"/>
-                </a:solidFill>
-                <a:latin typeface="Calibri"/>
-              </a:rPr>
-              <a:t>EL GUION DE PRUEBA</a:t>
-            </a:r>
-            <a:r>
-              <a:rPr sz="1500" b="0" i="0">
-                <a:solidFill>
-                  <a:srgbClr val="333333"/>
-                </a:solidFill>
-                <a:latin typeface="Calibri"/>
-              </a:rPr>
-              <a:t> — Tres tareas para pedirle a una persona ajena, salidas de los </a:t>
-            </a:r>
-            <a:r>
-              <a:rPr sz="1500" b="1" i="0">
-                <a:solidFill>
-                  <a:srgbClr val="333333"/>
-                </a:solidFill>
-                <a:latin typeface="Calibri"/>
-              </a:rPr>
-              <a:t>criterios de aceptación de la sesión 7</a:t>
-            </a:r>
-            <a:r>
-              <a:rPr sz="1500" b="0" i="0">
-                <a:solidFill>
-                  <a:srgbClr val="333333"/>
-                </a:solidFill>
-                <a:latin typeface="Calibri"/>
-              </a:rPr>
-              <a:t>, y una de ellas sobre el caso en que el sistema </a:t>
-            </a:r>
-            <a:r>
-              <a:rPr sz="1500" b="1" i="0">
-                <a:solidFill>
-                  <a:srgbClr val="333333"/>
-                </a:solidFill>
-                <a:latin typeface="Calibri"/>
-              </a:rPr>
-              <a:t>no</a:t>
-            </a:r>
-            <a:r>
-              <a:rPr sz="1500" b="0" i="0">
-                <a:solidFill>
-                  <a:srgbClr val="333333"/>
-                </a:solidFill>
-                <a:latin typeface="Calibri"/>
-              </a:rPr>
-              <a:t> tiene la respuesta.</a:t>
-            </a:r>
-          </a:p>
-        </p:txBody>
-      </p:sp>
-      <p:sp>
-        <p:nvSpPr>
-          <p:cNvPr id="26" name="TextBox 25"/>
-          <p:cNvSpPr txBox="1"/>
-          <p:nvPr/>
-        </p:nvSpPr>
-        <p:spPr>
-          <a:xfrm>
-            <a:off x="11185855" y="6473952"/>
-            <a:ext cx="640080" cy="274320"/>
-          </a:xfrm>
-          <a:prstGeom prst="rect">
-            <a:avLst/>
-          </a:prstGeom>
-          <a:noFill/>
-        </p:spPr>
-        <p:txBody>
-          <a:bodyPr wrap="square">
-            <a:spAutoFit/>
-          </a:bodyPr>
-          <a:lstStyle/>
-          <a:p>
-            <a:pPr algn="r"/>
-            <a:r>
-              <a:rPr sz="1100" b="0" i="0">
-                <a:solidFill>
-                  <a:srgbClr val="666666"/>
-                </a:solidFill>
-                <a:latin typeface="Calibri"/>
-              </a:rPr>
-              <a:t>12</a:t>
-            </a:r>
-          </a:p>
-        </p:txBody>
-      </p:sp>
-    </p:spTree>
-  </p:cSld>
-  <p:clrMapOvr>
-    <a:masterClrMapping/>
-  </p:clrMapOvr>
-</p:sld>
-</file>
-
-<file path=ppt/slides/slide13.xml><?xml version="1.0" encoding="utf-8"?>
-<p:sld xmlns:a="http://schemas.openxmlformats.org/drawingml/2006/main" xmlns:p="http://schemas.openxmlformats.org/presentationml/2006/main" xmlns:r="http://schemas.openxmlformats.org/officeDocument/2006/relationships">
-  <p:cSld>
-    <p:bg>
-      <p:bgPr>
-        <a:solidFill>
-          <a:srgbClr val="FFFFFF"/>
-        </a:solidFill>
-        <a:effectLst/>
-      </p:bgPr>
-    </p:bg>
-    <p:spTree>
-      <p:nvGrpSpPr>
-        <p:cNvPr id="1" name=""/>
-        <p:cNvGrpSpPr/>
-        <p:nvPr/>
-      </p:nvGrpSpPr>
-      <p:grpSpPr/>
-      <p:sp>
-        <p:nvSpPr>
-          <p:cNvPr id="2" name="Rectangle 1"/>
-          <p:cNvSpPr/>
-          <p:nvPr/>
-        </p:nvSpPr>
-        <p:spPr>
-          <a:xfrm>
-            <a:off x="0" y="0"/>
-            <a:ext cx="12191695" cy="1170432"/>
-          </a:xfrm>
-          <a:prstGeom prst="rect">
-            <a:avLst/>
-          </a:prstGeom>
-          <a:solidFill>
-            <a:srgbClr val="095292"/>
-          </a:solidFill>
-          <a:ln>
-            <a:noFill/>
-          </a:ln>
-        </p:spPr>
-        <p:style>
-          <a:lnRef idx="1">
-            <a:schemeClr val="accent1"/>
-          </a:lnRef>
-          <a:fillRef idx="3">
-            <a:schemeClr val="accent1"/>
-          </a:fillRef>
-          <a:effectRef idx="2">
-            <a:schemeClr val="accent1"/>
-          </a:effectRef>
-          <a:fontRef idx="minor">
-            <a:schemeClr val="lt1"/>
-          </a:fontRef>
-        </p:style>
-        <p:txBody>
-          <a:bodyPr rtlCol="0" anchor="ctr"/>
-          <a:lstStyle/>
-          <a:p>
-            <a:pPr algn="ctr"/>
-          </a:p>
-        </p:txBody>
-      </p:sp>
-      <p:sp>
-        <p:nvSpPr>
-          <p:cNvPr id="3" name="Rectangle 2"/>
-          <p:cNvSpPr/>
-          <p:nvPr/>
-        </p:nvSpPr>
-        <p:spPr>
-          <a:xfrm>
-            <a:off x="0" y="1170432"/>
-            <a:ext cx="12191695" cy="41148"/>
-          </a:xfrm>
-          <a:prstGeom prst="rect">
-            <a:avLst/>
-          </a:prstGeom>
-          <a:solidFill>
-            <a:srgbClr val="FFD000"/>
-          </a:solidFill>
-          <a:ln>
-            <a:noFill/>
-          </a:ln>
-        </p:spPr>
-        <p:style>
-          <a:lnRef idx="1">
-            <a:schemeClr val="accent1"/>
-          </a:lnRef>
-          <a:fillRef idx="3">
-            <a:schemeClr val="accent1"/>
-          </a:fillRef>
-          <a:effectRef idx="2">
-            <a:schemeClr val="accent1"/>
-          </a:effectRef>
-          <a:fontRef idx="minor">
-            <a:schemeClr val="lt1"/>
-          </a:fontRef>
-        </p:style>
-        <p:txBody>
-          <a:bodyPr rtlCol="0" anchor="ctr"/>
-          <a:lstStyle/>
-          <a:p>
-            <a:pPr algn="ctr"/>
-          </a:p>
-        </p:txBody>
-      </p:sp>
-      <p:sp>
-        <p:nvSpPr>
-          <p:cNvPr id="4" name="TextBox 3"/>
-          <p:cNvSpPr txBox="1"/>
-          <p:nvPr/>
-        </p:nvSpPr>
-        <p:spPr>
-          <a:xfrm>
-            <a:off x="457200" y="164592"/>
-            <a:ext cx="11277295" cy="384048"/>
-          </a:xfrm>
-          <a:prstGeom prst="rect">
-            <a:avLst/>
-          </a:prstGeom>
-          <a:noFill/>
-        </p:spPr>
-        <p:txBody>
-          <a:bodyPr wrap="square">
-            <a:spAutoFit/>
-          </a:bodyPr>
-          <a:lstStyle/>
-          <a:p>
-            <a:r>
-              <a:rPr sz="2600" b="1" i="0">
-                <a:solidFill>
-                  <a:srgbClr val="FFFFFF"/>
-                </a:solidFill>
-                <a:latin typeface="Calibri"/>
-              </a:rPr>
-              <a:t>Cómo se expone en 3 minutos</a:t>
-            </a:r>
-          </a:p>
-        </p:txBody>
-      </p:sp>
-      <p:sp>
-        <p:nvSpPr>
-          <p:cNvPr id="5" name="TextBox 4"/>
-          <p:cNvSpPr txBox="1"/>
-          <p:nvPr/>
-        </p:nvSpPr>
-        <p:spPr>
-          <a:xfrm>
-            <a:off x="457200" y="566928"/>
-            <a:ext cx="11277295" cy="411480"/>
-          </a:xfrm>
-          <a:prstGeom prst="rect">
-            <a:avLst/>
-          </a:prstGeom>
-          <a:noFill/>
-        </p:spPr>
-        <p:txBody>
-          <a:bodyPr wrap="square">
-            <a:spAutoFit/>
-          </a:bodyPr>
-          <a:lstStyle/>
-          <a:p>
-            <a:r>
-              <a:rPr sz="1400" b="0" i="0">
-                <a:solidFill>
-                  <a:srgbClr val="B8D8EE"/>
-                </a:solidFill>
-                <a:latin typeface="Calibri"/>
-              </a:rPr>
-              <a:t>Habla el vocero con la pantalla ya compartida · cronómetro en pantalla · se corta al llegar a cero</a:t>
-            </a:r>
-          </a:p>
-        </p:txBody>
-      </p:sp>
-      <p:sp>
-        <p:nvSpPr>
-          <p:cNvPr id="6" name="Rounded Rectangle 5"/>
-          <p:cNvSpPr/>
-          <p:nvPr/>
-        </p:nvSpPr>
-        <p:spPr>
-          <a:xfrm>
-            <a:off x="457200" y="1444752"/>
-            <a:ext cx="11277295" cy="908913"/>
-          </a:xfrm>
-          <a:prstGeom prst="roundRect">
-            <a:avLst>
-              <a:gd name="adj" fmla="val 12000"/>
-            </a:avLst>
-          </a:prstGeom>
-          <a:solidFill>
-            <a:srgbClr val="F2F2F2"/>
-          </a:solidFill>
-          <a:ln>
-            <a:noFill/>
-          </a:ln>
-        </p:spPr>
-        <p:style>
-          <a:lnRef idx="1">
-            <a:schemeClr val="accent1"/>
-          </a:lnRef>
-          <a:fillRef idx="3">
-            <a:schemeClr val="accent1"/>
-          </a:fillRef>
-          <a:effectRef idx="2">
-            <a:schemeClr val="accent1"/>
-          </a:effectRef>
-          <a:fontRef idx="minor">
-            <a:schemeClr val="lt1"/>
-          </a:fontRef>
-        </p:style>
-        <p:txBody>
-          <a:bodyPr rtlCol="0" anchor="ctr"/>
-          <a:lstStyle/>
-          <a:p>
-            <a:pPr algn="ctr"/>
-          </a:p>
-        </p:txBody>
-      </p:sp>
-      <p:sp>
-        <p:nvSpPr>
-          <p:cNvPr id="7" name="Rounded Rectangle 6"/>
-          <p:cNvSpPr/>
-          <p:nvPr/>
-        </p:nvSpPr>
-        <p:spPr>
-          <a:xfrm>
-            <a:off x="594360" y="1679752"/>
-            <a:ext cx="438912" cy="438912"/>
-          </a:xfrm>
-          <a:prstGeom prst="roundRect">
-            <a:avLst>
-              <a:gd name="adj" fmla="val 12000"/>
-            </a:avLst>
-          </a:prstGeom>
-          <a:solidFill>
-            <a:srgbClr val="095292"/>
-          </a:solidFill>
-          <a:ln>
-            <a:noFill/>
-          </a:ln>
-        </p:spPr>
-        <p:style>
-          <a:lnRef idx="1">
-            <a:schemeClr val="accent1"/>
-          </a:lnRef>
-          <a:fillRef idx="3">
-            <a:schemeClr val="accent1"/>
-          </a:fillRef>
-          <a:effectRef idx="2">
-            <a:schemeClr val="accent1"/>
-          </a:effectRef>
-          <a:fontRef idx="minor">
-            <a:schemeClr val="lt1"/>
-          </a:fontRef>
-        </p:style>
-        <p:txBody>
-          <a:bodyPr rtlCol="0" anchor="ctr"/>
-          <a:lstStyle/>
-          <a:p>
-            <a:pPr algn="ctr"/>
-          </a:p>
-        </p:txBody>
-      </p:sp>
-      <p:sp>
-        <p:nvSpPr>
-          <p:cNvPr id="8" name="TextBox 7"/>
-          <p:cNvSpPr txBox="1"/>
-          <p:nvPr/>
-        </p:nvSpPr>
-        <p:spPr>
-          <a:xfrm>
-            <a:off x="594360" y="1679752"/>
-            <a:ext cx="438912" cy="438912"/>
-          </a:xfrm>
-          <a:prstGeom prst="rect">
-            <a:avLst/>
-          </a:prstGeom>
-          <a:noFill/>
-        </p:spPr>
-        <p:txBody>
-          <a:bodyPr wrap="square" anchor="ctr"/>
-          <a:lstStyle/>
-          <a:p>
-            <a:pPr algn="ctr"/>
-            <a:r>
-              <a:rPr sz="1600" b="1" i="0">
-                <a:solidFill>
-                  <a:srgbClr val="FFFFFF"/>
-                </a:solidFill>
-                <a:latin typeface="Calibri"/>
-              </a:rPr>
-              <a:t>1</a:t>
-            </a:r>
-          </a:p>
-        </p:txBody>
-      </p:sp>
-      <p:sp>
-        <p:nvSpPr>
-          <p:cNvPr id="9" name="TextBox 8"/>
-          <p:cNvSpPr txBox="1"/>
-          <p:nvPr/>
-        </p:nvSpPr>
-        <p:spPr>
-          <a:xfrm>
-            <a:off x="1188720" y="1536192"/>
-            <a:ext cx="10271455" cy="744321"/>
-          </a:xfrm>
-          <a:prstGeom prst="rect">
-            <a:avLst/>
-          </a:prstGeom>
-          <a:noFill/>
-        </p:spPr>
-        <p:txBody>
-          <a:bodyPr wrap="square" anchor="ctr"/>
-          <a:lstStyle/>
-          <a:p>
-            <a:r>
-              <a:rPr sz="1500" b="1" i="0">
-                <a:solidFill>
-                  <a:srgbClr val="095292"/>
-                </a:solidFill>
-                <a:latin typeface="Calibri"/>
-              </a:rPr>
-              <a:t>30 s · El flujo</a:t>
-            </a:r>
-          </a:p>
-          <a:p>
-            <a:pPr>
-              <a:spcBef>
-                <a:spcPts val="200"/>
-              </a:spcBef>
-            </a:pPr>
-            <a:r>
-              <a:rPr sz="1300" b="0" i="0">
-                <a:solidFill>
-                  <a:srgbClr val="333333"/>
-                </a:solidFill>
-                <a:latin typeface="Calibri"/>
-              </a:rPr>
-              <a:t>Los tres pasos y para qué existe cada pantalla.</a:t>
-            </a:r>
-          </a:p>
-        </p:txBody>
-      </p:sp>
-      <p:sp>
-        <p:nvSpPr>
-          <p:cNvPr id="10" name="Rounded Rectangle 9"/>
-          <p:cNvSpPr/>
-          <p:nvPr/>
-        </p:nvSpPr>
-        <p:spPr>
-          <a:xfrm>
-            <a:off x="457200" y="2445105"/>
-            <a:ext cx="11277295" cy="908913"/>
-          </a:xfrm>
-          <a:prstGeom prst="roundRect">
-            <a:avLst>
-              <a:gd name="adj" fmla="val 12000"/>
-            </a:avLst>
-          </a:prstGeom>
-          <a:solidFill>
-            <a:srgbClr val="E8F4FA"/>
-          </a:solidFill>
-          <a:ln>
-            <a:noFill/>
-          </a:ln>
-        </p:spPr>
-        <p:style>
-          <a:lnRef idx="1">
-            <a:schemeClr val="accent1"/>
-          </a:lnRef>
-          <a:fillRef idx="3">
-            <a:schemeClr val="accent1"/>
-          </a:fillRef>
-          <a:effectRef idx="2">
-            <a:schemeClr val="accent1"/>
-          </a:effectRef>
-          <a:fontRef idx="minor">
-            <a:schemeClr val="lt1"/>
-          </a:fontRef>
-        </p:style>
-        <p:txBody>
-          <a:bodyPr rtlCol="0" anchor="ctr"/>
-          <a:lstStyle/>
-          <a:p>
-            <a:pPr algn="ctr"/>
-          </a:p>
-        </p:txBody>
-      </p:sp>
-      <p:sp>
-        <p:nvSpPr>
-          <p:cNvPr id="11" name="Rounded Rectangle 10"/>
-          <p:cNvSpPr/>
-          <p:nvPr/>
-        </p:nvSpPr>
-        <p:spPr>
-          <a:xfrm>
-            <a:off x="594360" y="2680106"/>
-            <a:ext cx="438912" cy="438912"/>
-          </a:xfrm>
-          <a:prstGeom prst="roundRect">
-            <a:avLst>
-              <a:gd name="adj" fmla="val 12000"/>
-            </a:avLst>
-          </a:prstGeom>
-          <a:solidFill>
-            <a:srgbClr val="095292"/>
-          </a:solidFill>
-          <a:ln>
-            <a:noFill/>
-          </a:ln>
-        </p:spPr>
-        <p:style>
-          <a:lnRef idx="1">
-            <a:schemeClr val="accent1"/>
-          </a:lnRef>
-          <a:fillRef idx="3">
-            <a:schemeClr val="accent1"/>
-          </a:fillRef>
-          <a:effectRef idx="2">
-            <a:schemeClr val="accent1"/>
-          </a:effectRef>
-          <a:fontRef idx="minor">
-            <a:schemeClr val="lt1"/>
-          </a:fontRef>
-        </p:style>
-        <p:txBody>
-          <a:bodyPr rtlCol="0" anchor="ctr"/>
-          <a:lstStyle/>
-          <a:p>
-            <a:pPr algn="ctr"/>
-          </a:p>
-        </p:txBody>
-      </p:sp>
-      <p:sp>
-        <p:nvSpPr>
-          <p:cNvPr id="12" name="TextBox 11"/>
-          <p:cNvSpPr txBox="1"/>
-          <p:nvPr/>
-        </p:nvSpPr>
-        <p:spPr>
-          <a:xfrm>
-            <a:off x="594360" y="2680106"/>
-            <a:ext cx="438912" cy="438912"/>
-          </a:xfrm>
-          <a:prstGeom prst="rect">
-            <a:avLst/>
-          </a:prstGeom>
-          <a:noFill/>
-        </p:spPr>
-        <p:txBody>
-          <a:bodyPr wrap="square" anchor="ctr"/>
-          <a:lstStyle/>
-          <a:p>
-            <a:pPr algn="ctr"/>
-            <a:r>
-              <a:rPr sz="1600" b="1" i="0">
-                <a:solidFill>
-                  <a:srgbClr val="FFFFFF"/>
-                </a:solidFill>
-                <a:latin typeface="Calibri"/>
-              </a:rPr>
-              <a:t>2</a:t>
-            </a:r>
-          </a:p>
-        </p:txBody>
-      </p:sp>
-      <p:sp>
-        <p:nvSpPr>
-          <p:cNvPr id="13" name="TextBox 12"/>
-          <p:cNvSpPr txBox="1"/>
-          <p:nvPr/>
-        </p:nvSpPr>
-        <p:spPr>
-          <a:xfrm>
-            <a:off x="1188720" y="2536545"/>
-            <a:ext cx="10271455" cy="744321"/>
-          </a:xfrm>
-          <a:prstGeom prst="rect">
-            <a:avLst/>
-          </a:prstGeom>
-          <a:noFill/>
-        </p:spPr>
-        <p:txBody>
-          <a:bodyPr wrap="square" anchor="ctr"/>
-          <a:lstStyle/>
-          <a:p>
-            <a:r>
-              <a:rPr sz="1500" b="1" i="0">
-                <a:solidFill>
-                  <a:srgbClr val="095292"/>
-                </a:solidFill>
-                <a:latin typeface="Calibri"/>
-              </a:rPr>
-              <a:t>50 s · El camino principal</a:t>
-            </a:r>
-          </a:p>
-          <a:p>
-            <a:pPr>
-              <a:spcBef>
-                <a:spcPts val="200"/>
-              </a:spcBef>
-            </a:pPr>
-            <a:r>
-              <a:rPr sz="1300" b="0" i="0">
-                <a:solidFill>
-                  <a:srgbClr val="333333"/>
-                </a:solidFill>
-                <a:latin typeface="Calibri"/>
-              </a:rPr>
-              <a:t>Qué hace el usuario el 90 % de las veces, señalado en el dibujo.</a:t>
-            </a:r>
-          </a:p>
-        </p:txBody>
-      </p:sp>
-      <p:sp>
-        <p:nvSpPr>
-          <p:cNvPr id="14" name="Rounded Rectangle 13"/>
-          <p:cNvSpPr/>
-          <p:nvPr/>
-        </p:nvSpPr>
-        <p:spPr>
-          <a:xfrm>
-            <a:off x="457200" y="3445459"/>
-            <a:ext cx="11277295" cy="908913"/>
-          </a:xfrm>
-          <a:prstGeom prst="roundRect">
-            <a:avLst>
-              <a:gd name="adj" fmla="val 12000"/>
-            </a:avLst>
-          </a:prstGeom>
-          <a:solidFill>
-            <a:srgbClr val="F2F2F2"/>
-          </a:solidFill>
-          <a:ln>
-            <a:noFill/>
-          </a:ln>
-        </p:spPr>
-        <p:style>
-          <a:lnRef idx="1">
-            <a:schemeClr val="accent1"/>
-          </a:lnRef>
-          <a:fillRef idx="3">
-            <a:schemeClr val="accent1"/>
-          </a:fillRef>
-          <a:effectRef idx="2">
-            <a:schemeClr val="accent1"/>
-          </a:effectRef>
-          <a:fontRef idx="minor">
-            <a:schemeClr val="lt1"/>
-          </a:fontRef>
-        </p:style>
-        <p:txBody>
-          <a:bodyPr rtlCol="0" anchor="ctr"/>
-          <a:lstStyle/>
-          <a:p>
-            <a:pPr algn="ctr"/>
-          </a:p>
-        </p:txBody>
-      </p:sp>
-      <p:sp>
-        <p:nvSpPr>
-          <p:cNvPr id="15" name="Rounded Rectangle 14"/>
-          <p:cNvSpPr/>
-          <p:nvPr/>
-        </p:nvSpPr>
-        <p:spPr>
-          <a:xfrm>
-            <a:off x="594360" y="3680460"/>
-            <a:ext cx="438912" cy="438912"/>
-          </a:xfrm>
-          <a:prstGeom prst="roundRect">
-            <a:avLst>
-              <a:gd name="adj" fmla="val 12000"/>
-            </a:avLst>
-          </a:prstGeom>
-          <a:solidFill>
-            <a:srgbClr val="095292"/>
-          </a:solidFill>
-          <a:ln>
-            <a:noFill/>
-          </a:ln>
-        </p:spPr>
-        <p:style>
-          <a:lnRef idx="1">
-            <a:schemeClr val="accent1"/>
-          </a:lnRef>
-          <a:fillRef idx="3">
-            <a:schemeClr val="accent1"/>
-          </a:fillRef>
-          <a:effectRef idx="2">
-            <a:schemeClr val="accent1"/>
-          </a:effectRef>
-          <a:fontRef idx="minor">
-            <a:schemeClr val="lt1"/>
-          </a:fontRef>
-        </p:style>
-        <p:txBody>
-          <a:bodyPr rtlCol="0" anchor="ctr"/>
-          <a:lstStyle/>
-          <a:p>
-            <a:pPr algn="ctr"/>
-          </a:p>
-        </p:txBody>
-      </p:sp>
-      <p:sp>
-        <p:nvSpPr>
-          <p:cNvPr id="16" name="TextBox 15"/>
-          <p:cNvSpPr txBox="1"/>
-          <p:nvPr/>
-        </p:nvSpPr>
-        <p:spPr>
-          <a:xfrm>
-            <a:off x="594360" y="3680460"/>
-            <a:ext cx="438912" cy="438912"/>
-          </a:xfrm>
-          <a:prstGeom prst="rect">
-            <a:avLst/>
-          </a:prstGeom>
-          <a:noFill/>
-        </p:spPr>
-        <p:txBody>
-          <a:bodyPr wrap="square" anchor="ctr"/>
-          <a:lstStyle/>
-          <a:p>
-            <a:pPr algn="ctr"/>
-            <a:r>
-              <a:rPr sz="1600" b="1" i="0">
-                <a:solidFill>
-                  <a:srgbClr val="FFFFFF"/>
-                </a:solidFill>
-                <a:latin typeface="Calibri"/>
-              </a:rPr>
-              <a:t>3</a:t>
-            </a:r>
-          </a:p>
-        </p:txBody>
-      </p:sp>
-      <p:sp>
-        <p:nvSpPr>
-          <p:cNvPr id="17" name="TextBox 16"/>
-          <p:cNvSpPr txBox="1"/>
-          <p:nvPr/>
-        </p:nvSpPr>
-        <p:spPr>
-          <a:xfrm>
-            <a:off x="1188720" y="3536899"/>
-            <a:ext cx="10271455" cy="744321"/>
-          </a:xfrm>
-          <a:prstGeom prst="rect">
-            <a:avLst/>
-          </a:prstGeom>
-          <a:noFill/>
-        </p:spPr>
-        <p:txBody>
-          <a:bodyPr wrap="square" anchor="ctr"/>
-          <a:lstStyle/>
-          <a:p>
-            <a:r>
-              <a:rPr sz="1500" b="1" i="0">
-                <a:solidFill>
-                  <a:srgbClr val="095292"/>
-                </a:solidFill>
-                <a:latin typeface="Calibri"/>
-              </a:rPr>
-              <a:t>50 s · Qué se ve cuando falla</a:t>
-            </a:r>
-          </a:p>
-          <a:p>
-            <a:pPr>
-              <a:spcBef>
-                <a:spcPts val="200"/>
-              </a:spcBef>
-            </a:pPr>
-            <a:r>
-              <a:rPr sz="1300" b="0" i="0">
-                <a:solidFill>
-                  <a:srgbClr val="333333"/>
-                </a:solidFill>
-                <a:latin typeface="Calibri"/>
-              </a:rPr>
-              <a:t>Estado vacío y de error, con el mensaje leído tal cual. Es el minuto obligatorio.</a:t>
-            </a:r>
-          </a:p>
-        </p:txBody>
-      </p:sp>
-      <p:sp>
-        <p:nvSpPr>
-          <p:cNvPr id="18" name="Rounded Rectangle 17"/>
-          <p:cNvSpPr/>
-          <p:nvPr/>
-        </p:nvSpPr>
-        <p:spPr>
-          <a:xfrm>
-            <a:off x="457200" y="4445812"/>
-            <a:ext cx="11277295" cy="908913"/>
-          </a:xfrm>
-          <a:prstGeom prst="roundRect">
-            <a:avLst>
-              <a:gd name="adj" fmla="val 12000"/>
-            </a:avLst>
-          </a:prstGeom>
-          <a:solidFill>
-            <a:srgbClr val="E8F4FA"/>
-          </a:solidFill>
-          <a:ln>
-            <a:noFill/>
-          </a:ln>
-        </p:spPr>
-        <p:style>
-          <a:lnRef idx="1">
-            <a:schemeClr val="accent1"/>
-          </a:lnRef>
-          <a:fillRef idx="3">
-            <a:schemeClr val="accent1"/>
-          </a:fillRef>
-          <a:effectRef idx="2">
-            <a:schemeClr val="accent1"/>
-          </a:effectRef>
-          <a:fontRef idx="minor">
-            <a:schemeClr val="lt1"/>
-          </a:fontRef>
-        </p:style>
-        <p:txBody>
-          <a:bodyPr rtlCol="0" anchor="ctr"/>
-          <a:lstStyle/>
-          <a:p>
-            <a:pPr algn="ctr"/>
-          </a:p>
-        </p:txBody>
-      </p:sp>
-      <p:sp>
-        <p:nvSpPr>
-          <p:cNvPr id="19" name="Rounded Rectangle 18"/>
-          <p:cNvSpPr/>
-          <p:nvPr/>
-        </p:nvSpPr>
-        <p:spPr>
-          <a:xfrm>
-            <a:off x="594360" y="4680813"/>
-            <a:ext cx="438912" cy="438912"/>
-          </a:xfrm>
-          <a:prstGeom prst="roundRect">
-            <a:avLst>
-              <a:gd name="adj" fmla="val 12000"/>
-            </a:avLst>
-          </a:prstGeom>
-          <a:solidFill>
-            <a:srgbClr val="095292"/>
-          </a:solidFill>
-          <a:ln>
-            <a:noFill/>
-          </a:ln>
-        </p:spPr>
-        <p:style>
-          <a:lnRef idx="1">
-            <a:schemeClr val="accent1"/>
-          </a:lnRef>
-          <a:fillRef idx="3">
-            <a:schemeClr val="accent1"/>
-          </a:fillRef>
-          <a:effectRef idx="2">
-            <a:schemeClr val="accent1"/>
-          </a:effectRef>
-          <a:fontRef idx="minor">
-            <a:schemeClr val="lt1"/>
-          </a:fontRef>
-        </p:style>
-        <p:txBody>
-          <a:bodyPr rtlCol="0" anchor="ctr"/>
-          <a:lstStyle/>
-          <a:p>
-            <a:pPr algn="ctr"/>
-          </a:p>
-        </p:txBody>
-      </p:sp>
-      <p:sp>
-        <p:nvSpPr>
-          <p:cNvPr id="20" name="TextBox 19"/>
-          <p:cNvSpPr txBox="1"/>
-          <p:nvPr/>
-        </p:nvSpPr>
-        <p:spPr>
-          <a:xfrm>
-            <a:off x="594360" y="4680813"/>
-            <a:ext cx="438912" cy="438912"/>
-          </a:xfrm>
-          <a:prstGeom prst="rect">
-            <a:avLst/>
-          </a:prstGeom>
-          <a:noFill/>
-        </p:spPr>
-        <p:txBody>
-          <a:bodyPr wrap="square" anchor="ctr"/>
-          <a:lstStyle/>
-          <a:p>
-            <a:pPr algn="ctr"/>
-            <a:r>
-              <a:rPr sz="1600" b="1" i="0">
-                <a:solidFill>
-                  <a:srgbClr val="FFFFFF"/>
-                </a:solidFill>
-                <a:latin typeface="Calibri"/>
-              </a:rPr>
-              <a:t>4</a:t>
-            </a:r>
-          </a:p>
-        </p:txBody>
-      </p:sp>
-      <p:sp>
-        <p:nvSpPr>
-          <p:cNvPr id="21" name="TextBox 20"/>
-          <p:cNvSpPr txBox="1"/>
-          <p:nvPr/>
-        </p:nvSpPr>
-        <p:spPr>
-          <a:xfrm>
-            <a:off x="1188720" y="4537252"/>
-            <a:ext cx="10271455" cy="744321"/>
-          </a:xfrm>
-          <a:prstGeom prst="rect">
-            <a:avLst/>
-          </a:prstGeom>
-          <a:noFill/>
-        </p:spPr>
-        <p:txBody>
-          <a:bodyPr wrap="square" anchor="ctr"/>
-          <a:lstStyle/>
-          <a:p>
-            <a:r>
-              <a:rPr sz="1500" b="1" i="0">
-                <a:solidFill>
-                  <a:srgbClr val="095292"/>
-                </a:solidFill>
-                <a:latin typeface="Calibri"/>
-              </a:rPr>
-              <a:t>30 s · Los textos</a:t>
-            </a:r>
-          </a:p>
-          <a:p>
-            <a:pPr>
-              <a:spcBef>
-                <a:spcPts val="200"/>
-              </a:spcBef>
-            </a:pPr>
-            <a:r>
-              <a:rPr sz="1300" b="0" i="0">
-                <a:solidFill>
-                  <a:srgbClr val="333333"/>
-                </a:solidFill>
-                <a:latin typeface="Calibri"/>
-              </a:rPr>
-              <a:t>Dos rótulos que costó decidir y por qué quedaron así.</a:t>
-            </a:r>
-          </a:p>
-        </p:txBody>
-      </p:sp>
-      <p:sp>
-        <p:nvSpPr>
-          <p:cNvPr id="22" name="Rounded Rectangle 21"/>
-          <p:cNvSpPr/>
-          <p:nvPr/>
-        </p:nvSpPr>
-        <p:spPr>
-          <a:xfrm>
-            <a:off x="457200" y="5446166"/>
-            <a:ext cx="11277295" cy="908913"/>
-          </a:xfrm>
-          <a:prstGeom prst="roundRect">
-            <a:avLst>
-              <a:gd name="adj" fmla="val 12000"/>
-            </a:avLst>
-          </a:prstGeom>
-          <a:solidFill>
-            <a:srgbClr val="F2F2F2"/>
-          </a:solidFill>
-          <a:ln>
-            <a:noFill/>
-          </a:ln>
-        </p:spPr>
-        <p:style>
-          <a:lnRef idx="1">
-            <a:schemeClr val="accent1"/>
-          </a:lnRef>
-          <a:fillRef idx="3">
-            <a:schemeClr val="accent1"/>
-          </a:fillRef>
-          <a:effectRef idx="2">
-            <a:schemeClr val="accent1"/>
-          </a:effectRef>
-          <a:fontRef idx="minor">
-            <a:schemeClr val="lt1"/>
-          </a:fontRef>
-        </p:style>
-        <p:txBody>
-          <a:bodyPr rtlCol="0" anchor="ctr"/>
-          <a:lstStyle/>
-          <a:p>
-            <a:pPr algn="ctr"/>
-          </a:p>
-        </p:txBody>
-      </p:sp>
-      <p:sp>
-        <p:nvSpPr>
-          <p:cNvPr id="23" name="Rounded Rectangle 22"/>
-          <p:cNvSpPr/>
-          <p:nvPr/>
-        </p:nvSpPr>
-        <p:spPr>
-          <a:xfrm>
-            <a:off x="594360" y="5681167"/>
-            <a:ext cx="438912" cy="438912"/>
-          </a:xfrm>
-          <a:prstGeom prst="roundRect">
-            <a:avLst>
-              <a:gd name="adj" fmla="val 12000"/>
-            </a:avLst>
-          </a:prstGeom>
-          <a:solidFill>
-            <a:srgbClr val="095292"/>
-          </a:solidFill>
-          <a:ln>
-            <a:noFill/>
-          </a:ln>
-        </p:spPr>
-        <p:style>
-          <a:lnRef idx="1">
-            <a:schemeClr val="accent1"/>
-          </a:lnRef>
-          <a:fillRef idx="3">
-            <a:schemeClr val="accent1"/>
-          </a:fillRef>
-          <a:effectRef idx="2">
-            <a:schemeClr val="accent1"/>
-          </a:effectRef>
-          <a:fontRef idx="minor">
-            <a:schemeClr val="lt1"/>
-          </a:fontRef>
-        </p:style>
-        <p:txBody>
-          <a:bodyPr rtlCol="0" anchor="ctr"/>
-          <a:lstStyle/>
-          <a:p>
-            <a:pPr algn="ctr"/>
-          </a:p>
-        </p:txBody>
-      </p:sp>
-      <p:sp>
-        <p:nvSpPr>
-          <p:cNvPr id="24" name="TextBox 23"/>
-          <p:cNvSpPr txBox="1"/>
-          <p:nvPr/>
-        </p:nvSpPr>
-        <p:spPr>
-          <a:xfrm>
-            <a:off x="594360" y="5681167"/>
-            <a:ext cx="438912" cy="438912"/>
-          </a:xfrm>
-          <a:prstGeom prst="rect">
-            <a:avLst/>
-          </a:prstGeom>
-          <a:noFill/>
-        </p:spPr>
-        <p:txBody>
-          <a:bodyPr wrap="square" anchor="ctr"/>
-          <a:lstStyle/>
-          <a:p>
-            <a:pPr algn="ctr"/>
-            <a:r>
-              <a:rPr sz="1600" b="1" i="0">
-                <a:solidFill>
-                  <a:srgbClr val="FFFFFF"/>
-                </a:solidFill>
-                <a:latin typeface="Calibri"/>
-              </a:rPr>
-              <a:t>5</a:t>
-            </a:r>
-          </a:p>
-        </p:txBody>
-      </p:sp>
-      <p:sp>
-        <p:nvSpPr>
-          <p:cNvPr id="25" name="TextBox 24"/>
-          <p:cNvSpPr txBox="1"/>
-          <p:nvPr/>
-        </p:nvSpPr>
-        <p:spPr>
-          <a:xfrm>
-            <a:off x="1188720" y="5537606"/>
-            <a:ext cx="10271455" cy="744321"/>
-          </a:xfrm>
-          <a:prstGeom prst="rect">
-            <a:avLst/>
-          </a:prstGeom>
-          <a:noFill/>
-        </p:spPr>
-        <p:txBody>
-          <a:bodyPr wrap="square" anchor="ctr"/>
-          <a:lstStyle/>
-          <a:p>
-            <a:r>
-              <a:rPr sz="1500" b="1" i="0">
-                <a:solidFill>
-                  <a:srgbClr val="095292"/>
-                </a:solidFill>
-                <a:latin typeface="Calibri"/>
-              </a:rPr>
-              <a:t>20 s · El guion de prueba</a:t>
-            </a:r>
-          </a:p>
-          <a:p>
-            <a:pPr>
-              <a:spcBef>
-                <a:spcPts val="200"/>
-              </a:spcBef>
-            </a:pPr>
-            <a:r>
-              <a:rPr sz="1300" b="0" i="0">
-                <a:solidFill>
-                  <a:srgbClr val="333333"/>
-                </a:solidFill>
-                <a:latin typeface="Calibri"/>
-              </a:rPr>
-              <a:t>Las tres tareas, y con qué rol van a probar.</a:t>
-            </a:r>
-          </a:p>
-        </p:txBody>
-      </p:sp>
-      <p:sp>
-        <p:nvSpPr>
-          <p:cNvPr id="26" name="TextBox 25"/>
-          <p:cNvSpPr txBox="1"/>
-          <p:nvPr/>
-        </p:nvSpPr>
-        <p:spPr>
-          <a:xfrm>
-            <a:off x="11185855" y="6473952"/>
-            <a:ext cx="640080" cy="274320"/>
-          </a:xfrm>
-          <a:prstGeom prst="rect">
-            <a:avLst/>
-          </a:prstGeom>
-          <a:noFill/>
-        </p:spPr>
-        <p:txBody>
-          <a:bodyPr wrap="square">
-            <a:spAutoFit/>
-          </a:bodyPr>
-          <a:lstStyle/>
-          <a:p>
-            <a:pPr algn="r"/>
-            <a:r>
-              <a:rPr sz="1100" b="0" i="0">
-                <a:solidFill>
-                  <a:srgbClr val="666666"/>
-                </a:solidFill>
-                <a:latin typeface="Calibri"/>
-              </a:rPr>
-              <a:t>13</a:t>
-            </a:r>
-          </a:p>
-        </p:txBody>
-      </p:sp>
-    </p:spTree>
-  </p:cSld>
-  <p:clrMapOvr>
-    <a:masterClrMapping/>
-  </p:clrMapOvr>
-</p:sld>
-</file>
-
-<file path=ppt/slides/slide14.xml><?xml version="1.0" encoding="utf-8"?>
-<p:sld xmlns:a="http://schemas.openxmlformats.org/drawingml/2006/main" xmlns:p="http://schemas.openxmlformats.org/presentationml/2006/main" xmlns:r="http://schemas.openxmlformats.org/officeDocument/2006/relationships">
-  <p:cSld>
-    <p:bg>
-      <p:bgPr>
-        <a:solidFill>
-          <a:srgbClr val="FFFFFF"/>
-        </a:solidFill>
-        <a:effectLst/>
-      </p:bgPr>
-    </p:bg>
-    <p:spTree>
-      <p:nvGrpSpPr>
-        <p:cNvPr id="1" name=""/>
-        <p:cNvGrpSpPr/>
-        <p:nvPr/>
-      </p:nvGrpSpPr>
-      <p:grpSpPr/>
-      <p:sp>
-        <p:nvSpPr>
-          <p:cNvPr id="2" name="Rectangle 1"/>
-          <p:cNvSpPr/>
-          <p:nvPr/>
-        </p:nvSpPr>
-        <p:spPr>
-          <a:xfrm>
-            <a:off x="0" y="0"/>
-            <a:ext cx="12191695" cy="960120"/>
-          </a:xfrm>
-          <a:prstGeom prst="rect">
-            <a:avLst/>
-          </a:prstGeom>
-          <a:solidFill>
-            <a:srgbClr val="095292"/>
-          </a:solidFill>
-          <a:ln>
-            <a:noFill/>
-          </a:ln>
-        </p:spPr>
-        <p:style>
-          <a:lnRef idx="1">
-            <a:schemeClr val="accent1"/>
-          </a:lnRef>
-          <a:fillRef idx="3">
-            <a:schemeClr val="accent1"/>
-          </a:fillRef>
-          <a:effectRef idx="2">
-            <a:schemeClr val="accent1"/>
-          </a:effectRef>
-          <a:fontRef idx="minor">
-            <a:schemeClr val="lt1"/>
-          </a:fontRef>
-        </p:style>
-        <p:txBody>
-          <a:bodyPr rtlCol="0" anchor="ctr"/>
-          <a:lstStyle/>
-          <a:p>
-            <a:pPr algn="ctr"/>
-          </a:p>
-        </p:txBody>
-      </p:sp>
-      <p:sp>
-        <p:nvSpPr>
-          <p:cNvPr id="3" name="Rectangle 2"/>
-          <p:cNvSpPr/>
-          <p:nvPr/>
-        </p:nvSpPr>
-        <p:spPr>
-          <a:xfrm>
-            <a:off x="0" y="960120"/>
-            <a:ext cx="12191695" cy="41148"/>
-          </a:xfrm>
-          <a:prstGeom prst="rect">
-            <a:avLst/>
-          </a:prstGeom>
-          <a:solidFill>
-            <a:srgbClr val="FFD000"/>
-          </a:solidFill>
-          <a:ln>
-            <a:noFill/>
-          </a:ln>
-        </p:spPr>
-        <p:style>
-          <a:lnRef idx="1">
-            <a:schemeClr val="accent1"/>
-          </a:lnRef>
-          <a:fillRef idx="3">
-            <a:schemeClr val="accent1"/>
-          </a:fillRef>
-          <a:effectRef idx="2">
-            <a:schemeClr val="accent1"/>
-          </a:effectRef>
-          <a:fontRef idx="minor">
-            <a:schemeClr val="lt1"/>
-          </a:fontRef>
-        </p:style>
-        <p:txBody>
-          <a:bodyPr rtlCol="0" anchor="ctr"/>
-          <a:lstStyle/>
-          <a:p>
-            <a:pPr algn="ctr"/>
-          </a:p>
-        </p:txBody>
-      </p:sp>
-      <p:sp>
-        <p:nvSpPr>
-          <p:cNvPr id="4" name="TextBox 3"/>
-          <p:cNvSpPr txBox="1"/>
-          <p:nvPr/>
-        </p:nvSpPr>
-        <p:spPr>
-          <a:xfrm>
-            <a:off x="457200" y="164592"/>
-            <a:ext cx="11277295" cy="502920"/>
-          </a:xfrm>
-          <a:prstGeom prst="rect">
-            <a:avLst/>
-          </a:prstGeom>
-          <a:noFill/>
-        </p:spPr>
-        <p:txBody>
-          <a:bodyPr wrap="square">
-            <a:spAutoFit/>
-          </a:bodyPr>
-          <a:lstStyle/>
-          <a:p>
-            <a:r>
-              <a:rPr sz="2600" b="1" i="0">
-                <a:solidFill>
-                  <a:srgbClr val="FFFFFF"/>
-                </a:solidFill>
-                <a:latin typeface="Calibri"/>
-              </a:rPr>
-              <a:t>Para la Clase 11</a:t>
-            </a:r>
-          </a:p>
-        </p:txBody>
-      </p:sp>
-      <p:sp>
-        <p:nvSpPr>
-          <p:cNvPr id="5" name="TextBox 4"/>
-          <p:cNvSpPr txBox="1"/>
-          <p:nvPr/>
-        </p:nvSpPr>
-        <p:spPr>
-          <a:xfrm>
-            <a:off x="457200" y="1170432"/>
-            <a:ext cx="11277295" cy="5230368"/>
-          </a:xfrm>
-          <a:prstGeom prst="rect">
-            <a:avLst/>
-          </a:prstGeom>
-          <a:noFill/>
-        </p:spPr>
-        <p:txBody>
-          <a:bodyPr wrap="square">
-            <a:spAutoFit/>
-          </a:bodyPr>
-          <a:lstStyle/>
-          <a:p>
-            <a:pPr>
-              <a:spcAft>
-                <a:spcPts val="800"/>
-              </a:spcAft>
-            </a:pPr>
-            <a:r>
-              <a:rPr sz="2000" b="0" i="0">
-                <a:solidFill>
-                  <a:srgbClr val="333333"/>
-                </a:solidFill>
-                <a:latin typeface="Calibri"/>
-              </a:rPr>
-              <a:t>–   </a:t>
-            </a:r>
-            <a:r>
-              <a:rPr sz="2000" b="1" i="0">
-                <a:solidFill>
-                  <a:srgbClr val="333333"/>
-                </a:solidFill>
-                <a:latin typeface="Calibri"/>
-              </a:rPr>
-              <a:t>Trabajo dirigido:</a:t>
-            </a:r>
-            <a:r>
-              <a:rPr sz="2000" b="0" i="0">
-                <a:solidFill>
-                  <a:srgbClr val="333333"/>
-                </a:solidFill>
-                <a:latin typeface="Calibri"/>
-              </a:rPr>
-              <a:t> Introducción a software de prototipado — terminar las tres pantallas con </a:t>
-            </a:r>
-            <a:r>
-              <a:rPr sz="2000" b="1" i="0">
-                <a:solidFill>
-                  <a:srgbClr val="333333"/>
-                </a:solidFill>
-                <a:latin typeface="Calibri"/>
-              </a:rPr>
-              <a:t>todos</a:t>
-            </a:r>
-            <a:r>
-              <a:rPr sz="2000" b="0" i="0">
-                <a:solidFill>
-                  <a:srgbClr val="333333"/>
-                </a:solidFill>
-                <a:latin typeface="Calibri"/>
-              </a:rPr>
-              <a:t> los textos reales y los tres estados dibujados, y dejar el PNG en la carpeta del equipo.</a:t>
-            </a:r>
-          </a:p>
-          <a:p>
-            <a:pPr>
-              <a:spcAft>
-                <a:spcPts val="800"/>
-              </a:spcAft>
-            </a:pPr>
-            <a:r>
-              <a:rPr sz="2000" b="0" i="0">
-                <a:solidFill>
-                  <a:srgbClr val="333333"/>
-                </a:solidFill>
-                <a:latin typeface="Calibri"/>
-              </a:rPr>
-              <a:t>–   </a:t>
-            </a:r>
-            <a:r>
-              <a:rPr sz="2000" b="1" i="0">
-                <a:solidFill>
-                  <a:srgbClr val="333333"/>
-                </a:solidFill>
-                <a:latin typeface="Calibri"/>
-              </a:rPr>
-              <a:t>Trabajo independiente:</a:t>
-            </a:r>
-            <a:r>
-              <a:rPr sz="2000" b="0" i="0">
-                <a:solidFill>
-                  <a:srgbClr val="333333"/>
-                </a:solidFill>
-                <a:latin typeface="Calibri"/>
-              </a:rPr>
-              <a:t> Práctica básica con herramientas digitales: convertir el prototipo en </a:t>
-            </a:r>
-            <a:r>
-              <a:rPr sz="2000" b="1" i="0">
-                <a:solidFill>
-                  <a:srgbClr val="333333"/>
-                </a:solidFill>
-                <a:latin typeface="Calibri"/>
-              </a:rPr>
-              <a:t>navegable</a:t>
-            </a:r>
-            <a:r>
-              <a:rPr sz="2000" b="0" i="0">
-                <a:solidFill>
-                  <a:srgbClr val="333333"/>
-                </a:solidFill>
-                <a:latin typeface="Calibri"/>
-              </a:rPr>
-              <a:t> —diapositivas enlazadas o enlaces entre marcos— para poder recorrerlo delante de una persona.</a:t>
-            </a:r>
-          </a:p>
-          <a:p>
-            <a:pPr>
-              <a:spcAft>
-                <a:spcPts val="800"/>
-              </a:spcAft>
-            </a:pPr>
-            <a:r>
-              <a:rPr sz="2000" b="0" i="0">
-                <a:solidFill>
-                  <a:srgbClr val="333333"/>
-                </a:solidFill>
-                <a:latin typeface="Calibri"/>
-              </a:rPr>
-              <a:t>–   </a:t>
-            </a:r>
-            <a:r>
-              <a:rPr sz="2000" b="1" i="0">
-                <a:solidFill>
-                  <a:srgbClr val="333333"/>
-                </a:solidFill>
-                <a:latin typeface="Calibri"/>
-              </a:rPr>
-              <a:t>Clase 11 · Taller de prototipado inicial con IA</a:t>
-            </a:r>
-            <a:r>
-              <a:rPr sz="2000" b="0" i="0">
-                <a:solidFill>
-                  <a:srgbClr val="333333"/>
-                </a:solidFill>
-                <a:latin typeface="Calibri"/>
-              </a:rPr>
-              <a:t> — </a:t>
-            </a:r>
-            <a:r>
-              <a:rPr sz="2000" b="1" i="0">
-                <a:solidFill>
-                  <a:srgbClr val="333333"/>
-                </a:solidFill>
-                <a:latin typeface="Calibri"/>
-              </a:rPr>
-              <a:t>prototipo v2 con IA autorizada</a:t>
-            </a:r>
-            <a:r>
-              <a:rPr sz="2000" b="0" i="0">
-                <a:solidFill>
-                  <a:srgbClr val="333333"/>
-                </a:solidFill>
-                <a:latin typeface="Calibri"/>
-              </a:rPr>
-              <a:t>: generar variantes, elegir con criterio y corregir lo que la IA no sabía. Y la </a:t>
-            </a:r>
-            <a:r>
-              <a:rPr sz="2000" b="1" i="0">
-                <a:solidFill>
-                  <a:srgbClr val="333333"/>
-                </a:solidFill>
-                <a:latin typeface="Calibri"/>
-              </a:rPr>
-              <a:t>evaluación del corte 2</a:t>
-            </a:r>
-            <a:r>
-              <a:rPr sz="2000" b="0" i="0">
-                <a:solidFill>
-                  <a:srgbClr val="333333"/>
-                </a:solidFill>
-                <a:latin typeface="Calibri"/>
-              </a:rPr>
-              <a:t> en la plataforma del curso, sobre las sesiones 7 a 11.</a:t>
-            </a:r>
-          </a:p>
-          <a:p>
-            <a:pPr>
-              <a:spcAft>
-                <a:spcPts val="800"/>
-              </a:spcAft>
-            </a:pPr>
-            <a:r>
-              <a:rPr sz="2000" b="0" i="0">
-                <a:solidFill>
-                  <a:srgbClr val="333333"/>
-                </a:solidFill>
-                <a:latin typeface="Calibri"/>
-              </a:rPr>
-              <a:t>–   </a:t>
-            </a:r>
-            <a:r>
-              <a:rPr sz="2000" b="1" i="0">
-                <a:solidFill>
-                  <a:srgbClr val="333333"/>
-                </a:solidFill>
-                <a:latin typeface="Calibri"/>
-              </a:rPr>
-              <a:t>Aviso:</a:t>
-            </a:r>
-            <a:r>
-              <a:rPr sz="2000" b="0" i="0">
-                <a:solidFill>
-                  <a:srgbClr val="333333"/>
-                </a:solidFill>
-                <a:latin typeface="Calibri"/>
-              </a:rPr>
-              <a:t> La sesión 11 </a:t>
-            </a:r>
-            <a:r>
-              <a:rPr sz="2000" b="1" i="0">
-                <a:solidFill>
-                  <a:srgbClr val="333333"/>
-                </a:solidFill>
-                <a:latin typeface="Calibri"/>
-              </a:rPr>
-              <a:t>cierra el corte 2</a:t>
-            </a:r>
-            <a:r>
-              <a:rPr sz="2000" b="0" i="0">
-                <a:solidFill>
-                  <a:srgbClr val="333333"/>
-                </a:solidFill>
-                <a:latin typeface="Calibri"/>
-              </a:rPr>
-              <a:t>: hay 20 minutos de evaluación al final, sobre las sesiones 7 a 11. Traigan el prototipo terminado y navegable — sin él no hay nada que corregir con IA, y ese es el entregable de la sesión. La evaluación es </a:t>
-            </a:r>
-            <a:r>
-              <a:rPr sz="2000" b="1" i="0">
-                <a:solidFill>
-                  <a:srgbClr val="333333"/>
-                </a:solidFill>
-                <a:latin typeface="Calibri"/>
-              </a:rPr>
-              <a:t>a libro abierto sobre los documentos de su equipo</a:t>
-            </a:r>
-            <a:r>
-              <a:rPr sz="2000" b="0" i="0">
-                <a:solidFill>
-                  <a:srgbClr val="333333"/>
-                </a:solidFill>
-                <a:latin typeface="Calibri"/>
-              </a:rPr>
-              <a:t>: lean el documento «Evaluación del Corte 2 — cómo prepararse», que dice exactamente qué pestañas tener abiertas.</a:t>
-            </a:r>
-          </a:p>
-          <a:p>
-            <a:pPr>
-              <a:spcAft>
-                <a:spcPts val="800"/>
-              </a:spcAft>
-            </a:pPr>
-            <a:r>
-              <a:rPr sz="2000" b="0" i="0">
-                <a:solidFill>
-                  <a:srgbClr val="333333"/>
-                </a:solidFill>
-                <a:latin typeface="Calibri"/>
-              </a:rPr>
-              <a:t>–   </a:t>
-            </a:r>
-            <a:r>
-              <a:rPr sz="2000" b="1" i="0">
-                <a:solidFill>
-                  <a:srgbClr val="333333"/>
-                </a:solidFill>
-                <a:latin typeface="Calibri"/>
-              </a:rPr>
-              <a:t>Antes de salir:</a:t>
-            </a:r>
-            <a:r>
-              <a:rPr sz="2000" b="0" i="0">
-                <a:solidFill>
-                  <a:srgbClr val="333333"/>
-                </a:solidFill>
-                <a:latin typeface="Calibri"/>
-              </a:rPr>
-              <a:t> el enlace del documento del equipo en el chat, con permiso de lectura para el docente, y el nombre del vocero de hoy.</a:t>
-            </a:r>
-          </a:p>
-        </p:txBody>
-      </p:sp>
-      <p:sp>
-        <p:nvSpPr>
-          <p:cNvPr id="6" name="TextBox 5"/>
-          <p:cNvSpPr txBox="1"/>
-          <p:nvPr/>
-        </p:nvSpPr>
-        <p:spPr>
-          <a:xfrm>
-            <a:off x="11185855" y="6473952"/>
-            <a:ext cx="640080" cy="274320"/>
-          </a:xfrm>
-          <a:prstGeom prst="rect">
-            <a:avLst/>
-          </a:prstGeom>
-          <a:noFill/>
-        </p:spPr>
-        <p:txBody>
-          <a:bodyPr wrap="square">
-            <a:spAutoFit/>
-          </a:bodyPr>
-          <a:lstStyle/>
-          <a:p>
-            <a:pPr algn="r"/>
-            <a:r>
-              <a:rPr sz="1100" b="0" i="0">
-                <a:solidFill>
-                  <a:srgbClr val="666666"/>
-                </a:solidFill>
-                <a:latin typeface="Calibri"/>
-              </a:rPr>
-              <a:t>14</a:t>
-            </a:r>
-          </a:p>
-        </p:txBody>
-      </p:sp>
-    </p:spTree>
-  </p:cSld>
-  <p:clrMapOvr>
-    <a:masterClrMapping/>
-  </p:clrMapOvr>
-</p:sld>
-</file>
-
-<file path=ppt/slides/slide15.xml><?xml version="1.0" encoding="utf-8"?>
-<p:sld xmlns:a="http://schemas.openxmlformats.org/drawingml/2006/main" xmlns:p="http://schemas.openxmlformats.org/presentationml/2006/main" xmlns:r="http://schemas.openxmlformats.org/officeDocument/2006/relationships">
-  <p:cSld>
-    <p:bg>
-      <p:bgPr>
-        <a:solidFill>
-          <a:srgbClr val="FFFFFF"/>
-        </a:solidFill>
-        <a:effectLst/>
-      </p:bgPr>
-    </p:bg>
-    <p:spTree>
-      <p:nvGrpSpPr>
-        <p:cNvPr id="1" name=""/>
-        <p:cNvGrpSpPr/>
-        <p:nvPr/>
-      </p:nvGrpSpPr>
-      <p:grpSpPr/>
-      <p:sp>
-        <p:nvSpPr>
-          <p:cNvPr id="2" name="Rectangle 1"/>
-          <p:cNvSpPr/>
-          <p:nvPr/>
-        </p:nvSpPr>
-        <p:spPr>
-          <a:xfrm>
-            <a:off x="0" y="0"/>
             <a:ext cx="12191695" cy="164592"/>
           </a:xfrm>
           <a:prstGeom prst="rect">
@@ -9407,7 +6668,7 @@
                 </a:solidFill>
                 <a:latin typeface="Calibri"/>
               </a:rPr>
-              <a:t>Taller — las tres pantallas del flujo principal, en Excalidraw o draw.io</a:t>
+              <a:t>Práctica en equipos (opcional · la guía está en la carpeta de la clase)</a:t>
             </a:r>
           </a:p>
         </p:txBody>
@@ -9522,7 +6783,7 @@
                 </a:solidFill>
                 <a:latin typeface="Calibri"/>
               </a:rPr>
-              <a:t>5 equipos × 3 min — el flujo dibujado y el estado de error</a:t>
+              <a:t>Socialización de la práctica, si se hizo</a:t>
             </a:r>
           </a:p>
         </p:txBody>

--- a/Introduccion a la Ingenieria/Clases/Clase 10 - Herramientas digitales aplicadas a la Ingenieria/Presentacion.pptx
+++ b/Introduccion a la Ingenieria/Clases/Clase 10 - Herramientas digitales aplicadas a la Ingenieria/Presentacion.pptx
@@ -5693,7 +5693,7 @@
                 </a:solidFill>
                 <a:latin typeface="Calibri"/>
               </a:rPr>
-              <a:t>No pulan el prototipo: no es lo que se califica.</a:t>
+              <a:t>No pulan el prototipo:</a:t>
             </a:r>
             <a:r>
               <a:rPr sz="1400" b="0" i="0">
@@ -5702,7 +5702,7 @@
                 </a:solidFill>
                 <a:latin typeface="Calibri"/>
               </a:rPr>
-              <a:t> Se califica que el flujo se entienda, que los textos sean reales y que existan el estado vacío y el de error. Un equipo que gasta el taller eligiendo colores llega a la Clase 12 sin nada que probar.</a:t>
+              <a:t> lo que importa es que el flujo se entienda, que los textos sean reales y que existan el estado vacío y el de error. Un equipo que gasta la sesión eligiendo colores llega a la Clase 12 sin nada que probar.</a:t>
             </a:r>
           </a:p>
         </p:txBody>

--- a/Introduccion a la Ingenieria/Clases/Clase 10 - Herramientas digitales aplicadas a la Ingenieria/Presentacion.pptx
+++ b/Introduccion a la Ingenieria/Clases/Clase 10 - Herramientas digitales aplicadas a la Ingenieria/Presentacion.pptx
@@ -7139,14 +7139,118 @@
       </p:sp>
       <p:sp>
         <p:nvSpPr>
-          <p:cNvPr id="5" name="TextBox 4"/>
+          <p:cNvPr id="5" name="Rounded Rectangle 4"/>
+          <p:cNvSpPr/>
+          <p:nvPr/>
+        </p:nvSpPr>
+        <p:spPr>
+          <a:xfrm>
+            <a:off x="5797149" y="1573813"/>
+            <a:ext cx="6010497" cy="4057845"/>
+          </a:xfrm>
+          <a:prstGeom prst="roundRect">
+            <a:avLst>
+              <a:gd name="adj" fmla="val 4000"/>
+            </a:avLst>
+          </a:prstGeom>
+          <a:solidFill>
+            <a:srgbClr val="E8EEF4"/>
+          </a:solidFill>
+          <a:ln>
+            <a:noFill/>
+          </a:ln>
+        </p:spPr>
+        <p:style>
+          <a:lnRef idx="1">
+            <a:schemeClr val="accent1"/>
+          </a:lnRef>
+          <a:fillRef idx="3">
+            <a:schemeClr val="accent1"/>
+          </a:fillRef>
+          <a:effectRef idx="2">
+            <a:schemeClr val="accent1"/>
+          </a:effectRef>
+          <a:fontRef idx="minor">
+            <a:schemeClr val="lt1"/>
+          </a:fontRef>
+        </p:style>
+        <p:txBody>
+          <a:bodyPr rtlCol="0" anchor="ctr"/>
+          <a:lstStyle/>
+          <a:p>
+            <a:pPr algn="ctr"/>
+          </a:p>
+        </p:txBody>
+      </p:sp>
+      <p:pic>
+        <p:nvPicPr>
+          <p:cNvPr id="6" name="Picture 5" descr="students-learning-laptops-classroom.jpg"/>
+          <p:cNvPicPr>
+            <a:picLocks noChangeAspect="1"/>
+          </p:cNvPicPr>
+          <p:nvPr/>
+        </p:nvPicPr>
+        <p:blipFill>
+          <a:blip r:embed="rId2"/>
+          <a:stretch>
+            <a:fillRect/>
+          </a:stretch>
+        </p:blipFill>
+        <p:spPr>
+          <a:xfrm>
+            <a:off x="5870301" y="1646965"/>
+            <a:ext cx="5864193" cy="3911541"/>
+          </a:xfrm>
+          <a:prstGeom prst="rect">
+            <a:avLst/>
+          </a:prstGeom>
+        </p:spPr>
+      </p:pic>
+      <p:sp>
+        <p:nvSpPr>
+          <p:cNvPr id="7" name="TextBox 6"/>
           <p:cNvSpPr txBox="1"/>
           <p:nvPr/>
         </p:nvSpPr>
         <p:spPr>
           <a:xfrm>
-            <a:off x="457200" y="1170432"/>
-            <a:ext cx="11277295" cy="5230368"/>
+            <a:off x="5870301" y="5961888"/>
+            <a:ext cx="5864193" cy="320040"/>
+          </a:xfrm>
+          <a:prstGeom prst="rect">
+            <a:avLst/>
+          </a:prstGeom>
+          <a:noFill/>
+        </p:spPr>
+        <p:txBody>
+          <a:bodyPr wrap="square">
+            <a:spAutoFit/>
+          </a:bodyPr>
+          <a:lstStyle/>
+          <a:p>
+            <a:pPr algn="ctr"/>
+            <a:r>
+              <a:rPr sz="1100" b="0" i="1">
+                <a:solidFill>
+                  <a:srgbClr val="666666"/>
+                </a:solidFill>
+                <a:latin typeface="Calibri"/>
+              </a:rPr>
+              <a:t>Foto: Mikhail Nilov · Pexels</a:t>
+            </a:r>
+          </a:p>
+        </p:txBody>
+      </p:sp>
+      <p:sp>
+        <p:nvSpPr>
+          <p:cNvPr id="8" name="TextBox 7"/>
+          <p:cNvSpPr txBox="1"/>
+          <p:nvPr/>
+        </p:nvSpPr>
+        <p:spPr>
+          <a:xfrm>
+            <a:off x="457200" y="1353312"/>
+            <a:ext cx="5093061" cy="5047488"/>
           </a:xfrm>
           <a:prstGeom prst="rect">
             <a:avLst/>
@@ -7316,7 +7420,7 @@
       </p:sp>
       <p:sp>
         <p:nvSpPr>
-          <p:cNvPr id="6" name="TextBox 5"/>
+          <p:cNvPr id="9" name="TextBox 8"/>
           <p:cNvSpPr txBox="1"/>
           <p:nvPr/>
         </p:nvSpPr>
@@ -9091,9 +9195,57 @@
           </a:p>
         </p:txBody>
       </p:sp>
-      <p:sp>
-        <p:nvSpPr>
-          <p:cNvPr id="13" name="TextBox 12"/>
+      <p:pic>
+        <p:nvPicPr>
+          <p:cNvPr id="13" name="Picture 12" descr="sello_mal.png"/>
+          <p:cNvPicPr>
+            <a:picLocks noChangeAspect="1"/>
+          </p:cNvPicPr>
+          <p:nvPr/>
+        </p:nvPicPr>
+        <p:blipFill>
+          <a:blip r:embed="rId2"/>
+          <a:stretch>
+            <a:fillRect/>
+          </a:stretch>
+        </p:blipFill>
+        <p:spPr>
+          <a:xfrm>
+            <a:off x="566928" y="1316736"/>
+            <a:ext cx="393192" cy="393192"/>
+          </a:xfrm>
+          <a:prstGeom prst="rect">
+            <a:avLst/>
+          </a:prstGeom>
+        </p:spPr>
+      </p:pic>
+      <p:pic>
+        <p:nvPicPr>
+          <p:cNvPr id="14" name="Picture 13" descr="sello_bien.png"/>
+          <p:cNvPicPr>
+            <a:picLocks noChangeAspect="1"/>
+          </p:cNvPicPr>
+          <p:nvPr/>
+        </p:nvPicPr>
+        <p:blipFill>
+          <a:blip r:embed="rId3"/>
+          <a:stretch>
+            <a:fillRect/>
+          </a:stretch>
+        </p:blipFill>
+        <p:spPr>
+          <a:xfrm>
+            <a:off x="6365595" y="1316736"/>
+            <a:ext cx="393192" cy="393192"/>
+          </a:xfrm>
+          <a:prstGeom prst="rect">
+            <a:avLst/>
+          </a:prstGeom>
+        </p:spPr>
+      </p:pic>
+      <p:sp>
+        <p:nvSpPr>
+          <p:cNvPr id="15" name="TextBox 14"/>
           <p:cNvSpPr txBox="1"/>
           <p:nvPr/>
         </p:nvSpPr>
@@ -11164,16 +11316,16 @@
         </p:nvSpPr>
         <p:spPr>
           <a:xfrm>
-            <a:off x="457200" y="1234440"/>
-            <a:ext cx="11277295" cy="950976"/>
+            <a:off x="5803166" y="1188719"/>
+            <a:ext cx="5998464" cy="4828032"/>
           </a:xfrm>
           <a:prstGeom prst="roundRect">
             <a:avLst>
-              <a:gd name="adj" fmla="val 12000"/>
+              <a:gd name="adj" fmla="val 4000"/>
             </a:avLst>
           </a:prstGeom>
           <a:solidFill>
-            <a:srgbClr val="F2F2F2"/>
+            <a:srgbClr val="E8EEF4"/>
           </a:solidFill>
           <a:ln>
             <a:noFill/>
@@ -11201,579 +11353,134 @@
           </a:p>
         </p:txBody>
       </p:sp>
-      <p:sp>
-        <p:nvSpPr>
-          <p:cNvPr id="6" name="Rounded Rectangle 5"/>
-          <p:cNvSpPr/>
-          <p:nvPr/>
-        </p:nvSpPr>
-        <p:spPr>
-          <a:xfrm>
-            <a:off x="594360" y="1490472"/>
-            <a:ext cx="438912" cy="438912"/>
-          </a:xfrm>
-          <a:prstGeom prst="roundRect">
-            <a:avLst>
-              <a:gd name="adj" fmla="val 12000"/>
-            </a:avLst>
-          </a:prstGeom>
-          <a:solidFill>
-            <a:srgbClr val="095292"/>
-          </a:solidFill>
-          <a:ln>
-            <a:noFill/>
-          </a:ln>
-        </p:spPr>
-        <p:style>
-          <a:lnRef idx="1">
-            <a:schemeClr val="accent1"/>
-          </a:lnRef>
-          <a:fillRef idx="3">
-            <a:schemeClr val="accent1"/>
-          </a:fillRef>
-          <a:effectRef idx="2">
-            <a:schemeClr val="accent1"/>
-          </a:effectRef>
-          <a:fontRef idx="minor">
-            <a:schemeClr val="lt1"/>
-          </a:fontRef>
-        </p:style>
-        <p:txBody>
-          <a:bodyPr rtlCol="0" anchor="ctr"/>
+      <p:pic>
+        <p:nvPicPr>
+          <p:cNvPr id="6" name="Picture 5" descr="pantalla-turno-paso1.png"/>
+          <p:cNvPicPr>
+            <a:picLocks noChangeAspect="1"/>
+          </p:cNvPicPr>
+          <p:nvPr/>
+        </p:nvPicPr>
+        <p:blipFill>
+          <a:blip r:embed="rId2"/>
+          <a:stretch>
+            <a:fillRect/>
+          </a:stretch>
+        </p:blipFill>
+        <p:spPr>
+          <a:xfrm>
+            <a:off x="5876318" y="1261872"/>
+            <a:ext cx="5852160" cy="4681728"/>
+          </a:xfrm>
+          <a:prstGeom prst="rect">
+            <a:avLst/>
+          </a:prstGeom>
+        </p:spPr>
+      </p:pic>
+      <p:pic>
+        <p:nvPicPr>
+          <p:cNvPr id="7" name="Picture 6" descr="pantalla-turno-paso2.png"/>
+          <p:cNvPicPr>
+            <a:picLocks noChangeAspect="1"/>
+          </p:cNvPicPr>
+          <p:nvPr/>
+        </p:nvPicPr>
+        <p:blipFill>
+          <a:blip r:embed="rId3"/>
+          <a:stretch>
+            <a:fillRect/>
+          </a:stretch>
+        </p:blipFill>
+        <p:spPr>
+          <a:xfrm>
+            <a:off x="5876318" y="1261872"/>
+            <a:ext cx="5852160" cy="4681728"/>
+          </a:xfrm>
+          <a:prstGeom prst="rect">
+            <a:avLst/>
+          </a:prstGeom>
+        </p:spPr>
+      </p:pic>
+      <p:pic>
+        <p:nvPicPr>
+          <p:cNvPr id="8" name="Picture 7" descr="pantalla-turno-paso3.png"/>
+          <p:cNvPicPr>
+            <a:picLocks noChangeAspect="1"/>
+          </p:cNvPicPr>
+          <p:nvPr/>
+        </p:nvPicPr>
+        <p:blipFill>
+          <a:blip r:embed="rId4"/>
+          <a:stretch>
+            <a:fillRect/>
+          </a:stretch>
+        </p:blipFill>
+        <p:spPr>
+          <a:xfrm>
+            <a:off x="5876318" y="1261872"/>
+            <a:ext cx="5852160" cy="4681728"/>
+          </a:xfrm>
+          <a:prstGeom prst="rect">
+            <a:avLst/>
+          </a:prstGeom>
+        </p:spPr>
+      </p:pic>
+      <p:pic>
+        <p:nvPicPr>
+          <p:cNvPr id="9" name="Picture 8" descr="pantalla-turno-paso4.png"/>
+          <p:cNvPicPr>
+            <a:picLocks noChangeAspect="1"/>
+          </p:cNvPicPr>
+          <p:nvPr/>
+        </p:nvPicPr>
+        <p:blipFill>
+          <a:blip r:embed="rId5"/>
+          <a:stretch>
+            <a:fillRect/>
+          </a:stretch>
+        </p:blipFill>
+        <p:spPr>
+          <a:xfrm>
+            <a:off x="5876318" y="1261872"/>
+            <a:ext cx="5852160" cy="4681728"/>
+          </a:xfrm>
+          <a:prstGeom prst="rect">
+            <a:avLst/>
+          </a:prstGeom>
+        </p:spPr>
+      </p:pic>
+      <p:sp>
+        <p:nvSpPr>
+          <p:cNvPr id="18" name="TextBox 17"/>
+          <p:cNvSpPr txBox="1"/>
+          <p:nvPr/>
+        </p:nvSpPr>
+        <p:spPr>
+          <a:xfrm>
+            <a:off x="5870301" y="5961888"/>
+            <a:ext cx="5864193" cy="320040"/>
+          </a:xfrm>
+          <a:prstGeom prst="rect">
+            <a:avLst/>
+          </a:prstGeom>
+          <a:noFill/>
+        </p:spPr>
+        <p:txBody>
+          <a:bodyPr wrap="square">
+            <a:spAutoFit/>
+          </a:bodyPr>
           <a:lstStyle/>
           <a:p>
             <a:pPr algn="ctr"/>
-          </a:p>
-        </p:txBody>
-      </p:sp>
-      <p:sp>
-        <p:nvSpPr>
-          <p:cNvPr id="7" name="TextBox 6"/>
-          <p:cNvSpPr txBox="1"/>
-          <p:nvPr/>
-        </p:nvSpPr>
-        <p:spPr>
-          <a:xfrm>
-            <a:off x="594360" y="1490472"/>
-            <a:ext cx="438912" cy="438912"/>
-          </a:xfrm>
-          <a:prstGeom prst="rect">
-            <a:avLst/>
-          </a:prstGeom>
-          <a:noFill/>
-        </p:spPr>
-        <p:txBody>
-          <a:bodyPr wrap="square" anchor="ctr"/>
-          <a:lstStyle/>
-          <a:p>
-            <a:pPr algn="ctr"/>
-            <a:r>
-              <a:rPr sz="1600" b="1" i="0">
-                <a:solidFill>
-                  <a:srgbClr val="FFFFFF"/>
-                </a:solidFill>
-                <a:latin typeface="Calibri"/>
-              </a:rPr>
-              <a:t>1</a:t>
-            </a:r>
-          </a:p>
-        </p:txBody>
-      </p:sp>
-      <p:sp>
-        <p:nvSpPr>
-          <p:cNvPr id="8" name="TextBox 7"/>
-          <p:cNvSpPr txBox="1"/>
-          <p:nvPr/>
-        </p:nvSpPr>
-        <p:spPr>
-          <a:xfrm>
-            <a:off x="1188720" y="1325880"/>
-            <a:ext cx="10271455" cy="786384"/>
-          </a:xfrm>
-          <a:prstGeom prst="rect">
-            <a:avLst/>
-          </a:prstGeom>
-          <a:noFill/>
-        </p:spPr>
-        <p:txBody>
-          <a:bodyPr wrap="square" anchor="ctr"/>
-          <a:lstStyle/>
-          <a:p>
-            <a:r>
-              <a:rPr sz="1500" b="1" i="0">
-                <a:solidFill>
-                  <a:srgbClr val="095292"/>
-                </a:solidFill>
-                <a:latin typeface="Calibri"/>
-              </a:rPr>
-              <a:t>1 · Para qué existe</a:t>
-            </a:r>
-          </a:p>
-          <a:p>
-            <a:pPr>
-              <a:spcBef>
-                <a:spcPts val="200"/>
-              </a:spcBef>
-            </a:pPr>
-            <a:r>
-              <a:rPr sz="1300" b="0" i="0">
-                <a:solidFill>
-                  <a:srgbClr val="333333"/>
-                </a:solidFill>
-                <a:latin typeface="Calibri"/>
-              </a:rPr>
-              <a:t>«Aquí el cliente sabe cuántas personas van antes que él».</a:t>
-            </a:r>
-          </a:p>
-        </p:txBody>
-      </p:sp>
-      <p:sp>
-        <p:nvSpPr>
-          <p:cNvPr id="9" name="Rounded Rectangle 8"/>
-          <p:cNvSpPr/>
-          <p:nvPr/>
-        </p:nvSpPr>
-        <p:spPr>
-          <a:xfrm>
-            <a:off x="457200" y="2276856"/>
-            <a:ext cx="11277295" cy="950976"/>
-          </a:xfrm>
-          <a:prstGeom prst="roundRect">
-            <a:avLst>
-              <a:gd name="adj" fmla="val 12000"/>
-            </a:avLst>
-          </a:prstGeom>
-          <a:solidFill>
-            <a:srgbClr val="E8F4FA"/>
-          </a:solidFill>
-          <a:ln>
-            <a:noFill/>
-          </a:ln>
-        </p:spPr>
-        <p:style>
-          <a:lnRef idx="1">
-            <a:schemeClr val="accent1"/>
-          </a:lnRef>
-          <a:fillRef idx="3">
-            <a:schemeClr val="accent1"/>
-          </a:fillRef>
-          <a:effectRef idx="2">
-            <a:schemeClr val="accent1"/>
-          </a:effectRef>
-          <a:fontRef idx="minor">
-            <a:schemeClr val="lt1"/>
-          </a:fontRef>
-        </p:style>
-        <p:txBody>
-          <a:bodyPr rtlCol="0" anchor="ctr"/>
-          <a:lstStyle/>
-          <a:p>
-            <a:pPr algn="ctr"/>
-          </a:p>
-        </p:txBody>
-      </p:sp>
-      <p:sp>
-        <p:nvSpPr>
-          <p:cNvPr id="10" name="Rounded Rectangle 9"/>
-          <p:cNvSpPr/>
-          <p:nvPr/>
-        </p:nvSpPr>
-        <p:spPr>
-          <a:xfrm>
-            <a:off x="594360" y="2532888"/>
-            <a:ext cx="438912" cy="438912"/>
-          </a:xfrm>
-          <a:prstGeom prst="roundRect">
-            <a:avLst>
-              <a:gd name="adj" fmla="val 12000"/>
-            </a:avLst>
-          </a:prstGeom>
-          <a:solidFill>
-            <a:srgbClr val="095292"/>
-          </a:solidFill>
-          <a:ln>
-            <a:noFill/>
-          </a:ln>
-        </p:spPr>
-        <p:style>
-          <a:lnRef idx="1">
-            <a:schemeClr val="accent1"/>
-          </a:lnRef>
-          <a:fillRef idx="3">
-            <a:schemeClr val="accent1"/>
-          </a:fillRef>
-          <a:effectRef idx="2">
-            <a:schemeClr val="accent1"/>
-          </a:effectRef>
-          <a:fontRef idx="minor">
-            <a:schemeClr val="lt1"/>
-          </a:fontRef>
-        </p:style>
-        <p:txBody>
-          <a:bodyPr rtlCol="0" anchor="ctr"/>
-          <a:lstStyle/>
-          <a:p>
-            <a:pPr algn="ctr"/>
-          </a:p>
-        </p:txBody>
-      </p:sp>
-      <p:sp>
-        <p:nvSpPr>
-          <p:cNvPr id="11" name="TextBox 10"/>
-          <p:cNvSpPr txBox="1"/>
-          <p:nvPr/>
-        </p:nvSpPr>
-        <p:spPr>
-          <a:xfrm>
-            <a:off x="594360" y="2532888"/>
-            <a:ext cx="438912" cy="438912"/>
-          </a:xfrm>
-          <a:prstGeom prst="rect">
-            <a:avLst/>
-          </a:prstGeom>
-          <a:noFill/>
-        </p:spPr>
-        <p:txBody>
-          <a:bodyPr wrap="square" anchor="ctr"/>
-          <a:lstStyle/>
-          <a:p>
-            <a:pPr algn="ctr"/>
-            <a:r>
-              <a:rPr sz="1600" b="1" i="0">
-                <a:solidFill>
-                  <a:srgbClr val="FFFFFF"/>
-                </a:solidFill>
-                <a:latin typeface="Calibri"/>
-              </a:rPr>
-              <a:t>2</a:t>
-            </a:r>
-          </a:p>
-        </p:txBody>
-      </p:sp>
-      <p:sp>
-        <p:nvSpPr>
-          <p:cNvPr id="12" name="TextBox 11"/>
-          <p:cNvSpPr txBox="1"/>
-          <p:nvPr/>
-        </p:nvSpPr>
-        <p:spPr>
-          <a:xfrm>
-            <a:off x="1188720" y="2368296"/>
-            <a:ext cx="10271455" cy="786384"/>
-          </a:xfrm>
-          <a:prstGeom prst="rect">
-            <a:avLst/>
-          </a:prstGeom>
-          <a:noFill/>
-        </p:spPr>
-        <p:txBody>
-          <a:bodyPr wrap="square" anchor="ctr"/>
-          <a:lstStyle/>
-          <a:p>
-            <a:r>
-              <a:rPr sz="1500" b="1" i="0">
-                <a:solidFill>
-                  <a:srgbClr val="095292"/>
-                </a:solidFill>
-                <a:latin typeface="Calibri"/>
-              </a:rPr>
-              <a:t>2 · Camino principal</a:t>
-            </a:r>
-          </a:p>
-          <a:p>
-            <a:pPr>
-              <a:spcBef>
-                <a:spcPts val="200"/>
-              </a:spcBef>
-            </a:pPr>
-            <a:r>
-              <a:rPr sz="1300" b="0" i="0">
-                <a:solidFill>
-                  <a:srgbClr val="333333"/>
-                </a:solidFill>
-                <a:latin typeface="Calibri"/>
-              </a:rPr>
-              <a:t>Un número grande al centro: </a:t>
-            </a:r>
-            <a:r>
-              <a:rPr sz="1300" b="1" i="0">
-                <a:solidFill>
-                  <a:srgbClr val="333333"/>
-                </a:solidFill>
-                <a:latin typeface="Calibri"/>
-              </a:rPr>
-              <a:t>«Van 4 antes que usted»</a:t>
-            </a:r>
-            <a:r>
-              <a:rPr sz="1300" b="0" i="0">
-                <a:solidFill>
-                  <a:srgbClr val="333333"/>
-                </a:solidFill>
-                <a:latin typeface="Calibri"/>
-              </a:rPr>
-              <a:t>.</a:t>
-            </a:r>
-          </a:p>
-        </p:txBody>
-      </p:sp>
-      <p:sp>
-        <p:nvSpPr>
-          <p:cNvPr id="13" name="Rounded Rectangle 12"/>
-          <p:cNvSpPr/>
-          <p:nvPr/>
-        </p:nvSpPr>
-        <p:spPr>
-          <a:xfrm>
-            <a:off x="457200" y="3319272"/>
-            <a:ext cx="11277295" cy="950976"/>
-          </a:xfrm>
-          <a:prstGeom prst="roundRect">
-            <a:avLst>
-              <a:gd name="adj" fmla="val 12000"/>
-            </a:avLst>
-          </a:prstGeom>
-          <a:solidFill>
-            <a:srgbClr val="F2F2F2"/>
-          </a:solidFill>
-          <a:ln>
-            <a:noFill/>
-          </a:ln>
-        </p:spPr>
-        <p:style>
-          <a:lnRef idx="1">
-            <a:schemeClr val="accent1"/>
-          </a:lnRef>
-          <a:fillRef idx="3">
-            <a:schemeClr val="accent1"/>
-          </a:fillRef>
-          <a:effectRef idx="2">
-            <a:schemeClr val="accent1"/>
-          </a:effectRef>
-          <a:fontRef idx="minor">
-            <a:schemeClr val="lt1"/>
-          </a:fontRef>
-        </p:style>
-        <p:txBody>
-          <a:bodyPr rtlCol="0" anchor="ctr"/>
-          <a:lstStyle/>
-          <a:p>
-            <a:pPr algn="ctr"/>
-          </a:p>
-        </p:txBody>
-      </p:sp>
-      <p:sp>
-        <p:nvSpPr>
-          <p:cNvPr id="14" name="Rounded Rectangle 13"/>
-          <p:cNvSpPr/>
-          <p:nvPr/>
-        </p:nvSpPr>
-        <p:spPr>
-          <a:xfrm>
-            <a:off x="594360" y="3575304"/>
-            <a:ext cx="438912" cy="438912"/>
-          </a:xfrm>
-          <a:prstGeom prst="roundRect">
-            <a:avLst>
-              <a:gd name="adj" fmla="val 12000"/>
-            </a:avLst>
-          </a:prstGeom>
-          <a:solidFill>
-            <a:srgbClr val="095292"/>
-          </a:solidFill>
-          <a:ln>
-            <a:noFill/>
-          </a:ln>
-        </p:spPr>
-        <p:style>
-          <a:lnRef idx="1">
-            <a:schemeClr val="accent1"/>
-          </a:lnRef>
-          <a:fillRef idx="3">
-            <a:schemeClr val="accent1"/>
-          </a:fillRef>
-          <a:effectRef idx="2">
-            <a:schemeClr val="accent1"/>
-          </a:effectRef>
-          <a:fontRef idx="minor">
-            <a:schemeClr val="lt1"/>
-          </a:fontRef>
-        </p:style>
-        <p:txBody>
-          <a:bodyPr rtlCol="0" anchor="ctr"/>
-          <a:lstStyle/>
-          <a:p>
-            <a:pPr algn="ctr"/>
-          </a:p>
-        </p:txBody>
-      </p:sp>
-      <p:sp>
-        <p:nvSpPr>
-          <p:cNvPr id="15" name="TextBox 14"/>
-          <p:cNvSpPr txBox="1"/>
-          <p:nvPr/>
-        </p:nvSpPr>
-        <p:spPr>
-          <a:xfrm>
-            <a:off x="594360" y="3575304"/>
-            <a:ext cx="438912" cy="438912"/>
-          </a:xfrm>
-          <a:prstGeom prst="rect">
-            <a:avLst/>
-          </a:prstGeom>
-          <a:noFill/>
-        </p:spPr>
-        <p:txBody>
-          <a:bodyPr wrap="square" anchor="ctr"/>
-          <a:lstStyle/>
-          <a:p>
-            <a:pPr algn="ctr"/>
-            <a:r>
-              <a:rPr sz="1600" b="1" i="0">
-                <a:solidFill>
-                  <a:srgbClr val="FFFFFF"/>
-                </a:solidFill>
-                <a:latin typeface="Calibri"/>
-              </a:rPr>
-              <a:t>3</a:t>
-            </a:r>
-          </a:p>
-        </p:txBody>
-      </p:sp>
-      <p:sp>
-        <p:nvSpPr>
-          <p:cNvPr id="16" name="TextBox 15"/>
-          <p:cNvSpPr txBox="1"/>
-          <p:nvPr/>
-        </p:nvSpPr>
-        <p:spPr>
-          <a:xfrm>
-            <a:off x="1188720" y="3410712"/>
-            <a:ext cx="10271455" cy="786384"/>
-          </a:xfrm>
-          <a:prstGeom prst="rect">
-            <a:avLst/>
-          </a:prstGeom>
-          <a:noFill/>
-        </p:spPr>
-        <p:txBody>
-          <a:bodyPr wrap="square" anchor="ctr"/>
-          <a:lstStyle/>
-          <a:p>
-            <a:r>
-              <a:rPr sz="1500" b="1" i="0">
-                <a:solidFill>
-                  <a:srgbClr val="095292"/>
-                </a:solidFill>
-                <a:latin typeface="Calibri"/>
-              </a:rPr>
-              <a:t>3 · Textos reales</a:t>
-            </a:r>
-          </a:p>
-          <a:p>
-            <a:pPr>
-              <a:spcBef>
-                <a:spcPts val="200"/>
-              </a:spcBef>
-            </a:pPr>
-            <a:r>
-              <a:rPr sz="1300" b="0" i="0">
-                <a:solidFill>
-                  <a:srgbClr val="333333"/>
-                </a:solidFill>
-                <a:latin typeface="Calibri"/>
-              </a:rPr>
-              <a:t>«Su turno: 27» y no «texto aquí».</a:t>
-            </a:r>
-          </a:p>
-        </p:txBody>
-      </p:sp>
-      <p:sp>
-        <p:nvSpPr>
-          <p:cNvPr id="17" name="Rounded Rectangle 16"/>
-          <p:cNvSpPr/>
-          <p:nvPr/>
-        </p:nvSpPr>
-        <p:spPr>
-          <a:xfrm>
-            <a:off x="457200" y="4361688"/>
-            <a:ext cx="11277295" cy="950976"/>
-          </a:xfrm>
-          <a:prstGeom prst="roundRect">
-            <a:avLst>
-              <a:gd name="adj" fmla="val 12000"/>
-            </a:avLst>
-          </a:prstGeom>
-          <a:solidFill>
-            <a:srgbClr val="E8F4FA"/>
-          </a:solidFill>
-          <a:ln>
-            <a:noFill/>
-          </a:ln>
-        </p:spPr>
-        <p:style>
-          <a:lnRef idx="1">
-            <a:schemeClr val="accent1"/>
-          </a:lnRef>
-          <a:fillRef idx="3">
-            <a:schemeClr val="accent1"/>
-          </a:fillRef>
-          <a:effectRef idx="2">
-            <a:schemeClr val="accent1"/>
-          </a:effectRef>
-          <a:fontRef idx="minor">
-            <a:schemeClr val="lt1"/>
-          </a:fontRef>
-        </p:style>
-        <p:txBody>
-          <a:bodyPr rtlCol="0" anchor="ctr"/>
-          <a:lstStyle/>
-          <a:p>
-            <a:pPr algn="ctr"/>
-          </a:p>
-        </p:txBody>
-      </p:sp>
-      <p:sp>
-        <p:nvSpPr>
-          <p:cNvPr id="18" name="Rounded Rectangle 17"/>
-          <p:cNvSpPr/>
-          <p:nvPr/>
-        </p:nvSpPr>
-        <p:spPr>
-          <a:xfrm>
-            <a:off x="594360" y="4617720"/>
-            <a:ext cx="438912" cy="438912"/>
-          </a:xfrm>
-          <a:prstGeom prst="roundRect">
-            <a:avLst>
-              <a:gd name="adj" fmla="val 12000"/>
-            </a:avLst>
-          </a:prstGeom>
-          <a:solidFill>
-            <a:srgbClr val="095292"/>
-          </a:solidFill>
-          <a:ln>
-            <a:noFill/>
-          </a:ln>
-        </p:spPr>
-        <p:style>
-          <a:lnRef idx="1">
-            <a:schemeClr val="accent1"/>
-          </a:lnRef>
-          <a:fillRef idx="3">
-            <a:schemeClr val="accent1"/>
-          </a:fillRef>
-          <a:effectRef idx="2">
-            <a:schemeClr val="accent1"/>
-          </a:effectRef>
-          <a:fontRef idx="minor">
-            <a:schemeClr val="lt1"/>
-          </a:fontRef>
-        </p:style>
-        <p:txBody>
-          <a:bodyPr rtlCol="0" anchor="ctr"/>
-          <a:lstStyle/>
-          <a:p>
-            <a:pPr algn="ctr"/>
+            <a:r>
+              <a:rPr sz="1100" b="0" i="1">
+                <a:solidFill>
+                  <a:srgbClr val="666666"/>
+                </a:solidFill>
+                <a:latin typeface="Calibri"/>
+              </a:rPr>
+              <a:t>Clic para avanzar la animación</a:t>
+            </a:r>
           </a:p>
         </p:txBody>
       </p:sp>
@@ -11785,8 +11492,8 @@
         </p:nvSpPr>
         <p:spPr>
           <a:xfrm>
-            <a:off x="594360" y="4617720"/>
-            <a:ext cx="438912" cy="438912"/>
+            <a:off x="457200" y="1353312"/>
+            <a:ext cx="5093061" cy="5047488"/>
           </a:xfrm>
           <a:prstGeom prst="rect">
             <a:avLst/>
@@ -11794,18 +11501,162 @@
           <a:noFill/>
         </p:spPr>
         <p:txBody>
-          <a:bodyPr wrap="square" anchor="ctr"/>
-          <a:lstStyle/>
-          <a:p>
-            <a:pPr algn="ctr"/>
-            <a:r>
-              <a:rPr sz="1600" b="1" i="0">
-                <a:solidFill>
-                  <a:srgbClr val="FFFFFF"/>
-                </a:solidFill>
-                <a:latin typeface="Calibri"/>
-              </a:rPr>
-              <a:t>4</a:t>
+          <a:bodyPr wrap="square">
+            <a:spAutoFit/>
+          </a:bodyPr>
+          <a:lstStyle/>
+          <a:p>
+            <a:pPr>
+              <a:spcAft>
+                <a:spcPts val="800"/>
+              </a:spcAft>
+            </a:pPr>
+            <a:r>
+              <a:rPr sz="2000" b="0" i="0">
+                <a:solidFill>
+                  <a:srgbClr val="333333"/>
+                </a:solidFill>
+                <a:latin typeface="Calibri"/>
+              </a:rPr>
+              <a:t>–   </a:t>
+            </a:r>
+            <a:r>
+              <a:rPr sz="2000" b="1" i="0">
+                <a:solidFill>
+                  <a:srgbClr val="333333"/>
+                </a:solidFill>
+                <a:latin typeface="Calibri"/>
+              </a:rPr>
+              <a:t>1 · Para qué existe:</a:t>
+            </a:r>
+            <a:r>
+              <a:rPr sz="2000" b="0" i="0">
+                <a:solidFill>
+                  <a:srgbClr val="333333"/>
+                </a:solidFill>
+                <a:latin typeface="Calibri"/>
+              </a:rPr>
+              <a:t> «Aquí el cliente sabe cuántas personas van antes que él».</a:t>
+            </a:r>
+          </a:p>
+          <a:p>
+            <a:pPr>
+              <a:spcAft>
+                <a:spcPts val="800"/>
+              </a:spcAft>
+            </a:pPr>
+            <a:r>
+              <a:rPr sz="2000" b="0" i="0">
+                <a:solidFill>
+                  <a:srgbClr val="333333"/>
+                </a:solidFill>
+                <a:latin typeface="Calibri"/>
+              </a:rPr>
+              <a:t>–   </a:t>
+            </a:r>
+            <a:r>
+              <a:rPr sz="2000" b="1" i="0">
+                <a:solidFill>
+                  <a:srgbClr val="333333"/>
+                </a:solidFill>
+                <a:latin typeface="Calibri"/>
+              </a:rPr>
+              <a:t>2 · Camino principal:</a:t>
+            </a:r>
+            <a:r>
+              <a:rPr sz="2000" b="0" i="0">
+                <a:solidFill>
+                  <a:srgbClr val="333333"/>
+                </a:solidFill>
+                <a:latin typeface="Calibri"/>
+              </a:rPr>
+              <a:t> Un número grande al centro: </a:t>
+            </a:r>
+            <a:r>
+              <a:rPr sz="2000" b="1" i="0">
+                <a:solidFill>
+                  <a:srgbClr val="333333"/>
+                </a:solidFill>
+                <a:latin typeface="Calibri"/>
+              </a:rPr>
+              <a:t>«Van 4 antes que usted»</a:t>
+            </a:r>
+            <a:r>
+              <a:rPr sz="2000" b="0" i="0">
+                <a:solidFill>
+                  <a:srgbClr val="333333"/>
+                </a:solidFill>
+                <a:latin typeface="Calibri"/>
+              </a:rPr>
+              <a:t>.</a:t>
+            </a:r>
+          </a:p>
+          <a:p>
+            <a:pPr>
+              <a:spcAft>
+                <a:spcPts val="800"/>
+              </a:spcAft>
+            </a:pPr>
+            <a:r>
+              <a:rPr sz="2000" b="0" i="0">
+                <a:solidFill>
+                  <a:srgbClr val="333333"/>
+                </a:solidFill>
+                <a:latin typeface="Calibri"/>
+              </a:rPr>
+              <a:t>–   </a:t>
+            </a:r>
+            <a:r>
+              <a:rPr sz="2000" b="1" i="0">
+                <a:solidFill>
+                  <a:srgbClr val="333333"/>
+                </a:solidFill>
+                <a:latin typeface="Calibri"/>
+              </a:rPr>
+              <a:t>3 · Textos reales:</a:t>
+            </a:r>
+            <a:r>
+              <a:rPr sz="2000" b="0" i="0">
+                <a:solidFill>
+                  <a:srgbClr val="333333"/>
+                </a:solidFill>
+                <a:latin typeface="Calibri"/>
+              </a:rPr>
+              <a:t> «Su turno: 27» y no «texto aquí».</a:t>
+            </a:r>
+          </a:p>
+          <a:p>
+            <a:pPr>
+              <a:spcAft>
+                <a:spcPts val="800"/>
+              </a:spcAft>
+            </a:pPr>
+            <a:r>
+              <a:rPr sz="2000" b="0" i="0">
+                <a:solidFill>
+                  <a:srgbClr val="333333"/>
+                </a:solidFill>
+                <a:latin typeface="Calibri"/>
+              </a:rPr>
+              <a:t>–   </a:t>
+            </a:r>
+            <a:r>
+              <a:rPr sz="2000" b="1" i="0">
+                <a:solidFill>
+                  <a:srgbClr val="333333"/>
+                </a:solidFill>
+                <a:latin typeface="Calibri"/>
+              </a:rPr>
+              <a:t>4 · Vacío y error:</a:t>
+            </a:r>
+            <a:r>
+              <a:rPr sz="2000" b="0" i="0">
+                <a:solidFill>
+                  <a:srgbClr val="333333"/>
+                </a:solidFill>
+                <a:latin typeface="Calibri"/>
+              </a:rPr>
+              <a:t> «Aún no tiene turno → Pedir turno» · «Sin conexión: intente de nuevo».</a:t>
             </a:r>
           </a:p>
         </p:txBody>
@@ -11813,225 +11664,6 @@
       <p:sp>
         <p:nvSpPr>
           <p:cNvPr id="20" name="TextBox 19"/>
-          <p:cNvSpPr txBox="1"/>
-          <p:nvPr/>
-        </p:nvSpPr>
-        <p:spPr>
-          <a:xfrm>
-            <a:off x="1188720" y="4453128"/>
-            <a:ext cx="10271455" cy="786384"/>
-          </a:xfrm>
-          <a:prstGeom prst="rect">
-            <a:avLst/>
-          </a:prstGeom>
-          <a:noFill/>
-        </p:spPr>
-        <p:txBody>
-          <a:bodyPr wrap="square" anchor="ctr"/>
-          <a:lstStyle/>
-          <a:p>
-            <a:r>
-              <a:rPr sz="1500" b="1" i="0">
-                <a:solidFill>
-                  <a:srgbClr val="095292"/>
-                </a:solidFill>
-                <a:latin typeface="Calibri"/>
-              </a:rPr>
-              <a:t>4 · Vacío y error</a:t>
-            </a:r>
-          </a:p>
-          <a:p>
-            <a:pPr>
-              <a:spcBef>
-                <a:spcPts val="200"/>
-              </a:spcBef>
-            </a:pPr>
-            <a:r>
-              <a:rPr sz="1300" b="0" i="0">
-                <a:solidFill>
-                  <a:srgbClr val="333333"/>
-                </a:solidFill>
-                <a:latin typeface="Calibri"/>
-              </a:rPr>
-              <a:t>«Aún no tiene turno → Pedir turno» · «Sin conexión: intente de nuevo».</a:t>
-            </a:r>
-          </a:p>
-        </p:txBody>
-      </p:sp>
-      <p:sp>
-        <p:nvSpPr>
-          <p:cNvPr id="21" name="Rounded Rectangle 20"/>
-          <p:cNvSpPr/>
-          <p:nvPr/>
-        </p:nvSpPr>
-        <p:spPr>
-          <a:xfrm>
-            <a:off x="457200" y="5404104"/>
-            <a:ext cx="11277295" cy="950976"/>
-          </a:xfrm>
-          <a:prstGeom prst="roundRect">
-            <a:avLst>
-              <a:gd name="adj" fmla="val 12000"/>
-            </a:avLst>
-          </a:prstGeom>
-          <a:solidFill>
-            <a:srgbClr val="F2F2F2"/>
-          </a:solidFill>
-          <a:ln>
-            <a:noFill/>
-          </a:ln>
-        </p:spPr>
-        <p:style>
-          <a:lnRef idx="1">
-            <a:schemeClr val="accent1"/>
-          </a:lnRef>
-          <a:fillRef idx="3">
-            <a:schemeClr val="accent1"/>
-          </a:fillRef>
-          <a:effectRef idx="2">
-            <a:schemeClr val="accent1"/>
-          </a:effectRef>
-          <a:fontRef idx="minor">
-            <a:schemeClr val="lt1"/>
-          </a:fontRef>
-        </p:style>
-        <p:txBody>
-          <a:bodyPr rtlCol="0" anchor="ctr"/>
-          <a:lstStyle/>
-          <a:p>
-            <a:pPr algn="ctr"/>
-          </a:p>
-        </p:txBody>
-      </p:sp>
-      <p:sp>
-        <p:nvSpPr>
-          <p:cNvPr id="22" name="Rounded Rectangle 21"/>
-          <p:cNvSpPr/>
-          <p:nvPr/>
-        </p:nvSpPr>
-        <p:spPr>
-          <a:xfrm>
-            <a:off x="594360" y="5660136"/>
-            <a:ext cx="438912" cy="438912"/>
-          </a:xfrm>
-          <a:prstGeom prst="roundRect">
-            <a:avLst>
-              <a:gd name="adj" fmla="val 12000"/>
-            </a:avLst>
-          </a:prstGeom>
-          <a:solidFill>
-            <a:srgbClr val="095292"/>
-          </a:solidFill>
-          <a:ln>
-            <a:noFill/>
-          </a:ln>
-        </p:spPr>
-        <p:style>
-          <a:lnRef idx="1">
-            <a:schemeClr val="accent1"/>
-          </a:lnRef>
-          <a:fillRef idx="3">
-            <a:schemeClr val="accent1"/>
-          </a:fillRef>
-          <a:effectRef idx="2">
-            <a:schemeClr val="accent1"/>
-          </a:effectRef>
-          <a:fontRef idx="minor">
-            <a:schemeClr val="lt1"/>
-          </a:fontRef>
-        </p:style>
-        <p:txBody>
-          <a:bodyPr rtlCol="0" anchor="ctr"/>
-          <a:lstStyle/>
-          <a:p>
-            <a:pPr algn="ctr"/>
-          </a:p>
-        </p:txBody>
-      </p:sp>
-      <p:sp>
-        <p:nvSpPr>
-          <p:cNvPr id="23" name="TextBox 22"/>
-          <p:cNvSpPr txBox="1"/>
-          <p:nvPr/>
-        </p:nvSpPr>
-        <p:spPr>
-          <a:xfrm>
-            <a:off x="594360" y="5660136"/>
-            <a:ext cx="438912" cy="438912"/>
-          </a:xfrm>
-          <a:prstGeom prst="rect">
-            <a:avLst/>
-          </a:prstGeom>
-          <a:noFill/>
-        </p:spPr>
-        <p:txBody>
-          <a:bodyPr wrap="square" anchor="ctr"/>
-          <a:lstStyle/>
-          <a:p>
-            <a:pPr algn="ctr"/>
-            <a:r>
-              <a:rPr sz="1600" b="1" i="0">
-                <a:solidFill>
-                  <a:srgbClr val="FFFFFF"/>
-                </a:solidFill>
-                <a:latin typeface="Calibri"/>
-              </a:rPr>
-              <a:t>5</a:t>
-            </a:r>
-          </a:p>
-        </p:txBody>
-      </p:sp>
-      <p:sp>
-        <p:nvSpPr>
-          <p:cNvPr id="24" name="TextBox 23"/>
-          <p:cNvSpPr txBox="1"/>
-          <p:nvPr/>
-        </p:nvSpPr>
-        <p:spPr>
-          <a:xfrm>
-            <a:off x="1188720" y="5495544"/>
-            <a:ext cx="10271455" cy="786384"/>
-          </a:xfrm>
-          <a:prstGeom prst="rect">
-            <a:avLst/>
-          </a:prstGeom>
-          <a:noFill/>
-        </p:spPr>
-        <p:txBody>
-          <a:bodyPr wrap="square" anchor="ctr"/>
-          <a:lstStyle/>
-          <a:p>
-            <a:r>
-              <a:rPr sz="1500" b="1" i="0">
-                <a:solidFill>
-                  <a:srgbClr val="095292"/>
-                </a:solidFill>
-                <a:latin typeface="Calibri"/>
-              </a:rPr>
-              <a:t>5 · Qué pasa al tocar</a:t>
-            </a:r>
-          </a:p>
-          <a:p>
-            <a:pPr>
-              <a:spcBef>
-                <a:spcPts val="200"/>
-              </a:spcBef>
-            </a:pPr>
-            <a:r>
-              <a:rPr sz="1300" b="0" i="0">
-                <a:solidFill>
-                  <a:srgbClr val="333333"/>
-                </a:solidFill>
-                <a:latin typeface="Calibri"/>
-              </a:rPr>
-              <a:t>«Cancelar turno» → pantalla de confirmación.</a:t>
-            </a:r>
-          </a:p>
-        </p:txBody>
-      </p:sp>
-      <p:sp>
-        <p:nvSpPr>
-          <p:cNvPr id="25" name="TextBox 24"/>
           <p:cNvSpPr txBox="1"/>
           <p:nvPr/>
         </p:nvSpPr>
@@ -12069,6 +11701,195 @@
   <p:clrMapOvr>
     <a:masterClrMapping/>
   </p:clrMapOvr>
+  <p:timing>
+    <p:tnLst>
+      <p:par>
+        <p:cTn id="1" dur="indefinite" restart="never" nodeType="tmRoot">
+          <p:childTnLst>
+            <p:seq concurrent="1" nextAc="seek">
+              <p:cTn id="2" dur="indefinite" nodeType="mainSeq">
+                <p:childTnLst>
+                  <p:par>
+                    <p:cTn id="3" fill="hold">
+                      <p:stCondLst>
+                        <p:cond delay="indefinite"/>
+                      </p:stCondLst>
+                      <p:childTnLst>
+                        <p:par>
+                          <p:cTn id="4" fill="hold">
+                            <p:stCondLst>
+                              <p:cond delay="0"/>
+                            </p:stCondLst>
+                            <p:childTnLst>
+                              <p:par>
+                                <p:cTn id="5" presetID="10" presetClass="entr" presetSubtype="0" fill="hold" nodeType="clickEffect">
+                                  <p:stCondLst>
+                                    <p:cond delay="0"/>
+                                  </p:stCondLst>
+                                  <p:childTnLst>
+                                    <p:set>
+                                      <p:cBhvr>
+                                        <p:cTn id="6" dur="1" fill="hold">
+                                          <p:stCondLst>
+                                            <p:cond delay="0"/>
+                                          </p:stCondLst>
+                                        </p:cTn>
+                                        <p:tgtEl>
+                                          <p:spTgt spid="7"/>
+                                        </p:tgtEl>
+                                        <p:attrNameLst>
+                                          <p:attrName>style.visibility</p:attrName>
+                                        </p:attrNameLst>
+                                      </p:cBhvr>
+                                      <p:to>
+                                        <p:strVal val="visible"/>
+                                      </p:to>
+                                    </p:set>
+                                    <p:animEffect transition="in" filter="fade">
+                                      <p:cBhvr>
+                                        <p:cTn id="7" dur="450"/>
+                                        <p:tgtEl>
+                                          <p:spTgt spid="7"/>
+                                        </p:tgtEl>
+                                      </p:cBhvr>
+                                    </p:animEffect>
+                                  </p:childTnLst>
+                                </p:cTn>
+                              </p:par>
+                            </p:childTnLst>
+                          </p:cTn>
+                        </p:par>
+                      </p:childTnLst>
+                    </p:cTn>
+                  </p:par>
+                  <p:par>
+                    <p:cTn id="8" fill="hold">
+                      <p:stCondLst>
+                        <p:cond delay="indefinite"/>
+                      </p:stCondLst>
+                      <p:childTnLst>
+                        <p:par>
+                          <p:cTn id="9" fill="hold">
+                            <p:stCondLst>
+                              <p:cond delay="0"/>
+                            </p:stCondLst>
+                            <p:childTnLst>
+                              <p:par>
+                                <p:cTn id="10" presetID="10" presetClass="entr" presetSubtype="0" fill="hold" nodeType="clickEffect">
+                                  <p:stCondLst>
+                                    <p:cond delay="0"/>
+                                  </p:stCondLst>
+                                  <p:childTnLst>
+                                    <p:set>
+                                      <p:cBhvr>
+                                        <p:cTn id="11" dur="1" fill="hold">
+                                          <p:stCondLst>
+                                            <p:cond delay="0"/>
+                                          </p:stCondLst>
+                                        </p:cTn>
+                                        <p:tgtEl>
+                                          <p:spTgt spid="8"/>
+                                        </p:tgtEl>
+                                        <p:attrNameLst>
+                                          <p:attrName>style.visibility</p:attrName>
+                                        </p:attrNameLst>
+                                      </p:cBhvr>
+                                      <p:to>
+                                        <p:strVal val="visible"/>
+                                      </p:to>
+                                    </p:set>
+                                    <p:animEffect transition="in" filter="fade">
+                                      <p:cBhvr>
+                                        <p:cTn id="12" dur="450"/>
+                                        <p:tgtEl>
+                                          <p:spTgt spid="8"/>
+                                        </p:tgtEl>
+                                      </p:cBhvr>
+                                    </p:animEffect>
+                                  </p:childTnLst>
+                                </p:cTn>
+                              </p:par>
+                            </p:childTnLst>
+                          </p:cTn>
+                        </p:par>
+                      </p:childTnLst>
+                    </p:cTn>
+                  </p:par>
+                  <p:par>
+                    <p:cTn id="13" fill="hold">
+                      <p:stCondLst>
+                        <p:cond delay="indefinite"/>
+                      </p:stCondLst>
+                      <p:childTnLst>
+                        <p:par>
+                          <p:cTn id="14" fill="hold">
+                            <p:stCondLst>
+                              <p:cond delay="0"/>
+                            </p:stCondLst>
+                            <p:childTnLst>
+                              <p:par>
+                                <p:cTn id="15" presetID="10" presetClass="entr" presetSubtype="0" fill="hold" nodeType="clickEffect">
+                                  <p:stCondLst>
+                                    <p:cond delay="0"/>
+                                  </p:stCondLst>
+                                  <p:childTnLst>
+                                    <p:set>
+                                      <p:cBhvr>
+                                        <p:cTn id="16" dur="1" fill="hold">
+                                          <p:stCondLst>
+                                            <p:cond delay="0"/>
+                                          </p:stCondLst>
+                                        </p:cTn>
+                                        <p:tgtEl>
+                                          <p:spTgt spid="9"/>
+                                        </p:tgtEl>
+                                        <p:attrNameLst>
+                                          <p:attrName>style.visibility</p:attrName>
+                                        </p:attrNameLst>
+                                      </p:cBhvr>
+                                      <p:to>
+                                        <p:strVal val="visible"/>
+                                      </p:to>
+                                    </p:set>
+                                    <p:animEffect transition="in" filter="fade">
+                                      <p:cBhvr>
+                                        <p:cTn id="17" dur="450"/>
+                                        <p:tgtEl>
+                                          <p:spTgt spid="9"/>
+                                        </p:tgtEl>
+                                      </p:cBhvr>
+                                    </p:animEffect>
+                                  </p:childTnLst>
+                                </p:cTn>
+                              </p:par>
+                            </p:childTnLst>
+                          </p:cTn>
+                        </p:par>
+                      </p:childTnLst>
+                    </p:cTn>
+                  </p:par>
+                </p:childTnLst>
+              </p:cTn>
+              <p:prevCondLst>
+                <p:cond evt="onPrev" delay="0">
+                  <p:tgtEl>
+                    <p:sldTgt/>
+                  </p:tgtEl>
+                </p:cond>
+              </p:prevCondLst>
+              <p:nextCondLst>
+                <p:cond evt="onNext" delay="0">
+                  <p:tgtEl>
+                    <p:sldTgt/>
+                  </p:tgtEl>
+                </p:cond>
+              </p:nextCondLst>
+            </p:seq>
+          </p:childTnLst>
+        </p:cTn>
+      </p:par>
+    </p:tnLst>
+  </p:timing>
 </p:sld>
 </file>
 

--- a/Introduccion a la Ingenieria/Clases/Clase 10 - Herramientas digitales aplicadas a la Ingenieria/Presentacion.pptx
+++ b/Introduccion a la Ingenieria/Clases/Clase 10 - Herramientas digitales aplicadas a la Ingenieria/Presentacion.pptx
@@ -7139,118 +7139,14 @@
       </p:sp>
       <p:sp>
         <p:nvSpPr>
-          <p:cNvPr id="5" name="Rounded Rectangle 4"/>
-          <p:cNvSpPr/>
-          <p:nvPr/>
-        </p:nvSpPr>
-        <p:spPr>
-          <a:xfrm>
-            <a:off x="5797149" y="1573813"/>
-            <a:ext cx="6010497" cy="4057845"/>
-          </a:xfrm>
-          <a:prstGeom prst="roundRect">
-            <a:avLst>
-              <a:gd name="adj" fmla="val 4000"/>
-            </a:avLst>
-          </a:prstGeom>
-          <a:solidFill>
-            <a:srgbClr val="E8EEF4"/>
-          </a:solidFill>
-          <a:ln>
-            <a:noFill/>
-          </a:ln>
-        </p:spPr>
-        <p:style>
-          <a:lnRef idx="1">
-            <a:schemeClr val="accent1"/>
-          </a:lnRef>
-          <a:fillRef idx="3">
-            <a:schemeClr val="accent1"/>
-          </a:fillRef>
-          <a:effectRef idx="2">
-            <a:schemeClr val="accent1"/>
-          </a:effectRef>
-          <a:fontRef idx="minor">
-            <a:schemeClr val="lt1"/>
-          </a:fontRef>
-        </p:style>
-        <p:txBody>
-          <a:bodyPr rtlCol="0" anchor="ctr"/>
-          <a:lstStyle/>
-          <a:p>
-            <a:pPr algn="ctr"/>
-          </a:p>
-        </p:txBody>
-      </p:sp>
-      <p:pic>
-        <p:nvPicPr>
-          <p:cNvPr id="6" name="Picture 5" descr="students-learning-laptops-classroom.jpg"/>
-          <p:cNvPicPr>
-            <a:picLocks noChangeAspect="1"/>
-          </p:cNvPicPr>
-          <p:nvPr/>
-        </p:nvPicPr>
-        <p:blipFill>
-          <a:blip r:embed="rId2"/>
-          <a:stretch>
-            <a:fillRect/>
-          </a:stretch>
-        </p:blipFill>
-        <p:spPr>
-          <a:xfrm>
-            <a:off x="5870301" y="1646965"/>
-            <a:ext cx="5864193" cy="3911541"/>
-          </a:xfrm>
-          <a:prstGeom prst="rect">
-            <a:avLst/>
-          </a:prstGeom>
-        </p:spPr>
-      </p:pic>
-      <p:sp>
-        <p:nvSpPr>
-          <p:cNvPr id="7" name="TextBox 6"/>
+          <p:cNvPr id="5" name="TextBox 4"/>
           <p:cNvSpPr txBox="1"/>
           <p:nvPr/>
         </p:nvSpPr>
         <p:spPr>
           <a:xfrm>
-            <a:off x="5870301" y="5961888"/>
-            <a:ext cx="5864193" cy="320040"/>
-          </a:xfrm>
-          <a:prstGeom prst="rect">
-            <a:avLst/>
-          </a:prstGeom>
-          <a:noFill/>
-        </p:spPr>
-        <p:txBody>
-          <a:bodyPr wrap="square">
-            <a:spAutoFit/>
-          </a:bodyPr>
-          <a:lstStyle/>
-          <a:p>
-            <a:pPr algn="ctr"/>
-            <a:r>
-              <a:rPr sz="1100" b="0" i="1">
-                <a:solidFill>
-                  <a:srgbClr val="666666"/>
-                </a:solidFill>
-                <a:latin typeface="Calibri"/>
-              </a:rPr>
-              <a:t>Foto: Mikhail Nilov · Pexels</a:t>
-            </a:r>
-          </a:p>
-        </p:txBody>
-      </p:sp>
-      <p:sp>
-        <p:nvSpPr>
-          <p:cNvPr id="8" name="TextBox 7"/>
-          <p:cNvSpPr txBox="1"/>
-          <p:nvPr/>
-        </p:nvSpPr>
-        <p:spPr>
-          <a:xfrm>
-            <a:off x="457200" y="1353312"/>
-            <a:ext cx="5093061" cy="5047488"/>
+            <a:off x="457200" y="1170432"/>
+            <a:ext cx="11277295" cy="5230368"/>
           </a:xfrm>
           <a:prstGeom prst="rect">
             <a:avLst/>
@@ -7420,7 +7316,7 @@
       </p:sp>
       <p:sp>
         <p:nvSpPr>
-          <p:cNvPr id="9" name="TextBox 8"/>
+          <p:cNvPr id="6" name="TextBox 5"/>
           <p:cNvSpPr txBox="1"/>
           <p:nvPr/>
         </p:nvSpPr>

--- a/Introduccion a la Ingenieria/Clases/Clase 10 - Herramientas digitales aplicadas a la Ingenieria/Presentacion.pptx
+++ b/Introduccion a la Ingenieria/Clases/Clase 10 - Herramientas digitales aplicadas a la Ingenieria/Presentacion.pptx
@@ -11345,9 +11345,33 @@
           </a:prstGeom>
         </p:spPr>
       </p:pic>
-      <p:sp>
-        <p:nvSpPr>
-          <p:cNvPr id="18" name="TextBox 17"/>
+      <p:pic>
+        <p:nvPicPr>
+          <p:cNvPr id="10" name="Picture 9" descr="pantalla-turno-paso5.png"/>
+          <p:cNvPicPr>
+            <a:picLocks noChangeAspect="1"/>
+          </p:cNvPicPr>
+          <p:nvPr/>
+        </p:nvPicPr>
+        <p:blipFill>
+          <a:blip r:embed="rId6"/>
+          <a:stretch>
+            <a:fillRect/>
+          </a:stretch>
+        </p:blipFill>
+        <p:spPr>
+          <a:xfrm>
+            <a:off x="5876318" y="1261872"/>
+            <a:ext cx="5852160" cy="4681728"/>
+          </a:xfrm>
+          <a:prstGeom prst="rect">
+            <a:avLst/>
+          </a:prstGeom>
+        </p:spPr>
+      </p:pic>
+      <p:sp>
+        <p:nvSpPr>
+          <p:cNvPr id="23" name="TextBox 22"/>
           <p:cNvSpPr txBox="1"/>
           <p:nvPr/>
         </p:nvSpPr>
@@ -11382,7 +11406,7 @@
       </p:sp>
       <p:sp>
         <p:nvSpPr>
-          <p:cNvPr id="19" name="TextBox 18"/>
+          <p:cNvPr id="24" name="TextBox 23"/>
           <p:cNvSpPr txBox="1"/>
           <p:nvPr/>
         </p:nvSpPr>
@@ -11559,7 +11583,7 @@
       </p:sp>
       <p:sp>
         <p:nvSpPr>
-          <p:cNvPr id="20" name="TextBox 19"/>
+          <p:cNvPr id="25" name="TextBox 24"/>
           <p:cNvSpPr txBox="1"/>
           <p:nvPr/>
         </p:nvSpPr>
@@ -11752,6 +11776,59 @@
                                         <p:cTn id="17" dur="450"/>
                                         <p:tgtEl>
                                           <p:spTgt spid="9"/>
+                                        </p:tgtEl>
+                                      </p:cBhvr>
+                                    </p:animEffect>
+                                  </p:childTnLst>
+                                </p:cTn>
+                              </p:par>
+                            </p:childTnLst>
+                          </p:cTn>
+                        </p:par>
+                      </p:childTnLst>
+                    </p:cTn>
+                  </p:par>
+                  <p:par>
+                    <p:cTn id="18" fill="hold">
+                      <p:stCondLst>
+                        <p:cond delay="indefinite"/>
+                      </p:stCondLst>
+                      <p:childTnLst>
+                        <p:par>
+                          <p:cTn id="19" fill="hold">
+                            <p:stCondLst>
+                              <p:cond delay="0"/>
+                            </p:stCondLst>
+                            <p:childTnLst>
+                              <p:par>
+                                <p:cTn id="20" presetID="10" presetClass="entr" presetSubtype="0" fill="hold" nodeType="clickEffect">
+                                  <p:stCondLst>
+                                    <p:cond delay="0"/>
+                                  </p:stCondLst>
+                                  <p:childTnLst>
+                                    <p:set>
+                                      <p:cBhvr>
+                                        <p:cTn id="21" dur="1" fill="hold">
+                                          <p:stCondLst>
+                                            <p:cond delay="0"/>
+                                          </p:stCondLst>
+                                        </p:cTn>
+                                        <p:tgtEl>
+                                          <p:spTgt spid="10"/>
+                                        </p:tgtEl>
+                                        <p:attrNameLst>
+                                          <p:attrName>style.visibility</p:attrName>
+                                        </p:attrNameLst>
+                                      </p:cBhvr>
+                                      <p:to>
+                                        <p:strVal val="visible"/>
+                                      </p:to>
+                                    </p:set>
+                                    <p:animEffect transition="in" filter="fade">
+                                      <p:cBhvr>
+                                        <p:cTn id="22" dur="450"/>
+                                        <p:tgtEl>
+                                          <p:spTgt spid="10"/>
                                         </p:tgtEl>
                                       </p:cBhvr>
                                     </p:animEffect>

--- a/Introduccion a la Ingenieria/Clases/Clase 10 - Herramientas digitales aplicadas a la Ingenieria/Presentacion.pptx
+++ b/Introduccion a la Ingenieria/Clases/Clase 10 - Herramientas digitales aplicadas a la Ingenieria/Presentacion.pptx
@@ -759,7 +759,7 @@
           <a:p/>
           <a:p>
             <a:r>
-              <a:t>No es la versión 1 a medias, y esta distinción es la que más cuesta en primer semestre. Una versión inacabada intenta ser el producto y falla en el intento; un prototipo no intenta ser el producto, así que puede ser papel, puede no tener datos reales, puede no funcionar, y aun así responder la pregunta con precisión.</a:t>
+              <a:t>No es la versión 1 a medias, y esta distinción es la que más cuesta en primer semestre. Una versión sin terminar intenta ser el producto y falla en el intento; un prototipo no intenta ser el producto, así que puede ser papel, puede no tener datos reales, puede no funcionar, y aun así responder la pregunta con precisión.</a:t>
             </a:r>
           </a:p>
           <a:p/>
@@ -7189,7 +7189,7 @@
                 </a:solidFill>
                 <a:latin typeface="Calibri"/>
               </a:rPr>
-              <a:t> de una versión inacabada, y saber qué pregunta responde cada nivel de </a:t>
+              <a:t> de una versión sin terminar, y saber qué pregunta responde cada nivel de </a:t>
             </a:r>
             <a:r>
               <a:rPr sz="2000" b="1" i="0">
@@ -8114,7 +8114,7 @@
                 </a:solidFill>
                 <a:latin typeface="Calibri"/>
               </a:rPr>
-              <a:t>Una versión inacabada intenta ser el producto y falla. </a:t>
+              <a:t>Una versión sin terminar intenta ser el producto y falla. </a:t>
             </a:r>
             <a:r>
               <a:rPr sz="1300" b="1" i="0">
